--- a/slides/slides.pptx
+++ b/slides/slides.pptx
@@ -110,6 +110,11 @@
       </a:defRPr>
     </a:lvl9pPr>
   </p:defaultTextStyle>
+  <p:extLst>
+    <p:ext uri="{EFAFB233-063F-42B5-8137-9DF3F51BA10A}">
+      <p15:sldGuideLst xmlns:p15="http://schemas.microsoft.com/office/powerpoint/2012/main"/>
+    </p:ext>
+  </p:extLst>
 </p:presentation>
 </file>
 
@@ -491,1295 +496,11 @@
         </p:nvSpPr>
         <p:spPr/>
       </p:sp>
-      <mc:AlternateContent xmlns:mc="http://schemas.openxmlformats.org/markup-compatibility/2006">
-        <mc:Choice xmlns:a14="http://schemas.microsoft.com/office/drawing/2010/main" Requires="a14">
+      <mc:AlternateContent xmlns:mc="http://schemas.openxmlformats.org/markup-compatibility/2006" xmlns:a14="http://schemas.microsoft.com/office/drawing/2010/main">
+        <mc:Choice Requires="a14">
           <p:sp>
             <p:nvSpPr>
               <p:cNvPr id="3" name="Notes Placeholder 2"/>
-              <p:cNvSpPr>
-                <a:spLocks noGrp="1"/>
-              </p:cNvSpPr>
-              <p:nvPr>
-                <p:ph type="body" idx="1"/>
-              </p:nvPr>
-            </p:nvSpPr>
-            <p:spPr/>
-            <p:txBody>
-              <a:bodyPr/>
-              <a:lstStyle/>
-              <a:p>
-                <a:r>
-                  <a:rPr lang="es-ES" dirty="0" err="1"/>
-                  <a:t>Algorithm</a:t>
-                </a:r>
-                <a:endParaRPr lang="es-ES" dirty="0"/>
-              </a:p>
-              <a:p>
-                <a:pPr marL="171450" indent="-171450">
-                  <a:buFont typeface="Arial" panose="020B0604020202020204" pitchFamily="34" charset="0"/>
-                  <a:buChar char="•"/>
-                </a:pPr>
-                <a:r>
-                  <a:rPr lang="es-ES" dirty="0" err="1"/>
-                  <a:t>For</a:t>
-                </a:r>
-                <a:r>
-                  <a:rPr lang="es-ES" dirty="0"/>
-                  <a:t> </a:t>
-                </a:r>
-                <a:r>
-                  <a:rPr lang="es-ES" dirty="0" err="1"/>
-                  <a:t>each</a:t>
-                </a:r>
-                <a:r>
-                  <a:rPr lang="es-ES" dirty="0"/>
-                  <a:t> </a:t>
-                </a:r>
-                <a:r>
-                  <a:rPr lang="es-ES" dirty="0" err="1"/>
-                  <a:t>metabolite</a:t>
-                </a:r>
-                <a:r>
-                  <a:rPr lang="es-ES" dirty="0"/>
-                  <a:t> </a:t>
-                </a:r>
-                <a14:m>
-                  <m:oMath xmlns:m="http://schemas.openxmlformats.org/officeDocument/2006/math">
-                    <m:r>
-                      <a:rPr lang="es-ES" sz="1200" i="1" kern="1200">
-                        <a:solidFill>
-                          <a:schemeClr val="tx1"/>
-                        </a:solidFill>
-                        <a:latin typeface="+mn-lt"/>
-                        <a:ea typeface="+mn-ea"/>
-                        <a:cs typeface="+mn-cs"/>
-                      </a:rPr>
-                      <m:t>𝑚</m:t>
-                    </m:r>
-                  </m:oMath>
-                </a14:m>
-                <a:r>
-                  <a:rPr lang="es-ES" dirty="0"/>
-                  <a:t>, </a:t>
-                </a:r>
-                <a:r>
-                  <a:rPr lang="es-ES" dirty="0" err="1"/>
-                  <a:t>list</a:t>
-                </a:r>
-                <a:r>
-                  <a:rPr lang="es-ES" dirty="0"/>
-                  <a:t> </a:t>
-                </a:r>
-                <a:r>
-                  <a:rPr lang="es-ES" dirty="0" err="1"/>
-                  <a:t>producers</a:t>
-                </a:r>
-                <a:r>
-                  <a:rPr lang="es-ES" dirty="0"/>
-                  <a:t> </a:t>
-                </a:r>
-                <a14:m>
-                  <m:oMath xmlns:m="http://schemas.openxmlformats.org/officeDocument/2006/math">
-                    <m:r>
-                      <a:rPr lang="es-ES" sz="1200" i="1" kern="1200">
-                        <a:solidFill>
-                          <a:schemeClr val="tx1"/>
-                        </a:solidFill>
-                        <a:latin typeface="+mn-lt"/>
-                        <a:ea typeface="+mn-ea"/>
-                        <a:cs typeface="+mn-cs"/>
-                      </a:rPr>
-                      <m:t>𝑃</m:t>
-                    </m:r>
-                  </m:oMath>
-                </a14:m>
-                <a:r>
-                  <a:rPr lang="es-ES" dirty="0"/>
-                  <a:t>(</a:t>
-                </a:r>
-                <a:r>
-                  <a:rPr lang="es-ES" dirty="0" err="1"/>
-                  <a:t>reactions</a:t>
-                </a:r>
-                <a:r>
-                  <a:rPr lang="es-ES" dirty="0"/>
-                  <a:t> </a:t>
-                </a:r>
-                <a:r>
-                  <a:rPr lang="es-ES" dirty="0" err="1"/>
-                  <a:t>with</a:t>
-                </a:r>
-                <a:r>
-                  <a:rPr lang="es-ES" dirty="0"/>
-                  <a:t> </a:t>
-                </a:r>
-                <a14:m>
-                  <m:oMath xmlns:m="http://schemas.openxmlformats.org/officeDocument/2006/math">
-                    <m:sSub>
-                      <m:sSubPr>
-                        <m:ctrlPr>
-                          <a:rPr lang="ar-AE" sz="1200" kern="1200">
-                            <a:solidFill>
-                              <a:schemeClr val="tx1"/>
-                            </a:solidFill>
-                            <a:latin typeface="+mn-lt"/>
-                            <a:ea typeface="+mn-ea"/>
-                            <a:cs typeface="+mn-cs"/>
-                          </a:rPr>
-                        </m:ctrlPr>
-                      </m:sSubPr>
-                      <m:e>
-                        <m:r>
-                          <a:rPr lang="ar-AE" sz="1200" i="1" kern="1200">
-                            <a:solidFill>
-                              <a:schemeClr val="tx1"/>
-                            </a:solidFill>
-                            <a:latin typeface="+mn-lt"/>
-                            <a:ea typeface="+mn-ea"/>
-                            <a:cs typeface="+mn-cs"/>
-                          </a:rPr>
-                          <m:t>𝑆</m:t>
-                        </m:r>
-                      </m:e>
-                      <m:sub>
-                        <m:r>
-                          <a:rPr lang="ar-AE" sz="1200" i="1" kern="1200">
-                            <a:solidFill>
-                              <a:schemeClr val="tx1"/>
-                            </a:solidFill>
-                            <a:latin typeface="+mn-lt"/>
-                            <a:ea typeface="+mn-ea"/>
-                            <a:cs typeface="+mn-cs"/>
-                          </a:rPr>
-                          <m:t>𝑚</m:t>
-                        </m:r>
-                        <m:r>
-                          <a:rPr lang="ar-AE" sz="1200" i="0" kern="1200">
-                            <a:solidFill>
-                              <a:schemeClr val="tx1"/>
-                            </a:solidFill>
-                            <a:latin typeface="+mn-lt"/>
-                            <a:ea typeface="+mn-ea"/>
-                            <a:cs typeface="+mn-cs"/>
-                          </a:rPr>
-                          <m:t>,</m:t>
-                        </m:r>
-                        <m:r>
-                          <a:rPr lang="ar-AE" sz="1200" i="1" kern="1200">
-                            <a:solidFill>
-                              <a:schemeClr val="tx1"/>
-                            </a:solidFill>
-                            <a:latin typeface="+mn-lt"/>
-                            <a:ea typeface="+mn-ea"/>
-                            <a:cs typeface="+mn-cs"/>
-                          </a:rPr>
-                          <m:t>𝑗</m:t>
-                        </m:r>
-                      </m:sub>
-                    </m:sSub>
-                    <m:r>
-                      <a:rPr lang="ar-AE" sz="1200" i="0" kern="1200">
-                        <a:solidFill>
-                          <a:schemeClr val="tx1"/>
-                        </a:solidFill>
-                        <a:latin typeface="+mn-lt"/>
-                        <a:ea typeface="+mn-ea"/>
-                        <a:cs typeface="+mn-cs"/>
-                      </a:rPr>
-                      <m:t>&gt;</m:t>
-                    </m:r>
-                    <m:r>
-                      <a:rPr lang="ar-AE" sz="1200" i="0" kern="1200">
-                        <a:solidFill>
-                          <a:schemeClr val="tx1"/>
-                        </a:solidFill>
-                        <a:latin typeface="+mn-lt"/>
-                        <a:ea typeface="+mn-ea"/>
-                        <a:cs typeface="+mn-cs"/>
-                      </a:rPr>
-                      <m:t>0</m:t>
-                    </m:r>
-                  </m:oMath>
-                </a14:m>
-                <a:r>
-                  <a:rPr lang="ar-AE" dirty="0"/>
-                  <a:t>)</a:t>
-                </a:r>
-              </a:p>
-              <a:p>
-                <a:pPr marL="171450" indent="-171450">
-                  <a:buFont typeface="Arial" panose="020B0604020202020204" pitchFamily="34" charset="0"/>
-                  <a:buChar char="•"/>
-                </a:pPr>
-                <a:r>
-                  <a:rPr lang="es-ES" dirty="0" err="1"/>
-                  <a:t>List</a:t>
-                </a:r>
-                <a:r>
-                  <a:rPr lang="es-ES" dirty="0"/>
-                  <a:t> </a:t>
-                </a:r>
-                <a:r>
-                  <a:rPr lang="es-ES" dirty="0" err="1"/>
-                  <a:t>consumers</a:t>
-                </a:r>
-                <a:r>
-                  <a:rPr lang="es-ES" dirty="0"/>
-                  <a:t> </a:t>
-                </a:r>
-                <a14:m>
-                  <m:oMath xmlns:m="http://schemas.openxmlformats.org/officeDocument/2006/math">
-                    <m:r>
-                      <a:rPr lang="es-ES" sz="1200" i="1" kern="1200">
-                        <a:solidFill>
-                          <a:schemeClr val="tx1"/>
-                        </a:solidFill>
-                        <a:latin typeface="+mn-lt"/>
-                        <a:ea typeface="+mn-ea"/>
-                        <a:cs typeface="+mn-cs"/>
-                      </a:rPr>
-                      <m:t>𝐶</m:t>
-                    </m:r>
-                  </m:oMath>
-                </a14:m>
-                <a:r>
-                  <a:rPr lang="es-ES" dirty="0"/>
-                  <a:t>(</a:t>
-                </a:r>
-                <a:r>
-                  <a:rPr lang="es-ES" dirty="0" err="1"/>
-                  <a:t>reactions</a:t>
-                </a:r>
-                <a:r>
-                  <a:rPr lang="es-ES" dirty="0"/>
-                  <a:t> </a:t>
-                </a:r>
-                <a:r>
-                  <a:rPr lang="es-ES" dirty="0" err="1"/>
-                  <a:t>with</a:t>
-                </a:r>
-                <a:r>
-                  <a:rPr lang="es-ES" dirty="0"/>
-                  <a:t> </a:t>
-                </a:r>
-                <a14:m>
-                  <m:oMath xmlns:m="http://schemas.openxmlformats.org/officeDocument/2006/math">
-                    <m:sSub>
-                      <m:sSubPr>
-                        <m:ctrlPr>
-                          <a:rPr lang="ar-AE" sz="1200" kern="1200">
-                            <a:solidFill>
-                              <a:schemeClr val="tx1"/>
-                            </a:solidFill>
-                            <a:latin typeface="+mn-lt"/>
-                            <a:ea typeface="+mn-ea"/>
-                            <a:cs typeface="+mn-cs"/>
-                          </a:rPr>
-                        </m:ctrlPr>
-                      </m:sSubPr>
-                      <m:e>
-                        <m:r>
-                          <a:rPr lang="ar-AE" sz="1200" i="1" kern="1200">
-                            <a:solidFill>
-                              <a:schemeClr val="tx1"/>
-                            </a:solidFill>
-                            <a:latin typeface="+mn-lt"/>
-                            <a:ea typeface="+mn-ea"/>
-                            <a:cs typeface="+mn-cs"/>
-                          </a:rPr>
-                          <m:t>𝑆</m:t>
-                        </m:r>
-                      </m:e>
-                      <m:sub>
-                        <m:r>
-                          <a:rPr lang="ar-AE" sz="1200" i="1" kern="1200">
-                            <a:solidFill>
-                              <a:schemeClr val="tx1"/>
-                            </a:solidFill>
-                            <a:latin typeface="+mn-lt"/>
-                            <a:ea typeface="+mn-ea"/>
-                            <a:cs typeface="+mn-cs"/>
-                          </a:rPr>
-                          <m:t>𝑚</m:t>
-                        </m:r>
-                        <m:r>
-                          <a:rPr lang="ar-AE" sz="1200" i="0" kern="1200">
-                            <a:solidFill>
-                              <a:schemeClr val="tx1"/>
-                            </a:solidFill>
-                            <a:latin typeface="+mn-lt"/>
-                            <a:ea typeface="+mn-ea"/>
-                            <a:cs typeface="+mn-cs"/>
-                          </a:rPr>
-                          <m:t>,</m:t>
-                        </m:r>
-                        <m:r>
-                          <a:rPr lang="ar-AE" sz="1200" i="1" kern="1200">
-                            <a:solidFill>
-                              <a:schemeClr val="tx1"/>
-                            </a:solidFill>
-                            <a:latin typeface="+mn-lt"/>
-                            <a:ea typeface="+mn-ea"/>
-                            <a:cs typeface="+mn-cs"/>
-                          </a:rPr>
-                          <m:t>𝑗</m:t>
-                        </m:r>
-                      </m:sub>
-                    </m:sSub>
-                    <m:r>
-                      <a:rPr lang="ar-AE" sz="1200" i="0" kern="1200">
-                        <a:solidFill>
-                          <a:schemeClr val="tx1"/>
-                        </a:solidFill>
-                        <a:latin typeface="+mn-lt"/>
-                        <a:ea typeface="+mn-ea"/>
-                        <a:cs typeface="+mn-cs"/>
-                      </a:rPr>
-                      <m:t>&lt;</m:t>
-                    </m:r>
-                    <m:r>
-                      <a:rPr lang="ar-AE" sz="1200" i="0" kern="1200">
-                        <a:solidFill>
-                          <a:schemeClr val="tx1"/>
-                        </a:solidFill>
-                        <a:latin typeface="+mn-lt"/>
-                        <a:ea typeface="+mn-ea"/>
-                        <a:cs typeface="+mn-cs"/>
-                      </a:rPr>
-                      <m:t>0</m:t>
-                    </m:r>
-                  </m:oMath>
-                </a14:m>
-                <a:r>
-                  <a:rPr lang="ar-AE" dirty="0"/>
-                  <a:t>)</a:t>
-                </a:r>
-              </a:p>
-              <a:p>
-                <a:pPr marL="171450" indent="-171450">
-                  <a:buFont typeface="Arial" panose="020B0604020202020204" pitchFamily="34" charset="0"/>
-                  <a:buChar char="•"/>
-                </a:pPr>
-                <a:r>
-                  <a:rPr lang="es-ES" dirty="0" err="1"/>
-                  <a:t>If</a:t>
-                </a:r>
-                <a:r>
-                  <a:rPr lang="es-ES" dirty="0"/>
-                  <a:t> </a:t>
-                </a:r>
-                <a14:m>
-                  <m:oMath xmlns:m="http://schemas.openxmlformats.org/officeDocument/2006/math">
-                    <m:r>
-                      <a:rPr lang="es-ES" sz="1200" kern="1200">
-                        <a:solidFill>
-                          <a:schemeClr val="tx1"/>
-                        </a:solidFill>
-                        <a:latin typeface="+mn-lt"/>
-                        <a:ea typeface="+mn-ea"/>
-                        <a:cs typeface="+mn-cs"/>
-                      </a:rPr>
-                      <m:t>∣</m:t>
-                    </m:r>
-                    <m:r>
-                      <a:rPr lang="es-ES" sz="1200" i="1" kern="1200">
-                        <a:solidFill>
-                          <a:schemeClr val="tx1"/>
-                        </a:solidFill>
-                        <a:latin typeface="+mn-lt"/>
-                        <a:ea typeface="+mn-ea"/>
-                        <a:cs typeface="+mn-cs"/>
-                      </a:rPr>
-                      <m:t>𝑃</m:t>
-                    </m:r>
-                    <m:r>
-                      <a:rPr lang="es-ES" sz="1200" i="0" kern="1200">
-                        <a:solidFill>
-                          <a:schemeClr val="tx1"/>
-                        </a:solidFill>
-                        <a:latin typeface="+mn-lt"/>
-                        <a:ea typeface="+mn-ea"/>
-                        <a:cs typeface="+mn-cs"/>
-                      </a:rPr>
-                      <m:t>∣≥</m:t>
-                    </m:r>
-                    <m:r>
-                      <a:rPr lang="es-ES" sz="1200" i="0" kern="1200">
-                        <a:solidFill>
-                          <a:schemeClr val="tx1"/>
-                        </a:solidFill>
-                        <a:latin typeface="+mn-lt"/>
-                        <a:ea typeface="+mn-ea"/>
-                        <a:cs typeface="+mn-cs"/>
-                      </a:rPr>
-                      <m:t>2</m:t>
-                    </m:r>
-                  </m:oMath>
-                </a14:m>
-                <a:r>
-                  <a:rPr lang="es-ES" dirty="0"/>
-                  <a:t>and </a:t>
-                </a:r>
-                <a14:m>
-                  <m:oMath xmlns:m="http://schemas.openxmlformats.org/officeDocument/2006/math">
-                    <m:r>
-                      <a:rPr lang="es-ES" sz="1200" kern="1200">
-                        <a:solidFill>
-                          <a:schemeClr val="tx1"/>
-                        </a:solidFill>
-                        <a:latin typeface="+mn-lt"/>
-                        <a:ea typeface="+mn-ea"/>
-                        <a:cs typeface="+mn-cs"/>
-                      </a:rPr>
-                      <m:t>∣</m:t>
-                    </m:r>
-                    <m:r>
-                      <a:rPr lang="es-ES" sz="1200" i="1" kern="1200">
-                        <a:solidFill>
-                          <a:schemeClr val="tx1"/>
-                        </a:solidFill>
-                        <a:latin typeface="+mn-lt"/>
-                        <a:ea typeface="+mn-ea"/>
-                        <a:cs typeface="+mn-cs"/>
-                      </a:rPr>
-                      <m:t>𝐶</m:t>
-                    </m:r>
-                    <m:r>
-                      <a:rPr lang="es-ES" sz="1200" i="0" kern="1200">
-                        <a:solidFill>
-                          <a:schemeClr val="tx1"/>
-                        </a:solidFill>
-                        <a:latin typeface="+mn-lt"/>
-                        <a:ea typeface="+mn-ea"/>
-                        <a:cs typeface="+mn-cs"/>
-                      </a:rPr>
-                      <m:t>∣≥</m:t>
-                    </m:r>
-                    <m:r>
-                      <a:rPr lang="es-ES" sz="1200" i="0" kern="1200">
-                        <a:solidFill>
-                          <a:schemeClr val="tx1"/>
-                        </a:solidFill>
-                        <a:latin typeface="+mn-lt"/>
-                        <a:ea typeface="+mn-ea"/>
-                        <a:cs typeface="+mn-cs"/>
-                      </a:rPr>
-                      <m:t>1</m:t>
-                    </m:r>
-                  </m:oMath>
-                </a14:m>
-                <a:r>
-                  <a:rPr lang="es-ES" dirty="0"/>
-                  <a:t>, </a:t>
-                </a:r>
-                <a:r>
-                  <a:rPr lang="es-ES" dirty="0" err="1"/>
-                  <a:t>check</a:t>
-                </a:r>
-                <a:r>
-                  <a:rPr lang="es-ES" dirty="0"/>
-                  <a:t> candidate outputs </a:t>
-                </a:r>
-                <a14:m>
-                  <m:oMath xmlns:m="http://schemas.openxmlformats.org/officeDocument/2006/math">
-                    <m:sSub>
-                      <m:sSubPr>
-                        <m:ctrlPr>
-                          <a:rPr lang="ar-AE" sz="1200" kern="1200">
-                            <a:solidFill>
-                              <a:schemeClr val="tx1"/>
-                            </a:solidFill>
-                            <a:latin typeface="+mn-lt"/>
-                            <a:ea typeface="+mn-ea"/>
-                            <a:cs typeface="+mn-cs"/>
-                          </a:rPr>
-                        </m:ctrlPr>
-                      </m:sSubPr>
-                      <m:e>
-                        <m:r>
-                          <a:rPr lang="ar-AE" sz="1200" i="1" kern="1200">
-                            <a:solidFill>
-                              <a:schemeClr val="tx1"/>
-                            </a:solidFill>
-                            <a:latin typeface="+mn-lt"/>
-                            <a:ea typeface="+mn-ea"/>
-                            <a:cs typeface="+mn-cs"/>
-                          </a:rPr>
-                          <m:t>𝑟</m:t>
-                        </m:r>
-                      </m:e>
-                      <m:sub>
-                        <m:r>
-                          <a:rPr lang="ar-AE" sz="1200" i="0" kern="1200">
-                            <a:solidFill>
-                              <a:schemeClr val="tx1"/>
-                            </a:solidFill>
-                            <a:latin typeface="+mn-lt"/>
-                            <a:ea typeface="+mn-ea"/>
-                            <a:cs typeface="+mn-cs"/>
-                          </a:rPr>
-                          <m:t>3</m:t>
-                        </m:r>
-                      </m:sub>
-                    </m:sSub>
-                    <m:r>
-                      <a:rPr lang="ar-AE" sz="1200" i="0" kern="1200">
-                        <a:solidFill>
-                          <a:schemeClr val="tx1"/>
-                        </a:solidFill>
-                        <a:latin typeface="+mn-lt"/>
-                        <a:ea typeface="+mn-ea"/>
-                        <a:cs typeface="+mn-cs"/>
-                      </a:rPr>
-                      <m:t>∈</m:t>
-                    </m:r>
-                    <m:r>
-                      <a:rPr lang="ar-AE" sz="1200" i="1" kern="1200">
-                        <a:solidFill>
-                          <a:schemeClr val="tx1"/>
-                        </a:solidFill>
-                        <a:latin typeface="+mn-lt"/>
-                        <a:ea typeface="+mn-ea"/>
-                        <a:cs typeface="+mn-cs"/>
-                      </a:rPr>
-                      <m:t>𝐶</m:t>
-                    </m:r>
-                  </m:oMath>
-                </a14:m>
-                <a:endParaRPr lang="ar-AE" dirty="0"/>
-              </a:p>
-              <a:p>
-                <a:pPr marL="171450" indent="-171450">
-                  <a:buFont typeface="Arial" panose="020B0604020202020204" pitchFamily="34" charset="0"/>
-                  <a:buChar char="•"/>
-                </a:pPr>
-                <a:r>
-                  <a:rPr lang="es-ES" dirty="0" err="1"/>
-                  <a:t>Prefer</a:t>
-                </a:r>
-                <a:r>
-                  <a:rPr lang="es-ES" dirty="0"/>
-                  <a:t> cases </a:t>
-                </a:r>
-                <a:r>
-                  <a:rPr lang="es-ES" dirty="0" err="1"/>
-                  <a:t>where</a:t>
-                </a:r>
-                <a:r>
-                  <a:rPr lang="es-ES" dirty="0"/>
-                  <a:t> </a:t>
-                </a:r>
-                <a14:m>
-                  <m:oMath xmlns:m="http://schemas.openxmlformats.org/officeDocument/2006/math">
-                    <m:r>
-                      <a:rPr lang="es-ES" sz="1200" i="1" kern="1200">
-                        <a:solidFill>
-                          <a:schemeClr val="tx1"/>
-                        </a:solidFill>
-                        <a:latin typeface="+mn-lt"/>
-                        <a:ea typeface="+mn-ea"/>
-                        <a:cs typeface="+mn-cs"/>
-                      </a:rPr>
-                      <m:t>𝑚</m:t>
-                    </m:r>
-                  </m:oMath>
-                </a14:m>
-                <a:r>
-                  <a:rPr lang="es-ES" dirty="0"/>
-                  <a:t>has </a:t>
-                </a:r>
-                <a:r>
-                  <a:rPr lang="es-ES" b="1" dirty="0" err="1"/>
-                  <a:t>exactly</a:t>
-                </a:r>
-                <a:r>
-                  <a:rPr lang="es-ES" dirty="0"/>
-                  <a:t> 2 </a:t>
-                </a:r>
-                <a:r>
-                  <a:rPr lang="es-ES" dirty="0" err="1"/>
-                  <a:t>producers</a:t>
-                </a:r>
-                <a:r>
-                  <a:rPr lang="es-ES" dirty="0"/>
-                  <a:t> and 1 </a:t>
-                </a:r>
-                <a:r>
-                  <a:rPr lang="es-ES" dirty="0" err="1"/>
-                  <a:t>consumer</a:t>
-                </a:r>
-                <a:r>
-                  <a:rPr lang="es-ES" dirty="0"/>
-                  <a:t> (</a:t>
-                </a:r>
-                <a:r>
-                  <a:rPr lang="es-ES" dirty="0" err="1"/>
-                  <a:t>tightest</a:t>
-                </a:r>
-                <a:r>
-                  <a:rPr lang="es-ES" dirty="0"/>
-                  <a:t> “</a:t>
-                </a:r>
-                <a:r>
-                  <a:rPr lang="es-ES" dirty="0" err="1"/>
-                  <a:t>adder</a:t>
-                </a:r>
-                <a:r>
-                  <a:rPr lang="es-ES" dirty="0"/>
-                  <a:t>”)</a:t>
-                </a:r>
-              </a:p>
-              <a:p>
-                <a:pPr marL="171450" indent="-171450">
-                  <a:buFont typeface="Arial" panose="020B0604020202020204" pitchFamily="34" charset="0"/>
-                  <a:buChar char="•"/>
-                </a:pPr>
-                <a:r>
-                  <a:rPr lang="es-ES" dirty="0" err="1"/>
-                  <a:t>Intersect</a:t>
-                </a:r>
-                <a:r>
-                  <a:rPr lang="es-ES" dirty="0"/>
-                  <a:t> </a:t>
-                </a:r>
-                <a:r>
-                  <a:rPr lang="es-ES" dirty="0" err="1"/>
-                  <a:t>producers</a:t>
-                </a:r>
-                <a:r>
-                  <a:rPr lang="es-ES" dirty="0"/>
-                  <a:t> </a:t>
-                </a:r>
-                <a:r>
-                  <a:rPr lang="es-ES" dirty="0" err="1"/>
-                  <a:t>with</a:t>
-                </a:r>
-                <a:r>
-                  <a:rPr lang="es-ES" dirty="0"/>
-                  <a:t> </a:t>
-                </a:r>
-                <a:r>
-                  <a:rPr lang="es-ES" dirty="0" err="1"/>
-                  <a:t>your</a:t>
-                </a:r>
-                <a:r>
-                  <a:rPr lang="es-ES" dirty="0"/>
-                  <a:t> </a:t>
-                </a:r>
-                <a:r>
-                  <a:rPr lang="es-ES" b="1" dirty="0"/>
-                  <a:t>single-gene </a:t>
-                </a:r>
-                <a:r>
-                  <a:rPr lang="es-ES" b="1" dirty="0" err="1"/>
-                  <a:t>reaction</a:t>
-                </a:r>
-                <a:r>
-                  <a:rPr lang="es-ES" b="1" dirty="0"/>
-                  <a:t> </a:t>
-                </a:r>
-                <a:r>
-                  <a:rPr lang="es-ES" b="1" dirty="0" err="1"/>
-                  <a:t>list</a:t>
-                </a:r>
-                <a:r>
-                  <a:rPr lang="es-ES" dirty="0"/>
-                  <a:t> (</a:t>
-                </a:r>
-                <a:r>
-                  <a:rPr lang="es-ES" dirty="0" err="1"/>
-                  <a:t>your</a:t>
-                </a:r>
-                <a:r>
-                  <a:rPr lang="es-ES" dirty="0"/>
-                  <a:t> </a:t>
-                </a:r>
-                <a:r>
-                  <a:rPr lang="es-ES" dirty="0" err="1"/>
-                  <a:t>current</a:t>
-                </a:r>
-                <a:r>
-                  <a:rPr lang="es-ES" dirty="0"/>
-                  <a:t> </a:t>
-                </a:r>
-                <a:r>
-                  <a:rPr lang="es-ES" dirty="0" err="1"/>
-                  <a:t>code</a:t>
-                </a:r>
-                <a:r>
-                  <a:rPr lang="es-ES" dirty="0"/>
-                  <a:t> </a:t>
-                </a:r>
-                <a:r>
-                  <a:rPr lang="es-ES" dirty="0" err="1"/>
-                  <a:t>already</a:t>
-                </a:r>
-                <a:r>
-                  <a:rPr lang="es-ES" dirty="0"/>
-                  <a:t> </a:t>
-                </a:r>
-                <a:r>
-                  <a:rPr lang="es-ES" dirty="0" err="1"/>
-                  <a:t>gives</a:t>
-                </a:r>
-                <a:r>
-                  <a:rPr lang="es-ES" dirty="0"/>
-                  <a:t> </a:t>
-                </a:r>
-                <a:r>
-                  <a:rPr lang="es-ES" dirty="0" err="1"/>
-                  <a:t>that</a:t>
-                </a:r>
-                <a:r>
-                  <a:rPr lang="es-ES" dirty="0"/>
-                  <a:t>)</a:t>
-                </a:r>
-              </a:p>
-              <a:p>
-                <a:endParaRPr lang="en-US" dirty="0"/>
-              </a:p>
-            </p:txBody>
-          </p:sp>
-        </mc:Choice>
-        <mc:Fallback>
-          <p:sp>
-            <p:nvSpPr>
-              <p:cNvPr id="3" name="Notes Placeholder 2"/>
-              <p:cNvSpPr>
-                <a:spLocks noGrp="1"/>
-              </p:cNvSpPr>
-              <p:nvPr>
-                <p:ph type="body" idx="1"/>
-              </p:nvPr>
-            </p:nvSpPr>
-            <p:spPr/>
-            <p:txBody>
-              <a:bodyPr/>
-              <a:lstStyle/>
-              <a:p>
-                <a:r>
-                  <a:rPr lang="es-ES" dirty="0" err="1"/>
-                  <a:t>Algorithm</a:t>
-                </a:r>
-                <a:endParaRPr lang="es-ES" dirty="0"/>
-              </a:p>
-              <a:p>
-                <a:pPr marL="171450" indent="-171450">
-                  <a:buFont typeface="Arial" panose="020B0604020202020204" pitchFamily="34" charset="0"/>
-                  <a:buChar char="•"/>
-                </a:pPr>
-                <a:r>
-                  <a:rPr lang="es-ES" dirty="0" err="1"/>
-                  <a:t>For</a:t>
-                </a:r>
-                <a:r>
-                  <a:rPr lang="es-ES" dirty="0"/>
-                  <a:t> </a:t>
-                </a:r>
-                <a:r>
-                  <a:rPr lang="es-ES" dirty="0" err="1"/>
-                  <a:t>each</a:t>
-                </a:r>
-                <a:r>
-                  <a:rPr lang="es-ES" dirty="0"/>
-                  <a:t> </a:t>
-                </a:r>
-                <a:r>
-                  <a:rPr lang="es-ES" dirty="0" err="1"/>
-                  <a:t>metabolite</a:t>
-                </a:r>
-                <a:r>
-                  <a:rPr lang="es-ES" dirty="0"/>
-                  <a:t> </a:t>
-                </a:r>
-                <a:r>
-                  <a:rPr lang="es-ES" sz="1200" i="0" kern="1200">
-                    <a:solidFill>
-                      <a:schemeClr val="tx1"/>
-                    </a:solidFill>
-                    <a:latin typeface="+mn-lt"/>
-                    <a:ea typeface="+mn-ea"/>
-                    <a:cs typeface="+mn-cs"/>
-                  </a:rPr>
-                  <a:t>𝑚</a:t>
-                </a:r>
-                <a:r>
-                  <a:rPr lang="es-ES" dirty="0"/>
-                  <a:t>, </a:t>
-                </a:r>
-                <a:r>
-                  <a:rPr lang="es-ES" dirty="0" err="1"/>
-                  <a:t>list</a:t>
-                </a:r>
-                <a:r>
-                  <a:rPr lang="es-ES" dirty="0"/>
-                  <a:t> </a:t>
-                </a:r>
-                <a:r>
-                  <a:rPr lang="es-ES" dirty="0" err="1"/>
-                  <a:t>producers</a:t>
-                </a:r>
-                <a:r>
-                  <a:rPr lang="es-ES" dirty="0"/>
-                  <a:t> </a:t>
-                </a:r>
-                <a:r>
-                  <a:rPr lang="es-ES" sz="1200" i="0" kern="1200">
-                    <a:solidFill>
-                      <a:schemeClr val="tx1"/>
-                    </a:solidFill>
-                    <a:latin typeface="+mn-lt"/>
-                    <a:ea typeface="+mn-ea"/>
-                    <a:cs typeface="+mn-cs"/>
-                  </a:rPr>
-                  <a:t>𝑃</a:t>
-                </a:r>
-                <a:r>
-                  <a:rPr lang="es-ES" dirty="0"/>
-                  <a:t>(</a:t>
-                </a:r>
-                <a:r>
-                  <a:rPr lang="es-ES" dirty="0" err="1"/>
-                  <a:t>reactions</a:t>
-                </a:r>
-                <a:r>
-                  <a:rPr lang="es-ES" dirty="0"/>
-                  <a:t> </a:t>
-                </a:r>
-                <a:r>
-                  <a:rPr lang="es-ES" dirty="0" err="1"/>
-                  <a:t>with</a:t>
-                </a:r>
-                <a:r>
-                  <a:rPr lang="es-ES" dirty="0"/>
-                  <a:t> </a:t>
-                </a:r>
-                <a:r>
-                  <a:rPr lang="ar-AE" sz="1200" i="0" kern="1200">
-                    <a:solidFill>
-                      <a:schemeClr val="tx1"/>
-                    </a:solidFill>
-                    <a:latin typeface="+mn-lt"/>
-                    <a:ea typeface="+mn-ea"/>
-                    <a:cs typeface="+mn-cs"/>
-                  </a:rPr>
-                  <a:t>𝑆_(𝑚,𝑗)&gt;0</a:t>
-                </a:r>
-                <a:r>
-                  <a:rPr lang="ar-AE" dirty="0"/>
-                  <a:t>)</a:t>
-                </a:r>
-              </a:p>
-              <a:p>
-                <a:pPr marL="171450" indent="-171450">
-                  <a:buFont typeface="Arial" panose="020B0604020202020204" pitchFamily="34" charset="0"/>
-                  <a:buChar char="•"/>
-                </a:pPr>
-                <a:r>
-                  <a:rPr lang="es-ES" dirty="0" err="1"/>
-                  <a:t>List</a:t>
-                </a:r>
-                <a:r>
-                  <a:rPr lang="es-ES" dirty="0"/>
-                  <a:t> </a:t>
-                </a:r>
-                <a:r>
-                  <a:rPr lang="es-ES" dirty="0" err="1"/>
-                  <a:t>consumers</a:t>
-                </a:r>
-                <a:r>
-                  <a:rPr lang="es-ES" dirty="0"/>
-                  <a:t> </a:t>
-                </a:r>
-                <a:r>
-                  <a:rPr lang="es-ES" sz="1200" i="0" kern="1200">
-                    <a:solidFill>
-                      <a:schemeClr val="tx1"/>
-                    </a:solidFill>
-                    <a:latin typeface="+mn-lt"/>
-                    <a:ea typeface="+mn-ea"/>
-                    <a:cs typeface="+mn-cs"/>
-                  </a:rPr>
-                  <a:t>𝐶</a:t>
-                </a:r>
-                <a:r>
-                  <a:rPr lang="es-ES" dirty="0"/>
-                  <a:t>(</a:t>
-                </a:r>
-                <a:r>
-                  <a:rPr lang="es-ES" dirty="0" err="1"/>
-                  <a:t>reactions</a:t>
-                </a:r>
-                <a:r>
-                  <a:rPr lang="es-ES" dirty="0"/>
-                  <a:t> </a:t>
-                </a:r>
-                <a:r>
-                  <a:rPr lang="es-ES" dirty="0" err="1"/>
-                  <a:t>with</a:t>
-                </a:r>
-                <a:r>
-                  <a:rPr lang="es-ES" dirty="0"/>
-                  <a:t> </a:t>
-                </a:r>
-                <a:r>
-                  <a:rPr lang="ar-AE" sz="1200" i="0" kern="1200">
-                    <a:solidFill>
-                      <a:schemeClr val="tx1"/>
-                    </a:solidFill>
-                    <a:latin typeface="+mn-lt"/>
-                    <a:ea typeface="+mn-ea"/>
-                    <a:cs typeface="+mn-cs"/>
-                  </a:rPr>
-                  <a:t>𝑆_(𝑚,𝑗)&lt;0</a:t>
-                </a:r>
-                <a:r>
-                  <a:rPr lang="ar-AE" dirty="0"/>
-                  <a:t>)</a:t>
-                </a:r>
-              </a:p>
-              <a:p>
-                <a:pPr marL="171450" indent="-171450">
-                  <a:buFont typeface="Arial" panose="020B0604020202020204" pitchFamily="34" charset="0"/>
-                  <a:buChar char="•"/>
-                </a:pPr>
-                <a:r>
-                  <a:rPr lang="es-ES" dirty="0" err="1"/>
-                  <a:t>If</a:t>
-                </a:r>
-                <a:r>
-                  <a:rPr lang="es-ES" dirty="0"/>
-                  <a:t> </a:t>
-                </a:r>
-                <a:r>
-                  <a:rPr lang="es-ES" sz="1200" i="0" kern="1200">
-                    <a:solidFill>
-                      <a:schemeClr val="tx1"/>
-                    </a:solidFill>
-                    <a:latin typeface="+mn-lt"/>
-                    <a:ea typeface="+mn-ea"/>
-                    <a:cs typeface="+mn-cs"/>
-                  </a:rPr>
-                  <a:t>∣𝑃∣≥2</a:t>
-                </a:r>
-                <a:r>
-                  <a:rPr lang="es-ES" dirty="0"/>
-                  <a:t>and </a:t>
-                </a:r>
-                <a:r>
-                  <a:rPr lang="es-ES" sz="1200" i="0" kern="1200">
-                    <a:solidFill>
-                      <a:schemeClr val="tx1"/>
-                    </a:solidFill>
-                    <a:latin typeface="+mn-lt"/>
-                    <a:ea typeface="+mn-ea"/>
-                    <a:cs typeface="+mn-cs"/>
-                  </a:rPr>
-                  <a:t>∣𝐶∣≥1</a:t>
-                </a:r>
-                <a:r>
-                  <a:rPr lang="es-ES" dirty="0"/>
-                  <a:t>, </a:t>
-                </a:r>
-                <a:r>
-                  <a:rPr lang="es-ES" dirty="0" err="1"/>
-                  <a:t>check</a:t>
-                </a:r>
-                <a:r>
-                  <a:rPr lang="es-ES" dirty="0"/>
-                  <a:t> candidate outputs </a:t>
-                </a:r>
-                <a:r>
-                  <a:rPr lang="ar-AE" sz="1200" i="0" kern="1200">
-                    <a:solidFill>
-                      <a:schemeClr val="tx1"/>
-                    </a:solidFill>
-                    <a:latin typeface="+mn-lt"/>
-                    <a:ea typeface="+mn-ea"/>
-                    <a:cs typeface="+mn-cs"/>
-                  </a:rPr>
-                  <a:t>𝑟_3∈𝐶</a:t>
-                </a:r>
-                <a:endParaRPr lang="ar-AE" dirty="0"/>
-              </a:p>
-              <a:p>
-                <a:pPr marL="171450" indent="-171450">
-                  <a:buFont typeface="Arial" panose="020B0604020202020204" pitchFamily="34" charset="0"/>
-                  <a:buChar char="•"/>
-                </a:pPr>
-                <a:r>
-                  <a:rPr lang="es-ES" dirty="0" err="1"/>
-                  <a:t>Prefer</a:t>
-                </a:r>
-                <a:r>
-                  <a:rPr lang="es-ES" dirty="0"/>
-                  <a:t> cases </a:t>
-                </a:r>
-                <a:r>
-                  <a:rPr lang="es-ES" dirty="0" err="1"/>
-                  <a:t>where</a:t>
-                </a:r>
-                <a:r>
-                  <a:rPr lang="es-ES" dirty="0"/>
-                  <a:t> </a:t>
-                </a:r>
-                <a:r>
-                  <a:rPr lang="es-ES" sz="1200" i="0" kern="1200">
-                    <a:solidFill>
-                      <a:schemeClr val="tx1"/>
-                    </a:solidFill>
-                    <a:latin typeface="+mn-lt"/>
-                    <a:ea typeface="+mn-ea"/>
-                    <a:cs typeface="+mn-cs"/>
-                  </a:rPr>
-                  <a:t>𝑚</a:t>
-                </a:r>
-                <a:r>
-                  <a:rPr lang="es-ES" dirty="0"/>
-                  <a:t>has </a:t>
-                </a:r>
-                <a:r>
-                  <a:rPr lang="es-ES" b="1" dirty="0" err="1"/>
-                  <a:t>exactly</a:t>
-                </a:r>
-                <a:r>
-                  <a:rPr lang="es-ES" dirty="0"/>
-                  <a:t> 2 </a:t>
-                </a:r>
-                <a:r>
-                  <a:rPr lang="es-ES" dirty="0" err="1"/>
-                  <a:t>producers</a:t>
-                </a:r>
-                <a:r>
-                  <a:rPr lang="es-ES" dirty="0"/>
-                  <a:t> and 1 </a:t>
-                </a:r>
-                <a:r>
-                  <a:rPr lang="es-ES" dirty="0" err="1"/>
-                  <a:t>consumer</a:t>
-                </a:r>
-                <a:r>
-                  <a:rPr lang="es-ES" dirty="0"/>
-                  <a:t> (</a:t>
-                </a:r>
-                <a:r>
-                  <a:rPr lang="es-ES" dirty="0" err="1"/>
-                  <a:t>tightest</a:t>
-                </a:r>
-                <a:r>
-                  <a:rPr lang="es-ES" dirty="0"/>
-                  <a:t> “</a:t>
-                </a:r>
-                <a:r>
-                  <a:rPr lang="es-ES" dirty="0" err="1"/>
-                  <a:t>adder</a:t>
-                </a:r>
-                <a:r>
-                  <a:rPr lang="es-ES" dirty="0"/>
-                  <a:t>”)</a:t>
-                </a:r>
-              </a:p>
-              <a:p>
-                <a:pPr marL="171450" indent="-171450">
-                  <a:buFont typeface="Arial" panose="020B0604020202020204" pitchFamily="34" charset="0"/>
-                  <a:buChar char="•"/>
-                </a:pPr>
-                <a:r>
-                  <a:rPr lang="es-ES" dirty="0" err="1"/>
-                  <a:t>Intersect</a:t>
-                </a:r>
-                <a:r>
-                  <a:rPr lang="es-ES" dirty="0"/>
-                  <a:t> </a:t>
-                </a:r>
-                <a:r>
-                  <a:rPr lang="es-ES" dirty="0" err="1"/>
-                  <a:t>producers</a:t>
-                </a:r>
-                <a:r>
-                  <a:rPr lang="es-ES" dirty="0"/>
-                  <a:t> </a:t>
-                </a:r>
-                <a:r>
-                  <a:rPr lang="es-ES" dirty="0" err="1"/>
-                  <a:t>with</a:t>
-                </a:r>
-                <a:r>
-                  <a:rPr lang="es-ES" dirty="0"/>
-                  <a:t> </a:t>
-                </a:r>
-                <a:r>
-                  <a:rPr lang="es-ES" dirty="0" err="1"/>
-                  <a:t>your</a:t>
-                </a:r>
-                <a:r>
-                  <a:rPr lang="es-ES" dirty="0"/>
-                  <a:t> </a:t>
-                </a:r>
-                <a:r>
-                  <a:rPr lang="es-ES" b="1" dirty="0"/>
-                  <a:t>single-gene </a:t>
-                </a:r>
-                <a:r>
-                  <a:rPr lang="es-ES" b="1" dirty="0" err="1"/>
-                  <a:t>reaction</a:t>
-                </a:r>
-                <a:r>
-                  <a:rPr lang="es-ES" b="1" dirty="0"/>
-                  <a:t> </a:t>
-                </a:r>
-                <a:r>
-                  <a:rPr lang="es-ES" b="1" dirty="0" err="1"/>
-                  <a:t>list</a:t>
-                </a:r>
-                <a:r>
-                  <a:rPr lang="es-ES" dirty="0"/>
-                  <a:t> (</a:t>
-                </a:r>
-                <a:r>
-                  <a:rPr lang="es-ES" dirty="0" err="1"/>
-                  <a:t>your</a:t>
-                </a:r>
-                <a:r>
-                  <a:rPr lang="es-ES" dirty="0"/>
-                  <a:t> </a:t>
-                </a:r>
-                <a:r>
-                  <a:rPr lang="es-ES" dirty="0" err="1"/>
-                  <a:t>current</a:t>
-                </a:r>
-                <a:r>
-                  <a:rPr lang="es-ES" dirty="0"/>
-                  <a:t> </a:t>
-                </a:r>
-                <a:r>
-                  <a:rPr lang="es-ES" dirty="0" err="1"/>
-                  <a:t>code</a:t>
-                </a:r>
-                <a:r>
-                  <a:rPr lang="es-ES" dirty="0"/>
-                  <a:t> </a:t>
-                </a:r>
-                <a:r>
-                  <a:rPr lang="es-ES" dirty="0" err="1"/>
-                  <a:t>already</a:t>
-                </a:r>
-                <a:r>
-                  <a:rPr lang="es-ES" dirty="0"/>
-                  <a:t> </a:t>
-                </a:r>
-                <a:r>
-                  <a:rPr lang="es-ES" dirty="0" err="1"/>
-                  <a:t>gives</a:t>
-                </a:r>
-                <a:r>
-                  <a:rPr lang="es-ES" dirty="0"/>
-                  <a:t> </a:t>
-                </a:r>
-                <a:r>
-                  <a:rPr lang="es-ES" dirty="0" err="1"/>
-                  <a:t>that</a:t>
-                </a:r>
-                <a:r>
-                  <a:rPr lang="es-ES" dirty="0"/>
-                  <a:t>)</a:t>
-                </a:r>
-              </a:p>
-              <a:p>
-                <a:endParaRPr lang="en-US" dirty="0"/>
-              </a:p>
-            </p:txBody>
-          </p:sp>
-        </mc:Fallback>
-      </mc:AlternateContent>
-      <p:sp>
-        <p:nvSpPr>
-          <p:cNvPr id="4" name="Slide Number Placeholder 3"/>
-          <p:cNvSpPr>
-            <a:spLocks noGrp="1"/>
-          </p:cNvSpPr>
-          <p:nvPr>
-            <p:ph type="sldNum" sz="quarter" idx="5"/>
-          </p:nvPr>
-        </p:nvSpPr>
-        <p:spPr/>
-        <p:txBody>
-          <a:bodyPr/>
-          <a:lstStyle/>
-          <a:p>
-            <a:fld id="{5F818A67-DE81-4BE5-A09A-01BC8A96D5BB}" type="slidenum">
-              <a:rPr lang="en-US" smtClean="0"/>
-              <a:t>3</a:t>
-            </a:fld>
-            <a:endParaRPr lang="en-US"/>
-          </a:p>
-        </p:txBody>
-      </p:sp>
-    </p:spTree>
-    <p:extLst>
-      <p:ext uri="{BB962C8B-B14F-4D97-AF65-F5344CB8AC3E}">
-        <p14:creationId xmlns:p14="http://schemas.microsoft.com/office/powerpoint/2010/main" val="1555917220"/>
-      </p:ext>
-    </p:extLst>
-  </p:cSld>
-  <p:clrMapOvr>
-    <a:masterClrMapping/>
-  </p:clrMapOvr>
-</p:notes>
-</file>
-
-<file path=ppt/notesSlides/notesSlide2.xml><?xml version="1.0" encoding="utf-8"?>
-<p:notes xmlns:a="http://schemas.openxmlformats.org/drawingml/2006/main" xmlns:r="http://schemas.openxmlformats.org/officeDocument/2006/relationships" xmlns:p="http://schemas.openxmlformats.org/presentationml/2006/main">
-  <p:cSld>
-    <p:spTree>
-      <p:nvGrpSpPr>
-        <p:cNvPr id="1" name="">
-          <a:extLst>
-            <a:ext uri="{FF2B5EF4-FFF2-40B4-BE49-F238E27FC236}">
-              <a16:creationId xmlns:a16="http://schemas.microsoft.com/office/drawing/2014/main" id="{CC905572-6063-7C16-16E8-29879B1D7BCB}"/>
-            </a:ext>
-          </a:extLst>
-        </p:cNvPr>
-        <p:cNvGrpSpPr/>
-        <p:nvPr/>
-      </p:nvGrpSpPr>
-      <p:grpSpPr>
-        <a:xfrm>
-          <a:off x="0" y="0"/>
-          <a:ext cx="0" cy="0"/>
-          <a:chOff x="0" y="0"/>
-          <a:chExt cx="0" cy="0"/>
-        </a:xfrm>
-      </p:grpSpPr>
-      <p:sp>
-        <p:nvSpPr>
-          <p:cNvPr id="2" name="Slide Image Placeholder 1">
-            <a:extLst>
-              <a:ext uri="{FF2B5EF4-FFF2-40B4-BE49-F238E27FC236}">
-                <a16:creationId xmlns:a16="http://schemas.microsoft.com/office/drawing/2014/main" id="{422EE637-7715-1373-4493-02CFD416B33F}"/>
-              </a:ext>
-            </a:extLst>
-          </p:cNvPr>
-          <p:cNvSpPr>
-            <a:spLocks noGrp="1" noRot="1" noChangeAspect="1"/>
-          </p:cNvSpPr>
-          <p:nvPr>
-            <p:ph type="sldImg"/>
-          </p:nvPr>
-        </p:nvSpPr>
-        <p:spPr/>
-      </p:sp>
-      <mc:AlternateContent xmlns:mc="http://schemas.openxmlformats.org/markup-compatibility/2006">
-        <mc:Choice xmlns:a14="http://schemas.microsoft.com/office/drawing/2010/main" Requires="a14">
-          <p:sp>
-            <p:nvSpPr>
-              <p:cNvPr id="3" name="Notes Placeholder 2">
-                <a:extLst>
-                  <a:ext uri="{FF2B5EF4-FFF2-40B4-BE49-F238E27FC236}">
-                    <a16:creationId xmlns:a16="http://schemas.microsoft.com/office/drawing/2014/main" id="{608074F7-E0BB-400B-67BA-E0BFC59D701B}"/>
-                  </a:ext>
-                </a:extLst>
-              </p:cNvPr>
               <p:cNvSpPr>
                 <a:spLocks noGrp="1"/>
               </p:cNvSpPr>
@@ -2525,7 +1246,1291 @@
             </p:txBody>
           </p:sp>
         </mc:Choice>
-        <mc:Fallback>
+        <mc:Fallback xmlns="">
+          <p:sp>
+            <p:nvSpPr>
+              <p:cNvPr id="3" name="Notes Placeholder 2"/>
+              <p:cNvSpPr>
+                <a:spLocks noGrp="1"/>
+              </p:cNvSpPr>
+              <p:nvPr>
+                <p:ph type="body" idx="1"/>
+              </p:nvPr>
+            </p:nvSpPr>
+            <p:spPr/>
+            <p:txBody>
+              <a:bodyPr/>
+              <a:lstStyle/>
+              <a:p>
+                <a:r>
+                  <a:rPr lang="es-ES" dirty="0" err="1"/>
+                  <a:t>Algorithm</a:t>
+                </a:r>
+                <a:endParaRPr lang="es-ES" dirty="0"/>
+              </a:p>
+              <a:p>
+                <a:pPr marL="171450" indent="-171450">
+                  <a:buFont typeface="Arial" panose="020B0604020202020204" pitchFamily="34" charset="0"/>
+                  <a:buChar char="•"/>
+                </a:pPr>
+                <a:r>
+                  <a:rPr lang="es-ES" dirty="0" err="1"/>
+                  <a:t>For</a:t>
+                </a:r>
+                <a:r>
+                  <a:rPr lang="es-ES" dirty="0"/>
+                  <a:t> </a:t>
+                </a:r>
+                <a:r>
+                  <a:rPr lang="es-ES" dirty="0" err="1"/>
+                  <a:t>each</a:t>
+                </a:r>
+                <a:r>
+                  <a:rPr lang="es-ES" dirty="0"/>
+                  <a:t> </a:t>
+                </a:r>
+                <a:r>
+                  <a:rPr lang="es-ES" dirty="0" err="1"/>
+                  <a:t>metabolite</a:t>
+                </a:r>
+                <a:r>
+                  <a:rPr lang="es-ES" dirty="0"/>
+                  <a:t> </a:t>
+                </a:r>
+                <a:r>
+                  <a:rPr lang="es-ES" sz="1200" i="0" kern="1200">
+                    <a:solidFill>
+                      <a:schemeClr val="tx1"/>
+                    </a:solidFill>
+                    <a:latin typeface="+mn-lt"/>
+                    <a:ea typeface="+mn-ea"/>
+                    <a:cs typeface="+mn-cs"/>
+                  </a:rPr>
+                  <a:t>𝑚</a:t>
+                </a:r>
+                <a:r>
+                  <a:rPr lang="es-ES" dirty="0"/>
+                  <a:t>, </a:t>
+                </a:r>
+                <a:r>
+                  <a:rPr lang="es-ES" dirty="0" err="1"/>
+                  <a:t>list</a:t>
+                </a:r>
+                <a:r>
+                  <a:rPr lang="es-ES" dirty="0"/>
+                  <a:t> </a:t>
+                </a:r>
+                <a:r>
+                  <a:rPr lang="es-ES" dirty="0" err="1"/>
+                  <a:t>producers</a:t>
+                </a:r>
+                <a:r>
+                  <a:rPr lang="es-ES" dirty="0"/>
+                  <a:t> </a:t>
+                </a:r>
+                <a:r>
+                  <a:rPr lang="es-ES" sz="1200" i="0" kern="1200">
+                    <a:solidFill>
+                      <a:schemeClr val="tx1"/>
+                    </a:solidFill>
+                    <a:latin typeface="+mn-lt"/>
+                    <a:ea typeface="+mn-ea"/>
+                    <a:cs typeface="+mn-cs"/>
+                  </a:rPr>
+                  <a:t>𝑃</a:t>
+                </a:r>
+                <a:r>
+                  <a:rPr lang="es-ES" dirty="0"/>
+                  <a:t>(</a:t>
+                </a:r>
+                <a:r>
+                  <a:rPr lang="es-ES" dirty="0" err="1"/>
+                  <a:t>reactions</a:t>
+                </a:r>
+                <a:r>
+                  <a:rPr lang="es-ES" dirty="0"/>
+                  <a:t> </a:t>
+                </a:r>
+                <a:r>
+                  <a:rPr lang="es-ES" dirty="0" err="1"/>
+                  <a:t>with</a:t>
+                </a:r>
+                <a:r>
+                  <a:rPr lang="es-ES" dirty="0"/>
+                  <a:t> </a:t>
+                </a:r>
+                <a:r>
+                  <a:rPr lang="ar-AE" sz="1200" i="0" kern="1200">
+                    <a:solidFill>
+                      <a:schemeClr val="tx1"/>
+                    </a:solidFill>
+                    <a:latin typeface="+mn-lt"/>
+                    <a:ea typeface="+mn-ea"/>
+                    <a:cs typeface="+mn-cs"/>
+                  </a:rPr>
+                  <a:t>𝑆_(𝑚,𝑗)&gt;0</a:t>
+                </a:r>
+                <a:r>
+                  <a:rPr lang="ar-AE" dirty="0"/>
+                  <a:t>)</a:t>
+                </a:r>
+              </a:p>
+              <a:p>
+                <a:pPr marL="171450" indent="-171450">
+                  <a:buFont typeface="Arial" panose="020B0604020202020204" pitchFamily="34" charset="0"/>
+                  <a:buChar char="•"/>
+                </a:pPr>
+                <a:r>
+                  <a:rPr lang="es-ES" dirty="0" err="1"/>
+                  <a:t>List</a:t>
+                </a:r>
+                <a:r>
+                  <a:rPr lang="es-ES" dirty="0"/>
+                  <a:t> </a:t>
+                </a:r>
+                <a:r>
+                  <a:rPr lang="es-ES" dirty="0" err="1"/>
+                  <a:t>consumers</a:t>
+                </a:r>
+                <a:r>
+                  <a:rPr lang="es-ES" dirty="0"/>
+                  <a:t> </a:t>
+                </a:r>
+                <a:r>
+                  <a:rPr lang="es-ES" sz="1200" i="0" kern="1200">
+                    <a:solidFill>
+                      <a:schemeClr val="tx1"/>
+                    </a:solidFill>
+                    <a:latin typeface="+mn-lt"/>
+                    <a:ea typeface="+mn-ea"/>
+                    <a:cs typeface="+mn-cs"/>
+                  </a:rPr>
+                  <a:t>𝐶</a:t>
+                </a:r>
+                <a:r>
+                  <a:rPr lang="es-ES" dirty="0"/>
+                  <a:t>(</a:t>
+                </a:r>
+                <a:r>
+                  <a:rPr lang="es-ES" dirty="0" err="1"/>
+                  <a:t>reactions</a:t>
+                </a:r>
+                <a:r>
+                  <a:rPr lang="es-ES" dirty="0"/>
+                  <a:t> </a:t>
+                </a:r>
+                <a:r>
+                  <a:rPr lang="es-ES" dirty="0" err="1"/>
+                  <a:t>with</a:t>
+                </a:r>
+                <a:r>
+                  <a:rPr lang="es-ES" dirty="0"/>
+                  <a:t> </a:t>
+                </a:r>
+                <a:r>
+                  <a:rPr lang="ar-AE" sz="1200" i="0" kern="1200">
+                    <a:solidFill>
+                      <a:schemeClr val="tx1"/>
+                    </a:solidFill>
+                    <a:latin typeface="+mn-lt"/>
+                    <a:ea typeface="+mn-ea"/>
+                    <a:cs typeface="+mn-cs"/>
+                  </a:rPr>
+                  <a:t>𝑆_(𝑚,𝑗)&lt;0</a:t>
+                </a:r>
+                <a:r>
+                  <a:rPr lang="ar-AE" dirty="0"/>
+                  <a:t>)</a:t>
+                </a:r>
+              </a:p>
+              <a:p>
+                <a:pPr marL="171450" indent="-171450">
+                  <a:buFont typeface="Arial" panose="020B0604020202020204" pitchFamily="34" charset="0"/>
+                  <a:buChar char="•"/>
+                </a:pPr>
+                <a:r>
+                  <a:rPr lang="es-ES" dirty="0" err="1"/>
+                  <a:t>If</a:t>
+                </a:r>
+                <a:r>
+                  <a:rPr lang="es-ES" dirty="0"/>
+                  <a:t> </a:t>
+                </a:r>
+                <a:r>
+                  <a:rPr lang="es-ES" sz="1200" i="0" kern="1200">
+                    <a:solidFill>
+                      <a:schemeClr val="tx1"/>
+                    </a:solidFill>
+                    <a:latin typeface="+mn-lt"/>
+                    <a:ea typeface="+mn-ea"/>
+                    <a:cs typeface="+mn-cs"/>
+                  </a:rPr>
+                  <a:t>∣𝑃∣≥2</a:t>
+                </a:r>
+                <a:r>
+                  <a:rPr lang="es-ES" dirty="0"/>
+                  <a:t>and </a:t>
+                </a:r>
+                <a:r>
+                  <a:rPr lang="es-ES" sz="1200" i="0" kern="1200">
+                    <a:solidFill>
+                      <a:schemeClr val="tx1"/>
+                    </a:solidFill>
+                    <a:latin typeface="+mn-lt"/>
+                    <a:ea typeface="+mn-ea"/>
+                    <a:cs typeface="+mn-cs"/>
+                  </a:rPr>
+                  <a:t>∣𝐶∣≥1</a:t>
+                </a:r>
+                <a:r>
+                  <a:rPr lang="es-ES" dirty="0"/>
+                  <a:t>, </a:t>
+                </a:r>
+                <a:r>
+                  <a:rPr lang="es-ES" dirty="0" err="1"/>
+                  <a:t>check</a:t>
+                </a:r>
+                <a:r>
+                  <a:rPr lang="es-ES" dirty="0"/>
+                  <a:t> candidate outputs </a:t>
+                </a:r>
+                <a:r>
+                  <a:rPr lang="ar-AE" sz="1200" i="0" kern="1200">
+                    <a:solidFill>
+                      <a:schemeClr val="tx1"/>
+                    </a:solidFill>
+                    <a:latin typeface="+mn-lt"/>
+                    <a:ea typeface="+mn-ea"/>
+                    <a:cs typeface="+mn-cs"/>
+                  </a:rPr>
+                  <a:t>𝑟_3∈𝐶</a:t>
+                </a:r>
+                <a:endParaRPr lang="ar-AE" dirty="0"/>
+              </a:p>
+              <a:p>
+                <a:pPr marL="171450" indent="-171450">
+                  <a:buFont typeface="Arial" panose="020B0604020202020204" pitchFamily="34" charset="0"/>
+                  <a:buChar char="•"/>
+                </a:pPr>
+                <a:r>
+                  <a:rPr lang="es-ES" dirty="0" err="1"/>
+                  <a:t>Prefer</a:t>
+                </a:r>
+                <a:r>
+                  <a:rPr lang="es-ES" dirty="0"/>
+                  <a:t> cases </a:t>
+                </a:r>
+                <a:r>
+                  <a:rPr lang="es-ES" dirty="0" err="1"/>
+                  <a:t>where</a:t>
+                </a:r>
+                <a:r>
+                  <a:rPr lang="es-ES" dirty="0"/>
+                  <a:t> </a:t>
+                </a:r>
+                <a:r>
+                  <a:rPr lang="es-ES" sz="1200" i="0" kern="1200">
+                    <a:solidFill>
+                      <a:schemeClr val="tx1"/>
+                    </a:solidFill>
+                    <a:latin typeface="+mn-lt"/>
+                    <a:ea typeface="+mn-ea"/>
+                    <a:cs typeface="+mn-cs"/>
+                  </a:rPr>
+                  <a:t>𝑚</a:t>
+                </a:r>
+                <a:r>
+                  <a:rPr lang="es-ES" dirty="0"/>
+                  <a:t>has </a:t>
+                </a:r>
+                <a:r>
+                  <a:rPr lang="es-ES" b="1" dirty="0" err="1"/>
+                  <a:t>exactly</a:t>
+                </a:r>
+                <a:r>
+                  <a:rPr lang="es-ES" dirty="0"/>
+                  <a:t> 2 </a:t>
+                </a:r>
+                <a:r>
+                  <a:rPr lang="es-ES" dirty="0" err="1"/>
+                  <a:t>producers</a:t>
+                </a:r>
+                <a:r>
+                  <a:rPr lang="es-ES" dirty="0"/>
+                  <a:t> and 1 </a:t>
+                </a:r>
+                <a:r>
+                  <a:rPr lang="es-ES" dirty="0" err="1"/>
+                  <a:t>consumer</a:t>
+                </a:r>
+                <a:r>
+                  <a:rPr lang="es-ES" dirty="0"/>
+                  <a:t> (</a:t>
+                </a:r>
+                <a:r>
+                  <a:rPr lang="es-ES" dirty="0" err="1"/>
+                  <a:t>tightest</a:t>
+                </a:r>
+                <a:r>
+                  <a:rPr lang="es-ES" dirty="0"/>
+                  <a:t> “</a:t>
+                </a:r>
+                <a:r>
+                  <a:rPr lang="es-ES" dirty="0" err="1"/>
+                  <a:t>adder</a:t>
+                </a:r>
+                <a:r>
+                  <a:rPr lang="es-ES" dirty="0"/>
+                  <a:t>”)</a:t>
+                </a:r>
+              </a:p>
+              <a:p>
+                <a:pPr marL="171450" indent="-171450">
+                  <a:buFont typeface="Arial" panose="020B0604020202020204" pitchFamily="34" charset="0"/>
+                  <a:buChar char="•"/>
+                </a:pPr>
+                <a:r>
+                  <a:rPr lang="es-ES" dirty="0" err="1"/>
+                  <a:t>Intersect</a:t>
+                </a:r>
+                <a:r>
+                  <a:rPr lang="es-ES" dirty="0"/>
+                  <a:t> </a:t>
+                </a:r>
+                <a:r>
+                  <a:rPr lang="es-ES" dirty="0" err="1"/>
+                  <a:t>producers</a:t>
+                </a:r>
+                <a:r>
+                  <a:rPr lang="es-ES" dirty="0"/>
+                  <a:t> </a:t>
+                </a:r>
+                <a:r>
+                  <a:rPr lang="es-ES" dirty="0" err="1"/>
+                  <a:t>with</a:t>
+                </a:r>
+                <a:r>
+                  <a:rPr lang="es-ES" dirty="0"/>
+                  <a:t> </a:t>
+                </a:r>
+                <a:r>
+                  <a:rPr lang="es-ES" dirty="0" err="1"/>
+                  <a:t>your</a:t>
+                </a:r>
+                <a:r>
+                  <a:rPr lang="es-ES" dirty="0"/>
+                  <a:t> </a:t>
+                </a:r>
+                <a:r>
+                  <a:rPr lang="es-ES" b="1" dirty="0"/>
+                  <a:t>single-gene </a:t>
+                </a:r>
+                <a:r>
+                  <a:rPr lang="es-ES" b="1" dirty="0" err="1"/>
+                  <a:t>reaction</a:t>
+                </a:r>
+                <a:r>
+                  <a:rPr lang="es-ES" b="1" dirty="0"/>
+                  <a:t> </a:t>
+                </a:r>
+                <a:r>
+                  <a:rPr lang="es-ES" b="1" dirty="0" err="1"/>
+                  <a:t>list</a:t>
+                </a:r>
+                <a:r>
+                  <a:rPr lang="es-ES" dirty="0"/>
+                  <a:t> (</a:t>
+                </a:r>
+                <a:r>
+                  <a:rPr lang="es-ES" dirty="0" err="1"/>
+                  <a:t>your</a:t>
+                </a:r>
+                <a:r>
+                  <a:rPr lang="es-ES" dirty="0"/>
+                  <a:t> </a:t>
+                </a:r>
+                <a:r>
+                  <a:rPr lang="es-ES" dirty="0" err="1"/>
+                  <a:t>current</a:t>
+                </a:r>
+                <a:r>
+                  <a:rPr lang="es-ES" dirty="0"/>
+                  <a:t> </a:t>
+                </a:r>
+                <a:r>
+                  <a:rPr lang="es-ES" dirty="0" err="1"/>
+                  <a:t>code</a:t>
+                </a:r>
+                <a:r>
+                  <a:rPr lang="es-ES" dirty="0"/>
+                  <a:t> </a:t>
+                </a:r>
+                <a:r>
+                  <a:rPr lang="es-ES" dirty="0" err="1"/>
+                  <a:t>already</a:t>
+                </a:r>
+                <a:r>
+                  <a:rPr lang="es-ES" dirty="0"/>
+                  <a:t> </a:t>
+                </a:r>
+                <a:r>
+                  <a:rPr lang="es-ES" dirty="0" err="1"/>
+                  <a:t>gives</a:t>
+                </a:r>
+                <a:r>
+                  <a:rPr lang="es-ES" dirty="0"/>
+                  <a:t> </a:t>
+                </a:r>
+                <a:r>
+                  <a:rPr lang="es-ES" dirty="0" err="1"/>
+                  <a:t>that</a:t>
+                </a:r>
+                <a:r>
+                  <a:rPr lang="es-ES" dirty="0"/>
+                  <a:t>)</a:t>
+                </a:r>
+              </a:p>
+              <a:p>
+                <a:endParaRPr lang="en-US" dirty="0"/>
+              </a:p>
+            </p:txBody>
+          </p:sp>
+        </mc:Fallback>
+      </mc:AlternateContent>
+      <p:sp>
+        <p:nvSpPr>
+          <p:cNvPr id="4" name="Slide Number Placeholder 3"/>
+          <p:cNvSpPr>
+            <a:spLocks noGrp="1"/>
+          </p:cNvSpPr>
+          <p:nvPr>
+            <p:ph type="sldNum" sz="quarter" idx="5"/>
+          </p:nvPr>
+        </p:nvSpPr>
+        <p:spPr/>
+        <p:txBody>
+          <a:bodyPr/>
+          <a:lstStyle/>
+          <a:p>
+            <a:fld id="{5F818A67-DE81-4BE5-A09A-01BC8A96D5BB}" type="slidenum">
+              <a:rPr lang="en-US" smtClean="0"/>
+              <a:t>3</a:t>
+            </a:fld>
+            <a:endParaRPr lang="en-US"/>
+          </a:p>
+        </p:txBody>
+      </p:sp>
+    </p:spTree>
+    <p:extLst>
+      <p:ext uri="{BB962C8B-B14F-4D97-AF65-F5344CB8AC3E}">
+        <p14:creationId xmlns:p14="http://schemas.microsoft.com/office/powerpoint/2010/main" val="1555917220"/>
+      </p:ext>
+    </p:extLst>
+  </p:cSld>
+  <p:clrMapOvr>
+    <a:masterClrMapping/>
+  </p:clrMapOvr>
+</p:notes>
+</file>
+
+<file path=ppt/notesSlides/notesSlide2.xml><?xml version="1.0" encoding="utf-8"?>
+<p:notes xmlns:a="http://schemas.openxmlformats.org/drawingml/2006/main" xmlns:r="http://schemas.openxmlformats.org/officeDocument/2006/relationships" xmlns:p="http://schemas.openxmlformats.org/presentationml/2006/main">
+  <p:cSld>
+    <p:spTree>
+      <p:nvGrpSpPr>
+        <p:cNvPr id="1" name="">
+          <a:extLst>
+            <a:ext uri="{FF2B5EF4-FFF2-40B4-BE49-F238E27FC236}">
+              <a16:creationId xmlns:a16="http://schemas.microsoft.com/office/drawing/2014/main" id="{CC905572-6063-7C16-16E8-29879B1D7BCB}"/>
+            </a:ext>
+          </a:extLst>
+        </p:cNvPr>
+        <p:cNvGrpSpPr/>
+        <p:nvPr/>
+      </p:nvGrpSpPr>
+      <p:grpSpPr>
+        <a:xfrm>
+          <a:off x="0" y="0"/>
+          <a:ext cx="0" cy="0"/>
+          <a:chOff x="0" y="0"/>
+          <a:chExt cx="0" cy="0"/>
+        </a:xfrm>
+      </p:grpSpPr>
+      <p:sp>
+        <p:nvSpPr>
+          <p:cNvPr id="2" name="Slide Image Placeholder 1">
+            <a:extLst>
+              <a:ext uri="{FF2B5EF4-FFF2-40B4-BE49-F238E27FC236}">
+                <a16:creationId xmlns:a16="http://schemas.microsoft.com/office/drawing/2014/main" id="{422EE637-7715-1373-4493-02CFD416B33F}"/>
+              </a:ext>
+            </a:extLst>
+          </p:cNvPr>
+          <p:cNvSpPr>
+            <a:spLocks noGrp="1" noRot="1" noChangeAspect="1"/>
+          </p:cNvSpPr>
+          <p:nvPr>
+            <p:ph type="sldImg"/>
+          </p:nvPr>
+        </p:nvSpPr>
+        <p:spPr/>
+      </p:sp>
+      <mc:AlternateContent xmlns:mc="http://schemas.openxmlformats.org/markup-compatibility/2006" xmlns:a14="http://schemas.microsoft.com/office/drawing/2010/main">
+        <mc:Choice Requires="a14">
+          <p:sp>
+            <p:nvSpPr>
+              <p:cNvPr id="3" name="Notes Placeholder 2">
+                <a:extLst>
+                  <a:ext uri="{FF2B5EF4-FFF2-40B4-BE49-F238E27FC236}">
+                    <a16:creationId xmlns:a16="http://schemas.microsoft.com/office/drawing/2014/main" id="{608074F7-E0BB-400B-67BA-E0BFC59D701B}"/>
+                  </a:ext>
+                </a:extLst>
+              </p:cNvPr>
+              <p:cNvSpPr>
+                <a:spLocks noGrp="1"/>
+              </p:cNvSpPr>
+              <p:nvPr>
+                <p:ph type="body" idx="1"/>
+              </p:nvPr>
+            </p:nvSpPr>
+            <p:spPr/>
+            <p:txBody>
+              <a:bodyPr/>
+              <a:lstStyle/>
+              <a:p>
+                <a:r>
+                  <a:rPr lang="es-ES" dirty="0" err="1"/>
+                  <a:t>Algorithm</a:t>
+                </a:r>
+                <a:endParaRPr lang="es-ES" dirty="0"/>
+              </a:p>
+              <a:p>
+                <a:pPr marL="171450" indent="-171450">
+                  <a:buFont typeface="Arial" panose="020B0604020202020204" pitchFamily="34" charset="0"/>
+                  <a:buChar char="•"/>
+                </a:pPr>
+                <a:r>
+                  <a:rPr lang="es-ES" dirty="0" err="1"/>
+                  <a:t>For</a:t>
+                </a:r>
+                <a:r>
+                  <a:rPr lang="es-ES" dirty="0"/>
+                  <a:t> </a:t>
+                </a:r>
+                <a:r>
+                  <a:rPr lang="es-ES" dirty="0" err="1"/>
+                  <a:t>each</a:t>
+                </a:r>
+                <a:r>
+                  <a:rPr lang="es-ES" dirty="0"/>
+                  <a:t> </a:t>
+                </a:r>
+                <a:r>
+                  <a:rPr lang="es-ES" dirty="0" err="1"/>
+                  <a:t>metabolite</a:t>
+                </a:r>
+                <a:r>
+                  <a:rPr lang="es-ES" dirty="0"/>
+                  <a:t> </a:t>
+                </a:r>
+                <a14:m>
+                  <m:oMath xmlns:m="http://schemas.openxmlformats.org/officeDocument/2006/math">
+                    <m:r>
+                      <a:rPr lang="es-ES" sz="1200" i="1" kern="1200">
+                        <a:solidFill>
+                          <a:schemeClr val="tx1"/>
+                        </a:solidFill>
+                        <a:latin typeface="Cambria Math" panose="02040503050406030204" pitchFamily="18" charset="0"/>
+                        <a:ea typeface="+mn-ea"/>
+                        <a:cs typeface="+mn-cs"/>
+                      </a:rPr>
+                      <m:t>𝑚</m:t>
+                    </m:r>
+                  </m:oMath>
+                </a14:m>
+                <a:r>
+                  <a:rPr lang="es-ES" dirty="0"/>
+                  <a:t>, </a:t>
+                </a:r>
+                <a:r>
+                  <a:rPr lang="es-ES" dirty="0" err="1"/>
+                  <a:t>list</a:t>
+                </a:r>
+                <a:r>
+                  <a:rPr lang="es-ES" dirty="0"/>
+                  <a:t> </a:t>
+                </a:r>
+                <a:r>
+                  <a:rPr lang="es-ES" dirty="0" err="1"/>
+                  <a:t>producers</a:t>
+                </a:r>
+                <a:r>
+                  <a:rPr lang="es-ES" dirty="0"/>
+                  <a:t> </a:t>
+                </a:r>
+                <a14:m>
+                  <m:oMath xmlns:m="http://schemas.openxmlformats.org/officeDocument/2006/math">
+                    <m:r>
+                      <a:rPr lang="es-ES" sz="1200" i="1" kern="1200">
+                        <a:solidFill>
+                          <a:schemeClr val="tx1"/>
+                        </a:solidFill>
+                        <a:latin typeface="Cambria Math" panose="02040503050406030204" pitchFamily="18" charset="0"/>
+                        <a:ea typeface="+mn-ea"/>
+                        <a:cs typeface="+mn-cs"/>
+                      </a:rPr>
+                      <m:t>𝑃</m:t>
+                    </m:r>
+                  </m:oMath>
+                </a14:m>
+                <a:r>
+                  <a:rPr lang="es-ES" dirty="0"/>
+                  <a:t>(</a:t>
+                </a:r>
+                <a:r>
+                  <a:rPr lang="es-ES" dirty="0" err="1"/>
+                  <a:t>reactions</a:t>
+                </a:r>
+                <a:r>
+                  <a:rPr lang="es-ES" dirty="0"/>
+                  <a:t> </a:t>
+                </a:r>
+                <a:r>
+                  <a:rPr lang="es-ES" dirty="0" err="1"/>
+                  <a:t>with</a:t>
+                </a:r>
+                <a:r>
+                  <a:rPr lang="es-ES" dirty="0"/>
+                  <a:t> </a:t>
+                </a:r>
+                <a14:m>
+                  <m:oMath xmlns:m="http://schemas.openxmlformats.org/officeDocument/2006/math">
+                    <m:sSub>
+                      <m:sSubPr>
+                        <m:ctrlPr>
+                          <a:rPr lang="ar-AE" sz="1200" i="1" kern="1200">
+                            <a:solidFill>
+                              <a:schemeClr val="tx1"/>
+                            </a:solidFill>
+                            <a:latin typeface="Cambria Math" panose="02040503050406030204" pitchFamily="18" charset="0"/>
+                            <a:ea typeface="+mn-ea"/>
+                            <a:cs typeface="+mn-cs"/>
+                          </a:rPr>
+                        </m:ctrlPr>
+                      </m:sSubPr>
+                      <m:e>
+                        <m:r>
+                          <a:rPr lang="ar-AE" sz="1200" i="1" kern="1200">
+                            <a:solidFill>
+                              <a:schemeClr val="tx1"/>
+                            </a:solidFill>
+                            <a:latin typeface="Cambria Math" panose="02040503050406030204" pitchFamily="18" charset="0"/>
+                            <a:ea typeface="+mn-ea"/>
+                            <a:cs typeface="+mn-cs"/>
+                          </a:rPr>
+                          <m:t>𝑆</m:t>
+                        </m:r>
+                      </m:e>
+                      <m:sub>
+                        <m:r>
+                          <a:rPr lang="ar-AE" sz="1200" i="1" kern="1200">
+                            <a:solidFill>
+                              <a:schemeClr val="tx1"/>
+                            </a:solidFill>
+                            <a:latin typeface="Cambria Math" panose="02040503050406030204" pitchFamily="18" charset="0"/>
+                            <a:ea typeface="+mn-ea"/>
+                            <a:cs typeface="+mn-cs"/>
+                          </a:rPr>
+                          <m:t>𝑚</m:t>
+                        </m:r>
+                        <m:r>
+                          <a:rPr lang="ar-AE" sz="1200" i="0" kern="1200">
+                            <a:solidFill>
+                              <a:schemeClr val="tx1"/>
+                            </a:solidFill>
+                            <a:latin typeface="Cambria Math" panose="02040503050406030204" pitchFamily="18" charset="0"/>
+                            <a:ea typeface="+mn-ea"/>
+                            <a:cs typeface="+mn-cs"/>
+                          </a:rPr>
+                          <m:t>,</m:t>
+                        </m:r>
+                        <m:r>
+                          <a:rPr lang="ar-AE" sz="1200" i="1" kern="1200">
+                            <a:solidFill>
+                              <a:schemeClr val="tx1"/>
+                            </a:solidFill>
+                            <a:latin typeface="Cambria Math" panose="02040503050406030204" pitchFamily="18" charset="0"/>
+                            <a:ea typeface="+mn-ea"/>
+                            <a:cs typeface="+mn-cs"/>
+                          </a:rPr>
+                          <m:t>𝑗</m:t>
+                        </m:r>
+                      </m:sub>
+                    </m:sSub>
+                    <m:r>
+                      <a:rPr lang="ar-AE" sz="1200" i="0" kern="1200">
+                        <a:solidFill>
+                          <a:schemeClr val="tx1"/>
+                        </a:solidFill>
+                        <a:latin typeface="Cambria Math" panose="02040503050406030204" pitchFamily="18" charset="0"/>
+                        <a:ea typeface="+mn-ea"/>
+                        <a:cs typeface="+mn-cs"/>
+                      </a:rPr>
+                      <m:t>&gt;</m:t>
+                    </m:r>
+                    <m:r>
+                      <a:rPr lang="ar-AE" sz="1200" i="0" kern="1200">
+                        <a:solidFill>
+                          <a:schemeClr val="tx1"/>
+                        </a:solidFill>
+                        <a:latin typeface="Cambria Math" panose="02040503050406030204" pitchFamily="18" charset="0"/>
+                        <a:ea typeface="+mn-ea"/>
+                        <a:cs typeface="+mn-cs"/>
+                      </a:rPr>
+                      <m:t>0</m:t>
+                    </m:r>
+                  </m:oMath>
+                </a14:m>
+                <a:r>
+                  <a:rPr lang="ar-AE" dirty="0"/>
+                  <a:t>)</a:t>
+                </a:r>
+              </a:p>
+              <a:p>
+                <a:pPr marL="171450" indent="-171450">
+                  <a:buFont typeface="Arial" panose="020B0604020202020204" pitchFamily="34" charset="0"/>
+                  <a:buChar char="•"/>
+                </a:pPr>
+                <a:r>
+                  <a:rPr lang="es-ES" dirty="0" err="1"/>
+                  <a:t>List</a:t>
+                </a:r>
+                <a:r>
+                  <a:rPr lang="es-ES" dirty="0"/>
+                  <a:t> </a:t>
+                </a:r>
+                <a:r>
+                  <a:rPr lang="es-ES" dirty="0" err="1"/>
+                  <a:t>consumers</a:t>
+                </a:r>
+                <a:r>
+                  <a:rPr lang="es-ES" dirty="0"/>
+                  <a:t> </a:t>
+                </a:r>
+                <a14:m>
+                  <m:oMath xmlns:m="http://schemas.openxmlformats.org/officeDocument/2006/math">
+                    <m:r>
+                      <a:rPr lang="es-ES" sz="1200" i="1" kern="1200">
+                        <a:solidFill>
+                          <a:schemeClr val="tx1"/>
+                        </a:solidFill>
+                        <a:latin typeface="Cambria Math" panose="02040503050406030204" pitchFamily="18" charset="0"/>
+                        <a:ea typeface="+mn-ea"/>
+                        <a:cs typeface="+mn-cs"/>
+                      </a:rPr>
+                      <m:t>𝐶</m:t>
+                    </m:r>
+                  </m:oMath>
+                </a14:m>
+                <a:r>
+                  <a:rPr lang="es-ES" dirty="0"/>
+                  <a:t>(</a:t>
+                </a:r>
+                <a:r>
+                  <a:rPr lang="es-ES" dirty="0" err="1"/>
+                  <a:t>reactions</a:t>
+                </a:r>
+                <a:r>
+                  <a:rPr lang="es-ES" dirty="0"/>
+                  <a:t> </a:t>
+                </a:r>
+                <a:r>
+                  <a:rPr lang="es-ES" dirty="0" err="1"/>
+                  <a:t>with</a:t>
+                </a:r>
+                <a:r>
+                  <a:rPr lang="es-ES" dirty="0"/>
+                  <a:t> </a:t>
+                </a:r>
+                <a14:m>
+                  <m:oMath xmlns:m="http://schemas.openxmlformats.org/officeDocument/2006/math">
+                    <m:sSub>
+                      <m:sSubPr>
+                        <m:ctrlPr>
+                          <a:rPr lang="ar-AE" sz="1200" i="1" kern="1200">
+                            <a:solidFill>
+                              <a:schemeClr val="tx1"/>
+                            </a:solidFill>
+                            <a:latin typeface="Cambria Math" panose="02040503050406030204" pitchFamily="18" charset="0"/>
+                            <a:ea typeface="+mn-ea"/>
+                            <a:cs typeface="+mn-cs"/>
+                          </a:rPr>
+                        </m:ctrlPr>
+                      </m:sSubPr>
+                      <m:e>
+                        <m:r>
+                          <a:rPr lang="ar-AE" sz="1200" i="1" kern="1200">
+                            <a:solidFill>
+                              <a:schemeClr val="tx1"/>
+                            </a:solidFill>
+                            <a:latin typeface="Cambria Math" panose="02040503050406030204" pitchFamily="18" charset="0"/>
+                            <a:ea typeface="+mn-ea"/>
+                            <a:cs typeface="+mn-cs"/>
+                          </a:rPr>
+                          <m:t>𝑆</m:t>
+                        </m:r>
+                      </m:e>
+                      <m:sub>
+                        <m:r>
+                          <a:rPr lang="ar-AE" sz="1200" i="1" kern="1200">
+                            <a:solidFill>
+                              <a:schemeClr val="tx1"/>
+                            </a:solidFill>
+                            <a:latin typeface="Cambria Math" panose="02040503050406030204" pitchFamily="18" charset="0"/>
+                            <a:ea typeface="+mn-ea"/>
+                            <a:cs typeface="+mn-cs"/>
+                          </a:rPr>
+                          <m:t>𝑚</m:t>
+                        </m:r>
+                        <m:r>
+                          <a:rPr lang="ar-AE" sz="1200" i="0" kern="1200">
+                            <a:solidFill>
+                              <a:schemeClr val="tx1"/>
+                            </a:solidFill>
+                            <a:latin typeface="Cambria Math" panose="02040503050406030204" pitchFamily="18" charset="0"/>
+                            <a:ea typeface="+mn-ea"/>
+                            <a:cs typeface="+mn-cs"/>
+                          </a:rPr>
+                          <m:t>,</m:t>
+                        </m:r>
+                        <m:r>
+                          <a:rPr lang="ar-AE" sz="1200" i="1" kern="1200">
+                            <a:solidFill>
+                              <a:schemeClr val="tx1"/>
+                            </a:solidFill>
+                            <a:latin typeface="Cambria Math" panose="02040503050406030204" pitchFamily="18" charset="0"/>
+                            <a:ea typeface="+mn-ea"/>
+                            <a:cs typeface="+mn-cs"/>
+                          </a:rPr>
+                          <m:t>𝑗</m:t>
+                        </m:r>
+                      </m:sub>
+                    </m:sSub>
+                    <m:r>
+                      <a:rPr lang="ar-AE" sz="1200" i="0" kern="1200">
+                        <a:solidFill>
+                          <a:schemeClr val="tx1"/>
+                        </a:solidFill>
+                        <a:latin typeface="Cambria Math" panose="02040503050406030204" pitchFamily="18" charset="0"/>
+                        <a:ea typeface="+mn-ea"/>
+                        <a:cs typeface="+mn-cs"/>
+                      </a:rPr>
+                      <m:t>&lt;</m:t>
+                    </m:r>
+                    <m:r>
+                      <a:rPr lang="ar-AE" sz="1200" i="0" kern="1200">
+                        <a:solidFill>
+                          <a:schemeClr val="tx1"/>
+                        </a:solidFill>
+                        <a:latin typeface="Cambria Math" panose="02040503050406030204" pitchFamily="18" charset="0"/>
+                        <a:ea typeface="+mn-ea"/>
+                        <a:cs typeface="+mn-cs"/>
+                      </a:rPr>
+                      <m:t>0</m:t>
+                    </m:r>
+                  </m:oMath>
+                </a14:m>
+                <a:r>
+                  <a:rPr lang="ar-AE" dirty="0"/>
+                  <a:t>)</a:t>
+                </a:r>
+              </a:p>
+              <a:p>
+                <a:pPr marL="171450" indent="-171450">
+                  <a:buFont typeface="Arial" panose="020B0604020202020204" pitchFamily="34" charset="0"/>
+                  <a:buChar char="•"/>
+                </a:pPr>
+                <a:r>
+                  <a:rPr lang="es-ES" dirty="0" err="1"/>
+                  <a:t>If</a:t>
+                </a:r>
+                <a:r>
+                  <a:rPr lang="es-ES" dirty="0"/>
+                  <a:t> </a:t>
+                </a:r>
+                <a14:m>
+                  <m:oMath xmlns:m="http://schemas.openxmlformats.org/officeDocument/2006/math">
+                    <m:r>
+                      <a:rPr lang="es-ES" sz="1200" kern="1200">
+                        <a:solidFill>
+                          <a:schemeClr val="tx1"/>
+                        </a:solidFill>
+                        <a:latin typeface="Cambria Math" panose="02040503050406030204" pitchFamily="18" charset="0"/>
+                        <a:ea typeface="+mn-ea"/>
+                        <a:cs typeface="+mn-cs"/>
+                      </a:rPr>
+                      <m:t>∣</m:t>
+                    </m:r>
+                    <m:r>
+                      <a:rPr lang="es-ES" sz="1200" i="1" kern="1200">
+                        <a:solidFill>
+                          <a:schemeClr val="tx1"/>
+                        </a:solidFill>
+                        <a:latin typeface="Cambria Math" panose="02040503050406030204" pitchFamily="18" charset="0"/>
+                        <a:ea typeface="+mn-ea"/>
+                        <a:cs typeface="+mn-cs"/>
+                      </a:rPr>
+                      <m:t>𝑃</m:t>
+                    </m:r>
+                    <m:r>
+                      <a:rPr lang="es-ES" sz="1200" i="0" kern="1200">
+                        <a:solidFill>
+                          <a:schemeClr val="tx1"/>
+                        </a:solidFill>
+                        <a:latin typeface="Cambria Math" panose="02040503050406030204" pitchFamily="18" charset="0"/>
+                        <a:ea typeface="+mn-ea"/>
+                        <a:cs typeface="+mn-cs"/>
+                      </a:rPr>
+                      <m:t>∣≥</m:t>
+                    </m:r>
+                    <m:r>
+                      <a:rPr lang="es-ES" sz="1200" i="0" kern="1200">
+                        <a:solidFill>
+                          <a:schemeClr val="tx1"/>
+                        </a:solidFill>
+                        <a:latin typeface="Cambria Math" panose="02040503050406030204" pitchFamily="18" charset="0"/>
+                        <a:ea typeface="+mn-ea"/>
+                        <a:cs typeface="+mn-cs"/>
+                      </a:rPr>
+                      <m:t>2</m:t>
+                    </m:r>
+                  </m:oMath>
+                </a14:m>
+                <a:r>
+                  <a:rPr lang="es-ES" dirty="0"/>
+                  <a:t>and </a:t>
+                </a:r>
+                <a14:m>
+                  <m:oMath xmlns:m="http://schemas.openxmlformats.org/officeDocument/2006/math">
+                    <m:r>
+                      <a:rPr lang="es-ES" sz="1200" kern="1200">
+                        <a:solidFill>
+                          <a:schemeClr val="tx1"/>
+                        </a:solidFill>
+                        <a:latin typeface="Cambria Math" panose="02040503050406030204" pitchFamily="18" charset="0"/>
+                        <a:ea typeface="+mn-ea"/>
+                        <a:cs typeface="+mn-cs"/>
+                      </a:rPr>
+                      <m:t>∣</m:t>
+                    </m:r>
+                    <m:r>
+                      <a:rPr lang="es-ES" sz="1200" i="1" kern="1200">
+                        <a:solidFill>
+                          <a:schemeClr val="tx1"/>
+                        </a:solidFill>
+                        <a:latin typeface="Cambria Math" panose="02040503050406030204" pitchFamily="18" charset="0"/>
+                        <a:ea typeface="+mn-ea"/>
+                        <a:cs typeface="+mn-cs"/>
+                      </a:rPr>
+                      <m:t>𝐶</m:t>
+                    </m:r>
+                    <m:r>
+                      <a:rPr lang="es-ES" sz="1200" i="0" kern="1200">
+                        <a:solidFill>
+                          <a:schemeClr val="tx1"/>
+                        </a:solidFill>
+                        <a:latin typeface="Cambria Math" panose="02040503050406030204" pitchFamily="18" charset="0"/>
+                        <a:ea typeface="+mn-ea"/>
+                        <a:cs typeface="+mn-cs"/>
+                      </a:rPr>
+                      <m:t>∣≥</m:t>
+                    </m:r>
+                    <m:r>
+                      <a:rPr lang="es-ES" sz="1200" i="0" kern="1200">
+                        <a:solidFill>
+                          <a:schemeClr val="tx1"/>
+                        </a:solidFill>
+                        <a:latin typeface="Cambria Math" panose="02040503050406030204" pitchFamily="18" charset="0"/>
+                        <a:ea typeface="+mn-ea"/>
+                        <a:cs typeface="+mn-cs"/>
+                      </a:rPr>
+                      <m:t>1</m:t>
+                    </m:r>
+                  </m:oMath>
+                </a14:m>
+                <a:r>
+                  <a:rPr lang="es-ES" dirty="0"/>
+                  <a:t>, </a:t>
+                </a:r>
+                <a:r>
+                  <a:rPr lang="es-ES" dirty="0" err="1"/>
+                  <a:t>check</a:t>
+                </a:r>
+                <a:r>
+                  <a:rPr lang="es-ES" dirty="0"/>
+                  <a:t> candidate outputs </a:t>
+                </a:r>
+                <a14:m>
+                  <m:oMath xmlns:m="http://schemas.openxmlformats.org/officeDocument/2006/math">
+                    <m:sSub>
+                      <m:sSubPr>
+                        <m:ctrlPr>
+                          <a:rPr lang="ar-AE" sz="1200" i="1" kern="1200">
+                            <a:solidFill>
+                              <a:schemeClr val="tx1"/>
+                            </a:solidFill>
+                            <a:latin typeface="Cambria Math" panose="02040503050406030204" pitchFamily="18" charset="0"/>
+                            <a:ea typeface="+mn-ea"/>
+                            <a:cs typeface="+mn-cs"/>
+                          </a:rPr>
+                        </m:ctrlPr>
+                      </m:sSubPr>
+                      <m:e>
+                        <m:r>
+                          <a:rPr lang="ar-AE" sz="1200" i="1" kern="1200">
+                            <a:solidFill>
+                              <a:schemeClr val="tx1"/>
+                            </a:solidFill>
+                            <a:latin typeface="Cambria Math" panose="02040503050406030204" pitchFamily="18" charset="0"/>
+                            <a:ea typeface="+mn-ea"/>
+                            <a:cs typeface="+mn-cs"/>
+                          </a:rPr>
+                          <m:t>𝑟</m:t>
+                        </m:r>
+                      </m:e>
+                      <m:sub>
+                        <m:r>
+                          <a:rPr lang="ar-AE" sz="1200" i="0" kern="1200">
+                            <a:solidFill>
+                              <a:schemeClr val="tx1"/>
+                            </a:solidFill>
+                            <a:latin typeface="Cambria Math" panose="02040503050406030204" pitchFamily="18" charset="0"/>
+                            <a:ea typeface="+mn-ea"/>
+                            <a:cs typeface="+mn-cs"/>
+                          </a:rPr>
+                          <m:t>3</m:t>
+                        </m:r>
+                      </m:sub>
+                    </m:sSub>
+                    <m:r>
+                      <a:rPr lang="ar-AE" sz="1200" i="0" kern="1200">
+                        <a:solidFill>
+                          <a:schemeClr val="tx1"/>
+                        </a:solidFill>
+                        <a:latin typeface="Cambria Math" panose="02040503050406030204" pitchFamily="18" charset="0"/>
+                        <a:ea typeface="+mn-ea"/>
+                        <a:cs typeface="+mn-cs"/>
+                      </a:rPr>
+                      <m:t>∈</m:t>
+                    </m:r>
+                    <m:r>
+                      <a:rPr lang="ar-AE" sz="1200" i="1" kern="1200">
+                        <a:solidFill>
+                          <a:schemeClr val="tx1"/>
+                        </a:solidFill>
+                        <a:latin typeface="Cambria Math" panose="02040503050406030204" pitchFamily="18" charset="0"/>
+                        <a:ea typeface="+mn-ea"/>
+                        <a:cs typeface="+mn-cs"/>
+                      </a:rPr>
+                      <m:t>𝐶</m:t>
+                    </m:r>
+                  </m:oMath>
+                </a14:m>
+                <a:endParaRPr lang="ar-AE" dirty="0"/>
+              </a:p>
+              <a:p>
+                <a:pPr marL="171450" indent="-171450">
+                  <a:buFont typeface="Arial" panose="020B0604020202020204" pitchFamily="34" charset="0"/>
+                  <a:buChar char="•"/>
+                </a:pPr>
+                <a:r>
+                  <a:rPr lang="es-ES" dirty="0" err="1"/>
+                  <a:t>Prefer</a:t>
+                </a:r>
+                <a:r>
+                  <a:rPr lang="es-ES" dirty="0"/>
+                  <a:t> cases </a:t>
+                </a:r>
+                <a:r>
+                  <a:rPr lang="es-ES" dirty="0" err="1"/>
+                  <a:t>where</a:t>
+                </a:r>
+                <a:r>
+                  <a:rPr lang="es-ES" dirty="0"/>
+                  <a:t> </a:t>
+                </a:r>
+                <a14:m>
+                  <m:oMath xmlns:m="http://schemas.openxmlformats.org/officeDocument/2006/math">
+                    <m:r>
+                      <a:rPr lang="es-ES" sz="1200" i="1" kern="1200">
+                        <a:solidFill>
+                          <a:schemeClr val="tx1"/>
+                        </a:solidFill>
+                        <a:latin typeface="Cambria Math" panose="02040503050406030204" pitchFamily="18" charset="0"/>
+                        <a:ea typeface="+mn-ea"/>
+                        <a:cs typeface="+mn-cs"/>
+                      </a:rPr>
+                      <m:t>𝑚</m:t>
+                    </m:r>
+                  </m:oMath>
+                </a14:m>
+                <a:r>
+                  <a:rPr lang="es-ES" dirty="0"/>
+                  <a:t>has </a:t>
+                </a:r>
+                <a:r>
+                  <a:rPr lang="es-ES" b="1" dirty="0" err="1"/>
+                  <a:t>exactly</a:t>
+                </a:r>
+                <a:r>
+                  <a:rPr lang="es-ES" dirty="0"/>
+                  <a:t> 2 </a:t>
+                </a:r>
+                <a:r>
+                  <a:rPr lang="es-ES" dirty="0" err="1"/>
+                  <a:t>producers</a:t>
+                </a:r>
+                <a:r>
+                  <a:rPr lang="es-ES" dirty="0"/>
+                  <a:t> and 1 </a:t>
+                </a:r>
+                <a:r>
+                  <a:rPr lang="es-ES" dirty="0" err="1"/>
+                  <a:t>consumer</a:t>
+                </a:r>
+                <a:r>
+                  <a:rPr lang="es-ES" dirty="0"/>
+                  <a:t> (</a:t>
+                </a:r>
+                <a:r>
+                  <a:rPr lang="es-ES" dirty="0" err="1"/>
+                  <a:t>tightest</a:t>
+                </a:r>
+                <a:r>
+                  <a:rPr lang="es-ES" dirty="0"/>
+                  <a:t> “</a:t>
+                </a:r>
+                <a:r>
+                  <a:rPr lang="es-ES" dirty="0" err="1"/>
+                  <a:t>adder</a:t>
+                </a:r>
+                <a:r>
+                  <a:rPr lang="es-ES" dirty="0"/>
+                  <a:t>”)</a:t>
+                </a:r>
+              </a:p>
+              <a:p>
+                <a:pPr marL="171450" indent="-171450">
+                  <a:buFont typeface="Arial" panose="020B0604020202020204" pitchFamily="34" charset="0"/>
+                  <a:buChar char="•"/>
+                </a:pPr>
+                <a:r>
+                  <a:rPr lang="es-ES" dirty="0" err="1"/>
+                  <a:t>Intersect</a:t>
+                </a:r>
+                <a:r>
+                  <a:rPr lang="es-ES" dirty="0"/>
+                  <a:t> </a:t>
+                </a:r>
+                <a:r>
+                  <a:rPr lang="es-ES" dirty="0" err="1"/>
+                  <a:t>producers</a:t>
+                </a:r>
+                <a:r>
+                  <a:rPr lang="es-ES" dirty="0"/>
+                  <a:t> </a:t>
+                </a:r>
+                <a:r>
+                  <a:rPr lang="es-ES" dirty="0" err="1"/>
+                  <a:t>with</a:t>
+                </a:r>
+                <a:r>
+                  <a:rPr lang="es-ES" dirty="0"/>
+                  <a:t> </a:t>
+                </a:r>
+                <a:r>
+                  <a:rPr lang="es-ES" dirty="0" err="1"/>
+                  <a:t>your</a:t>
+                </a:r>
+                <a:r>
+                  <a:rPr lang="es-ES" dirty="0"/>
+                  <a:t> </a:t>
+                </a:r>
+                <a:r>
+                  <a:rPr lang="es-ES" b="1" dirty="0"/>
+                  <a:t>single-gene </a:t>
+                </a:r>
+                <a:r>
+                  <a:rPr lang="es-ES" b="1" dirty="0" err="1"/>
+                  <a:t>reaction</a:t>
+                </a:r>
+                <a:r>
+                  <a:rPr lang="es-ES" b="1" dirty="0"/>
+                  <a:t> </a:t>
+                </a:r>
+                <a:r>
+                  <a:rPr lang="es-ES" b="1" dirty="0" err="1"/>
+                  <a:t>list</a:t>
+                </a:r>
+                <a:r>
+                  <a:rPr lang="es-ES" dirty="0"/>
+                  <a:t> (</a:t>
+                </a:r>
+                <a:r>
+                  <a:rPr lang="es-ES" dirty="0" err="1"/>
+                  <a:t>your</a:t>
+                </a:r>
+                <a:r>
+                  <a:rPr lang="es-ES" dirty="0"/>
+                  <a:t> </a:t>
+                </a:r>
+                <a:r>
+                  <a:rPr lang="es-ES" dirty="0" err="1"/>
+                  <a:t>current</a:t>
+                </a:r>
+                <a:r>
+                  <a:rPr lang="es-ES" dirty="0"/>
+                  <a:t> </a:t>
+                </a:r>
+                <a:r>
+                  <a:rPr lang="es-ES" dirty="0" err="1"/>
+                  <a:t>code</a:t>
+                </a:r>
+                <a:r>
+                  <a:rPr lang="es-ES" dirty="0"/>
+                  <a:t> </a:t>
+                </a:r>
+                <a:r>
+                  <a:rPr lang="es-ES" dirty="0" err="1"/>
+                  <a:t>already</a:t>
+                </a:r>
+                <a:r>
+                  <a:rPr lang="es-ES" dirty="0"/>
+                  <a:t> </a:t>
+                </a:r>
+                <a:r>
+                  <a:rPr lang="es-ES" dirty="0" err="1"/>
+                  <a:t>gives</a:t>
+                </a:r>
+                <a:r>
+                  <a:rPr lang="es-ES" dirty="0"/>
+                  <a:t> </a:t>
+                </a:r>
+                <a:r>
+                  <a:rPr lang="es-ES" dirty="0" err="1"/>
+                  <a:t>that</a:t>
+                </a:r>
+                <a:r>
+                  <a:rPr lang="es-ES" dirty="0"/>
+                  <a:t>)</a:t>
+                </a:r>
+              </a:p>
+              <a:p>
+                <a:endParaRPr lang="en-US" dirty="0"/>
+              </a:p>
+            </p:txBody>
+          </p:sp>
+        </mc:Choice>
+        <mc:Fallback xmlns="">
           <p:sp>
             <p:nvSpPr>
               <p:cNvPr id="3" name="Notes Placeholder 2">
@@ -6358,8 +6363,8 @@
           </a:p>
         </p:txBody>
       </p:sp>
-      <mc:AlternateContent xmlns:mc="http://schemas.openxmlformats.org/markup-compatibility/2006">
-        <mc:Choice xmlns:a14="http://schemas.microsoft.com/office/drawing/2010/main" Requires="a14">
+      <mc:AlternateContent xmlns:mc="http://schemas.openxmlformats.org/markup-compatibility/2006" xmlns:a14="http://schemas.microsoft.com/office/drawing/2010/main">
+        <mc:Choice Requires="a14">
           <p:sp>
             <p:nvSpPr>
               <p:cNvPr id="4" name="TextBox 3">
@@ -6388,6 +6393,7 @@
               </a:bodyPr>
               <a:lstStyle/>
               <a:p>
+                <a:pPr/>
                 <a14:m>
                   <m:oMathPara xmlns:m="http://schemas.openxmlformats.org/officeDocument/2006/math">
                     <m:oMathParaPr>
@@ -6528,13 +6534,7 @@
                                       <a:rPr lang="de-DE" sz="2400" b="0" i="1" smtClean="0">
                                         <a:latin typeface="Cambria Math" panose="02040503050406030204" pitchFamily="18" charset="0"/>
                                       </a:rPr>
-                                      <m:t>1</m:t>
-                                    </m:r>
-                                    <m:r>
-                                      <a:rPr lang="de-DE" sz="2400" b="0" i="1" smtClean="0">
-                                        <a:latin typeface="Cambria Math" panose="02040503050406030204" pitchFamily="18" charset="0"/>
-                                      </a:rPr>
-                                      <m:t>,</m:t>
+                                      <m:t>1,</m:t>
                                     </m:r>
                                     <m:r>
                                       <m:rPr>
@@ -6607,13 +6607,7 @@
                                       <a:rPr lang="de-DE" sz="2400" b="0" i="1" smtClean="0">
                                         <a:latin typeface="Cambria Math" panose="02040503050406030204" pitchFamily="18" charset="0"/>
                                       </a:rPr>
-                                      <m:t>,</m:t>
-                                    </m:r>
-                                    <m:r>
-                                      <a:rPr lang="de-DE" sz="2400" b="0" i="1" smtClean="0">
-                                        <a:latin typeface="Cambria Math" panose="02040503050406030204" pitchFamily="18" charset="0"/>
-                                      </a:rPr>
-                                      <m:t>1</m:t>
+                                      <m:t>,1</m:t>
                                     </m:r>
                                   </m:sub>
                                 </m:sSub>
@@ -6731,7 +6725,7 @@
             </p:txBody>
           </p:sp>
         </mc:Choice>
-        <mc:Fallback>
+        <mc:Fallback xmlns="">
           <p:sp>
             <p:nvSpPr>
               <p:cNvPr id="4" name="TextBox 3">
@@ -6776,8 +6770,8 @@
           </p:sp>
         </mc:Fallback>
       </mc:AlternateContent>
-      <mc:AlternateContent xmlns:mc="http://schemas.openxmlformats.org/markup-compatibility/2006">
-        <mc:Choice xmlns:a14="http://schemas.microsoft.com/office/drawing/2010/main" Requires="a14">
+      <mc:AlternateContent xmlns:mc="http://schemas.openxmlformats.org/markup-compatibility/2006" xmlns:a14="http://schemas.microsoft.com/office/drawing/2010/main">
+        <mc:Choice Requires="a14">
           <p:sp>
             <p:nvSpPr>
               <p:cNvPr id="8" name="TextBox 7">
@@ -6806,6 +6800,7 @@
               </a:bodyPr>
               <a:lstStyle/>
               <a:p>
+                <a:pPr/>
                 <a14:m>
                   <m:oMathPara xmlns:m="http://schemas.openxmlformats.org/officeDocument/2006/math">
                     <m:oMathParaPr>
@@ -6972,13 +6967,7 @@
                         <a:rPr lang="de-DE" sz="2400" b="0" i="1" smtClean="0">
                           <a:latin typeface="Cambria Math" panose="02040503050406030204" pitchFamily="18" charset="0"/>
                         </a:rPr>
-                        <m:t>=</m:t>
-                      </m:r>
-                      <m:r>
-                        <a:rPr lang="de-DE" sz="2400" b="0" i="1" smtClean="0">
-                          <a:latin typeface="Cambria Math" panose="02040503050406030204" pitchFamily="18" charset="0"/>
-                        </a:rPr>
-                        <m:t>0</m:t>
+                        <m:t>=0</m:t>
                       </m:r>
                     </m:oMath>
                   </m:oMathPara>
@@ -6988,7 +6977,7 @@
             </p:txBody>
           </p:sp>
         </mc:Choice>
-        <mc:Fallback>
+        <mc:Fallback xmlns="">
           <p:sp>
             <p:nvSpPr>
               <p:cNvPr id="8" name="TextBox 7">
@@ -7033,8 +7022,8 @@
           </p:sp>
         </mc:Fallback>
       </mc:AlternateContent>
-      <mc:AlternateContent xmlns:mc="http://schemas.openxmlformats.org/markup-compatibility/2006">
-        <mc:Choice xmlns:a14="http://schemas.microsoft.com/office/drawing/2010/main" Requires="a14">
+      <mc:AlternateContent xmlns:mc="http://schemas.openxmlformats.org/markup-compatibility/2006" xmlns:a14="http://schemas.microsoft.com/office/drawing/2010/main">
+        <mc:Choice Requires="a14">
           <p:sp>
             <p:nvSpPr>
               <p:cNvPr id="9" name="TextBox 8">
@@ -7063,6 +7052,7 @@
               </a:bodyPr>
               <a:lstStyle/>
               <a:p>
+                <a:pPr/>
                 <a14:m>
                   <m:oMathPara xmlns:m="http://schemas.openxmlformats.org/officeDocument/2006/math">
                     <m:oMathParaPr>
@@ -7135,7 +7125,7 @@
             </p:txBody>
           </p:sp>
         </mc:Choice>
-        <mc:Fallback>
+        <mc:Fallback xmlns="">
           <p:sp>
             <p:nvSpPr>
               <p:cNvPr id="9" name="TextBox 8">
@@ -7180,8 +7170,8 @@
           </p:sp>
         </mc:Fallback>
       </mc:AlternateContent>
-      <mc:AlternateContent xmlns:mc="http://schemas.openxmlformats.org/markup-compatibility/2006">
-        <mc:Choice xmlns:a14="http://schemas.microsoft.com/office/drawing/2010/main" Requires="a14">
+      <mc:AlternateContent xmlns:mc="http://schemas.openxmlformats.org/markup-compatibility/2006" xmlns:a14="http://schemas.microsoft.com/office/drawing/2010/main">
+        <mc:Choice Requires="a14">
           <p:sp>
             <p:nvSpPr>
               <p:cNvPr id="10" name="TextBox 9">
@@ -7309,13 +7299,7 @@
                       <a:rPr lang="de-DE" sz="2400" b="0" i="1" smtClean="0">
                         <a:latin typeface="Cambria Math" panose="02040503050406030204" pitchFamily="18" charset="0"/>
                       </a:rPr>
-                      <m:t>+</m:t>
-                    </m:r>
-                    <m:r>
-                      <a:rPr lang="de-DE" sz="2400" b="0" i="1" smtClean="0">
-                        <a:latin typeface="Cambria Math" panose="02040503050406030204" pitchFamily="18" charset="0"/>
-                      </a:rPr>
-                      <m:t>2</m:t>
+                      <m:t>+2</m:t>
                     </m:r>
                     <m:sSub>
                       <m:sSubPr>
@@ -7428,19 +7412,7 @@
                         <a:rPr lang="de-DE" sz="2400" b="0" i="1" smtClean="0">
                           <a:latin typeface="Cambria Math" panose="02040503050406030204" pitchFamily="18" charset="0"/>
                         </a:rPr>
-                        <m:t>=</m:t>
-                      </m:r>
-                      <m:r>
-                        <a:rPr lang="de-DE" sz="2400" b="0" i="1" smtClean="0">
-                          <a:latin typeface="Cambria Math" panose="02040503050406030204" pitchFamily="18" charset="0"/>
-                        </a:rPr>
-                        <m:t>1</m:t>
-                      </m:r>
-                      <m:r>
-                        <a:rPr lang="de-DE" sz="2400" b="0" i="1" smtClean="0">
-                          <a:latin typeface="Cambria Math" panose="02040503050406030204" pitchFamily="18" charset="0"/>
-                        </a:rPr>
-                        <m:t>, </m:t>
+                        <m:t>=1, </m:t>
                       </m:r>
                     </m:oMath>
                   </m:oMathPara>
@@ -7485,13 +7457,7 @@
                             <a:rPr lang="de-DE" sz="2400" b="0" i="1" smtClean="0">
                               <a:latin typeface="Cambria Math" panose="02040503050406030204" pitchFamily="18" charset="0"/>
                             </a:rPr>
-                            <m:t>2</m:t>
-                          </m:r>
-                          <m:r>
-                            <a:rPr lang="de-DE" sz="2400" b="0" i="1" smtClean="0">
-                              <a:latin typeface="Cambria Math" panose="02040503050406030204" pitchFamily="18" charset="0"/>
-                            </a:rPr>
-                            <m:t>1</m:t>
+                            <m:t>21</m:t>
                           </m:r>
                         </m:sub>
                       </m:sSub>
@@ -7499,19 +7465,7 @@
                         <a:rPr lang="de-DE" sz="2400" b="0" i="1" smtClean="0">
                           <a:latin typeface="Cambria Math" panose="02040503050406030204" pitchFamily="18" charset="0"/>
                         </a:rPr>
-                        <m:t>=</m:t>
-                      </m:r>
-                      <m:r>
-                        <a:rPr lang="de-DE" sz="2400" b="0" i="1" smtClean="0">
-                          <a:latin typeface="Cambria Math" panose="02040503050406030204" pitchFamily="18" charset="0"/>
-                        </a:rPr>
-                        <m:t>2</m:t>
-                      </m:r>
-                      <m:r>
-                        <a:rPr lang="de-DE" sz="2400" b="0" i="1" smtClean="0">
-                          <a:latin typeface="Cambria Math" panose="02040503050406030204" pitchFamily="18" charset="0"/>
-                        </a:rPr>
-                        <m:t>,</m:t>
+                        <m:t>=2,</m:t>
                       </m:r>
                     </m:oMath>
                   </m:oMathPara>
@@ -7556,13 +7510,7 @@
                             <a:rPr lang="de-DE" sz="2400" b="0" i="1" smtClean="0">
                               <a:latin typeface="Cambria Math" panose="02040503050406030204" pitchFamily="18" charset="0"/>
                             </a:rPr>
-                            <m:t>3</m:t>
-                          </m:r>
-                          <m:r>
-                            <a:rPr lang="de-DE" sz="2400" b="0" i="1" smtClean="0">
-                              <a:latin typeface="Cambria Math" panose="02040503050406030204" pitchFamily="18" charset="0"/>
-                            </a:rPr>
-                            <m:t>1</m:t>
+                            <m:t>31</m:t>
                           </m:r>
                         </m:sub>
                       </m:sSub>
@@ -7570,13 +7518,7 @@
                         <a:rPr lang="de-DE" sz="2400" b="0" i="1" smtClean="0">
                           <a:latin typeface="Cambria Math" panose="02040503050406030204" pitchFamily="18" charset="0"/>
                         </a:rPr>
-                        <m:t>=-</m:t>
-                      </m:r>
-                      <m:r>
-                        <a:rPr lang="de-DE" sz="2400" b="0" i="1" smtClean="0">
-                          <a:latin typeface="Cambria Math" panose="02040503050406030204" pitchFamily="18" charset="0"/>
-                        </a:rPr>
-                        <m:t>1</m:t>
+                        <m:t>=−1</m:t>
                       </m:r>
                     </m:oMath>
                   </m:oMathPara>
@@ -7586,7 +7528,7 @@
             </p:txBody>
           </p:sp>
         </mc:Choice>
-        <mc:Fallback>
+        <mc:Fallback xmlns="">
           <p:sp>
             <p:nvSpPr>
               <p:cNvPr id="10" name="TextBox 9">
@@ -7916,8 +7858,8 @@
           </a:p>
         </p:txBody>
       </p:sp>
-      <mc:AlternateContent xmlns:mc="http://schemas.openxmlformats.org/markup-compatibility/2006">
-        <mc:Choice xmlns:a14="http://schemas.microsoft.com/office/drawing/2010/main" Requires="a14">
+      <mc:AlternateContent xmlns:mc="http://schemas.openxmlformats.org/markup-compatibility/2006" xmlns:a14="http://schemas.microsoft.com/office/drawing/2010/main">
+        <mc:Choice Requires="a14">
           <p:sp>
             <p:nvSpPr>
               <p:cNvPr id="50" name="TextBox 49">
@@ -8155,7 +8097,7 @@
             </p:txBody>
           </p:sp>
         </mc:Choice>
-        <mc:Fallback>
+        <mc:Fallback xmlns="">
           <p:sp>
             <p:nvSpPr>
               <p:cNvPr id="50" name="TextBox 49">
@@ -8200,8 +8142,8 @@
           </p:sp>
         </mc:Fallback>
       </mc:AlternateContent>
-      <mc:AlternateContent xmlns:mc="http://schemas.openxmlformats.org/markup-compatibility/2006">
-        <mc:Choice xmlns:a14="http://schemas.microsoft.com/office/drawing/2010/main" Requires="a14">
+      <mc:AlternateContent xmlns:mc="http://schemas.openxmlformats.org/markup-compatibility/2006" xmlns:a14="http://schemas.microsoft.com/office/drawing/2010/main">
+        <mc:Choice Requires="a14">
           <p:sp>
             <p:nvSpPr>
               <p:cNvPr id="51" name="TextBox 50">
@@ -8230,6 +8172,7 @@
               </a:bodyPr>
               <a:lstStyle/>
               <a:p>
+                <a:pPr/>
                 <a14:m>
                   <m:oMathPara xmlns:m="http://schemas.openxmlformats.org/officeDocument/2006/math">
                     <m:oMathParaPr>
@@ -8251,7 +8194,7 @@
             </p:txBody>
           </p:sp>
         </mc:Choice>
-        <mc:Fallback>
+        <mc:Fallback xmlns="">
           <p:sp>
             <p:nvSpPr>
               <p:cNvPr id="51" name="TextBox 50">
@@ -8756,8 +8699,8 @@
           </a:fontRef>
         </p:style>
       </p:cxnSp>
-      <mc:AlternateContent xmlns:mc="http://schemas.openxmlformats.org/markup-compatibility/2006">
-        <mc:Choice xmlns:a14="http://schemas.microsoft.com/office/drawing/2010/main" Requires="a14">
+      <mc:AlternateContent xmlns:mc="http://schemas.openxmlformats.org/markup-compatibility/2006" xmlns:a14="http://schemas.microsoft.com/office/drawing/2010/main">
+        <mc:Choice Requires="a14">
           <p:sp>
             <p:nvSpPr>
               <p:cNvPr id="31" name="TextBox 30">
@@ -8829,7 +8772,7 @@
             </p:txBody>
           </p:sp>
         </mc:Choice>
-        <mc:Fallback>
+        <mc:Fallback xmlns="">
           <p:sp>
             <p:nvSpPr>
               <p:cNvPr id="31" name="TextBox 30">
@@ -8874,8 +8817,8 @@
           </p:sp>
         </mc:Fallback>
       </mc:AlternateContent>
-      <mc:AlternateContent xmlns:mc="http://schemas.openxmlformats.org/markup-compatibility/2006">
-        <mc:Choice xmlns:a14="http://schemas.microsoft.com/office/drawing/2010/main" Requires="a14">
+      <mc:AlternateContent xmlns:mc="http://schemas.openxmlformats.org/markup-compatibility/2006" xmlns:a14="http://schemas.microsoft.com/office/drawing/2010/main">
+        <mc:Choice Requires="a14">
           <p:sp>
             <p:nvSpPr>
               <p:cNvPr id="32" name="TextBox 31">
@@ -8953,7 +8896,7 @@
             </p:txBody>
           </p:sp>
         </mc:Choice>
-        <mc:Fallback>
+        <mc:Fallback xmlns="">
           <p:sp>
             <p:nvSpPr>
               <p:cNvPr id="32" name="TextBox 31">
@@ -8998,8 +8941,8 @@
           </p:sp>
         </mc:Fallback>
       </mc:AlternateContent>
-      <mc:AlternateContent xmlns:mc="http://schemas.openxmlformats.org/markup-compatibility/2006">
-        <mc:Choice xmlns:a14="http://schemas.microsoft.com/office/drawing/2010/main" Requires="a14">
+      <mc:AlternateContent xmlns:mc="http://schemas.openxmlformats.org/markup-compatibility/2006" xmlns:a14="http://schemas.microsoft.com/office/drawing/2010/main">
+        <mc:Choice Requires="a14">
           <p:sp>
             <p:nvSpPr>
               <p:cNvPr id="33" name="TextBox 32">
@@ -9071,7 +9014,7 @@
             </p:txBody>
           </p:sp>
         </mc:Choice>
-        <mc:Fallback>
+        <mc:Fallback xmlns="">
           <p:sp>
             <p:nvSpPr>
               <p:cNvPr id="33" name="TextBox 32">
@@ -9116,8 +9059,8 @@
           </p:sp>
         </mc:Fallback>
       </mc:AlternateContent>
-      <mc:AlternateContent xmlns:mc="http://schemas.openxmlformats.org/markup-compatibility/2006">
-        <mc:Choice xmlns:a14="http://schemas.microsoft.com/office/drawing/2010/main" Requires="a14">
+      <mc:AlternateContent xmlns:mc="http://schemas.openxmlformats.org/markup-compatibility/2006" xmlns:a14="http://schemas.microsoft.com/office/drawing/2010/main">
+        <mc:Choice Requires="a14">
           <p:sp>
             <p:nvSpPr>
               <p:cNvPr id="35" name="TextBox 34">
@@ -9186,7 +9129,7 @@
             </p:txBody>
           </p:sp>
         </mc:Choice>
-        <mc:Fallback>
+        <mc:Fallback xmlns="">
           <p:sp>
             <p:nvSpPr>
               <p:cNvPr id="35" name="TextBox 34">
@@ -9286,10 +9229,19 @@
                         </m:e>
                         <m:sub>
                           <m:r>
+                            <m:rPr>
+                              <m:sty m:val="p"/>
+                            </m:rPr>
                             <a:rPr lang="de-DE" sz="2400" b="0" i="1" smtClean="0">
                               <a:latin typeface="Cambria Math" panose="02040503050406030204" pitchFamily="18" charset="0"/>
                             </a:rPr>
-                            <m:t>𝑖𝑘</m:t>
+                            <m:t>z</m:t>
+                          </m:r>
+                          <m:r>
+                            <a:rPr lang="de-DE" sz="2400" b="0" i="1" smtClean="0">
+                              <a:latin typeface="Cambria Math" panose="02040503050406030204" pitchFamily="18" charset="0"/>
+                            </a:rPr>
+                            <m:t>𝑘</m:t>
                           </m:r>
                         </m:sub>
                       </m:sSub>
@@ -9346,8 +9298,8 @@
           </p:sp>
         </mc:Fallback>
       </mc:AlternateContent>
-      <mc:AlternateContent xmlns:mc="http://schemas.openxmlformats.org/markup-compatibility/2006">
-        <mc:Choice xmlns:a14="http://schemas.microsoft.com/office/drawing/2010/main" Requires="a14">
+      <mc:AlternateContent xmlns:mc="http://schemas.openxmlformats.org/markup-compatibility/2006" xmlns:a14="http://schemas.microsoft.com/office/drawing/2010/main">
+        <mc:Choice Requires="a14">
           <p:sp>
             <p:nvSpPr>
               <p:cNvPr id="40" name="TextBox 39">
@@ -9425,7 +9377,7 @@
             </p:txBody>
           </p:sp>
         </mc:Choice>
-        <mc:Fallback>
+        <mc:Fallback xmlns="">
           <p:sp>
             <p:nvSpPr>
               <p:cNvPr id="40" name="TextBox 39">
@@ -9470,8 +9422,8 @@
           </p:sp>
         </mc:Fallback>
       </mc:AlternateContent>
-      <mc:AlternateContent xmlns:mc="http://schemas.openxmlformats.org/markup-compatibility/2006">
-        <mc:Choice xmlns:a14="http://schemas.microsoft.com/office/drawing/2010/main" Requires="a14">
+      <mc:AlternateContent xmlns:mc="http://schemas.openxmlformats.org/markup-compatibility/2006" xmlns:a14="http://schemas.microsoft.com/office/drawing/2010/main">
+        <mc:Choice Requires="a14">
           <p:sp>
             <p:nvSpPr>
               <p:cNvPr id="41" name="TextBox 40">
@@ -9543,7 +9495,7 @@
             </p:txBody>
           </p:sp>
         </mc:Choice>
-        <mc:Fallback>
+        <mc:Fallback xmlns="">
           <p:sp>
             <p:nvSpPr>
               <p:cNvPr id="41" name="TextBox 40">
@@ -9588,8 +9540,8 @@
           </p:sp>
         </mc:Fallback>
       </mc:AlternateContent>
-      <mc:AlternateContent xmlns:mc="http://schemas.openxmlformats.org/markup-compatibility/2006">
-        <mc:Choice xmlns:a14="http://schemas.microsoft.com/office/drawing/2010/main" Requires="a14">
+      <mc:AlternateContent xmlns:mc="http://schemas.openxmlformats.org/markup-compatibility/2006" xmlns:a14="http://schemas.microsoft.com/office/drawing/2010/main">
+        <mc:Choice Requires="a14">
           <p:sp>
             <p:nvSpPr>
               <p:cNvPr id="45" name="TextBox 44">
@@ -9661,7 +9613,7 @@
             </p:txBody>
           </p:sp>
         </mc:Choice>
-        <mc:Fallback>
+        <mc:Fallback xmlns="">
           <p:sp>
             <p:nvSpPr>
               <p:cNvPr id="45" name="TextBox 44">
@@ -9706,8 +9658,8 @@
           </p:sp>
         </mc:Fallback>
       </mc:AlternateContent>
-      <mc:AlternateContent xmlns:mc="http://schemas.openxmlformats.org/markup-compatibility/2006">
-        <mc:Choice xmlns:a14="http://schemas.microsoft.com/office/drawing/2010/main" Requires="a14">
+      <mc:AlternateContent xmlns:mc="http://schemas.openxmlformats.org/markup-compatibility/2006" xmlns:a14="http://schemas.microsoft.com/office/drawing/2010/main">
+        <mc:Choice Requires="a14">
           <p:sp>
             <p:nvSpPr>
               <p:cNvPr id="46" name="TextBox 45">
@@ -9779,7 +9731,7 @@
             </p:txBody>
           </p:sp>
         </mc:Choice>
-        <mc:Fallback>
+        <mc:Fallback xmlns="">
           <p:sp>
             <p:nvSpPr>
               <p:cNvPr id="46" name="TextBox 45">
@@ -9824,8 +9776,8 @@
           </p:sp>
         </mc:Fallback>
       </mc:AlternateContent>
-      <mc:AlternateContent xmlns:mc="http://schemas.openxmlformats.org/markup-compatibility/2006">
-        <mc:Choice xmlns:a14="http://schemas.microsoft.com/office/drawing/2010/main" Requires="a14">
+      <mc:AlternateContent xmlns:mc="http://schemas.openxmlformats.org/markup-compatibility/2006" xmlns:a14="http://schemas.microsoft.com/office/drawing/2010/main">
+        <mc:Choice Requires="a14">
           <p:sp>
             <p:nvSpPr>
               <p:cNvPr id="47" name="TextBox 46">
@@ -9894,7 +9846,7 @@
             </p:txBody>
           </p:sp>
         </mc:Choice>
-        <mc:Fallback>
+        <mc:Fallback xmlns="">
           <p:sp>
             <p:nvSpPr>
               <p:cNvPr id="47" name="TextBox 46">
@@ -9939,8 +9891,8 @@
           </p:sp>
         </mc:Fallback>
       </mc:AlternateContent>
-      <mc:AlternateContent xmlns:mc="http://schemas.openxmlformats.org/markup-compatibility/2006">
-        <mc:Choice xmlns:a14="http://schemas.microsoft.com/office/drawing/2010/main" Requires="a14">
+      <mc:AlternateContent xmlns:mc="http://schemas.openxmlformats.org/markup-compatibility/2006" xmlns:a14="http://schemas.microsoft.com/office/drawing/2010/main">
+        <mc:Choice Requires="a14">
           <p:sp>
             <p:nvSpPr>
               <p:cNvPr id="48" name="TextBox 47">
@@ -10012,7 +9964,7 @@
             </p:txBody>
           </p:sp>
         </mc:Choice>
-        <mc:Fallback>
+        <mc:Fallback xmlns="">
           <p:sp>
             <p:nvSpPr>
               <p:cNvPr id="48" name="TextBox 47">
@@ -10115,7 +10067,13 @@
                             <a:rPr lang="de-DE" sz="2400" b="0" i="1" smtClean="0">
                               <a:latin typeface="Cambria Math" panose="02040503050406030204" pitchFamily="18" charset="0"/>
                             </a:rPr>
-                            <m:t>𝑖𝑘</m:t>
+                            <m:t>𝑧</m:t>
+                          </m:r>
+                          <m:r>
+                            <a:rPr lang="de-DE" sz="2400" b="0" i="1" smtClean="0">
+                              <a:latin typeface="Cambria Math" panose="02040503050406030204" pitchFamily="18" charset="0"/>
+                            </a:rPr>
+                            <m:t>𝑘</m:t>
                           </m:r>
                         </m:sub>
                       </m:sSub>
@@ -10172,8 +10130,8 @@
           </p:sp>
         </mc:Fallback>
       </mc:AlternateContent>
-      <mc:AlternateContent xmlns:mc="http://schemas.openxmlformats.org/markup-compatibility/2006">
-        <mc:Choice xmlns:a14="http://schemas.microsoft.com/office/drawing/2010/main" Requires="a14">
+      <mc:AlternateContent xmlns:mc="http://schemas.openxmlformats.org/markup-compatibility/2006" xmlns:a14="http://schemas.microsoft.com/office/drawing/2010/main">
+        <mc:Choice Requires="a14">
           <p:sp>
             <p:nvSpPr>
               <p:cNvPr id="4" name="TextBox 3">
@@ -10202,6 +10160,7 @@
               </a:bodyPr>
               <a:lstStyle/>
               <a:p>
+                <a:pPr/>
                 <a14:m>
                   <m:oMathPara xmlns:m="http://schemas.openxmlformats.org/officeDocument/2006/math">
                     <m:oMathParaPr>
@@ -10352,13 +10311,7 @@
                                             <a:rPr lang="de-DE" sz="2400" b="0" i="1" smtClean="0">
                                               <a:latin typeface="Cambria Math" panose="02040503050406030204" pitchFamily="18" charset="0"/>
                                             </a:rPr>
-                                            <m:t>1</m:t>
-                                          </m:r>
-                                          <m:r>
-                                            <a:rPr lang="de-DE" sz="2400" b="0" i="1" smtClean="0">
-                                              <a:latin typeface="Cambria Math" panose="02040503050406030204" pitchFamily="18" charset="0"/>
-                                            </a:rPr>
-                                            <m:t>2</m:t>
+                                            <m:t>12</m:t>
                                           </m:r>
                                         </m:sub>
                                       </m:sSub>
@@ -10853,7 +10806,7 @@
             </p:txBody>
           </p:sp>
         </mc:Choice>
-        <mc:Fallback>
+        <mc:Fallback xmlns="">
           <p:sp>
             <p:nvSpPr>
               <p:cNvPr id="4" name="TextBox 3">
@@ -10898,8 +10851,8 @@
           </p:sp>
         </mc:Fallback>
       </mc:AlternateContent>
-      <mc:AlternateContent xmlns:mc="http://schemas.openxmlformats.org/markup-compatibility/2006">
-        <mc:Choice xmlns:a14="http://schemas.microsoft.com/office/drawing/2010/main" Requires="a14">
+      <mc:AlternateContent xmlns:mc="http://schemas.openxmlformats.org/markup-compatibility/2006" xmlns:a14="http://schemas.microsoft.com/office/drawing/2010/main">
+        <mc:Choice Requires="a14">
           <p:sp>
             <p:nvSpPr>
               <p:cNvPr id="6" name="TextBox 5">
@@ -11017,13 +10970,7 @@
                             <a:rPr lang="de-DE" sz="2400" b="0" i="1" smtClean="0">
                               <a:latin typeface="Cambria Math" panose="02040503050406030204" pitchFamily="18" charset="0"/>
                             </a:rPr>
-                            <m:t>𝑧</m:t>
-                          </m:r>
-                          <m:r>
-                            <a:rPr lang="de-DE" sz="2400" b="0" i="1" smtClean="0">
-                              <a:latin typeface="Cambria Math" panose="02040503050406030204" pitchFamily="18" charset="0"/>
-                            </a:rPr>
-                            <m:t>𝑗</m:t>
+                            <m:t>𝑧𝑗</m:t>
                           </m:r>
                         </m:sub>
                       </m:sSub>
@@ -11043,21 +10990,7 @@
                         <a:rPr lang="de-DE" sz="2400" b="0" i="1" smtClean="0">
                           <a:latin typeface="Cambria Math" panose="02040503050406030204" pitchFamily="18" charset="0"/>
                         </a:rPr>
-                        <m:t>,</m:t>
-                      </m:r>
-                      <m:r>
-                        <a:rPr lang="de-DE" sz="2400" b="0" i="1" smtClean="0">
-                          <a:latin typeface="Cambria Math" panose="02040503050406030204" pitchFamily="18" charset="0"/>
-                          <a:ea typeface="Cambria Math" panose="02040503050406030204" pitchFamily="18" charset="0"/>
-                        </a:rPr>
-                        <m:t>⋯</m:t>
-                      </m:r>
-                      <m:r>
-                        <a:rPr lang="de-DE" sz="2400" b="0" i="1" smtClean="0">
-                          <a:latin typeface="Cambria Math" panose="02040503050406030204" pitchFamily="18" charset="0"/>
-                          <a:ea typeface="Cambria Math" panose="02040503050406030204" pitchFamily="18" charset="0"/>
-                        </a:rPr>
-                        <m:t>,</m:t>
+                        <m:t>,⋯,</m:t>
                       </m:r>
                       <m:sSub>
                         <m:sSubPr>
@@ -11080,13 +11013,7 @@
                             <a:rPr lang="de-DE" sz="2400" b="0" i="1" smtClean="0">
                               <a:latin typeface="Cambria Math" panose="02040503050406030204" pitchFamily="18" charset="0"/>
                             </a:rPr>
-                            <m:t>𝑧</m:t>
-                          </m:r>
-                          <m:r>
-                            <a:rPr lang="de-DE" sz="2400" b="0" i="1" smtClean="0">
-                              <a:latin typeface="Cambria Math" panose="02040503050406030204" pitchFamily="18" charset="0"/>
-                            </a:rPr>
-                            <m:t>𝑘</m:t>
+                            <m:t>𝑧𝑘</m:t>
                           </m:r>
                         </m:sub>
                       </m:sSub>
@@ -11106,21 +11033,7 @@
                         <a:rPr lang="de-DE" sz="2400" b="0" i="1" smtClean="0">
                           <a:latin typeface="Cambria Math" panose="02040503050406030204" pitchFamily="18" charset="0"/>
                         </a:rPr>
-                        <m:t>,</m:t>
-                      </m:r>
-                      <m:r>
-                        <a:rPr lang="de-DE" sz="2400" b="0" i="1" smtClean="0">
-                          <a:latin typeface="Cambria Math" panose="02040503050406030204" pitchFamily="18" charset="0"/>
-                          <a:ea typeface="Cambria Math" panose="02040503050406030204" pitchFamily="18" charset="0"/>
-                        </a:rPr>
-                        <m:t>⋯</m:t>
-                      </m:r>
-                      <m:r>
-                        <a:rPr lang="de-DE" sz="2400" b="0" i="1" smtClean="0">
-                          <a:latin typeface="Cambria Math" panose="02040503050406030204" pitchFamily="18" charset="0"/>
-                          <a:ea typeface="Cambria Math" panose="02040503050406030204" pitchFamily="18" charset="0"/>
-                        </a:rPr>
-                        <m:t>,</m:t>
+                        <m:t>,⋯,</m:t>
                       </m:r>
                       <m:r>
                         <a:rPr lang="de-DE" sz="2400" b="0" i="1" smtClean="0">
@@ -11143,7 +11056,7 @@
             </p:txBody>
           </p:sp>
         </mc:Choice>
-        <mc:Fallback>
+        <mc:Fallback xmlns="">
           <p:sp>
             <p:nvSpPr>
               <p:cNvPr id="6" name="TextBox 5">
@@ -11385,28 +11298,1582 @@
           </a:p>
         </p:txBody>
       </p:sp>
-      <p:sp>
-        <p:nvSpPr>
-          <p:cNvPr id="17" name="Oval 16">
+      <p:pic>
+        <p:nvPicPr>
+          <p:cNvPr id="27" name="Picture 26" descr="A computer screen shot of a black screen&#10;&#10;AI-generated content may be incorrect.">
             <a:extLst>
               <a:ext uri="{FF2B5EF4-FFF2-40B4-BE49-F238E27FC236}">
-                <a16:creationId xmlns:a16="http://schemas.microsoft.com/office/drawing/2014/main" id="{E0555464-F16C-EB99-75FE-9D375CDAA133}"/>
+                <a16:creationId xmlns:a16="http://schemas.microsoft.com/office/drawing/2014/main" id="{EA5EC35B-7C25-FBAF-8BD7-87249CE7A51B}"/>
               </a:ext>
             </a:extLst>
           </p:cNvPr>
-          <p:cNvSpPr>
-            <a:spLocks noChangeAspect="1"/>
-          </p:cNvSpPr>
+          <p:cNvPicPr>
+            <a:picLocks noChangeAspect="1"/>
+          </p:cNvPicPr>
+          <p:nvPr/>
+        </p:nvPicPr>
+        <p:blipFill>
+          <a:blip r:embed="rId3"/>
+          <a:stretch>
+            <a:fillRect/>
+          </a:stretch>
+        </p:blipFill>
+        <p:spPr>
+          <a:xfrm>
+            <a:off x="4430977" y="374145"/>
+            <a:ext cx="7716327" cy="6068272"/>
+          </a:xfrm>
+          <a:prstGeom prst="rect">
+            <a:avLst/>
+          </a:prstGeom>
+        </p:spPr>
+      </p:pic>
+      <p:pic>
+        <p:nvPicPr>
+          <p:cNvPr id="4" name="Picture 3" descr="A diagram of dna sequence&#10;&#10;AI-generated content may be incorrect.">
+            <a:extLst>
+              <a:ext uri="{FF2B5EF4-FFF2-40B4-BE49-F238E27FC236}">
+                <a16:creationId xmlns:a16="http://schemas.microsoft.com/office/drawing/2014/main" id="{DF34A1A1-6B97-F25B-5A1B-3355508138DF}"/>
+              </a:ext>
+            </a:extLst>
+          </p:cNvPr>
+          <p:cNvPicPr>
+            <a:picLocks noChangeAspect="1"/>
+          </p:cNvPicPr>
+          <p:nvPr/>
+        </p:nvPicPr>
+        <p:blipFill>
+          <a:blip r:embed="rId4"/>
+          <a:stretch>
+            <a:fillRect/>
+          </a:stretch>
+        </p:blipFill>
+        <p:spPr>
+          <a:xfrm>
+            <a:off x="164283" y="1063004"/>
+            <a:ext cx="3720510" cy="3943335"/>
+          </a:xfrm>
+          <a:prstGeom prst="rect">
+            <a:avLst/>
+          </a:prstGeom>
+        </p:spPr>
+      </p:pic>
+      <p:grpSp>
+        <p:nvGrpSpPr>
+          <p:cNvPr id="6" name="Group 5">
+            <a:extLst>
+              <a:ext uri="{FF2B5EF4-FFF2-40B4-BE49-F238E27FC236}">
+                <a16:creationId xmlns:a16="http://schemas.microsoft.com/office/drawing/2014/main" id="{BA9F3F39-6CA6-3182-0B58-4E9D877F5A99}"/>
+              </a:ext>
+            </a:extLst>
+          </p:cNvPr>
+          <p:cNvGrpSpPr/>
+          <p:nvPr/>
+        </p:nvGrpSpPr>
+        <p:grpSpPr>
+          <a:xfrm>
+            <a:off x="8554832" y="2810934"/>
+            <a:ext cx="3616284" cy="1973197"/>
+            <a:chOff x="431855" y="1391826"/>
+            <a:chExt cx="3616284" cy="1973197"/>
+          </a:xfrm>
+        </p:grpSpPr>
+        <mc:AlternateContent xmlns:mc="http://schemas.openxmlformats.org/markup-compatibility/2006">
+          <mc:Choice xmlns:a14="http://schemas.microsoft.com/office/drawing/2010/main" Requires="a14">
+            <p:sp>
+              <p:nvSpPr>
+                <p:cNvPr id="41" name="TextBox 40">
+                  <a:extLst>
+                    <a:ext uri="{FF2B5EF4-FFF2-40B4-BE49-F238E27FC236}">
+                      <a16:creationId xmlns:a16="http://schemas.microsoft.com/office/drawing/2014/main" id="{F26DDB16-7FD3-4032-EEDE-BBECCBC7F08C}"/>
+                    </a:ext>
+                  </a:extLst>
+                </p:cNvPr>
+                <p:cNvSpPr txBox="1"/>
+                <p:nvPr/>
+              </p:nvSpPr>
+              <p:spPr>
+                <a:xfrm>
+                  <a:off x="3419061" y="1887881"/>
+                  <a:ext cx="629078" cy="461665"/>
+                </a:xfrm>
+                <a:prstGeom prst="rect">
+                  <a:avLst/>
+                </a:prstGeom>
+                <a:noFill/>
+              </p:spPr>
+              <p:txBody>
+                <a:bodyPr wrap="square">
+                  <a:spAutoFit/>
+                </a:bodyPr>
+                <a:lstStyle/>
+                <a:p>
+                  <a:pPr/>
+                  <a14:m>
+                    <m:oMathPara xmlns:m="http://schemas.openxmlformats.org/officeDocument/2006/math">
+                      <m:oMathParaPr>
+                        <m:jc m:val="right"/>
+                      </m:oMathParaPr>
+                      <m:oMath xmlns:m="http://schemas.openxmlformats.org/officeDocument/2006/math">
+                        <m:sSub>
+                          <m:sSubPr>
+                            <m:ctrlPr>
+                              <a:rPr lang="de-DE" sz="2400" b="0" i="1" smtClean="0">
+                                <a:solidFill>
+                                  <a:schemeClr val="bg1"/>
+                                </a:solidFill>
+                                <a:latin typeface="Cambria Math" panose="02040503050406030204" pitchFamily="18" charset="0"/>
+                              </a:rPr>
+                            </m:ctrlPr>
+                          </m:sSubPr>
+                          <m:e>
+                            <m:r>
+                              <m:rPr>
+                                <m:sty m:val="p"/>
+                              </m:rPr>
+                              <a:rPr lang="de-DE" sz="2400" b="0" i="1" smtClean="0">
+                                <a:solidFill>
+                                  <a:schemeClr val="bg1"/>
+                                </a:solidFill>
+                                <a:latin typeface="Cambria Math" panose="02040503050406030204" pitchFamily="18" charset="0"/>
+                              </a:rPr>
+                              <m:t>m</m:t>
+                            </m:r>
+                          </m:e>
+                          <m:sub>
+                            <m:r>
+                              <a:rPr lang="de-DE" sz="2400" b="0" i="1" smtClean="0">
+                                <a:solidFill>
+                                  <a:schemeClr val="bg1"/>
+                                </a:solidFill>
+                                <a:latin typeface="Cambria Math" panose="02040503050406030204" pitchFamily="18" charset="0"/>
+                              </a:rPr>
+                              <m:t>4</m:t>
+                            </m:r>
+                          </m:sub>
+                        </m:sSub>
+                      </m:oMath>
+                    </m:oMathPara>
+                  </a14:m>
+                  <a:endParaRPr lang="en-US" sz="2400" dirty="0">
+                    <a:solidFill>
+                      <a:schemeClr val="bg1"/>
+                    </a:solidFill>
+                  </a:endParaRPr>
+                </a:p>
+              </p:txBody>
+            </p:sp>
+          </mc:Choice>
+          <mc:Fallback>
+            <p:sp>
+              <p:nvSpPr>
+                <p:cNvPr id="41" name="TextBox 40">
+                  <a:extLst>
+                    <a:ext uri="{FF2B5EF4-FFF2-40B4-BE49-F238E27FC236}">
+                      <a16:creationId xmlns:a16="http://schemas.microsoft.com/office/drawing/2014/main" id="{F26DDB16-7FD3-4032-EEDE-BBECCBC7F08C}"/>
+                    </a:ext>
+                  </a:extLst>
+                </p:cNvPr>
+                <p:cNvSpPr txBox="1">
+                  <a:spLocks noRot="1" noChangeAspect="1" noMove="1" noResize="1" noEditPoints="1" noAdjustHandles="1" noChangeArrowheads="1" noChangeShapeType="1" noTextEdit="1"/>
+                </p:cNvSpPr>
+                <p:nvPr/>
+              </p:nvSpPr>
+              <p:spPr>
+                <a:xfrm>
+                  <a:off x="3419061" y="1887881"/>
+                  <a:ext cx="629078" cy="461665"/>
+                </a:xfrm>
+                <a:prstGeom prst="rect">
+                  <a:avLst/>
+                </a:prstGeom>
+                <a:blipFill>
+                  <a:blip r:embed="rId5"/>
+                  <a:stretch>
+                    <a:fillRect/>
+                  </a:stretch>
+                </a:blipFill>
+              </p:spPr>
+              <p:txBody>
+                <a:bodyPr/>
+                <a:lstStyle/>
+                <a:p>
+                  <a:r>
+                    <a:rPr lang="en-US">
+                      <a:noFill/>
+                    </a:rPr>
+                    <a:t> </a:t>
+                  </a:r>
+                </a:p>
+              </p:txBody>
+            </p:sp>
+          </mc:Fallback>
+        </mc:AlternateContent>
+        <p:sp>
+          <p:nvSpPr>
+            <p:cNvPr id="17" name="Oval 16">
+              <a:extLst>
+                <a:ext uri="{FF2B5EF4-FFF2-40B4-BE49-F238E27FC236}">
+                  <a16:creationId xmlns:a16="http://schemas.microsoft.com/office/drawing/2014/main" id="{E0555464-F16C-EB99-75FE-9D375CDAA133}"/>
+                </a:ext>
+              </a:extLst>
+            </p:cNvPr>
+            <p:cNvSpPr>
+              <a:spLocks noChangeAspect="1"/>
+            </p:cNvSpPr>
+            <p:nvPr/>
+          </p:nvSpPr>
+          <p:spPr>
+            <a:xfrm>
+              <a:off x="1315417" y="1484012"/>
+              <a:ext cx="365760" cy="365760"/>
+            </a:xfrm>
+            <a:prstGeom prst="ellipse">
+              <a:avLst/>
+            </a:prstGeom>
+            <a:solidFill>
+              <a:schemeClr val="bg1"/>
+            </a:solidFill>
+            <a:ln>
+              <a:solidFill>
+                <a:schemeClr val="bg1"/>
+              </a:solidFill>
+            </a:ln>
+          </p:spPr>
+          <p:style>
+            <a:lnRef idx="2">
+              <a:schemeClr val="accent1">
+                <a:shade val="15000"/>
+              </a:schemeClr>
+            </a:lnRef>
+            <a:fillRef idx="1">
+              <a:schemeClr val="accent1"/>
+            </a:fillRef>
+            <a:effectRef idx="0">
+              <a:schemeClr val="accent1"/>
+            </a:effectRef>
+            <a:fontRef idx="minor">
+              <a:schemeClr val="lt1"/>
+            </a:fontRef>
+          </p:style>
+          <p:txBody>
+            <a:bodyPr rtlCol="0" anchor="ctr"/>
+            <a:lstStyle/>
+            <a:p>
+              <a:pPr algn="ctr"/>
+              <a:endParaRPr lang="en-US"/>
+            </a:p>
+          </p:txBody>
+        </p:sp>
+        <p:sp>
+          <p:nvSpPr>
+            <p:cNvPr id="18" name="Oval 17">
+              <a:extLst>
+                <a:ext uri="{FF2B5EF4-FFF2-40B4-BE49-F238E27FC236}">
+                  <a16:creationId xmlns:a16="http://schemas.microsoft.com/office/drawing/2014/main" id="{6DACA316-230D-D8CD-EF68-29B01C3EA119}"/>
+                </a:ext>
+              </a:extLst>
+            </p:cNvPr>
+            <p:cNvSpPr>
+              <a:spLocks noChangeAspect="1"/>
+            </p:cNvSpPr>
+            <p:nvPr/>
+          </p:nvSpPr>
+          <p:spPr>
+            <a:xfrm>
+              <a:off x="1326847" y="2951311"/>
+              <a:ext cx="365760" cy="365760"/>
+            </a:xfrm>
+            <a:prstGeom prst="ellipse">
+              <a:avLst/>
+            </a:prstGeom>
+            <a:solidFill>
+              <a:schemeClr val="bg1"/>
+            </a:solidFill>
+            <a:ln>
+              <a:solidFill>
+                <a:schemeClr val="bg1"/>
+              </a:solidFill>
+            </a:ln>
+          </p:spPr>
+          <p:style>
+            <a:lnRef idx="2">
+              <a:schemeClr val="accent1">
+                <a:shade val="15000"/>
+              </a:schemeClr>
+            </a:lnRef>
+            <a:fillRef idx="1">
+              <a:schemeClr val="accent1"/>
+            </a:fillRef>
+            <a:effectRef idx="0">
+              <a:schemeClr val="accent1"/>
+            </a:effectRef>
+            <a:fontRef idx="minor">
+              <a:schemeClr val="lt1"/>
+            </a:fontRef>
+          </p:style>
+          <p:txBody>
+            <a:bodyPr rtlCol="0" anchor="ctr"/>
+            <a:lstStyle/>
+            <a:p>
+              <a:pPr algn="ctr"/>
+              <a:endParaRPr lang="en-US"/>
+            </a:p>
+          </p:txBody>
+        </p:sp>
+        <p:sp>
+          <p:nvSpPr>
+            <p:cNvPr id="19" name="Oval 18">
+              <a:extLst>
+                <a:ext uri="{FF2B5EF4-FFF2-40B4-BE49-F238E27FC236}">
+                  <a16:creationId xmlns:a16="http://schemas.microsoft.com/office/drawing/2014/main" id="{815BBFC4-0F99-2CC9-D561-7F255E117A6E}"/>
+                </a:ext>
+              </a:extLst>
+            </p:cNvPr>
+            <p:cNvSpPr>
+              <a:spLocks noChangeAspect="1"/>
+            </p:cNvSpPr>
+            <p:nvPr/>
+          </p:nvSpPr>
+          <p:spPr>
+            <a:xfrm>
+              <a:off x="2858467" y="2257891"/>
+              <a:ext cx="365760" cy="365760"/>
+            </a:xfrm>
+            <a:prstGeom prst="ellipse">
+              <a:avLst/>
+            </a:prstGeom>
+            <a:solidFill>
+              <a:schemeClr val="bg1"/>
+            </a:solidFill>
+            <a:ln>
+              <a:solidFill>
+                <a:schemeClr val="bg1"/>
+              </a:solidFill>
+            </a:ln>
+          </p:spPr>
+          <p:style>
+            <a:lnRef idx="2">
+              <a:schemeClr val="accent1">
+                <a:shade val="15000"/>
+              </a:schemeClr>
+            </a:lnRef>
+            <a:fillRef idx="1">
+              <a:schemeClr val="accent1"/>
+            </a:fillRef>
+            <a:effectRef idx="0">
+              <a:schemeClr val="accent1"/>
+            </a:effectRef>
+            <a:fontRef idx="minor">
+              <a:schemeClr val="lt1"/>
+            </a:fontRef>
+          </p:style>
+          <p:txBody>
+            <a:bodyPr rtlCol="0" anchor="ctr"/>
+            <a:lstStyle/>
+            <a:p>
+              <a:pPr algn="ctr"/>
+              <a:endParaRPr lang="en-US"/>
+            </a:p>
+          </p:txBody>
+        </p:sp>
+        <p:cxnSp>
+          <p:nvCxnSpPr>
+            <p:cNvPr id="21" name="Straight Arrow Connector 20">
+              <a:extLst>
+                <a:ext uri="{FF2B5EF4-FFF2-40B4-BE49-F238E27FC236}">
+                  <a16:creationId xmlns:a16="http://schemas.microsoft.com/office/drawing/2014/main" id="{7C82803E-B556-906C-0FD9-FCE6FB1F606B}"/>
+                </a:ext>
+              </a:extLst>
+            </p:cNvPr>
+            <p:cNvCxnSpPr>
+              <a:cxnSpLocks/>
+              <a:stCxn id="18" idx="6"/>
+              <a:endCxn id="19" idx="3"/>
+            </p:cNvCxnSpPr>
+            <p:nvPr/>
+          </p:nvCxnSpPr>
+          <p:spPr>
+            <a:xfrm flipV="1">
+              <a:off x="1692607" y="2570087"/>
+              <a:ext cx="1219424" cy="564104"/>
+            </a:xfrm>
+            <a:prstGeom prst="straightConnector1">
+              <a:avLst/>
+            </a:prstGeom>
+            <a:solidFill>
+              <a:schemeClr val="bg1"/>
+            </a:solidFill>
+            <a:ln>
+              <a:solidFill>
+                <a:schemeClr val="bg1"/>
+              </a:solidFill>
+              <a:tailEnd type="triangle" w="lg" len="lg"/>
+            </a:ln>
+          </p:spPr>
+          <p:style>
+            <a:lnRef idx="2">
+              <a:schemeClr val="accent1"/>
+            </a:lnRef>
+            <a:fillRef idx="0">
+              <a:schemeClr val="accent1"/>
+            </a:fillRef>
+            <a:effectRef idx="1">
+              <a:schemeClr val="accent1"/>
+            </a:effectRef>
+            <a:fontRef idx="minor">
+              <a:schemeClr val="tx1"/>
+            </a:fontRef>
+          </p:style>
+        </p:cxnSp>
+        <p:cxnSp>
+          <p:nvCxnSpPr>
+            <p:cNvPr id="24" name="Straight Arrow Connector 23">
+              <a:extLst>
+                <a:ext uri="{FF2B5EF4-FFF2-40B4-BE49-F238E27FC236}">
+                  <a16:creationId xmlns:a16="http://schemas.microsoft.com/office/drawing/2014/main" id="{194BED61-5805-76F0-4414-6C51BCF23D50}"/>
+                </a:ext>
+              </a:extLst>
+            </p:cNvPr>
+            <p:cNvCxnSpPr>
+              <a:stCxn id="17" idx="6"/>
+              <a:endCxn id="19" idx="1"/>
+            </p:cNvCxnSpPr>
+            <p:nvPr/>
+          </p:nvCxnSpPr>
+          <p:spPr>
+            <a:xfrm>
+              <a:off x="1681177" y="1666892"/>
+              <a:ext cx="1230854" cy="644563"/>
+            </a:xfrm>
+            <a:prstGeom prst="straightConnector1">
+              <a:avLst/>
+            </a:prstGeom>
+            <a:solidFill>
+              <a:schemeClr val="bg1"/>
+            </a:solidFill>
+            <a:ln>
+              <a:solidFill>
+                <a:schemeClr val="bg1"/>
+              </a:solidFill>
+              <a:tailEnd type="triangle" w="lg" len="lg"/>
+            </a:ln>
+          </p:spPr>
+          <p:style>
+            <a:lnRef idx="2">
+              <a:schemeClr val="accent1"/>
+            </a:lnRef>
+            <a:fillRef idx="0">
+              <a:schemeClr val="accent1"/>
+            </a:fillRef>
+            <a:effectRef idx="1">
+              <a:schemeClr val="accent1"/>
+            </a:effectRef>
+            <a:fontRef idx="minor">
+              <a:schemeClr val="tx1"/>
+            </a:fontRef>
+          </p:style>
+        </p:cxnSp>
+        <p:cxnSp>
+          <p:nvCxnSpPr>
+            <p:cNvPr id="25" name="Straight Arrow Connector 24">
+              <a:extLst>
+                <a:ext uri="{FF2B5EF4-FFF2-40B4-BE49-F238E27FC236}">
+                  <a16:creationId xmlns:a16="http://schemas.microsoft.com/office/drawing/2014/main" id="{4CA272A9-A1B9-1E11-A374-2E2BA93B23DE}"/>
+                </a:ext>
+              </a:extLst>
+            </p:cNvPr>
+            <p:cNvCxnSpPr>
+              <a:cxnSpLocks/>
+            </p:cNvCxnSpPr>
+            <p:nvPr/>
+          </p:nvCxnSpPr>
+          <p:spPr>
+            <a:xfrm>
+              <a:off x="515317" y="1666892"/>
+              <a:ext cx="800100" cy="0"/>
+            </a:xfrm>
+            <a:prstGeom prst="straightConnector1">
+              <a:avLst/>
+            </a:prstGeom>
+            <a:solidFill>
+              <a:schemeClr val="bg1"/>
+            </a:solidFill>
+            <a:ln>
+              <a:solidFill>
+                <a:schemeClr val="bg1"/>
+              </a:solidFill>
+              <a:tailEnd type="triangle" w="lg" len="lg"/>
+            </a:ln>
+          </p:spPr>
+          <p:style>
+            <a:lnRef idx="2">
+              <a:schemeClr val="accent1"/>
+            </a:lnRef>
+            <a:fillRef idx="0">
+              <a:schemeClr val="accent1"/>
+            </a:fillRef>
+            <a:effectRef idx="1">
+              <a:schemeClr val="accent1"/>
+            </a:effectRef>
+            <a:fontRef idx="minor">
+              <a:schemeClr val="tx1"/>
+            </a:fontRef>
+          </p:style>
+        </p:cxnSp>
+        <p:cxnSp>
+          <p:nvCxnSpPr>
+            <p:cNvPr id="28" name="Straight Arrow Connector 27">
+              <a:extLst>
+                <a:ext uri="{FF2B5EF4-FFF2-40B4-BE49-F238E27FC236}">
+                  <a16:creationId xmlns:a16="http://schemas.microsoft.com/office/drawing/2014/main" id="{5E69A336-30C0-D5CD-CA64-C0BCFB5DE8D0}"/>
+                </a:ext>
+              </a:extLst>
+            </p:cNvPr>
+            <p:cNvCxnSpPr>
+              <a:cxnSpLocks/>
+              <a:endCxn id="18" idx="2"/>
+            </p:cNvCxnSpPr>
+            <p:nvPr/>
+          </p:nvCxnSpPr>
+          <p:spPr>
+            <a:xfrm>
+              <a:off x="515317" y="3134191"/>
+              <a:ext cx="811530" cy="0"/>
+            </a:xfrm>
+            <a:prstGeom prst="straightConnector1">
+              <a:avLst/>
+            </a:prstGeom>
+            <a:solidFill>
+              <a:schemeClr val="bg1"/>
+            </a:solidFill>
+            <a:ln>
+              <a:solidFill>
+                <a:schemeClr val="bg1"/>
+              </a:solidFill>
+              <a:tailEnd type="triangle" w="lg" len="lg"/>
+            </a:ln>
+          </p:spPr>
+          <p:style>
+            <a:lnRef idx="2">
+              <a:schemeClr val="accent1"/>
+            </a:lnRef>
+            <a:fillRef idx="0">
+              <a:schemeClr val="accent1"/>
+            </a:fillRef>
+            <a:effectRef idx="1">
+              <a:schemeClr val="accent1"/>
+            </a:effectRef>
+            <a:fontRef idx="minor">
+              <a:schemeClr val="tx1"/>
+            </a:fontRef>
+          </p:style>
+        </p:cxnSp>
+        <p:cxnSp>
+          <p:nvCxnSpPr>
+            <p:cNvPr id="29" name="Straight Arrow Connector 28">
+              <a:extLst>
+                <a:ext uri="{FF2B5EF4-FFF2-40B4-BE49-F238E27FC236}">
+                  <a16:creationId xmlns:a16="http://schemas.microsoft.com/office/drawing/2014/main" id="{B37C9D3C-7810-04DD-E4D9-BC6359EADF76}"/>
+                </a:ext>
+              </a:extLst>
+            </p:cNvPr>
+            <p:cNvCxnSpPr>
+              <a:cxnSpLocks/>
+            </p:cNvCxnSpPr>
+            <p:nvPr/>
+          </p:nvCxnSpPr>
+          <p:spPr>
+            <a:xfrm>
+              <a:off x="3224227" y="2425082"/>
+              <a:ext cx="800100" cy="0"/>
+            </a:xfrm>
+            <a:prstGeom prst="straightConnector1">
+              <a:avLst/>
+            </a:prstGeom>
+            <a:solidFill>
+              <a:schemeClr val="bg1"/>
+            </a:solidFill>
+            <a:ln>
+              <a:solidFill>
+                <a:schemeClr val="bg1"/>
+              </a:solidFill>
+              <a:tailEnd type="triangle" w="lg" len="lg"/>
+            </a:ln>
+          </p:spPr>
+          <p:style>
+            <a:lnRef idx="2">
+              <a:schemeClr val="accent1"/>
+            </a:lnRef>
+            <a:fillRef idx="0">
+              <a:schemeClr val="accent1"/>
+            </a:fillRef>
+            <a:effectRef idx="1">
+              <a:schemeClr val="accent1"/>
+            </a:effectRef>
+            <a:fontRef idx="minor">
+              <a:schemeClr val="tx1"/>
+            </a:fontRef>
+          </p:style>
+        </p:cxnSp>
+        <mc:AlternateContent xmlns:mc="http://schemas.openxmlformats.org/markup-compatibility/2006">
+          <mc:Choice xmlns:a14="http://schemas.microsoft.com/office/drawing/2010/main" Requires="a14">
+            <p:sp>
+              <p:nvSpPr>
+                <p:cNvPr id="31" name="TextBox 30">
+                  <a:extLst>
+                    <a:ext uri="{FF2B5EF4-FFF2-40B4-BE49-F238E27FC236}">
+                      <a16:creationId xmlns:a16="http://schemas.microsoft.com/office/drawing/2014/main" id="{AFDA9619-46C1-35AA-8D39-D84883E83DEE}"/>
+                    </a:ext>
+                  </a:extLst>
+                </p:cNvPr>
+                <p:cNvSpPr txBox="1"/>
+                <p:nvPr/>
+              </p:nvSpPr>
+              <p:spPr>
+                <a:xfrm>
+                  <a:off x="431855" y="1666892"/>
+                  <a:ext cx="675668" cy="461665"/>
+                </a:xfrm>
+                <a:prstGeom prst="rect">
+                  <a:avLst/>
+                </a:prstGeom>
+                <a:noFill/>
+              </p:spPr>
+              <p:txBody>
+                <a:bodyPr wrap="square">
+                  <a:spAutoFit/>
+                </a:bodyPr>
+                <a:lstStyle/>
+                <a:p>
+                  <a:pPr/>
+                  <a14:m>
+                    <m:oMathPara xmlns:m="http://schemas.openxmlformats.org/officeDocument/2006/math">
+                      <m:oMathParaPr>
+                        <m:jc m:val="left"/>
+                      </m:oMathParaPr>
+                      <m:oMath xmlns:m="http://schemas.openxmlformats.org/officeDocument/2006/math">
+                        <m:sSub>
+                          <m:sSubPr>
+                            <m:ctrlPr>
+                              <a:rPr lang="de-DE" sz="2400" b="0" i="1" smtClean="0">
+                                <a:solidFill>
+                                  <a:schemeClr val="bg1"/>
+                                </a:solidFill>
+                                <a:latin typeface="Cambria Math" panose="02040503050406030204" pitchFamily="18" charset="0"/>
+                              </a:rPr>
+                            </m:ctrlPr>
+                          </m:sSubPr>
+                          <m:e>
+                            <m:r>
+                              <m:rPr>
+                                <m:sty m:val="p"/>
+                              </m:rPr>
+                              <a:rPr lang="de-DE" sz="2400" b="0" i="1" smtClean="0">
+                                <a:solidFill>
+                                  <a:schemeClr val="bg1"/>
+                                </a:solidFill>
+                                <a:latin typeface="Cambria Math" panose="02040503050406030204" pitchFamily="18" charset="0"/>
+                              </a:rPr>
+                              <m:t>m</m:t>
+                            </m:r>
+                          </m:e>
+                          <m:sub>
+                            <m:r>
+                              <a:rPr lang="de-DE" sz="2400" b="0" i="1" smtClean="0">
+                                <a:solidFill>
+                                  <a:schemeClr val="bg1"/>
+                                </a:solidFill>
+                                <a:latin typeface="Cambria Math" panose="02040503050406030204" pitchFamily="18" charset="0"/>
+                              </a:rPr>
+                              <m:t>1</m:t>
+                            </m:r>
+                          </m:sub>
+                        </m:sSub>
+                      </m:oMath>
+                    </m:oMathPara>
+                  </a14:m>
+                  <a:endParaRPr lang="en-US" sz="2400" dirty="0">
+                    <a:solidFill>
+                      <a:schemeClr val="bg1"/>
+                    </a:solidFill>
+                  </a:endParaRPr>
+                </a:p>
+              </p:txBody>
+            </p:sp>
+          </mc:Choice>
+          <mc:Fallback>
+            <p:sp>
+              <p:nvSpPr>
+                <p:cNvPr id="31" name="TextBox 30">
+                  <a:extLst>
+                    <a:ext uri="{FF2B5EF4-FFF2-40B4-BE49-F238E27FC236}">
+                      <a16:creationId xmlns:a16="http://schemas.microsoft.com/office/drawing/2014/main" id="{AFDA9619-46C1-35AA-8D39-D84883E83DEE}"/>
+                    </a:ext>
+                  </a:extLst>
+                </p:cNvPr>
+                <p:cNvSpPr txBox="1">
+                  <a:spLocks noRot="1" noChangeAspect="1" noMove="1" noResize="1" noEditPoints="1" noAdjustHandles="1" noChangeArrowheads="1" noChangeShapeType="1" noTextEdit="1"/>
+                </p:cNvSpPr>
+                <p:nvPr/>
+              </p:nvSpPr>
+              <p:spPr>
+                <a:xfrm>
+                  <a:off x="431855" y="1666892"/>
+                  <a:ext cx="675668" cy="461665"/>
+                </a:xfrm>
+                <a:prstGeom prst="rect">
+                  <a:avLst/>
+                </a:prstGeom>
+                <a:blipFill>
+                  <a:blip r:embed="rId6"/>
+                  <a:stretch>
+                    <a:fillRect/>
+                  </a:stretch>
+                </a:blipFill>
+              </p:spPr>
+              <p:txBody>
+                <a:bodyPr/>
+                <a:lstStyle/>
+                <a:p>
+                  <a:r>
+                    <a:rPr lang="en-US">
+                      <a:noFill/>
+                    </a:rPr>
+                    <a:t> </a:t>
+                  </a:r>
+                </a:p>
+              </p:txBody>
+            </p:sp>
+          </mc:Fallback>
+        </mc:AlternateContent>
+        <mc:AlternateContent xmlns:mc="http://schemas.openxmlformats.org/markup-compatibility/2006">
+          <mc:Choice xmlns:a14="http://schemas.microsoft.com/office/drawing/2010/main" Requires="a14">
+            <p:sp>
+              <p:nvSpPr>
+                <p:cNvPr id="32" name="TextBox 31">
+                  <a:extLst>
+                    <a:ext uri="{FF2B5EF4-FFF2-40B4-BE49-F238E27FC236}">
+                      <a16:creationId xmlns:a16="http://schemas.microsoft.com/office/drawing/2014/main" id="{723F16E3-8206-36D0-8CD8-8945A0493065}"/>
+                    </a:ext>
+                  </a:extLst>
+                </p:cNvPr>
+                <p:cNvSpPr txBox="1"/>
+                <p:nvPr/>
+              </p:nvSpPr>
+              <p:spPr>
+                <a:xfrm>
+                  <a:off x="2298433" y="2903358"/>
+                  <a:ext cx="641032" cy="461665"/>
+                </a:xfrm>
+                <a:prstGeom prst="rect">
+                  <a:avLst/>
+                </a:prstGeom>
+                <a:noFill/>
+                <a:ln w="19050">
+                  <a:solidFill>
+                    <a:srgbClr val="C00000"/>
+                  </a:solidFill>
+                </a:ln>
+              </p:spPr>
+              <p:txBody>
+                <a:bodyPr wrap="square">
+                  <a:spAutoFit/>
+                </a:bodyPr>
+                <a:lstStyle/>
+                <a:p>
+                  <a:pPr/>
+                  <a14:m>
+                    <m:oMathPara xmlns:m="http://schemas.openxmlformats.org/officeDocument/2006/math">
+                      <m:oMathParaPr>
+                        <m:jc m:val="centerGroup"/>
+                      </m:oMathParaPr>
+                      <m:oMath xmlns:m="http://schemas.openxmlformats.org/officeDocument/2006/math">
+                        <m:sSub>
+                          <m:sSubPr>
+                            <m:ctrlPr>
+                              <a:rPr lang="de-DE" sz="2400" b="1" i="1" smtClean="0">
+                                <a:solidFill>
+                                  <a:schemeClr val="bg1"/>
+                                </a:solidFill>
+                                <a:latin typeface="Cambria Math" panose="02040503050406030204" pitchFamily="18" charset="0"/>
+                              </a:rPr>
+                            </m:ctrlPr>
+                          </m:sSubPr>
+                          <m:e>
+                            <m:r>
+                              <a:rPr lang="de-DE" sz="2400" b="1" i="1" smtClean="0">
+                                <a:solidFill>
+                                  <a:schemeClr val="bg1"/>
+                                </a:solidFill>
+                                <a:latin typeface="Cambria Math" panose="02040503050406030204" pitchFamily="18" charset="0"/>
+                              </a:rPr>
+                              <m:t>𝒎</m:t>
+                            </m:r>
+                          </m:e>
+                          <m:sub>
+                            <m:r>
+                              <a:rPr lang="de-DE" sz="2400" b="1" i="0" smtClean="0">
+                                <a:solidFill>
+                                  <a:schemeClr val="bg1"/>
+                                </a:solidFill>
+                                <a:latin typeface="Cambria Math" panose="02040503050406030204" pitchFamily="18" charset="0"/>
+                              </a:rPr>
+                              <m:t>𝐳</m:t>
+                            </m:r>
+                          </m:sub>
+                        </m:sSub>
+                      </m:oMath>
+                    </m:oMathPara>
+                  </a14:m>
+                  <a:endParaRPr lang="en-US" sz="2400" b="1" dirty="0">
+                    <a:solidFill>
+                      <a:schemeClr val="bg1"/>
+                    </a:solidFill>
+                  </a:endParaRPr>
+                </a:p>
+              </p:txBody>
+            </p:sp>
+          </mc:Choice>
+          <mc:Fallback>
+            <p:sp>
+              <p:nvSpPr>
+                <p:cNvPr id="32" name="TextBox 31">
+                  <a:extLst>
+                    <a:ext uri="{FF2B5EF4-FFF2-40B4-BE49-F238E27FC236}">
+                      <a16:creationId xmlns:a16="http://schemas.microsoft.com/office/drawing/2014/main" id="{723F16E3-8206-36D0-8CD8-8945A0493065}"/>
+                    </a:ext>
+                  </a:extLst>
+                </p:cNvPr>
+                <p:cNvSpPr txBox="1">
+                  <a:spLocks noRot="1" noChangeAspect="1" noMove="1" noResize="1" noEditPoints="1" noAdjustHandles="1" noChangeArrowheads="1" noChangeShapeType="1" noTextEdit="1"/>
+                </p:cNvSpPr>
+                <p:nvPr/>
+              </p:nvSpPr>
+              <p:spPr>
+                <a:xfrm>
+                  <a:off x="2298433" y="2903358"/>
+                  <a:ext cx="641032" cy="461665"/>
+                </a:xfrm>
+                <a:prstGeom prst="rect">
+                  <a:avLst/>
+                </a:prstGeom>
+                <a:blipFill>
+                  <a:blip r:embed="rId7"/>
+                  <a:stretch>
+                    <a:fillRect/>
+                  </a:stretch>
+                </a:blipFill>
+                <a:ln w="19050">
+                  <a:solidFill>
+                    <a:srgbClr val="C00000"/>
+                  </a:solidFill>
+                </a:ln>
+              </p:spPr>
+              <p:txBody>
+                <a:bodyPr/>
+                <a:lstStyle/>
+                <a:p>
+                  <a:r>
+                    <a:rPr lang="en-US">
+                      <a:noFill/>
+                    </a:rPr>
+                    <a:t> </a:t>
+                  </a:r>
+                </a:p>
+              </p:txBody>
+            </p:sp>
+          </mc:Fallback>
+        </mc:AlternateContent>
+        <mc:AlternateContent xmlns:mc="http://schemas.openxmlformats.org/markup-compatibility/2006">
+          <mc:Choice xmlns:a14="http://schemas.microsoft.com/office/drawing/2010/main" Requires="a14">
+            <p:sp>
+              <p:nvSpPr>
+                <p:cNvPr id="33" name="TextBox 32">
+                  <a:extLst>
+                    <a:ext uri="{FF2B5EF4-FFF2-40B4-BE49-F238E27FC236}">
+                      <a16:creationId xmlns:a16="http://schemas.microsoft.com/office/drawing/2014/main" id="{9E0490DA-EA3F-93AB-D5D4-8341117CED35}"/>
+                    </a:ext>
+                  </a:extLst>
+                </p:cNvPr>
+                <p:cNvSpPr txBox="1"/>
+                <p:nvPr/>
+              </p:nvSpPr>
+              <p:spPr>
+                <a:xfrm>
+                  <a:off x="465982" y="2632490"/>
+                  <a:ext cx="740343" cy="461665"/>
+                </a:xfrm>
+                <a:prstGeom prst="rect">
+                  <a:avLst/>
+                </a:prstGeom>
+                <a:noFill/>
+              </p:spPr>
+              <p:txBody>
+                <a:bodyPr wrap="square">
+                  <a:spAutoFit/>
+                </a:bodyPr>
+                <a:lstStyle/>
+                <a:p>
+                  <a:pPr/>
+                  <a14:m>
+                    <m:oMathPara xmlns:m="http://schemas.openxmlformats.org/officeDocument/2006/math">
+                      <m:oMathParaPr>
+                        <m:jc m:val="left"/>
+                      </m:oMathParaPr>
+                      <m:oMath xmlns:m="http://schemas.openxmlformats.org/officeDocument/2006/math">
+                        <m:sSub>
+                          <m:sSubPr>
+                            <m:ctrlPr>
+                              <a:rPr lang="de-DE" sz="2400" b="0" i="1" smtClean="0">
+                                <a:solidFill>
+                                  <a:schemeClr val="bg1"/>
+                                </a:solidFill>
+                                <a:latin typeface="Cambria Math" panose="02040503050406030204" pitchFamily="18" charset="0"/>
+                              </a:rPr>
+                            </m:ctrlPr>
+                          </m:sSubPr>
+                          <m:e>
+                            <m:r>
+                              <m:rPr>
+                                <m:sty m:val="p"/>
+                              </m:rPr>
+                              <a:rPr lang="de-DE" sz="2400" b="0" i="1" smtClean="0">
+                                <a:solidFill>
+                                  <a:schemeClr val="bg1"/>
+                                </a:solidFill>
+                                <a:latin typeface="Cambria Math" panose="02040503050406030204" pitchFamily="18" charset="0"/>
+                              </a:rPr>
+                              <m:t>m</m:t>
+                            </m:r>
+                          </m:e>
+                          <m:sub>
+                            <m:r>
+                              <a:rPr lang="de-DE" sz="2400" b="0" i="1" smtClean="0">
+                                <a:solidFill>
+                                  <a:schemeClr val="bg1"/>
+                                </a:solidFill>
+                                <a:latin typeface="Cambria Math" panose="02040503050406030204" pitchFamily="18" charset="0"/>
+                              </a:rPr>
+                              <m:t>2</m:t>
+                            </m:r>
+                          </m:sub>
+                        </m:sSub>
+                      </m:oMath>
+                    </m:oMathPara>
+                  </a14:m>
+                  <a:endParaRPr lang="en-US" sz="2400" dirty="0">
+                    <a:solidFill>
+                      <a:schemeClr val="bg1"/>
+                    </a:solidFill>
+                  </a:endParaRPr>
+                </a:p>
+              </p:txBody>
+            </p:sp>
+          </mc:Choice>
+          <mc:Fallback>
+            <p:sp>
+              <p:nvSpPr>
+                <p:cNvPr id="33" name="TextBox 32">
+                  <a:extLst>
+                    <a:ext uri="{FF2B5EF4-FFF2-40B4-BE49-F238E27FC236}">
+                      <a16:creationId xmlns:a16="http://schemas.microsoft.com/office/drawing/2014/main" id="{9E0490DA-EA3F-93AB-D5D4-8341117CED35}"/>
+                    </a:ext>
+                  </a:extLst>
+                </p:cNvPr>
+                <p:cNvSpPr txBox="1">
+                  <a:spLocks noRot="1" noChangeAspect="1" noMove="1" noResize="1" noEditPoints="1" noAdjustHandles="1" noChangeArrowheads="1" noChangeShapeType="1" noTextEdit="1"/>
+                </p:cNvSpPr>
+                <p:nvPr/>
+              </p:nvSpPr>
+              <p:spPr>
+                <a:xfrm>
+                  <a:off x="465982" y="2632490"/>
+                  <a:ext cx="740343" cy="461665"/>
+                </a:xfrm>
+                <a:prstGeom prst="rect">
+                  <a:avLst/>
+                </a:prstGeom>
+                <a:blipFill>
+                  <a:blip r:embed="rId8"/>
+                  <a:stretch>
+                    <a:fillRect/>
+                  </a:stretch>
+                </a:blipFill>
+              </p:spPr>
+              <p:txBody>
+                <a:bodyPr/>
+                <a:lstStyle/>
+                <a:p>
+                  <a:r>
+                    <a:rPr lang="en-US">
+                      <a:noFill/>
+                    </a:rPr>
+                    <a:t> </a:t>
+                  </a:r>
+                </a:p>
+              </p:txBody>
+            </p:sp>
+          </mc:Fallback>
+        </mc:AlternateContent>
+        <mc:AlternateContent xmlns:mc="http://schemas.openxmlformats.org/markup-compatibility/2006">
+          <mc:Choice xmlns:a14="http://schemas.microsoft.com/office/drawing/2010/main" Requires="a14">
+            <p:sp>
+              <p:nvSpPr>
+                <p:cNvPr id="40" name="TextBox 39">
+                  <a:extLst>
+                    <a:ext uri="{FF2B5EF4-FFF2-40B4-BE49-F238E27FC236}">
+                      <a16:creationId xmlns:a16="http://schemas.microsoft.com/office/drawing/2014/main" id="{1C880405-ADCD-FBF7-9406-D9BCB78F26F3}"/>
+                    </a:ext>
+                  </a:extLst>
+                </p:cNvPr>
+                <p:cNvSpPr txBox="1"/>
+                <p:nvPr/>
+              </p:nvSpPr>
+              <p:spPr>
+                <a:xfrm>
+                  <a:off x="2121068" y="1391826"/>
+                  <a:ext cx="651146" cy="461665"/>
+                </a:xfrm>
+                <a:prstGeom prst="rect">
+                  <a:avLst/>
+                </a:prstGeom>
+                <a:noFill/>
+                <a:ln w="19050">
+                  <a:solidFill>
+                    <a:srgbClr val="C00000"/>
+                  </a:solidFill>
+                </a:ln>
+              </p:spPr>
+              <p:txBody>
+                <a:bodyPr wrap="square">
+                  <a:spAutoFit/>
+                </a:bodyPr>
+                <a:lstStyle/>
+                <a:p>
+                  <a:pPr/>
+                  <a14:m>
+                    <m:oMathPara xmlns:m="http://schemas.openxmlformats.org/officeDocument/2006/math">
+                      <m:oMathParaPr>
+                        <m:jc m:val="centerGroup"/>
+                      </m:oMathParaPr>
+                      <m:oMath xmlns:m="http://schemas.openxmlformats.org/officeDocument/2006/math">
+                        <m:sSub>
+                          <m:sSubPr>
+                            <m:ctrlPr>
+                              <a:rPr lang="de-DE" sz="2400" b="1" i="1" smtClean="0">
+                                <a:solidFill>
+                                  <a:schemeClr val="bg1"/>
+                                </a:solidFill>
+                                <a:latin typeface="Cambria Math" panose="02040503050406030204" pitchFamily="18" charset="0"/>
+                              </a:rPr>
+                            </m:ctrlPr>
+                          </m:sSubPr>
+                          <m:e>
+                            <m:r>
+                              <a:rPr lang="de-DE" sz="2400" b="1" i="1" smtClean="0">
+                                <a:solidFill>
+                                  <a:schemeClr val="bg1"/>
+                                </a:solidFill>
+                                <a:latin typeface="Cambria Math" panose="02040503050406030204" pitchFamily="18" charset="0"/>
+                              </a:rPr>
+                              <m:t>𝒎</m:t>
+                            </m:r>
+                          </m:e>
+                          <m:sub>
+                            <m:r>
+                              <a:rPr lang="de-DE" sz="2400" b="1" i="1" smtClean="0">
+                                <a:solidFill>
+                                  <a:schemeClr val="bg1"/>
+                                </a:solidFill>
+                                <a:latin typeface="Cambria Math" panose="02040503050406030204" pitchFamily="18" charset="0"/>
+                              </a:rPr>
+                              <m:t>𝒛</m:t>
+                            </m:r>
+                          </m:sub>
+                        </m:sSub>
+                      </m:oMath>
+                    </m:oMathPara>
+                  </a14:m>
+                  <a:endParaRPr lang="en-US" sz="2400" b="1" dirty="0">
+                    <a:solidFill>
+                      <a:schemeClr val="bg1"/>
+                    </a:solidFill>
+                  </a:endParaRPr>
+                </a:p>
+              </p:txBody>
+            </p:sp>
+          </mc:Choice>
+          <mc:Fallback>
+            <p:sp>
+              <p:nvSpPr>
+                <p:cNvPr id="40" name="TextBox 39">
+                  <a:extLst>
+                    <a:ext uri="{FF2B5EF4-FFF2-40B4-BE49-F238E27FC236}">
+                      <a16:creationId xmlns:a16="http://schemas.microsoft.com/office/drawing/2014/main" id="{1C880405-ADCD-FBF7-9406-D9BCB78F26F3}"/>
+                    </a:ext>
+                  </a:extLst>
+                </p:cNvPr>
+                <p:cNvSpPr txBox="1">
+                  <a:spLocks noRot="1" noChangeAspect="1" noMove="1" noResize="1" noEditPoints="1" noAdjustHandles="1" noChangeArrowheads="1" noChangeShapeType="1" noTextEdit="1"/>
+                </p:cNvSpPr>
+                <p:nvPr/>
+              </p:nvSpPr>
+              <p:spPr>
+                <a:xfrm>
+                  <a:off x="2121068" y="1391826"/>
+                  <a:ext cx="651146" cy="461665"/>
+                </a:xfrm>
+                <a:prstGeom prst="rect">
+                  <a:avLst/>
+                </a:prstGeom>
+                <a:blipFill>
+                  <a:blip r:embed="rId9"/>
+                  <a:stretch>
+                    <a:fillRect/>
+                  </a:stretch>
+                </a:blipFill>
+                <a:ln w="19050">
+                  <a:solidFill>
+                    <a:srgbClr val="C00000"/>
+                  </a:solidFill>
+                </a:ln>
+              </p:spPr>
+              <p:txBody>
+                <a:bodyPr/>
+                <a:lstStyle/>
+                <a:p>
+                  <a:r>
+                    <a:rPr lang="en-US">
+                      <a:noFill/>
+                    </a:rPr>
+                    <a:t> </a:t>
+                  </a:r>
+                </a:p>
+              </p:txBody>
+            </p:sp>
+          </mc:Fallback>
+        </mc:AlternateContent>
+        <mc:AlternateContent xmlns:mc="http://schemas.openxmlformats.org/markup-compatibility/2006">
+          <mc:Choice xmlns:a14="http://schemas.microsoft.com/office/drawing/2010/main" Requires="a14">
+            <p:sp>
+              <p:nvSpPr>
+                <p:cNvPr id="45" name="TextBox 44">
+                  <a:extLst>
+                    <a:ext uri="{FF2B5EF4-FFF2-40B4-BE49-F238E27FC236}">
+                      <a16:creationId xmlns:a16="http://schemas.microsoft.com/office/drawing/2014/main" id="{A2521AB9-1978-32E8-7F4C-C51C06880C5F}"/>
+                    </a:ext>
+                  </a:extLst>
+                </p:cNvPr>
+                <p:cNvSpPr txBox="1"/>
+                <p:nvPr/>
+              </p:nvSpPr>
+              <p:spPr>
+                <a:xfrm>
+                  <a:off x="1057862" y="1831144"/>
+                  <a:ext cx="970607" cy="461665"/>
+                </a:xfrm>
+                <a:prstGeom prst="rect">
+                  <a:avLst/>
+                </a:prstGeom>
+                <a:noFill/>
+              </p:spPr>
+              <p:txBody>
+                <a:bodyPr wrap="square">
+                  <a:spAutoFit/>
+                </a:bodyPr>
+                <a:lstStyle/>
+                <a:p>
+                  <a:pPr/>
+                  <a14:m>
+                    <m:oMathPara xmlns:m="http://schemas.openxmlformats.org/officeDocument/2006/math">
+                      <m:oMathParaPr>
+                        <m:jc m:val="centerGroup"/>
+                      </m:oMathParaPr>
+                      <m:oMath xmlns:m="http://schemas.openxmlformats.org/officeDocument/2006/math">
+                        <m:sSub>
+                          <m:sSubPr>
+                            <m:ctrlPr>
+                              <a:rPr lang="de-DE" sz="2400" b="0" i="1" smtClean="0">
+                                <a:solidFill>
+                                  <a:schemeClr val="bg1"/>
+                                </a:solidFill>
+                                <a:latin typeface="Cambria Math" panose="02040503050406030204" pitchFamily="18" charset="0"/>
+                              </a:rPr>
+                            </m:ctrlPr>
+                          </m:sSubPr>
+                          <m:e>
+                            <m:r>
+                              <m:rPr>
+                                <m:sty m:val="p"/>
+                              </m:rPr>
+                              <a:rPr lang="de-DE" sz="2400" b="0" i="1" smtClean="0">
+                                <a:solidFill>
+                                  <a:schemeClr val="bg1"/>
+                                </a:solidFill>
+                                <a:latin typeface="Cambria Math" panose="02040503050406030204" pitchFamily="18" charset="0"/>
+                              </a:rPr>
+                              <m:t>r</m:t>
+                            </m:r>
+                          </m:e>
+                          <m:sub>
+                            <m:r>
+                              <a:rPr lang="de-DE" sz="2400" b="0" i="1" smtClean="0">
+                                <a:solidFill>
+                                  <a:schemeClr val="bg1"/>
+                                </a:solidFill>
+                                <a:latin typeface="Cambria Math" panose="02040503050406030204" pitchFamily="18" charset="0"/>
+                              </a:rPr>
+                              <m:t>1</m:t>
+                            </m:r>
+                          </m:sub>
+                        </m:sSub>
+                      </m:oMath>
+                    </m:oMathPara>
+                  </a14:m>
+                  <a:endParaRPr lang="en-US" sz="2400" dirty="0">
+                    <a:solidFill>
+                      <a:schemeClr val="bg1"/>
+                    </a:solidFill>
+                  </a:endParaRPr>
+                </a:p>
+              </p:txBody>
+            </p:sp>
+          </mc:Choice>
+          <mc:Fallback>
+            <p:sp>
+              <p:nvSpPr>
+                <p:cNvPr id="45" name="TextBox 44">
+                  <a:extLst>
+                    <a:ext uri="{FF2B5EF4-FFF2-40B4-BE49-F238E27FC236}">
+                      <a16:creationId xmlns:a16="http://schemas.microsoft.com/office/drawing/2014/main" id="{A2521AB9-1978-32E8-7F4C-C51C06880C5F}"/>
+                    </a:ext>
+                  </a:extLst>
+                </p:cNvPr>
+                <p:cNvSpPr txBox="1">
+                  <a:spLocks noRot="1" noChangeAspect="1" noMove="1" noResize="1" noEditPoints="1" noAdjustHandles="1" noChangeArrowheads="1" noChangeShapeType="1" noTextEdit="1"/>
+                </p:cNvSpPr>
+                <p:nvPr/>
+              </p:nvSpPr>
+              <p:spPr>
+                <a:xfrm>
+                  <a:off x="1057862" y="1831144"/>
+                  <a:ext cx="970607" cy="461665"/>
+                </a:xfrm>
+                <a:prstGeom prst="rect">
+                  <a:avLst/>
+                </a:prstGeom>
+                <a:blipFill>
+                  <a:blip r:embed="rId10"/>
+                  <a:stretch>
+                    <a:fillRect/>
+                  </a:stretch>
+                </a:blipFill>
+              </p:spPr>
+              <p:txBody>
+                <a:bodyPr/>
+                <a:lstStyle/>
+                <a:p>
+                  <a:r>
+                    <a:rPr lang="en-US">
+                      <a:noFill/>
+                    </a:rPr>
+                    <a:t> </a:t>
+                  </a:r>
+                </a:p>
+              </p:txBody>
+            </p:sp>
+          </mc:Fallback>
+        </mc:AlternateContent>
+        <mc:AlternateContent xmlns:mc="http://schemas.openxmlformats.org/markup-compatibility/2006">
+          <mc:Choice xmlns:a14="http://schemas.microsoft.com/office/drawing/2010/main" Requires="a14">
+            <p:sp>
+              <p:nvSpPr>
+                <p:cNvPr id="46" name="TextBox 45">
+                  <a:extLst>
+                    <a:ext uri="{FF2B5EF4-FFF2-40B4-BE49-F238E27FC236}">
+                      <a16:creationId xmlns:a16="http://schemas.microsoft.com/office/drawing/2014/main" id="{D20D86B1-5E70-338F-D88A-B102B98C364B}"/>
+                    </a:ext>
+                  </a:extLst>
+                </p:cNvPr>
+                <p:cNvSpPr txBox="1"/>
+                <p:nvPr/>
+              </p:nvSpPr>
+              <p:spPr>
+                <a:xfrm>
+                  <a:off x="1086781" y="2439570"/>
+                  <a:ext cx="970607" cy="461665"/>
+                </a:xfrm>
+                <a:prstGeom prst="rect">
+                  <a:avLst/>
+                </a:prstGeom>
+                <a:noFill/>
+              </p:spPr>
+              <p:txBody>
+                <a:bodyPr wrap="square">
+                  <a:spAutoFit/>
+                </a:bodyPr>
+                <a:lstStyle/>
+                <a:p>
+                  <a:pPr/>
+                  <a14:m>
+                    <m:oMathPara xmlns:m="http://schemas.openxmlformats.org/officeDocument/2006/math">
+                      <m:oMathParaPr>
+                        <m:jc m:val="centerGroup"/>
+                      </m:oMathParaPr>
+                      <m:oMath xmlns:m="http://schemas.openxmlformats.org/officeDocument/2006/math">
+                        <m:sSub>
+                          <m:sSubPr>
+                            <m:ctrlPr>
+                              <a:rPr lang="de-DE" sz="2400" b="0" i="1" smtClean="0">
+                                <a:solidFill>
+                                  <a:schemeClr val="bg1"/>
+                                </a:solidFill>
+                                <a:latin typeface="Cambria Math" panose="02040503050406030204" pitchFamily="18" charset="0"/>
+                              </a:rPr>
+                            </m:ctrlPr>
+                          </m:sSubPr>
+                          <m:e>
+                            <m:r>
+                              <m:rPr>
+                                <m:sty m:val="p"/>
+                              </m:rPr>
+                              <a:rPr lang="de-DE" sz="2400" b="0" i="1" smtClean="0">
+                                <a:solidFill>
+                                  <a:schemeClr val="bg1"/>
+                                </a:solidFill>
+                                <a:latin typeface="Cambria Math" panose="02040503050406030204" pitchFamily="18" charset="0"/>
+                              </a:rPr>
+                              <m:t>r</m:t>
+                            </m:r>
+                          </m:e>
+                          <m:sub>
+                            <m:r>
+                              <a:rPr lang="de-DE" sz="2400" b="0" i="1" smtClean="0">
+                                <a:solidFill>
+                                  <a:schemeClr val="bg1"/>
+                                </a:solidFill>
+                                <a:latin typeface="Cambria Math" panose="02040503050406030204" pitchFamily="18" charset="0"/>
+                              </a:rPr>
+                              <m:t>2</m:t>
+                            </m:r>
+                          </m:sub>
+                        </m:sSub>
+                      </m:oMath>
+                    </m:oMathPara>
+                  </a14:m>
+                  <a:endParaRPr lang="en-US" sz="2400" dirty="0">
+                    <a:solidFill>
+                      <a:schemeClr val="bg1"/>
+                    </a:solidFill>
+                  </a:endParaRPr>
+                </a:p>
+              </p:txBody>
+            </p:sp>
+          </mc:Choice>
+          <mc:Fallback>
+            <p:sp>
+              <p:nvSpPr>
+                <p:cNvPr id="46" name="TextBox 45">
+                  <a:extLst>
+                    <a:ext uri="{FF2B5EF4-FFF2-40B4-BE49-F238E27FC236}">
+                      <a16:creationId xmlns:a16="http://schemas.microsoft.com/office/drawing/2014/main" id="{D20D86B1-5E70-338F-D88A-B102B98C364B}"/>
+                    </a:ext>
+                  </a:extLst>
+                </p:cNvPr>
+                <p:cNvSpPr txBox="1">
+                  <a:spLocks noRot="1" noChangeAspect="1" noMove="1" noResize="1" noEditPoints="1" noAdjustHandles="1" noChangeArrowheads="1" noChangeShapeType="1" noTextEdit="1"/>
+                </p:cNvSpPr>
+                <p:nvPr/>
+              </p:nvSpPr>
+              <p:spPr>
+                <a:xfrm>
+                  <a:off x="1086781" y="2439570"/>
+                  <a:ext cx="970607" cy="461665"/>
+                </a:xfrm>
+                <a:prstGeom prst="rect">
+                  <a:avLst/>
+                </a:prstGeom>
+                <a:blipFill>
+                  <a:blip r:embed="rId11"/>
+                  <a:stretch>
+                    <a:fillRect/>
+                  </a:stretch>
+                </a:blipFill>
+              </p:spPr>
+              <p:txBody>
+                <a:bodyPr/>
+                <a:lstStyle/>
+                <a:p>
+                  <a:r>
+                    <a:rPr lang="en-US">
+                      <a:noFill/>
+                    </a:rPr>
+                    <a:t> </a:t>
+                  </a:r>
+                </a:p>
+              </p:txBody>
+            </p:sp>
+          </mc:Fallback>
+        </mc:AlternateContent>
+        <mc:AlternateContent xmlns:mc="http://schemas.openxmlformats.org/markup-compatibility/2006">
+          <mc:Choice xmlns:a14="http://schemas.microsoft.com/office/drawing/2010/main" Requires="a14">
+            <p:sp>
+              <p:nvSpPr>
+                <p:cNvPr id="48" name="TextBox 47">
+                  <a:extLst>
+                    <a:ext uri="{FF2B5EF4-FFF2-40B4-BE49-F238E27FC236}">
+                      <a16:creationId xmlns:a16="http://schemas.microsoft.com/office/drawing/2014/main" id="{30B18A39-9866-0789-02AE-BCAA83EA05F2}"/>
+                    </a:ext>
+                  </a:extLst>
+                </p:cNvPr>
+                <p:cNvSpPr txBox="1"/>
+                <p:nvPr/>
+              </p:nvSpPr>
+              <p:spPr>
+                <a:xfrm>
+                  <a:off x="2871649" y="1730967"/>
+                  <a:ext cx="480273" cy="461665"/>
+                </a:xfrm>
+                <a:prstGeom prst="rect">
+                  <a:avLst/>
+                </a:prstGeom>
+                <a:noFill/>
+              </p:spPr>
+              <p:txBody>
+                <a:bodyPr wrap="square">
+                  <a:spAutoFit/>
+                </a:bodyPr>
+                <a:lstStyle/>
+                <a:p>
+                  <a:pPr/>
+                  <a14:m>
+                    <m:oMathPara xmlns:m="http://schemas.openxmlformats.org/officeDocument/2006/math">
+                      <m:oMathParaPr>
+                        <m:jc m:val="centerGroup"/>
+                      </m:oMathParaPr>
+                      <m:oMath xmlns:m="http://schemas.openxmlformats.org/officeDocument/2006/math">
+                        <m:sSub>
+                          <m:sSubPr>
+                            <m:ctrlPr>
+                              <a:rPr lang="de-DE" sz="2400" b="0" i="1" smtClean="0">
+                                <a:solidFill>
+                                  <a:schemeClr val="bg1"/>
+                                </a:solidFill>
+                                <a:latin typeface="Cambria Math" panose="02040503050406030204" pitchFamily="18" charset="0"/>
+                              </a:rPr>
+                            </m:ctrlPr>
+                          </m:sSubPr>
+                          <m:e>
+                            <m:r>
+                              <m:rPr>
+                                <m:sty m:val="p"/>
+                              </m:rPr>
+                              <a:rPr lang="de-DE" sz="2400" b="0" i="1" smtClean="0">
+                                <a:solidFill>
+                                  <a:schemeClr val="bg1"/>
+                                </a:solidFill>
+                                <a:latin typeface="Cambria Math" panose="02040503050406030204" pitchFamily="18" charset="0"/>
+                              </a:rPr>
+                              <m:t>r</m:t>
+                            </m:r>
+                          </m:e>
+                          <m:sub>
+                            <m:r>
+                              <a:rPr lang="de-DE" sz="2400" b="0" i="1" smtClean="0">
+                                <a:solidFill>
+                                  <a:schemeClr val="bg1"/>
+                                </a:solidFill>
+                                <a:latin typeface="Cambria Math" panose="02040503050406030204" pitchFamily="18" charset="0"/>
+                              </a:rPr>
+                              <m:t>3</m:t>
+                            </m:r>
+                          </m:sub>
+                        </m:sSub>
+                      </m:oMath>
+                    </m:oMathPara>
+                  </a14:m>
+                  <a:endParaRPr lang="en-US" sz="2400" dirty="0">
+                    <a:solidFill>
+                      <a:schemeClr val="bg1"/>
+                    </a:solidFill>
+                  </a:endParaRPr>
+                </a:p>
+              </p:txBody>
+            </p:sp>
+          </mc:Choice>
+          <mc:Fallback>
+            <p:sp>
+              <p:nvSpPr>
+                <p:cNvPr id="48" name="TextBox 47">
+                  <a:extLst>
+                    <a:ext uri="{FF2B5EF4-FFF2-40B4-BE49-F238E27FC236}">
+                      <a16:creationId xmlns:a16="http://schemas.microsoft.com/office/drawing/2014/main" id="{30B18A39-9866-0789-02AE-BCAA83EA05F2}"/>
+                    </a:ext>
+                  </a:extLst>
+                </p:cNvPr>
+                <p:cNvSpPr txBox="1">
+                  <a:spLocks noRot="1" noChangeAspect="1" noMove="1" noResize="1" noEditPoints="1" noAdjustHandles="1" noChangeArrowheads="1" noChangeShapeType="1" noTextEdit="1"/>
+                </p:cNvSpPr>
+                <p:nvPr/>
+              </p:nvSpPr>
+              <p:spPr>
+                <a:xfrm>
+                  <a:off x="2871649" y="1730967"/>
+                  <a:ext cx="480273" cy="461665"/>
+                </a:xfrm>
+                <a:prstGeom prst="rect">
+                  <a:avLst/>
+                </a:prstGeom>
+                <a:blipFill>
+                  <a:blip r:embed="rId12"/>
+                  <a:stretch>
+                    <a:fillRect/>
+                  </a:stretch>
+                </a:blipFill>
+              </p:spPr>
+              <p:txBody>
+                <a:bodyPr/>
+                <a:lstStyle/>
+                <a:p>
+                  <a:r>
+                    <a:rPr lang="en-US">
+                      <a:noFill/>
+                    </a:rPr>
+                    <a:t> </a:t>
+                  </a:r>
+                </a:p>
+              </p:txBody>
+            </p:sp>
+          </mc:Fallback>
+        </mc:AlternateContent>
+      </p:grpSp>
+      <p:sp>
+        <p:nvSpPr>
+          <p:cNvPr id="7" name="Rectangle 6">
+            <a:extLst>
+              <a:ext uri="{FF2B5EF4-FFF2-40B4-BE49-F238E27FC236}">
+                <a16:creationId xmlns:a16="http://schemas.microsoft.com/office/drawing/2014/main" id="{DD754F22-71D8-D172-4D3F-6B805B9827AD}"/>
+              </a:ext>
+            </a:extLst>
+          </p:cNvPr>
+          <p:cNvSpPr/>
           <p:nvPr/>
         </p:nvSpPr>
         <p:spPr>
           <a:xfrm>
-            <a:off x="1315417" y="1484012"/>
-            <a:ext cx="365760" cy="365760"/>
+            <a:off x="6320790" y="491490"/>
+            <a:ext cx="834390" cy="480060"/>
           </a:xfrm>
-          <a:prstGeom prst="ellipse">
+          <a:prstGeom prst="rect">
             <a:avLst/>
           </a:prstGeom>
+          <a:noFill/>
+          <a:ln>
+            <a:solidFill>
+              <a:srgbClr val="C00000"/>
+            </a:solidFill>
+          </a:ln>
         </p:spPr>
         <p:style>
           <a:lnRef idx="2">
@@ -11435,26 +12902,30 @@
       </p:sp>
       <p:sp>
         <p:nvSpPr>
-          <p:cNvPr id="18" name="Oval 17">
+          <p:cNvPr id="8" name="Rectangle 7">
             <a:extLst>
               <a:ext uri="{FF2B5EF4-FFF2-40B4-BE49-F238E27FC236}">
-                <a16:creationId xmlns:a16="http://schemas.microsoft.com/office/drawing/2014/main" id="{6DACA316-230D-D8CD-EF68-29B01C3EA119}"/>
+                <a16:creationId xmlns:a16="http://schemas.microsoft.com/office/drawing/2014/main" id="{AD712611-33ED-ED51-7A02-90CB92F657A3}"/>
               </a:ext>
             </a:extLst>
           </p:cNvPr>
-          <p:cNvSpPr>
-            <a:spLocks noChangeAspect="1"/>
-          </p:cNvSpPr>
+          <p:cNvSpPr/>
           <p:nvPr/>
         </p:nvSpPr>
         <p:spPr>
           <a:xfrm>
-            <a:off x="1326847" y="2951311"/>
-            <a:ext cx="365760" cy="365760"/>
+            <a:off x="8494912" y="1489501"/>
+            <a:ext cx="954912" cy="365760"/>
           </a:xfrm>
-          <a:prstGeom prst="ellipse">
+          <a:prstGeom prst="rect">
             <a:avLst/>
           </a:prstGeom>
+          <a:noFill/>
+          <a:ln>
+            <a:solidFill>
+              <a:srgbClr val="C00000"/>
+            </a:solidFill>
+          </a:ln>
         </p:spPr>
         <p:style>
           <a:lnRef idx="2">
@@ -11483,26 +12954,30 @@
       </p:sp>
       <p:sp>
         <p:nvSpPr>
-          <p:cNvPr id="19" name="Oval 18">
+          <p:cNvPr id="9" name="Rectangle 8">
             <a:extLst>
               <a:ext uri="{FF2B5EF4-FFF2-40B4-BE49-F238E27FC236}">
-                <a16:creationId xmlns:a16="http://schemas.microsoft.com/office/drawing/2014/main" id="{815BBFC4-0F99-2CC9-D561-7F255E117A6E}"/>
+                <a16:creationId xmlns:a16="http://schemas.microsoft.com/office/drawing/2014/main" id="{8F786605-5CD3-7047-B93C-CC82CD3CB78A}"/>
               </a:ext>
             </a:extLst>
           </p:cNvPr>
-          <p:cNvSpPr>
-            <a:spLocks noChangeAspect="1"/>
-          </p:cNvSpPr>
+          <p:cNvSpPr/>
           <p:nvPr/>
         </p:nvSpPr>
         <p:spPr>
           <a:xfrm>
-            <a:off x="2858467" y="2257891"/>
-            <a:ext cx="365760" cy="365760"/>
+            <a:off x="4430977" y="1695241"/>
+            <a:ext cx="1608876" cy="365760"/>
           </a:xfrm>
-          <a:prstGeom prst="ellipse">
+          <a:prstGeom prst="rect">
             <a:avLst/>
           </a:prstGeom>
+          <a:noFill/>
+          <a:ln>
+            <a:solidFill>
+              <a:srgbClr val="C00000"/>
+            </a:solidFill>
+          </a:ln>
         </p:spPr>
         <p:style>
           <a:lnRef idx="2">
@@ -11529,1201 +13004,93 @@
           </a:p>
         </p:txBody>
       </p:sp>
-      <p:cxnSp>
-        <p:nvCxnSpPr>
-          <p:cNvPr id="21" name="Straight Arrow Connector 20">
+      <p:sp>
+        <p:nvSpPr>
+          <p:cNvPr id="10" name="Rectangle 9">
             <a:extLst>
               <a:ext uri="{FF2B5EF4-FFF2-40B4-BE49-F238E27FC236}">
-                <a16:creationId xmlns:a16="http://schemas.microsoft.com/office/drawing/2014/main" id="{7C82803E-B556-906C-0FD9-FCE6FB1F606B}"/>
+                <a16:creationId xmlns:a16="http://schemas.microsoft.com/office/drawing/2014/main" id="{EE98B2B5-2D78-ADAE-87E6-2EA53EE0A6C3}"/>
               </a:ext>
             </a:extLst>
           </p:cNvPr>
-          <p:cNvCxnSpPr>
-            <a:cxnSpLocks/>
-            <a:stCxn id="18" idx="6"/>
-            <a:endCxn id="19" idx="3"/>
-          </p:cNvCxnSpPr>
+          <p:cNvSpPr/>
           <p:nvPr/>
-        </p:nvCxnSpPr>
+        </p:nvSpPr>
         <p:spPr>
-          <a:xfrm flipV="1">
-            <a:off x="1692607" y="2570087"/>
-            <a:ext cx="1219424" cy="564104"/>
+          <a:xfrm>
+            <a:off x="4475694" y="3562914"/>
+            <a:ext cx="1608876" cy="365760"/>
           </a:xfrm>
-          <a:prstGeom prst="straightConnector1">
+          <a:prstGeom prst="rect">
             <a:avLst/>
           </a:prstGeom>
+          <a:noFill/>
           <a:ln>
-            <a:tailEnd type="triangle" w="lg" len="lg"/>
+            <a:solidFill>
+              <a:srgbClr val="C00000"/>
+            </a:solidFill>
           </a:ln>
         </p:spPr>
         <p:style>
           <a:lnRef idx="2">
-            <a:schemeClr val="accent1"/>
+            <a:schemeClr val="accent1">
+              <a:shade val="15000"/>
+            </a:schemeClr>
           </a:lnRef>
-          <a:fillRef idx="0">
+          <a:fillRef idx="1">
             <a:schemeClr val="accent1"/>
           </a:fillRef>
-          <a:effectRef idx="1">
+          <a:effectRef idx="0">
             <a:schemeClr val="accent1"/>
           </a:effectRef>
           <a:fontRef idx="minor">
-            <a:schemeClr val="tx1"/>
+            <a:schemeClr val="lt1"/>
           </a:fontRef>
         </p:style>
-      </p:cxnSp>
-      <p:cxnSp>
-        <p:nvCxnSpPr>
-          <p:cNvPr id="24" name="Straight Arrow Connector 23">
+        <p:txBody>
+          <a:bodyPr rtlCol="0" anchor="ctr"/>
+          <a:lstStyle/>
+          <a:p>
+            <a:pPr algn="ctr"/>
+            <a:endParaRPr lang="en-US"/>
+          </a:p>
+        </p:txBody>
+      </p:sp>
+      <p:sp>
+        <p:nvSpPr>
+          <p:cNvPr id="12" name="TextBox 11">
             <a:extLst>
               <a:ext uri="{FF2B5EF4-FFF2-40B4-BE49-F238E27FC236}">
-                <a16:creationId xmlns:a16="http://schemas.microsoft.com/office/drawing/2014/main" id="{194BED61-5805-76F0-4414-6C51BCF23D50}"/>
+                <a16:creationId xmlns:a16="http://schemas.microsoft.com/office/drawing/2014/main" id="{B813F352-DC28-BBE8-BFFF-5717980948B8}"/>
               </a:ext>
             </a:extLst>
           </p:cNvPr>
-          <p:cNvCxnSpPr>
-            <a:stCxn id="17" idx="6"/>
-            <a:endCxn id="19" idx="1"/>
-          </p:cNvCxnSpPr>
+          <p:cNvSpPr txBox="1"/>
           <p:nvPr/>
-        </p:nvCxnSpPr>
+        </p:nvSpPr>
         <p:spPr>
           <a:xfrm>
-            <a:off x="1681177" y="1666892"/>
-            <a:ext cx="1230854" cy="644563"/>
-          </a:xfrm>
-          <a:prstGeom prst="straightConnector1">
-            <a:avLst/>
-          </a:prstGeom>
-          <a:ln>
-            <a:tailEnd type="triangle" w="lg" len="lg"/>
-          </a:ln>
-        </p:spPr>
-        <p:style>
-          <a:lnRef idx="2">
-            <a:schemeClr val="accent1"/>
-          </a:lnRef>
-          <a:fillRef idx="0">
-            <a:schemeClr val="accent1"/>
-          </a:fillRef>
-          <a:effectRef idx="1">
-            <a:schemeClr val="accent1"/>
-          </a:effectRef>
-          <a:fontRef idx="minor">
-            <a:schemeClr val="tx1"/>
-          </a:fontRef>
-        </p:style>
-      </p:cxnSp>
-      <p:cxnSp>
-        <p:nvCxnSpPr>
-          <p:cNvPr id="25" name="Straight Arrow Connector 24">
-            <a:extLst>
-              <a:ext uri="{FF2B5EF4-FFF2-40B4-BE49-F238E27FC236}">
-                <a16:creationId xmlns:a16="http://schemas.microsoft.com/office/drawing/2014/main" id="{4CA272A9-A1B9-1E11-A374-2E2BA93B23DE}"/>
-              </a:ext>
-            </a:extLst>
-          </p:cNvPr>
-          <p:cNvCxnSpPr>
-            <a:cxnSpLocks/>
-          </p:cNvCxnSpPr>
-          <p:nvPr/>
-        </p:nvCxnSpPr>
-        <p:spPr>
-          <a:xfrm>
-            <a:off x="515317" y="1666892"/>
-            <a:ext cx="800100" cy="0"/>
-          </a:xfrm>
-          <a:prstGeom prst="straightConnector1">
-            <a:avLst/>
-          </a:prstGeom>
-          <a:ln>
-            <a:tailEnd type="triangle" w="lg" len="lg"/>
-          </a:ln>
-        </p:spPr>
-        <p:style>
-          <a:lnRef idx="2">
-            <a:schemeClr val="accent1"/>
-          </a:lnRef>
-          <a:fillRef idx="0">
-            <a:schemeClr val="accent1"/>
-          </a:fillRef>
-          <a:effectRef idx="1">
-            <a:schemeClr val="accent1"/>
-          </a:effectRef>
-          <a:fontRef idx="minor">
-            <a:schemeClr val="tx1"/>
-          </a:fontRef>
-        </p:style>
-      </p:cxnSp>
-      <p:cxnSp>
-        <p:nvCxnSpPr>
-          <p:cNvPr id="28" name="Straight Arrow Connector 27">
-            <a:extLst>
-              <a:ext uri="{FF2B5EF4-FFF2-40B4-BE49-F238E27FC236}">
-                <a16:creationId xmlns:a16="http://schemas.microsoft.com/office/drawing/2014/main" id="{5E69A336-30C0-D5CD-CA64-C0BCFB5DE8D0}"/>
-              </a:ext>
-            </a:extLst>
-          </p:cNvPr>
-          <p:cNvCxnSpPr>
-            <a:cxnSpLocks/>
-            <a:endCxn id="18" idx="2"/>
-          </p:cNvCxnSpPr>
-          <p:nvPr/>
-        </p:nvCxnSpPr>
-        <p:spPr>
-          <a:xfrm>
-            <a:off x="515317" y="3134191"/>
-            <a:ext cx="811530" cy="0"/>
-          </a:xfrm>
-          <a:prstGeom prst="straightConnector1">
-            <a:avLst/>
-          </a:prstGeom>
-          <a:ln>
-            <a:tailEnd type="triangle" w="lg" len="lg"/>
-          </a:ln>
-        </p:spPr>
-        <p:style>
-          <a:lnRef idx="2">
-            <a:schemeClr val="accent1"/>
-          </a:lnRef>
-          <a:fillRef idx="0">
-            <a:schemeClr val="accent1"/>
-          </a:fillRef>
-          <a:effectRef idx="1">
-            <a:schemeClr val="accent1"/>
-          </a:effectRef>
-          <a:fontRef idx="minor">
-            <a:schemeClr val="tx1"/>
-          </a:fontRef>
-        </p:style>
-      </p:cxnSp>
-      <p:cxnSp>
-        <p:nvCxnSpPr>
-          <p:cNvPr id="29" name="Straight Arrow Connector 28">
-            <a:extLst>
-              <a:ext uri="{FF2B5EF4-FFF2-40B4-BE49-F238E27FC236}">
-                <a16:creationId xmlns:a16="http://schemas.microsoft.com/office/drawing/2014/main" id="{B37C9D3C-7810-04DD-E4D9-BC6359EADF76}"/>
-              </a:ext>
-            </a:extLst>
-          </p:cNvPr>
-          <p:cNvCxnSpPr>
-            <a:cxnSpLocks/>
-          </p:cNvCxnSpPr>
-          <p:nvPr/>
-        </p:nvCxnSpPr>
-        <p:spPr>
-          <a:xfrm>
-            <a:off x="3224227" y="2425082"/>
-            <a:ext cx="800100" cy="0"/>
-          </a:xfrm>
-          <a:prstGeom prst="straightConnector1">
-            <a:avLst/>
-          </a:prstGeom>
-          <a:ln>
-            <a:tailEnd type="triangle" w="lg" len="lg"/>
-          </a:ln>
-        </p:spPr>
-        <p:style>
-          <a:lnRef idx="2">
-            <a:schemeClr val="accent1"/>
-          </a:lnRef>
-          <a:fillRef idx="0">
-            <a:schemeClr val="accent1"/>
-          </a:fillRef>
-          <a:effectRef idx="1">
-            <a:schemeClr val="accent1"/>
-          </a:effectRef>
-          <a:fontRef idx="minor">
-            <a:schemeClr val="tx1"/>
-          </a:fontRef>
-        </p:style>
-      </p:cxnSp>
-      <mc:AlternateContent xmlns:mc="http://schemas.openxmlformats.org/markup-compatibility/2006">
-        <mc:Choice xmlns:a14="http://schemas.microsoft.com/office/drawing/2010/main" Requires="a14">
-          <p:sp>
-            <p:nvSpPr>
-              <p:cNvPr id="31" name="TextBox 30">
-                <a:extLst>
-                  <a:ext uri="{FF2B5EF4-FFF2-40B4-BE49-F238E27FC236}">
-                    <a16:creationId xmlns:a16="http://schemas.microsoft.com/office/drawing/2014/main" id="{AFDA9619-46C1-35AA-8D39-D84883E83DEE}"/>
-                  </a:ext>
-                </a:extLst>
-              </p:cNvPr>
-              <p:cNvSpPr txBox="1"/>
-              <p:nvPr/>
-            </p:nvSpPr>
-            <p:spPr>
-              <a:xfrm>
-                <a:off x="-201915" y="1148627"/>
-                <a:ext cx="1006792" cy="461665"/>
-              </a:xfrm>
-              <a:prstGeom prst="rect">
-                <a:avLst/>
-              </a:prstGeom>
-              <a:noFill/>
-            </p:spPr>
-            <p:txBody>
-              <a:bodyPr wrap="square">
-                <a:spAutoFit/>
-              </a:bodyPr>
-              <a:lstStyle/>
-              <a:p>
-                <a:pPr/>
-                <a14:m>
-                  <m:oMathPara xmlns:m="http://schemas.openxmlformats.org/officeDocument/2006/math">
-                    <m:oMathParaPr>
-                      <m:jc m:val="centerGroup"/>
-                    </m:oMathParaPr>
-                    <m:oMath xmlns:m="http://schemas.openxmlformats.org/officeDocument/2006/math">
-                      <m:sSub>
-                        <m:sSubPr>
-                          <m:ctrlPr>
-                            <a:rPr lang="de-DE" sz="2400" b="0" i="1" smtClean="0">
-                              <a:latin typeface="Cambria Math" panose="02040503050406030204" pitchFamily="18" charset="0"/>
-                            </a:rPr>
-                          </m:ctrlPr>
-                        </m:sSubPr>
-                        <m:e>
-                          <m:r>
-                            <m:rPr>
-                              <m:sty m:val="p"/>
-                            </m:rPr>
-                            <a:rPr lang="de-DE" sz="2400" b="0" i="1" smtClean="0">
-                              <a:latin typeface="Cambria Math" panose="02040503050406030204" pitchFamily="18" charset="0"/>
-                            </a:rPr>
-                            <m:t>m</m:t>
-                          </m:r>
-                        </m:e>
-                        <m:sub>
-                          <m:r>
-                            <a:rPr lang="de-DE" sz="2400" b="0" i="1" smtClean="0">
-                              <a:latin typeface="Cambria Math" panose="02040503050406030204" pitchFamily="18" charset="0"/>
-                            </a:rPr>
-                            <m:t>1</m:t>
-                          </m:r>
-                        </m:sub>
-                      </m:sSub>
-                    </m:oMath>
-                  </m:oMathPara>
-                </a14:m>
-                <a:endParaRPr lang="en-US" sz="2400" dirty="0"/>
-              </a:p>
-            </p:txBody>
-          </p:sp>
-        </mc:Choice>
-        <mc:Fallback>
-          <p:sp>
-            <p:nvSpPr>
-              <p:cNvPr id="31" name="TextBox 30">
-                <a:extLst>
-                  <a:ext uri="{FF2B5EF4-FFF2-40B4-BE49-F238E27FC236}">
-                    <a16:creationId xmlns:a16="http://schemas.microsoft.com/office/drawing/2014/main" id="{AFDA9619-46C1-35AA-8D39-D84883E83DEE}"/>
-                  </a:ext>
-                </a:extLst>
-              </p:cNvPr>
-              <p:cNvSpPr txBox="1">
-                <a:spLocks noRot="1" noChangeAspect="1" noMove="1" noResize="1" noEditPoints="1" noAdjustHandles="1" noChangeArrowheads="1" noChangeShapeType="1" noTextEdit="1"/>
-              </p:cNvSpPr>
-              <p:nvPr/>
-            </p:nvSpPr>
-            <p:spPr>
-              <a:xfrm>
-                <a:off x="-201915" y="1148627"/>
-                <a:ext cx="1006792" cy="461665"/>
-              </a:xfrm>
-              <a:prstGeom prst="rect">
-                <a:avLst/>
-              </a:prstGeom>
-              <a:blipFill>
-                <a:blip r:embed="rId3"/>
-                <a:stretch>
-                  <a:fillRect/>
-                </a:stretch>
-              </a:blipFill>
-            </p:spPr>
-            <p:txBody>
-              <a:bodyPr/>
-              <a:lstStyle/>
-              <a:p>
-                <a:r>
-                  <a:rPr lang="en-US">
-                    <a:noFill/>
-                  </a:rPr>
-                  <a:t> </a:t>
-                </a:r>
-              </a:p>
-            </p:txBody>
-          </p:sp>
-        </mc:Fallback>
-      </mc:AlternateContent>
-      <mc:AlternateContent xmlns:mc="http://schemas.openxmlformats.org/markup-compatibility/2006">
-        <mc:Choice xmlns:a14="http://schemas.microsoft.com/office/drawing/2010/main" Requires="a14">
-          <p:sp>
-            <p:nvSpPr>
-              <p:cNvPr id="32" name="TextBox 31">
-                <a:extLst>
-                  <a:ext uri="{FF2B5EF4-FFF2-40B4-BE49-F238E27FC236}">
-                    <a16:creationId xmlns:a16="http://schemas.microsoft.com/office/drawing/2014/main" id="{723F16E3-8206-36D0-8CD8-8945A0493065}"/>
-                  </a:ext>
-                </a:extLst>
-              </p:cNvPr>
-              <p:cNvSpPr txBox="1"/>
-              <p:nvPr/>
-            </p:nvSpPr>
-            <p:spPr>
-              <a:xfrm>
-                <a:off x="1735090" y="2997538"/>
-                <a:ext cx="1006792" cy="461665"/>
-              </a:xfrm>
-              <a:prstGeom prst="rect">
-                <a:avLst/>
-              </a:prstGeom>
-              <a:noFill/>
-            </p:spPr>
-            <p:txBody>
-              <a:bodyPr wrap="square">
-                <a:spAutoFit/>
-              </a:bodyPr>
-              <a:lstStyle/>
-              <a:p>
-                <a:pPr/>
-                <a14:m>
-                  <m:oMathPara xmlns:m="http://schemas.openxmlformats.org/officeDocument/2006/math">
-                    <m:oMathParaPr>
-                      <m:jc m:val="centerGroup"/>
-                    </m:oMathParaPr>
-                    <m:oMath xmlns:m="http://schemas.openxmlformats.org/officeDocument/2006/math">
-                      <m:sSub>
-                        <m:sSubPr>
-                          <m:ctrlPr>
-                            <a:rPr lang="de-DE" sz="2400" b="1" i="1" smtClean="0">
-                              <a:solidFill>
-                                <a:srgbClr val="C00000"/>
-                              </a:solidFill>
-                              <a:latin typeface="Cambria Math" panose="02040503050406030204" pitchFamily="18" charset="0"/>
-                            </a:rPr>
-                          </m:ctrlPr>
-                        </m:sSubPr>
-                        <m:e>
-                          <m:r>
-                            <a:rPr lang="de-DE" sz="2400" b="1" i="1" smtClean="0">
-                              <a:solidFill>
-                                <a:srgbClr val="C00000"/>
-                              </a:solidFill>
-                              <a:latin typeface="Cambria Math" panose="02040503050406030204" pitchFamily="18" charset="0"/>
-                            </a:rPr>
-                            <m:t>𝒎</m:t>
-                          </m:r>
-                        </m:e>
-                        <m:sub>
-                          <m:r>
-                            <a:rPr lang="de-DE" sz="2400" b="1" i="0" smtClean="0">
-                              <a:solidFill>
-                                <a:srgbClr val="C00000"/>
-                              </a:solidFill>
-                              <a:latin typeface="Cambria Math" panose="02040503050406030204" pitchFamily="18" charset="0"/>
-                            </a:rPr>
-                            <m:t>𝐳</m:t>
-                          </m:r>
-                        </m:sub>
-                      </m:sSub>
-                    </m:oMath>
-                  </m:oMathPara>
-                </a14:m>
-                <a:endParaRPr lang="en-US" sz="2400" b="1" dirty="0"/>
-              </a:p>
-            </p:txBody>
-          </p:sp>
-        </mc:Choice>
-        <mc:Fallback>
-          <p:sp>
-            <p:nvSpPr>
-              <p:cNvPr id="32" name="TextBox 31">
-                <a:extLst>
-                  <a:ext uri="{FF2B5EF4-FFF2-40B4-BE49-F238E27FC236}">
-                    <a16:creationId xmlns:a16="http://schemas.microsoft.com/office/drawing/2014/main" id="{723F16E3-8206-36D0-8CD8-8945A0493065}"/>
-                  </a:ext>
-                </a:extLst>
-              </p:cNvPr>
-              <p:cNvSpPr txBox="1">
-                <a:spLocks noRot="1" noChangeAspect="1" noMove="1" noResize="1" noEditPoints="1" noAdjustHandles="1" noChangeArrowheads="1" noChangeShapeType="1" noTextEdit="1"/>
-              </p:cNvSpPr>
-              <p:nvPr/>
-            </p:nvSpPr>
-            <p:spPr>
-              <a:xfrm>
-                <a:off x="1735090" y="2997538"/>
-                <a:ext cx="1006792" cy="461665"/>
-              </a:xfrm>
-              <a:prstGeom prst="rect">
-                <a:avLst/>
-              </a:prstGeom>
-              <a:blipFill>
-                <a:blip r:embed="rId4"/>
-                <a:stretch>
-                  <a:fillRect/>
-                </a:stretch>
-              </a:blipFill>
-            </p:spPr>
-            <p:txBody>
-              <a:bodyPr/>
-              <a:lstStyle/>
-              <a:p>
-                <a:r>
-                  <a:rPr lang="en-US">
-                    <a:noFill/>
-                  </a:rPr>
-                  <a:t> </a:t>
-                </a:r>
-              </a:p>
-            </p:txBody>
-          </p:sp>
-        </mc:Fallback>
-      </mc:AlternateContent>
-      <mc:AlternateContent xmlns:mc="http://schemas.openxmlformats.org/markup-compatibility/2006">
-        <mc:Choice xmlns:a14="http://schemas.microsoft.com/office/drawing/2010/main" Requires="a14">
-          <p:sp>
-            <p:nvSpPr>
-              <p:cNvPr id="33" name="TextBox 32">
-                <a:extLst>
-                  <a:ext uri="{FF2B5EF4-FFF2-40B4-BE49-F238E27FC236}">
-                    <a16:creationId xmlns:a16="http://schemas.microsoft.com/office/drawing/2014/main" id="{9E0490DA-EA3F-93AB-D5D4-8341117CED35}"/>
-                  </a:ext>
-                </a:extLst>
-              </p:cNvPr>
-              <p:cNvSpPr txBox="1"/>
-              <p:nvPr/>
-            </p:nvSpPr>
-            <p:spPr>
-              <a:xfrm>
-                <a:off x="-159026" y="2672526"/>
-                <a:ext cx="1006792" cy="461665"/>
-              </a:xfrm>
-              <a:prstGeom prst="rect">
-                <a:avLst/>
-              </a:prstGeom>
-              <a:noFill/>
-            </p:spPr>
-            <p:txBody>
-              <a:bodyPr wrap="square">
-                <a:spAutoFit/>
-              </a:bodyPr>
-              <a:lstStyle/>
-              <a:p>
-                <a:pPr/>
-                <a14:m>
-                  <m:oMathPara xmlns:m="http://schemas.openxmlformats.org/officeDocument/2006/math">
-                    <m:oMathParaPr>
-                      <m:jc m:val="centerGroup"/>
-                    </m:oMathParaPr>
-                    <m:oMath xmlns:m="http://schemas.openxmlformats.org/officeDocument/2006/math">
-                      <m:sSub>
-                        <m:sSubPr>
-                          <m:ctrlPr>
-                            <a:rPr lang="de-DE" sz="2400" b="0" i="1" smtClean="0">
-                              <a:latin typeface="Cambria Math" panose="02040503050406030204" pitchFamily="18" charset="0"/>
-                            </a:rPr>
-                          </m:ctrlPr>
-                        </m:sSubPr>
-                        <m:e>
-                          <m:r>
-                            <m:rPr>
-                              <m:sty m:val="p"/>
-                            </m:rPr>
-                            <a:rPr lang="de-DE" sz="2400" b="0" i="1" smtClean="0">
-                              <a:latin typeface="Cambria Math" panose="02040503050406030204" pitchFamily="18" charset="0"/>
-                            </a:rPr>
-                            <m:t>m</m:t>
-                          </m:r>
-                        </m:e>
-                        <m:sub>
-                          <m:r>
-                            <a:rPr lang="de-DE" sz="2400" b="0" i="1" smtClean="0">
-                              <a:latin typeface="Cambria Math" panose="02040503050406030204" pitchFamily="18" charset="0"/>
-                            </a:rPr>
-                            <m:t>2</m:t>
-                          </m:r>
-                        </m:sub>
-                      </m:sSub>
-                    </m:oMath>
-                  </m:oMathPara>
-                </a14:m>
-                <a:endParaRPr lang="en-US" sz="2400" dirty="0"/>
-              </a:p>
-            </p:txBody>
-          </p:sp>
-        </mc:Choice>
-        <mc:Fallback>
-          <p:sp>
-            <p:nvSpPr>
-              <p:cNvPr id="33" name="TextBox 32">
-                <a:extLst>
-                  <a:ext uri="{FF2B5EF4-FFF2-40B4-BE49-F238E27FC236}">
-                    <a16:creationId xmlns:a16="http://schemas.microsoft.com/office/drawing/2014/main" id="{9E0490DA-EA3F-93AB-D5D4-8341117CED35}"/>
-                  </a:ext>
-                </a:extLst>
-              </p:cNvPr>
-              <p:cNvSpPr txBox="1">
-                <a:spLocks noRot="1" noChangeAspect="1" noMove="1" noResize="1" noEditPoints="1" noAdjustHandles="1" noChangeArrowheads="1" noChangeShapeType="1" noTextEdit="1"/>
-              </p:cNvSpPr>
-              <p:nvPr/>
-            </p:nvSpPr>
-            <p:spPr>
-              <a:xfrm>
-                <a:off x="-159026" y="2672526"/>
-                <a:ext cx="1006792" cy="461665"/>
-              </a:xfrm>
-              <a:prstGeom prst="rect">
-                <a:avLst/>
-              </a:prstGeom>
-              <a:blipFill>
-                <a:blip r:embed="rId5"/>
-                <a:stretch>
-                  <a:fillRect/>
-                </a:stretch>
-              </a:blipFill>
-            </p:spPr>
-            <p:txBody>
-              <a:bodyPr/>
-              <a:lstStyle/>
-              <a:p>
-                <a:r>
-                  <a:rPr lang="en-US">
-                    <a:noFill/>
-                  </a:rPr>
-                  <a:t> </a:t>
-                </a:r>
-              </a:p>
-            </p:txBody>
-          </p:sp>
-        </mc:Fallback>
-      </mc:AlternateContent>
-      <mc:AlternateContent xmlns:mc="http://schemas.openxmlformats.org/markup-compatibility/2006">
-        <mc:Choice xmlns:a14="http://schemas.microsoft.com/office/drawing/2010/main" Requires="a14">
-          <p:sp>
-            <p:nvSpPr>
-              <p:cNvPr id="40" name="TextBox 39">
-                <a:extLst>
-                  <a:ext uri="{FF2B5EF4-FFF2-40B4-BE49-F238E27FC236}">
-                    <a16:creationId xmlns:a16="http://schemas.microsoft.com/office/drawing/2014/main" id="{1C880405-ADCD-FBF7-9406-D9BCB78F26F3}"/>
-                  </a:ext>
-                </a:extLst>
-              </p:cNvPr>
-              <p:cNvSpPr txBox="1"/>
-              <p:nvPr/>
-            </p:nvSpPr>
-            <p:spPr>
-              <a:xfrm>
-                <a:off x="1741184" y="1186599"/>
-                <a:ext cx="1006792" cy="461665"/>
-              </a:xfrm>
-              <a:prstGeom prst="rect">
-                <a:avLst/>
-              </a:prstGeom>
-              <a:noFill/>
-            </p:spPr>
-            <p:txBody>
-              <a:bodyPr wrap="square">
-                <a:spAutoFit/>
-              </a:bodyPr>
-              <a:lstStyle/>
-              <a:p>
-                <a:pPr/>
-                <a14:m>
-                  <m:oMathPara xmlns:m="http://schemas.openxmlformats.org/officeDocument/2006/math">
-                    <m:oMathParaPr>
-                      <m:jc m:val="centerGroup"/>
-                    </m:oMathParaPr>
-                    <m:oMath xmlns:m="http://schemas.openxmlformats.org/officeDocument/2006/math">
-                      <m:sSub>
-                        <m:sSubPr>
-                          <m:ctrlPr>
-                            <a:rPr lang="de-DE" sz="2400" b="1" i="1" smtClean="0">
-                              <a:solidFill>
-                                <a:srgbClr val="C00000"/>
-                              </a:solidFill>
-                              <a:latin typeface="Cambria Math" panose="02040503050406030204" pitchFamily="18" charset="0"/>
-                            </a:rPr>
-                          </m:ctrlPr>
-                        </m:sSubPr>
-                        <m:e>
-                          <m:r>
-                            <a:rPr lang="de-DE" sz="2400" b="1" i="1" smtClean="0">
-                              <a:solidFill>
-                                <a:srgbClr val="C00000"/>
-                              </a:solidFill>
-                              <a:latin typeface="Cambria Math" panose="02040503050406030204" pitchFamily="18" charset="0"/>
-                            </a:rPr>
-                            <m:t>𝒎</m:t>
-                          </m:r>
-                        </m:e>
-                        <m:sub>
-                          <m:r>
-                            <a:rPr lang="de-DE" sz="2400" b="1" i="1" smtClean="0">
-                              <a:solidFill>
-                                <a:srgbClr val="C00000"/>
-                              </a:solidFill>
-                              <a:latin typeface="Cambria Math" panose="02040503050406030204" pitchFamily="18" charset="0"/>
-                            </a:rPr>
-                            <m:t>𝒛</m:t>
-                          </m:r>
-                        </m:sub>
-                      </m:sSub>
-                    </m:oMath>
-                  </m:oMathPara>
-                </a14:m>
-                <a:endParaRPr lang="en-US" sz="2400" b="1" dirty="0"/>
-              </a:p>
-            </p:txBody>
-          </p:sp>
-        </mc:Choice>
-        <mc:Fallback>
-          <p:sp>
-            <p:nvSpPr>
-              <p:cNvPr id="40" name="TextBox 39">
-                <a:extLst>
-                  <a:ext uri="{FF2B5EF4-FFF2-40B4-BE49-F238E27FC236}">
-                    <a16:creationId xmlns:a16="http://schemas.microsoft.com/office/drawing/2014/main" id="{1C880405-ADCD-FBF7-9406-D9BCB78F26F3}"/>
-                  </a:ext>
-                </a:extLst>
-              </p:cNvPr>
-              <p:cNvSpPr txBox="1">
-                <a:spLocks noRot="1" noChangeAspect="1" noMove="1" noResize="1" noEditPoints="1" noAdjustHandles="1" noChangeArrowheads="1" noChangeShapeType="1" noTextEdit="1"/>
-              </p:cNvSpPr>
-              <p:nvPr/>
-            </p:nvSpPr>
-            <p:spPr>
-              <a:xfrm>
-                <a:off x="1741184" y="1186599"/>
-                <a:ext cx="1006792" cy="461665"/>
-              </a:xfrm>
-              <a:prstGeom prst="rect">
-                <a:avLst/>
-              </a:prstGeom>
-              <a:blipFill>
-                <a:blip r:embed="rId6"/>
-                <a:stretch>
-                  <a:fillRect/>
-                </a:stretch>
-              </a:blipFill>
-            </p:spPr>
-            <p:txBody>
-              <a:bodyPr/>
-              <a:lstStyle/>
-              <a:p>
-                <a:r>
-                  <a:rPr lang="en-US">
-                    <a:noFill/>
-                  </a:rPr>
-                  <a:t> </a:t>
-                </a:r>
-              </a:p>
-            </p:txBody>
-          </p:sp>
-        </mc:Fallback>
-      </mc:AlternateContent>
-      <mc:AlternateContent xmlns:mc="http://schemas.openxmlformats.org/markup-compatibility/2006">
-        <mc:Choice xmlns:a14="http://schemas.microsoft.com/office/drawing/2010/main" Requires="a14">
-          <p:sp>
-            <p:nvSpPr>
-              <p:cNvPr id="41" name="TextBox 40">
-                <a:extLst>
-                  <a:ext uri="{FF2B5EF4-FFF2-40B4-BE49-F238E27FC236}">
-                    <a16:creationId xmlns:a16="http://schemas.microsoft.com/office/drawing/2014/main" id="{F26DDB16-7FD3-4032-EEDE-BBECCBC7F08C}"/>
-                  </a:ext>
-                </a:extLst>
-              </p:cNvPr>
-              <p:cNvSpPr txBox="1"/>
-              <p:nvPr/>
-            </p:nvSpPr>
-            <p:spPr>
-              <a:xfrm>
-                <a:off x="3535822" y="1866925"/>
-                <a:ext cx="1006792" cy="461665"/>
-              </a:xfrm>
-              <a:prstGeom prst="rect">
-                <a:avLst/>
-              </a:prstGeom>
-              <a:noFill/>
-            </p:spPr>
-            <p:txBody>
-              <a:bodyPr wrap="square">
-                <a:spAutoFit/>
-              </a:bodyPr>
-              <a:lstStyle/>
-              <a:p>
-                <a:pPr/>
-                <a14:m>
-                  <m:oMathPara xmlns:m="http://schemas.openxmlformats.org/officeDocument/2006/math">
-                    <m:oMathParaPr>
-                      <m:jc m:val="centerGroup"/>
-                    </m:oMathParaPr>
-                    <m:oMath xmlns:m="http://schemas.openxmlformats.org/officeDocument/2006/math">
-                      <m:sSub>
-                        <m:sSubPr>
-                          <m:ctrlPr>
-                            <a:rPr lang="de-DE" sz="2400" b="0" i="1" smtClean="0">
-                              <a:latin typeface="Cambria Math" panose="02040503050406030204" pitchFamily="18" charset="0"/>
-                            </a:rPr>
-                          </m:ctrlPr>
-                        </m:sSubPr>
-                        <m:e>
-                          <m:r>
-                            <m:rPr>
-                              <m:sty m:val="p"/>
-                            </m:rPr>
-                            <a:rPr lang="de-DE" sz="2400" b="0" i="1" smtClean="0">
-                              <a:latin typeface="Cambria Math" panose="02040503050406030204" pitchFamily="18" charset="0"/>
-                            </a:rPr>
-                            <m:t>m</m:t>
-                          </m:r>
-                        </m:e>
-                        <m:sub>
-                          <m:r>
-                            <a:rPr lang="de-DE" sz="2400" b="0" i="1" smtClean="0">
-                              <a:latin typeface="Cambria Math" panose="02040503050406030204" pitchFamily="18" charset="0"/>
-                            </a:rPr>
-                            <m:t>4</m:t>
-                          </m:r>
-                        </m:sub>
-                      </m:sSub>
-                    </m:oMath>
-                  </m:oMathPara>
-                </a14:m>
-                <a:endParaRPr lang="en-US" sz="2400" dirty="0"/>
-              </a:p>
-            </p:txBody>
-          </p:sp>
-        </mc:Choice>
-        <mc:Fallback>
-          <p:sp>
-            <p:nvSpPr>
-              <p:cNvPr id="41" name="TextBox 40">
-                <a:extLst>
-                  <a:ext uri="{FF2B5EF4-FFF2-40B4-BE49-F238E27FC236}">
-                    <a16:creationId xmlns:a16="http://schemas.microsoft.com/office/drawing/2014/main" id="{F26DDB16-7FD3-4032-EEDE-BBECCBC7F08C}"/>
-                  </a:ext>
-                </a:extLst>
-              </p:cNvPr>
-              <p:cNvSpPr txBox="1">
-                <a:spLocks noRot="1" noChangeAspect="1" noMove="1" noResize="1" noEditPoints="1" noAdjustHandles="1" noChangeArrowheads="1" noChangeShapeType="1" noTextEdit="1"/>
-              </p:cNvSpPr>
-              <p:nvPr/>
-            </p:nvSpPr>
-            <p:spPr>
-              <a:xfrm>
-                <a:off x="3535822" y="1866925"/>
-                <a:ext cx="1006792" cy="461665"/>
-              </a:xfrm>
-              <a:prstGeom prst="rect">
-                <a:avLst/>
-              </a:prstGeom>
-              <a:blipFill>
-                <a:blip r:embed="rId7"/>
-                <a:stretch>
-                  <a:fillRect/>
-                </a:stretch>
-              </a:blipFill>
-            </p:spPr>
-            <p:txBody>
-              <a:bodyPr/>
-              <a:lstStyle/>
-              <a:p>
-                <a:r>
-                  <a:rPr lang="en-US">
-                    <a:noFill/>
-                  </a:rPr>
-                  <a:t> </a:t>
-                </a:r>
-              </a:p>
-            </p:txBody>
-          </p:sp>
-        </mc:Fallback>
-      </mc:AlternateContent>
-      <mc:AlternateContent xmlns:mc="http://schemas.openxmlformats.org/markup-compatibility/2006">
-        <mc:Choice xmlns:a14="http://schemas.microsoft.com/office/drawing/2010/main" Requires="a14">
-          <p:sp>
-            <p:nvSpPr>
-              <p:cNvPr id="45" name="TextBox 44">
-                <a:extLst>
-                  <a:ext uri="{FF2B5EF4-FFF2-40B4-BE49-F238E27FC236}">
-                    <a16:creationId xmlns:a16="http://schemas.microsoft.com/office/drawing/2014/main" id="{A2521AB9-1978-32E8-7F4C-C51C06880C5F}"/>
-                  </a:ext>
-                </a:extLst>
-              </p:cNvPr>
-              <p:cNvSpPr txBox="1"/>
-              <p:nvPr/>
-            </p:nvSpPr>
-            <p:spPr>
-              <a:xfrm>
-                <a:off x="1000130" y="1012870"/>
-                <a:ext cx="970607" cy="461665"/>
-              </a:xfrm>
-              <a:prstGeom prst="rect">
-                <a:avLst/>
-              </a:prstGeom>
-              <a:noFill/>
-            </p:spPr>
-            <p:txBody>
-              <a:bodyPr wrap="square">
-                <a:spAutoFit/>
-              </a:bodyPr>
-              <a:lstStyle/>
-              <a:p>
-                <a:pPr/>
-                <a14:m>
-                  <m:oMathPara xmlns:m="http://schemas.openxmlformats.org/officeDocument/2006/math">
-                    <m:oMathParaPr>
-                      <m:jc m:val="centerGroup"/>
-                    </m:oMathParaPr>
-                    <m:oMath xmlns:m="http://schemas.openxmlformats.org/officeDocument/2006/math">
-                      <m:sSub>
-                        <m:sSubPr>
-                          <m:ctrlPr>
-                            <a:rPr lang="de-DE" sz="2400" b="0" i="1" smtClean="0">
-                              <a:latin typeface="Cambria Math" panose="02040503050406030204" pitchFamily="18" charset="0"/>
-                            </a:rPr>
-                          </m:ctrlPr>
-                        </m:sSubPr>
-                        <m:e>
-                          <m:r>
-                            <m:rPr>
-                              <m:sty m:val="p"/>
-                            </m:rPr>
-                            <a:rPr lang="de-DE" sz="2400" b="0" i="1" smtClean="0">
-                              <a:latin typeface="Cambria Math" panose="02040503050406030204" pitchFamily="18" charset="0"/>
-                            </a:rPr>
-                            <m:t>r</m:t>
-                          </m:r>
-                        </m:e>
-                        <m:sub>
-                          <m:r>
-                            <a:rPr lang="de-DE" sz="2400" b="0" i="1" smtClean="0">
-                              <a:latin typeface="Cambria Math" panose="02040503050406030204" pitchFamily="18" charset="0"/>
-                            </a:rPr>
-                            <m:t>1</m:t>
-                          </m:r>
-                        </m:sub>
-                      </m:sSub>
-                    </m:oMath>
-                  </m:oMathPara>
-                </a14:m>
-                <a:endParaRPr lang="en-US" sz="2400" dirty="0"/>
-              </a:p>
-            </p:txBody>
-          </p:sp>
-        </mc:Choice>
-        <mc:Fallback>
-          <p:sp>
-            <p:nvSpPr>
-              <p:cNvPr id="45" name="TextBox 44">
-                <a:extLst>
-                  <a:ext uri="{FF2B5EF4-FFF2-40B4-BE49-F238E27FC236}">
-                    <a16:creationId xmlns:a16="http://schemas.microsoft.com/office/drawing/2014/main" id="{A2521AB9-1978-32E8-7F4C-C51C06880C5F}"/>
-                  </a:ext>
-                </a:extLst>
-              </p:cNvPr>
-              <p:cNvSpPr txBox="1">
-                <a:spLocks noRot="1" noChangeAspect="1" noMove="1" noResize="1" noEditPoints="1" noAdjustHandles="1" noChangeArrowheads="1" noChangeShapeType="1" noTextEdit="1"/>
-              </p:cNvSpPr>
-              <p:nvPr/>
-            </p:nvSpPr>
-            <p:spPr>
-              <a:xfrm>
-                <a:off x="1000130" y="1012870"/>
-                <a:ext cx="970607" cy="461665"/>
-              </a:xfrm>
-              <a:prstGeom prst="rect">
-                <a:avLst/>
-              </a:prstGeom>
-              <a:blipFill>
-                <a:blip r:embed="rId8"/>
-                <a:stretch>
-                  <a:fillRect/>
-                </a:stretch>
-              </a:blipFill>
-            </p:spPr>
-            <p:txBody>
-              <a:bodyPr/>
-              <a:lstStyle/>
-              <a:p>
-                <a:r>
-                  <a:rPr lang="en-US">
-                    <a:noFill/>
-                  </a:rPr>
-                  <a:t> </a:t>
-                </a:r>
-              </a:p>
-            </p:txBody>
-          </p:sp>
-        </mc:Fallback>
-      </mc:AlternateContent>
-      <mc:AlternateContent xmlns:mc="http://schemas.openxmlformats.org/markup-compatibility/2006">
-        <mc:Choice xmlns:a14="http://schemas.microsoft.com/office/drawing/2010/main" Requires="a14">
-          <p:sp>
-            <p:nvSpPr>
-              <p:cNvPr id="46" name="TextBox 45">
-                <a:extLst>
-                  <a:ext uri="{FF2B5EF4-FFF2-40B4-BE49-F238E27FC236}">
-                    <a16:creationId xmlns:a16="http://schemas.microsoft.com/office/drawing/2014/main" id="{D20D86B1-5E70-338F-D88A-B102B98C364B}"/>
-                  </a:ext>
-                </a:extLst>
-              </p:cNvPr>
-              <p:cNvSpPr txBox="1"/>
-              <p:nvPr/>
-            </p:nvSpPr>
-            <p:spPr>
-              <a:xfrm>
-                <a:off x="1052200" y="3234332"/>
-                <a:ext cx="970607" cy="461665"/>
-              </a:xfrm>
-              <a:prstGeom prst="rect">
-                <a:avLst/>
-              </a:prstGeom>
-              <a:noFill/>
-            </p:spPr>
-            <p:txBody>
-              <a:bodyPr wrap="square">
-                <a:spAutoFit/>
-              </a:bodyPr>
-              <a:lstStyle/>
-              <a:p>
-                <a:pPr/>
-                <a14:m>
-                  <m:oMathPara xmlns:m="http://schemas.openxmlformats.org/officeDocument/2006/math">
-                    <m:oMathParaPr>
-                      <m:jc m:val="centerGroup"/>
-                    </m:oMathParaPr>
-                    <m:oMath xmlns:m="http://schemas.openxmlformats.org/officeDocument/2006/math">
-                      <m:sSub>
-                        <m:sSubPr>
-                          <m:ctrlPr>
-                            <a:rPr lang="de-DE" sz="2400" b="0" i="1" smtClean="0">
-                              <a:latin typeface="Cambria Math" panose="02040503050406030204" pitchFamily="18" charset="0"/>
-                            </a:rPr>
-                          </m:ctrlPr>
-                        </m:sSubPr>
-                        <m:e>
-                          <m:r>
-                            <m:rPr>
-                              <m:sty m:val="p"/>
-                            </m:rPr>
-                            <a:rPr lang="de-DE" sz="2400" b="0" i="1" smtClean="0">
-                              <a:latin typeface="Cambria Math" panose="02040503050406030204" pitchFamily="18" charset="0"/>
-                            </a:rPr>
-                            <m:t>r</m:t>
-                          </m:r>
-                        </m:e>
-                        <m:sub>
-                          <m:r>
-                            <a:rPr lang="de-DE" sz="2400" b="0" i="1" smtClean="0">
-                              <a:latin typeface="Cambria Math" panose="02040503050406030204" pitchFamily="18" charset="0"/>
-                            </a:rPr>
-                            <m:t>2</m:t>
-                          </m:r>
-                        </m:sub>
-                      </m:sSub>
-                    </m:oMath>
-                  </m:oMathPara>
-                </a14:m>
-                <a:endParaRPr lang="en-US" sz="2400" dirty="0"/>
-              </a:p>
-            </p:txBody>
-          </p:sp>
-        </mc:Choice>
-        <mc:Fallback>
-          <p:sp>
-            <p:nvSpPr>
-              <p:cNvPr id="46" name="TextBox 45">
-                <a:extLst>
-                  <a:ext uri="{FF2B5EF4-FFF2-40B4-BE49-F238E27FC236}">
-                    <a16:creationId xmlns:a16="http://schemas.microsoft.com/office/drawing/2014/main" id="{D20D86B1-5E70-338F-D88A-B102B98C364B}"/>
-                  </a:ext>
-                </a:extLst>
-              </p:cNvPr>
-              <p:cNvSpPr txBox="1">
-                <a:spLocks noRot="1" noChangeAspect="1" noMove="1" noResize="1" noEditPoints="1" noAdjustHandles="1" noChangeArrowheads="1" noChangeShapeType="1" noTextEdit="1"/>
-              </p:cNvSpPr>
-              <p:nvPr/>
-            </p:nvSpPr>
-            <p:spPr>
-              <a:xfrm>
-                <a:off x="1052200" y="3234332"/>
-                <a:ext cx="970607" cy="461665"/>
-              </a:xfrm>
-              <a:prstGeom prst="rect">
-                <a:avLst/>
-              </a:prstGeom>
-              <a:blipFill>
-                <a:blip r:embed="rId9"/>
-                <a:stretch>
-                  <a:fillRect/>
-                </a:stretch>
-              </a:blipFill>
-            </p:spPr>
-            <p:txBody>
-              <a:bodyPr/>
-              <a:lstStyle/>
-              <a:p>
-                <a:r>
-                  <a:rPr lang="en-US">
-                    <a:noFill/>
-                  </a:rPr>
-                  <a:t> </a:t>
-                </a:r>
-              </a:p>
-            </p:txBody>
-          </p:sp>
-        </mc:Fallback>
-      </mc:AlternateContent>
-      <mc:AlternateContent xmlns:mc="http://schemas.openxmlformats.org/markup-compatibility/2006">
-        <mc:Choice xmlns:a14="http://schemas.microsoft.com/office/drawing/2010/main" Requires="a14">
-          <p:sp>
-            <p:nvSpPr>
-              <p:cNvPr id="48" name="TextBox 47">
-                <a:extLst>
-                  <a:ext uri="{FF2B5EF4-FFF2-40B4-BE49-F238E27FC236}">
-                    <a16:creationId xmlns:a16="http://schemas.microsoft.com/office/drawing/2014/main" id="{30B18A39-9866-0789-02AE-BCAA83EA05F2}"/>
-                  </a:ext>
-                </a:extLst>
-              </p:cNvPr>
-              <p:cNvSpPr txBox="1"/>
-              <p:nvPr/>
-            </p:nvSpPr>
-            <p:spPr>
-              <a:xfrm>
-                <a:off x="2626592" y="1657049"/>
-                <a:ext cx="970607" cy="461665"/>
-              </a:xfrm>
-              <a:prstGeom prst="rect">
-                <a:avLst/>
-              </a:prstGeom>
-              <a:noFill/>
-            </p:spPr>
-            <p:txBody>
-              <a:bodyPr wrap="square">
-                <a:spAutoFit/>
-              </a:bodyPr>
-              <a:lstStyle/>
-              <a:p>
-                <a:pPr/>
-                <a14:m>
-                  <m:oMathPara xmlns:m="http://schemas.openxmlformats.org/officeDocument/2006/math">
-                    <m:oMathParaPr>
-                      <m:jc m:val="centerGroup"/>
-                    </m:oMathParaPr>
-                    <m:oMath xmlns:m="http://schemas.openxmlformats.org/officeDocument/2006/math">
-                      <m:sSub>
-                        <m:sSubPr>
-                          <m:ctrlPr>
-                            <a:rPr lang="de-DE" sz="2400" b="0" i="1" smtClean="0">
-                              <a:latin typeface="Cambria Math" panose="02040503050406030204" pitchFamily="18" charset="0"/>
-                            </a:rPr>
-                          </m:ctrlPr>
-                        </m:sSubPr>
-                        <m:e>
-                          <m:r>
-                            <m:rPr>
-                              <m:sty m:val="p"/>
-                            </m:rPr>
-                            <a:rPr lang="de-DE" sz="2400" b="0" i="1" smtClean="0">
-                              <a:latin typeface="Cambria Math" panose="02040503050406030204" pitchFamily="18" charset="0"/>
-                            </a:rPr>
-                            <m:t>r</m:t>
-                          </m:r>
-                        </m:e>
-                        <m:sub>
-                          <m:r>
-                            <a:rPr lang="de-DE" sz="2400" b="0" i="1" smtClean="0">
-                              <a:latin typeface="Cambria Math" panose="02040503050406030204" pitchFamily="18" charset="0"/>
-                            </a:rPr>
-                            <m:t>3</m:t>
-                          </m:r>
-                        </m:sub>
-                      </m:sSub>
-                    </m:oMath>
-                  </m:oMathPara>
-                </a14:m>
-                <a:endParaRPr lang="en-US" sz="2400" dirty="0"/>
-              </a:p>
-            </p:txBody>
-          </p:sp>
-        </mc:Choice>
-        <mc:Fallback>
-          <p:sp>
-            <p:nvSpPr>
-              <p:cNvPr id="48" name="TextBox 47">
-                <a:extLst>
-                  <a:ext uri="{FF2B5EF4-FFF2-40B4-BE49-F238E27FC236}">
-                    <a16:creationId xmlns:a16="http://schemas.microsoft.com/office/drawing/2014/main" id="{30B18A39-9866-0789-02AE-BCAA83EA05F2}"/>
-                  </a:ext>
-                </a:extLst>
-              </p:cNvPr>
-              <p:cNvSpPr txBox="1">
-                <a:spLocks noRot="1" noChangeAspect="1" noMove="1" noResize="1" noEditPoints="1" noAdjustHandles="1" noChangeArrowheads="1" noChangeShapeType="1" noTextEdit="1"/>
-              </p:cNvSpPr>
-              <p:nvPr/>
-            </p:nvSpPr>
-            <p:spPr>
-              <a:xfrm>
-                <a:off x="2626592" y="1657049"/>
-                <a:ext cx="970607" cy="461665"/>
-              </a:xfrm>
-              <a:prstGeom prst="rect">
-                <a:avLst/>
-              </a:prstGeom>
-              <a:blipFill>
-                <a:blip r:embed="rId10"/>
-                <a:stretch>
-                  <a:fillRect/>
-                </a:stretch>
-              </a:blipFill>
-            </p:spPr>
-            <p:txBody>
-              <a:bodyPr/>
-              <a:lstStyle/>
-              <a:p>
-                <a:r>
-                  <a:rPr lang="en-US">
-                    <a:noFill/>
-                  </a:rPr>
-                  <a:t> </a:t>
-                </a:r>
-              </a:p>
-            </p:txBody>
-          </p:sp>
-        </mc:Fallback>
-      </mc:AlternateContent>
-      <p:pic>
-        <p:nvPicPr>
-          <p:cNvPr id="27" name="Picture 26" descr="A computer screen shot of a black screen&#10;&#10;AI-generated content may be incorrect.">
-            <a:extLst>
-              <a:ext uri="{FF2B5EF4-FFF2-40B4-BE49-F238E27FC236}">
-                <a16:creationId xmlns:a16="http://schemas.microsoft.com/office/drawing/2014/main" id="{EA5EC35B-7C25-FBAF-8BD7-87249CE7A51B}"/>
-              </a:ext>
-            </a:extLst>
-          </p:cNvPr>
-          <p:cNvPicPr>
-            <a:picLocks noChangeAspect="1"/>
-          </p:cNvPicPr>
-          <p:nvPr/>
-        </p:nvPicPr>
-        <p:blipFill>
-          <a:blip r:embed="rId11"/>
-          <a:stretch>
-            <a:fillRect/>
-          </a:stretch>
-        </p:blipFill>
-        <p:spPr>
-          <a:xfrm>
-            <a:off x="4454789" y="292145"/>
-            <a:ext cx="7716327" cy="6068272"/>
+            <a:off x="48571" y="6142335"/>
+            <a:ext cx="3697037" cy="600164"/>
           </a:xfrm>
           <a:prstGeom prst="rect">
             <a:avLst/>
           </a:prstGeom>
+          <a:noFill/>
         </p:spPr>
-      </p:pic>
+        <p:txBody>
+          <a:bodyPr wrap="square">
+            <a:spAutoFit/>
+          </a:bodyPr>
+          <a:lstStyle/>
+          <a:p>
+            <a:r>
+              <a:rPr lang="en-US" sz="1100" dirty="0"/>
+              <a:t>[1] B. Alberts, D. Bray, and K. Hopkin, Essential Cell Biology, 4th rev ed. edition. New York, NY: Norton &amp; Company, 2014.</a:t>
+            </a:r>
+          </a:p>
+        </p:txBody>
+      </p:sp>
     </p:spTree>
     <p:extLst>
       <p:ext uri="{BB962C8B-B14F-4D97-AF65-F5344CB8AC3E}">

--- a/slides/slides.pptx
+++ b/slides/slides.pptx
@@ -200,7 +200,7 @@
           <a:p>
             <a:fld id="{FF1A252C-87EA-4881-A10E-9E4CA26E6FE3}" type="datetimeFigureOut">
               <a:rPr lang="en-US" smtClean="0"/>
-              <a:t>12/24/2025</a:t>
+              <a:t>1/29/2026</a:t>
             </a:fld>
             <a:endParaRPr lang="en-US"/>
           </a:p>
@@ -3176,7 +3176,7 @@
           <a:p>
             <a:fld id="{E6D7105C-A8E4-4519-9028-35FD188A98F2}" type="datetimeFigureOut">
               <a:rPr lang="en-US" smtClean="0"/>
-              <a:t>12/24/2025</a:t>
+              <a:t>1/29/2026</a:t>
             </a:fld>
             <a:endParaRPr lang="en-US"/>
           </a:p>
@@ -3374,7 +3374,7 @@
           <a:p>
             <a:fld id="{E6D7105C-A8E4-4519-9028-35FD188A98F2}" type="datetimeFigureOut">
               <a:rPr lang="en-US" smtClean="0"/>
-              <a:t>12/24/2025</a:t>
+              <a:t>1/29/2026</a:t>
             </a:fld>
             <a:endParaRPr lang="en-US"/>
           </a:p>
@@ -3582,7 +3582,7 @@
           <a:p>
             <a:fld id="{E6D7105C-A8E4-4519-9028-35FD188A98F2}" type="datetimeFigureOut">
               <a:rPr lang="en-US" smtClean="0"/>
-              <a:t>12/24/2025</a:t>
+              <a:t>1/29/2026</a:t>
             </a:fld>
             <a:endParaRPr lang="en-US"/>
           </a:p>
@@ -3780,7 +3780,7 @@
           <a:p>
             <a:fld id="{E6D7105C-A8E4-4519-9028-35FD188A98F2}" type="datetimeFigureOut">
               <a:rPr lang="en-US" smtClean="0"/>
-              <a:t>12/24/2025</a:t>
+              <a:t>1/29/2026</a:t>
             </a:fld>
             <a:endParaRPr lang="en-US"/>
           </a:p>
@@ -4055,7 +4055,7 @@
           <a:p>
             <a:fld id="{E6D7105C-A8E4-4519-9028-35FD188A98F2}" type="datetimeFigureOut">
               <a:rPr lang="en-US" smtClean="0"/>
-              <a:t>12/24/2025</a:t>
+              <a:t>1/29/2026</a:t>
             </a:fld>
             <a:endParaRPr lang="en-US"/>
           </a:p>
@@ -4320,7 +4320,7 @@
           <a:p>
             <a:fld id="{E6D7105C-A8E4-4519-9028-35FD188A98F2}" type="datetimeFigureOut">
               <a:rPr lang="en-US" smtClean="0"/>
-              <a:t>12/24/2025</a:t>
+              <a:t>1/29/2026</a:t>
             </a:fld>
             <a:endParaRPr lang="en-US"/>
           </a:p>
@@ -4732,7 +4732,7 @@
           <a:p>
             <a:fld id="{E6D7105C-A8E4-4519-9028-35FD188A98F2}" type="datetimeFigureOut">
               <a:rPr lang="en-US" smtClean="0"/>
-              <a:t>12/24/2025</a:t>
+              <a:t>1/29/2026</a:t>
             </a:fld>
             <a:endParaRPr lang="en-US"/>
           </a:p>
@@ -4873,7 +4873,7 @@
           <a:p>
             <a:fld id="{E6D7105C-A8E4-4519-9028-35FD188A98F2}" type="datetimeFigureOut">
               <a:rPr lang="en-US" smtClean="0"/>
-              <a:t>12/24/2025</a:t>
+              <a:t>1/29/2026</a:t>
             </a:fld>
             <a:endParaRPr lang="en-US"/>
           </a:p>
@@ -4986,7 +4986,7 @@
           <a:p>
             <a:fld id="{E6D7105C-A8E4-4519-9028-35FD188A98F2}" type="datetimeFigureOut">
               <a:rPr lang="en-US" smtClean="0"/>
-              <a:t>12/24/2025</a:t>
+              <a:t>1/29/2026</a:t>
             </a:fld>
             <a:endParaRPr lang="en-US"/>
           </a:p>
@@ -5297,7 +5297,7 @@
           <a:p>
             <a:fld id="{E6D7105C-A8E4-4519-9028-35FD188A98F2}" type="datetimeFigureOut">
               <a:rPr lang="en-US" smtClean="0"/>
-              <a:t>12/24/2025</a:t>
+              <a:t>1/29/2026</a:t>
             </a:fld>
             <a:endParaRPr lang="en-US"/>
           </a:p>
@@ -5585,7 +5585,7 @@
           <a:p>
             <a:fld id="{E6D7105C-A8E4-4519-9028-35FD188A98F2}" type="datetimeFigureOut">
               <a:rPr lang="en-US" smtClean="0"/>
-              <a:t>12/24/2025</a:t>
+              <a:t>1/29/2026</a:t>
             </a:fld>
             <a:endParaRPr lang="en-US"/>
           </a:p>
@@ -5826,7 +5826,7 @@
           <a:p>
             <a:fld id="{E6D7105C-A8E4-4519-9028-35FD188A98F2}" type="datetimeFigureOut">
               <a:rPr lang="en-US" smtClean="0"/>
-              <a:t>12/24/2025</a:t>
+              <a:t>1/29/2026</a:t>
             </a:fld>
             <a:endParaRPr lang="en-US"/>
           </a:p>
@@ -7818,7 +7818,7 @@
           <a:p>
             <a:r>
               <a:rPr lang="en-US" sz="2400" dirty="0"/>
-              <a:t>(2)</a:t>
+              <a:t>(3)</a:t>
             </a:r>
           </a:p>
         </p:txBody>
@@ -7853,7 +7853,7 @@
           <a:p>
             <a:r>
               <a:rPr lang="en-US" sz="2400" dirty="0"/>
-              <a:t>(3)</a:t>
+              <a:t>(4)</a:t>
             </a:r>
           </a:p>
         </p:txBody>
@@ -8274,6 +8274,36 @@
           </a:p>
         </p:txBody>
       </p:sp>
+      <p:pic>
+        <p:nvPicPr>
+          <p:cNvPr id="3" name="Picture 2">
+            <a:extLst>
+              <a:ext uri="{FF2B5EF4-FFF2-40B4-BE49-F238E27FC236}">
+                <a16:creationId xmlns:a16="http://schemas.microsoft.com/office/drawing/2014/main" id="{2851A3F9-7DF3-0288-5EC2-2581B8F3C17D}"/>
+              </a:ext>
+            </a:extLst>
+          </p:cNvPr>
+          <p:cNvPicPr>
+            <a:picLocks noChangeAspect="1"/>
+          </p:cNvPicPr>
+          <p:nvPr/>
+        </p:nvPicPr>
+        <p:blipFill>
+          <a:blip r:embed="rId8"/>
+          <a:stretch>
+            <a:fillRect/>
+          </a:stretch>
+        </p:blipFill>
+        <p:spPr>
+          <a:xfrm>
+            <a:off x="7411042" y="3187220"/>
+            <a:ext cx="4692769" cy="3519577"/>
+          </a:xfrm>
+          <a:prstGeom prst="rect">
+            <a:avLst/>
+          </a:prstGeom>
+        </p:spPr>
+      </p:pic>
     </p:spTree>
     <p:extLst>
       <p:ext uri="{BB962C8B-B14F-4D97-AF65-F5344CB8AC3E}">
@@ -8362,8 +8392,8 @@
         </p:nvSpPr>
         <p:spPr>
           <a:xfrm>
-            <a:off x="1833704" y="1518055"/>
-            <a:ext cx="365760" cy="365760"/>
+            <a:off x="1833698" y="1169256"/>
+            <a:ext cx="482803" cy="482803"/>
           </a:xfrm>
           <a:prstGeom prst="ellipse">
             <a:avLst/>
@@ -8410,8 +8440,8 @@
         </p:nvSpPr>
         <p:spPr>
           <a:xfrm>
-            <a:off x="1845134" y="2985354"/>
-            <a:ext cx="365760" cy="365760"/>
+            <a:off x="1845128" y="3371848"/>
+            <a:ext cx="482803" cy="482803"/>
           </a:xfrm>
           <a:prstGeom prst="ellipse">
             <a:avLst/>
@@ -8458,8 +8488,8 @@
         </p:nvSpPr>
         <p:spPr>
           <a:xfrm>
-            <a:off x="3376754" y="2291934"/>
-            <a:ext cx="365760" cy="365760"/>
+            <a:off x="3744396" y="2291928"/>
+            <a:ext cx="482803" cy="482803"/>
           </a:xfrm>
           <a:prstGeom prst="ellipse">
             <a:avLst/>
@@ -8508,8 +8538,8 @@
         </p:nvCxnSpPr>
         <p:spPr>
           <a:xfrm flipV="1">
-            <a:off x="2210894" y="2604130"/>
-            <a:ext cx="1219424" cy="564104"/>
+            <a:off x="2327931" y="2704026"/>
+            <a:ext cx="1487170" cy="909224"/>
           </a:xfrm>
           <a:prstGeom prst="straightConnector1">
             <a:avLst/>
@@ -8550,8 +8580,8 @@
         </p:nvCxnSpPr>
         <p:spPr>
           <a:xfrm>
-            <a:off x="2199464" y="1700935"/>
-            <a:ext cx="1230854" cy="644563"/>
+            <a:off x="2316501" y="1410658"/>
+            <a:ext cx="1498600" cy="951975"/>
           </a:xfrm>
           <a:prstGeom prst="straightConnector1">
             <a:avLst/>
@@ -8591,7 +8621,7 @@
         </p:nvCxnSpPr>
         <p:spPr>
           <a:xfrm>
-            <a:off x="1033604" y="1700935"/>
+            <a:off x="1033604" y="1352142"/>
             <a:ext cx="800100" cy="0"/>
           </a:xfrm>
           <a:prstGeom prst="straightConnector1">
@@ -8633,8 +8663,8 @@
         </p:nvCxnSpPr>
         <p:spPr>
           <a:xfrm>
-            <a:off x="1033604" y="3168234"/>
-            <a:ext cx="811530" cy="0"/>
+            <a:off x="1005179" y="3613250"/>
+            <a:ext cx="839949" cy="0"/>
           </a:xfrm>
           <a:prstGeom prst="straightConnector1">
             <a:avLst/>
@@ -8674,8 +8704,8 @@
         </p:nvCxnSpPr>
         <p:spPr>
           <a:xfrm>
-            <a:off x="3742514" y="2459125"/>
-            <a:ext cx="800100" cy="0"/>
+            <a:off x="4227199" y="2533329"/>
+            <a:ext cx="665312" cy="0"/>
           </a:xfrm>
           <a:prstGeom prst="straightConnector1">
             <a:avLst/>
@@ -8699,8 +8729,8 @@
           </a:fontRef>
         </p:style>
       </p:cxnSp>
-      <mc:AlternateContent xmlns:mc="http://schemas.openxmlformats.org/markup-compatibility/2006" xmlns:a14="http://schemas.microsoft.com/office/drawing/2010/main">
-        <mc:Choice Requires="a14">
+      <mc:AlternateContent xmlns:mc="http://schemas.openxmlformats.org/markup-compatibility/2006">
+        <mc:Choice xmlns:a14="http://schemas.microsoft.com/office/drawing/2010/main" Requires="a14">
           <p:sp>
             <p:nvSpPr>
               <p:cNvPr id="31" name="TextBox 30">
@@ -8715,8 +8745,8 @@
             </p:nvSpPr>
             <p:spPr>
               <a:xfrm>
-                <a:off x="316372" y="1182670"/>
-                <a:ext cx="1006792" cy="461665"/>
+                <a:off x="427146" y="1078064"/>
+                <a:ext cx="656402" cy="461665"/>
               </a:xfrm>
               <a:prstGeom prst="rect">
                 <a:avLst/>
@@ -8772,7 +8802,7 @@
             </p:txBody>
           </p:sp>
         </mc:Choice>
-        <mc:Fallback xmlns="">
+        <mc:Fallback>
           <p:sp>
             <p:nvSpPr>
               <p:cNvPr id="31" name="TextBox 30">
@@ -8789,8 +8819,8 @@
             </p:nvSpPr>
             <p:spPr>
               <a:xfrm>
-                <a:off x="316372" y="1182670"/>
-                <a:ext cx="1006792" cy="461665"/>
+                <a:off x="427146" y="1078064"/>
+                <a:ext cx="656402" cy="461665"/>
               </a:xfrm>
               <a:prstGeom prst="rect">
                 <a:avLst/>
@@ -8817,8 +8847,8 @@
           </p:sp>
         </mc:Fallback>
       </mc:AlternateContent>
-      <mc:AlternateContent xmlns:mc="http://schemas.openxmlformats.org/markup-compatibility/2006" xmlns:a14="http://schemas.microsoft.com/office/drawing/2010/main">
-        <mc:Choice Requires="a14">
+      <mc:AlternateContent xmlns:mc="http://schemas.openxmlformats.org/markup-compatibility/2006">
+        <mc:Choice xmlns:a14="http://schemas.microsoft.com/office/drawing/2010/main" Requires="a14">
           <p:sp>
             <p:nvSpPr>
               <p:cNvPr id="32" name="TextBox 31">
@@ -8833,8 +8863,8 @@
             </p:nvSpPr>
             <p:spPr>
               <a:xfrm>
-                <a:off x="2253377" y="3031581"/>
-                <a:ext cx="1006792" cy="461665"/>
+                <a:off x="2524024" y="2760969"/>
+                <a:ext cx="651283" cy="461665"/>
               </a:xfrm>
               <a:prstGeom prst="rect">
                 <a:avLst/>
@@ -8896,7 +8926,7 @@
             </p:txBody>
           </p:sp>
         </mc:Choice>
-        <mc:Fallback xmlns="">
+        <mc:Fallback>
           <p:sp>
             <p:nvSpPr>
               <p:cNvPr id="32" name="TextBox 31">
@@ -8913,8 +8943,8 @@
             </p:nvSpPr>
             <p:spPr>
               <a:xfrm>
-                <a:off x="2253377" y="3031581"/>
-                <a:ext cx="1006792" cy="461665"/>
+                <a:off x="2524024" y="2760969"/>
+                <a:ext cx="651283" cy="461665"/>
               </a:xfrm>
               <a:prstGeom prst="rect">
                 <a:avLst/>
@@ -8941,8 +8971,8 @@
           </p:sp>
         </mc:Fallback>
       </mc:AlternateContent>
-      <mc:AlternateContent xmlns:mc="http://schemas.openxmlformats.org/markup-compatibility/2006" xmlns:a14="http://schemas.microsoft.com/office/drawing/2010/main">
-        <mc:Choice Requires="a14">
+      <mc:AlternateContent xmlns:mc="http://schemas.openxmlformats.org/markup-compatibility/2006">
+        <mc:Choice xmlns:a14="http://schemas.microsoft.com/office/drawing/2010/main" Requires="a14">
           <p:sp>
             <p:nvSpPr>
               <p:cNvPr id="33" name="TextBox 32">
@@ -8957,8 +8987,8 @@
             </p:nvSpPr>
             <p:spPr>
               <a:xfrm>
-                <a:off x="331864" y="2464961"/>
-                <a:ext cx="1006792" cy="461665"/>
+                <a:off x="288059" y="3262413"/>
+                <a:ext cx="701740" cy="461665"/>
               </a:xfrm>
               <a:prstGeom prst="rect">
                 <a:avLst/>
@@ -9014,7 +9044,7 @@
             </p:txBody>
           </p:sp>
         </mc:Choice>
-        <mc:Fallback xmlns="">
+        <mc:Fallback>
           <p:sp>
             <p:nvSpPr>
               <p:cNvPr id="33" name="TextBox 32">
@@ -9031,8 +9061,8 @@
             </p:nvSpPr>
             <p:spPr>
               <a:xfrm>
-                <a:off x="331864" y="2464961"/>
-                <a:ext cx="1006792" cy="461665"/>
+                <a:off x="288059" y="3262413"/>
+                <a:ext cx="701740" cy="461665"/>
               </a:xfrm>
               <a:prstGeom prst="rect">
                 <a:avLst/>
@@ -9059,8 +9089,8 @@
           </p:sp>
         </mc:Fallback>
       </mc:AlternateContent>
-      <mc:AlternateContent xmlns:mc="http://schemas.openxmlformats.org/markup-compatibility/2006" xmlns:a14="http://schemas.microsoft.com/office/drawing/2010/main">
-        <mc:Choice Requires="a14">
+      <mc:AlternateContent xmlns:mc="http://schemas.openxmlformats.org/markup-compatibility/2006">
+        <mc:Choice xmlns:a14="http://schemas.microsoft.com/office/drawing/2010/main" Requires="a14">
           <p:sp>
             <p:nvSpPr>
               <p:cNvPr id="35" name="TextBox 34">
@@ -9075,7 +9105,7 @@
             </p:nvSpPr>
             <p:spPr>
               <a:xfrm>
-                <a:off x="989799" y="1126070"/>
+                <a:off x="989799" y="777277"/>
                 <a:ext cx="991552" cy="461665"/>
               </a:xfrm>
               <a:prstGeom prst="rect">
@@ -9129,7 +9159,7 @@
             </p:txBody>
           </p:sp>
         </mc:Choice>
-        <mc:Fallback xmlns="">
+        <mc:Fallback>
           <p:sp>
             <p:nvSpPr>
               <p:cNvPr id="35" name="TextBox 34">
@@ -9146,7 +9176,7 @@
             </p:nvSpPr>
             <p:spPr>
               <a:xfrm>
-                <a:off x="989799" y="1126070"/>
+                <a:off x="989799" y="777277"/>
                 <a:ext cx="991552" cy="461665"/>
               </a:xfrm>
               <a:prstGeom prst="rect">
@@ -9190,8 +9220,8 @@
             </p:nvSpPr>
             <p:spPr>
               <a:xfrm>
-                <a:off x="2004575" y="2523689"/>
-                <a:ext cx="991552" cy="461665"/>
+                <a:off x="3316758" y="2795972"/>
+                <a:ext cx="761501" cy="461665"/>
               </a:xfrm>
               <a:prstGeom prst="rect">
                 <a:avLst/>
@@ -9270,8 +9300,8 @@
             </p:nvSpPr>
             <p:spPr>
               <a:xfrm>
-                <a:off x="2004575" y="2523689"/>
-                <a:ext cx="991552" cy="461665"/>
+                <a:off x="3316758" y="2795972"/>
+                <a:ext cx="761501" cy="461665"/>
               </a:xfrm>
               <a:prstGeom prst="rect">
                 <a:avLst/>
@@ -9279,7 +9309,7 @@
               <a:blipFill>
                 <a:blip r:embed="rId7"/>
                 <a:stretch>
-                  <a:fillRect/>
+                  <a:fillRect b="-1333"/>
                 </a:stretch>
               </a:blipFill>
             </p:spPr>
@@ -9298,8 +9328,8 @@
           </p:sp>
         </mc:Fallback>
       </mc:AlternateContent>
-      <mc:AlternateContent xmlns:mc="http://schemas.openxmlformats.org/markup-compatibility/2006" xmlns:a14="http://schemas.microsoft.com/office/drawing/2010/main">
-        <mc:Choice Requires="a14">
+      <mc:AlternateContent xmlns:mc="http://schemas.openxmlformats.org/markup-compatibility/2006">
+        <mc:Choice xmlns:a14="http://schemas.microsoft.com/office/drawing/2010/main" Requires="a14">
           <p:sp>
             <p:nvSpPr>
               <p:cNvPr id="40" name="TextBox 39">
@@ -9314,7 +9344,7 @@
             </p:nvSpPr>
             <p:spPr>
               <a:xfrm>
-                <a:off x="2259471" y="1220642"/>
+                <a:off x="2509969" y="1341069"/>
                 <a:ext cx="1006792" cy="461665"/>
               </a:xfrm>
               <a:prstGeom prst="rect">
@@ -9377,7 +9407,7 @@
             </p:txBody>
           </p:sp>
         </mc:Choice>
-        <mc:Fallback xmlns="">
+        <mc:Fallback>
           <p:sp>
             <p:nvSpPr>
               <p:cNvPr id="40" name="TextBox 39">
@@ -9394,7 +9424,7 @@
             </p:nvSpPr>
             <p:spPr>
               <a:xfrm>
-                <a:off x="2259471" y="1220642"/>
+                <a:off x="2509969" y="1341069"/>
                 <a:ext cx="1006792" cy="461665"/>
               </a:xfrm>
               <a:prstGeom prst="rect">
@@ -9540,8 +9570,8 @@
           </p:sp>
         </mc:Fallback>
       </mc:AlternateContent>
-      <mc:AlternateContent xmlns:mc="http://schemas.openxmlformats.org/markup-compatibility/2006" xmlns:a14="http://schemas.microsoft.com/office/drawing/2010/main">
-        <mc:Choice Requires="a14">
+      <mc:AlternateContent xmlns:mc="http://schemas.openxmlformats.org/markup-compatibility/2006">
+        <mc:Choice xmlns:a14="http://schemas.microsoft.com/office/drawing/2010/main" Requires="a14">
           <p:sp>
             <p:nvSpPr>
               <p:cNvPr id="45" name="TextBox 44">
@@ -9556,8 +9586,8 @@
             </p:nvSpPr>
             <p:spPr>
               <a:xfrm>
-                <a:off x="1518417" y="1046913"/>
-                <a:ext cx="970607" cy="461665"/>
+                <a:off x="1757481" y="1170607"/>
+                <a:ext cx="656402" cy="461665"/>
               </a:xfrm>
               <a:prstGeom prst="rect">
                 <a:avLst/>
@@ -9581,6 +9611,9 @@
                         <m:sSubPr>
                           <m:ctrlPr>
                             <a:rPr lang="de-DE" sz="2400" b="0" i="1" smtClean="0">
+                              <a:solidFill>
+                                <a:schemeClr val="bg1"/>
+                              </a:solidFill>
                               <a:latin typeface="Cambria Math" panose="02040503050406030204" pitchFamily="18" charset="0"/>
                             </a:rPr>
                           </m:ctrlPr>
@@ -9591,6 +9624,9 @@
                               <m:sty m:val="p"/>
                             </m:rPr>
                             <a:rPr lang="de-DE" sz="2400" b="0" i="1" smtClean="0">
+                              <a:solidFill>
+                                <a:schemeClr val="bg1"/>
+                              </a:solidFill>
                               <a:latin typeface="Cambria Math" panose="02040503050406030204" pitchFamily="18" charset="0"/>
                             </a:rPr>
                             <m:t>r</m:t>
@@ -9599,6 +9635,9 @@
                         <m:sub>
                           <m:r>
                             <a:rPr lang="de-DE" sz="2400" b="0" i="1" smtClean="0">
+                              <a:solidFill>
+                                <a:schemeClr val="bg1"/>
+                              </a:solidFill>
                               <a:latin typeface="Cambria Math" panose="02040503050406030204" pitchFamily="18" charset="0"/>
                             </a:rPr>
                             <m:t>𝑖</m:t>
@@ -9608,12 +9647,16 @@
                     </m:oMath>
                   </m:oMathPara>
                 </a14:m>
-                <a:endParaRPr lang="en-US" sz="2400" dirty="0"/>
+                <a:endParaRPr lang="en-US" sz="2400" dirty="0">
+                  <a:solidFill>
+                    <a:schemeClr val="bg1"/>
+                  </a:solidFill>
+                </a:endParaRPr>
               </a:p>
             </p:txBody>
           </p:sp>
         </mc:Choice>
-        <mc:Fallback xmlns="">
+        <mc:Fallback>
           <p:sp>
             <p:nvSpPr>
               <p:cNvPr id="45" name="TextBox 44">
@@ -9630,8 +9673,8 @@
             </p:nvSpPr>
             <p:spPr>
               <a:xfrm>
-                <a:off x="1518417" y="1046913"/>
-                <a:ext cx="970607" cy="461665"/>
+                <a:off x="1757481" y="1170607"/>
+                <a:ext cx="656402" cy="461665"/>
               </a:xfrm>
               <a:prstGeom prst="rect">
                 <a:avLst/>
@@ -9639,7 +9682,7 @@
               <a:blipFill>
                 <a:blip r:embed="rId10"/>
                 <a:stretch>
-                  <a:fillRect b="-1333"/>
+                  <a:fillRect b="-1316"/>
                 </a:stretch>
               </a:blipFill>
             </p:spPr>
@@ -9658,8 +9701,8 @@
           </p:sp>
         </mc:Fallback>
       </mc:AlternateContent>
-      <mc:AlternateContent xmlns:mc="http://schemas.openxmlformats.org/markup-compatibility/2006" xmlns:a14="http://schemas.microsoft.com/office/drawing/2010/main">
-        <mc:Choice Requires="a14">
+      <mc:AlternateContent xmlns:mc="http://schemas.openxmlformats.org/markup-compatibility/2006">
+        <mc:Choice xmlns:a14="http://schemas.microsoft.com/office/drawing/2010/main" Requires="a14">
           <p:sp>
             <p:nvSpPr>
               <p:cNvPr id="46" name="TextBox 45">
@@ -9674,8 +9717,8 @@
             </p:nvSpPr>
             <p:spPr>
               <a:xfrm>
-                <a:off x="1570487" y="3268375"/>
-                <a:ext cx="970607" cy="495905"/>
+                <a:off x="1853971" y="3306781"/>
+                <a:ext cx="495606" cy="495905"/>
               </a:xfrm>
               <a:prstGeom prst="rect">
                 <a:avLst/>
@@ -9699,6 +9742,9 @@
                         <m:sSubPr>
                           <m:ctrlPr>
                             <a:rPr lang="de-DE" sz="2400" b="0" i="1" smtClean="0">
+                              <a:solidFill>
+                                <a:schemeClr val="bg1"/>
+                              </a:solidFill>
                               <a:latin typeface="Cambria Math" panose="02040503050406030204" pitchFamily="18" charset="0"/>
                             </a:rPr>
                           </m:ctrlPr>
@@ -9709,6 +9755,9 @@
                               <m:sty m:val="p"/>
                             </m:rPr>
                             <a:rPr lang="de-DE" sz="2400" b="0" i="1" smtClean="0">
+                              <a:solidFill>
+                                <a:schemeClr val="bg1"/>
+                              </a:solidFill>
                               <a:latin typeface="Cambria Math" panose="02040503050406030204" pitchFamily="18" charset="0"/>
                             </a:rPr>
                             <m:t>r</m:t>
@@ -9717,6 +9766,9 @@
                         <m:sub>
                           <m:r>
                             <a:rPr lang="de-DE" sz="2400" b="0" i="1" smtClean="0">
+                              <a:solidFill>
+                                <a:schemeClr val="bg1"/>
+                              </a:solidFill>
                               <a:latin typeface="Cambria Math" panose="02040503050406030204" pitchFamily="18" charset="0"/>
                             </a:rPr>
                             <m:t>𝑗</m:t>
@@ -9726,12 +9778,16 @@
                     </m:oMath>
                   </m:oMathPara>
                 </a14:m>
-                <a:endParaRPr lang="en-US" sz="2400" dirty="0"/>
+                <a:endParaRPr lang="en-US" sz="2400" dirty="0">
+                  <a:solidFill>
+                    <a:schemeClr val="bg1"/>
+                  </a:solidFill>
+                </a:endParaRPr>
               </a:p>
             </p:txBody>
           </p:sp>
         </mc:Choice>
-        <mc:Fallback xmlns="">
+        <mc:Fallback>
           <p:sp>
             <p:nvSpPr>
               <p:cNvPr id="46" name="TextBox 45">
@@ -9748,8 +9804,8 @@
             </p:nvSpPr>
             <p:spPr>
               <a:xfrm>
-                <a:off x="1570487" y="3268375"/>
-                <a:ext cx="970607" cy="495905"/>
+                <a:off x="1853971" y="3306781"/>
+                <a:ext cx="495606" cy="495905"/>
               </a:xfrm>
               <a:prstGeom prst="rect">
                 <a:avLst/>
@@ -9776,8 +9832,8 @@
           </p:sp>
         </mc:Fallback>
       </mc:AlternateContent>
-      <mc:AlternateContent xmlns:mc="http://schemas.openxmlformats.org/markup-compatibility/2006" xmlns:a14="http://schemas.microsoft.com/office/drawing/2010/main">
-        <mc:Choice Requires="a14">
+      <mc:AlternateContent xmlns:mc="http://schemas.openxmlformats.org/markup-compatibility/2006">
+        <mc:Choice xmlns:a14="http://schemas.microsoft.com/office/drawing/2010/main" Requires="a14">
           <p:sp>
             <p:nvSpPr>
               <p:cNvPr id="47" name="TextBox 46">
@@ -9792,7 +9848,7 @@
             </p:nvSpPr>
             <p:spPr>
               <a:xfrm>
-                <a:off x="1005179" y="2684234"/>
+                <a:off x="1005179" y="3070734"/>
                 <a:ext cx="991552" cy="495905"/>
               </a:xfrm>
               <a:prstGeom prst="rect">
@@ -9846,7 +9902,7 @@
             </p:txBody>
           </p:sp>
         </mc:Choice>
-        <mc:Fallback xmlns="">
+        <mc:Fallback>
           <p:sp>
             <p:nvSpPr>
               <p:cNvPr id="47" name="TextBox 46">
@@ -9863,7 +9919,7 @@
             </p:nvSpPr>
             <p:spPr>
               <a:xfrm>
-                <a:off x="1005179" y="2684234"/>
+                <a:off x="1005179" y="3070734"/>
                 <a:ext cx="991552" cy="495905"/>
               </a:xfrm>
               <a:prstGeom prst="rect">
@@ -9872,7 +9928,7 @@
               <a:blipFill>
                 <a:blip r:embed="rId12"/>
                 <a:stretch>
-                  <a:fillRect b="-8537"/>
+                  <a:fillRect b="-9877"/>
                 </a:stretch>
               </a:blipFill>
             </p:spPr>
@@ -9891,8 +9947,8 @@
           </p:sp>
         </mc:Fallback>
       </mc:AlternateContent>
-      <mc:AlternateContent xmlns:mc="http://schemas.openxmlformats.org/markup-compatibility/2006" xmlns:a14="http://schemas.microsoft.com/office/drawing/2010/main">
-        <mc:Choice Requires="a14">
+      <mc:AlternateContent xmlns:mc="http://schemas.openxmlformats.org/markup-compatibility/2006">
+        <mc:Choice xmlns:a14="http://schemas.microsoft.com/office/drawing/2010/main" Requires="a14">
           <p:sp>
             <p:nvSpPr>
               <p:cNvPr id="48" name="TextBox 47">
@@ -9907,8 +9963,8 @@
             </p:nvSpPr>
             <p:spPr>
               <a:xfrm>
-                <a:off x="3144879" y="1691092"/>
-                <a:ext cx="970607" cy="461665"/>
+                <a:off x="3734725" y="2236201"/>
+                <a:ext cx="527465" cy="461665"/>
               </a:xfrm>
               <a:prstGeom prst="rect">
                 <a:avLst/>
@@ -9932,6 +9988,9 @@
                         <m:sSubPr>
                           <m:ctrlPr>
                             <a:rPr lang="de-DE" sz="2400" b="0" i="1" smtClean="0">
+                              <a:solidFill>
+                                <a:schemeClr val="bg1"/>
+                              </a:solidFill>
                               <a:latin typeface="Cambria Math" panose="02040503050406030204" pitchFamily="18" charset="0"/>
                             </a:rPr>
                           </m:ctrlPr>
@@ -9942,6 +10001,9 @@
                               <m:sty m:val="p"/>
                             </m:rPr>
                             <a:rPr lang="de-DE" sz="2400" b="0" i="1" smtClean="0">
+                              <a:solidFill>
+                                <a:schemeClr val="bg1"/>
+                              </a:solidFill>
                               <a:latin typeface="Cambria Math" panose="02040503050406030204" pitchFamily="18" charset="0"/>
                             </a:rPr>
                             <m:t>r</m:t>
@@ -9950,6 +10012,9 @@
                         <m:sub>
                           <m:r>
                             <a:rPr lang="de-DE" sz="2400" b="0" i="1" smtClean="0">
+                              <a:solidFill>
+                                <a:schemeClr val="bg1"/>
+                              </a:solidFill>
                               <a:latin typeface="Cambria Math" panose="02040503050406030204" pitchFamily="18" charset="0"/>
                             </a:rPr>
                             <m:t>𝑘</m:t>
@@ -9959,12 +10024,16 @@
                     </m:oMath>
                   </m:oMathPara>
                 </a14:m>
-                <a:endParaRPr lang="en-US" sz="2400" dirty="0"/>
+                <a:endParaRPr lang="en-US" sz="2400" dirty="0">
+                  <a:solidFill>
+                    <a:schemeClr val="bg1"/>
+                  </a:solidFill>
+                </a:endParaRPr>
               </a:p>
             </p:txBody>
           </p:sp>
         </mc:Choice>
-        <mc:Fallback xmlns="">
+        <mc:Fallback>
           <p:sp>
             <p:nvSpPr>
               <p:cNvPr id="48" name="TextBox 47">
@@ -9981,8 +10050,8 @@
             </p:nvSpPr>
             <p:spPr>
               <a:xfrm>
-                <a:off x="3144879" y="1691092"/>
-                <a:ext cx="970607" cy="461665"/>
+                <a:off x="3734725" y="2236201"/>
+                <a:ext cx="527465" cy="461665"/>
               </a:xfrm>
               <a:prstGeom prst="rect">
                 <a:avLst/>
@@ -9990,7 +10059,7 @@
               <a:blipFill>
                 <a:blip r:embed="rId13"/>
                 <a:stretch>
-                  <a:fillRect b="-1316"/>
+                  <a:fillRect/>
                 </a:stretch>
               </a:blipFill>
             </p:spPr>
@@ -10025,8 +10094,8 @@
             </p:nvSpPr>
             <p:spPr>
               <a:xfrm>
-                <a:off x="2057867" y="1776487"/>
-                <a:ext cx="991552" cy="461665"/>
+                <a:off x="3397707" y="1756296"/>
+                <a:ext cx="656402" cy="461665"/>
               </a:xfrm>
               <a:prstGeom prst="rect">
                 <a:avLst/>
@@ -10067,13 +10136,7 @@
                             <a:rPr lang="de-DE" sz="2400" b="0" i="1" smtClean="0">
                               <a:latin typeface="Cambria Math" panose="02040503050406030204" pitchFamily="18" charset="0"/>
                             </a:rPr>
-                            <m:t>𝑧</m:t>
-                          </m:r>
-                          <m:r>
-                            <a:rPr lang="de-DE" sz="2400" b="0" i="1" smtClean="0">
-                              <a:latin typeface="Cambria Math" panose="02040503050406030204" pitchFamily="18" charset="0"/>
-                            </a:rPr>
-                            <m:t>𝑘</m:t>
+                            <m:t>𝑧𝑘</m:t>
                           </m:r>
                         </m:sub>
                       </m:sSub>
@@ -10102,8 +10165,8 @@
             </p:nvSpPr>
             <p:spPr>
               <a:xfrm>
-                <a:off x="2057867" y="1776487"/>
-                <a:ext cx="991552" cy="461665"/>
+                <a:off x="3397707" y="1756296"/>
+                <a:ext cx="656402" cy="461665"/>
               </a:xfrm>
               <a:prstGeom prst="rect">
                 <a:avLst/>
@@ -10349,13 +10412,7 @@
                                       <a:rPr lang="de-DE" sz="2400" b="0" i="1" smtClean="0">
                                         <a:latin typeface="Cambria Math" panose="02040503050406030204" pitchFamily="18" charset="0"/>
                                       </a:rPr>
-                                      <m:t>1</m:t>
-                                    </m:r>
-                                    <m:r>
-                                      <a:rPr lang="de-DE" sz="2400" b="0" i="1" smtClean="0">
-                                        <a:latin typeface="Cambria Math" panose="02040503050406030204" pitchFamily="18" charset="0"/>
-                                      </a:rPr>
-                                      <m:t>,</m:t>
+                                      <m:t>1,</m:t>
                                     </m:r>
                                     <m:r>
                                       <m:rPr>
@@ -10708,13 +10765,7 @@
                                       <a:rPr lang="de-DE" sz="2400" b="0" i="1" smtClean="0">
                                         <a:latin typeface="Cambria Math" panose="02040503050406030204" pitchFamily="18" charset="0"/>
                                       </a:rPr>
-                                      <m:t>,</m:t>
-                                    </m:r>
-                                    <m:r>
-                                      <a:rPr lang="de-DE" sz="2400" b="0" i="1" smtClean="0">
-                                        <a:latin typeface="Cambria Math" panose="02040503050406030204" pitchFamily="18" charset="0"/>
-                                      </a:rPr>
-                                      <m:t>1</m:t>
+                                      <m:t>,1</m:t>
                                     </m:r>
                                   </m:sub>
                                 </m:sSub>
@@ -10851,8 +10902,8 @@
           </p:sp>
         </mc:Fallback>
       </mc:AlternateContent>
-      <mc:AlternateContent xmlns:mc="http://schemas.openxmlformats.org/markup-compatibility/2006" xmlns:a14="http://schemas.microsoft.com/office/drawing/2010/main">
-        <mc:Choice Requires="a14">
+      <mc:AlternateContent xmlns:mc="http://schemas.openxmlformats.org/markup-compatibility/2006">
+        <mc:Choice xmlns:a14="http://schemas.microsoft.com/office/drawing/2010/main" Requires="a14">
           <p:sp>
             <p:nvSpPr>
               <p:cNvPr id="6" name="TextBox 5">
@@ -10867,7 +10918,7 @@
             </p:nvSpPr>
             <p:spPr>
               <a:xfrm>
-                <a:off x="5657850" y="3429546"/>
+                <a:off x="5667277" y="3730592"/>
                 <a:ext cx="6271260" cy="491417"/>
               </a:xfrm>
               <a:prstGeom prst="rect">
@@ -10892,19 +10943,7 @@
                         <a:rPr lang="de-DE" sz="2400" b="0" i="1" smtClean="0">
                           <a:latin typeface="Cambria Math" panose="02040503050406030204" pitchFamily="18" charset="0"/>
                         </a:rPr>
-                        <m:t>[</m:t>
-                      </m:r>
-                      <m:r>
-                        <a:rPr lang="de-DE" sz="2400" b="0" i="1" smtClean="0">
-                          <a:latin typeface="Cambria Math" panose="02040503050406030204" pitchFamily="18" charset="0"/>
-                        </a:rPr>
-                        <m:t>0</m:t>
-                      </m:r>
-                      <m:r>
-                        <a:rPr lang="de-DE" sz="2400" b="0" i="1" smtClean="0">
-                          <a:latin typeface="Cambria Math" panose="02040503050406030204" pitchFamily="18" charset="0"/>
-                        </a:rPr>
-                        <m:t>, ⋯,</m:t>
+                        <m:t>[0, ⋯,</m:t>
                       </m:r>
                       <m:sSub>
                         <m:sSubPr>
@@ -10935,19 +10974,7 @@
                         <a:rPr lang="de-DE" sz="2400" b="0" i="1" smtClean="0">
                           <a:latin typeface="Cambria Math" panose="02040503050406030204" pitchFamily="18" charset="0"/>
                         </a:rPr>
-                        <m:t>&gt;</m:t>
-                      </m:r>
-                      <m:r>
-                        <a:rPr lang="de-DE" sz="2400" b="0" i="1" smtClean="0">
-                          <a:latin typeface="Cambria Math" panose="02040503050406030204" pitchFamily="18" charset="0"/>
-                        </a:rPr>
-                        <m:t>0</m:t>
-                      </m:r>
-                      <m:r>
-                        <a:rPr lang="de-DE" sz="2400" b="0" i="1" smtClean="0">
-                          <a:latin typeface="Cambria Math" panose="02040503050406030204" pitchFamily="18" charset="0"/>
-                        </a:rPr>
-                        <m:t>,⋯,</m:t>
+                        <m:t>&gt;0,⋯,</m:t>
                       </m:r>
                       <m:sSub>
                         <m:sSubPr>
@@ -10978,19 +11005,7 @@
                         <a:rPr lang="de-DE" sz="2400" b="0" i="1" smtClean="0">
                           <a:latin typeface="Cambria Math" panose="02040503050406030204" pitchFamily="18" charset="0"/>
                         </a:rPr>
-                        <m:t>&gt;</m:t>
-                      </m:r>
-                      <m:r>
-                        <a:rPr lang="de-DE" sz="2400" b="0" i="1" smtClean="0">
-                          <a:latin typeface="Cambria Math" panose="02040503050406030204" pitchFamily="18" charset="0"/>
-                        </a:rPr>
-                        <m:t>0</m:t>
-                      </m:r>
-                      <m:r>
-                        <a:rPr lang="de-DE" sz="2400" b="0" i="1" smtClean="0">
-                          <a:latin typeface="Cambria Math" panose="02040503050406030204" pitchFamily="18" charset="0"/>
-                        </a:rPr>
-                        <m:t>,⋯,</m:t>
+                        <m:t>&gt;0,⋯,</m:t>
                       </m:r>
                       <m:sSub>
                         <m:sSubPr>
@@ -11021,19 +11036,7 @@
                         <a:rPr lang="de-DE" sz="2400" b="0" i="1" smtClean="0">
                           <a:latin typeface="Cambria Math" panose="02040503050406030204" pitchFamily="18" charset="0"/>
                         </a:rPr>
-                        <m:t>&lt;</m:t>
-                      </m:r>
-                      <m:r>
-                        <a:rPr lang="de-DE" sz="2400" b="0" i="1" smtClean="0">
-                          <a:latin typeface="Cambria Math" panose="02040503050406030204" pitchFamily="18" charset="0"/>
-                        </a:rPr>
-                        <m:t>0</m:t>
-                      </m:r>
-                      <m:r>
-                        <a:rPr lang="de-DE" sz="2400" b="0" i="1" smtClean="0">
-                          <a:latin typeface="Cambria Math" panose="02040503050406030204" pitchFamily="18" charset="0"/>
-                        </a:rPr>
-                        <m:t>,⋯,</m:t>
+                        <m:t>&lt;0,⋯,</m:t>
                       </m:r>
                       <m:r>
                         <a:rPr lang="de-DE" sz="2400" b="0" i="1" smtClean="0">
@@ -11056,7 +11059,7 @@
             </p:txBody>
           </p:sp>
         </mc:Choice>
-        <mc:Fallback xmlns="">
+        <mc:Fallback>
           <p:sp>
             <p:nvSpPr>
               <p:cNvPr id="6" name="TextBox 5">
@@ -11073,7 +11076,7 @@
             </p:nvSpPr>
             <p:spPr>
               <a:xfrm>
-                <a:off x="5657850" y="3429546"/>
+                <a:off x="5667277" y="3730592"/>
                 <a:ext cx="6271260" cy="491417"/>
               </a:xfrm>
               <a:prstGeom prst="rect">
@@ -11082,7 +11085,7 @@
               <a:blipFill>
                 <a:blip r:embed="rId16"/>
                 <a:stretch>
-                  <a:fillRect l="-777" b="-12500"/>
+                  <a:fillRect l="-875" b="-11111"/>
                 </a:stretch>
               </a:blipFill>
             </p:spPr>
@@ -11218,6 +11221,641 @@
           </a:prstGeom>
         </p:spPr>
       </p:pic>
+      <mc:AlternateContent xmlns:mc="http://schemas.openxmlformats.org/markup-compatibility/2006">
+        <mc:Choice xmlns:a14="http://schemas.microsoft.com/office/drawing/2010/main" Requires="a14">
+          <p:sp>
+            <p:nvSpPr>
+              <p:cNvPr id="5" name="TextBox 4">
+                <a:extLst>
+                  <a:ext uri="{FF2B5EF4-FFF2-40B4-BE49-F238E27FC236}">
+                    <a16:creationId xmlns:a16="http://schemas.microsoft.com/office/drawing/2014/main" id="{B512A852-F17E-C34E-B93D-40884E3B7546}"/>
+                  </a:ext>
+                </a:extLst>
+              </p:cNvPr>
+              <p:cNvSpPr txBox="1"/>
+              <p:nvPr/>
+            </p:nvSpPr>
+            <p:spPr>
+              <a:xfrm>
+                <a:off x="2166934" y="1502987"/>
+                <a:ext cx="656402" cy="461665"/>
+              </a:xfrm>
+              <a:prstGeom prst="rect">
+                <a:avLst/>
+              </a:prstGeom>
+              <a:noFill/>
+            </p:spPr>
+            <p:txBody>
+              <a:bodyPr wrap="square">
+                <a:spAutoFit/>
+              </a:bodyPr>
+              <a:lstStyle/>
+              <a:p>
+                <a:pPr/>
+                <a14:m>
+                  <m:oMathPara xmlns:m="http://schemas.openxmlformats.org/officeDocument/2006/math">
+                    <m:oMathParaPr>
+                      <m:jc m:val="centerGroup"/>
+                    </m:oMathParaPr>
+                    <m:oMath xmlns:m="http://schemas.openxmlformats.org/officeDocument/2006/math">
+                      <m:sSub>
+                        <m:sSubPr>
+                          <m:ctrlPr>
+                            <a:rPr lang="de-DE" sz="2400" b="0" i="1" smtClean="0">
+                              <a:latin typeface="Cambria Math" panose="02040503050406030204" pitchFamily="18" charset="0"/>
+                            </a:rPr>
+                          </m:ctrlPr>
+                        </m:sSubPr>
+                        <m:e>
+                          <m:r>
+                            <a:rPr lang="de-DE" sz="2400" b="0" i="1" smtClean="0">
+                              <a:latin typeface="Cambria Math" panose="02040503050406030204" pitchFamily="18" charset="0"/>
+                            </a:rPr>
+                            <m:t>𝑏</m:t>
+                          </m:r>
+                        </m:e>
+                        <m:sub>
+                          <m:r>
+                            <a:rPr lang="de-DE" sz="2400" b="0" i="1" smtClean="0">
+                              <a:latin typeface="Cambria Math" panose="02040503050406030204" pitchFamily="18" charset="0"/>
+                            </a:rPr>
+                            <m:t>𝑧</m:t>
+                          </m:r>
+                          <m:r>
+                            <a:rPr lang="de-DE" sz="2400" b="0" i="1" smtClean="0">
+                              <a:latin typeface="Cambria Math" panose="02040503050406030204" pitchFamily="18" charset="0"/>
+                            </a:rPr>
+                            <m:t>𝑖</m:t>
+                          </m:r>
+                        </m:sub>
+                      </m:sSub>
+                    </m:oMath>
+                  </m:oMathPara>
+                </a14:m>
+                <a:endParaRPr lang="en-US" sz="2400" dirty="0"/>
+              </a:p>
+            </p:txBody>
+          </p:sp>
+        </mc:Choice>
+        <mc:Fallback>
+          <p:sp>
+            <p:nvSpPr>
+              <p:cNvPr id="5" name="TextBox 4">
+                <a:extLst>
+                  <a:ext uri="{FF2B5EF4-FFF2-40B4-BE49-F238E27FC236}">
+                    <a16:creationId xmlns:a16="http://schemas.microsoft.com/office/drawing/2014/main" id="{B512A852-F17E-C34E-B93D-40884E3B7546}"/>
+                  </a:ext>
+                </a:extLst>
+              </p:cNvPr>
+              <p:cNvSpPr txBox="1">
+                <a:spLocks noRot="1" noChangeAspect="1" noMove="1" noResize="1" noEditPoints="1" noAdjustHandles="1" noChangeArrowheads="1" noChangeShapeType="1" noTextEdit="1"/>
+              </p:cNvSpPr>
+              <p:nvPr/>
+            </p:nvSpPr>
+            <p:spPr>
+              <a:xfrm>
+                <a:off x="2166934" y="1502987"/>
+                <a:ext cx="656402" cy="461665"/>
+              </a:xfrm>
+              <a:prstGeom prst="rect">
+                <a:avLst/>
+              </a:prstGeom>
+              <a:blipFill>
+                <a:blip r:embed="rId18"/>
+                <a:stretch>
+                  <a:fillRect b="-1333"/>
+                </a:stretch>
+              </a:blipFill>
+            </p:spPr>
+            <p:txBody>
+              <a:bodyPr/>
+              <a:lstStyle/>
+              <a:p>
+                <a:r>
+                  <a:rPr lang="en-US">
+                    <a:noFill/>
+                  </a:rPr>
+                  <a:t> </a:t>
+                </a:r>
+              </a:p>
+            </p:txBody>
+          </p:sp>
+        </mc:Fallback>
+      </mc:AlternateContent>
+      <mc:AlternateContent xmlns:mc="http://schemas.openxmlformats.org/markup-compatibility/2006">
+        <mc:Choice xmlns:a14="http://schemas.microsoft.com/office/drawing/2010/main" Requires="a14">
+          <p:sp>
+            <p:nvSpPr>
+              <p:cNvPr id="11" name="TextBox 10">
+                <a:extLst>
+                  <a:ext uri="{FF2B5EF4-FFF2-40B4-BE49-F238E27FC236}">
+                    <a16:creationId xmlns:a16="http://schemas.microsoft.com/office/drawing/2014/main" id="{B2D02457-C80D-97B7-1666-D5EDFCCD477A}"/>
+                  </a:ext>
+                </a:extLst>
+              </p:cNvPr>
+              <p:cNvSpPr txBox="1"/>
+              <p:nvPr/>
+            </p:nvSpPr>
+            <p:spPr>
+              <a:xfrm>
+                <a:off x="2249689" y="3554733"/>
+                <a:ext cx="656402" cy="495905"/>
+              </a:xfrm>
+              <a:prstGeom prst="rect">
+                <a:avLst/>
+              </a:prstGeom>
+              <a:noFill/>
+            </p:spPr>
+            <p:txBody>
+              <a:bodyPr wrap="square">
+                <a:spAutoFit/>
+              </a:bodyPr>
+              <a:lstStyle/>
+              <a:p>
+                <a:pPr/>
+                <a14:m>
+                  <m:oMathPara xmlns:m="http://schemas.openxmlformats.org/officeDocument/2006/math">
+                    <m:oMathParaPr>
+                      <m:jc m:val="centerGroup"/>
+                    </m:oMathParaPr>
+                    <m:oMath xmlns:m="http://schemas.openxmlformats.org/officeDocument/2006/math">
+                      <m:sSub>
+                        <m:sSubPr>
+                          <m:ctrlPr>
+                            <a:rPr lang="de-DE" sz="2400" b="0" i="1" smtClean="0">
+                              <a:latin typeface="Cambria Math" panose="02040503050406030204" pitchFamily="18" charset="0"/>
+                            </a:rPr>
+                          </m:ctrlPr>
+                        </m:sSubPr>
+                        <m:e>
+                          <m:r>
+                            <a:rPr lang="de-DE" sz="2400" b="0" i="1" smtClean="0">
+                              <a:latin typeface="Cambria Math" panose="02040503050406030204" pitchFamily="18" charset="0"/>
+                            </a:rPr>
+                            <m:t>𝑏</m:t>
+                          </m:r>
+                        </m:e>
+                        <m:sub>
+                          <m:r>
+                            <a:rPr lang="de-DE" sz="2400" b="0" i="1" smtClean="0">
+                              <a:latin typeface="Cambria Math" panose="02040503050406030204" pitchFamily="18" charset="0"/>
+                            </a:rPr>
+                            <m:t>𝑧</m:t>
+                          </m:r>
+                          <m:r>
+                            <a:rPr lang="de-DE" sz="2400" b="0" i="1" smtClean="0">
+                              <a:latin typeface="Cambria Math" panose="02040503050406030204" pitchFamily="18" charset="0"/>
+                            </a:rPr>
+                            <m:t>𝑗</m:t>
+                          </m:r>
+                        </m:sub>
+                      </m:sSub>
+                    </m:oMath>
+                  </m:oMathPara>
+                </a14:m>
+                <a:endParaRPr lang="en-US" sz="2400" dirty="0"/>
+              </a:p>
+            </p:txBody>
+          </p:sp>
+        </mc:Choice>
+        <mc:Fallback>
+          <p:sp>
+            <p:nvSpPr>
+              <p:cNvPr id="11" name="TextBox 10">
+                <a:extLst>
+                  <a:ext uri="{FF2B5EF4-FFF2-40B4-BE49-F238E27FC236}">
+                    <a16:creationId xmlns:a16="http://schemas.microsoft.com/office/drawing/2014/main" id="{B2D02457-C80D-97B7-1666-D5EDFCCD477A}"/>
+                  </a:ext>
+                </a:extLst>
+              </p:cNvPr>
+              <p:cNvSpPr txBox="1">
+                <a:spLocks noRot="1" noChangeAspect="1" noMove="1" noResize="1" noEditPoints="1" noAdjustHandles="1" noChangeArrowheads="1" noChangeShapeType="1" noTextEdit="1"/>
+              </p:cNvSpPr>
+              <p:nvPr/>
+            </p:nvSpPr>
+            <p:spPr>
+              <a:xfrm>
+                <a:off x="2249689" y="3554733"/>
+                <a:ext cx="656402" cy="495905"/>
+              </a:xfrm>
+              <a:prstGeom prst="rect">
+                <a:avLst/>
+              </a:prstGeom>
+              <a:blipFill>
+                <a:blip r:embed="rId19"/>
+                <a:stretch>
+                  <a:fillRect b="-9877"/>
+                </a:stretch>
+              </a:blipFill>
+            </p:spPr>
+            <p:txBody>
+              <a:bodyPr/>
+              <a:lstStyle/>
+              <a:p>
+                <a:r>
+                  <a:rPr lang="en-US">
+                    <a:noFill/>
+                  </a:rPr>
+                  <a:t> </a:t>
+                </a:r>
+              </a:p>
+            </p:txBody>
+          </p:sp>
+        </mc:Fallback>
+      </mc:AlternateContent>
+      <mc:AlternateContent xmlns:mc="http://schemas.openxmlformats.org/markup-compatibility/2006">
+        <mc:Choice xmlns:a14="http://schemas.microsoft.com/office/drawing/2010/main" Requires="a14">
+          <p:sp>
+            <p:nvSpPr>
+              <p:cNvPr id="12" name="TextBox 11">
+                <a:extLst>
+                  <a:ext uri="{FF2B5EF4-FFF2-40B4-BE49-F238E27FC236}">
+                    <a16:creationId xmlns:a16="http://schemas.microsoft.com/office/drawing/2014/main" id="{36BBE5F9-EC8F-3B74-59D1-26672A338C1E}"/>
+                  </a:ext>
+                </a:extLst>
+              </p:cNvPr>
+              <p:cNvSpPr txBox="1"/>
+              <p:nvPr/>
+            </p:nvSpPr>
+            <p:spPr>
+              <a:xfrm>
+                <a:off x="6680287" y="3257637"/>
+                <a:ext cx="656402" cy="461665"/>
+              </a:xfrm>
+              <a:prstGeom prst="rect">
+                <a:avLst/>
+              </a:prstGeom>
+              <a:noFill/>
+            </p:spPr>
+            <p:txBody>
+              <a:bodyPr wrap="square">
+                <a:spAutoFit/>
+              </a:bodyPr>
+              <a:lstStyle/>
+              <a:p>
+                <a:pPr/>
+                <a14:m>
+                  <m:oMathPara xmlns:m="http://schemas.openxmlformats.org/officeDocument/2006/math">
+                    <m:oMathParaPr>
+                      <m:jc m:val="centerGroup"/>
+                    </m:oMathParaPr>
+                    <m:oMath xmlns:m="http://schemas.openxmlformats.org/officeDocument/2006/math">
+                      <m:sSub>
+                        <m:sSubPr>
+                          <m:ctrlPr>
+                            <a:rPr lang="de-DE" sz="2400" b="0" i="1" smtClean="0">
+                              <a:solidFill>
+                                <a:schemeClr val="tx1"/>
+                              </a:solidFill>
+                              <a:latin typeface="Cambria Math" panose="02040503050406030204" pitchFamily="18" charset="0"/>
+                            </a:rPr>
+                          </m:ctrlPr>
+                        </m:sSubPr>
+                        <m:e>
+                          <m:r>
+                            <m:rPr>
+                              <m:sty m:val="p"/>
+                            </m:rPr>
+                            <a:rPr lang="de-DE" sz="2400" b="0" i="1" smtClean="0">
+                              <a:solidFill>
+                                <a:schemeClr val="tx1"/>
+                              </a:solidFill>
+                              <a:latin typeface="Cambria Math" panose="02040503050406030204" pitchFamily="18" charset="0"/>
+                            </a:rPr>
+                            <m:t>r</m:t>
+                          </m:r>
+                        </m:e>
+                        <m:sub>
+                          <m:r>
+                            <a:rPr lang="de-DE" sz="2400" b="0" i="1" smtClean="0">
+                              <a:solidFill>
+                                <a:schemeClr val="tx1"/>
+                              </a:solidFill>
+                              <a:latin typeface="Cambria Math" panose="02040503050406030204" pitchFamily="18" charset="0"/>
+                            </a:rPr>
+                            <m:t>𝑖</m:t>
+                          </m:r>
+                        </m:sub>
+                      </m:sSub>
+                    </m:oMath>
+                  </m:oMathPara>
+                </a14:m>
+                <a:endParaRPr lang="en-US" sz="2400" dirty="0">
+                  <a:solidFill>
+                    <a:schemeClr val="tx1"/>
+                  </a:solidFill>
+                </a:endParaRPr>
+              </a:p>
+            </p:txBody>
+          </p:sp>
+        </mc:Choice>
+        <mc:Fallback>
+          <p:sp>
+            <p:nvSpPr>
+              <p:cNvPr id="12" name="TextBox 11">
+                <a:extLst>
+                  <a:ext uri="{FF2B5EF4-FFF2-40B4-BE49-F238E27FC236}">
+                    <a16:creationId xmlns:a16="http://schemas.microsoft.com/office/drawing/2014/main" id="{36BBE5F9-EC8F-3B74-59D1-26672A338C1E}"/>
+                  </a:ext>
+                </a:extLst>
+              </p:cNvPr>
+              <p:cNvSpPr txBox="1">
+                <a:spLocks noRot="1" noChangeAspect="1" noMove="1" noResize="1" noEditPoints="1" noAdjustHandles="1" noChangeArrowheads="1" noChangeShapeType="1" noTextEdit="1"/>
+              </p:cNvSpPr>
+              <p:nvPr/>
+            </p:nvSpPr>
+            <p:spPr>
+              <a:xfrm>
+                <a:off x="6680287" y="3257637"/>
+                <a:ext cx="656402" cy="461665"/>
+              </a:xfrm>
+              <a:prstGeom prst="rect">
+                <a:avLst/>
+              </a:prstGeom>
+              <a:blipFill>
+                <a:blip r:embed="rId20"/>
+                <a:stretch>
+                  <a:fillRect b="-1316"/>
+                </a:stretch>
+              </a:blipFill>
+            </p:spPr>
+            <p:txBody>
+              <a:bodyPr/>
+              <a:lstStyle/>
+              <a:p>
+                <a:r>
+                  <a:rPr lang="en-US">
+                    <a:noFill/>
+                  </a:rPr>
+                  <a:t> </a:t>
+                </a:r>
+              </a:p>
+            </p:txBody>
+          </p:sp>
+        </mc:Fallback>
+      </mc:AlternateContent>
+      <mc:AlternateContent xmlns:mc="http://schemas.openxmlformats.org/markup-compatibility/2006">
+        <mc:Choice xmlns:a14="http://schemas.microsoft.com/office/drawing/2010/main" Requires="a14">
+          <p:sp>
+            <p:nvSpPr>
+              <p:cNvPr id="14" name="TextBox 13">
+                <a:extLst>
+                  <a:ext uri="{FF2B5EF4-FFF2-40B4-BE49-F238E27FC236}">
+                    <a16:creationId xmlns:a16="http://schemas.microsoft.com/office/drawing/2014/main" id="{40AABB4B-5503-F17E-B088-A4B9DACFFFB1}"/>
+                  </a:ext>
+                </a:extLst>
+              </p:cNvPr>
+              <p:cNvSpPr txBox="1"/>
+              <p:nvPr/>
+            </p:nvSpPr>
+            <p:spPr>
+              <a:xfrm>
+                <a:off x="8113743" y="3239131"/>
+                <a:ext cx="656402" cy="495905"/>
+              </a:xfrm>
+              <a:prstGeom prst="rect">
+                <a:avLst/>
+              </a:prstGeom>
+              <a:noFill/>
+            </p:spPr>
+            <p:txBody>
+              <a:bodyPr wrap="square">
+                <a:spAutoFit/>
+              </a:bodyPr>
+              <a:lstStyle/>
+              <a:p>
+                <a:pPr/>
+                <a14:m>
+                  <m:oMathPara xmlns:m="http://schemas.openxmlformats.org/officeDocument/2006/math">
+                    <m:oMathParaPr>
+                      <m:jc m:val="centerGroup"/>
+                    </m:oMathParaPr>
+                    <m:oMath xmlns:m="http://schemas.openxmlformats.org/officeDocument/2006/math">
+                      <m:sSub>
+                        <m:sSubPr>
+                          <m:ctrlPr>
+                            <a:rPr lang="de-DE" sz="2400" b="0" i="1" smtClean="0">
+                              <a:solidFill>
+                                <a:schemeClr val="tx1"/>
+                              </a:solidFill>
+                              <a:latin typeface="Cambria Math" panose="02040503050406030204" pitchFamily="18" charset="0"/>
+                            </a:rPr>
+                          </m:ctrlPr>
+                        </m:sSubPr>
+                        <m:e>
+                          <m:r>
+                            <m:rPr>
+                              <m:sty m:val="p"/>
+                            </m:rPr>
+                            <a:rPr lang="de-DE" sz="2400" b="0" i="1" smtClean="0">
+                              <a:solidFill>
+                                <a:schemeClr val="tx1"/>
+                              </a:solidFill>
+                              <a:latin typeface="Cambria Math" panose="02040503050406030204" pitchFamily="18" charset="0"/>
+                            </a:rPr>
+                            <m:t>r</m:t>
+                          </m:r>
+                        </m:e>
+                        <m:sub>
+                          <m:r>
+                            <a:rPr lang="de-DE" sz="2400" b="0" i="1" smtClean="0">
+                              <a:solidFill>
+                                <a:schemeClr val="tx1"/>
+                              </a:solidFill>
+                              <a:latin typeface="Cambria Math" panose="02040503050406030204" pitchFamily="18" charset="0"/>
+                            </a:rPr>
+                            <m:t>𝑗</m:t>
+                          </m:r>
+                        </m:sub>
+                      </m:sSub>
+                    </m:oMath>
+                  </m:oMathPara>
+                </a14:m>
+                <a:endParaRPr lang="en-US" sz="2400" dirty="0">
+                  <a:solidFill>
+                    <a:schemeClr val="tx1"/>
+                  </a:solidFill>
+                </a:endParaRPr>
+              </a:p>
+            </p:txBody>
+          </p:sp>
+        </mc:Choice>
+        <mc:Fallback>
+          <p:sp>
+            <p:nvSpPr>
+              <p:cNvPr id="14" name="TextBox 13">
+                <a:extLst>
+                  <a:ext uri="{FF2B5EF4-FFF2-40B4-BE49-F238E27FC236}">
+                    <a16:creationId xmlns:a16="http://schemas.microsoft.com/office/drawing/2014/main" id="{40AABB4B-5503-F17E-B088-A4B9DACFFFB1}"/>
+                  </a:ext>
+                </a:extLst>
+              </p:cNvPr>
+              <p:cNvSpPr txBox="1">
+                <a:spLocks noRot="1" noChangeAspect="1" noMove="1" noResize="1" noEditPoints="1" noAdjustHandles="1" noChangeArrowheads="1" noChangeShapeType="1" noTextEdit="1"/>
+              </p:cNvSpPr>
+              <p:nvPr/>
+            </p:nvSpPr>
+            <p:spPr>
+              <a:xfrm>
+                <a:off x="8113743" y="3239131"/>
+                <a:ext cx="656402" cy="495905"/>
+              </a:xfrm>
+              <a:prstGeom prst="rect">
+                <a:avLst/>
+              </a:prstGeom>
+              <a:blipFill>
+                <a:blip r:embed="rId21"/>
+                <a:stretch>
+                  <a:fillRect b="-8537"/>
+                </a:stretch>
+              </a:blipFill>
+            </p:spPr>
+            <p:txBody>
+              <a:bodyPr/>
+              <a:lstStyle/>
+              <a:p>
+                <a:r>
+                  <a:rPr lang="en-US">
+                    <a:noFill/>
+                  </a:rPr>
+                  <a:t> </a:t>
+                </a:r>
+              </a:p>
+            </p:txBody>
+          </p:sp>
+        </mc:Fallback>
+      </mc:AlternateContent>
+      <mc:AlternateContent xmlns:mc="http://schemas.openxmlformats.org/markup-compatibility/2006">
+        <mc:Choice xmlns:a14="http://schemas.microsoft.com/office/drawing/2010/main" Requires="a14">
+          <p:sp>
+            <p:nvSpPr>
+              <p:cNvPr id="15" name="TextBox 14">
+                <a:extLst>
+                  <a:ext uri="{FF2B5EF4-FFF2-40B4-BE49-F238E27FC236}">
+                    <a16:creationId xmlns:a16="http://schemas.microsoft.com/office/drawing/2014/main" id="{C2401C1D-C3A0-4D2C-CD5E-9208E7471FD3}"/>
+                  </a:ext>
+                </a:extLst>
+              </p:cNvPr>
+              <p:cNvSpPr txBox="1"/>
+              <p:nvPr/>
+            </p:nvSpPr>
+            <p:spPr>
+              <a:xfrm>
+                <a:off x="9565454" y="3239130"/>
+                <a:ext cx="656402" cy="461665"/>
+              </a:xfrm>
+              <a:prstGeom prst="rect">
+                <a:avLst/>
+              </a:prstGeom>
+              <a:noFill/>
+            </p:spPr>
+            <p:txBody>
+              <a:bodyPr wrap="square">
+                <a:spAutoFit/>
+              </a:bodyPr>
+              <a:lstStyle/>
+              <a:p>
+                <a:pPr/>
+                <a14:m>
+                  <m:oMathPara xmlns:m="http://schemas.openxmlformats.org/officeDocument/2006/math">
+                    <m:oMathParaPr>
+                      <m:jc m:val="centerGroup"/>
+                    </m:oMathParaPr>
+                    <m:oMath xmlns:m="http://schemas.openxmlformats.org/officeDocument/2006/math">
+                      <m:sSub>
+                        <m:sSubPr>
+                          <m:ctrlPr>
+                            <a:rPr lang="de-DE" sz="2400" b="0" i="1" smtClean="0">
+                              <a:solidFill>
+                                <a:schemeClr val="tx1"/>
+                              </a:solidFill>
+                              <a:latin typeface="Cambria Math" panose="02040503050406030204" pitchFamily="18" charset="0"/>
+                            </a:rPr>
+                          </m:ctrlPr>
+                        </m:sSubPr>
+                        <m:e>
+                          <m:r>
+                            <m:rPr>
+                              <m:sty m:val="p"/>
+                            </m:rPr>
+                            <a:rPr lang="de-DE" sz="2400" b="0" i="1" smtClean="0">
+                              <a:solidFill>
+                                <a:schemeClr val="tx1"/>
+                              </a:solidFill>
+                              <a:latin typeface="Cambria Math" panose="02040503050406030204" pitchFamily="18" charset="0"/>
+                            </a:rPr>
+                            <m:t>r</m:t>
+                          </m:r>
+                        </m:e>
+                        <m:sub>
+                          <m:r>
+                            <a:rPr lang="de-DE" sz="2400" b="0" i="1" smtClean="0">
+                              <a:solidFill>
+                                <a:schemeClr val="tx1"/>
+                              </a:solidFill>
+                              <a:latin typeface="Cambria Math" panose="02040503050406030204" pitchFamily="18" charset="0"/>
+                            </a:rPr>
+                            <m:t>𝑘</m:t>
+                          </m:r>
+                        </m:sub>
+                      </m:sSub>
+                    </m:oMath>
+                  </m:oMathPara>
+                </a14:m>
+                <a:endParaRPr lang="en-US" sz="2400" dirty="0">
+                  <a:solidFill>
+                    <a:schemeClr val="tx1"/>
+                  </a:solidFill>
+                </a:endParaRPr>
+              </a:p>
+            </p:txBody>
+          </p:sp>
+        </mc:Choice>
+        <mc:Fallback>
+          <p:sp>
+            <p:nvSpPr>
+              <p:cNvPr id="15" name="TextBox 14">
+                <a:extLst>
+                  <a:ext uri="{FF2B5EF4-FFF2-40B4-BE49-F238E27FC236}">
+                    <a16:creationId xmlns:a16="http://schemas.microsoft.com/office/drawing/2014/main" id="{C2401C1D-C3A0-4D2C-CD5E-9208E7471FD3}"/>
+                  </a:ext>
+                </a:extLst>
+              </p:cNvPr>
+              <p:cNvSpPr txBox="1">
+                <a:spLocks noRot="1" noChangeAspect="1" noMove="1" noResize="1" noEditPoints="1" noAdjustHandles="1" noChangeArrowheads="1" noChangeShapeType="1" noTextEdit="1"/>
+              </p:cNvSpPr>
+              <p:nvPr/>
+            </p:nvSpPr>
+            <p:spPr>
+              <a:xfrm>
+                <a:off x="9565454" y="3239130"/>
+                <a:ext cx="656402" cy="461665"/>
+              </a:xfrm>
+              <a:prstGeom prst="rect">
+                <a:avLst/>
+              </a:prstGeom>
+              <a:blipFill>
+                <a:blip r:embed="rId22"/>
+                <a:stretch>
+                  <a:fillRect b="-1316"/>
+                </a:stretch>
+              </a:blipFill>
+            </p:spPr>
+            <p:txBody>
+              <a:bodyPr/>
+              <a:lstStyle/>
+              <a:p>
+                <a:r>
+                  <a:rPr lang="en-US">
+                    <a:noFill/>
+                  </a:rPr>
+                  <a:t> </a:t>
+                </a:r>
+              </a:p>
+            </p:txBody>
+          </p:sp>
+        </mc:Fallback>
+      </mc:AlternateContent>
     </p:spTree>
     <p:extLst>
       <p:ext uri="{BB962C8B-B14F-4D97-AF65-F5344CB8AC3E}">
@@ -11378,8 +12016,8 @@
             <a:chExt cx="3616284" cy="1973197"/>
           </a:xfrm>
         </p:grpSpPr>
-        <mc:AlternateContent xmlns:mc="http://schemas.openxmlformats.org/markup-compatibility/2006">
-          <mc:Choice xmlns:a14="http://schemas.microsoft.com/office/drawing/2010/main" Requires="a14">
+        <mc:AlternateContent xmlns:mc="http://schemas.openxmlformats.org/markup-compatibility/2006" xmlns:a14="http://schemas.microsoft.com/office/drawing/2010/main">
+          <mc:Choice Requires="a14">
             <p:sp>
               <p:nvSpPr>
                 <p:cNvPr id="41" name="TextBox 40">
@@ -11464,7 +12102,7 @@
               </p:txBody>
             </p:sp>
           </mc:Choice>
-          <mc:Fallback>
+          <mc:Fallback xmlns="">
             <p:sp>
               <p:nvSpPr>
                 <p:cNvPr id="41" name="TextBox 40">
@@ -11916,8 +12554,8 @@
             </a:fontRef>
           </p:style>
         </p:cxnSp>
-        <mc:AlternateContent xmlns:mc="http://schemas.openxmlformats.org/markup-compatibility/2006">
-          <mc:Choice xmlns:a14="http://schemas.microsoft.com/office/drawing/2010/main" Requires="a14">
+        <mc:AlternateContent xmlns:mc="http://schemas.openxmlformats.org/markup-compatibility/2006" xmlns:a14="http://schemas.microsoft.com/office/drawing/2010/main">
+          <mc:Choice Requires="a14">
             <p:sp>
               <p:nvSpPr>
                 <p:cNvPr id="31" name="TextBox 30">
@@ -12002,7 +12640,7 @@
               </p:txBody>
             </p:sp>
           </mc:Choice>
-          <mc:Fallback>
+          <mc:Fallback xmlns="">
             <p:sp>
               <p:nvSpPr>
                 <p:cNvPr id="31" name="TextBox 30">
@@ -12047,8 +12685,8 @@
             </p:sp>
           </mc:Fallback>
         </mc:AlternateContent>
-        <mc:AlternateContent xmlns:mc="http://schemas.openxmlformats.org/markup-compatibility/2006">
-          <mc:Choice xmlns:a14="http://schemas.microsoft.com/office/drawing/2010/main" Requires="a14">
+        <mc:AlternateContent xmlns:mc="http://schemas.openxmlformats.org/markup-compatibility/2006" xmlns:a14="http://schemas.microsoft.com/office/drawing/2010/main">
+          <mc:Choice Requires="a14">
             <p:sp>
               <p:nvSpPr>
                 <p:cNvPr id="32" name="TextBox 31">
@@ -12135,7 +12773,7 @@
               </p:txBody>
             </p:sp>
           </mc:Choice>
-          <mc:Fallback>
+          <mc:Fallback xmlns="">
             <p:sp>
               <p:nvSpPr>
                 <p:cNvPr id="32" name="TextBox 31">
@@ -12185,8 +12823,8 @@
             </p:sp>
           </mc:Fallback>
         </mc:AlternateContent>
-        <mc:AlternateContent xmlns:mc="http://schemas.openxmlformats.org/markup-compatibility/2006">
-          <mc:Choice xmlns:a14="http://schemas.microsoft.com/office/drawing/2010/main" Requires="a14">
+        <mc:AlternateContent xmlns:mc="http://schemas.openxmlformats.org/markup-compatibility/2006" xmlns:a14="http://schemas.microsoft.com/office/drawing/2010/main">
+          <mc:Choice Requires="a14">
             <p:sp>
               <p:nvSpPr>
                 <p:cNvPr id="33" name="TextBox 32">
@@ -12271,7 +12909,7 @@
               </p:txBody>
             </p:sp>
           </mc:Choice>
-          <mc:Fallback>
+          <mc:Fallback xmlns="">
             <p:sp>
               <p:nvSpPr>
                 <p:cNvPr id="33" name="TextBox 32">
@@ -12316,8 +12954,8 @@
             </p:sp>
           </mc:Fallback>
         </mc:AlternateContent>
-        <mc:AlternateContent xmlns:mc="http://schemas.openxmlformats.org/markup-compatibility/2006">
-          <mc:Choice xmlns:a14="http://schemas.microsoft.com/office/drawing/2010/main" Requires="a14">
+        <mc:AlternateContent xmlns:mc="http://schemas.openxmlformats.org/markup-compatibility/2006" xmlns:a14="http://schemas.microsoft.com/office/drawing/2010/main">
+          <mc:Choice Requires="a14">
             <p:sp>
               <p:nvSpPr>
                 <p:cNvPr id="40" name="TextBox 39">
@@ -12404,7 +13042,7 @@
               </p:txBody>
             </p:sp>
           </mc:Choice>
-          <mc:Fallback>
+          <mc:Fallback xmlns="">
             <p:sp>
               <p:nvSpPr>
                 <p:cNvPr id="40" name="TextBox 39">
@@ -12454,8 +13092,8 @@
             </p:sp>
           </mc:Fallback>
         </mc:AlternateContent>
-        <mc:AlternateContent xmlns:mc="http://schemas.openxmlformats.org/markup-compatibility/2006">
-          <mc:Choice xmlns:a14="http://schemas.microsoft.com/office/drawing/2010/main" Requires="a14">
+        <mc:AlternateContent xmlns:mc="http://schemas.openxmlformats.org/markup-compatibility/2006" xmlns:a14="http://schemas.microsoft.com/office/drawing/2010/main">
+          <mc:Choice Requires="a14">
             <p:sp>
               <p:nvSpPr>
                 <p:cNvPr id="45" name="TextBox 44">
@@ -12540,7 +13178,7 @@
               </p:txBody>
             </p:sp>
           </mc:Choice>
-          <mc:Fallback>
+          <mc:Fallback xmlns="">
             <p:sp>
               <p:nvSpPr>
                 <p:cNvPr id="45" name="TextBox 44">
@@ -12585,8 +13223,8 @@
             </p:sp>
           </mc:Fallback>
         </mc:AlternateContent>
-        <mc:AlternateContent xmlns:mc="http://schemas.openxmlformats.org/markup-compatibility/2006">
-          <mc:Choice xmlns:a14="http://schemas.microsoft.com/office/drawing/2010/main" Requires="a14">
+        <mc:AlternateContent xmlns:mc="http://schemas.openxmlformats.org/markup-compatibility/2006" xmlns:a14="http://schemas.microsoft.com/office/drawing/2010/main">
+          <mc:Choice Requires="a14">
             <p:sp>
               <p:nvSpPr>
                 <p:cNvPr id="46" name="TextBox 45">
@@ -12671,7 +13309,7 @@
               </p:txBody>
             </p:sp>
           </mc:Choice>
-          <mc:Fallback>
+          <mc:Fallback xmlns="">
             <p:sp>
               <p:nvSpPr>
                 <p:cNvPr id="46" name="TextBox 45">
@@ -12716,8 +13354,8 @@
             </p:sp>
           </mc:Fallback>
         </mc:AlternateContent>
-        <mc:AlternateContent xmlns:mc="http://schemas.openxmlformats.org/markup-compatibility/2006">
-          <mc:Choice xmlns:a14="http://schemas.microsoft.com/office/drawing/2010/main" Requires="a14">
+        <mc:AlternateContent xmlns:mc="http://schemas.openxmlformats.org/markup-compatibility/2006" xmlns:a14="http://schemas.microsoft.com/office/drawing/2010/main">
+          <mc:Choice Requires="a14">
             <p:sp>
               <p:nvSpPr>
                 <p:cNvPr id="48" name="TextBox 47">
@@ -12802,7 +13440,7 @@
               </p:txBody>
             </p:sp>
           </mc:Choice>
-          <mc:Fallback>
+          <mc:Fallback xmlns="">
             <p:sp>
               <p:nvSpPr>
                 <p:cNvPr id="48" name="TextBox 47">

--- a/slides/slides.pptx
+++ b/slides/slides.pptx
@@ -5,13 +5,15 @@
     <p:sldMasterId id="2147483648" r:id="rId1"/>
   </p:sldMasterIdLst>
   <p:notesMasterIdLst>
-    <p:notesMasterId r:id="rId6"/>
+    <p:notesMasterId r:id="rId8"/>
   </p:notesMasterIdLst>
   <p:sldIdLst>
     <p:sldId id="256" r:id="rId2"/>
     <p:sldId id="257" r:id="rId3"/>
     <p:sldId id="258" r:id="rId4"/>
     <p:sldId id="259" r:id="rId5"/>
+    <p:sldId id="261" r:id="rId6"/>
+    <p:sldId id="260" r:id="rId7"/>
   </p:sldIdLst>
   <p:sldSz cx="12192000" cy="6858000"/>
   <p:notesSz cx="6858000" cy="9144000"/>
@@ -200,7 +202,7 @@
           <a:p>
             <a:fld id="{FF1A252C-87EA-4881-A10E-9E4CA26E6FE3}" type="datetimeFigureOut">
               <a:rPr lang="en-US" smtClean="0"/>
-              <a:t>1/29/2026</a:t>
+              <a:t>2/13/2026</a:t>
             </a:fld>
             <a:endParaRPr lang="en-US"/>
           </a:p>
@@ -3176,7 +3178,7 @@
           <a:p>
             <a:fld id="{E6D7105C-A8E4-4519-9028-35FD188A98F2}" type="datetimeFigureOut">
               <a:rPr lang="en-US" smtClean="0"/>
-              <a:t>1/29/2026</a:t>
+              <a:t>2/13/2026</a:t>
             </a:fld>
             <a:endParaRPr lang="en-US"/>
           </a:p>
@@ -3374,7 +3376,7 @@
           <a:p>
             <a:fld id="{E6D7105C-A8E4-4519-9028-35FD188A98F2}" type="datetimeFigureOut">
               <a:rPr lang="en-US" smtClean="0"/>
-              <a:t>1/29/2026</a:t>
+              <a:t>2/13/2026</a:t>
             </a:fld>
             <a:endParaRPr lang="en-US"/>
           </a:p>
@@ -3582,7 +3584,7 @@
           <a:p>
             <a:fld id="{E6D7105C-A8E4-4519-9028-35FD188A98F2}" type="datetimeFigureOut">
               <a:rPr lang="en-US" smtClean="0"/>
-              <a:t>1/29/2026</a:t>
+              <a:t>2/13/2026</a:t>
             </a:fld>
             <a:endParaRPr lang="en-US"/>
           </a:p>
@@ -3780,7 +3782,7 @@
           <a:p>
             <a:fld id="{E6D7105C-A8E4-4519-9028-35FD188A98F2}" type="datetimeFigureOut">
               <a:rPr lang="en-US" smtClean="0"/>
-              <a:t>1/29/2026</a:t>
+              <a:t>2/13/2026</a:t>
             </a:fld>
             <a:endParaRPr lang="en-US"/>
           </a:p>
@@ -4055,7 +4057,7 @@
           <a:p>
             <a:fld id="{E6D7105C-A8E4-4519-9028-35FD188A98F2}" type="datetimeFigureOut">
               <a:rPr lang="en-US" smtClean="0"/>
-              <a:t>1/29/2026</a:t>
+              <a:t>2/13/2026</a:t>
             </a:fld>
             <a:endParaRPr lang="en-US"/>
           </a:p>
@@ -4320,7 +4322,7 @@
           <a:p>
             <a:fld id="{E6D7105C-A8E4-4519-9028-35FD188A98F2}" type="datetimeFigureOut">
               <a:rPr lang="en-US" smtClean="0"/>
-              <a:t>1/29/2026</a:t>
+              <a:t>2/13/2026</a:t>
             </a:fld>
             <a:endParaRPr lang="en-US"/>
           </a:p>
@@ -4732,7 +4734,7 @@
           <a:p>
             <a:fld id="{E6D7105C-A8E4-4519-9028-35FD188A98F2}" type="datetimeFigureOut">
               <a:rPr lang="en-US" smtClean="0"/>
-              <a:t>1/29/2026</a:t>
+              <a:t>2/13/2026</a:t>
             </a:fld>
             <a:endParaRPr lang="en-US"/>
           </a:p>
@@ -4873,7 +4875,7 @@
           <a:p>
             <a:fld id="{E6D7105C-A8E4-4519-9028-35FD188A98F2}" type="datetimeFigureOut">
               <a:rPr lang="en-US" smtClean="0"/>
-              <a:t>1/29/2026</a:t>
+              <a:t>2/13/2026</a:t>
             </a:fld>
             <a:endParaRPr lang="en-US"/>
           </a:p>
@@ -4986,7 +4988,7 @@
           <a:p>
             <a:fld id="{E6D7105C-A8E4-4519-9028-35FD188A98F2}" type="datetimeFigureOut">
               <a:rPr lang="en-US" smtClean="0"/>
-              <a:t>1/29/2026</a:t>
+              <a:t>2/13/2026</a:t>
             </a:fld>
             <a:endParaRPr lang="en-US"/>
           </a:p>
@@ -5297,7 +5299,7 @@
           <a:p>
             <a:fld id="{E6D7105C-A8E4-4519-9028-35FD188A98F2}" type="datetimeFigureOut">
               <a:rPr lang="en-US" smtClean="0"/>
-              <a:t>1/29/2026</a:t>
+              <a:t>2/13/2026</a:t>
             </a:fld>
             <a:endParaRPr lang="en-US"/>
           </a:p>
@@ -5585,7 +5587,7 @@
           <a:p>
             <a:fld id="{E6D7105C-A8E4-4519-9028-35FD188A98F2}" type="datetimeFigureOut">
               <a:rPr lang="en-US" smtClean="0"/>
-              <a:t>1/29/2026</a:t>
+              <a:t>2/13/2026</a:t>
             </a:fld>
             <a:endParaRPr lang="en-US"/>
           </a:p>
@@ -5826,7 +5828,7 @@
           <a:p>
             <a:fld id="{E6D7105C-A8E4-4519-9028-35FD188A98F2}" type="datetimeFigureOut">
               <a:rPr lang="en-US" smtClean="0"/>
-              <a:t>1/29/2026</a:t>
+              <a:t>2/13/2026</a:t>
             </a:fld>
             <a:endParaRPr lang="en-US"/>
           </a:p>
@@ -8729,8 +8731,8 @@
           </a:fontRef>
         </p:style>
       </p:cxnSp>
-      <mc:AlternateContent xmlns:mc="http://schemas.openxmlformats.org/markup-compatibility/2006">
-        <mc:Choice xmlns:a14="http://schemas.microsoft.com/office/drawing/2010/main" Requires="a14">
+      <mc:AlternateContent xmlns:mc="http://schemas.openxmlformats.org/markup-compatibility/2006" xmlns:a14="http://schemas.microsoft.com/office/drawing/2010/main">
+        <mc:Choice Requires="a14">
           <p:sp>
             <p:nvSpPr>
               <p:cNvPr id="31" name="TextBox 30">
@@ -8802,7 +8804,7 @@
             </p:txBody>
           </p:sp>
         </mc:Choice>
-        <mc:Fallback>
+        <mc:Fallback xmlns="">
           <p:sp>
             <p:nvSpPr>
               <p:cNvPr id="31" name="TextBox 30">
@@ -8847,8 +8849,8 @@
           </p:sp>
         </mc:Fallback>
       </mc:AlternateContent>
-      <mc:AlternateContent xmlns:mc="http://schemas.openxmlformats.org/markup-compatibility/2006">
-        <mc:Choice xmlns:a14="http://schemas.microsoft.com/office/drawing/2010/main" Requires="a14">
+      <mc:AlternateContent xmlns:mc="http://schemas.openxmlformats.org/markup-compatibility/2006" xmlns:a14="http://schemas.microsoft.com/office/drawing/2010/main">
+        <mc:Choice Requires="a14">
           <p:sp>
             <p:nvSpPr>
               <p:cNvPr id="32" name="TextBox 31">
@@ -8926,7 +8928,7 @@
             </p:txBody>
           </p:sp>
         </mc:Choice>
-        <mc:Fallback>
+        <mc:Fallback xmlns="">
           <p:sp>
             <p:nvSpPr>
               <p:cNvPr id="32" name="TextBox 31">
@@ -8971,8 +8973,8 @@
           </p:sp>
         </mc:Fallback>
       </mc:AlternateContent>
-      <mc:AlternateContent xmlns:mc="http://schemas.openxmlformats.org/markup-compatibility/2006">
-        <mc:Choice xmlns:a14="http://schemas.microsoft.com/office/drawing/2010/main" Requires="a14">
+      <mc:AlternateContent xmlns:mc="http://schemas.openxmlformats.org/markup-compatibility/2006" xmlns:a14="http://schemas.microsoft.com/office/drawing/2010/main">
+        <mc:Choice Requires="a14">
           <p:sp>
             <p:nvSpPr>
               <p:cNvPr id="33" name="TextBox 32">
@@ -8987,7 +8989,7 @@
             </p:nvSpPr>
             <p:spPr>
               <a:xfrm>
-                <a:off x="288059" y="3262413"/>
+                <a:off x="331864" y="3257637"/>
                 <a:ext cx="701740" cy="461665"/>
               </a:xfrm>
               <a:prstGeom prst="rect">
@@ -9044,7 +9046,7 @@
             </p:txBody>
           </p:sp>
         </mc:Choice>
-        <mc:Fallback>
+        <mc:Fallback xmlns="">
           <p:sp>
             <p:nvSpPr>
               <p:cNvPr id="33" name="TextBox 32">
@@ -9061,7 +9063,7 @@
             </p:nvSpPr>
             <p:spPr>
               <a:xfrm>
-                <a:off x="288059" y="3262413"/>
+                <a:off x="331864" y="3257637"/>
                 <a:ext cx="701740" cy="461665"/>
               </a:xfrm>
               <a:prstGeom prst="rect">
@@ -9089,8 +9091,8 @@
           </p:sp>
         </mc:Fallback>
       </mc:AlternateContent>
-      <mc:AlternateContent xmlns:mc="http://schemas.openxmlformats.org/markup-compatibility/2006">
-        <mc:Choice xmlns:a14="http://schemas.microsoft.com/office/drawing/2010/main" Requires="a14">
+      <mc:AlternateContent xmlns:mc="http://schemas.openxmlformats.org/markup-compatibility/2006" xmlns:a14="http://schemas.microsoft.com/office/drawing/2010/main">
+        <mc:Choice Requires="a14">
           <p:sp>
             <p:nvSpPr>
               <p:cNvPr id="35" name="TextBox 34">
@@ -9159,7 +9161,7 @@
             </p:txBody>
           </p:sp>
         </mc:Choice>
-        <mc:Fallback>
+        <mc:Fallback xmlns="">
           <p:sp>
             <p:nvSpPr>
               <p:cNvPr id="35" name="TextBox 34">
@@ -9204,8 +9206,8 @@
           </p:sp>
         </mc:Fallback>
       </mc:AlternateContent>
-      <mc:AlternateContent xmlns:mc="http://schemas.openxmlformats.org/markup-compatibility/2006">
-        <mc:Choice xmlns:a14="http://schemas.microsoft.com/office/drawing/2010/main" Requires="a14">
+      <mc:AlternateContent xmlns:mc="http://schemas.openxmlformats.org/markup-compatibility/2006" xmlns:a14="http://schemas.microsoft.com/office/drawing/2010/main">
+        <mc:Choice Requires="a14">
           <p:sp>
             <p:nvSpPr>
               <p:cNvPr id="36" name="TextBox 35">
@@ -9283,7 +9285,7 @@
             </p:txBody>
           </p:sp>
         </mc:Choice>
-        <mc:Fallback>
+        <mc:Fallback xmlns="">
           <p:sp>
             <p:nvSpPr>
               <p:cNvPr id="36" name="TextBox 35">
@@ -9328,8 +9330,8 @@
           </p:sp>
         </mc:Fallback>
       </mc:AlternateContent>
-      <mc:AlternateContent xmlns:mc="http://schemas.openxmlformats.org/markup-compatibility/2006">
-        <mc:Choice xmlns:a14="http://schemas.microsoft.com/office/drawing/2010/main" Requires="a14">
+      <mc:AlternateContent xmlns:mc="http://schemas.openxmlformats.org/markup-compatibility/2006" xmlns:a14="http://schemas.microsoft.com/office/drawing/2010/main">
+        <mc:Choice Requires="a14">
           <p:sp>
             <p:nvSpPr>
               <p:cNvPr id="40" name="TextBox 39">
@@ -9407,7 +9409,7 @@
             </p:txBody>
           </p:sp>
         </mc:Choice>
-        <mc:Fallback>
+        <mc:Fallback xmlns="">
           <p:sp>
             <p:nvSpPr>
               <p:cNvPr id="40" name="TextBox 39">
@@ -9570,8 +9572,8 @@
           </p:sp>
         </mc:Fallback>
       </mc:AlternateContent>
-      <mc:AlternateContent xmlns:mc="http://schemas.openxmlformats.org/markup-compatibility/2006">
-        <mc:Choice xmlns:a14="http://schemas.microsoft.com/office/drawing/2010/main" Requires="a14">
+      <mc:AlternateContent xmlns:mc="http://schemas.openxmlformats.org/markup-compatibility/2006" xmlns:a14="http://schemas.microsoft.com/office/drawing/2010/main">
+        <mc:Choice Requires="a14">
           <p:sp>
             <p:nvSpPr>
               <p:cNvPr id="45" name="TextBox 44">
@@ -9656,7 +9658,7 @@
             </p:txBody>
           </p:sp>
         </mc:Choice>
-        <mc:Fallback>
+        <mc:Fallback xmlns="">
           <p:sp>
             <p:nvSpPr>
               <p:cNvPr id="45" name="TextBox 44">
@@ -9701,8 +9703,8 @@
           </p:sp>
         </mc:Fallback>
       </mc:AlternateContent>
-      <mc:AlternateContent xmlns:mc="http://schemas.openxmlformats.org/markup-compatibility/2006">
-        <mc:Choice xmlns:a14="http://schemas.microsoft.com/office/drawing/2010/main" Requires="a14">
+      <mc:AlternateContent xmlns:mc="http://schemas.openxmlformats.org/markup-compatibility/2006" xmlns:a14="http://schemas.microsoft.com/office/drawing/2010/main">
+        <mc:Choice Requires="a14">
           <p:sp>
             <p:nvSpPr>
               <p:cNvPr id="46" name="TextBox 45">
@@ -9787,7 +9789,7 @@
             </p:txBody>
           </p:sp>
         </mc:Choice>
-        <mc:Fallback>
+        <mc:Fallback xmlns="">
           <p:sp>
             <p:nvSpPr>
               <p:cNvPr id="46" name="TextBox 45">
@@ -9832,8 +9834,8 @@
           </p:sp>
         </mc:Fallback>
       </mc:AlternateContent>
-      <mc:AlternateContent xmlns:mc="http://schemas.openxmlformats.org/markup-compatibility/2006">
-        <mc:Choice xmlns:a14="http://schemas.microsoft.com/office/drawing/2010/main" Requires="a14">
+      <mc:AlternateContent xmlns:mc="http://schemas.openxmlformats.org/markup-compatibility/2006" xmlns:a14="http://schemas.microsoft.com/office/drawing/2010/main">
+        <mc:Choice Requires="a14">
           <p:sp>
             <p:nvSpPr>
               <p:cNvPr id="47" name="TextBox 46">
@@ -9902,7 +9904,7 @@
             </p:txBody>
           </p:sp>
         </mc:Choice>
-        <mc:Fallback>
+        <mc:Fallback xmlns="">
           <p:sp>
             <p:nvSpPr>
               <p:cNvPr id="47" name="TextBox 46">
@@ -9947,8 +9949,8 @@
           </p:sp>
         </mc:Fallback>
       </mc:AlternateContent>
-      <mc:AlternateContent xmlns:mc="http://schemas.openxmlformats.org/markup-compatibility/2006">
-        <mc:Choice xmlns:a14="http://schemas.microsoft.com/office/drawing/2010/main" Requires="a14">
+      <mc:AlternateContent xmlns:mc="http://schemas.openxmlformats.org/markup-compatibility/2006" xmlns:a14="http://schemas.microsoft.com/office/drawing/2010/main">
+        <mc:Choice Requires="a14">
           <p:sp>
             <p:nvSpPr>
               <p:cNvPr id="48" name="TextBox 47">
@@ -10033,7 +10035,7 @@
             </p:txBody>
           </p:sp>
         </mc:Choice>
-        <mc:Fallback>
+        <mc:Fallback xmlns="">
           <p:sp>
             <p:nvSpPr>
               <p:cNvPr id="48" name="TextBox 47">
@@ -10078,8 +10080,8 @@
           </p:sp>
         </mc:Fallback>
       </mc:AlternateContent>
-      <mc:AlternateContent xmlns:mc="http://schemas.openxmlformats.org/markup-compatibility/2006">
-        <mc:Choice xmlns:a14="http://schemas.microsoft.com/office/drawing/2010/main" Requires="a14">
+      <mc:AlternateContent xmlns:mc="http://schemas.openxmlformats.org/markup-compatibility/2006" xmlns:a14="http://schemas.microsoft.com/office/drawing/2010/main">
+        <mc:Choice Requires="a14">
           <p:sp>
             <p:nvSpPr>
               <p:cNvPr id="49" name="TextBox 48">
@@ -10148,7 +10150,7 @@
             </p:txBody>
           </p:sp>
         </mc:Choice>
-        <mc:Fallback>
+        <mc:Fallback xmlns="">
           <p:sp>
             <p:nvSpPr>
               <p:cNvPr id="49" name="TextBox 48">
@@ -10193,8 +10195,8 @@
           </p:sp>
         </mc:Fallback>
       </mc:AlternateContent>
-      <mc:AlternateContent xmlns:mc="http://schemas.openxmlformats.org/markup-compatibility/2006" xmlns:a14="http://schemas.microsoft.com/office/drawing/2010/main">
-        <mc:Choice Requires="a14">
+      <mc:AlternateContent xmlns:mc="http://schemas.openxmlformats.org/markup-compatibility/2006">
+        <mc:Choice xmlns:a14="http://schemas.microsoft.com/office/drawing/2010/main" Requires="a14">
           <p:sp>
             <p:nvSpPr>
               <p:cNvPr id="4" name="TextBox 3">
@@ -10210,7 +10212,7 @@
             <p:spPr>
               <a:xfrm>
                 <a:off x="6096000" y="861364"/>
-                <a:ext cx="5938742" cy="1830245"/>
+                <a:ext cx="4941417" cy="1830245"/>
               </a:xfrm>
               <a:prstGeom prst="rect">
                 <a:avLst/>
@@ -10412,16 +10414,19 @@
                                       <a:rPr lang="de-DE" sz="2400" b="0" i="1" smtClean="0">
                                         <a:latin typeface="Cambria Math" panose="02040503050406030204" pitchFamily="18" charset="0"/>
                                       </a:rPr>
-                                      <m:t>1,</m:t>
+                                      <m:t>1</m:t>
                                     </m:r>
                                     <m:r>
-                                      <m:rPr>
-                                        <m:sty m:val="p"/>
-                                      </m:rPr>
                                       <a:rPr lang="de-DE" sz="2400" b="0" i="1" smtClean="0">
                                         <a:latin typeface="Cambria Math" panose="02040503050406030204" pitchFamily="18" charset="0"/>
                                       </a:rPr>
-                                      <m:t>rxn</m:t>
+                                      <m:t>,</m:t>
+                                    </m:r>
+                                    <m:r>
+                                      <a:rPr lang="de-DE" sz="2400" b="0" i="1" smtClean="0">
+                                        <a:latin typeface="Cambria Math" panose="02040503050406030204" pitchFamily="18" charset="0"/>
+                                      </a:rPr>
+                                      <m:t>𝑅</m:t>
                                     </m:r>
                                   </m:sub>
                                 </m:sSub>
@@ -10478,7 +10483,7 @@
                                             <a:rPr lang="de-DE" sz="2400" b="0" i="1" smtClean="0">
                                               <a:latin typeface="Cambria Math" panose="02040503050406030204" pitchFamily="18" charset="0"/>
                                             </a:rPr>
-                                            <m:t>𝑧</m:t>
+                                            <m:t>𝑚</m:t>
                                           </m:r>
                                           <m:r>
                                             <a:rPr lang="de-DE" sz="2400" b="0" i="1" smtClean="0">
@@ -10592,7 +10597,7 @@
                                                   <a:rPr lang="de-DE" sz="2400" b="0" i="1" smtClean="0">
                                                     <a:latin typeface="Cambria Math" panose="02040503050406030204" pitchFamily="18" charset="0"/>
                                                   </a:rPr>
-                                                  <m:t>𝑧</m:t>
+                                                  <m:t>𝑚</m:t>
                                                 </m:r>
                                                 <m:r>
                                                   <a:rPr lang="de-DE" sz="2400" b="0" i="1" smtClean="0">
@@ -10699,7 +10704,7 @@
                                             <a:rPr lang="de-DE" sz="2400" b="0" i="1" smtClean="0">
                                               <a:latin typeface="Cambria Math" panose="02040503050406030204" pitchFamily="18" charset="0"/>
                                             </a:rPr>
-                                            <m:t>𝑧</m:t>
+                                            <m:t>𝑚</m:t>
                                           </m:r>
                                           <m:r>
                                             <a:rPr lang="de-DE" sz="2400" b="0" i="1" smtClean="0">
@@ -10708,13 +10713,10 @@
                                             <m:t>,</m:t>
                                           </m:r>
                                           <m:r>
-                                            <m:rPr>
-                                              <m:sty m:val="p"/>
-                                            </m:rPr>
                                             <a:rPr lang="de-DE" sz="2400" b="0" i="1" smtClean="0">
                                               <a:latin typeface="Cambria Math" panose="02040503050406030204" pitchFamily="18" charset="0"/>
                                             </a:rPr>
-                                            <m:t>rxn</m:t>
+                                            <m:t>𝑅</m:t>
                                           </m:r>
                                         </m:sub>
                                       </m:sSub>
@@ -10753,19 +10755,22 @@
                                   </m:e>
                                   <m:sub>
                                     <m:r>
-                                      <m:rPr>
-                                        <m:sty m:val="p"/>
-                                      </m:rPr>
                                       <a:rPr lang="de-DE" sz="2400" b="0" i="1" smtClean="0">
                                         <a:latin typeface="Cambria Math" panose="02040503050406030204" pitchFamily="18" charset="0"/>
                                       </a:rPr>
-                                      <m:t>mets</m:t>
+                                      <m:t>𝑀</m:t>
                                     </m:r>
                                     <m:r>
                                       <a:rPr lang="de-DE" sz="2400" b="0" i="1" smtClean="0">
                                         <a:latin typeface="Cambria Math" panose="02040503050406030204" pitchFamily="18" charset="0"/>
                                       </a:rPr>
-                                      <m:t>,1</m:t>
+                                      <m:t>,</m:t>
+                                    </m:r>
+                                    <m:r>
+                                      <a:rPr lang="de-DE" sz="2400" b="0" i="1" smtClean="0">
+                                        <a:latin typeface="Cambria Math" panose="02040503050406030204" pitchFamily="18" charset="0"/>
+                                      </a:rPr>
+                                      <m:t>1</m:t>
                                     </m:r>
                                   </m:sub>
                                 </m:sSub>
@@ -10819,13 +10824,10 @@
                                   </m:e>
                                   <m:sub>
                                     <m:r>
-                                      <m:rPr>
-                                        <m:sty m:val="p"/>
-                                      </m:rPr>
                                       <a:rPr lang="de-DE" sz="2400" b="0" i="1" smtClean="0">
                                         <a:latin typeface="Cambria Math" panose="02040503050406030204" pitchFamily="18" charset="0"/>
                                       </a:rPr>
-                                      <m:t>mets</m:t>
+                                      <m:t>𝑀</m:t>
                                     </m:r>
                                     <m:r>
                                       <a:rPr lang="de-DE" sz="2400" b="0" i="1" smtClean="0">
@@ -10834,13 +10836,10 @@
                                       <m:t>,</m:t>
                                     </m:r>
                                     <m:r>
-                                      <m:rPr>
-                                        <m:sty m:val="p"/>
-                                      </m:rPr>
                                       <a:rPr lang="de-DE" sz="2400" b="0" i="1" smtClean="0">
                                         <a:latin typeface="Cambria Math" panose="02040503050406030204" pitchFamily="18" charset="0"/>
                                       </a:rPr>
-                                      <m:t>rxns</m:t>
+                                      <m:t>𝑅</m:t>
                                     </m:r>
                                   </m:sub>
                                 </m:sSub>
@@ -10857,7 +10856,7 @@
             </p:txBody>
           </p:sp>
         </mc:Choice>
-        <mc:Fallback xmlns="">
+        <mc:Fallback>
           <p:sp>
             <p:nvSpPr>
               <p:cNvPr id="4" name="TextBox 3">
@@ -10875,7 +10874,7 @@
             <p:spPr>
               <a:xfrm>
                 <a:off x="6096000" y="861364"/>
-                <a:ext cx="5938742" cy="1830245"/>
+                <a:ext cx="4941417" cy="1830245"/>
               </a:xfrm>
               <a:prstGeom prst="rect">
                 <a:avLst/>
@@ -10943,7 +10942,19 @@
                         <a:rPr lang="de-DE" sz="2400" b="0" i="1" smtClean="0">
                           <a:latin typeface="Cambria Math" panose="02040503050406030204" pitchFamily="18" charset="0"/>
                         </a:rPr>
-                        <m:t>[0, ⋯,</m:t>
+                        <m:t>[</m:t>
+                      </m:r>
+                      <m:r>
+                        <a:rPr lang="de-DE" sz="2400" b="0" i="1" smtClean="0">
+                          <a:latin typeface="Cambria Math" panose="02040503050406030204" pitchFamily="18" charset="0"/>
+                        </a:rPr>
+                        <m:t>0</m:t>
+                      </m:r>
+                      <m:r>
+                        <a:rPr lang="de-DE" sz="2400" b="0" i="1" smtClean="0">
+                          <a:latin typeface="Cambria Math" panose="02040503050406030204" pitchFamily="18" charset="0"/>
+                        </a:rPr>
+                        <m:t>, ⋯,</m:t>
                       </m:r>
                       <m:sSub>
                         <m:sSubPr>
@@ -10966,7 +10977,13 @@
                             <a:rPr lang="de-DE" sz="2400" b="0" i="1" smtClean="0">
                               <a:latin typeface="Cambria Math" panose="02040503050406030204" pitchFamily="18" charset="0"/>
                             </a:rPr>
-                            <m:t>𝑧𝑖</m:t>
+                            <m:t>𝑚</m:t>
+                          </m:r>
+                          <m:r>
+                            <a:rPr lang="de-DE" sz="2400" b="0" i="1" smtClean="0">
+                              <a:latin typeface="Cambria Math" panose="02040503050406030204" pitchFamily="18" charset="0"/>
+                            </a:rPr>
+                            <m:t>𝑖</m:t>
                           </m:r>
                         </m:sub>
                       </m:sSub>
@@ -10974,7 +10991,71 @@
                         <a:rPr lang="de-DE" sz="2400" b="0" i="1" smtClean="0">
                           <a:latin typeface="Cambria Math" panose="02040503050406030204" pitchFamily="18" charset="0"/>
                         </a:rPr>
-                        <m:t>&gt;0,⋯,</m:t>
+                        <m:t>&gt;</m:t>
+                      </m:r>
+                      <m:r>
+                        <a:rPr lang="de-DE" sz="2400" b="0" i="1" smtClean="0">
+                          <a:latin typeface="Cambria Math" panose="02040503050406030204" pitchFamily="18" charset="0"/>
+                        </a:rPr>
+                        <m:t>0</m:t>
+                      </m:r>
+                      <m:r>
+                        <a:rPr lang="de-DE" sz="2400" b="0" i="1" smtClean="0">
+                          <a:latin typeface="Cambria Math" panose="02040503050406030204" pitchFamily="18" charset="0"/>
+                        </a:rPr>
+                        <m:t>,⋯,</m:t>
+                      </m:r>
+                      <m:sSub>
+                        <m:sSubPr>
+                          <m:ctrlPr>
+                            <a:rPr lang="de-DE" sz="2400" b="0" i="1" smtClean="0">
+                              <a:latin typeface="Cambria Math" panose="02040503050406030204" pitchFamily="18" charset="0"/>
+                            </a:rPr>
+                          </m:ctrlPr>
+                        </m:sSubPr>
+                        <m:e>
+                          <m:r>
+                            <a:rPr lang="de-DE" sz="2400" b="0" i="1" smtClean="0">
+                              <a:latin typeface="Cambria Math" panose="02040503050406030204" pitchFamily="18" charset="0"/>
+                            </a:rPr>
+                            <m:t>𝑏</m:t>
+                          </m:r>
+                        </m:e>
+                        <m:sub>
+                          <m:r>
+                            <m:rPr>
+                              <m:sty m:val="p"/>
+                            </m:rPr>
+                            <a:rPr lang="de-DE" sz="2400" b="0" i="1" smtClean="0">
+                              <a:latin typeface="Cambria Math" panose="02040503050406030204" pitchFamily="18" charset="0"/>
+                            </a:rPr>
+                            <m:t>m</m:t>
+                          </m:r>
+                          <m:r>
+                            <a:rPr lang="de-DE" sz="2400" b="0" i="1" smtClean="0">
+                              <a:latin typeface="Cambria Math" panose="02040503050406030204" pitchFamily="18" charset="0"/>
+                            </a:rPr>
+                            <m:t>𝑗</m:t>
+                          </m:r>
+                        </m:sub>
+                      </m:sSub>
+                      <m:r>
+                        <a:rPr lang="de-DE" sz="2400" b="0" i="1" smtClean="0">
+                          <a:latin typeface="Cambria Math" panose="02040503050406030204" pitchFamily="18" charset="0"/>
+                        </a:rPr>
+                        <m:t>&gt;</m:t>
+                      </m:r>
+                      <m:r>
+                        <a:rPr lang="de-DE" sz="2400" b="0" i="1" smtClean="0">
+                          <a:latin typeface="Cambria Math" panose="02040503050406030204" pitchFamily="18" charset="0"/>
+                        </a:rPr>
+                        <m:t>0</m:t>
+                      </m:r>
+                      <m:r>
+                        <a:rPr lang="de-DE" sz="2400" b="0" i="1" smtClean="0">
+                          <a:latin typeface="Cambria Math" panose="02040503050406030204" pitchFamily="18" charset="0"/>
+                        </a:rPr>
+                        <m:t>,⋯,</m:t>
                       </m:r>
                       <m:sSub>
                         <m:sSubPr>
@@ -10997,7 +11078,13 @@
                             <a:rPr lang="de-DE" sz="2400" b="0" i="1" smtClean="0">
                               <a:latin typeface="Cambria Math" panose="02040503050406030204" pitchFamily="18" charset="0"/>
                             </a:rPr>
-                            <m:t>𝑧𝑗</m:t>
+                            <m:t>𝑚</m:t>
+                          </m:r>
+                          <m:r>
+                            <a:rPr lang="de-DE" sz="2400" b="0" i="1" smtClean="0">
+                              <a:latin typeface="Cambria Math" panose="02040503050406030204" pitchFamily="18" charset="0"/>
+                            </a:rPr>
+                            <m:t>𝑘</m:t>
                           </m:r>
                         </m:sub>
                       </m:sSub>
@@ -11005,38 +11092,19 @@
                         <a:rPr lang="de-DE" sz="2400" b="0" i="1" smtClean="0">
                           <a:latin typeface="Cambria Math" panose="02040503050406030204" pitchFamily="18" charset="0"/>
                         </a:rPr>
-                        <m:t>&gt;0,⋯,</m:t>
+                        <m:t>&lt;</m:t>
                       </m:r>
-                      <m:sSub>
-                        <m:sSubPr>
-                          <m:ctrlPr>
-                            <a:rPr lang="de-DE" sz="2400" b="0" i="1" smtClean="0">
-                              <a:latin typeface="Cambria Math" panose="02040503050406030204" pitchFamily="18" charset="0"/>
-                            </a:rPr>
-                          </m:ctrlPr>
-                        </m:sSubPr>
-                        <m:e>
-                          <m:r>
-                            <a:rPr lang="de-DE" sz="2400" b="0" i="1" smtClean="0">
-                              <a:latin typeface="Cambria Math" panose="02040503050406030204" pitchFamily="18" charset="0"/>
-                            </a:rPr>
-                            <m:t>𝑏</m:t>
-                          </m:r>
-                        </m:e>
-                        <m:sub>
-                          <m:r>
-                            <a:rPr lang="de-DE" sz="2400" b="0" i="1" smtClean="0">
-                              <a:latin typeface="Cambria Math" panose="02040503050406030204" pitchFamily="18" charset="0"/>
-                            </a:rPr>
-                            <m:t>𝑧𝑘</m:t>
-                          </m:r>
-                        </m:sub>
-                      </m:sSub>
                       <m:r>
                         <a:rPr lang="de-DE" sz="2400" b="0" i="1" smtClean="0">
                           <a:latin typeface="Cambria Math" panose="02040503050406030204" pitchFamily="18" charset="0"/>
                         </a:rPr>
-                        <m:t>&lt;0,⋯,</m:t>
+                        <m:t>0</m:t>
+                      </m:r>
+                      <m:r>
+                        <a:rPr lang="de-DE" sz="2400" b="0" i="1" smtClean="0">
+                          <a:latin typeface="Cambria Math" panose="02040503050406030204" pitchFamily="18" charset="0"/>
+                        </a:rPr>
+                        <m:t>,⋯,</m:t>
                       </m:r>
                       <m:r>
                         <a:rPr lang="de-DE" sz="2400" b="0" i="1" smtClean="0">
@@ -11118,8 +11186,8 @@
         </p:nvSpPr>
         <p:spPr>
           <a:xfrm>
-            <a:off x="8181975" y="1489795"/>
-            <a:ext cx="3531870" cy="600201"/>
+            <a:off x="7916096" y="1520650"/>
+            <a:ext cx="3209103" cy="600201"/>
           </a:xfrm>
           <a:prstGeom prst="roundRect">
             <a:avLst/>
@@ -11191,38 +11259,8 @@
           </a:fontRef>
         </p:style>
       </p:cxnSp>
-      <p:pic>
-        <p:nvPicPr>
-          <p:cNvPr id="13" name="Picture 12" descr="A screenshot of a computer&#10;&#10;AI-generated content may be incorrect.">
-            <a:extLst>
-              <a:ext uri="{FF2B5EF4-FFF2-40B4-BE49-F238E27FC236}">
-                <a16:creationId xmlns:a16="http://schemas.microsoft.com/office/drawing/2014/main" id="{4A1338EE-6372-755D-D5AF-D9704DAC4196}"/>
-              </a:ext>
-            </a:extLst>
-          </p:cNvPr>
-          <p:cNvPicPr>
-            <a:picLocks noChangeAspect="1"/>
-          </p:cNvPicPr>
-          <p:nvPr/>
-        </p:nvPicPr>
-        <p:blipFill>
-          <a:blip r:embed="rId17"/>
-          <a:stretch>
-            <a:fillRect/>
-          </a:stretch>
-        </p:blipFill>
-        <p:spPr>
-          <a:xfrm>
-            <a:off x="331864" y="4479838"/>
-            <a:ext cx="9688277" cy="2295845"/>
-          </a:xfrm>
-          <a:prstGeom prst="rect">
-            <a:avLst/>
-          </a:prstGeom>
-        </p:spPr>
-      </p:pic>
-      <mc:AlternateContent xmlns:mc="http://schemas.openxmlformats.org/markup-compatibility/2006">
-        <mc:Choice xmlns:a14="http://schemas.microsoft.com/office/drawing/2010/main" Requires="a14">
+      <mc:AlternateContent xmlns:mc="http://schemas.openxmlformats.org/markup-compatibility/2006" xmlns:a14="http://schemas.microsoft.com/office/drawing/2010/main">
+        <mc:Choice Requires="a14">
           <p:sp>
             <p:nvSpPr>
               <p:cNvPr id="5" name="TextBox 4">
@@ -11279,13 +11317,7 @@
                             <a:rPr lang="de-DE" sz="2400" b="0" i="1" smtClean="0">
                               <a:latin typeface="Cambria Math" panose="02040503050406030204" pitchFamily="18" charset="0"/>
                             </a:rPr>
-                            <m:t>𝑧</m:t>
-                          </m:r>
-                          <m:r>
-                            <a:rPr lang="de-DE" sz="2400" b="0" i="1" smtClean="0">
-                              <a:latin typeface="Cambria Math" panose="02040503050406030204" pitchFamily="18" charset="0"/>
-                            </a:rPr>
-                            <m:t>𝑖</m:t>
+                            <m:t>𝑧𝑖</m:t>
                           </m:r>
                         </m:sub>
                       </m:sSub>
@@ -11297,7 +11329,7 @@
             </p:txBody>
           </p:sp>
         </mc:Choice>
-        <mc:Fallback>
+        <mc:Fallback xmlns="">
           <p:sp>
             <p:nvSpPr>
               <p:cNvPr id="5" name="TextBox 4">
@@ -11342,8 +11374,8 @@
           </p:sp>
         </mc:Fallback>
       </mc:AlternateContent>
-      <mc:AlternateContent xmlns:mc="http://schemas.openxmlformats.org/markup-compatibility/2006">
-        <mc:Choice xmlns:a14="http://schemas.microsoft.com/office/drawing/2010/main" Requires="a14">
+      <mc:AlternateContent xmlns:mc="http://schemas.openxmlformats.org/markup-compatibility/2006" xmlns:a14="http://schemas.microsoft.com/office/drawing/2010/main">
+        <mc:Choice Requires="a14">
           <p:sp>
             <p:nvSpPr>
               <p:cNvPr id="11" name="TextBox 10">
@@ -11400,13 +11432,7 @@
                             <a:rPr lang="de-DE" sz="2400" b="0" i="1" smtClean="0">
                               <a:latin typeface="Cambria Math" panose="02040503050406030204" pitchFamily="18" charset="0"/>
                             </a:rPr>
-                            <m:t>𝑧</m:t>
-                          </m:r>
-                          <m:r>
-                            <a:rPr lang="de-DE" sz="2400" b="0" i="1" smtClean="0">
-                              <a:latin typeface="Cambria Math" panose="02040503050406030204" pitchFamily="18" charset="0"/>
-                            </a:rPr>
-                            <m:t>𝑗</m:t>
+                            <m:t>𝑧𝑗</m:t>
                           </m:r>
                         </m:sub>
                       </m:sSub>
@@ -11418,7 +11444,7 @@
             </p:txBody>
           </p:sp>
         </mc:Choice>
-        <mc:Fallback>
+        <mc:Fallback xmlns="">
           <p:sp>
             <p:nvSpPr>
               <p:cNvPr id="11" name="TextBox 10">
@@ -11463,8 +11489,8 @@
           </p:sp>
         </mc:Fallback>
       </mc:AlternateContent>
-      <mc:AlternateContent xmlns:mc="http://schemas.openxmlformats.org/markup-compatibility/2006">
-        <mc:Choice xmlns:a14="http://schemas.microsoft.com/office/drawing/2010/main" Requires="a14">
+      <mc:AlternateContent xmlns:mc="http://schemas.openxmlformats.org/markup-compatibility/2006" xmlns:a14="http://schemas.microsoft.com/office/drawing/2010/main">
+        <mc:Choice Requires="a14">
           <p:sp>
             <p:nvSpPr>
               <p:cNvPr id="12" name="TextBox 11">
@@ -11549,7 +11575,7 @@
             </p:txBody>
           </p:sp>
         </mc:Choice>
-        <mc:Fallback>
+        <mc:Fallback xmlns="">
           <p:sp>
             <p:nvSpPr>
               <p:cNvPr id="12" name="TextBox 11">
@@ -11594,8 +11620,8 @@
           </p:sp>
         </mc:Fallback>
       </mc:AlternateContent>
-      <mc:AlternateContent xmlns:mc="http://schemas.openxmlformats.org/markup-compatibility/2006">
-        <mc:Choice xmlns:a14="http://schemas.microsoft.com/office/drawing/2010/main" Requires="a14">
+      <mc:AlternateContent xmlns:mc="http://schemas.openxmlformats.org/markup-compatibility/2006" xmlns:a14="http://schemas.microsoft.com/office/drawing/2010/main">
+        <mc:Choice Requires="a14">
           <p:sp>
             <p:nvSpPr>
               <p:cNvPr id="14" name="TextBox 13">
@@ -11680,7 +11706,7 @@
             </p:txBody>
           </p:sp>
         </mc:Choice>
-        <mc:Fallback>
+        <mc:Fallback xmlns="">
           <p:sp>
             <p:nvSpPr>
               <p:cNvPr id="14" name="TextBox 13">
@@ -11725,8 +11751,8 @@
           </p:sp>
         </mc:Fallback>
       </mc:AlternateContent>
-      <mc:AlternateContent xmlns:mc="http://schemas.openxmlformats.org/markup-compatibility/2006">
-        <mc:Choice xmlns:a14="http://schemas.microsoft.com/office/drawing/2010/main" Requires="a14">
+      <mc:AlternateContent xmlns:mc="http://schemas.openxmlformats.org/markup-compatibility/2006" xmlns:a14="http://schemas.microsoft.com/office/drawing/2010/main">
+        <mc:Choice Requires="a14">
           <p:sp>
             <p:nvSpPr>
               <p:cNvPr id="15" name="TextBox 14">
@@ -11811,7 +11837,7 @@
             </p:txBody>
           </p:sp>
         </mc:Choice>
-        <mc:Fallback>
+        <mc:Fallback xmlns="">
           <p:sp>
             <p:nvSpPr>
               <p:cNvPr id="15" name="TextBox 14">
@@ -11856,6 +11882,36 @@
           </p:sp>
         </mc:Fallback>
       </mc:AlternateContent>
+      <p:pic>
+        <p:nvPicPr>
+          <p:cNvPr id="8" name="Picture 7">
+            <a:extLst>
+              <a:ext uri="{FF2B5EF4-FFF2-40B4-BE49-F238E27FC236}">
+                <a16:creationId xmlns:a16="http://schemas.microsoft.com/office/drawing/2014/main" id="{8E7D0598-CDF0-C7B5-76FF-7D271D421667}"/>
+              </a:ext>
+            </a:extLst>
+          </p:cNvPr>
+          <p:cNvPicPr>
+            <a:picLocks noChangeAspect="1"/>
+          </p:cNvPicPr>
+          <p:nvPr/>
+        </p:nvPicPr>
+        <p:blipFill>
+          <a:blip r:embed="rId23"/>
+          <a:stretch>
+            <a:fillRect/>
+          </a:stretch>
+        </p:blipFill>
+        <p:spPr>
+          <a:xfrm>
+            <a:off x="129539" y="4301350"/>
+            <a:ext cx="7881829" cy="2387525"/>
+          </a:xfrm>
+          <a:prstGeom prst="rect">
+            <a:avLst/>
+          </a:prstGeom>
+        </p:spPr>
+      </p:pic>
     </p:spTree>
     <p:extLst>
       <p:ext uri="{BB962C8B-B14F-4D97-AF65-F5344CB8AC3E}">
@@ -11894,6 +11950,134 @@
       </p:grpSpPr>
       <p:sp>
         <p:nvSpPr>
+          <p:cNvPr id="22" name="Rectangle 21">
+            <a:extLst>
+              <a:ext uri="{FF2B5EF4-FFF2-40B4-BE49-F238E27FC236}">
+                <a16:creationId xmlns:a16="http://schemas.microsoft.com/office/drawing/2014/main" id="{CDEA7BE3-3C70-8493-F32C-065982748F61}"/>
+              </a:ext>
+            </a:extLst>
+          </p:cNvPr>
+          <p:cNvSpPr/>
+          <p:nvPr/>
+        </p:nvSpPr>
+        <p:spPr>
+          <a:xfrm>
+            <a:off x="0" y="4755791"/>
+            <a:ext cx="4378223" cy="2102209"/>
+          </a:xfrm>
+          <a:prstGeom prst="rect">
+            <a:avLst/>
+          </a:prstGeom>
+          <a:solidFill>
+            <a:srgbClr val="121212"/>
+          </a:solidFill>
+        </p:spPr>
+        <p:style>
+          <a:lnRef idx="2">
+            <a:schemeClr val="accent1">
+              <a:shade val="15000"/>
+            </a:schemeClr>
+          </a:lnRef>
+          <a:fillRef idx="1">
+            <a:schemeClr val="accent1"/>
+          </a:fillRef>
+          <a:effectRef idx="0">
+            <a:schemeClr val="accent1"/>
+          </a:effectRef>
+          <a:fontRef idx="minor">
+            <a:schemeClr val="lt1"/>
+          </a:fontRef>
+        </p:style>
+        <p:txBody>
+          <a:bodyPr rtlCol="0" anchor="ctr"/>
+          <a:lstStyle/>
+          <a:p>
+            <a:pPr algn="ctr"/>
+            <a:endParaRPr lang="en-US"/>
+          </a:p>
+        </p:txBody>
+      </p:sp>
+      <p:sp>
+        <p:nvSpPr>
+          <p:cNvPr id="20" name="Rectangle 19">
+            <a:extLst>
+              <a:ext uri="{FF2B5EF4-FFF2-40B4-BE49-F238E27FC236}">
+                <a16:creationId xmlns:a16="http://schemas.microsoft.com/office/drawing/2014/main" id="{BE5A9E57-ED5D-6F58-A53C-99AC67D97065}"/>
+              </a:ext>
+            </a:extLst>
+          </p:cNvPr>
+          <p:cNvSpPr/>
+          <p:nvPr/>
+        </p:nvSpPr>
+        <p:spPr>
+          <a:xfrm>
+            <a:off x="4318937" y="0"/>
+            <a:ext cx="7873063" cy="6858000"/>
+          </a:xfrm>
+          <a:prstGeom prst="rect">
+            <a:avLst/>
+          </a:prstGeom>
+          <a:solidFill>
+            <a:srgbClr val="121212"/>
+          </a:solidFill>
+        </p:spPr>
+        <p:style>
+          <a:lnRef idx="2">
+            <a:schemeClr val="accent1">
+              <a:shade val="15000"/>
+            </a:schemeClr>
+          </a:lnRef>
+          <a:fillRef idx="1">
+            <a:schemeClr val="accent1"/>
+          </a:fillRef>
+          <a:effectRef idx="0">
+            <a:schemeClr val="accent1"/>
+          </a:effectRef>
+          <a:fontRef idx="minor">
+            <a:schemeClr val="lt1"/>
+          </a:fontRef>
+        </p:style>
+        <p:txBody>
+          <a:bodyPr rtlCol="0" anchor="ctr"/>
+          <a:lstStyle/>
+          <a:p>
+            <a:pPr algn="ctr"/>
+            <a:endParaRPr lang="en-US"/>
+          </a:p>
+        </p:txBody>
+      </p:sp>
+      <p:pic>
+        <p:nvPicPr>
+          <p:cNvPr id="16" name="Picture 15">
+            <a:extLst>
+              <a:ext uri="{FF2B5EF4-FFF2-40B4-BE49-F238E27FC236}">
+                <a16:creationId xmlns:a16="http://schemas.microsoft.com/office/drawing/2014/main" id="{0992105A-8651-6F18-1366-572E17648DE4}"/>
+              </a:ext>
+            </a:extLst>
+          </p:cNvPr>
+          <p:cNvPicPr>
+            <a:picLocks noChangeAspect="1"/>
+          </p:cNvPicPr>
+          <p:nvPr/>
+        </p:nvPicPr>
+        <p:blipFill>
+          <a:blip r:embed="rId3"/>
+          <a:stretch>
+            <a:fillRect/>
+          </a:stretch>
+        </p:blipFill>
+        <p:spPr>
+          <a:xfrm>
+            <a:off x="4318937" y="40061"/>
+            <a:ext cx="6968602" cy="6486970"/>
+          </a:xfrm>
+          <a:prstGeom prst="rect">
+            <a:avLst/>
+          </a:prstGeom>
+        </p:spPr>
+      </p:pic>
+      <p:sp>
+        <p:nvSpPr>
           <p:cNvPr id="2" name="Title 1">
             <a:extLst>
               <a:ext uri="{FF2B5EF4-FFF2-40B4-BE49-F238E27FC236}">
@@ -11921,51 +12105,21 @@
           <a:lstStyle/>
           <a:p>
             <a:r>
-              <a:rPr lang="de-DE" sz="3200" dirty="0"/>
+              <a:rPr lang="de-DE" sz="2400" dirty="0"/>
               <a:t>Looking </a:t>
             </a:r>
             <a:r>
-              <a:rPr lang="de-DE" sz="3200" dirty="0" err="1"/>
+              <a:rPr lang="de-DE" sz="2400" dirty="0" err="1"/>
               <a:t>for</a:t>
             </a:r>
             <a:r>
-              <a:rPr lang="de-DE" sz="3200" dirty="0"/>
+              <a:rPr lang="de-DE" sz="2400" dirty="0"/>
               <a:t> 2-neuron NNs</a:t>
             </a:r>
-            <a:endParaRPr lang="en-US" sz="3200" dirty="0"/>
+            <a:endParaRPr lang="en-US" sz="2400" dirty="0"/>
           </a:p>
         </p:txBody>
       </p:sp>
-      <p:pic>
-        <p:nvPicPr>
-          <p:cNvPr id="27" name="Picture 26" descr="A computer screen shot of a black screen&#10;&#10;AI-generated content may be incorrect.">
-            <a:extLst>
-              <a:ext uri="{FF2B5EF4-FFF2-40B4-BE49-F238E27FC236}">
-                <a16:creationId xmlns:a16="http://schemas.microsoft.com/office/drawing/2014/main" id="{EA5EC35B-7C25-FBAF-8BD7-87249CE7A51B}"/>
-              </a:ext>
-            </a:extLst>
-          </p:cNvPr>
-          <p:cNvPicPr>
-            <a:picLocks noChangeAspect="1"/>
-          </p:cNvPicPr>
-          <p:nvPr/>
-        </p:nvPicPr>
-        <p:blipFill>
-          <a:blip r:embed="rId3"/>
-          <a:stretch>
-            <a:fillRect/>
-          </a:stretch>
-        </p:blipFill>
-        <p:spPr>
-          <a:xfrm>
-            <a:off x="4430977" y="374145"/>
-            <a:ext cx="7716327" cy="6068272"/>
-          </a:xfrm>
-          <a:prstGeom prst="rect">
-            <a:avLst/>
-          </a:prstGeom>
-        </p:spPr>
-      </p:pic>
       <p:pic>
         <p:nvPicPr>
           <p:cNvPr id="4" name="Picture 3" descr="A diagram of dna sequence&#10;&#10;AI-generated content may be incorrect.">
@@ -11988,8 +12142,8 @@
         </p:blipFill>
         <p:spPr>
           <a:xfrm>
-            <a:off x="164283" y="1063004"/>
-            <a:ext cx="3720510" cy="3943335"/>
+            <a:off x="497670" y="694476"/>
+            <a:ext cx="2916786" cy="3091475"/>
           </a:xfrm>
           <a:prstGeom prst="rect">
             <a:avLst/>
@@ -12010,7 +12164,7 @@
         </p:nvGrpSpPr>
         <p:grpSpPr>
           <a:xfrm>
-            <a:off x="8554832" y="2810934"/>
+            <a:off x="317155" y="4819526"/>
             <a:ext cx="3616284" cy="1973197"/>
             <a:chOff x="431855" y="1391826"/>
             <a:chExt cx="3616284" cy="1973197"/>
@@ -13500,7 +13654,7 @@
         </p:nvSpPr>
         <p:spPr>
           <a:xfrm>
-            <a:off x="6320790" y="491490"/>
+            <a:off x="6271094" y="146148"/>
             <a:ext cx="834390" cy="480060"/>
           </a:xfrm>
           <a:prstGeom prst="rect">
@@ -13552,8 +13706,8 @@
         </p:nvSpPr>
         <p:spPr>
           <a:xfrm>
-            <a:off x="8494912" y="1489501"/>
-            <a:ext cx="954912" cy="365760"/>
+            <a:off x="7572233" y="1187122"/>
+            <a:ext cx="1038374" cy="277156"/>
           </a:xfrm>
           <a:prstGeom prst="rect">
             <a:avLst/>
@@ -13604,60 +13758,8 @@
         </p:nvSpPr>
         <p:spPr>
           <a:xfrm>
-            <a:off x="4430977" y="1695241"/>
-            <a:ext cx="1608876" cy="365760"/>
-          </a:xfrm>
-          <a:prstGeom prst="rect">
-            <a:avLst/>
-          </a:prstGeom>
-          <a:noFill/>
-          <a:ln>
-            <a:solidFill>
-              <a:srgbClr val="C00000"/>
-            </a:solidFill>
-          </a:ln>
-        </p:spPr>
-        <p:style>
-          <a:lnRef idx="2">
-            <a:schemeClr val="accent1">
-              <a:shade val="15000"/>
-            </a:schemeClr>
-          </a:lnRef>
-          <a:fillRef idx="1">
-            <a:schemeClr val="accent1"/>
-          </a:fillRef>
-          <a:effectRef idx="0">
-            <a:schemeClr val="accent1"/>
-          </a:effectRef>
-          <a:fontRef idx="minor">
-            <a:schemeClr val="lt1"/>
-          </a:fontRef>
-        </p:style>
-        <p:txBody>
-          <a:bodyPr rtlCol="0" anchor="ctr"/>
-          <a:lstStyle/>
-          <a:p>
-            <a:pPr algn="ctr"/>
-            <a:endParaRPr lang="en-US"/>
-          </a:p>
-        </p:txBody>
-      </p:sp>
-      <p:sp>
-        <p:nvSpPr>
-          <p:cNvPr id="10" name="Rectangle 9">
-            <a:extLst>
-              <a:ext uri="{FF2B5EF4-FFF2-40B4-BE49-F238E27FC236}">
-                <a16:creationId xmlns:a16="http://schemas.microsoft.com/office/drawing/2014/main" id="{EE98B2B5-2D78-ADAE-87E6-2EA53EE0A6C3}"/>
-              </a:ext>
-            </a:extLst>
-          </p:cNvPr>
-          <p:cNvSpPr/>
-          <p:nvPr/>
-        </p:nvSpPr>
-        <p:spPr>
-          <a:xfrm>
-            <a:off x="4475694" y="3562914"/>
-            <a:ext cx="1608876" cy="365760"/>
+            <a:off x="4378223" y="1459066"/>
+            <a:ext cx="1608876" cy="239697"/>
           </a:xfrm>
           <a:prstGeom prst="rect">
             <a:avLst/>
@@ -13708,7 +13810,7 @@
         </p:nvSpPr>
         <p:spPr>
           <a:xfrm>
-            <a:off x="48571" y="6142335"/>
+            <a:off x="317155" y="3767558"/>
             <a:ext cx="3697037" cy="600164"/>
           </a:xfrm>
           <a:prstGeom prst="rect">
@@ -13729,10 +13831,6453 @@
           </a:p>
         </p:txBody>
       </p:sp>
+      <p:sp>
+        <p:nvSpPr>
+          <p:cNvPr id="5" name="Rectangle 4">
+            <a:extLst>
+              <a:ext uri="{FF2B5EF4-FFF2-40B4-BE49-F238E27FC236}">
+                <a16:creationId xmlns:a16="http://schemas.microsoft.com/office/drawing/2014/main" id="{7BD9D7A6-B451-8FB9-6D5C-3C8FA58C2C14}"/>
+              </a:ext>
+            </a:extLst>
+          </p:cNvPr>
+          <p:cNvSpPr/>
+          <p:nvPr/>
+        </p:nvSpPr>
+        <p:spPr>
+          <a:xfrm>
+            <a:off x="4378223" y="3428493"/>
+            <a:ext cx="1608876" cy="239697"/>
+          </a:xfrm>
+          <a:prstGeom prst="rect">
+            <a:avLst/>
+          </a:prstGeom>
+          <a:noFill/>
+          <a:ln>
+            <a:solidFill>
+              <a:srgbClr val="C00000"/>
+            </a:solidFill>
+          </a:ln>
+        </p:spPr>
+        <p:style>
+          <a:lnRef idx="2">
+            <a:schemeClr val="accent1">
+              <a:shade val="15000"/>
+            </a:schemeClr>
+          </a:lnRef>
+          <a:fillRef idx="1">
+            <a:schemeClr val="accent1"/>
+          </a:fillRef>
+          <a:effectRef idx="0">
+            <a:schemeClr val="accent1"/>
+          </a:effectRef>
+          <a:fontRef idx="minor">
+            <a:schemeClr val="lt1"/>
+          </a:fontRef>
+        </p:style>
+        <p:txBody>
+          <a:bodyPr rtlCol="0" anchor="ctr"/>
+          <a:lstStyle/>
+          <a:p>
+            <a:pPr algn="ctr"/>
+            <a:endParaRPr lang="en-US"/>
+          </a:p>
+        </p:txBody>
+      </p:sp>
+      <p:sp>
+        <p:nvSpPr>
+          <p:cNvPr id="11" name="Rectangle 10">
+            <a:extLst>
+              <a:ext uri="{FF2B5EF4-FFF2-40B4-BE49-F238E27FC236}">
+                <a16:creationId xmlns:a16="http://schemas.microsoft.com/office/drawing/2014/main" id="{5DC5CB2C-233B-907B-CC6E-94C22506141F}"/>
+              </a:ext>
+            </a:extLst>
+          </p:cNvPr>
+          <p:cNvSpPr/>
+          <p:nvPr/>
+        </p:nvSpPr>
+        <p:spPr>
+          <a:xfrm>
+            <a:off x="5804452" y="5124657"/>
+            <a:ext cx="1063073" cy="239697"/>
+          </a:xfrm>
+          <a:prstGeom prst="rect">
+            <a:avLst/>
+          </a:prstGeom>
+          <a:noFill/>
+          <a:ln>
+            <a:solidFill>
+              <a:srgbClr val="C00000"/>
+            </a:solidFill>
+          </a:ln>
+        </p:spPr>
+        <p:style>
+          <a:lnRef idx="2">
+            <a:schemeClr val="accent1">
+              <a:shade val="15000"/>
+            </a:schemeClr>
+          </a:lnRef>
+          <a:fillRef idx="1">
+            <a:schemeClr val="accent1"/>
+          </a:fillRef>
+          <a:effectRef idx="0">
+            <a:schemeClr val="accent1"/>
+          </a:effectRef>
+          <a:fontRef idx="minor">
+            <a:schemeClr val="lt1"/>
+          </a:fontRef>
+        </p:style>
+        <p:txBody>
+          <a:bodyPr rtlCol="0" anchor="ctr"/>
+          <a:lstStyle/>
+          <a:p>
+            <a:pPr algn="ctr"/>
+            <a:endParaRPr lang="en-US"/>
+          </a:p>
+        </p:txBody>
+      </p:sp>
+      <p:sp>
+        <p:nvSpPr>
+          <p:cNvPr id="13" name="Rectangle 12">
+            <a:extLst>
+              <a:ext uri="{FF2B5EF4-FFF2-40B4-BE49-F238E27FC236}">
+                <a16:creationId xmlns:a16="http://schemas.microsoft.com/office/drawing/2014/main" id="{D1CB3910-E14C-4E06-70EC-351B156D0C0F}"/>
+              </a:ext>
+            </a:extLst>
+          </p:cNvPr>
+          <p:cNvSpPr/>
+          <p:nvPr/>
+        </p:nvSpPr>
+        <p:spPr>
+          <a:xfrm>
+            <a:off x="7217094" y="3144968"/>
+            <a:ext cx="1038374" cy="277156"/>
+          </a:xfrm>
+          <a:prstGeom prst="rect">
+            <a:avLst/>
+          </a:prstGeom>
+          <a:noFill/>
+          <a:ln>
+            <a:solidFill>
+              <a:srgbClr val="C00000"/>
+            </a:solidFill>
+          </a:ln>
+        </p:spPr>
+        <p:style>
+          <a:lnRef idx="2">
+            <a:schemeClr val="accent1">
+              <a:shade val="15000"/>
+            </a:schemeClr>
+          </a:lnRef>
+          <a:fillRef idx="1">
+            <a:schemeClr val="accent1"/>
+          </a:fillRef>
+          <a:effectRef idx="0">
+            <a:schemeClr val="accent1"/>
+          </a:effectRef>
+          <a:fontRef idx="minor">
+            <a:schemeClr val="lt1"/>
+          </a:fontRef>
+        </p:style>
+        <p:txBody>
+          <a:bodyPr rtlCol="0" anchor="ctr"/>
+          <a:lstStyle/>
+          <a:p>
+            <a:pPr algn="ctr"/>
+            <a:endParaRPr lang="en-US"/>
+          </a:p>
+        </p:txBody>
+      </p:sp>
+      <p:sp>
+        <p:nvSpPr>
+          <p:cNvPr id="14" name="Rectangle 13">
+            <a:extLst>
+              <a:ext uri="{FF2B5EF4-FFF2-40B4-BE49-F238E27FC236}">
+                <a16:creationId xmlns:a16="http://schemas.microsoft.com/office/drawing/2014/main" id="{097F383E-3816-CD72-83A5-86862D555B1A}"/>
+              </a:ext>
+            </a:extLst>
+          </p:cNvPr>
+          <p:cNvSpPr/>
+          <p:nvPr/>
+        </p:nvSpPr>
+        <p:spPr>
+          <a:xfrm>
+            <a:off x="4355895" y="5409802"/>
+            <a:ext cx="1521029" cy="221752"/>
+          </a:xfrm>
+          <a:prstGeom prst="rect">
+            <a:avLst/>
+          </a:prstGeom>
+          <a:noFill/>
+          <a:ln>
+            <a:solidFill>
+              <a:srgbClr val="C00000"/>
+            </a:solidFill>
+          </a:ln>
+        </p:spPr>
+        <p:style>
+          <a:lnRef idx="2">
+            <a:schemeClr val="accent1">
+              <a:shade val="15000"/>
+            </a:schemeClr>
+          </a:lnRef>
+          <a:fillRef idx="1">
+            <a:schemeClr val="accent1"/>
+          </a:fillRef>
+          <a:effectRef idx="0">
+            <a:schemeClr val="accent1"/>
+          </a:effectRef>
+          <a:fontRef idx="minor">
+            <a:schemeClr val="lt1"/>
+          </a:fontRef>
+        </p:style>
+        <p:txBody>
+          <a:bodyPr rtlCol="0" anchor="ctr"/>
+          <a:lstStyle/>
+          <a:p>
+            <a:pPr algn="ctr"/>
+            <a:endParaRPr lang="en-US"/>
+          </a:p>
+        </p:txBody>
+      </p:sp>
     </p:spTree>
     <p:extLst>
       <p:ext uri="{BB962C8B-B14F-4D97-AF65-F5344CB8AC3E}">
         <p14:creationId xmlns:p14="http://schemas.microsoft.com/office/powerpoint/2010/main" val="1952062210"/>
+      </p:ext>
+    </p:extLst>
+  </p:cSld>
+  <p:clrMapOvr>
+    <a:masterClrMapping/>
+  </p:clrMapOvr>
+</p:sld>
+</file>
+
+<file path=ppt/slides/slide5.xml><?xml version="1.0" encoding="utf-8"?>
+<p:sld xmlns:a="http://schemas.openxmlformats.org/drawingml/2006/main" xmlns:r="http://schemas.openxmlformats.org/officeDocument/2006/relationships" xmlns:p="http://schemas.openxmlformats.org/presentationml/2006/main">
+  <p:cSld>
+    <p:spTree>
+      <p:nvGrpSpPr>
+        <p:cNvPr id="1" name="">
+          <a:extLst>
+            <a:ext uri="{FF2B5EF4-FFF2-40B4-BE49-F238E27FC236}">
+              <a16:creationId xmlns:a16="http://schemas.microsoft.com/office/drawing/2014/main" id="{5B2C4E27-BC73-7E99-527A-F1C0E0D41C4A}"/>
+            </a:ext>
+          </a:extLst>
+        </p:cNvPr>
+        <p:cNvGrpSpPr/>
+        <p:nvPr/>
+      </p:nvGrpSpPr>
+      <p:grpSpPr>
+        <a:xfrm>
+          <a:off x="0" y="0"/>
+          <a:ext cx="0" cy="0"/>
+          <a:chOff x="0" y="0"/>
+          <a:chExt cx="0" cy="0"/>
+        </a:xfrm>
+      </p:grpSpPr>
+      <p:pic>
+        <p:nvPicPr>
+          <p:cNvPr id="69" name="Picture 68">
+            <a:extLst>
+              <a:ext uri="{FF2B5EF4-FFF2-40B4-BE49-F238E27FC236}">
+                <a16:creationId xmlns:a16="http://schemas.microsoft.com/office/drawing/2014/main" id="{CB495D52-D6F2-CF72-AE1B-9A0B77268BE0}"/>
+              </a:ext>
+            </a:extLst>
+          </p:cNvPr>
+          <p:cNvPicPr>
+            <a:picLocks noChangeAspect="1"/>
+          </p:cNvPicPr>
+          <p:nvPr/>
+        </p:nvPicPr>
+        <p:blipFill>
+          <a:blip r:embed="rId2"/>
+          <a:stretch>
+            <a:fillRect/>
+          </a:stretch>
+        </p:blipFill>
+        <p:spPr>
+          <a:xfrm>
+            <a:off x="8274302" y="3474994"/>
+            <a:ext cx="3495675" cy="2170998"/>
+          </a:xfrm>
+          <a:prstGeom prst="rect">
+            <a:avLst/>
+          </a:prstGeom>
+          <a:ln>
+            <a:solidFill>
+              <a:schemeClr val="accent1"/>
+            </a:solidFill>
+          </a:ln>
+        </p:spPr>
+      </p:pic>
+      <p:pic>
+        <p:nvPicPr>
+          <p:cNvPr id="65" name="Picture 64">
+            <a:extLst>
+              <a:ext uri="{FF2B5EF4-FFF2-40B4-BE49-F238E27FC236}">
+                <a16:creationId xmlns:a16="http://schemas.microsoft.com/office/drawing/2014/main" id="{5687D1C9-6731-8560-7CA1-1BDA04793080}"/>
+              </a:ext>
+            </a:extLst>
+          </p:cNvPr>
+          <p:cNvPicPr>
+            <a:picLocks noChangeAspect="1"/>
+          </p:cNvPicPr>
+          <p:nvPr/>
+        </p:nvPicPr>
+        <p:blipFill>
+          <a:blip r:embed="rId3"/>
+          <a:stretch>
+            <a:fillRect/>
+          </a:stretch>
+        </p:blipFill>
+        <p:spPr>
+          <a:xfrm>
+            <a:off x="8282282" y="1150165"/>
+            <a:ext cx="3495675" cy="2200275"/>
+          </a:xfrm>
+          <a:prstGeom prst="rect">
+            <a:avLst/>
+          </a:prstGeom>
+          <a:ln>
+            <a:solidFill>
+              <a:schemeClr val="accent1"/>
+            </a:solidFill>
+          </a:ln>
+        </p:spPr>
+      </p:pic>
+      <p:grpSp>
+        <p:nvGrpSpPr>
+          <p:cNvPr id="52" name="Group 51">
+            <a:extLst>
+              <a:ext uri="{FF2B5EF4-FFF2-40B4-BE49-F238E27FC236}">
+                <a16:creationId xmlns:a16="http://schemas.microsoft.com/office/drawing/2014/main" id="{4BDF12EA-5A4A-4549-412E-1A122F171A3F}"/>
+              </a:ext>
+            </a:extLst>
+          </p:cNvPr>
+          <p:cNvGrpSpPr>
+            <a:grpSpLocks noChangeAspect="1"/>
+          </p:cNvGrpSpPr>
+          <p:nvPr/>
+        </p:nvGrpSpPr>
+        <p:grpSpPr>
+          <a:xfrm>
+            <a:off x="75552" y="5122759"/>
+            <a:ext cx="3073558" cy="1475770"/>
+            <a:chOff x="7813777" y="-1763"/>
+            <a:chExt cx="4378223" cy="2102209"/>
+          </a:xfrm>
+        </p:grpSpPr>
+        <p:sp>
+          <p:nvSpPr>
+            <p:cNvPr id="32" name="Rectangle 31">
+              <a:extLst>
+                <a:ext uri="{FF2B5EF4-FFF2-40B4-BE49-F238E27FC236}">
+                  <a16:creationId xmlns:a16="http://schemas.microsoft.com/office/drawing/2014/main" id="{9387F881-0772-3C46-6A1C-9737522A2F2C}"/>
+                </a:ext>
+              </a:extLst>
+            </p:cNvPr>
+            <p:cNvSpPr/>
+            <p:nvPr/>
+          </p:nvSpPr>
+          <p:spPr>
+            <a:xfrm>
+              <a:off x="7813777" y="-1763"/>
+              <a:ext cx="4378223" cy="2102209"/>
+            </a:xfrm>
+            <a:prstGeom prst="rect">
+              <a:avLst/>
+            </a:prstGeom>
+            <a:solidFill>
+              <a:srgbClr val="121212"/>
+            </a:solidFill>
+          </p:spPr>
+          <p:style>
+            <a:lnRef idx="2">
+              <a:schemeClr val="accent1">
+                <a:shade val="15000"/>
+              </a:schemeClr>
+            </a:lnRef>
+            <a:fillRef idx="1">
+              <a:schemeClr val="accent1"/>
+            </a:fillRef>
+            <a:effectRef idx="0">
+              <a:schemeClr val="accent1"/>
+            </a:effectRef>
+            <a:fontRef idx="minor">
+              <a:schemeClr val="lt1"/>
+            </a:fontRef>
+          </p:style>
+          <p:txBody>
+            <a:bodyPr rtlCol="0" anchor="ctr"/>
+            <a:lstStyle/>
+            <a:p>
+              <a:pPr algn="ctr"/>
+              <a:endParaRPr lang="en-US" sz="1200"/>
+            </a:p>
+          </p:txBody>
+        </p:sp>
+        <p:grpSp>
+          <p:nvGrpSpPr>
+            <p:cNvPr id="33" name="Group 32">
+              <a:extLst>
+                <a:ext uri="{FF2B5EF4-FFF2-40B4-BE49-F238E27FC236}">
+                  <a16:creationId xmlns:a16="http://schemas.microsoft.com/office/drawing/2014/main" id="{81B4E578-70C8-A34F-77FA-85DBC4E773C1}"/>
+                </a:ext>
+              </a:extLst>
+            </p:cNvPr>
+            <p:cNvGrpSpPr/>
+            <p:nvPr/>
+          </p:nvGrpSpPr>
+          <p:grpSpPr>
+            <a:xfrm>
+              <a:off x="8130932" y="61972"/>
+              <a:ext cx="3616284" cy="1993796"/>
+              <a:chOff x="431855" y="1391826"/>
+              <a:chExt cx="3616284" cy="1993796"/>
+            </a:xfrm>
+          </p:grpSpPr>
+          <mc:AlternateContent xmlns:mc="http://schemas.openxmlformats.org/markup-compatibility/2006">
+            <mc:Choice xmlns:a14="http://schemas.microsoft.com/office/drawing/2010/main" Requires="a14">
+              <p:sp>
+                <p:nvSpPr>
+                  <p:cNvPr id="34" name="TextBox 33">
+                    <a:extLst>
+                      <a:ext uri="{FF2B5EF4-FFF2-40B4-BE49-F238E27FC236}">
+                        <a16:creationId xmlns:a16="http://schemas.microsoft.com/office/drawing/2014/main" id="{B8640B44-C564-4296-217C-0B091D498A50}"/>
+                      </a:ext>
+                    </a:extLst>
+                  </p:cNvPr>
+                  <p:cNvSpPr txBox="1"/>
+                  <p:nvPr/>
+                </p:nvSpPr>
+                <p:spPr>
+                  <a:xfrm>
+                    <a:off x="3419061" y="1887881"/>
+                    <a:ext cx="629078" cy="482264"/>
+                  </a:xfrm>
+                  <a:prstGeom prst="rect">
+                    <a:avLst/>
+                  </a:prstGeom>
+                  <a:noFill/>
+                </p:spPr>
+                <p:txBody>
+                  <a:bodyPr wrap="square">
+                    <a:spAutoFit/>
+                  </a:bodyPr>
+                  <a:lstStyle/>
+                  <a:p>
+                    <a:pPr/>
+                    <a14:m>
+                      <m:oMathPara xmlns:m="http://schemas.openxmlformats.org/officeDocument/2006/math">
+                        <m:oMathParaPr>
+                          <m:jc m:val="right"/>
+                        </m:oMathParaPr>
+                        <m:oMath xmlns:m="http://schemas.openxmlformats.org/officeDocument/2006/math">
+                          <m:sSub>
+                            <m:sSubPr>
+                              <m:ctrlPr>
+                                <a:rPr lang="de-DE" sz="1600" b="0" i="1" smtClean="0">
+                                  <a:solidFill>
+                                    <a:schemeClr val="bg1"/>
+                                  </a:solidFill>
+                                  <a:latin typeface="Cambria Math" panose="02040503050406030204" pitchFamily="18" charset="0"/>
+                                </a:rPr>
+                              </m:ctrlPr>
+                            </m:sSubPr>
+                            <m:e>
+                              <m:r>
+                                <m:rPr>
+                                  <m:sty m:val="p"/>
+                                </m:rPr>
+                                <a:rPr lang="de-DE" sz="1600" b="0" i="1" smtClean="0">
+                                  <a:solidFill>
+                                    <a:schemeClr val="bg1"/>
+                                  </a:solidFill>
+                                  <a:latin typeface="Cambria Math" panose="02040503050406030204" pitchFamily="18" charset="0"/>
+                                </a:rPr>
+                                <m:t>m</m:t>
+                              </m:r>
+                            </m:e>
+                            <m:sub>
+                              <m:r>
+                                <a:rPr lang="de-DE" sz="1600" b="0" i="1" smtClean="0">
+                                  <a:solidFill>
+                                    <a:schemeClr val="bg1"/>
+                                  </a:solidFill>
+                                  <a:latin typeface="Cambria Math" panose="02040503050406030204" pitchFamily="18" charset="0"/>
+                                </a:rPr>
+                                <m:t>4</m:t>
+                              </m:r>
+                            </m:sub>
+                          </m:sSub>
+                        </m:oMath>
+                      </m:oMathPara>
+                    </a14:m>
+                    <a:endParaRPr lang="en-US" sz="1600" dirty="0">
+                      <a:solidFill>
+                        <a:schemeClr val="bg1"/>
+                      </a:solidFill>
+                    </a:endParaRPr>
+                  </a:p>
+                </p:txBody>
+              </p:sp>
+            </mc:Choice>
+            <mc:Fallback>
+              <p:sp>
+                <p:nvSpPr>
+                  <p:cNvPr id="34" name="TextBox 33">
+                    <a:extLst>
+                      <a:ext uri="{FF2B5EF4-FFF2-40B4-BE49-F238E27FC236}">
+                        <a16:creationId xmlns:a16="http://schemas.microsoft.com/office/drawing/2014/main" id="{B8640B44-C564-4296-217C-0B091D498A50}"/>
+                      </a:ext>
+                    </a:extLst>
+                  </p:cNvPr>
+                  <p:cNvSpPr txBox="1">
+                    <a:spLocks noRot="1" noChangeAspect="1" noMove="1" noResize="1" noEditPoints="1" noAdjustHandles="1" noChangeArrowheads="1" noChangeShapeType="1" noTextEdit="1"/>
+                  </p:cNvSpPr>
+                  <p:nvPr/>
+                </p:nvSpPr>
+                <p:spPr>
+                  <a:xfrm>
+                    <a:off x="3419061" y="1887881"/>
+                    <a:ext cx="629078" cy="482264"/>
+                  </a:xfrm>
+                  <a:prstGeom prst="rect">
+                    <a:avLst/>
+                  </a:prstGeom>
+                  <a:blipFill>
+                    <a:blip r:embed="rId4"/>
+                    <a:stretch>
+                      <a:fillRect/>
+                    </a:stretch>
+                  </a:blipFill>
+                </p:spPr>
+                <p:txBody>
+                  <a:bodyPr/>
+                  <a:lstStyle/>
+                  <a:p>
+                    <a:r>
+                      <a:rPr lang="en-US">
+                        <a:noFill/>
+                      </a:rPr>
+                      <a:t> </a:t>
+                    </a:r>
+                  </a:p>
+                </p:txBody>
+              </p:sp>
+            </mc:Fallback>
+          </mc:AlternateContent>
+          <p:sp>
+            <p:nvSpPr>
+              <p:cNvPr id="35" name="Oval 34">
+                <a:extLst>
+                  <a:ext uri="{FF2B5EF4-FFF2-40B4-BE49-F238E27FC236}">
+                    <a16:creationId xmlns:a16="http://schemas.microsoft.com/office/drawing/2014/main" id="{CD395584-8D71-2EC6-044A-F1B4499B284F}"/>
+                  </a:ext>
+                </a:extLst>
+              </p:cNvPr>
+              <p:cNvSpPr>
+                <a:spLocks noChangeAspect="1"/>
+              </p:cNvSpPr>
+              <p:nvPr/>
+            </p:nvSpPr>
+            <p:spPr>
+              <a:xfrm>
+                <a:off x="1315417" y="1484012"/>
+                <a:ext cx="365760" cy="365760"/>
+              </a:xfrm>
+              <a:prstGeom prst="ellipse">
+                <a:avLst/>
+              </a:prstGeom>
+              <a:solidFill>
+                <a:schemeClr val="bg1"/>
+              </a:solidFill>
+              <a:ln>
+                <a:solidFill>
+                  <a:schemeClr val="bg1"/>
+                </a:solidFill>
+              </a:ln>
+            </p:spPr>
+            <p:style>
+              <a:lnRef idx="2">
+                <a:schemeClr val="accent1">
+                  <a:shade val="15000"/>
+                </a:schemeClr>
+              </a:lnRef>
+              <a:fillRef idx="1">
+                <a:schemeClr val="accent1"/>
+              </a:fillRef>
+              <a:effectRef idx="0">
+                <a:schemeClr val="accent1"/>
+              </a:effectRef>
+              <a:fontRef idx="minor">
+                <a:schemeClr val="lt1"/>
+              </a:fontRef>
+            </p:style>
+            <p:txBody>
+              <a:bodyPr rtlCol="0" anchor="ctr"/>
+              <a:lstStyle/>
+              <a:p>
+                <a:pPr algn="ctr"/>
+                <a:endParaRPr lang="en-US" sz="1200"/>
+              </a:p>
+            </p:txBody>
+          </p:sp>
+          <p:sp>
+            <p:nvSpPr>
+              <p:cNvPr id="36" name="Oval 35">
+                <a:extLst>
+                  <a:ext uri="{FF2B5EF4-FFF2-40B4-BE49-F238E27FC236}">
+                    <a16:creationId xmlns:a16="http://schemas.microsoft.com/office/drawing/2014/main" id="{09A541A6-A6CD-3E3C-C67D-D6F1871FDB64}"/>
+                  </a:ext>
+                </a:extLst>
+              </p:cNvPr>
+              <p:cNvSpPr>
+                <a:spLocks noChangeAspect="1"/>
+              </p:cNvSpPr>
+              <p:nvPr/>
+            </p:nvSpPr>
+            <p:spPr>
+              <a:xfrm>
+                <a:off x="1326847" y="2951311"/>
+                <a:ext cx="365760" cy="365760"/>
+              </a:xfrm>
+              <a:prstGeom prst="ellipse">
+                <a:avLst/>
+              </a:prstGeom>
+              <a:solidFill>
+                <a:schemeClr val="bg1"/>
+              </a:solidFill>
+              <a:ln>
+                <a:solidFill>
+                  <a:schemeClr val="bg1"/>
+                </a:solidFill>
+              </a:ln>
+            </p:spPr>
+            <p:style>
+              <a:lnRef idx="2">
+                <a:schemeClr val="accent1">
+                  <a:shade val="15000"/>
+                </a:schemeClr>
+              </a:lnRef>
+              <a:fillRef idx="1">
+                <a:schemeClr val="accent1"/>
+              </a:fillRef>
+              <a:effectRef idx="0">
+                <a:schemeClr val="accent1"/>
+              </a:effectRef>
+              <a:fontRef idx="minor">
+                <a:schemeClr val="lt1"/>
+              </a:fontRef>
+            </p:style>
+            <p:txBody>
+              <a:bodyPr rtlCol="0" anchor="ctr"/>
+              <a:lstStyle/>
+              <a:p>
+                <a:pPr algn="ctr"/>
+                <a:endParaRPr lang="en-US" sz="1200"/>
+              </a:p>
+            </p:txBody>
+          </p:sp>
+          <p:sp>
+            <p:nvSpPr>
+              <p:cNvPr id="37" name="Oval 36">
+                <a:extLst>
+                  <a:ext uri="{FF2B5EF4-FFF2-40B4-BE49-F238E27FC236}">
+                    <a16:creationId xmlns:a16="http://schemas.microsoft.com/office/drawing/2014/main" id="{2F1B90FF-2921-5471-0009-227385AC9A73}"/>
+                  </a:ext>
+                </a:extLst>
+              </p:cNvPr>
+              <p:cNvSpPr>
+                <a:spLocks noChangeAspect="1"/>
+              </p:cNvSpPr>
+              <p:nvPr/>
+            </p:nvSpPr>
+            <p:spPr>
+              <a:xfrm>
+                <a:off x="2858467" y="2257891"/>
+                <a:ext cx="365760" cy="365760"/>
+              </a:xfrm>
+              <a:prstGeom prst="ellipse">
+                <a:avLst/>
+              </a:prstGeom>
+              <a:solidFill>
+                <a:schemeClr val="bg1"/>
+              </a:solidFill>
+              <a:ln>
+                <a:solidFill>
+                  <a:schemeClr val="bg1"/>
+                </a:solidFill>
+              </a:ln>
+            </p:spPr>
+            <p:style>
+              <a:lnRef idx="2">
+                <a:schemeClr val="accent1">
+                  <a:shade val="15000"/>
+                </a:schemeClr>
+              </a:lnRef>
+              <a:fillRef idx="1">
+                <a:schemeClr val="accent1"/>
+              </a:fillRef>
+              <a:effectRef idx="0">
+                <a:schemeClr val="accent1"/>
+              </a:effectRef>
+              <a:fontRef idx="minor">
+                <a:schemeClr val="lt1"/>
+              </a:fontRef>
+            </p:style>
+            <p:txBody>
+              <a:bodyPr rtlCol="0" anchor="ctr"/>
+              <a:lstStyle/>
+              <a:p>
+                <a:pPr algn="ctr"/>
+                <a:endParaRPr lang="en-US" sz="1200"/>
+              </a:p>
+            </p:txBody>
+          </p:sp>
+          <p:cxnSp>
+            <p:nvCxnSpPr>
+              <p:cNvPr id="38" name="Straight Arrow Connector 37">
+                <a:extLst>
+                  <a:ext uri="{FF2B5EF4-FFF2-40B4-BE49-F238E27FC236}">
+                    <a16:creationId xmlns:a16="http://schemas.microsoft.com/office/drawing/2014/main" id="{6C2DF129-8EC0-DE93-AB30-3E4B9F5853A2}"/>
+                  </a:ext>
+                </a:extLst>
+              </p:cNvPr>
+              <p:cNvCxnSpPr>
+                <a:cxnSpLocks/>
+                <a:stCxn id="36" idx="6"/>
+                <a:endCxn id="37" idx="3"/>
+              </p:cNvCxnSpPr>
+              <p:nvPr/>
+            </p:nvCxnSpPr>
+            <p:spPr>
+              <a:xfrm flipV="1">
+                <a:off x="1692607" y="2570087"/>
+                <a:ext cx="1219424" cy="564104"/>
+              </a:xfrm>
+              <a:prstGeom prst="straightConnector1">
+                <a:avLst/>
+              </a:prstGeom>
+              <a:solidFill>
+                <a:schemeClr val="bg1"/>
+              </a:solidFill>
+              <a:ln>
+                <a:solidFill>
+                  <a:schemeClr val="bg1"/>
+                </a:solidFill>
+                <a:tailEnd type="triangle" w="lg" len="lg"/>
+              </a:ln>
+            </p:spPr>
+            <p:style>
+              <a:lnRef idx="2">
+                <a:schemeClr val="accent1"/>
+              </a:lnRef>
+              <a:fillRef idx="0">
+                <a:schemeClr val="accent1"/>
+              </a:fillRef>
+              <a:effectRef idx="1">
+                <a:schemeClr val="accent1"/>
+              </a:effectRef>
+              <a:fontRef idx="minor">
+                <a:schemeClr val="tx1"/>
+              </a:fontRef>
+            </p:style>
+          </p:cxnSp>
+          <p:cxnSp>
+            <p:nvCxnSpPr>
+              <p:cNvPr id="39" name="Straight Arrow Connector 38">
+                <a:extLst>
+                  <a:ext uri="{FF2B5EF4-FFF2-40B4-BE49-F238E27FC236}">
+                    <a16:creationId xmlns:a16="http://schemas.microsoft.com/office/drawing/2014/main" id="{5DF70F31-30D1-659C-51F1-B7327518926E}"/>
+                  </a:ext>
+                </a:extLst>
+              </p:cNvPr>
+              <p:cNvCxnSpPr>
+                <a:stCxn id="35" idx="6"/>
+                <a:endCxn id="37" idx="1"/>
+              </p:cNvCxnSpPr>
+              <p:nvPr/>
+            </p:nvCxnSpPr>
+            <p:spPr>
+              <a:xfrm>
+                <a:off x="1681177" y="1666892"/>
+                <a:ext cx="1230854" cy="644563"/>
+              </a:xfrm>
+              <a:prstGeom prst="straightConnector1">
+                <a:avLst/>
+              </a:prstGeom>
+              <a:solidFill>
+                <a:schemeClr val="bg1"/>
+              </a:solidFill>
+              <a:ln>
+                <a:solidFill>
+                  <a:schemeClr val="bg1"/>
+                </a:solidFill>
+                <a:tailEnd type="triangle" w="lg" len="lg"/>
+              </a:ln>
+            </p:spPr>
+            <p:style>
+              <a:lnRef idx="2">
+                <a:schemeClr val="accent1"/>
+              </a:lnRef>
+              <a:fillRef idx="0">
+                <a:schemeClr val="accent1"/>
+              </a:fillRef>
+              <a:effectRef idx="1">
+                <a:schemeClr val="accent1"/>
+              </a:effectRef>
+              <a:fontRef idx="minor">
+                <a:schemeClr val="tx1"/>
+              </a:fontRef>
+            </p:style>
+          </p:cxnSp>
+          <p:cxnSp>
+            <p:nvCxnSpPr>
+              <p:cNvPr id="40" name="Straight Arrow Connector 39">
+                <a:extLst>
+                  <a:ext uri="{FF2B5EF4-FFF2-40B4-BE49-F238E27FC236}">
+                    <a16:creationId xmlns:a16="http://schemas.microsoft.com/office/drawing/2014/main" id="{D4D8E2A3-AA5D-B11F-63FC-A31FA2573E87}"/>
+                  </a:ext>
+                </a:extLst>
+              </p:cNvPr>
+              <p:cNvCxnSpPr>
+                <a:cxnSpLocks/>
+              </p:cNvCxnSpPr>
+              <p:nvPr/>
+            </p:nvCxnSpPr>
+            <p:spPr>
+              <a:xfrm>
+                <a:off x="515317" y="1666892"/>
+                <a:ext cx="800100" cy="0"/>
+              </a:xfrm>
+              <a:prstGeom prst="straightConnector1">
+                <a:avLst/>
+              </a:prstGeom>
+              <a:solidFill>
+                <a:schemeClr val="bg1"/>
+              </a:solidFill>
+              <a:ln>
+                <a:solidFill>
+                  <a:schemeClr val="bg1"/>
+                </a:solidFill>
+                <a:tailEnd type="triangle" w="lg" len="lg"/>
+              </a:ln>
+            </p:spPr>
+            <p:style>
+              <a:lnRef idx="2">
+                <a:schemeClr val="accent1"/>
+              </a:lnRef>
+              <a:fillRef idx="0">
+                <a:schemeClr val="accent1"/>
+              </a:fillRef>
+              <a:effectRef idx="1">
+                <a:schemeClr val="accent1"/>
+              </a:effectRef>
+              <a:fontRef idx="minor">
+                <a:schemeClr val="tx1"/>
+              </a:fontRef>
+            </p:style>
+          </p:cxnSp>
+          <p:cxnSp>
+            <p:nvCxnSpPr>
+              <p:cNvPr id="41" name="Straight Arrow Connector 40">
+                <a:extLst>
+                  <a:ext uri="{FF2B5EF4-FFF2-40B4-BE49-F238E27FC236}">
+                    <a16:creationId xmlns:a16="http://schemas.microsoft.com/office/drawing/2014/main" id="{1EE58497-0AC3-4C85-8E3F-3C944C97BD7D}"/>
+                  </a:ext>
+                </a:extLst>
+              </p:cNvPr>
+              <p:cNvCxnSpPr>
+                <a:cxnSpLocks/>
+                <a:endCxn id="36" idx="2"/>
+              </p:cNvCxnSpPr>
+              <p:nvPr/>
+            </p:nvCxnSpPr>
+            <p:spPr>
+              <a:xfrm>
+                <a:off x="515317" y="3134191"/>
+                <a:ext cx="811530" cy="0"/>
+              </a:xfrm>
+              <a:prstGeom prst="straightConnector1">
+                <a:avLst/>
+              </a:prstGeom>
+              <a:solidFill>
+                <a:schemeClr val="bg1"/>
+              </a:solidFill>
+              <a:ln>
+                <a:solidFill>
+                  <a:schemeClr val="bg1"/>
+                </a:solidFill>
+                <a:tailEnd type="triangle" w="lg" len="lg"/>
+              </a:ln>
+            </p:spPr>
+            <p:style>
+              <a:lnRef idx="2">
+                <a:schemeClr val="accent1"/>
+              </a:lnRef>
+              <a:fillRef idx="0">
+                <a:schemeClr val="accent1"/>
+              </a:fillRef>
+              <a:effectRef idx="1">
+                <a:schemeClr val="accent1"/>
+              </a:effectRef>
+              <a:fontRef idx="minor">
+                <a:schemeClr val="tx1"/>
+              </a:fontRef>
+            </p:style>
+          </p:cxnSp>
+          <p:cxnSp>
+            <p:nvCxnSpPr>
+              <p:cNvPr id="42" name="Straight Arrow Connector 41">
+                <a:extLst>
+                  <a:ext uri="{FF2B5EF4-FFF2-40B4-BE49-F238E27FC236}">
+                    <a16:creationId xmlns:a16="http://schemas.microsoft.com/office/drawing/2014/main" id="{453D914B-EBC9-4DCA-C4C4-472F11BD8670}"/>
+                  </a:ext>
+                </a:extLst>
+              </p:cNvPr>
+              <p:cNvCxnSpPr>
+                <a:cxnSpLocks/>
+              </p:cNvCxnSpPr>
+              <p:nvPr/>
+            </p:nvCxnSpPr>
+            <p:spPr>
+              <a:xfrm>
+                <a:off x="3224227" y="2425082"/>
+                <a:ext cx="800100" cy="0"/>
+              </a:xfrm>
+              <a:prstGeom prst="straightConnector1">
+                <a:avLst/>
+              </a:prstGeom>
+              <a:solidFill>
+                <a:schemeClr val="bg1"/>
+              </a:solidFill>
+              <a:ln>
+                <a:solidFill>
+                  <a:schemeClr val="bg1"/>
+                </a:solidFill>
+                <a:tailEnd type="triangle" w="lg" len="lg"/>
+              </a:ln>
+            </p:spPr>
+            <p:style>
+              <a:lnRef idx="2">
+                <a:schemeClr val="accent1"/>
+              </a:lnRef>
+              <a:fillRef idx="0">
+                <a:schemeClr val="accent1"/>
+              </a:fillRef>
+              <a:effectRef idx="1">
+                <a:schemeClr val="accent1"/>
+              </a:effectRef>
+              <a:fontRef idx="minor">
+                <a:schemeClr val="tx1"/>
+              </a:fontRef>
+            </p:style>
+          </p:cxnSp>
+          <mc:AlternateContent xmlns:mc="http://schemas.openxmlformats.org/markup-compatibility/2006">
+            <mc:Choice xmlns:a14="http://schemas.microsoft.com/office/drawing/2010/main" Requires="a14">
+              <p:sp>
+                <p:nvSpPr>
+                  <p:cNvPr id="43" name="TextBox 42">
+                    <a:extLst>
+                      <a:ext uri="{FF2B5EF4-FFF2-40B4-BE49-F238E27FC236}">
+                        <a16:creationId xmlns:a16="http://schemas.microsoft.com/office/drawing/2014/main" id="{0F27555F-AD6B-8DAF-29DD-E1DEB25241FD}"/>
+                      </a:ext>
+                    </a:extLst>
+                  </p:cNvPr>
+                  <p:cNvSpPr txBox="1"/>
+                  <p:nvPr/>
+                </p:nvSpPr>
+                <p:spPr>
+                  <a:xfrm>
+                    <a:off x="431855" y="1666892"/>
+                    <a:ext cx="675668" cy="482264"/>
+                  </a:xfrm>
+                  <a:prstGeom prst="rect">
+                    <a:avLst/>
+                  </a:prstGeom>
+                  <a:noFill/>
+                </p:spPr>
+                <p:txBody>
+                  <a:bodyPr wrap="square">
+                    <a:spAutoFit/>
+                  </a:bodyPr>
+                  <a:lstStyle/>
+                  <a:p>
+                    <a:pPr/>
+                    <a14:m>
+                      <m:oMathPara xmlns:m="http://schemas.openxmlformats.org/officeDocument/2006/math">
+                        <m:oMathParaPr>
+                          <m:jc m:val="left"/>
+                        </m:oMathParaPr>
+                        <m:oMath xmlns:m="http://schemas.openxmlformats.org/officeDocument/2006/math">
+                          <m:sSub>
+                            <m:sSubPr>
+                              <m:ctrlPr>
+                                <a:rPr lang="de-DE" sz="1600" b="0" i="1" smtClean="0">
+                                  <a:solidFill>
+                                    <a:schemeClr val="bg1"/>
+                                  </a:solidFill>
+                                  <a:latin typeface="Cambria Math" panose="02040503050406030204" pitchFamily="18" charset="0"/>
+                                </a:rPr>
+                              </m:ctrlPr>
+                            </m:sSubPr>
+                            <m:e>
+                              <m:r>
+                                <m:rPr>
+                                  <m:sty m:val="p"/>
+                                </m:rPr>
+                                <a:rPr lang="de-DE" sz="1600" b="0" i="1" smtClean="0">
+                                  <a:solidFill>
+                                    <a:schemeClr val="bg1"/>
+                                  </a:solidFill>
+                                  <a:latin typeface="Cambria Math" panose="02040503050406030204" pitchFamily="18" charset="0"/>
+                                </a:rPr>
+                                <m:t>m</m:t>
+                              </m:r>
+                            </m:e>
+                            <m:sub>
+                              <m:r>
+                                <a:rPr lang="de-DE" sz="1600" b="0" i="1" smtClean="0">
+                                  <a:solidFill>
+                                    <a:schemeClr val="bg1"/>
+                                  </a:solidFill>
+                                  <a:latin typeface="Cambria Math" panose="02040503050406030204" pitchFamily="18" charset="0"/>
+                                </a:rPr>
+                                <m:t>1</m:t>
+                              </m:r>
+                            </m:sub>
+                          </m:sSub>
+                        </m:oMath>
+                      </m:oMathPara>
+                    </a14:m>
+                    <a:endParaRPr lang="en-US" sz="1600" dirty="0">
+                      <a:solidFill>
+                        <a:schemeClr val="bg1"/>
+                      </a:solidFill>
+                    </a:endParaRPr>
+                  </a:p>
+                </p:txBody>
+              </p:sp>
+            </mc:Choice>
+            <mc:Fallback>
+              <p:sp>
+                <p:nvSpPr>
+                  <p:cNvPr id="43" name="TextBox 42">
+                    <a:extLst>
+                      <a:ext uri="{FF2B5EF4-FFF2-40B4-BE49-F238E27FC236}">
+                        <a16:creationId xmlns:a16="http://schemas.microsoft.com/office/drawing/2014/main" id="{0F27555F-AD6B-8DAF-29DD-E1DEB25241FD}"/>
+                      </a:ext>
+                    </a:extLst>
+                  </p:cNvPr>
+                  <p:cNvSpPr txBox="1">
+                    <a:spLocks noRot="1" noChangeAspect="1" noMove="1" noResize="1" noEditPoints="1" noAdjustHandles="1" noChangeArrowheads="1" noChangeShapeType="1" noTextEdit="1"/>
+                  </p:cNvSpPr>
+                  <p:nvPr/>
+                </p:nvSpPr>
+                <p:spPr>
+                  <a:xfrm>
+                    <a:off x="431855" y="1666892"/>
+                    <a:ext cx="675668" cy="482264"/>
+                  </a:xfrm>
+                  <a:prstGeom prst="rect">
+                    <a:avLst/>
+                  </a:prstGeom>
+                  <a:blipFill>
+                    <a:blip r:embed="rId5"/>
+                    <a:stretch>
+                      <a:fillRect/>
+                    </a:stretch>
+                  </a:blipFill>
+                </p:spPr>
+                <p:txBody>
+                  <a:bodyPr/>
+                  <a:lstStyle/>
+                  <a:p>
+                    <a:r>
+                      <a:rPr lang="en-US">
+                        <a:noFill/>
+                      </a:rPr>
+                      <a:t> </a:t>
+                    </a:r>
+                  </a:p>
+                </p:txBody>
+              </p:sp>
+            </mc:Fallback>
+          </mc:AlternateContent>
+          <mc:AlternateContent xmlns:mc="http://schemas.openxmlformats.org/markup-compatibility/2006">
+            <mc:Choice xmlns:a14="http://schemas.microsoft.com/office/drawing/2010/main" Requires="a14">
+              <p:sp>
+                <p:nvSpPr>
+                  <p:cNvPr id="44" name="TextBox 43">
+                    <a:extLst>
+                      <a:ext uri="{FF2B5EF4-FFF2-40B4-BE49-F238E27FC236}">
+                        <a16:creationId xmlns:a16="http://schemas.microsoft.com/office/drawing/2014/main" id="{C803C8B0-945C-68BD-EF65-1DC539AA81F4}"/>
+                      </a:ext>
+                    </a:extLst>
+                  </p:cNvPr>
+                  <p:cNvSpPr txBox="1"/>
+                  <p:nvPr/>
+                </p:nvSpPr>
+                <p:spPr>
+                  <a:xfrm>
+                    <a:off x="2298433" y="2903358"/>
+                    <a:ext cx="641032" cy="482264"/>
+                  </a:xfrm>
+                  <a:prstGeom prst="rect">
+                    <a:avLst/>
+                  </a:prstGeom>
+                  <a:noFill/>
+                  <a:ln w="19050">
+                    <a:solidFill>
+                      <a:srgbClr val="C00000"/>
+                    </a:solidFill>
+                  </a:ln>
+                </p:spPr>
+                <p:txBody>
+                  <a:bodyPr wrap="square">
+                    <a:spAutoFit/>
+                  </a:bodyPr>
+                  <a:lstStyle/>
+                  <a:p>
+                    <a:pPr/>
+                    <a14:m>
+                      <m:oMathPara xmlns:m="http://schemas.openxmlformats.org/officeDocument/2006/math">
+                        <m:oMathParaPr>
+                          <m:jc m:val="centerGroup"/>
+                        </m:oMathParaPr>
+                        <m:oMath xmlns:m="http://schemas.openxmlformats.org/officeDocument/2006/math">
+                          <m:sSub>
+                            <m:sSubPr>
+                              <m:ctrlPr>
+                                <a:rPr lang="de-DE" sz="1600" b="1" i="1" smtClean="0">
+                                  <a:solidFill>
+                                    <a:schemeClr val="bg1"/>
+                                  </a:solidFill>
+                                  <a:latin typeface="Cambria Math" panose="02040503050406030204" pitchFamily="18" charset="0"/>
+                                </a:rPr>
+                              </m:ctrlPr>
+                            </m:sSubPr>
+                            <m:e>
+                              <m:r>
+                                <a:rPr lang="de-DE" sz="1600" b="1" i="1" smtClean="0">
+                                  <a:solidFill>
+                                    <a:schemeClr val="bg1"/>
+                                  </a:solidFill>
+                                  <a:latin typeface="Cambria Math" panose="02040503050406030204" pitchFamily="18" charset="0"/>
+                                </a:rPr>
+                                <m:t>𝒎</m:t>
+                              </m:r>
+                            </m:e>
+                            <m:sub>
+                              <m:r>
+                                <a:rPr lang="de-DE" sz="1600" b="1" i="0" smtClean="0">
+                                  <a:solidFill>
+                                    <a:schemeClr val="bg1"/>
+                                  </a:solidFill>
+                                  <a:latin typeface="Cambria Math" panose="02040503050406030204" pitchFamily="18" charset="0"/>
+                                </a:rPr>
+                                <m:t>𝐳</m:t>
+                              </m:r>
+                            </m:sub>
+                          </m:sSub>
+                        </m:oMath>
+                      </m:oMathPara>
+                    </a14:m>
+                    <a:endParaRPr lang="en-US" sz="1600" b="1" dirty="0">
+                      <a:solidFill>
+                        <a:schemeClr val="bg1"/>
+                      </a:solidFill>
+                    </a:endParaRPr>
+                  </a:p>
+                </p:txBody>
+              </p:sp>
+            </mc:Choice>
+            <mc:Fallback>
+              <p:sp>
+                <p:nvSpPr>
+                  <p:cNvPr id="44" name="TextBox 43">
+                    <a:extLst>
+                      <a:ext uri="{FF2B5EF4-FFF2-40B4-BE49-F238E27FC236}">
+                        <a16:creationId xmlns:a16="http://schemas.microsoft.com/office/drawing/2014/main" id="{C803C8B0-945C-68BD-EF65-1DC539AA81F4}"/>
+                      </a:ext>
+                    </a:extLst>
+                  </p:cNvPr>
+                  <p:cNvSpPr txBox="1">
+                    <a:spLocks noRot="1" noChangeAspect="1" noMove="1" noResize="1" noEditPoints="1" noAdjustHandles="1" noChangeArrowheads="1" noChangeShapeType="1" noTextEdit="1"/>
+                  </p:cNvSpPr>
+                  <p:nvPr/>
+                </p:nvSpPr>
+                <p:spPr>
+                  <a:xfrm>
+                    <a:off x="2298433" y="2903358"/>
+                    <a:ext cx="641032" cy="482264"/>
+                  </a:xfrm>
+                  <a:prstGeom prst="rect">
+                    <a:avLst/>
+                  </a:prstGeom>
+                  <a:blipFill>
+                    <a:blip r:embed="rId6"/>
+                    <a:stretch>
+                      <a:fillRect/>
+                    </a:stretch>
+                  </a:blipFill>
+                  <a:ln w="19050">
+                    <a:solidFill>
+                      <a:srgbClr val="C00000"/>
+                    </a:solidFill>
+                  </a:ln>
+                </p:spPr>
+                <p:txBody>
+                  <a:bodyPr/>
+                  <a:lstStyle/>
+                  <a:p>
+                    <a:r>
+                      <a:rPr lang="en-US">
+                        <a:noFill/>
+                      </a:rPr>
+                      <a:t> </a:t>
+                    </a:r>
+                  </a:p>
+                </p:txBody>
+              </p:sp>
+            </mc:Fallback>
+          </mc:AlternateContent>
+          <mc:AlternateContent xmlns:mc="http://schemas.openxmlformats.org/markup-compatibility/2006">
+            <mc:Choice xmlns:a14="http://schemas.microsoft.com/office/drawing/2010/main" Requires="a14">
+              <p:sp>
+                <p:nvSpPr>
+                  <p:cNvPr id="45" name="TextBox 44">
+                    <a:extLst>
+                      <a:ext uri="{FF2B5EF4-FFF2-40B4-BE49-F238E27FC236}">
+                        <a16:creationId xmlns:a16="http://schemas.microsoft.com/office/drawing/2014/main" id="{1D6EFC8C-9700-D71B-F9FB-6B17274F59A2}"/>
+                      </a:ext>
+                    </a:extLst>
+                  </p:cNvPr>
+                  <p:cNvSpPr txBox="1"/>
+                  <p:nvPr/>
+                </p:nvSpPr>
+                <p:spPr>
+                  <a:xfrm>
+                    <a:off x="465983" y="2632489"/>
+                    <a:ext cx="740342" cy="482264"/>
+                  </a:xfrm>
+                  <a:prstGeom prst="rect">
+                    <a:avLst/>
+                  </a:prstGeom>
+                  <a:noFill/>
+                </p:spPr>
+                <p:txBody>
+                  <a:bodyPr wrap="square">
+                    <a:spAutoFit/>
+                  </a:bodyPr>
+                  <a:lstStyle/>
+                  <a:p>
+                    <a:pPr/>
+                    <a14:m>
+                      <m:oMathPara xmlns:m="http://schemas.openxmlformats.org/officeDocument/2006/math">
+                        <m:oMathParaPr>
+                          <m:jc m:val="left"/>
+                        </m:oMathParaPr>
+                        <m:oMath xmlns:m="http://schemas.openxmlformats.org/officeDocument/2006/math">
+                          <m:sSub>
+                            <m:sSubPr>
+                              <m:ctrlPr>
+                                <a:rPr lang="de-DE" sz="1600" b="0" i="1" smtClean="0">
+                                  <a:solidFill>
+                                    <a:schemeClr val="bg1"/>
+                                  </a:solidFill>
+                                  <a:latin typeface="Cambria Math" panose="02040503050406030204" pitchFamily="18" charset="0"/>
+                                </a:rPr>
+                              </m:ctrlPr>
+                            </m:sSubPr>
+                            <m:e>
+                              <m:r>
+                                <m:rPr>
+                                  <m:sty m:val="p"/>
+                                </m:rPr>
+                                <a:rPr lang="de-DE" sz="1600" b="0" i="1" smtClean="0">
+                                  <a:solidFill>
+                                    <a:schemeClr val="bg1"/>
+                                  </a:solidFill>
+                                  <a:latin typeface="Cambria Math" panose="02040503050406030204" pitchFamily="18" charset="0"/>
+                                </a:rPr>
+                                <m:t>m</m:t>
+                              </m:r>
+                            </m:e>
+                            <m:sub>
+                              <m:r>
+                                <a:rPr lang="de-DE" sz="1600" b="0" i="1" smtClean="0">
+                                  <a:solidFill>
+                                    <a:schemeClr val="bg1"/>
+                                  </a:solidFill>
+                                  <a:latin typeface="Cambria Math" panose="02040503050406030204" pitchFamily="18" charset="0"/>
+                                </a:rPr>
+                                <m:t>2</m:t>
+                              </m:r>
+                            </m:sub>
+                          </m:sSub>
+                        </m:oMath>
+                      </m:oMathPara>
+                    </a14:m>
+                    <a:endParaRPr lang="en-US" sz="1600" dirty="0">
+                      <a:solidFill>
+                        <a:schemeClr val="bg1"/>
+                      </a:solidFill>
+                    </a:endParaRPr>
+                  </a:p>
+                </p:txBody>
+              </p:sp>
+            </mc:Choice>
+            <mc:Fallback>
+              <p:sp>
+                <p:nvSpPr>
+                  <p:cNvPr id="45" name="TextBox 44">
+                    <a:extLst>
+                      <a:ext uri="{FF2B5EF4-FFF2-40B4-BE49-F238E27FC236}">
+                        <a16:creationId xmlns:a16="http://schemas.microsoft.com/office/drawing/2014/main" id="{1D6EFC8C-9700-D71B-F9FB-6B17274F59A2}"/>
+                      </a:ext>
+                    </a:extLst>
+                  </p:cNvPr>
+                  <p:cNvSpPr txBox="1">
+                    <a:spLocks noRot="1" noChangeAspect="1" noMove="1" noResize="1" noEditPoints="1" noAdjustHandles="1" noChangeArrowheads="1" noChangeShapeType="1" noTextEdit="1"/>
+                  </p:cNvSpPr>
+                  <p:nvPr/>
+                </p:nvSpPr>
+                <p:spPr>
+                  <a:xfrm>
+                    <a:off x="465983" y="2632489"/>
+                    <a:ext cx="740342" cy="482264"/>
+                  </a:xfrm>
+                  <a:prstGeom prst="rect">
+                    <a:avLst/>
+                  </a:prstGeom>
+                  <a:blipFill>
+                    <a:blip r:embed="rId7"/>
+                    <a:stretch>
+                      <a:fillRect/>
+                    </a:stretch>
+                  </a:blipFill>
+                </p:spPr>
+                <p:txBody>
+                  <a:bodyPr/>
+                  <a:lstStyle/>
+                  <a:p>
+                    <a:r>
+                      <a:rPr lang="en-US">
+                        <a:noFill/>
+                      </a:rPr>
+                      <a:t> </a:t>
+                    </a:r>
+                  </a:p>
+                </p:txBody>
+              </p:sp>
+            </mc:Fallback>
+          </mc:AlternateContent>
+          <mc:AlternateContent xmlns:mc="http://schemas.openxmlformats.org/markup-compatibility/2006">
+            <mc:Choice xmlns:a14="http://schemas.microsoft.com/office/drawing/2010/main" Requires="a14">
+              <p:sp>
+                <p:nvSpPr>
+                  <p:cNvPr id="46" name="TextBox 45">
+                    <a:extLst>
+                      <a:ext uri="{FF2B5EF4-FFF2-40B4-BE49-F238E27FC236}">
+                        <a16:creationId xmlns:a16="http://schemas.microsoft.com/office/drawing/2014/main" id="{D8258DD7-F843-00AC-1646-EBEC2EACBD9F}"/>
+                      </a:ext>
+                    </a:extLst>
+                  </p:cNvPr>
+                  <p:cNvSpPr txBox="1"/>
+                  <p:nvPr/>
+                </p:nvSpPr>
+                <p:spPr>
+                  <a:xfrm>
+                    <a:off x="2121068" y="1391826"/>
+                    <a:ext cx="651146" cy="482264"/>
+                  </a:xfrm>
+                  <a:prstGeom prst="rect">
+                    <a:avLst/>
+                  </a:prstGeom>
+                  <a:noFill/>
+                  <a:ln w="19050">
+                    <a:solidFill>
+                      <a:srgbClr val="C00000"/>
+                    </a:solidFill>
+                  </a:ln>
+                </p:spPr>
+                <p:txBody>
+                  <a:bodyPr wrap="square">
+                    <a:spAutoFit/>
+                  </a:bodyPr>
+                  <a:lstStyle/>
+                  <a:p>
+                    <a:pPr/>
+                    <a14:m>
+                      <m:oMathPara xmlns:m="http://schemas.openxmlformats.org/officeDocument/2006/math">
+                        <m:oMathParaPr>
+                          <m:jc m:val="centerGroup"/>
+                        </m:oMathParaPr>
+                        <m:oMath xmlns:m="http://schemas.openxmlformats.org/officeDocument/2006/math">
+                          <m:sSub>
+                            <m:sSubPr>
+                              <m:ctrlPr>
+                                <a:rPr lang="de-DE" sz="1600" b="1" i="1" smtClean="0">
+                                  <a:solidFill>
+                                    <a:schemeClr val="bg1"/>
+                                  </a:solidFill>
+                                  <a:latin typeface="Cambria Math" panose="02040503050406030204" pitchFamily="18" charset="0"/>
+                                </a:rPr>
+                              </m:ctrlPr>
+                            </m:sSubPr>
+                            <m:e>
+                              <m:r>
+                                <a:rPr lang="de-DE" sz="1600" b="1" i="1" smtClean="0">
+                                  <a:solidFill>
+                                    <a:schemeClr val="bg1"/>
+                                  </a:solidFill>
+                                  <a:latin typeface="Cambria Math" panose="02040503050406030204" pitchFamily="18" charset="0"/>
+                                </a:rPr>
+                                <m:t>𝒎</m:t>
+                              </m:r>
+                            </m:e>
+                            <m:sub>
+                              <m:r>
+                                <a:rPr lang="de-DE" sz="1600" b="1" i="1" smtClean="0">
+                                  <a:solidFill>
+                                    <a:schemeClr val="bg1"/>
+                                  </a:solidFill>
+                                  <a:latin typeface="Cambria Math" panose="02040503050406030204" pitchFamily="18" charset="0"/>
+                                </a:rPr>
+                                <m:t>𝒛</m:t>
+                              </m:r>
+                            </m:sub>
+                          </m:sSub>
+                        </m:oMath>
+                      </m:oMathPara>
+                    </a14:m>
+                    <a:endParaRPr lang="en-US" sz="1600" b="1" dirty="0">
+                      <a:solidFill>
+                        <a:schemeClr val="bg1"/>
+                      </a:solidFill>
+                    </a:endParaRPr>
+                  </a:p>
+                </p:txBody>
+              </p:sp>
+            </mc:Choice>
+            <mc:Fallback>
+              <p:sp>
+                <p:nvSpPr>
+                  <p:cNvPr id="46" name="TextBox 45">
+                    <a:extLst>
+                      <a:ext uri="{FF2B5EF4-FFF2-40B4-BE49-F238E27FC236}">
+                        <a16:creationId xmlns:a16="http://schemas.microsoft.com/office/drawing/2014/main" id="{D8258DD7-F843-00AC-1646-EBEC2EACBD9F}"/>
+                      </a:ext>
+                    </a:extLst>
+                  </p:cNvPr>
+                  <p:cNvSpPr txBox="1">
+                    <a:spLocks noRot="1" noChangeAspect="1" noMove="1" noResize="1" noEditPoints="1" noAdjustHandles="1" noChangeArrowheads="1" noChangeShapeType="1" noTextEdit="1"/>
+                  </p:cNvSpPr>
+                  <p:nvPr/>
+                </p:nvSpPr>
+                <p:spPr>
+                  <a:xfrm>
+                    <a:off x="2121068" y="1391826"/>
+                    <a:ext cx="651146" cy="482264"/>
+                  </a:xfrm>
+                  <a:prstGeom prst="rect">
+                    <a:avLst/>
+                  </a:prstGeom>
+                  <a:blipFill>
+                    <a:blip r:embed="rId8"/>
+                    <a:stretch>
+                      <a:fillRect/>
+                    </a:stretch>
+                  </a:blipFill>
+                  <a:ln w="19050">
+                    <a:solidFill>
+                      <a:srgbClr val="C00000"/>
+                    </a:solidFill>
+                  </a:ln>
+                </p:spPr>
+                <p:txBody>
+                  <a:bodyPr/>
+                  <a:lstStyle/>
+                  <a:p>
+                    <a:r>
+                      <a:rPr lang="en-US">
+                        <a:noFill/>
+                      </a:rPr>
+                      <a:t> </a:t>
+                    </a:r>
+                  </a:p>
+                </p:txBody>
+              </p:sp>
+            </mc:Fallback>
+          </mc:AlternateContent>
+          <mc:AlternateContent xmlns:mc="http://schemas.openxmlformats.org/markup-compatibility/2006">
+            <mc:Choice xmlns:a14="http://schemas.microsoft.com/office/drawing/2010/main" Requires="a14">
+              <p:sp>
+                <p:nvSpPr>
+                  <p:cNvPr id="47" name="TextBox 46">
+                    <a:extLst>
+                      <a:ext uri="{FF2B5EF4-FFF2-40B4-BE49-F238E27FC236}">
+                        <a16:creationId xmlns:a16="http://schemas.microsoft.com/office/drawing/2014/main" id="{FCAD0005-D28A-F12E-F7F7-AA531253C494}"/>
+                      </a:ext>
+                    </a:extLst>
+                  </p:cNvPr>
+                  <p:cNvSpPr txBox="1"/>
+                  <p:nvPr/>
+                </p:nvSpPr>
+                <p:spPr>
+                  <a:xfrm>
+                    <a:off x="1057861" y="1831144"/>
+                    <a:ext cx="970607" cy="482264"/>
+                  </a:xfrm>
+                  <a:prstGeom prst="rect">
+                    <a:avLst/>
+                  </a:prstGeom>
+                  <a:noFill/>
+                </p:spPr>
+                <p:txBody>
+                  <a:bodyPr wrap="square">
+                    <a:spAutoFit/>
+                  </a:bodyPr>
+                  <a:lstStyle/>
+                  <a:p>
+                    <a:pPr/>
+                    <a14:m>
+                      <m:oMathPara xmlns:m="http://schemas.openxmlformats.org/officeDocument/2006/math">
+                        <m:oMathParaPr>
+                          <m:jc m:val="centerGroup"/>
+                        </m:oMathParaPr>
+                        <m:oMath xmlns:m="http://schemas.openxmlformats.org/officeDocument/2006/math">
+                          <m:sSub>
+                            <m:sSubPr>
+                              <m:ctrlPr>
+                                <a:rPr lang="de-DE" sz="1600" b="0" i="1" smtClean="0">
+                                  <a:solidFill>
+                                    <a:schemeClr val="bg1"/>
+                                  </a:solidFill>
+                                  <a:latin typeface="Cambria Math" panose="02040503050406030204" pitchFamily="18" charset="0"/>
+                                </a:rPr>
+                              </m:ctrlPr>
+                            </m:sSubPr>
+                            <m:e>
+                              <m:r>
+                                <m:rPr>
+                                  <m:sty m:val="p"/>
+                                </m:rPr>
+                                <a:rPr lang="de-DE" sz="1600" b="0" i="1" smtClean="0">
+                                  <a:solidFill>
+                                    <a:schemeClr val="bg1"/>
+                                  </a:solidFill>
+                                  <a:latin typeface="Cambria Math" panose="02040503050406030204" pitchFamily="18" charset="0"/>
+                                </a:rPr>
+                                <m:t>r</m:t>
+                              </m:r>
+                            </m:e>
+                            <m:sub>
+                              <m:r>
+                                <a:rPr lang="de-DE" sz="1600" b="0" i="1" smtClean="0">
+                                  <a:solidFill>
+                                    <a:schemeClr val="bg1"/>
+                                  </a:solidFill>
+                                  <a:latin typeface="Cambria Math" panose="02040503050406030204" pitchFamily="18" charset="0"/>
+                                </a:rPr>
+                                <m:t>1</m:t>
+                              </m:r>
+                            </m:sub>
+                          </m:sSub>
+                        </m:oMath>
+                      </m:oMathPara>
+                    </a14:m>
+                    <a:endParaRPr lang="en-US" sz="1600" dirty="0">
+                      <a:solidFill>
+                        <a:schemeClr val="bg1"/>
+                      </a:solidFill>
+                    </a:endParaRPr>
+                  </a:p>
+                </p:txBody>
+              </p:sp>
+            </mc:Choice>
+            <mc:Fallback>
+              <p:sp>
+                <p:nvSpPr>
+                  <p:cNvPr id="47" name="TextBox 46">
+                    <a:extLst>
+                      <a:ext uri="{FF2B5EF4-FFF2-40B4-BE49-F238E27FC236}">
+                        <a16:creationId xmlns:a16="http://schemas.microsoft.com/office/drawing/2014/main" id="{FCAD0005-D28A-F12E-F7F7-AA531253C494}"/>
+                      </a:ext>
+                    </a:extLst>
+                  </p:cNvPr>
+                  <p:cNvSpPr txBox="1">
+                    <a:spLocks noRot="1" noChangeAspect="1" noMove="1" noResize="1" noEditPoints="1" noAdjustHandles="1" noChangeArrowheads="1" noChangeShapeType="1" noTextEdit="1"/>
+                  </p:cNvSpPr>
+                  <p:nvPr/>
+                </p:nvSpPr>
+                <p:spPr>
+                  <a:xfrm>
+                    <a:off x="1057861" y="1831144"/>
+                    <a:ext cx="970607" cy="482264"/>
+                  </a:xfrm>
+                  <a:prstGeom prst="rect">
+                    <a:avLst/>
+                  </a:prstGeom>
+                  <a:blipFill>
+                    <a:blip r:embed="rId9"/>
+                    <a:stretch>
+                      <a:fillRect/>
+                    </a:stretch>
+                  </a:blipFill>
+                </p:spPr>
+                <p:txBody>
+                  <a:bodyPr/>
+                  <a:lstStyle/>
+                  <a:p>
+                    <a:r>
+                      <a:rPr lang="en-US">
+                        <a:noFill/>
+                      </a:rPr>
+                      <a:t> </a:t>
+                    </a:r>
+                  </a:p>
+                </p:txBody>
+              </p:sp>
+            </mc:Fallback>
+          </mc:AlternateContent>
+          <mc:AlternateContent xmlns:mc="http://schemas.openxmlformats.org/markup-compatibility/2006">
+            <mc:Choice xmlns:a14="http://schemas.microsoft.com/office/drawing/2010/main" Requires="a14">
+              <p:sp>
+                <p:nvSpPr>
+                  <p:cNvPr id="48" name="TextBox 47">
+                    <a:extLst>
+                      <a:ext uri="{FF2B5EF4-FFF2-40B4-BE49-F238E27FC236}">
+                        <a16:creationId xmlns:a16="http://schemas.microsoft.com/office/drawing/2014/main" id="{4021F2A5-6F44-C8F8-B892-FC8816B90930}"/>
+                      </a:ext>
+                    </a:extLst>
+                  </p:cNvPr>
+                  <p:cNvSpPr txBox="1"/>
+                  <p:nvPr/>
+                </p:nvSpPr>
+                <p:spPr>
+                  <a:xfrm>
+                    <a:off x="1086781" y="2439570"/>
+                    <a:ext cx="970607" cy="482264"/>
+                  </a:xfrm>
+                  <a:prstGeom prst="rect">
+                    <a:avLst/>
+                  </a:prstGeom>
+                  <a:noFill/>
+                </p:spPr>
+                <p:txBody>
+                  <a:bodyPr wrap="square">
+                    <a:spAutoFit/>
+                  </a:bodyPr>
+                  <a:lstStyle/>
+                  <a:p>
+                    <a:pPr/>
+                    <a14:m>
+                      <m:oMathPara xmlns:m="http://schemas.openxmlformats.org/officeDocument/2006/math">
+                        <m:oMathParaPr>
+                          <m:jc m:val="centerGroup"/>
+                        </m:oMathParaPr>
+                        <m:oMath xmlns:m="http://schemas.openxmlformats.org/officeDocument/2006/math">
+                          <m:sSub>
+                            <m:sSubPr>
+                              <m:ctrlPr>
+                                <a:rPr lang="de-DE" sz="1600" b="0" i="1" smtClean="0">
+                                  <a:solidFill>
+                                    <a:schemeClr val="bg1"/>
+                                  </a:solidFill>
+                                  <a:latin typeface="Cambria Math" panose="02040503050406030204" pitchFamily="18" charset="0"/>
+                                </a:rPr>
+                              </m:ctrlPr>
+                            </m:sSubPr>
+                            <m:e>
+                              <m:r>
+                                <m:rPr>
+                                  <m:sty m:val="p"/>
+                                </m:rPr>
+                                <a:rPr lang="de-DE" sz="1600" b="0" i="1" smtClean="0">
+                                  <a:solidFill>
+                                    <a:schemeClr val="bg1"/>
+                                  </a:solidFill>
+                                  <a:latin typeface="Cambria Math" panose="02040503050406030204" pitchFamily="18" charset="0"/>
+                                </a:rPr>
+                                <m:t>r</m:t>
+                              </m:r>
+                            </m:e>
+                            <m:sub>
+                              <m:r>
+                                <a:rPr lang="de-DE" sz="1600" b="0" i="1" smtClean="0">
+                                  <a:solidFill>
+                                    <a:schemeClr val="bg1"/>
+                                  </a:solidFill>
+                                  <a:latin typeface="Cambria Math" panose="02040503050406030204" pitchFamily="18" charset="0"/>
+                                </a:rPr>
+                                <m:t>2</m:t>
+                              </m:r>
+                            </m:sub>
+                          </m:sSub>
+                        </m:oMath>
+                      </m:oMathPara>
+                    </a14:m>
+                    <a:endParaRPr lang="en-US" sz="1600" dirty="0">
+                      <a:solidFill>
+                        <a:schemeClr val="bg1"/>
+                      </a:solidFill>
+                    </a:endParaRPr>
+                  </a:p>
+                </p:txBody>
+              </p:sp>
+            </mc:Choice>
+            <mc:Fallback>
+              <p:sp>
+                <p:nvSpPr>
+                  <p:cNvPr id="48" name="TextBox 47">
+                    <a:extLst>
+                      <a:ext uri="{FF2B5EF4-FFF2-40B4-BE49-F238E27FC236}">
+                        <a16:creationId xmlns:a16="http://schemas.microsoft.com/office/drawing/2014/main" id="{4021F2A5-6F44-C8F8-B892-FC8816B90930}"/>
+                      </a:ext>
+                    </a:extLst>
+                  </p:cNvPr>
+                  <p:cNvSpPr txBox="1">
+                    <a:spLocks noRot="1" noChangeAspect="1" noMove="1" noResize="1" noEditPoints="1" noAdjustHandles="1" noChangeArrowheads="1" noChangeShapeType="1" noTextEdit="1"/>
+                  </p:cNvSpPr>
+                  <p:nvPr/>
+                </p:nvSpPr>
+                <p:spPr>
+                  <a:xfrm>
+                    <a:off x="1086781" y="2439570"/>
+                    <a:ext cx="970607" cy="482264"/>
+                  </a:xfrm>
+                  <a:prstGeom prst="rect">
+                    <a:avLst/>
+                  </a:prstGeom>
+                  <a:blipFill>
+                    <a:blip r:embed="rId10"/>
+                    <a:stretch>
+                      <a:fillRect/>
+                    </a:stretch>
+                  </a:blipFill>
+                </p:spPr>
+                <p:txBody>
+                  <a:bodyPr/>
+                  <a:lstStyle/>
+                  <a:p>
+                    <a:r>
+                      <a:rPr lang="en-US">
+                        <a:noFill/>
+                      </a:rPr>
+                      <a:t> </a:t>
+                    </a:r>
+                  </a:p>
+                </p:txBody>
+              </p:sp>
+            </mc:Fallback>
+          </mc:AlternateContent>
+          <mc:AlternateContent xmlns:mc="http://schemas.openxmlformats.org/markup-compatibility/2006">
+            <mc:Choice xmlns:a14="http://schemas.microsoft.com/office/drawing/2010/main" Requires="a14">
+              <p:sp>
+                <p:nvSpPr>
+                  <p:cNvPr id="49" name="TextBox 48">
+                    <a:extLst>
+                      <a:ext uri="{FF2B5EF4-FFF2-40B4-BE49-F238E27FC236}">
+                        <a16:creationId xmlns:a16="http://schemas.microsoft.com/office/drawing/2014/main" id="{0620BAE1-1E9B-43EA-64AA-747A6FA0716F}"/>
+                      </a:ext>
+                    </a:extLst>
+                  </p:cNvPr>
+                  <p:cNvSpPr txBox="1"/>
+                  <p:nvPr/>
+                </p:nvSpPr>
+                <p:spPr>
+                  <a:xfrm>
+                    <a:off x="2871649" y="1730967"/>
+                    <a:ext cx="480274" cy="482264"/>
+                  </a:xfrm>
+                  <a:prstGeom prst="rect">
+                    <a:avLst/>
+                  </a:prstGeom>
+                  <a:noFill/>
+                </p:spPr>
+                <p:txBody>
+                  <a:bodyPr wrap="square">
+                    <a:spAutoFit/>
+                  </a:bodyPr>
+                  <a:lstStyle/>
+                  <a:p>
+                    <a:pPr/>
+                    <a14:m>
+                      <m:oMathPara xmlns:m="http://schemas.openxmlformats.org/officeDocument/2006/math">
+                        <m:oMathParaPr>
+                          <m:jc m:val="centerGroup"/>
+                        </m:oMathParaPr>
+                        <m:oMath xmlns:m="http://schemas.openxmlformats.org/officeDocument/2006/math">
+                          <m:sSub>
+                            <m:sSubPr>
+                              <m:ctrlPr>
+                                <a:rPr lang="de-DE" sz="1600" b="0" i="1" smtClean="0">
+                                  <a:solidFill>
+                                    <a:schemeClr val="bg1"/>
+                                  </a:solidFill>
+                                  <a:latin typeface="Cambria Math" panose="02040503050406030204" pitchFamily="18" charset="0"/>
+                                </a:rPr>
+                              </m:ctrlPr>
+                            </m:sSubPr>
+                            <m:e>
+                              <m:r>
+                                <m:rPr>
+                                  <m:sty m:val="p"/>
+                                </m:rPr>
+                                <a:rPr lang="de-DE" sz="1600" b="0" i="1" smtClean="0">
+                                  <a:solidFill>
+                                    <a:schemeClr val="bg1"/>
+                                  </a:solidFill>
+                                  <a:latin typeface="Cambria Math" panose="02040503050406030204" pitchFamily="18" charset="0"/>
+                                </a:rPr>
+                                <m:t>r</m:t>
+                              </m:r>
+                            </m:e>
+                            <m:sub>
+                              <m:r>
+                                <a:rPr lang="de-DE" sz="1600" b="0" i="1" smtClean="0">
+                                  <a:solidFill>
+                                    <a:schemeClr val="bg1"/>
+                                  </a:solidFill>
+                                  <a:latin typeface="Cambria Math" panose="02040503050406030204" pitchFamily="18" charset="0"/>
+                                </a:rPr>
+                                <m:t>3</m:t>
+                              </m:r>
+                            </m:sub>
+                          </m:sSub>
+                        </m:oMath>
+                      </m:oMathPara>
+                    </a14:m>
+                    <a:endParaRPr lang="en-US" sz="1600" dirty="0">
+                      <a:solidFill>
+                        <a:schemeClr val="bg1"/>
+                      </a:solidFill>
+                    </a:endParaRPr>
+                  </a:p>
+                </p:txBody>
+              </p:sp>
+            </mc:Choice>
+            <mc:Fallback>
+              <p:sp>
+                <p:nvSpPr>
+                  <p:cNvPr id="49" name="TextBox 48">
+                    <a:extLst>
+                      <a:ext uri="{FF2B5EF4-FFF2-40B4-BE49-F238E27FC236}">
+                        <a16:creationId xmlns:a16="http://schemas.microsoft.com/office/drawing/2014/main" id="{0620BAE1-1E9B-43EA-64AA-747A6FA0716F}"/>
+                      </a:ext>
+                    </a:extLst>
+                  </p:cNvPr>
+                  <p:cNvSpPr txBox="1">
+                    <a:spLocks noRot="1" noChangeAspect="1" noMove="1" noResize="1" noEditPoints="1" noAdjustHandles="1" noChangeArrowheads="1" noChangeShapeType="1" noTextEdit="1"/>
+                  </p:cNvSpPr>
+                  <p:nvPr/>
+                </p:nvSpPr>
+                <p:spPr>
+                  <a:xfrm>
+                    <a:off x="2871649" y="1730967"/>
+                    <a:ext cx="480274" cy="482264"/>
+                  </a:xfrm>
+                  <a:prstGeom prst="rect">
+                    <a:avLst/>
+                  </a:prstGeom>
+                  <a:blipFill>
+                    <a:blip r:embed="rId11"/>
+                    <a:stretch>
+                      <a:fillRect/>
+                    </a:stretch>
+                  </a:blipFill>
+                </p:spPr>
+                <p:txBody>
+                  <a:bodyPr/>
+                  <a:lstStyle/>
+                  <a:p>
+                    <a:r>
+                      <a:rPr lang="en-US">
+                        <a:noFill/>
+                      </a:rPr>
+                      <a:t> </a:t>
+                    </a:r>
+                  </a:p>
+                </p:txBody>
+              </p:sp>
+            </mc:Fallback>
+          </mc:AlternateContent>
+        </p:grpSp>
+      </p:grpSp>
+      <p:sp>
+        <p:nvSpPr>
+          <p:cNvPr id="50" name="TextBox 49">
+            <a:extLst>
+              <a:ext uri="{FF2B5EF4-FFF2-40B4-BE49-F238E27FC236}">
+                <a16:creationId xmlns:a16="http://schemas.microsoft.com/office/drawing/2014/main" id="{7BA293E9-9185-6E4F-E81E-B1966326174C}"/>
+              </a:ext>
+            </a:extLst>
+          </p:cNvPr>
+          <p:cNvSpPr txBox="1"/>
+          <p:nvPr/>
+        </p:nvSpPr>
+        <p:spPr>
+          <a:xfrm>
+            <a:off x="2880475" y="53233"/>
+            <a:ext cx="1290738" cy="369332"/>
+          </a:xfrm>
+          <a:prstGeom prst="rect">
+            <a:avLst/>
+          </a:prstGeom>
+          <a:noFill/>
+        </p:spPr>
+        <p:txBody>
+          <a:bodyPr wrap="none" rtlCol="0">
+            <a:spAutoFit/>
+          </a:bodyPr>
+          <a:lstStyle/>
+          <a:p>
+            <a:r>
+              <a:rPr lang="en-US" dirty="0"/>
+              <a:t>Reaction 1 </a:t>
+            </a:r>
+          </a:p>
+        </p:txBody>
+      </p:sp>
+      <p:pic>
+        <p:nvPicPr>
+          <p:cNvPr id="51" name="Picture 50" descr="A diagram of dna sequence&#10;&#10;AI-generated content may be incorrect.">
+            <a:extLst>
+              <a:ext uri="{FF2B5EF4-FFF2-40B4-BE49-F238E27FC236}">
+                <a16:creationId xmlns:a16="http://schemas.microsoft.com/office/drawing/2014/main" id="{A0ED6B0A-41D7-23DF-FB14-C4465E4E596C}"/>
+              </a:ext>
+            </a:extLst>
+          </p:cNvPr>
+          <p:cNvPicPr>
+            <a:picLocks noChangeAspect="1"/>
+          </p:cNvPicPr>
+          <p:nvPr/>
+        </p:nvPicPr>
+        <p:blipFill>
+          <a:blip r:embed="rId12"/>
+          <a:stretch>
+            <a:fillRect/>
+          </a:stretch>
+        </p:blipFill>
+        <p:spPr>
+          <a:xfrm>
+            <a:off x="120761" y="1606269"/>
+            <a:ext cx="2916786" cy="3091475"/>
+          </a:xfrm>
+          <a:prstGeom prst="rect">
+            <a:avLst/>
+          </a:prstGeom>
+        </p:spPr>
+      </p:pic>
+      <p:sp>
+        <p:nvSpPr>
+          <p:cNvPr id="53" name="TextBox 52">
+            <a:extLst>
+              <a:ext uri="{FF2B5EF4-FFF2-40B4-BE49-F238E27FC236}">
+                <a16:creationId xmlns:a16="http://schemas.microsoft.com/office/drawing/2014/main" id="{50EB439C-EAB6-7789-92FC-64AE859620AC}"/>
+              </a:ext>
+            </a:extLst>
+          </p:cNvPr>
+          <p:cNvSpPr txBox="1"/>
+          <p:nvPr/>
+        </p:nvSpPr>
+        <p:spPr>
+          <a:xfrm>
+            <a:off x="6969059" y="0"/>
+            <a:ext cx="1290738" cy="369332"/>
+          </a:xfrm>
+          <a:prstGeom prst="rect">
+            <a:avLst/>
+          </a:prstGeom>
+          <a:noFill/>
+        </p:spPr>
+        <p:txBody>
+          <a:bodyPr wrap="none" rtlCol="0">
+            <a:spAutoFit/>
+          </a:bodyPr>
+          <a:lstStyle/>
+          <a:p>
+            <a:r>
+              <a:rPr lang="en-US" dirty="0"/>
+              <a:t>Reaction 2 </a:t>
+            </a:r>
+          </a:p>
+        </p:txBody>
+      </p:sp>
+      <p:sp>
+        <p:nvSpPr>
+          <p:cNvPr id="55" name="TextBox 54">
+            <a:extLst>
+              <a:ext uri="{FF2B5EF4-FFF2-40B4-BE49-F238E27FC236}">
+                <a16:creationId xmlns:a16="http://schemas.microsoft.com/office/drawing/2014/main" id="{4C9A963E-FFCD-5C8D-6835-0AB284DDCE29}"/>
+              </a:ext>
+            </a:extLst>
+          </p:cNvPr>
+          <p:cNvSpPr txBox="1"/>
+          <p:nvPr/>
+        </p:nvSpPr>
+        <p:spPr>
+          <a:xfrm>
+            <a:off x="4280350" y="635072"/>
+            <a:ext cx="1694318" cy="369332"/>
+          </a:xfrm>
+          <a:prstGeom prst="rect">
+            <a:avLst/>
+          </a:prstGeom>
+          <a:noFill/>
+        </p:spPr>
+        <p:txBody>
+          <a:bodyPr wrap="square">
+            <a:spAutoFit/>
+          </a:bodyPr>
+          <a:lstStyle/>
+          <a:p>
+            <a:r>
+              <a:rPr lang="es-ES" b="0" i="0" dirty="0">
+                <a:effectLst/>
+                <a:latin typeface="Menlo"/>
+                <a:hlinkClick r:id="rId13"/>
+              </a:rPr>
+              <a:t>YPL214C (THI6)</a:t>
+            </a:r>
+            <a:endParaRPr lang="en-US" dirty="0"/>
+          </a:p>
+        </p:txBody>
+      </p:sp>
+      <p:sp>
+        <p:nvSpPr>
+          <p:cNvPr id="57" name="TextBox 56">
+            <a:extLst>
+              <a:ext uri="{FF2B5EF4-FFF2-40B4-BE49-F238E27FC236}">
+                <a16:creationId xmlns:a16="http://schemas.microsoft.com/office/drawing/2014/main" id="{3B02CB41-0232-245B-CA26-2987E2366761}"/>
+              </a:ext>
+            </a:extLst>
+          </p:cNvPr>
+          <p:cNvSpPr txBox="1"/>
+          <p:nvPr/>
+        </p:nvSpPr>
+        <p:spPr>
+          <a:xfrm>
+            <a:off x="8204752" y="573356"/>
+            <a:ext cx="1825368" cy="369332"/>
+          </a:xfrm>
+          <a:prstGeom prst="rect">
+            <a:avLst/>
+          </a:prstGeom>
+          <a:noFill/>
+        </p:spPr>
+        <p:txBody>
+          <a:bodyPr wrap="square">
+            <a:spAutoFit/>
+          </a:bodyPr>
+          <a:lstStyle/>
+          <a:p>
+            <a:r>
+              <a:rPr lang="es-ES" b="0" i="0" dirty="0">
+                <a:effectLst/>
+                <a:latin typeface="Menlo"/>
+                <a:hlinkClick r:id="rId14"/>
+              </a:rPr>
+              <a:t>YGR144W (THI4)</a:t>
+            </a:r>
+            <a:endParaRPr lang="en-US" dirty="0"/>
+          </a:p>
+        </p:txBody>
+      </p:sp>
+      <p:sp>
+        <p:nvSpPr>
+          <p:cNvPr id="4" name="Title 3">
+            <a:extLst>
+              <a:ext uri="{FF2B5EF4-FFF2-40B4-BE49-F238E27FC236}">
+                <a16:creationId xmlns:a16="http://schemas.microsoft.com/office/drawing/2014/main" id="{2C323123-73EA-33DB-90F1-8CBA4153DBB2}"/>
+              </a:ext>
+            </a:extLst>
+          </p:cNvPr>
+          <p:cNvSpPr>
+            <a:spLocks noGrp="1"/>
+          </p:cNvSpPr>
+          <p:nvPr>
+            <p:ph type="title"/>
+          </p:nvPr>
+        </p:nvSpPr>
+        <p:spPr>
+          <a:xfrm>
+            <a:off x="9199" y="59081"/>
+            <a:ext cx="3139911" cy="755065"/>
+          </a:xfrm>
+        </p:spPr>
+        <p:txBody>
+          <a:bodyPr>
+            <a:normAutofit/>
+          </a:bodyPr>
+          <a:lstStyle/>
+          <a:p>
+            <a:r>
+              <a:rPr lang="en-US" sz="3600" dirty="0"/>
+              <a:t>Enzymes</a:t>
+            </a:r>
+          </a:p>
+        </p:txBody>
+      </p:sp>
+      <p:sp>
+        <p:nvSpPr>
+          <p:cNvPr id="6" name="TextBox 5">
+            <a:extLst>
+              <a:ext uri="{FF2B5EF4-FFF2-40B4-BE49-F238E27FC236}">
+                <a16:creationId xmlns:a16="http://schemas.microsoft.com/office/drawing/2014/main" id="{E4AB3561-0988-0221-FEAD-D3304EC6023B}"/>
+              </a:ext>
+            </a:extLst>
+          </p:cNvPr>
+          <p:cNvSpPr txBox="1"/>
+          <p:nvPr/>
+        </p:nvSpPr>
+        <p:spPr>
+          <a:xfrm>
+            <a:off x="3373028" y="635072"/>
+            <a:ext cx="718466" cy="369332"/>
+          </a:xfrm>
+          <a:prstGeom prst="rect">
+            <a:avLst/>
+          </a:prstGeom>
+          <a:noFill/>
+        </p:spPr>
+        <p:txBody>
+          <a:bodyPr wrap="none" rtlCol="0">
+            <a:spAutoFit/>
+          </a:bodyPr>
+          <a:lstStyle/>
+          <a:p>
+            <a:r>
+              <a:rPr lang="en-US" dirty="0"/>
+              <a:t>Gene</a:t>
+            </a:r>
+          </a:p>
+        </p:txBody>
+      </p:sp>
+      <p:sp>
+        <p:nvSpPr>
+          <p:cNvPr id="7" name="TextBox 6">
+            <a:extLst>
+              <a:ext uri="{FF2B5EF4-FFF2-40B4-BE49-F238E27FC236}">
+                <a16:creationId xmlns:a16="http://schemas.microsoft.com/office/drawing/2014/main" id="{008D5721-8CD6-9079-9756-C0FD953E1571}"/>
+              </a:ext>
+            </a:extLst>
+          </p:cNvPr>
+          <p:cNvSpPr txBox="1"/>
+          <p:nvPr/>
+        </p:nvSpPr>
+        <p:spPr>
+          <a:xfrm>
+            <a:off x="2951834" y="1121859"/>
+            <a:ext cx="1074590" cy="369332"/>
+          </a:xfrm>
+          <a:prstGeom prst="rect">
+            <a:avLst/>
+          </a:prstGeom>
+          <a:noFill/>
+        </p:spPr>
+        <p:txBody>
+          <a:bodyPr wrap="none" rtlCol="0">
+            <a:spAutoFit/>
+          </a:bodyPr>
+          <a:lstStyle/>
+          <a:p>
+            <a:r>
+              <a:rPr lang="en-US" dirty="0"/>
+              <a:t>Enzymes</a:t>
+            </a:r>
+          </a:p>
+        </p:txBody>
+      </p:sp>
+      <p:pic>
+        <p:nvPicPr>
+          <p:cNvPr id="16" name="Picture 15">
+            <a:extLst>
+              <a:ext uri="{FF2B5EF4-FFF2-40B4-BE49-F238E27FC236}">
+                <a16:creationId xmlns:a16="http://schemas.microsoft.com/office/drawing/2014/main" id="{7B0021DB-4F7E-7960-BE12-FEBF74107A8A}"/>
+              </a:ext>
+            </a:extLst>
+          </p:cNvPr>
+          <p:cNvPicPr>
+            <a:picLocks noChangeAspect="1"/>
+          </p:cNvPicPr>
+          <p:nvPr/>
+        </p:nvPicPr>
+        <p:blipFill>
+          <a:blip r:embed="rId15"/>
+          <a:stretch>
+            <a:fillRect/>
+          </a:stretch>
+        </p:blipFill>
+        <p:spPr>
+          <a:xfrm>
+            <a:off x="3953594" y="1113849"/>
+            <a:ext cx="2990850" cy="1533525"/>
+          </a:xfrm>
+          <a:prstGeom prst="rect">
+            <a:avLst/>
+          </a:prstGeom>
+          <a:ln>
+            <a:solidFill>
+              <a:schemeClr val="accent1"/>
+            </a:solidFill>
+          </a:ln>
+        </p:spPr>
+      </p:pic>
+      <p:sp>
+        <p:nvSpPr>
+          <p:cNvPr id="21" name="TextBox 20">
+            <a:extLst>
+              <a:ext uri="{FF2B5EF4-FFF2-40B4-BE49-F238E27FC236}">
+                <a16:creationId xmlns:a16="http://schemas.microsoft.com/office/drawing/2014/main" id="{FF1AEDEE-7DEE-F0D7-D9E5-2A9702B06649}"/>
+              </a:ext>
+            </a:extLst>
+          </p:cNvPr>
+          <p:cNvSpPr txBox="1"/>
+          <p:nvPr/>
+        </p:nvSpPr>
+        <p:spPr>
+          <a:xfrm>
+            <a:off x="4617561" y="1119436"/>
+            <a:ext cx="848412" cy="369332"/>
+          </a:xfrm>
+          <a:prstGeom prst="rect">
+            <a:avLst/>
+          </a:prstGeom>
+          <a:noFill/>
+        </p:spPr>
+        <p:txBody>
+          <a:bodyPr wrap="square">
+            <a:spAutoFit/>
+          </a:bodyPr>
+          <a:lstStyle/>
+          <a:p>
+            <a:r>
+              <a:rPr lang="en-US" dirty="0">
+                <a:hlinkClick r:id="rId16"/>
+              </a:rPr>
+              <a:t>THI2</a:t>
+            </a:r>
+            <a:endParaRPr lang="en-US" dirty="0"/>
+          </a:p>
+        </p:txBody>
+      </p:sp>
+      <p:pic>
+        <p:nvPicPr>
+          <p:cNvPr id="56" name="Picture 55">
+            <a:extLst>
+              <a:ext uri="{FF2B5EF4-FFF2-40B4-BE49-F238E27FC236}">
+                <a16:creationId xmlns:a16="http://schemas.microsoft.com/office/drawing/2014/main" id="{5AE9DED2-07A1-4109-EB50-A406630B4795}"/>
+              </a:ext>
+            </a:extLst>
+          </p:cNvPr>
+          <p:cNvPicPr>
+            <a:picLocks noChangeAspect="1"/>
+          </p:cNvPicPr>
+          <p:nvPr/>
+        </p:nvPicPr>
+        <p:blipFill>
+          <a:blip r:embed="rId17"/>
+          <a:stretch>
+            <a:fillRect/>
+          </a:stretch>
+        </p:blipFill>
+        <p:spPr>
+          <a:xfrm>
+            <a:off x="3953594" y="2688742"/>
+            <a:ext cx="1408718" cy="2135088"/>
+          </a:xfrm>
+          <a:prstGeom prst="rect">
+            <a:avLst/>
+          </a:prstGeom>
+          <a:ln>
+            <a:solidFill>
+              <a:schemeClr val="accent1"/>
+            </a:solidFill>
+          </a:ln>
+        </p:spPr>
+      </p:pic>
+      <p:sp>
+        <p:nvSpPr>
+          <p:cNvPr id="11" name="TextBox 10">
+            <a:extLst>
+              <a:ext uri="{FF2B5EF4-FFF2-40B4-BE49-F238E27FC236}">
+                <a16:creationId xmlns:a16="http://schemas.microsoft.com/office/drawing/2014/main" id="{89F65830-6D78-7426-A2BF-EA7DBD05EB6A}"/>
+              </a:ext>
+            </a:extLst>
+          </p:cNvPr>
+          <p:cNvSpPr txBox="1"/>
+          <p:nvPr/>
+        </p:nvSpPr>
+        <p:spPr>
+          <a:xfrm>
+            <a:off x="3968501" y="2692151"/>
+            <a:ext cx="689065" cy="369332"/>
+          </a:xfrm>
+          <a:prstGeom prst="rect">
+            <a:avLst/>
+          </a:prstGeom>
+          <a:noFill/>
+          <a:ln>
+            <a:noFill/>
+          </a:ln>
+        </p:spPr>
+        <p:txBody>
+          <a:bodyPr wrap="square">
+            <a:spAutoFit/>
+          </a:bodyPr>
+          <a:lstStyle/>
+          <a:p>
+            <a:r>
+              <a:rPr lang="en-US" dirty="0">
+                <a:hlinkClick r:id="rId18"/>
+              </a:rPr>
+              <a:t>THI3</a:t>
+            </a:r>
+            <a:endParaRPr lang="en-US" dirty="0"/>
+          </a:p>
+        </p:txBody>
+      </p:sp>
+      <p:pic>
+        <p:nvPicPr>
+          <p:cNvPr id="59" name="Picture 58">
+            <a:extLst>
+              <a:ext uri="{FF2B5EF4-FFF2-40B4-BE49-F238E27FC236}">
+                <a16:creationId xmlns:a16="http://schemas.microsoft.com/office/drawing/2014/main" id="{BBD8FE98-34DC-08E1-D0A4-64A89B2F2383}"/>
+              </a:ext>
+            </a:extLst>
+          </p:cNvPr>
+          <p:cNvPicPr>
+            <a:picLocks noChangeAspect="1"/>
+          </p:cNvPicPr>
+          <p:nvPr/>
+        </p:nvPicPr>
+        <p:blipFill>
+          <a:blip r:embed="rId19"/>
+          <a:stretch>
+            <a:fillRect/>
+          </a:stretch>
+        </p:blipFill>
+        <p:spPr>
+          <a:xfrm>
+            <a:off x="5434108" y="2699143"/>
+            <a:ext cx="2460017" cy="2114285"/>
+          </a:xfrm>
+          <a:prstGeom prst="rect">
+            <a:avLst/>
+          </a:prstGeom>
+          <a:ln>
+            <a:solidFill>
+              <a:schemeClr val="accent1"/>
+            </a:solidFill>
+          </a:ln>
+        </p:spPr>
+      </p:pic>
+      <p:sp>
+        <p:nvSpPr>
+          <p:cNvPr id="60" name="TextBox 59">
+            <a:extLst>
+              <a:ext uri="{FF2B5EF4-FFF2-40B4-BE49-F238E27FC236}">
+                <a16:creationId xmlns:a16="http://schemas.microsoft.com/office/drawing/2014/main" id="{3742EBDA-B6E1-320F-978E-447F499FC2D1}"/>
+              </a:ext>
+            </a:extLst>
+          </p:cNvPr>
+          <p:cNvSpPr txBox="1"/>
+          <p:nvPr/>
+        </p:nvSpPr>
+        <p:spPr>
+          <a:xfrm>
+            <a:off x="5527373" y="2709545"/>
+            <a:ext cx="894590" cy="369332"/>
+          </a:xfrm>
+          <a:prstGeom prst="rect">
+            <a:avLst/>
+          </a:prstGeom>
+          <a:noFill/>
+        </p:spPr>
+        <p:txBody>
+          <a:bodyPr wrap="square">
+            <a:spAutoFit/>
+          </a:bodyPr>
+          <a:lstStyle/>
+          <a:p>
+            <a:r>
+              <a:rPr lang="en-US" dirty="0">
+                <a:hlinkClick r:id="rId20"/>
+              </a:rPr>
+              <a:t>PDC2</a:t>
+            </a:r>
+            <a:endParaRPr lang="en-US" dirty="0"/>
+          </a:p>
+        </p:txBody>
+      </p:sp>
+      <p:sp>
+        <p:nvSpPr>
+          <p:cNvPr id="61" name="TextBox 60">
+            <a:extLst>
+              <a:ext uri="{FF2B5EF4-FFF2-40B4-BE49-F238E27FC236}">
+                <a16:creationId xmlns:a16="http://schemas.microsoft.com/office/drawing/2014/main" id="{7060448E-52D5-72D1-8F24-C803CA718873}"/>
+              </a:ext>
+            </a:extLst>
+          </p:cNvPr>
+          <p:cNvSpPr txBox="1"/>
+          <p:nvPr/>
+        </p:nvSpPr>
+        <p:spPr>
+          <a:xfrm>
+            <a:off x="7412661" y="573356"/>
+            <a:ext cx="718466" cy="369332"/>
+          </a:xfrm>
+          <a:prstGeom prst="rect">
+            <a:avLst/>
+          </a:prstGeom>
+          <a:noFill/>
+        </p:spPr>
+        <p:txBody>
+          <a:bodyPr wrap="none" rtlCol="0">
+            <a:spAutoFit/>
+          </a:bodyPr>
+          <a:lstStyle/>
+          <a:p>
+            <a:r>
+              <a:rPr lang="en-US" dirty="0"/>
+              <a:t>Gene</a:t>
+            </a:r>
+          </a:p>
+        </p:txBody>
+      </p:sp>
+      <p:sp>
+        <p:nvSpPr>
+          <p:cNvPr id="62" name="TextBox 61">
+            <a:extLst>
+              <a:ext uri="{FF2B5EF4-FFF2-40B4-BE49-F238E27FC236}">
+                <a16:creationId xmlns:a16="http://schemas.microsoft.com/office/drawing/2014/main" id="{D4DE34FA-2FC0-6731-1D69-9E01AC817A94}"/>
+              </a:ext>
+            </a:extLst>
+          </p:cNvPr>
+          <p:cNvSpPr txBox="1"/>
+          <p:nvPr/>
+        </p:nvSpPr>
+        <p:spPr>
+          <a:xfrm>
+            <a:off x="7146384" y="1126228"/>
+            <a:ext cx="1074590" cy="369332"/>
+          </a:xfrm>
+          <a:prstGeom prst="rect">
+            <a:avLst/>
+          </a:prstGeom>
+          <a:noFill/>
+        </p:spPr>
+        <p:txBody>
+          <a:bodyPr wrap="none" rtlCol="0">
+            <a:spAutoFit/>
+          </a:bodyPr>
+          <a:lstStyle/>
+          <a:p>
+            <a:r>
+              <a:rPr lang="en-US" dirty="0"/>
+              <a:t>Enzymes</a:t>
+            </a:r>
+          </a:p>
+        </p:txBody>
+      </p:sp>
+      <p:sp>
+        <p:nvSpPr>
+          <p:cNvPr id="63" name="TextBox 62">
+            <a:extLst>
+              <a:ext uri="{FF2B5EF4-FFF2-40B4-BE49-F238E27FC236}">
+                <a16:creationId xmlns:a16="http://schemas.microsoft.com/office/drawing/2014/main" id="{22C11B94-76A0-6DEB-0C81-453A9B5641E0}"/>
+              </a:ext>
+            </a:extLst>
+          </p:cNvPr>
+          <p:cNvSpPr txBox="1"/>
+          <p:nvPr/>
+        </p:nvSpPr>
+        <p:spPr>
+          <a:xfrm>
+            <a:off x="8220974" y="1113849"/>
+            <a:ext cx="707630" cy="369332"/>
+          </a:xfrm>
+          <a:prstGeom prst="rect">
+            <a:avLst/>
+          </a:prstGeom>
+          <a:noFill/>
+        </p:spPr>
+        <p:txBody>
+          <a:bodyPr wrap="none" rtlCol="0">
+            <a:spAutoFit/>
+          </a:bodyPr>
+          <a:lstStyle/>
+          <a:p>
+            <a:r>
+              <a:rPr lang="en-US" dirty="0">
+                <a:hlinkClick r:id="rId21"/>
+              </a:rPr>
+              <a:t>HST1</a:t>
+            </a:r>
+            <a:endParaRPr lang="en-US" dirty="0"/>
+          </a:p>
+        </p:txBody>
+      </p:sp>
+      <p:sp>
+        <p:nvSpPr>
+          <p:cNvPr id="67" name="TextBox 66">
+            <a:extLst>
+              <a:ext uri="{FF2B5EF4-FFF2-40B4-BE49-F238E27FC236}">
+                <a16:creationId xmlns:a16="http://schemas.microsoft.com/office/drawing/2014/main" id="{CBB22A07-1EF7-796C-1976-EC7E63331085}"/>
+              </a:ext>
+            </a:extLst>
+          </p:cNvPr>
+          <p:cNvSpPr txBox="1"/>
+          <p:nvPr/>
+        </p:nvSpPr>
+        <p:spPr>
+          <a:xfrm>
+            <a:off x="8340747" y="3558233"/>
+            <a:ext cx="968915" cy="369332"/>
+          </a:xfrm>
+          <a:prstGeom prst="rect">
+            <a:avLst/>
+          </a:prstGeom>
+          <a:noFill/>
+        </p:spPr>
+        <p:txBody>
+          <a:bodyPr wrap="square">
+            <a:spAutoFit/>
+          </a:bodyPr>
+          <a:lstStyle/>
+          <a:p>
+            <a:r>
+              <a:rPr lang="en-US" dirty="0">
+                <a:hlinkClick r:id="rId22"/>
+              </a:rPr>
+              <a:t>Sir2</a:t>
+            </a:r>
+            <a:endParaRPr lang="en-US" dirty="0"/>
+          </a:p>
+        </p:txBody>
+      </p:sp>
+    </p:spTree>
+    <p:extLst>
+      <p:ext uri="{BB962C8B-B14F-4D97-AF65-F5344CB8AC3E}">
+        <p14:creationId xmlns:p14="http://schemas.microsoft.com/office/powerpoint/2010/main" val="378105346"/>
+      </p:ext>
+    </p:extLst>
+  </p:cSld>
+  <p:clrMapOvr>
+    <a:masterClrMapping/>
+  </p:clrMapOvr>
+</p:sld>
+</file>
+
+<file path=ppt/slides/slide6.xml><?xml version="1.0" encoding="utf-8"?>
+<p:sld xmlns:a="http://schemas.openxmlformats.org/drawingml/2006/main" xmlns:r="http://schemas.openxmlformats.org/officeDocument/2006/relationships" xmlns:p="http://schemas.openxmlformats.org/presentationml/2006/main">
+  <p:cSld>
+    <p:spTree>
+      <p:nvGrpSpPr>
+        <p:cNvPr id="1" name=""/>
+        <p:cNvGrpSpPr/>
+        <p:nvPr/>
+      </p:nvGrpSpPr>
+      <p:grpSpPr>
+        <a:xfrm>
+          <a:off x="0" y="0"/>
+          <a:ext cx="0" cy="0"/>
+          <a:chOff x="0" y="0"/>
+          <a:chExt cx="0" cy="0"/>
+        </a:xfrm>
+      </p:grpSpPr>
+      <p:sp>
+        <p:nvSpPr>
+          <p:cNvPr id="2" name="Title 1">
+            <a:extLst>
+              <a:ext uri="{FF2B5EF4-FFF2-40B4-BE49-F238E27FC236}">
+                <a16:creationId xmlns:a16="http://schemas.microsoft.com/office/drawing/2014/main" id="{83C6ED07-B438-DA2A-9475-7CD2E760405C}"/>
+              </a:ext>
+            </a:extLst>
+          </p:cNvPr>
+          <p:cNvSpPr>
+            <a:spLocks noGrp="1"/>
+          </p:cNvSpPr>
+          <p:nvPr>
+            <p:ph type="title"/>
+          </p:nvPr>
+        </p:nvSpPr>
+        <p:spPr>
+          <a:xfrm>
+            <a:off x="83598" y="149682"/>
+            <a:ext cx="4124417" cy="602541"/>
+          </a:xfrm>
+        </p:spPr>
+        <p:txBody>
+          <a:bodyPr>
+            <a:normAutofit/>
+          </a:bodyPr>
+          <a:lstStyle/>
+          <a:p>
+            <a:r>
+              <a:rPr lang="es-ES" sz="2000" dirty="0"/>
+              <a:t>THz-</a:t>
+            </a:r>
+            <a:r>
+              <a:rPr lang="es-ES" sz="2000" dirty="0" err="1"/>
+              <a:t>Induced</a:t>
+            </a:r>
+            <a:r>
+              <a:rPr lang="es-ES" sz="2000" dirty="0"/>
+              <a:t> </a:t>
+            </a:r>
+            <a:r>
+              <a:rPr lang="es-ES" sz="2000" dirty="0" err="1"/>
+              <a:t>Enzyme</a:t>
+            </a:r>
+            <a:r>
+              <a:rPr lang="es-ES" sz="2000" dirty="0"/>
+              <a:t> </a:t>
+            </a:r>
+            <a:r>
+              <a:rPr lang="es-ES" sz="2000" dirty="0" err="1"/>
+              <a:t>Unfolding</a:t>
+            </a:r>
+            <a:r>
+              <a:rPr lang="es-ES" sz="2000" dirty="0"/>
+              <a:t> </a:t>
+            </a:r>
+            <a:r>
+              <a:rPr lang="es-ES" sz="2000" dirty="0" err="1"/>
+              <a:t>Model</a:t>
+            </a:r>
+            <a:endParaRPr lang="en-US" sz="2000" dirty="0"/>
+          </a:p>
+        </p:txBody>
+      </p:sp>
+      <p:sp>
+        <p:nvSpPr>
+          <p:cNvPr id="5" name="TextBox 4">
+            <a:extLst>
+              <a:ext uri="{FF2B5EF4-FFF2-40B4-BE49-F238E27FC236}">
+                <a16:creationId xmlns:a16="http://schemas.microsoft.com/office/drawing/2014/main" id="{AEB9D6A3-59F7-3469-F596-F9D7D21583FA}"/>
+              </a:ext>
+            </a:extLst>
+          </p:cNvPr>
+          <p:cNvSpPr txBox="1"/>
+          <p:nvPr/>
+        </p:nvSpPr>
+        <p:spPr>
+          <a:xfrm>
+            <a:off x="111483" y="6376036"/>
+            <a:ext cx="11743512" cy="507831"/>
+          </a:xfrm>
+          <a:prstGeom prst="rect">
+            <a:avLst/>
+          </a:prstGeom>
+          <a:noFill/>
+        </p:spPr>
+        <p:txBody>
+          <a:bodyPr wrap="square">
+            <a:spAutoFit/>
+          </a:bodyPr>
+          <a:lstStyle/>
+          <a:p>
+            <a:r>
+              <a:rPr lang="en-US" sz="900" dirty="0"/>
+              <a:t>[1] Hadeel Elayan, Andrew W. Eckford, and Raviraj S. Adve. 2023. Terahertz Induced Protein Interactions in a Random Medium. IEEE Transactions on Molecular, Biological and Multi-Scale Communications 9, 4 (Dec. 2023), 435–446. https: //doi.org/10.1109/tmbmc.2023.3327302</a:t>
+            </a:r>
+          </a:p>
+          <a:p>
+            <a:endParaRPr lang="en-US" sz="900" dirty="0"/>
+          </a:p>
+        </p:txBody>
+      </p:sp>
+      <mc:AlternateContent xmlns:mc="http://schemas.openxmlformats.org/markup-compatibility/2006">
+        <mc:Choice xmlns:a14="http://schemas.microsoft.com/office/drawing/2010/main" Requires="a14">
+          <p:sp>
+            <p:nvSpPr>
+              <p:cNvPr id="8" name="TextBox 7">
+                <a:extLst>
+                  <a:ext uri="{FF2B5EF4-FFF2-40B4-BE49-F238E27FC236}">
+                    <a16:creationId xmlns:a16="http://schemas.microsoft.com/office/drawing/2014/main" id="{F1A5A38E-152E-2D88-FF83-2BD41CDDC078}"/>
+                  </a:ext>
+                </a:extLst>
+              </p:cNvPr>
+              <p:cNvSpPr txBox="1"/>
+              <p:nvPr/>
+            </p:nvSpPr>
+            <p:spPr>
+              <a:xfrm>
+                <a:off x="366192" y="734535"/>
+                <a:ext cx="2716567" cy="806824"/>
+              </a:xfrm>
+              <a:prstGeom prst="rect">
+                <a:avLst/>
+              </a:prstGeom>
+              <a:noFill/>
+            </p:spPr>
+            <p:txBody>
+              <a:bodyPr wrap="square">
+                <a:spAutoFit/>
+              </a:bodyPr>
+              <a:lstStyle/>
+              <a:p>
+                <a:pPr/>
+                <a14:m>
+                  <m:oMathPara xmlns:m="http://schemas.openxmlformats.org/officeDocument/2006/math">
+                    <m:oMathParaPr>
+                      <m:jc m:val="centerGroup"/>
+                    </m:oMathParaPr>
+                    <m:oMath xmlns:m="http://schemas.openxmlformats.org/officeDocument/2006/math">
+                      <m:sSub>
+                        <m:sSubPr>
+                          <m:ctrlPr>
+                            <a:rPr lang="de-DE" i="1">
+                              <a:latin typeface="Cambria Math" panose="02040503050406030204" pitchFamily="18" charset="0"/>
+                            </a:rPr>
+                          </m:ctrlPr>
+                        </m:sSubPr>
+                        <m:e>
+                          <m:r>
+                            <a:rPr lang="de-DE" i="1">
+                              <a:latin typeface="Cambria Math" panose="02040503050406030204" pitchFamily="18" charset="0"/>
+                            </a:rPr>
+                            <m:t>𝑝</m:t>
+                          </m:r>
+                        </m:e>
+                        <m:sub>
+                          <m:r>
+                            <a:rPr lang="de-DE" i="1">
+                              <a:latin typeface="Cambria Math" panose="02040503050406030204" pitchFamily="18" charset="0"/>
+                            </a:rPr>
+                            <m:t>𝐹</m:t>
+                          </m:r>
+                        </m:sub>
+                      </m:sSub>
+                      <m:r>
+                        <a:rPr lang="de-DE" i="1">
+                          <a:latin typeface="Cambria Math" panose="02040503050406030204" pitchFamily="18" charset="0"/>
+                        </a:rPr>
+                        <m:t>=</m:t>
+                      </m:r>
+                      <m:f>
+                        <m:fPr>
+                          <m:ctrlPr>
+                            <a:rPr lang="en-US" i="1" dirty="0" smtClean="0">
+                              <a:latin typeface="Cambria Math" panose="02040503050406030204" pitchFamily="18" charset="0"/>
+                            </a:rPr>
+                          </m:ctrlPr>
+                        </m:fPr>
+                        <m:num>
+                          <m:r>
+                            <a:rPr lang="en-US" i="1" dirty="0" smtClean="0">
+                              <a:latin typeface="Cambria Math" panose="02040503050406030204" pitchFamily="18" charset="0"/>
+                            </a:rPr>
+                            <m:t>1</m:t>
+                          </m:r>
+                        </m:num>
+                        <m:den>
+                          <m:r>
+                            <a:rPr lang="en-US" i="1" dirty="0" smtClean="0">
+                              <a:latin typeface="Cambria Math" panose="02040503050406030204" pitchFamily="18" charset="0"/>
+                            </a:rPr>
+                            <m:t>1</m:t>
+                          </m:r>
+                          <m:r>
+                            <a:rPr lang="en-US" i="1" dirty="0" smtClean="0">
+                              <a:latin typeface="Cambria Math" panose="02040503050406030204" pitchFamily="18" charset="0"/>
+                            </a:rPr>
+                            <m:t>+</m:t>
+                          </m:r>
+                          <m:sSup>
+                            <m:sSupPr>
+                              <m:ctrlPr>
+                                <a:rPr lang="de-DE" b="0" i="1" dirty="0" smtClean="0">
+                                  <a:latin typeface="Cambria Math" panose="02040503050406030204" pitchFamily="18" charset="0"/>
+                                </a:rPr>
+                              </m:ctrlPr>
+                            </m:sSupPr>
+                            <m:e>
+                              <m:r>
+                                <a:rPr lang="de-DE" b="0" i="1" dirty="0" smtClean="0">
+                                  <a:latin typeface="Cambria Math" panose="02040503050406030204" pitchFamily="18" charset="0"/>
+                                </a:rPr>
+                                <m:t>𝑒</m:t>
+                              </m:r>
+                            </m:e>
+                            <m:sup>
+                              <m:d>
+                                <m:dPr>
+                                  <m:ctrlPr>
+                                    <a:rPr lang="en-US" b="0" i="1" dirty="0" smtClean="0">
+                                      <a:latin typeface="Cambria Math" panose="02040503050406030204" pitchFamily="18" charset="0"/>
+                                    </a:rPr>
+                                  </m:ctrlPr>
+                                </m:dPr>
+                                <m:e>
+                                  <m:f>
+                                    <m:fPr>
+                                      <m:ctrlPr>
+                                        <a:rPr lang="en-US" b="0" i="1" dirty="0" smtClean="0">
+                                          <a:latin typeface="Cambria Math" panose="02040503050406030204" pitchFamily="18" charset="0"/>
+                                        </a:rPr>
+                                      </m:ctrlPr>
+                                    </m:fPr>
+                                    <m:num>
+                                      <m:r>
+                                        <m:rPr>
+                                          <m:sty m:val="p"/>
+                                        </m:rPr>
+                                        <a:rPr lang="en-US" i="0" dirty="0" smtClean="0">
+                                          <a:latin typeface="Cambria Math" panose="02040503050406030204" pitchFamily="18" charset="0"/>
+                                        </a:rPr>
+                                        <m:t>Δ</m:t>
+                                      </m:r>
+                                      <m:r>
+                                        <a:rPr lang="en-US" i="1" dirty="0" smtClean="0">
+                                          <a:latin typeface="Cambria Math" panose="02040503050406030204" pitchFamily="18" charset="0"/>
+                                        </a:rPr>
+                                        <m:t>𝐸</m:t>
+                                      </m:r>
+                                      <m:r>
+                                        <a:rPr lang="en-US" i="1" dirty="0" smtClean="0">
+                                          <a:latin typeface="Cambria Math" panose="02040503050406030204" pitchFamily="18" charset="0"/>
+                                        </a:rPr>
+                                        <m:t>−</m:t>
+                                      </m:r>
+                                      <m:sSub>
+                                        <m:sSubPr>
+                                          <m:ctrlPr>
+                                            <a:rPr lang="en-US" i="1" dirty="0" smtClean="0">
+                                              <a:latin typeface="Cambria Math" panose="02040503050406030204" pitchFamily="18" charset="0"/>
+                                            </a:rPr>
+                                          </m:ctrlPr>
+                                        </m:sSubPr>
+                                        <m:e>
+                                          <m:d>
+                                            <m:dPr>
+                                              <m:begChr m:val="⟨"/>
+                                              <m:endChr m:val="⟩"/>
+                                              <m:ctrlPr>
+                                                <a:rPr lang="en-US" i="1" dirty="0" smtClean="0">
+                                                  <a:latin typeface="Cambria Math" panose="02040503050406030204" pitchFamily="18" charset="0"/>
+                                                </a:rPr>
+                                              </m:ctrlPr>
+                                            </m:dPr>
+                                            <m:e>
+                                              <m:sSub>
+                                                <m:sSubPr>
+                                                  <m:ctrlPr>
+                                                    <a:rPr lang="en-US" i="1" dirty="0" smtClean="0">
+                                                      <a:latin typeface="Cambria Math" panose="02040503050406030204" pitchFamily="18" charset="0"/>
+                                                    </a:rPr>
+                                                  </m:ctrlPr>
+                                                </m:sSubPr>
+                                                <m:e>
+                                                  <m:r>
+                                                    <a:rPr lang="en-US" i="1" dirty="0" smtClean="0">
+                                                      <a:latin typeface="Cambria Math" panose="02040503050406030204" pitchFamily="18" charset="0"/>
+                                                    </a:rPr>
+                                                    <m:t>𝐸</m:t>
+                                                  </m:r>
+                                                </m:e>
+                                                <m:sub>
+                                                  <m:r>
+                                                    <a:rPr lang="en-US" i="1" dirty="0" smtClean="0">
+                                                      <a:latin typeface="Cambria Math" panose="02040503050406030204" pitchFamily="18" charset="0"/>
+                                                    </a:rPr>
+                                                    <m:t>𝑡𝑜𝑡</m:t>
+                                                  </m:r>
+                                                </m:sub>
+                                              </m:sSub>
+                                            </m:e>
+                                          </m:d>
+                                        </m:e>
+                                        <m:sub>
+                                          <m:r>
+                                            <a:rPr lang="en-US" i="1" dirty="0" smtClean="0">
+                                              <a:latin typeface="Cambria Math" panose="02040503050406030204" pitchFamily="18" charset="0"/>
+                                            </a:rPr>
+                                            <m:t>𝑠𝑠</m:t>
+                                          </m:r>
+                                        </m:sub>
+                                      </m:sSub>
+                                    </m:num>
+                                    <m:den>
+                                      <m:sSub>
+                                        <m:sSubPr>
+                                          <m:ctrlPr>
+                                            <a:rPr lang="en-US" i="1" dirty="0" smtClean="0">
+                                              <a:latin typeface="Cambria Math" panose="02040503050406030204" pitchFamily="18" charset="0"/>
+                                            </a:rPr>
+                                          </m:ctrlPr>
+                                        </m:sSubPr>
+                                        <m:e>
+                                          <m:r>
+                                            <a:rPr lang="en-US" i="1" dirty="0" smtClean="0">
+                                              <a:latin typeface="Cambria Math" panose="02040503050406030204" pitchFamily="18" charset="0"/>
+                                            </a:rPr>
+                                            <m:t>𝑘</m:t>
+                                          </m:r>
+                                        </m:e>
+                                        <m:sub>
+                                          <m:r>
+                                            <a:rPr lang="en-US" i="1" dirty="0" smtClean="0">
+                                              <a:latin typeface="Cambria Math" panose="02040503050406030204" pitchFamily="18" charset="0"/>
+                                            </a:rPr>
+                                            <m:t>𝑏</m:t>
+                                          </m:r>
+                                        </m:sub>
+                                      </m:sSub>
+                                      <m:r>
+                                        <a:rPr lang="en-US" i="1" dirty="0" smtClean="0">
+                                          <a:latin typeface="Cambria Math" panose="02040503050406030204" pitchFamily="18" charset="0"/>
+                                        </a:rPr>
+                                        <m:t>𝑇</m:t>
+                                      </m:r>
+                                    </m:den>
+                                  </m:f>
+                                </m:e>
+                              </m:d>
+                            </m:sup>
+                          </m:sSup>
+                        </m:den>
+                      </m:f>
+                    </m:oMath>
+                  </m:oMathPara>
+                </a14:m>
+              </a:p>
+            </p:txBody>
+          </p:sp>
+        </mc:Choice>
+        <mc:Fallback>
+          <p:sp>
+            <p:nvSpPr>
+              <p:cNvPr id="8" name="TextBox 7">
+                <a:extLst>
+                  <a:ext uri="{FF2B5EF4-FFF2-40B4-BE49-F238E27FC236}">
+                    <a16:creationId xmlns:a16="http://schemas.microsoft.com/office/drawing/2014/main" id="{F1A5A38E-152E-2D88-FF83-2BD41CDDC078}"/>
+                  </a:ext>
+                </a:extLst>
+              </p:cNvPr>
+              <p:cNvSpPr txBox="1">
+                <a:spLocks noRot="1" noChangeAspect="1" noMove="1" noResize="1" noEditPoints="1" noAdjustHandles="1" noChangeArrowheads="1" noChangeShapeType="1" noTextEdit="1"/>
+              </p:cNvSpPr>
+              <p:nvPr/>
+            </p:nvSpPr>
+            <p:spPr>
+              <a:xfrm>
+                <a:off x="366192" y="734535"/>
+                <a:ext cx="2716567" cy="806824"/>
+              </a:xfrm>
+              <a:prstGeom prst="rect">
+                <a:avLst/>
+              </a:prstGeom>
+              <a:blipFill>
+                <a:blip r:embed="rId2"/>
+                <a:stretch>
+                  <a:fillRect/>
+                </a:stretch>
+              </a:blipFill>
+            </p:spPr>
+            <p:txBody>
+              <a:bodyPr/>
+              <a:lstStyle/>
+              <a:p>
+                <a:r>
+                  <a:rPr lang="en-US">
+                    <a:noFill/>
+                  </a:rPr>
+                  <a:t> </a:t>
+                </a:r>
+              </a:p>
+            </p:txBody>
+          </p:sp>
+        </mc:Fallback>
+      </mc:AlternateContent>
+      <mc:AlternateContent xmlns:mc="http://schemas.openxmlformats.org/markup-compatibility/2006">
+        <mc:Choice xmlns:a14="http://schemas.microsoft.com/office/drawing/2010/main" Requires="a14">
+          <p:sp>
+            <p:nvSpPr>
+              <p:cNvPr id="10" name="TextBox 9">
+                <a:extLst>
+                  <a:ext uri="{FF2B5EF4-FFF2-40B4-BE49-F238E27FC236}">
+                    <a16:creationId xmlns:a16="http://schemas.microsoft.com/office/drawing/2014/main" id="{2D8FCC9F-6F72-EA63-42AE-107091808056}"/>
+                  </a:ext>
+                </a:extLst>
+              </p:cNvPr>
+              <p:cNvSpPr txBox="1"/>
+              <p:nvPr/>
+            </p:nvSpPr>
+            <p:spPr>
+              <a:xfrm>
+                <a:off x="518522" y="1751460"/>
+                <a:ext cx="3264763" cy="391582"/>
+              </a:xfrm>
+              <a:prstGeom prst="rect">
+                <a:avLst/>
+              </a:prstGeom>
+              <a:noFill/>
+            </p:spPr>
+            <p:txBody>
+              <a:bodyPr wrap="square">
+                <a:spAutoFit/>
+              </a:bodyPr>
+              <a:lstStyle/>
+              <a:p>
+                <a:pPr/>
+                <a14:m>
+                  <m:oMath xmlns:m="http://schemas.openxmlformats.org/officeDocument/2006/math">
+                    <m:r>
+                      <m:rPr>
+                        <m:sty m:val="p"/>
+                      </m:rPr>
+                      <a:rPr lang="en-US" i="0" dirty="0" smtClean="0">
+                        <a:latin typeface="Cambria Math" panose="02040503050406030204" pitchFamily="18" charset="0"/>
+                      </a:rPr>
+                      <m:t>Δ</m:t>
+                    </m:r>
+                    <m:r>
+                      <a:rPr lang="en-US" i="1" dirty="0" smtClean="0">
+                        <a:latin typeface="Cambria Math" panose="02040503050406030204" pitchFamily="18" charset="0"/>
+                      </a:rPr>
+                      <m:t>𝐸</m:t>
+                    </m:r>
+                    <m:r>
+                      <a:rPr lang="de-DE" b="0" i="1" dirty="0" smtClean="0">
+                        <a:latin typeface="Cambria Math" panose="02040503050406030204" pitchFamily="18" charset="0"/>
+                      </a:rPr>
+                      <m:t>=</m:t>
+                    </m:r>
+                    <m:sSub>
+                      <m:sSubPr>
+                        <m:ctrlPr>
+                          <a:rPr lang="de-DE" b="0" i="1" dirty="0" smtClean="0">
+                            <a:latin typeface="Cambria Math" panose="02040503050406030204" pitchFamily="18" charset="0"/>
+                          </a:rPr>
+                        </m:ctrlPr>
+                      </m:sSubPr>
+                      <m:e>
+                        <m:r>
+                          <a:rPr lang="de-DE" b="0" i="1" dirty="0" smtClean="0">
+                            <a:latin typeface="Cambria Math" panose="02040503050406030204" pitchFamily="18" charset="0"/>
+                          </a:rPr>
+                          <m:t>𝐸</m:t>
+                        </m:r>
+                      </m:e>
+                      <m:sub>
+                        <m:r>
+                          <a:rPr lang="de-DE" b="0" i="1" dirty="0" smtClean="0">
+                            <a:latin typeface="Cambria Math" panose="02040503050406030204" pitchFamily="18" charset="0"/>
+                          </a:rPr>
+                          <m:t>𝑓</m:t>
+                        </m:r>
+                      </m:sub>
+                    </m:sSub>
+                    <m:r>
+                      <a:rPr lang="de-DE" b="0" i="1" dirty="0" smtClean="0">
+                        <a:latin typeface="Cambria Math" panose="02040503050406030204" pitchFamily="18" charset="0"/>
+                        <a:ea typeface="Cambria Math" panose="02040503050406030204" pitchFamily="18" charset="0"/>
+                      </a:rPr>
+                      <m:t>−</m:t>
+                    </m:r>
+                    <m:sSub>
+                      <m:sSubPr>
+                        <m:ctrlPr>
+                          <a:rPr lang="de-DE" i="1" dirty="0">
+                            <a:latin typeface="Cambria Math" panose="02040503050406030204" pitchFamily="18" charset="0"/>
+                          </a:rPr>
+                        </m:ctrlPr>
+                      </m:sSubPr>
+                      <m:e>
+                        <m:r>
+                          <a:rPr lang="de-DE" i="1" dirty="0">
+                            <a:latin typeface="Cambria Math" panose="02040503050406030204" pitchFamily="18" charset="0"/>
+                          </a:rPr>
+                          <m:t>𝐸</m:t>
+                        </m:r>
+                      </m:e>
+                      <m:sub>
+                        <m:r>
+                          <a:rPr lang="de-DE" b="0" i="1" dirty="0" smtClean="0">
+                            <a:latin typeface="Cambria Math" panose="02040503050406030204" pitchFamily="18" charset="0"/>
+                          </a:rPr>
+                          <m:t>𝑢</m:t>
+                        </m:r>
+                      </m:sub>
+                    </m:sSub>
+                  </m:oMath>
+                </a14:m>
+                <a:r>
+                  <a:rPr lang="en-US" dirty="0"/>
+                  <a:t> : free energy</a:t>
+                </a:r>
+                <a:r>
+                  <a:rPr lang="en-US" i="1" dirty="0"/>
+                  <a:t> </a:t>
+                </a:r>
+              </a:p>
+            </p:txBody>
+          </p:sp>
+        </mc:Choice>
+        <mc:Fallback>
+          <p:sp>
+            <p:nvSpPr>
+              <p:cNvPr id="10" name="TextBox 9">
+                <a:extLst>
+                  <a:ext uri="{FF2B5EF4-FFF2-40B4-BE49-F238E27FC236}">
+                    <a16:creationId xmlns:a16="http://schemas.microsoft.com/office/drawing/2014/main" id="{2D8FCC9F-6F72-EA63-42AE-107091808056}"/>
+                  </a:ext>
+                </a:extLst>
+              </p:cNvPr>
+              <p:cNvSpPr txBox="1">
+                <a:spLocks noRot="1" noChangeAspect="1" noMove="1" noResize="1" noEditPoints="1" noAdjustHandles="1" noChangeArrowheads="1" noChangeShapeType="1" noTextEdit="1"/>
+              </p:cNvSpPr>
+              <p:nvPr/>
+            </p:nvSpPr>
+            <p:spPr>
+              <a:xfrm>
+                <a:off x="518522" y="1751460"/>
+                <a:ext cx="3264763" cy="391582"/>
+              </a:xfrm>
+              <a:prstGeom prst="rect">
+                <a:avLst/>
+              </a:prstGeom>
+              <a:blipFill>
+                <a:blip r:embed="rId3"/>
+                <a:stretch>
+                  <a:fillRect t="-4615" b="-20000"/>
+                </a:stretch>
+              </a:blipFill>
+            </p:spPr>
+            <p:txBody>
+              <a:bodyPr/>
+              <a:lstStyle/>
+              <a:p>
+                <a:r>
+                  <a:rPr lang="en-US">
+                    <a:noFill/>
+                  </a:rPr>
+                  <a:t> </a:t>
+                </a:r>
+              </a:p>
+            </p:txBody>
+          </p:sp>
+        </mc:Fallback>
+      </mc:AlternateContent>
+      <mc:AlternateContent xmlns:mc="http://schemas.openxmlformats.org/markup-compatibility/2006">
+        <mc:Choice xmlns:a14="http://schemas.microsoft.com/office/drawing/2010/main" Requires="a14">
+          <p:sp>
+            <p:nvSpPr>
+              <p:cNvPr id="12" name="TextBox 11">
+                <a:extLst>
+                  <a:ext uri="{FF2B5EF4-FFF2-40B4-BE49-F238E27FC236}">
+                    <a16:creationId xmlns:a16="http://schemas.microsoft.com/office/drawing/2014/main" id="{7DCF8BB0-8B3B-ACD6-63F4-2F98484E9D53}"/>
+                  </a:ext>
+                </a:extLst>
+              </p:cNvPr>
+              <p:cNvSpPr txBox="1"/>
+              <p:nvPr/>
+            </p:nvSpPr>
+            <p:spPr>
+              <a:xfrm>
+                <a:off x="83598" y="2330532"/>
+                <a:ext cx="5552161" cy="531107"/>
+              </a:xfrm>
+              <a:prstGeom prst="rect">
+                <a:avLst/>
+              </a:prstGeom>
+              <a:noFill/>
+            </p:spPr>
+            <p:txBody>
+              <a:bodyPr wrap="none" lIns="0" tIns="0" rIns="0" bIns="0" rtlCol="0">
+                <a:spAutoFit/>
+              </a:bodyPr>
+              <a:lstStyle/>
+              <a:p>
+                <a14:m>
+                  <m:oMathPara xmlns:m="http://schemas.openxmlformats.org/officeDocument/2006/math">
+                    <m:oMathParaPr>
+                      <m:jc m:val="centerGroup"/>
+                    </m:oMathParaPr>
+                    <m:oMath xmlns:m="http://schemas.openxmlformats.org/officeDocument/2006/math">
+                      <m:sSub>
+                        <m:sSubPr>
+                          <m:ctrlPr>
+                            <a:rPr lang="en-US" i="1" dirty="0" smtClean="0">
+                              <a:latin typeface="Cambria Math" panose="02040503050406030204" pitchFamily="18" charset="0"/>
+                            </a:rPr>
+                          </m:ctrlPr>
+                        </m:sSubPr>
+                        <m:e>
+                          <m:d>
+                            <m:dPr>
+                              <m:begChr m:val="⟨"/>
+                              <m:endChr m:val="⟩"/>
+                              <m:ctrlPr>
+                                <a:rPr lang="en-US" i="1" dirty="0">
+                                  <a:latin typeface="Cambria Math" panose="02040503050406030204" pitchFamily="18" charset="0"/>
+                                </a:rPr>
+                              </m:ctrlPr>
+                            </m:dPr>
+                            <m:e>
+                              <m:sSub>
+                                <m:sSubPr>
+                                  <m:ctrlPr>
+                                    <a:rPr lang="en-US" i="1" dirty="0">
+                                      <a:latin typeface="Cambria Math" panose="02040503050406030204" pitchFamily="18" charset="0"/>
+                                    </a:rPr>
+                                  </m:ctrlPr>
+                                </m:sSubPr>
+                                <m:e>
+                                  <m:r>
+                                    <a:rPr lang="en-US" i="1" dirty="0">
+                                      <a:latin typeface="Cambria Math" panose="02040503050406030204" pitchFamily="18" charset="0"/>
+                                    </a:rPr>
+                                    <m:t>𝐸</m:t>
+                                  </m:r>
+                                </m:e>
+                                <m:sub>
+                                  <m:r>
+                                    <a:rPr lang="en-US" i="1" dirty="0">
+                                      <a:latin typeface="Cambria Math" panose="02040503050406030204" pitchFamily="18" charset="0"/>
+                                    </a:rPr>
+                                    <m:t>𝑡𝑜𝑡</m:t>
+                                  </m:r>
+                                </m:sub>
+                              </m:sSub>
+                            </m:e>
+                          </m:d>
+                        </m:e>
+                        <m:sub>
+                          <m:r>
+                            <a:rPr lang="en-US" i="1" dirty="0">
+                              <a:latin typeface="Cambria Math" panose="02040503050406030204" pitchFamily="18" charset="0"/>
+                            </a:rPr>
+                            <m:t>𝑠𝑠</m:t>
+                          </m:r>
+                        </m:sub>
+                      </m:sSub>
+                      <m:r>
+                        <a:rPr lang="en-US" i="1" dirty="0">
+                          <a:latin typeface="Cambria Math" panose="02040503050406030204" pitchFamily="18" charset="0"/>
+                        </a:rPr>
+                        <m:t>=</m:t>
+                      </m:r>
+                      <m:f>
+                        <m:fPr>
+                          <m:ctrlPr>
+                            <a:rPr lang="en-US" i="1" dirty="0">
+                              <a:latin typeface="Cambria Math" panose="02040503050406030204" pitchFamily="18" charset="0"/>
+                            </a:rPr>
+                          </m:ctrlPr>
+                        </m:fPr>
+                        <m:num>
+                          <m:r>
+                            <a:rPr lang="en-US" i="1" dirty="0">
+                              <a:latin typeface="Cambria Math" panose="02040503050406030204" pitchFamily="18" charset="0"/>
+                            </a:rPr>
+                            <m:t>𝛼</m:t>
+                          </m:r>
+                        </m:num>
+                        <m:den>
+                          <m:r>
+                            <a:rPr lang="en-US" i="1" dirty="0">
+                              <a:latin typeface="Cambria Math" panose="02040503050406030204" pitchFamily="18" charset="0"/>
+                            </a:rPr>
+                            <m:t>4</m:t>
+                          </m:r>
+                          <m:r>
+                            <a:rPr lang="en-US" i="1" dirty="0">
+                              <a:latin typeface="Cambria Math" panose="02040503050406030204" pitchFamily="18" charset="0"/>
+                            </a:rPr>
+                            <m:t>𝛽</m:t>
+                          </m:r>
+                          <m:r>
+                            <a:rPr lang="en-US" i="1" dirty="0">
+                              <a:latin typeface="Cambria Math" panose="02040503050406030204" pitchFamily="18" charset="0"/>
+                            </a:rPr>
+                            <m:t>𝑚</m:t>
+                          </m:r>
+                          <m:d>
+                            <m:dPr>
+                              <m:begChr m:val="["/>
+                              <m:endChr m:val="]"/>
+                              <m:ctrlPr>
+                                <a:rPr lang="en-US" i="1" dirty="0">
+                                  <a:latin typeface="Cambria Math" panose="02040503050406030204" pitchFamily="18" charset="0"/>
+                                </a:rPr>
+                              </m:ctrlPr>
+                            </m:dPr>
+                            <m:e>
+                              <m:sSup>
+                                <m:sSupPr>
+                                  <m:ctrlPr>
+                                    <a:rPr lang="en-US" i="1" dirty="0">
+                                      <a:latin typeface="Cambria Math" panose="02040503050406030204" pitchFamily="18" charset="0"/>
+                                    </a:rPr>
+                                  </m:ctrlPr>
+                                </m:sSupPr>
+                                <m:e>
+                                  <m:d>
+                                    <m:dPr>
+                                      <m:ctrlPr>
+                                        <a:rPr lang="en-US" i="1" dirty="0">
+                                          <a:latin typeface="Cambria Math" panose="02040503050406030204" pitchFamily="18" charset="0"/>
+                                        </a:rPr>
+                                      </m:ctrlPr>
+                                    </m:dPr>
+                                    <m:e>
+                                      <m:sSubSup>
+                                        <m:sSubSupPr>
+                                          <m:ctrlPr>
+                                            <a:rPr lang="en-US" i="1" dirty="0" smtClean="0">
+                                              <a:solidFill>
+                                                <a:srgbClr val="C00000"/>
+                                              </a:solidFill>
+                                              <a:latin typeface="Cambria Math" panose="02040503050406030204" pitchFamily="18" charset="0"/>
+                                            </a:rPr>
+                                          </m:ctrlPr>
+                                        </m:sSubSupPr>
+                                        <m:e>
+                                          <m:r>
+                                            <a:rPr lang="en-US" i="1" dirty="0">
+                                              <a:solidFill>
+                                                <a:srgbClr val="C00000"/>
+                                              </a:solidFill>
+                                              <a:latin typeface="Cambria Math" panose="02040503050406030204" pitchFamily="18" charset="0"/>
+                                            </a:rPr>
+                                            <m:t>𝜔</m:t>
+                                          </m:r>
+                                        </m:e>
+                                        <m:sub>
+                                          <m:r>
+                                            <a:rPr lang="en-US" i="1" dirty="0">
+                                              <a:solidFill>
+                                                <a:srgbClr val="C00000"/>
+                                              </a:solidFill>
+                                              <a:latin typeface="Cambria Math" panose="02040503050406030204" pitchFamily="18" charset="0"/>
+                                            </a:rPr>
+                                            <m:t>𝑜</m:t>
+                                          </m:r>
+                                        </m:sub>
+                                        <m:sup>
+                                          <m:r>
+                                            <a:rPr lang="en-US" i="1" dirty="0">
+                                              <a:solidFill>
+                                                <a:srgbClr val="C00000"/>
+                                              </a:solidFill>
+                                              <a:latin typeface="Cambria Math" panose="02040503050406030204" pitchFamily="18" charset="0"/>
+                                            </a:rPr>
+                                            <m:t>2</m:t>
+                                          </m:r>
+                                        </m:sup>
+                                      </m:sSubSup>
+                                      <m:r>
+                                        <a:rPr lang="en-US" i="1" dirty="0">
+                                          <a:latin typeface="Cambria Math" panose="02040503050406030204" pitchFamily="18" charset="0"/>
+                                        </a:rPr>
+                                        <m:t>−</m:t>
+                                      </m:r>
+                                      <m:sSubSup>
+                                        <m:sSubSupPr>
+                                          <m:ctrlPr>
+                                            <a:rPr lang="en-US" i="1" dirty="0">
+                                              <a:latin typeface="Cambria Math" panose="02040503050406030204" pitchFamily="18" charset="0"/>
+                                            </a:rPr>
+                                          </m:ctrlPr>
+                                        </m:sSubSupPr>
+                                        <m:e>
+                                          <m:r>
+                                            <a:rPr lang="en-US" i="1" dirty="0">
+                                              <a:latin typeface="Cambria Math" panose="02040503050406030204" pitchFamily="18" charset="0"/>
+                                            </a:rPr>
+                                            <m:t>𝜔</m:t>
+                                          </m:r>
+                                        </m:e>
+                                        <m:sub>
+                                          <m:r>
+                                            <a:rPr lang="en-US" i="1" dirty="0">
+                                              <a:latin typeface="Cambria Math" panose="02040503050406030204" pitchFamily="18" charset="0"/>
+                                            </a:rPr>
+                                            <m:t>𝑎</m:t>
+                                          </m:r>
+                                        </m:sub>
+                                        <m:sup>
+                                          <m:r>
+                                            <a:rPr lang="en-US" i="1" dirty="0">
+                                              <a:latin typeface="Cambria Math" panose="02040503050406030204" pitchFamily="18" charset="0"/>
+                                            </a:rPr>
+                                            <m:t>2</m:t>
+                                          </m:r>
+                                        </m:sup>
+                                      </m:sSubSup>
+                                    </m:e>
+                                  </m:d>
+                                </m:e>
+                                <m:sup>
+                                  <m:r>
+                                    <a:rPr lang="en-US" i="1" dirty="0">
+                                      <a:latin typeface="Cambria Math" panose="02040503050406030204" pitchFamily="18" charset="0"/>
+                                    </a:rPr>
+                                    <m:t>2</m:t>
+                                  </m:r>
+                                </m:sup>
+                              </m:sSup>
+                              <m:r>
+                                <a:rPr lang="en-US" i="1" dirty="0">
+                                  <a:latin typeface="Cambria Math" panose="02040503050406030204" pitchFamily="18" charset="0"/>
+                                </a:rPr>
+                                <m:t>+</m:t>
+                              </m:r>
+                              <m:sSup>
+                                <m:sSupPr>
+                                  <m:ctrlPr>
+                                    <a:rPr lang="en-US" i="1" dirty="0">
+                                      <a:latin typeface="Cambria Math" panose="02040503050406030204" pitchFamily="18" charset="0"/>
+                                    </a:rPr>
+                                  </m:ctrlPr>
+                                </m:sSupPr>
+                                <m:e>
+                                  <m:d>
+                                    <m:dPr>
+                                      <m:ctrlPr>
+                                        <a:rPr lang="en-US" i="1" dirty="0">
+                                          <a:latin typeface="Cambria Math" panose="02040503050406030204" pitchFamily="18" charset="0"/>
+                                        </a:rPr>
+                                      </m:ctrlPr>
+                                    </m:dPr>
+                                    <m:e>
+                                      <m:sSub>
+                                        <m:sSubPr>
+                                          <m:ctrlPr>
+                                            <a:rPr lang="en-US" i="1" dirty="0">
+                                              <a:latin typeface="Cambria Math" panose="02040503050406030204" pitchFamily="18" charset="0"/>
+                                            </a:rPr>
+                                          </m:ctrlPr>
+                                        </m:sSubPr>
+                                        <m:e>
+                                          <m:r>
+                                            <a:rPr lang="en-US" i="1" dirty="0">
+                                              <a:latin typeface="Cambria Math" panose="02040503050406030204" pitchFamily="18" charset="0"/>
+                                            </a:rPr>
+                                            <m:t>𝜔</m:t>
+                                          </m:r>
+                                        </m:e>
+                                        <m:sub>
+                                          <m:r>
+                                            <a:rPr lang="en-US" i="1" dirty="0">
+                                              <a:latin typeface="Cambria Math" panose="02040503050406030204" pitchFamily="18" charset="0"/>
+                                            </a:rPr>
+                                            <m:t>𝑎</m:t>
+                                          </m:r>
+                                        </m:sub>
+                                      </m:sSub>
+                                      <m:acc>
+                                        <m:accPr>
+                                          <m:chr m:val="̅"/>
+                                          <m:ctrlPr>
+                                            <a:rPr lang="en-US" i="1" dirty="0" smtClean="0">
+                                              <a:solidFill>
+                                                <a:srgbClr val="C00000"/>
+                                              </a:solidFill>
+                                              <a:latin typeface="Cambria Math" panose="02040503050406030204" pitchFamily="18" charset="0"/>
+                                            </a:rPr>
+                                          </m:ctrlPr>
+                                        </m:accPr>
+                                        <m:e>
+                                          <m:r>
+                                            <a:rPr lang="en-US" i="1" dirty="0">
+                                              <a:solidFill>
+                                                <a:srgbClr val="C00000"/>
+                                              </a:solidFill>
+                                              <a:latin typeface="Cambria Math" panose="02040503050406030204" pitchFamily="18" charset="0"/>
+                                            </a:rPr>
+                                            <m:t>𝛾</m:t>
+                                          </m:r>
+                                        </m:e>
+                                      </m:acc>
+                                    </m:e>
+                                  </m:d>
+                                </m:e>
+                                <m:sup>
+                                  <m:r>
+                                    <a:rPr lang="en-US" i="1" dirty="0">
+                                      <a:latin typeface="Cambria Math" panose="02040503050406030204" pitchFamily="18" charset="0"/>
+                                    </a:rPr>
+                                    <m:t>2</m:t>
+                                  </m:r>
+                                </m:sup>
+                              </m:sSup>
+                            </m:e>
+                          </m:d>
+                        </m:den>
+                      </m:f>
+                      <m:d>
+                        <m:dPr>
+                          <m:ctrlPr>
+                            <a:rPr lang="en-US" i="1" dirty="0">
+                              <a:latin typeface="Cambria Math" panose="02040503050406030204" pitchFamily="18" charset="0"/>
+                            </a:rPr>
+                          </m:ctrlPr>
+                        </m:dPr>
+                        <m:e>
+                          <m:sSubSup>
+                            <m:sSubSupPr>
+                              <m:ctrlPr>
+                                <a:rPr lang="en-US" i="1" dirty="0">
+                                  <a:latin typeface="Cambria Math" panose="02040503050406030204" pitchFamily="18" charset="0"/>
+                                </a:rPr>
+                              </m:ctrlPr>
+                            </m:sSubSupPr>
+                            <m:e>
+                              <m:r>
+                                <a:rPr lang="en-US" i="1" dirty="0">
+                                  <a:latin typeface="Cambria Math" panose="02040503050406030204" pitchFamily="18" charset="0"/>
+                                </a:rPr>
+                                <m:t>𝜔</m:t>
+                              </m:r>
+                            </m:e>
+                            <m:sub>
+                              <m:r>
+                                <a:rPr lang="en-US" i="1" dirty="0">
+                                  <a:latin typeface="Cambria Math" panose="02040503050406030204" pitchFamily="18" charset="0"/>
+                                </a:rPr>
+                                <m:t>𝑎</m:t>
+                              </m:r>
+                            </m:sub>
+                            <m:sup>
+                              <m:r>
+                                <a:rPr lang="en-US" i="1" dirty="0">
+                                  <a:latin typeface="Cambria Math" panose="02040503050406030204" pitchFamily="18" charset="0"/>
+                                </a:rPr>
+                                <m:t>2</m:t>
+                              </m:r>
+                            </m:sup>
+                          </m:sSubSup>
+                          <m:r>
+                            <a:rPr lang="en-US" i="1" dirty="0">
+                              <a:latin typeface="Cambria Math" panose="02040503050406030204" pitchFamily="18" charset="0"/>
+                            </a:rPr>
+                            <m:t>+</m:t>
+                          </m:r>
+                          <m:sSubSup>
+                            <m:sSubSupPr>
+                              <m:ctrlPr>
+                                <a:rPr lang="en-US" i="1" dirty="0" smtClean="0">
+                                  <a:solidFill>
+                                    <a:srgbClr val="C00000"/>
+                                  </a:solidFill>
+                                  <a:latin typeface="Cambria Math" panose="02040503050406030204" pitchFamily="18" charset="0"/>
+                                </a:rPr>
+                              </m:ctrlPr>
+                            </m:sSubSupPr>
+                            <m:e>
+                              <m:r>
+                                <a:rPr lang="en-US" i="1" dirty="0">
+                                  <a:solidFill>
+                                    <a:srgbClr val="C00000"/>
+                                  </a:solidFill>
+                                  <a:latin typeface="Cambria Math" panose="02040503050406030204" pitchFamily="18" charset="0"/>
+                                </a:rPr>
+                                <m:t>𝜔</m:t>
+                              </m:r>
+                            </m:e>
+                            <m:sub>
+                              <m:r>
+                                <a:rPr lang="en-US" i="1" dirty="0">
+                                  <a:solidFill>
+                                    <a:srgbClr val="C00000"/>
+                                  </a:solidFill>
+                                  <a:latin typeface="Cambria Math" panose="02040503050406030204" pitchFamily="18" charset="0"/>
+                                </a:rPr>
+                                <m:t>𝑜</m:t>
+                              </m:r>
+                            </m:sub>
+                            <m:sup>
+                              <m:r>
+                                <a:rPr lang="en-US" i="1" dirty="0">
+                                  <a:solidFill>
+                                    <a:srgbClr val="C00000"/>
+                                  </a:solidFill>
+                                  <a:latin typeface="Cambria Math" panose="02040503050406030204" pitchFamily="18" charset="0"/>
+                                </a:rPr>
+                                <m:t>2</m:t>
+                              </m:r>
+                            </m:sup>
+                          </m:sSubSup>
+                        </m:e>
+                      </m:d>
+                      <m:r>
+                        <a:rPr lang="en-US" i="1" dirty="0">
+                          <a:latin typeface="Cambria Math" panose="02040503050406030204" pitchFamily="18" charset="0"/>
+                        </a:rPr>
+                        <m:t>+</m:t>
+                      </m:r>
+                      <m:sSub>
+                        <m:sSubPr>
+                          <m:ctrlPr>
+                            <a:rPr lang="en-US" i="1" dirty="0">
+                              <a:latin typeface="Cambria Math" panose="02040503050406030204" pitchFamily="18" charset="0"/>
+                            </a:rPr>
+                          </m:ctrlPr>
+                        </m:sSubPr>
+                        <m:e>
+                          <m:r>
+                            <a:rPr lang="en-US" i="1" dirty="0">
+                              <a:latin typeface="Cambria Math" panose="02040503050406030204" pitchFamily="18" charset="0"/>
+                            </a:rPr>
+                            <m:t>𝑘</m:t>
+                          </m:r>
+                        </m:e>
+                        <m:sub>
+                          <m:r>
+                            <a:rPr lang="en-US" i="1" dirty="0">
+                              <a:latin typeface="Cambria Math" panose="02040503050406030204" pitchFamily="18" charset="0"/>
+                            </a:rPr>
+                            <m:t>𝑏</m:t>
+                          </m:r>
+                        </m:sub>
+                      </m:sSub>
+                      <m:r>
+                        <a:rPr lang="en-US" i="1" dirty="0">
+                          <a:latin typeface="Cambria Math" panose="02040503050406030204" pitchFamily="18" charset="0"/>
+                        </a:rPr>
+                        <m:t>𝑇</m:t>
+                      </m:r>
+                    </m:oMath>
+                  </m:oMathPara>
+                </a14:m>
+              </a:p>
+            </p:txBody>
+          </p:sp>
+        </mc:Choice>
+        <mc:Fallback>
+          <p:sp>
+            <p:nvSpPr>
+              <p:cNvPr id="12" name="TextBox 11">
+                <a:extLst>
+                  <a:ext uri="{FF2B5EF4-FFF2-40B4-BE49-F238E27FC236}">
+                    <a16:creationId xmlns:a16="http://schemas.microsoft.com/office/drawing/2014/main" id="{7DCF8BB0-8B3B-ACD6-63F4-2F98484E9D53}"/>
+                  </a:ext>
+                </a:extLst>
+              </p:cNvPr>
+              <p:cNvSpPr txBox="1">
+                <a:spLocks noRot="1" noChangeAspect="1" noMove="1" noResize="1" noEditPoints="1" noAdjustHandles="1" noChangeArrowheads="1" noChangeShapeType="1" noTextEdit="1"/>
+              </p:cNvSpPr>
+              <p:nvPr/>
+            </p:nvSpPr>
+            <p:spPr>
+              <a:xfrm>
+                <a:off x="83598" y="2330532"/>
+                <a:ext cx="5552161" cy="531107"/>
+              </a:xfrm>
+              <a:prstGeom prst="rect">
+                <a:avLst/>
+              </a:prstGeom>
+              <a:blipFill>
+                <a:blip r:embed="rId4"/>
+                <a:stretch>
+                  <a:fillRect b="-1149"/>
+                </a:stretch>
+              </a:blipFill>
+            </p:spPr>
+            <p:txBody>
+              <a:bodyPr/>
+              <a:lstStyle/>
+              <a:p>
+                <a:r>
+                  <a:rPr lang="en-US">
+                    <a:noFill/>
+                  </a:rPr>
+                  <a:t> </a:t>
+                </a:r>
+              </a:p>
+            </p:txBody>
+          </p:sp>
+        </mc:Fallback>
+      </mc:AlternateContent>
+      <mc:AlternateContent xmlns:mc="http://schemas.openxmlformats.org/markup-compatibility/2006">
+        <mc:Choice xmlns:a14="http://schemas.microsoft.com/office/drawing/2010/main" Requires="a14">
+          <p:sp>
+            <p:nvSpPr>
+              <p:cNvPr id="13" name="TextBox 12">
+                <a:extLst>
+                  <a:ext uri="{FF2B5EF4-FFF2-40B4-BE49-F238E27FC236}">
+                    <a16:creationId xmlns:a16="http://schemas.microsoft.com/office/drawing/2014/main" id="{1650A18F-AA7B-CC05-AC43-0821909B161A}"/>
+                  </a:ext>
+                </a:extLst>
+              </p:cNvPr>
+              <p:cNvSpPr txBox="1"/>
+              <p:nvPr/>
+            </p:nvSpPr>
+            <p:spPr>
+              <a:xfrm>
+                <a:off x="454159" y="3172361"/>
+                <a:ext cx="5098383" cy="491288"/>
+              </a:xfrm>
+              <a:prstGeom prst="rect">
+                <a:avLst/>
+              </a:prstGeom>
+              <a:noFill/>
+            </p:spPr>
+            <p:txBody>
+              <a:bodyPr wrap="none" rtlCol="0">
+                <a:spAutoFit/>
+              </a:bodyPr>
+              <a:lstStyle/>
+              <a:p>
+                <a14:m>
+                  <m:oMath xmlns:m="http://schemas.openxmlformats.org/officeDocument/2006/math">
+                    <m:sSubSup>
+                      <m:sSubSupPr>
+                        <m:ctrlPr>
+                          <a:rPr lang="en-US" i="1" dirty="0" smtClean="0">
+                            <a:solidFill>
+                              <a:schemeClr val="tx1"/>
+                            </a:solidFill>
+                            <a:latin typeface="Cambria Math" panose="02040503050406030204" pitchFamily="18" charset="0"/>
+                          </a:rPr>
+                        </m:ctrlPr>
+                      </m:sSubSupPr>
+                      <m:e>
+                        <m:r>
+                          <a:rPr lang="en-US" i="1" dirty="0">
+                            <a:solidFill>
+                              <a:schemeClr val="tx1"/>
+                            </a:solidFill>
+                            <a:latin typeface="Cambria Math" panose="02040503050406030204" pitchFamily="18" charset="0"/>
+                          </a:rPr>
+                          <m:t>𝜔</m:t>
+                        </m:r>
+                      </m:e>
+                      <m:sub>
+                        <m:r>
+                          <a:rPr lang="en-US" i="1" dirty="0">
+                            <a:solidFill>
+                              <a:schemeClr val="tx1"/>
+                            </a:solidFill>
+                            <a:latin typeface="Cambria Math" panose="02040503050406030204" pitchFamily="18" charset="0"/>
+                          </a:rPr>
+                          <m:t>𝑜</m:t>
+                        </m:r>
+                      </m:sub>
+                      <m:sup>
+                        <m:r>
+                          <a:rPr lang="en-US" i="1" dirty="0">
+                            <a:solidFill>
+                              <a:schemeClr val="tx1"/>
+                            </a:solidFill>
+                            <a:latin typeface="Cambria Math" panose="02040503050406030204" pitchFamily="18" charset="0"/>
+                          </a:rPr>
+                          <m:t>2</m:t>
+                        </m:r>
+                      </m:sup>
+                    </m:sSubSup>
+                    <m:r>
+                      <a:rPr lang="de-DE" b="0" i="1" smtClean="0">
+                        <a:latin typeface="Cambria Math" panose="02040503050406030204" pitchFamily="18" charset="0"/>
+                      </a:rPr>
+                      <m:t>=</m:t>
+                    </m:r>
+                    <m:f>
+                      <m:fPr>
+                        <m:ctrlPr>
+                          <a:rPr lang="de-DE" b="0" i="1" smtClean="0">
+                            <a:latin typeface="Cambria Math" panose="02040503050406030204" pitchFamily="18" charset="0"/>
+                          </a:rPr>
+                        </m:ctrlPr>
+                      </m:fPr>
+                      <m:num>
+                        <m:r>
+                          <a:rPr lang="de-DE" b="0" i="1" smtClean="0">
+                            <a:latin typeface="Cambria Math" panose="02040503050406030204" pitchFamily="18" charset="0"/>
+                          </a:rPr>
+                          <m:t>𝑘</m:t>
+                        </m:r>
+                      </m:num>
+                      <m:den>
+                        <m:r>
+                          <a:rPr lang="de-DE" b="0" i="1" smtClean="0">
+                            <a:latin typeface="Cambria Math" panose="02040503050406030204" pitchFamily="18" charset="0"/>
+                          </a:rPr>
+                          <m:t>𝑚</m:t>
+                        </m:r>
+                      </m:den>
+                    </m:f>
+                  </m:oMath>
+                </a14:m>
+                <a:r>
+                  <a:rPr lang="en-US" i="1" dirty="0"/>
+                  <a:t> , </a:t>
+                </a:r>
+                <a14:m>
+                  <m:oMath xmlns:m="http://schemas.openxmlformats.org/officeDocument/2006/math">
+                    <m:sSub>
+                      <m:sSubPr>
+                        <m:ctrlPr>
+                          <a:rPr lang="en-US" i="1" smtClean="0">
+                            <a:latin typeface="Cambria Math" panose="02040503050406030204" pitchFamily="18" charset="0"/>
+                          </a:rPr>
+                        </m:ctrlPr>
+                      </m:sSubPr>
+                      <m:e>
+                        <m:r>
+                          <a:rPr lang="en-US" i="1" smtClean="0">
+                            <a:latin typeface="Cambria Math" panose="02040503050406030204" pitchFamily="18" charset="0"/>
+                            <a:ea typeface="Cambria Math" panose="02040503050406030204" pitchFamily="18" charset="0"/>
+                          </a:rPr>
+                          <m:t>𝜔</m:t>
+                        </m:r>
+                      </m:e>
+                      <m:sub>
+                        <m:r>
+                          <a:rPr lang="de-DE" b="0" i="1" smtClean="0">
+                            <a:latin typeface="Cambria Math" panose="02040503050406030204" pitchFamily="18" charset="0"/>
+                          </a:rPr>
+                          <m:t>0</m:t>
+                        </m:r>
+                      </m:sub>
+                    </m:sSub>
+                  </m:oMath>
+                </a14:m>
+                <a:r>
+                  <a:rPr lang="en-US" dirty="0"/>
+                  <a:t> is the natural frequency of the protein</a:t>
+                </a:r>
+              </a:p>
+            </p:txBody>
+          </p:sp>
+        </mc:Choice>
+        <mc:Fallback>
+          <p:sp>
+            <p:nvSpPr>
+              <p:cNvPr id="13" name="TextBox 12">
+                <a:extLst>
+                  <a:ext uri="{FF2B5EF4-FFF2-40B4-BE49-F238E27FC236}">
+                    <a16:creationId xmlns:a16="http://schemas.microsoft.com/office/drawing/2014/main" id="{1650A18F-AA7B-CC05-AC43-0821909B161A}"/>
+                  </a:ext>
+                </a:extLst>
+              </p:cNvPr>
+              <p:cNvSpPr txBox="1">
+                <a:spLocks noRot="1" noChangeAspect="1" noMove="1" noResize="1" noEditPoints="1" noAdjustHandles="1" noChangeArrowheads="1" noChangeShapeType="1" noTextEdit="1"/>
+              </p:cNvSpPr>
+              <p:nvPr/>
+            </p:nvSpPr>
+            <p:spPr>
+              <a:xfrm>
+                <a:off x="454159" y="3172361"/>
+                <a:ext cx="5098383" cy="491288"/>
+              </a:xfrm>
+              <a:prstGeom prst="rect">
+                <a:avLst/>
+              </a:prstGeom>
+              <a:blipFill>
+                <a:blip r:embed="rId5"/>
+                <a:stretch>
+                  <a:fillRect r="-239" b="-8642"/>
+                </a:stretch>
+              </a:blipFill>
+            </p:spPr>
+            <p:txBody>
+              <a:bodyPr/>
+              <a:lstStyle/>
+              <a:p>
+                <a:r>
+                  <a:rPr lang="en-US">
+                    <a:noFill/>
+                  </a:rPr>
+                  <a:t> </a:t>
+                </a:r>
+              </a:p>
+            </p:txBody>
+          </p:sp>
+        </mc:Fallback>
+      </mc:AlternateContent>
+      <mc:AlternateContent xmlns:mc="http://schemas.openxmlformats.org/markup-compatibility/2006">
+        <mc:Choice xmlns:a14="http://schemas.microsoft.com/office/drawing/2010/main" Requires="a14">
+          <p:sp>
+            <p:nvSpPr>
+              <p:cNvPr id="15" name="TextBox 14">
+                <a:extLst>
+                  <a:ext uri="{FF2B5EF4-FFF2-40B4-BE49-F238E27FC236}">
+                    <a16:creationId xmlns:a16="http://schemas.microsoft.com/office/drawing/2014/main" id="{DB8140D9-A5BB-2CDD-16C8-EE8CE49E9893}"/>
+                  </a:ext>
+                </a:extLst>
+              </p:cNvPr>
+              <p:cNvSpPr txBox="1"/>
+              <p:nvPr/>
+            </p:nvSpPr>
+            <p:spPr>
+              <a:xfrm>
+                <a:off x="454159" y="3673423"/>
+                <a:ext cx="1112258" cy="681533"/>
+              </a:xfrm>
+              <a:prstGeom prst="rect">
+                <a:avLst/>
+              </a:prstGeom>
+              <a:noFill/>
+            </p:spPr>
+            <p:txBody>
+              <a:bodyPr wrap="square">
+                <a:spAutoFit/>
+              </a:bodyPr>
+              <a:lstStyle/>
+              <a:p>
+                <a:pPr/>
+                <a14:m>
+                  <m:oMathPara xmlns:m="http://schemas.openxmlformats.org/officeDocument/2006/math">
+                    <m:oMathParaPr>
+                      <m:jc m:val="centerGroup"/>
+                    </m:oMathParaPr>
+                    <m:oMath xmlns:m="http://schemas.openxmlformats.org/officeDocument/2006/math">
+                      <m:acc>
+                        <m:accPr>
+                          <m:chr m:val="̅"/>
+                          <m:ctrlPr>
+                            <a:rPr lang="en-US" i="1" dirty="0" smtClean="0">
+                              <a:solidFill>
+                                <a:schemeClr val="tx1"/>
+                              </a:solidFill>
+                              <a:latin typeface="Cambria Math" panose="02040503050406030204" pitchFamily="18" charset="0"/>
+                            </a:rPr>
+                          </m:ctrlPr>
+                        </m:accPr>
+                        <m:e>
+                          <m:r>
+                            <a:rPr lang="en-US" i="1" dirty="0">
+                              <a:solidFill>
+                                <a:schemeClr val="tx1"/>
+                              </a:solidFill>
+                              <a:latin typeface="Cambria Math" panose="02040503050406030204" pitchFamily="18" charset="0"/>
+                            </a:rPr>
+                            <m:t>𝛾</m:t>
+                          </m:r>
+                        </m:e>
+                      </m:acc>
+                      <m:r>
+                        <a:rPr lang="de-DE" b="0" i="1" dirty="0" smtClean="0">
+                          <a:latin typeface="Cambria Math" panose="02040503050406030204" pitchFamily="18" charset="0"/>
+                        </a:rPr>
+                        <m:t>=</m:t>
+                      </m:r>
+                      <m:f>
+                        <m:fPr>
+                          <m:ctrlPr>
+                            <a:rPr lang="de-DE" b="0" i="1" dirty="0" smtClean="0">
+                              <a:latin typeface="Cambria Math" panose="02040503050406030204" pitchFamily="18" charset="0"/>
+                            </a:rPr>
+                          </m:ctrlPr>
+                        </m:fPr>
+                        <m:num>
+                          <m:acc>
+                            <m:accPr>
+                              <m:chr m:val="̈"/>
+                              <m:ctrlPr>
+                                <a:rPr lang="de-DE" b="0" i="1" dirty="0" smtClean="0">
+                                  <a:solidFill>
+                                    <a:schemeClr val="tx1"/>
+                                  </a:solidFill>
+                                  <a:latin typeface="Cambria Math" panose="02040503050406030204" pitchFamily="18" charset="0"/>
+                                </a:rPr>
+                              </m:ctrlPr>
+                            </m:accPr>
+                            <m:e>
+                              <m:r>
+                                <a:rPr lang="de-DE" b="0" i="1" dirty="0" smtClean="0">
+                                  <a:solidFill>
+                                    <a:schemeClr val="tx1"/>
+                                  </a:solidFill>
+                                  <a:latin typeface="Cambria Math" panose="02040503050406030204" pitchFamily="18" charset="0"/>
+                                  <a:ea typeface="Cambria Math" panose="02040503050406030204" pitchFamily="18" charset="0"/>
+                                </a:rPr>
+                                <m:t>𝛽</m:t>
+                              </m:r>
+                            </m:e>
+                          </m:acc>
+                        </m:num>
+                        <m:den>
+                          <m:r>
+                            <a:rPr lang="de-DE" b="0" i="1" dirty="0" smtClean="0">
+                              <a:latin typeface="Cambria Math" panose="02040503050406030204" pitchFamily="18" charset="0"/>
+                            </a:rPr>
+                            <m:t>𝑚</m:t>
+                          </m:r>
+                        </m:den>
+                      </m:f>
+                    </m:oMath>
+                  </m:oMathPara>
+                </a14:m>
+                <a:endParaRPr lang="en-US" dirty="0"/>
+              </a:p>
+            </p:txBody>
+          </p:sp>
+        </mc:Choice>
+        <mc:Fallback>
+          <p:sp>
+            <p:nvSpPr>
+              <p:cNvPr id="15" name="TextBox 14">
+                <a:extLst>
+                  <a:ext uri="{FF2B5EF4-FFF2-40B4-BE49-F238E27FC236}">
+                    <a16:creationId xmlns:a16="http://schemas.microsoft.com/office/drawing/2014/main" id="{DB8140D9-A5BB-2CDD-16C8-EE8CE49E9893}"/>
+                  </a:ext>
+                </a:extLst>
+              </p:cNvPr>
+              <p:cNvSpPr txBox="1">
+                <a:spLocks noRot="1" noChangeAspect="1" noMove="1" noResize="1" noEditPoints="1" noAdjustHandles="1" noChangeArrowheads="1" noChangeShapeType="1" noTextEdit="1"/>
+              </p:cNvSpPr>
+              <p:nvPr/>
+            </p:nvSpPr>
+            <p:spPr>
+              <a:xfrm>
+                <a:off x="454159" y="3673423"/>
+                <a:ext cx="1112258" cy="681533"/>
+              </a:xfrm>
+              <a:prstGeom prst="rect">
+                <a:avLst/>
+              </a:prstGeom>
+              <a:blipFill>
+                <a:blip r:embed="rId6"/>
+                <a:stretch>
+                  <a:fillRect/>
+                </a:stretch>
+              </a:blipFill>
+            </p:spPr>
+            <p:txBody>
+              <a:bodyPr/>
+              <a:lstStyle/>
+              <a:p>
+                <a:r>
+                  <a:rPr lang="en-US">
+                    <a:noFill/>
+                  </a:rPr>
+                  <a:t> </a:t>
+                </a:r>
+              </a:p>
+            </p:txBody>
+          </p:sp>
+        </mc:Fallback>
+      </mc:AlternateContent>
+      <mc:AlternateContent xmlns:mc="http://schemas.openxmlformats.org/markup-compatibility/2006">
+        <mc:Choice xmlns:a14="http://schemas.microsoft.com/office/drawing/2010/main" Requires="a14">
+          <p:sp>
+            <p:nvSpPr>
+              <p:cNvPr id="17" name="TextBox 16">
+                <a:extLst>
+                  <a:ext uri="{FF2B5EF4-FFF2-40B4-BE49-F238E27FC236}">
+                    <a16:creationId xmlns:a16="http://schemas.microsoft.com/office/drawing/2014/main" id="{5F87FEDF-92AA-8B90-0A98-D4BECAEB1333}"/>
+                  </a:ext>
+                </a:extLst>
+              </p:cNvPr>
+              <p:cNvSpPr txBox="1"/>
+              <p:nvPr/>
+            </p:nvSpPr>
+            <p:spPr>
+              <a:xfrm>
+                <a:off x="560370" y="4397154"/>
+                <a:ext cx="3870985" cy="385427"/>
+              </a:xfrm>
+              <a:prstGeom prst="rect">
+                <a:avLst/>
+              </a:prstGeom>
+              <a:noFill/>
+            </p:spPr>
+            <p:txBody>
+              <a:bodyPr wrap="square">
+                <a:spAutoFit/>
+              </a:bodyPr>
+              <a:lstStyle/>
+              <a:p>
+                <a:pPr/>
+                <a14:m>
+                  <m:oMath xmlns:m="http://schemas.openxmlformats.org/officeDocument/2006/math">
+                    <m:acc>
+                      <m:accPr>
+                        <m:chr m:val="̈"/>
+                        <m:ctrlPr>
+                          <a:rPr lang="de-DE" b="0" i="1" dirty="0" smtClean="0">
+                            <a:solidFill>
+                              <a:srgbClr val="C00000"/>
+                            </a:solidFill>
+                            <a:latin typeface="Cambria Math" panose="02040503050406030204" pitchFamily="18" charset="0"/>
+                          </a:rPr>
+                        </m:ctrlPr>
+                      </m:accPr>
+                      <m:e>
+                        <m:r>
+                          <a:rPr lang="de-DE" b="0" i="1" dirty="0" smtClean="0">
+                            <a:solidFill>
+                              <a:srgbClr val="C00000"/>
+                            </a:solidFill>
+                            <a:latin typeface="Cambria Math" panose="02040503050406030204" pitchFamily="18" charset="0"/>
+                            <a:ea typeface="Cambria Math" panose="02040503050406030204" pitchFamily="18" charset="0"/>
+                          </a:rPr>
+                          <m:t>𝛽</m:t>
+                        </m:r>
+                      </m:e>
+                    </m:acc>
+                  </m:oMath>
+                </a14:m>
+                <a:r>
+                  <a:rPr lang="en-US" dirty="0"/>
+                  <a:t>: Damping coefficient of the protein</a:t>
+                </a:r>
+              </a:p>
+            </p:txBody>
+          </p:sp>
+        </mc:Choice>
+        <mc:Fallback>
+          <p:sp>
+            <p:nvSpPr>
+              <p:cNvPr id="17" name="TextBox 16">
+                <a:extLst>
+                  <a:ext uri="{FF2B5EF4-FFF2-40B4-BE49-F238E27FC236}">
+                    <a16:creationId xmlns:a16="http://schemas.microsoft.com/office/drawing/2014/main" id="{5F87FEDF-92AA-8B90-0A98-D4BECAEB1333}"/>
+                  </a:ext>
+                </a:extLst>
+              </p:cNvPr>
+              <p:cNvSpPr txBox="1">
+                <a:spLocks noRot="1" noChangeAspect="1" noMove="1" noResize="1" noEditPoints="1" noAdjustHandles="1" noChangeArrowheads="1" noChangeShapeType="1" noTextEdit="1"/>
+              </p:cNvSpPr>
+              <p:nvPr/>
+            </p:nvSpPr>
+            <p:spPr>
+              <a:xfrm>
+                <a:off x="560370" y="4397154"/>
+                <a:ext cx="3870985" cy="385427"/>
+              </a:xfrm>
+              <a:prstGeom prst="rect">
+                <a:avLst/>
+              </a:prstGeom>
+              <a:blipFill>
+                <a:blip r:embed="rId7"/>
+                <a:stretch>
+                  <a:fillRect l="-472" t="-1563" b="-25000"/>
+                </a:stretch>
+              </a:blipFill>
+            </p:spPr>
+            <p:txBody>
+              <a:bodyPr/>
+              <a:lstStyle/>
+              <a:p>
+                <a:r>
+                  <a:rPr lang="en-US">
+                    <a:noFill/>
+                  </a:rPr>
+                  <a:t> </a:t>
+                </a:r>
+              </a:p>
+            </p:txBody>
+          </p:sp>
+        </mc:Fallback>
+      </mc:AlternateContent>
+      <mc:AlternateContent xmlns:mc="http://schemas.openxmlformats.org/markup-compatibility/2006">
+        <mc:Choice xmlns:a14="http://schemas.microsoft.com/office/drawing/2010/main" Requires="a14">
+          <p:sp>
+            <p:nvSpPr>
+              <p:cNvPr id="19" name="TextBox 18">
+                <a:extLst>
+                  <a:ext uri="{FF2B5EF4-FFF2-40B4-BE49-F238E27FC236}">
+                    <a16:creationId xmlns:a16="http://schemas.microsoft.com/office/drawing/2014/main" id="{F94F89C1-9FCA-84B5-953A-9404443B3B8F}"/>
+                  </a:ext>
+                </a:extLst>
+              </p:cNvPr>
+              <p:cNvSpPr txBox="1"/>
+              <p:nvPr/>
+            </p:nvSpPr>
+            <p:spPr>
+              <a:xfrm>
+                <a:off x="558472" y="4947309"/>
+                <a:ext cx="2647384" cy="369332"/>
+              </a:xfrm>
+              <a:prstGeom prst="rect">
+                <a:avLst/>
+              </a:prstGeom>
+              <a:noFill/>
+            </p:spPr>
+            <p:txBody>
+              <a:bodyPr wrap="square">
+                <a:spAutoFit/>
+              </a:bodyPr>
+              <a:lstStyle/>
+              <a:p>
+                <a:pPr/>
+                <a14:m>
+                  <m:oMath xmlns:m="http://schemas.openxmlformats.org/officeDocument/2006/math">
+                    <m:r>
+                      <a:rPr lang="de-DE" b="0" i="1" smtClean="0">
+                        <a:solidFill>
+                          <a:srgbClr val="C00000"/>
+                        </a:solidFill>
+                        <a:latin typeface="Cambria Math" panose="02040503050406030204" pitchFamily="18" charset="0"/>
+                      </a:rPr>
+                      <m:t>𝑚</m:t>
+                    </m:r>
+                  </m:oMath>
+                </a14:m>
+                <a:r>
+                  <a:rPr lang="en-US" dirty="0">
+                    <a:solidFill>
+                      <a:srgbClr val="C00000"/>
+                    </a:solidFill>
+                  </a:rPr>
+                  <a:t>: </a:t>
+                </a:r>
+                <a:r>
+                  <a:rPr lang="en-US" dirty="0"/>
+                  <a:t>Protein mass</a:t>
+                </a:r>
+              </a:p>
+            </p:txBody>
+          </p:sp>
+        </mc:Choice>
+        <mc:Fallback>
+          <p:sp>
+            <p:nvSpPr>
+              <p:cNvPr id="19" name="TextBox 18">
+                <a:extLst>
+                  <a:ext uri="{FF2B5EF4-FFF2-40B4-BE49-F238E27FC236}">
+                    <a16:creationId xmlns:a16="http://schemas.microsoft.com/office/drawing/2014/main" id="{F94F89C1-9FCA-84B5-953A-9404443B3B8F}"/>
+                  </a:ext>
+                </a:extLst>
+              </p:cNvPr>
+              <p:cNvSpPr txBox="1">
+                <a:spLocks noRot="1" noChangeAspect="1" noMove="1" noResize="1" noEditPoints="1" noAdjustHandles="1" noChangeArrowheads="1" noChangeShapeType="1" noTextEdit="1"/>
+              </p:cNvSpPr>
+              <p:nvPr/>
+            </p:nvSpPr>
+            <p:spPr>
+              <a:xfrm>
+                <a:off x="558472" y="4947309"/>
+                <a:ext cx="2647384" cy="369332"/>
+              </a:xfrm>
+              <a:prstGeom prst="rect">
+                <a:avLst/>
+              </a:prstGeom>
+              <a:blipFill>
+                <a:blip r:embed="rId8"/>
+                <a:stretch>
+                  <a:fillRect t="-8333" b="-28333"/>
+                </a:stretch>
+              </a:blipFill>
+            </p:spPr>
+            <p:txBody>
+              <a:bodyPr/>
+              <a:lstStyle/>
+              <a:p>
+                <a:r>
+                  <a:rPr lang="en-US">
+                    <a:noFill/>
+                  </a:rPr>
+                  <a:t> </a:t>
+                </a:r>
+              </a:p>
+            </p:txBody>
+          </p:sp>
+        </mc:Fallback>
+      </mc:AlternateContent>
+      <mc:AlternateContent xmlns:mc="http://schemas.openxmlformats.org/markup-compatibility/2006">
+        <mc:Choice xmlns:a14="http://schemas.microsoft.com/office/drawing/2010/main" Requires="a14">
+          <p:sp>
+            <p:nvSpPr>
+              <p:cNvPr id="20" name="TextBox 19">
+                <a:extLst>
+                  <a:ext uri="{FF2B5EF4-FFF2-40B4-BE49-F238E27FC236}">
+                    <a16:creationId xmlns:a16="http://schemas.microsoft.com/office/drawing/2014/main" id="{431E805A-C64D-599C-F4C7-E2F65E153468}"/>
+                  </a:ext>
+                </a:extLst>
+              </p:cNvPr>
+              <p:cNvSpPr txBox="1"/>
+              <p:nvPr/>
+            </p:nvSpPr>
+            <p:spPr>
+              <a:xfrm>
+                <a:off x="567189" y="5442786"/>
+                <a:ext cx="3216096" cy="369332"/>
+              </a:xfrm>
+              <a:prstGeom prst="rect">
+                <a:avLst/>
+              </a:prstGeom>
+              <a:noFill/>
+            </p:spPr>
+            <p:txBody>
+              <a:bodyPr wrap="square">
+                <a:spAutoFit/>
+              </a:bodyPr>
+              <a:lstStyle/>
+              <a:p>
+                <a:pPr/>
+                <a14:m>
+                  <m:oMath xmlns:m="http://schemas.openxmlformats.org/officeDocument/2006/math">
+                    <m:r>
+                      <a:rPr lang="de-DE" b="0" i="1" smtClean="0">
+                        <a:solidFill>
+                          <a:srgbClr val="C00000"/>
+                        </a:solidFill>
+                        <a:latin typeface="Cambria Math" panose="02040503050406030204" pitchFamily="18" charset="0"/>
+                      </a:rPr>
+                      <m:t>𝑘</m:t>
+                    </m:r>
+                  </m:oMath>
+                </a14:m>
+                <a:r>
+                  <a:rPr lang="en-US" dirty="0">
+                    <a:solidFill>
+                      <a:srgbClr val="C00000"/>
+                    </a:solidFill>
+                  </a:rPr>
+                  <a:t>:</a:t>
+                </a:r>
+                <a:r>
+                  <a:rPr lang="en-US" dirty="0"/>
+                  <a:t> Protein spring constant</a:t>
+                </a:r>
+              </a:p>
+            </p:txBody>
+          </p:sp>
+        </mc:Choice>
+        <mc:Fallback>
+          <p:sp>
+            <p:nvSpPr>
+              <p:cNvPr id="20" name="TextBox 19">
+                <a:extLst>
+                  <a:ext uri="{FF2B5EF4-FFF2-40B4-BE49-F238E27FC236}">
+                    <a16:creationId xmlns:a16="http://schemas.microsoft.com/office/drawing/2014/main" id="{431E805A-C64D-599C-F4C7-E2F65E153468}"/>
+                  </a:ext>
+                </a:extLst>
+              </p:cNvPr>
+              <p:cNvSpPr txBox="1">
+                <a:spLocks noRot="1" noChangeAspect="1" noMove="1" noResize="1" noEditPoints="1" noAdjustHandles="1" noChangeArrowheads="1" noChangeShapeType="1" noTextEdit="1"/>
+              </p:cNvSpPr>
+              <p:nvPr/>
+            </p:nvSpPr>
+            <p:spPr>
+              <a:xfrm>
+                <a:off x="567189" y="5442786"/>
+                <a:ext cx="3216096" cy="369332"/>
+              </a:xfrm>
+              <a:prstGeom prst="rect">
+                <a:avLst/>
+              </a:prstGeom>
+              <a:blipFill>
+                <a:blip r:embed="rId9"/>
+                <a:stretch>
+                  <a:fillRect t="-8333" b="-28333"/>
+                </a:stretch>
+              </a:blipFill>
+            </p:spPr>
+            <p:txBody>
+              <a:bodyPr/>
+              <a:lstStyle/>
+              <a:p>
+                <a:r>
+                  <a:rPr lang="en-US">
+                    <a:noFill/>
+                  </a:rPr>
+                  <a:t> </a:t>
+                </a:r>
+              </a:p>
+            </p:txBody>
+          </p:sp>
+        </mc:Fallback>
+      </mc:AlternateContent>
+      <mc:AlternateContent xmlns:mc="http://schemas.openxmlformats.org/markup-compatibility/2006">
+        <mc:Choice xmlns:a14="http://schemas.microsoft.com/office/drawing/2010/main" Requires="a14">
+          <p:sp>
+            <p:nvSpPr>
+              <p:cNvPr id="22" name="TextBox 21">
+                <a:extLst>
+                  <a:ext uri="{FF2B5EF4-FFF2-40B4-BE49-F238E27FC236}">
+                    <a16:creationId xmlns:a16="http://schemas.microsoft.com/office/drawing/2014/main" id="{5B514ED2-1CD7-E15E-1BB0-9225DFE8855E}"/>
+                  </a:ext>
+                </a:extLst>
+              </p:cNvPr>
+              <p:cNvSpPr txBox="1"/>
+              <p:nvPr/>
+            </p:nvSpPr>
+            <p:spPr>
+              <a:xfrm>
+                <a:off x="481533" y="5812118"/>
+                <a:ext cx="4507958" cy="369332"/>
+              </a:xfrm>
+              <a:prstGeom prst="rect">
+                <a:avLst/>
+              </a:prstGeom>
+              <a:noFill/>
+            </p:spPr>
+            <p:txBody>
+              <a:bodyPr wrap="square">
+                <a:spAutoFit/>
+              </a:bodyPr>
+              <a:lstStyle/>
+              <a:p>
+                <a14:m>
+                  <m:oMath xmlns:m="http://schemas.openxmlformats.org/officeDocument/2006/math">
+                    <m:sSub>
+                      <m:sSubPr>
+                        <m:ctrlPr>
+                          <a:rPr lang="en-US" i="1" smtClean="0">
+                            <a:latin typeface="Cambria Math" panose="02040503050406030204" pitchFamily="18" charset="0"/>
+                          </a:rPr>
+                        </m:ctrlPr>
+                      </m:sSubPr>
+                      <m:e>
+                        <m:r>
+                          <a:rPr lang="en-US" i="1" smtClean="0">
+                            <a:latin typeface="Cambria Math" panose="02040503050406030204" pitchFamily="18" charset="0"/>
+                            <a:ea typeface="Cambria Math" panose="02040503050406030204" pitchFamily="18" charset="0"/>
+                          </a:rPr>
+                          <m:t>𝜔</m:t>
+                        </m:r>
+                      </m:e>
+                      <m:sub>
+                        <m:r>
+                          <a:rPr lang="de-DE" b="0" i="1" smtClean="0">
+                            <a:latin typeface="Cambria Math" panose="02040503050406030204" pitchFamily="18" charset="0"/>
+                          </a:rPr>
+                          <m:t>𝑎</m:t>
+                        </m:r>
+                      </m:sub>
+                    </m:sSub>
+                  </m:oMath>
+                </a14:m>
+                <a:r>
+                  <a:rPr lang="en-US" dirty="0"/>
+                  <a:t>: Antenna radiation angular frequency </a:t>
+                </a:r>
+              </a:p>
+            </p:txBody>
+          </p:sp>
+        </mc:Choice>
+        <mc:Fallback>
+          <p:sp>
+            <p:nvSpPr>
+              <p:cNvPr id="22" name="TextBox 21">
+                <a:extLst>
+                  <a:ext uri="{FF2B5EF4-FFF2-40B4-BE49-F238E27FC236}">
+                    <a16:creationId xmlns:a16="http://schemas.microsoft.com/office/drawing/2014/main" id="{5B514ED2-1CD7-E15E-1BB0-9225DFE8855E}"/>
+                  </a:ext>
+                </a:extLst>
+              </p:cNvPr>
+              <p:cNvSpPr txBox="1">
+                <a:spLocks noRot="1" noChangeAspect="1" noMove="1" noResize="1" noEditPoints="1" noAdjustHandles="1" noChangeArrowheads="1" noChangeShapeType="1" noTextEdit="1"/>
+              </p:cNvSpPr>
+              <p:nvPr/>
+            </p:nvSpPr>
+            <p:spPr>
+              <a:xfrm>
+                <a:off x="481533" y="5812118"/>
+                <a:ext cx="4507958" cy="369332"/>
+              </a:xfrm>
+              <a:prstGeom prst="rect">
+                <a:avLst/>
+              </a:prstGeom>
+              <a:blipFill>
+                <a:blip r:embed="rId10"/>
+                <a:stretch>
+                  <a:fillRect t="-6557" b="-26230"/>
+                </a:stretch>
+              </a:blipFill>
+            </p:spPr>
+            <p:txBody>
+              <a:bodyPr/>
+              <a:lstStyle/>
+              <a:p>
+                <a:r>
+                  <a:rPr lang="en-US">
+                    <a:noFill/>
+                  </a:rPr>
+                  <a:t> </a:t>
+                </a:r>
+              </a:p>
+            </p:txBody>
+          </p:sp>
+        </mc:Fallback>
+      </mc:AlternateContent>
+      <p:sp>
+        <p:nvSpPr>
+          <p:cNvPr id="23" name="TextBox 22">
+            <a:extLst>
+              <a:ext uri="{FF2B5EF4-FFF2-40B4-BE49-F238E27FC236}">
+                <a16:creationId xmlns:a16="http://schemas.microsoft.com/office/drawing/2014/main" id="{BF064904-313D-4876-FF49-2B7188FBDA4F}"/>
+              </a:ext>
+            </a:extLst>
+          </p:cNvPr>
+          <p:cNvSpPr txBox="1"/>
+          <p:nvPr/>
+        </p:nvSpPr>
+        <p:spPr>
+          <a:xfrm>
+            <a:off x="3065421" y="850337"/>
+            <a:ext cx="415498" cy="338554"/>
+          </a:xfrm>
+          <a:prstGeom prst="rect">
+            <a:avLst/>
+          </a:prstGeom>
+          <a:noFill/>
+        </p:spPr>
+        <p:txBody>
+          <a:bodyPr wrap="none" rtlCol="0">
+            <a:spAutoFit/>
+          </a:bodyPr>
+          <a:lstStyle/>
+          <a:p>
+            <a:r>
+              <a:rPr lang="en-US" sz="1600" dirty="0"/>
+              <a:t>(1)</a:t>
+            </a:r>
+          </a:p>
+        </p:txBody>
+      </p:sp>
+      <p:sp>
+        <p:nvSpPr>
+          <p:cNvPr id="24" name="TextBox 23">
+            <a:extLst>
+              <a:ext uri="{FF2B5EF4-FFF2-40B4-BE49-F238E27FC236}">
+                <a16:creationId xmlns:a16="http://schemas.microsoft.com/office/drawing/2014/main" id="{CA76E999-D418-5C4C-0604-7C20145C94A1}"/>
+              </a:ext>
+            </a:extLst>
+          </p:cNvPr>
+          <p:cNvSpPr txBox="1"/>
+          <p:nvPr/>
+        </p:nvSpPr>
+        <p:spPr>
+          <a:xfrm>
+            <a:off x="5775490" y="2442196"/>
+            <a:ext cx="415498" cy="338554"/>
+          </a:xfrm>
+          <a:prstGeom prst="rect">
+            <a:avLst/>
+          </a:prstGeom>
+          <a:noFill/>
+        </p:spPr>
+        <p:txBody>
+          <a:bodyPr wrap="none" rtlCol="0">
+            <a:spAutoFit/>
+          </a:bodyPr>
+          <a:lstStyle/>
+          <a:p>
+            <a:r>
+              <a:rPr lang="en-US" sz="1600" dirty="0"/>
+              <a:t>(3)</a:t>
+            </a:r>
+          </a:p>
+        </p:txBody>
+      </p:sp>
+      <p:sp>
+        <p:nvSpPr>
+          <p:cNvPr id="25" name="TextBox 24">
+            <a:extLst>
+              <a:ext uri="{FF2B5EF4-FFF2-40B4-BE49-F238E27FC236}">
+                <a16:creationId xmlns:a16="http://schemas.microsoft.com/office/drawing/2014/main" id="{9986BB83-1865-C31D-4307-87CA6E106E24}"/>
+              </a:ext>
+            </a:extLst>
+          </p:cNvPr>
+          <p:cNvSpPr txBox="1"/>
+          <p:nvPr/>
+        </p:nvSpPr>
+        <p:spPr>
+          <a:xfrm>
+            <a:off x="5582168" y="3221647"/>
+            <a:ext cx="415498" cy="338554"/>
+          </a:xfrm>
+          <a:prstGeom prst="rect">
+            <a:avLst/>
+          </a:prstGeom>
+          <a:noFill/>
+        </p:spPr>
+        <p:txBody>
+          <a:bodyPr wrap="none" rtlCol="0">
+            <a:spAutoFit/>
+          </a:bodyPr>
+          <a:lstStyle/>
+          <a:p>
+            <a:r>
+              <a:rPr lang="en-US" sz="1600" dirty="0"/>
+              <a:t>(4)</a:t>
+            </a:r>
+          </a:p>
+        </p:txBody>
+      </p:sp>
+      <p:sp>
+        <p:nvSpPr>
+          <p:cNvPr id="26" name="TextBox 25">
+            <a:extLst>
+              <a:ext uri="{FF2B5EF4-FFF2-40B4-BE49-F238E27FC236}">
+                <a16:creationId xmlns:a16="http://schemas.microsoft.com/office/drawing/2014/main" id="{64763AD4-BAAE-9453-6AFB-A1A7F9DBD2EA}"/>
+              </a:ext>
+            </a:extLst>
+          </p:cNvPr>
+          <p:cNvSpPr txBox="1"/>
+          <p:nvPr/>
+        </p:nvSpPr>
+        <p:spPr>
+          <a:xfrm>
+            <a:off x="3396641" y="1692652"/>
+            <a:ext cx="415498" cy="338554"/>
+          </a:xfrm>
+          <a:prstGeom prst="rect">
+            <a:avLst/>
+          </a:prstGeom>
+          <a:noFill/>
+        </p:spPr>
+        <p:txBody>
+          <a:bodyPr wrap="none" rtlCol="0">
+            <a:spAutoFit/>
+          </a:bodyPr>
+          <a:lstStyle/>
+          <a:p>
+            <a:r>
+              <a:rPr lang="en-US" sz="1600" dirty="0"/>
+              <a:t>(2)</a:t>
+            </a:r>
+          </a:p>
+        </p:txBody>
+      </p:sp>
+      <p:sp>
+        <p:nvSpPr>
+          <p:cNvPr id="27" name="TextBox 26">
+            <a:extLst>
+              <a:ext uri="{FF2B5EF4-FFF2-40B4-BE49-F238E27FC236}">
+                <a16:creationId xmlns:a16="http://schemas.microsoft.com/office/drawing/2014/main" id="{11B4445D-060C-5310-A139-74A343F8E18E}"/>
+              </a:ext>
+            </a:extLst>
+          </p:cNvPr>
+          <p:cNvSpPr txBox="1"/>
+          <p:nvPr/>
+        </p:nvSpPr>
+        <p:spPr>
+          <a:xfrm>
+            <a:off x="1566417" y="3872308"/>
+            <a:ext cx="415498" cy="338554"/>
+          </a:xfrm>
+          <a:prstGeom prst="rect">
+            <a:avLst/>
+          </a:prstGeom>
+          <a:noFill/>
+        </p:spPr>
+        <p:txBody>
+          <a:bodyPr wrap="none" rtlCol="0">
+            <a:spAutoFit/>
+          </a:bodyPr>
+          <a:lstStyle/>
+          <a:p>
+            <a:r>
+              <a:rPr lang="en-US" sz="1600" dirty="0"/>
+              <a:t>(5)</a:t>
+            </a:r>
+          </a:p>
+        </p:txBody>
+      </p:sp>
+      <p:sp>
+        <p:nvSpPr>
+          <p:cNvPr id="28" name="TextBox 27">
+            <a:extLst>
+              <a:ext uri="{FF2B5EF4-FFF2-40B4-BE49-F238E27FC236}">
+                <a16:creationId xmlns:a16="http://schemas.microsoft.com/office/drawing/2014/main" id="{FC0A81EA-525C-CDAC-4316-AB6600D4982E}"/>
+              </a:ext>
+            </a:extLst>
+          </p:cNvPr>
+          <p:cNvSpPr txBox="1"/>
+          <p:nvPr/>
+        </p:nvSpPr>
+        <p:spPr>
+          <a:xfrm>
+            <a:off x="2320014" y="4939504"/>
+            <a:ext cx="415498" cy="338554"/>
+          </a:xfrm>
+          <a:prstGeom prst="rect">
+            <a:avLst/>
+          </a:prstGeom>
+          <a:noFill/>
+        </p:spPr>
+        <p:txBody>
+          <a:bodyPr wrap="none" rtlCol="0">
+            <a:spAutoFit/>
+          </a:bodyPr>
+          <a:lstStyle/>
+          <a:p>
+            <a:r>
+              <a:rPr lang="en-US" sz="1600" dirty="0"/>
+              <a:t>(7)</a:t>
+            </a:r>
+          </a:p>
+        </p:txBody>
+      </p:sp>
+      <p:sp>
+        <p:nvSpPr>
+          <p:cNvPr id="29" name="TextBox 28">
+            <a:extLst>
+              <a:ext uri="{FF2B5EF4-FFF2-40B4-BE49-F238E27FC236}">
+                <a16:creationId xmlns:a16="http://schemas.microsoft.com/office/drawing/2014/main" id="{B3F51B2F-2D3C-0908-2732-66CC3C47C5CA}"/>
+              </a:ext>
+            </a:extLst>
+          </p:cNvPr>
+          <p:cNvSpPr txBox="1"/>
+          <p:nvPr/>
+        </p:nvSpPr>
+        <p:spPr>
+          <a:xfrm>
+            <a:off x="3273170" y="5442786"/>
+            <a:ext cx="415498" cy="338554"/>
+          </a:xfrm>
+          <a:prstGeom prst="rect">
+            <a:avLst/>
+          </a:prstGeom>
+          <a:noFill/>
+        </p:spPr>
+        <p:txBody>
+          <a:bodyPr wrap="none" rtlCol="0">
+            <a:spAutoFit/>
+          </a:bodyPr>
+          <a:lstStyle/>
+          <a:p>
+            <a:r>
+              <a:rPr lang="en-US" sz="1600" dirty="0"/>
+              <a:t>(8)</a:t>
+            </a:r>
+          </a:p>
+        </p:txBody>
+      </p:sp>
+      <p:sp>
+        <p:nvSpPr>
+          <p:cNvPr id="30" name="TextBox 29">
+            <a:extLst>
+              <a:ext uri="{FF2B5EF4-FFF2-40B4-BE49-F238E27FC236}">
+                <a16:creationId xmlns:a16="http://schemas.microsoft.com/office/drawing/2014/main" id="{F27FA41C-D511-593F-6DFA-391B4101C9E5}"/>
+              </a:ext>
+            </a:extLst>
+          </p:cNvPr>
+          <p:cNvSpPr txBox="1"/>
+          <p:nvPr/>
+        </p:nvSpPr>
+        <p:spPr>
+          <a:xfrm>
+            <a:off x="4431355" y="4420590"/>
+            <a:ext cx="415498" cy="338554"/>
+          </a:xfrm>
+          <a:prstGeom prst="rect">
+            <a:avLst/>
+          </a:prstGeom>
+          <a:noFill/>
+        </p:spPr>
+        <p:txBody>
+          <a:bodyPr wrap="none" rtlCol="0">
+            <a:spAutoFit/>
+          </a:bodyPr>
+          <a:lstStyle/>
+          <a:p>
+            <a:r>
+              <a:rPr lang="en-US" sz="1600" dirty="0"/>
+              <a:t>(6)</a:t>
+            </a:r>
+          </a:p>
+        </p:txBody>
+      </p:sp>
+      <p:sp>
+        <p:nvSpPr>
+          <p:cNvPr id="31" name="TextBox 30">
+            <a:extLst>
+              <a:ext uri="{FF2B5EF4-FFF2-40B4-BE49-F238E27FC236}">
+                <a16:creationId xmlns:a16="http://schemas.microsoft.com/office/drawing/2014/main" id="{9FEBE6D2-9003-73BC-31AF-F94FF69D9C7F}"/>
+              </a:ext>
+            </a:extLst>
+          </p:cNvPr>
+          <p:cNvSpPr txBox="1"/>
+          <p:nvPr/>
+        </p:nvSpPr>
+        <p:spPr>
+          <a:xfrm>
+            <a:off x="4659649" y="5827507"/>
+            <a:ext cx="415498" cy="338554"/>
+          </a:xfrm>
+          <a:prstGeom prst="rect">
+            <a:avLst/>
+          </a:prstGeom>
+          <a:noFill/>
+        </p:spPr>
+        <p:txBody>
+          <a:bodyPr wrap="none" rtlCol="0">
+            <a:spAutoFit/>
+          </a:bodyPr>
+          <a:lstStyle/>
+          <a:p>
+            <a:r>
+              <a:rPr lang="en-US" sz="1600" dirty="0"/>
+              <a:t>(9)</a:t>
+            </a:r>
+          </a:p>
+        </p:txBody>
+      </p:sp>
+      <p:grpSp>
+        <p:nvGrpSpPr>
+          <p:cNvPr id="52" name="Group 51">
+            <a:extLst>
+              <a:ext uri="{FF2B5EF4-FFF2-40B4-BE49-F238E27FC236}">
+                <a16:creationId xmlns:a16="http://schemas.microsoft.com/office/drawing/2014/main" id="{A77BBBBD-1B7C-A47A-8D34-06B5F6A7A0B7}"/>
+              </a:ext>
+            </a:extLst>
+          </p:cNvPr>
+          <p:cNvGrpSpPr>
+            <a:grpSpLocks noChangeAspect="1"/>
+          </p:cNvGrpSpPr>
+          <p:nvPr/>
+        </p:nvGrpSpPr>
+        <p:grpSpPr>
+          <a:xfrm>
+            <a:off x="9109243" y="14338"/>
+            <a:ext cx="3073558" cy="1475770"/>
+            <a:chOff x="7813777" y="-1763"/>
+            <a:chExt cx="4378223" cy="2102209"/>
+          </a:xfrm>
+        </p:grpSpPr>
+        <p:sp>
+          <p:nvSpPr>
+            <p:cNvPr id="32" name="Rectangle 31">
+              <a:extLst>
+                <a:ext uri="{FF2B5EF4-FFF2-40B4-BE49-F238E27FC236}">
+                  <a16:creationId xmlns:a16="http://schemas.microsoft.com/office/drawing/2014/main" id="{6B1D3EAA-D070-A64C-DF3E-4BDBBB3DCE6D}"/>
+                </a:ext>
+              </a:extLst>
+            </p:cNvPr>
+            <p:cNvSpPr/>
+            <p:nvPr/>
+          </p:nvSpPr>
+          <p:spPr>
+            <a:xfrm>
+              <a:off x="7813777" y="-1763"/>
+              <a:ext cx="4378223" cy="2102209"/>
+            </a:xfrm>
+            <a:prstGeom prst="rect">
+              <a:avLst/>
+            </a:prstGeom>
+            <a:solidFill>
+              <a:srgbClr val="121212"/>
+            </a:solidFill>
+          </p:spPr>
+          <p:style>
+            <a:lnRef idx="2">
+              <a:schemeClr val="accent1">
+                <a:shade val="15000"/>
+              </a:schemeClr>
+            </a:lnRef>
+            <a:fillRef idx="1">
+              <a:schemeClr val="accent1"/>
+            </a:fillRef>
+            <a:effectRef idx="0">
+              <a:schemeClr val="accent1"/>
+            </a:effectRef>
+            <a:fontRef idx="minor">
+              <a:schemeClr val="lt1"/>
+            </a:fontRef>
+          </p:style>
+          <p:txBody>
+            <a:bodyPr rtlCol="0" anchor="ctr"/>
+            <a:lstStyle/>
+            <a:p>
+              <a:pPr algn="ctr"/>
+              <a:endParaRPr lang="en-US" sz="1200"/>
+            </a:p>
+          </p:txBody>
+        </p:sp>
+        <p:grpSp>
+          <p:nvGrpSpPr>
+            <p:cNvPr id="33" name="Group 32">
+              <a:extLst>
+                <a:ext uri="{FF2B5EF4-FFF2-40B4-BE49-F238E27FC236}">
+                  <a16:creationId xmlns:a16="http://schemas.microsoft.com/office/drawing/2014/main" id="{BB9E6F3F-2C84-098F-BFB9-27507633C99F}"/>
+                </a:ext>
+              </a:extLst>
+            </p:cNvPr>
+            <p:cNvGrpSpPr/>
+            <p:nvPr/>
+          </p:nvGrpSpPr>
+          <p:grpSpPr>
+            <a:xfrm>
+              <a:off x="8130932" y="61972"/>
+              <a:ext cx="3616284" cy="1993796"/>
+              <a:chOff x="431855" y="1391826"/>
+              <a:chExt cx="3616284" cy="1993796"/>
+            </a:xfrm>
+          </p:grpSpPr>
+          <mc:AlternateContent xmlns:mc="http://schemas.openxmlformats.org/markup-compatibility/2006">
+            <mc:Choice xmlns:a14="http://schemas.microsoft.com/office/drawing/2010/main" Requires="a14">
+              <p:sp>
+                <p:nvSpPr>
+                  <p:cNvPr id="34" name="TextBox 33">
+                    <a:extLst>
+                      <a:ext uri="{FF2B5EF4-FFF2-40B4-BE49-F238E27FC236}">
+                        <a16:creationId xmlns:a16="http://schemas.microsoft.com/office/drawing/2014/main" id="{624EB6EA-4B3D-D2D3-20CA-77543FB5FCC6}"/>
+                      </a:ext>
+                    </a:extLst>
+                  </p:cNvPr>
+                  <p:cNvSpPr txBox="1"/>
+                  <p:nvPr/>
+                </p:nvSpPr>
+                <p:spPr>
+                  <a:xfrm>
+                    <a:off x="3419061" y="1887881"/>
+                    <a:ext cx="629078" cy="482264"/>
+                  </a:xfrm>
+                  <a:prstGeom prst="rect">
+                    <a:avLst/>
+                  </a:prstGeom>
+                  <a:noFill/>
+                </p:spPr>
+                <p:txBody>
+                  <a:bodyPr wrap="square">
+                    <a:spAutoFit/>
+                  </a:bodyPr>
+                  <a:lstStyle/>
+                  <a:p>
+                    <a:pPr/>
+                    <a14:m>
+                      <m:oMathPara xmlns:m="http://schemas.openxmlformats.org/officeDocument/2006/math">
+                        <m:oMathParaPr>
+                          <m:jc m:val="right"/>
+                        </m:oMathParaPr>
+                        <m:oMath xmlns:m="http://schemas.openxmlformats.org/officeDocument/2006/math">
+                          <m:sSub>
+                            <m:sSubPr>
+                              <m:ctrlPr>
+                                <a:rPr lang="de-DE" sz="1600" b="0" i="1" smtClean="0">
+                                  <a:solidFill>
+                                    <a:schemeClr val="bg1"/>
+                                  </a:solidFill>
+                                  <a:latin typeface="Cambria Math" panose="02040503050406030204" pitchFamily="18" charset="0"/>
+                                </a:rPr>
+                              </m:ctrlPr>
+                            </m:sSubPr>
+                            <m:e>
+                              <m:r>
+                                <m:rPr>
+                                  <m:sty m:val="p"/>
+                                </m:rPr>
+                                <a:rPr lang="de-DE" sz="1600" b="0" i="1" smtClean="0">
+                                  <a:solidFill>
+                                    <a:schemeClr val="bg1"/>
+                                  </a:solidFill>
+                                  <a:latin typeface="Cambria Math" panose="02040503050406030204" pitchFamily="18" charset="0"/>
+                                </a:rPr>
+                                <m:t>m</m:t>
+                              </m:r>
+                            </m:e>
+                            <m:sub>
+                              <m:r>
+                                <a:rPr lang="de-DE" sz="1600" b="0" i="1" smtClean="0">
+                                  <a:solidFill>
+                                    <a:schemeClr val="bg1"/>
+                                  </a:solidFill>
+                                  <a:latin typeface="Cambria Math" panose="02040503050406030204" pitchFamily="18" charset="0"/>
+                                </a:rPr>
+                                <m:t>4</m:t>
+                              </m:r>
+                            </m:sub>
+                          </m:sSub>
+                        </m:oMath>
+                      </m:oMathPara>
+                    </a14:m>
+                    <a:endParaRPr lang="en-US" sz="1600" dirty="0">
+                      <a:solidFill>
+                        <a:schemeClr val="bg1"/>
+                      </a:solidFill>
+                    </a:endParaRPr>
+                  </a:p>
+                </p:txBody>
+              </p:sp>
+            </mc:Choice>
+            <mc:Fallback>
+              <p:sp>
+                <p:nvSpPr>
+                  <p:cNvPr id="34" name="TextBox 33">
+                    <a:extLst>
+                      <a:ext uri="{FF2B5EF4-FFF2-40B4-BE49-F238E27FC236}">
+                        <a16:creationId xmlns:a16="http://schemas.microsoft.com/office/drawing/2014/main" id="{624EB6EA-4B3D-D2D3-20CA-77543FB5FCC6}"/>
+                      </a:ext>
+                    </a:extLst>
+                  </p:cNvPr>
+                  <p:cNvSpPr txBox="1">
+                    <a:spLocks noRot="1" noChangeAspect="1" noMove="1" noResize="1" noEditPoints="1" noAdjustHandles="1" noChangeArrowheads="1" noChangeShapeType="1" noTextEdit="1"/>
+                  </p:cNvSpPr>
+                  <p:nvPr/>
+                </p:nvSpPr>
+                <p:spPr>
+                  <a:xfrm>
+                    <a:off x="3419061" y="1887881"/>
+                    <a:ext cx="629078" cy="482264"/>
+                  </a:xfrm>
+                  <a:prstGeom prst="rect">
+                    <a:avLst/>
+                  </a:prstGeom>
+                  <a:blipFill>
+                    <a:blip r:embed="rId11"/>
+                    <a:stretch>
+                      <a:fillRect/>
+                    </a:stretch>
+                  </a:blipFill>
+                </p:spPr>
+                <p:txBody>
+                  <a:bodyPr/>
+                  <a:lstStyle/>
+                  <a:p>
+                    <a:r>
+                      <a:rPr lang="en-US">
+                        <a:noFill/>
+                      </a:rPr>
+                      <a:t> </a:t>
+                    </a:r>
+                  </a:p>
+                </p:txBody>
+              </p:sp>
+            </mc:Fallback>
+          </mc:AlternateContent>
+          <p:sp>
+            <p:nvSpPr>
+              <p:cNvPr id="35" name="Oval 34">
+                <a:extLst>
+                  <a:ext uri="{FF2B5EF4-FFF2-40B4-BE49-F238E27FC236}">
+                    <a16:creationId xmlns:a16="http://schemas.microsoft.com/office/drawing/2014/main" id="{3914E01C-6104-D8E9-C4A5-BC80C9ADB853}"/>
+                  </a:ext>
+                </a:extLst>
+              </p:cNvPr>
+              <p:cNvSpPr>
+                <a:spLocks noChangeAspect="1"/>
+              </p:cNvSpPr>
+              <p:nvPr/>
+            </p:nvSpPr>
+            <p:spPr>
+              <a:xfrm>
+                <a:off x="1315417" y="1484012"/>
+                <a:ext cx="365760" cy="365760"/>
+              </a:xfrm>
+              <a:prstGeom prst="ellipse">
+                <a:avLst/>
+              </a:prstGeom>
+              <a:solidFill>
+                <a:schemeClr val="bg1"/>
+              </a:solidFill>
+              <a:ln>
+                <a:solidFill>
+                  <a:schemeClr val="bg1"/>
+                </a:solidFill>
+              </a:ln>
+            </p:spPr>
+            <p:style>
+              <a:lnRef idx="2">
+                <a:schemeClr val="accent1">
+                  <a:shade val="15000"/>
+                </a:schemeClr>
+              </a:lnRef>
+              <a:fillRef idx="1">
+                <a:schemeClr val="accent1"/>
+              </a:fillRef>
+              <a:effectRef idx="0">
+                <a:schemeClr val="accent1"/>
+              </a:effectRef>
+              <a:fontRef idx="minor">
+                <a:schemeClr val="lt1"/>
+              </a:fontRef>
+            </p:style>
+            <p:txBody>
+              <a:bodyPr rtlCol="0" anchor="ctr"/>
+              <a:lstStyle/>
+              <a:p>
+                <a:pPr algn="ctr"/>
+                <a:endParaRPr lang="en-US" sz="1200"/>
+              </a:p>
+            </p:txBody>
+          </p:sp>
+          <p:sp>
+            <p:nvSpPr>
+              <p:cNvPr id="36" name="Oval 35">
+                <a:extLst>
+                  <a:ext uri="{FF2B5EF4-FFF2-40B4-BE49-F238E27FC236}">
+                    <a16:creationId xmlns:a16="http://schemas.microsoft.com/office/drawing/2014/main" id="{0A16E04D-3A2C-2BD5-EA08-5D4B34730D9B}"/>
+                  </a:ext>
+                </a:extLst>
+              </p:cNvPr>
+              <p:cNvSpPr>
+                <a:spLocks noChangeAspect="1"/>
+              </p:cNvSpPr>
+              <p:nvPr/>
+            </p:nvSpPr>
+            <p:spPr>
+              <a:xfrm>
+                <a:off x="1326847" y="2951311"/>
+                <a:ext cx="365760" cy="365760"/>
+              </a:xfrm>
+              <a:prstGeom prst="ellipse">
+                <a:avLst/>
+              </a:prstGeom>
+              <a:solidFill>
+                <a:schemeClr val="bg1"/>
+              </a:solidFill>
+              <a:ln>
+                <a:solidFill>
+                  <a:schemeClr val="bg1"/>
+                </a:solidFill>
+              </a:ln>
+            </p:spPr>
+            <p:style>
+              <a:lnRef idx="2">
+                <a:schemeClr val="accent1">
+                  <a:shade val="15000"/>
+                </a:schemeClr>
+              </a:lnRef>
+              <a:fillRef idx="1">
+                <a:schemeClr val="accent1"/>
+              </a:fillRef>
+              <a:effectRef idx="0">
+                <a:schemeClr val="accent1"/>
+              </a:effectRef>
+              <a:fontRef idx="minor">
+                <a:schemeClr val="lt1"/>
+              </a:fontRef>
+            </p:style>
+            <p:txBody>
+              <a:bodyPr rtlCol="0" anchor="ctr"/>
+              <a:lstStyle/>
+              <a:p>
+                <a:pPr algn="ctr"/>
+                <a:endParaRPr lang="en-US" sz="1200"/>
+              </a:p>
+            </p:txBody>
+          </p:sp>
+          <p:sp>
+            <p:nvSpPr>
+              <p:cNvPr id="37" name="Oval 36">
+                <a:extLst>
+                  <a:ext uri="{FF2B5EF4-FFF2-40B4-BE49-F238E27FC236}">
+                    <a16:creationId xmlns:a16="http://schemas.microsoft.com/office/drawing/2014/main" id="{726C1C76-B230-13AE-3FDA-323059D79A9D}"/>
+                  </a:ext>
+                </a:extLst>
+              </p:cNvPr>
+              <p:cNvSpPr>
+                <a:spLocks noChangeAspect="1"/>
+              </p:cNvSpPr>
+              <p:nvPr/>
+            </p:nvSpPr>
+            <p:spPr>
+              <a:xfrm>
+                <a:off x="2858467" y="2257891"/>
+                <a:ext cx="365760" cy="365760"/>
+              </a:xfrm>
+              <a:prstGeom prst="ellipse">
+                <a:avLst/>
+              </a:prstGeom>
+              <a:solidFill>
+                <a:schemeClr val="bg1"/>
+              </a:solidFill>
+              <a:ln>
+                <a:solidFill>
+                  <a:schemeClr val="bg1"/>
+                </a:solidFill>
+              </a:ln>
+            </p:spPr>
+            <p:style>
+              <a:lnRef idx="2">
+                <a:schemeClr val="accent1">
+                  <a:shade val="15000"/>
+                </a:schemeClr>
+              </a:lnRef>
+              <a:fillRef idx="1">
+                <a:schemeClr val="accent1"/>
+              </a:fillRef>
+              <a:effectRef idx="0">
+                <a:schemeClr val="accent1"/>
+              </a:effectRef>
+              <a:fontRef idx="minor">
+                <a:schemeClr val="lt1"/>
+              </a:fontRef>
+            </p:style>
+            <p:txBody>
+              <a:bodyPr rtlCol="0" anchor="ctr"/>
+              <a:lstStyle/>
+              <a:p>
+                <a:pPr algn="ctr"/>
+                <a:endParaRPr lang="en-US" sz="1200"/>
+              </a:p>
+            </p:txBody>
+          </p:sp>
+          <p:cxnSp>
+            <p:nvCxnSpPr>
+              <p:cNvPr id="38" name="Straight Arrow Connector 37">
+                <a:extLst>
+                  <a:ext uri="{FF2B5EF4-FFF2-40B4-BE49-F238E27FC236}">
+                    <a16:creationId xmlns:a16="http://schemas.microsoft.com/office/drawing/2014/main" id="{4ECE2C46-7A43-F992-8135-3A3356A0365D}"/>
+                  </a:ext>
+                </a:extLst>
+              </p:cNvPr>
+              <p:cNvCxnSpPr>
+                <a:cxnSpLocks/>
+                <a:stCxn id="36" idx="6"/>
+                <a:endCxn id="37" idx="3"/>
+              </p:cNvCxnSpPr>
+              <p:nvPr/>
+            </p:nvCxnSpPr>
+            <p:spPr>
+              <a:xfrm flipV="1">
+                <a:off x="1692607" y="2570087"/>
+                <a:ext cx="1219424" cy="564104"/>
+              </a:xfrm>
+              <a:prstGeom prst="straightConnector1">
+                <a:avLst/>
+              </a:prstGeom>
+              <a:solidFill>
+                <a:schemeClr val="bg1"/>
+              </a:solidFill>
+              <a:ln>
+                <a:solidFill>
+                  <a:schemeClr val="bg1"/>
+                </a:solidFill>
+                <a:tailEnd type="triangle" w="lg" len="lg"/>
+              </a:ln>
+            </p:spPr>
+            <p:style>
+              <a:lnRef idx="2">
+                <a:schemeClr val="accent1"/>
+              </a:lnRef>
+              <a:fillRef idx="0">
+                <a:schemeClr val="accent1"/>
+              </a:fillRef>
+              <a:effectRef idx="1">
+                <a:schemeClr val="accent1"/>
+              </a:effectRef>
+              <a:fontRef idx="minor">
+                <a:schemeClr val="tx1"/>
+              </a:fontRef>
+            </p:style>
+          </p:cxnSp>
+          <p:cxnSp>
+            <p:nvCxnSpPr>
+              <p:cNvPr id="39" name="Straight Arrow Connector 38">
+                <a:extLst>
+                  <a:ext uri="{FF2B5EF4-FFF2-40B4-BE49-F238E27FC236}">
+                    <a16:creationId xmlns:a16="http://schemas.microsoft.com/office/drawing/2014/main" id="{FC822B04-030B-DAA1-C576-E97A31A120C5}"/>
+                  </a:ext>
+                </a:extLst>
+              </p:cNvPr>
+              <p:cNvCxnSpPr>
+                <a:stCxn id="35" idx="6"/>
+                <a:endCxn id="37" idx="1"/>
+              </p:cNvCxnSpPr>
+              <p:nvPr/>
+            </p:nvCxnSpPr>
+            <p:spPr>
+              <a:xfrm>
+                <a:off x="1681177" y="1666892"/>
+                <a:ext cx="1230854" cy="644563"/>
+              </a:xfrm>
+              <a:prstGeom prst="straightConnector1">
+                <a:avLst/>
+              </a:prstGeom>
+              <a:solidFill>
+                <a:schemeClr val="bg1"/>
+              </a:solidFill>
+              <a:ln>
+                <a:solidFill>
+                  <a:schemeClr val="bg1"/>
+                </a:solidFill>
+                <a:tailEnd type="triangle" w="lg" len="lg"/>
+              </a:ln>
+            </p:spPr>
+            <p:style>
+              <a:lnRef idx="2">
+                <a:schemeClr val="accent1"/>
+              </a:lnRef>
+              <a:fillRef idx="0">
+                <a:schemeClr val="accent1"/>
+              </a:fillRef>
+              <a:effectRef idx="1">
+                <a:schemeClr val="accent1"/>
+              </a:effectRef>
+              <a:fontRef idx="minor">
+                <a:schemeClr val="tx1"/>
+              </a:fontRef>
+            </p:style>
+          </p:cxnSp>
+          <p:cxnSp>
+            <p:nvCxnSpPr>
+              <p:cNvPr id="40" name="Straight Arrow Connector 39">
+                <a:extLst>
+                  <a:ext uri="{FF2B5EF4-FFF2-40B4-BE49-F238E27FC236}">
+                    <a16:creationId xmlns:a16="http://schemas.microsoft.com/office/drawing/2014/main" id="{551A1C3D-720F-D8F8-BE25-FEEADFE3FF0E}"/>
+                  </a:ext>
+                </a:extLst>
+              </p:cNvPr>
+              <p:cNvCxnSpPr>
+                <a:cxnSpLocks/>
+              </p:cNvCxnSpPr>
+              <p:nvPr/>
+            </p:nvCxnSpPr>
+            <p:spPr>
+              <a:xfrm>
+                <a:off x="515317" y="1666892"/>
+                <a:ext cx="800100" cy="0"/>
+              </a:xfrm>
+              <a:prstGeom prst="straightConnector1">
+                <a:avLst/>
+              </a:prstGeom>
+              <a:solidFill>
+                <a:schemeClr val="bg1"/>
+              </a:solidFill>
+              <a:ln>
+                <a:solidFill>
+                  <a:schemeClr val="bg1"/>
+                </a:solidFill>
+                <a:tailEnd type="triangle" w="lg" len="lg"/>
+              </a:ln>
+            </p:spPr>
+            <p:style>
+              <a:lnRef idx="2">
+                <a:schemeClr val="accent1"/>
+              </a:lnRef>
+              <a:fillRef idx="0">
+                <a:schemeClr val="accent1"/>
+              </a:fillRef>
+              <a:effectRef idx="1">
+                <a:schemeClr val="accent1"/>
+              </a:effectRef>
+              <a:fontRef idx="minor">
+                <a:schemeClr val="tx1"/>
+              </a:fontRef>
+            </p:style>
+          </p:cxnSp>
+          <p:cxnSp>
+            <p:nvCxnSpPr>
+              <p:cNvPr id="41" name="Straight Arrow Connector 40">
+                <a:extLst>
+                  <a:ext uri="{FF2B5EF4-FFF2-40B4-BE49-F238E27FC236}">
+                    <a16:creationId xmlns:a16="http://schemas.microsoft.com/office/drawing/2014/main" id="{C81BE78A-5E62-D17E-820D-06E542FF096B}"/>
+                  </a:ext>
+                </a:extLst>
+              </p:cNvPr>
+              <p:cNvCxnSpPr>
+                <a:cxnSpLocks/>
+                <a:endCxn id="36" idx="2"/>
+              </p:cNvCxnSpPr>
+              <p:nvPr/>
+            </p:nvCxnSpPr>
+            <p:spPr>
+              <a:xfrm>
+                <a:off x="515317" y="3134191"/>
+                <a:ext cx="811530" cy="0"/>
+              </a:xfrm>
+              <a:prstGeom prst="straightConnector1">
+                <a:avLst/>
+              </a:prstGeom>
+              <a:solidFill>
+                <a:schemeClr val="bg1"/>
+              </a:solidFill>
+              <a:ln>
+                <a:solidFill>
+                  <a:schemeClr val="bg1"/>
+                </a:solidFill>
+                <a:tailEnd type="triangle" w="lg" len="lg"/>
+              </a:ln>
+            </p:spPr>
+            <p:style>
+              <a:lnRef idx="2">
+                <a:schemeClr val="accent1"/>
+              </a:lnRef>
+              <a:fillRef idx="0">
+                <a:schemeClr val="accent1"/>
+              </a:fillRef>
+              <a:effectRef idx="1">
+                <a:schemeClr val="accent1"/>
+              </a:effectRef>
+              <a:fontRef idx="minor">
+                <a:schemeClr val="tx1"/>
+              </a:fontRef>
+            </p:style>
+          </p:cxnSp>
+          <p:cxnSp>
+            <p:nvCxnSpPr>
+              <p:cNvPr id="42" name="Straight Arrow Connector 41">
+                <a:extLst>
+                  <a:ext uri="{FF2B5EF4-FFF2-40B4-BE49-F238E27FC236}">
+                    <a16:creationId xmlns:a16="http://schemas.microsoft.com/office/drawing/2014/main" id="{27D69B1E-8245-D68D-A611-4956451BF88E}"/>
+                  </a:ext>
+                </a:extLst>
+              </p:cNvPr>
+              <p:cNvCxnSpPr>
+                <a:cxnSpLocks/>
+              </p:cNvCxnSpPr>
+              <p:nvPr/>
+            </p:nvCxnSpPr>
+            <p:spPr>
+              <a:xfrm>
+                <a:off x="3224227" y="2425082"/>
+                <a:ext cx="800100" cy="0"/>
+              </a:xfrm>
+              <a:prstGeom prst="straightConnector1">
+                <a:avLst/>
+              </a:prstGeom>
+              <a:solidFill>
+                <a:schemeClr val="bg1"/>
+              </a:solidFill>
+              <a:ln>
+                <a:solidFill>
+                  <a:schemeClr val="bg1"/>
+                </a:solidFill>
+                <a:tailEnd type="triangle" w="lg" len="lg"/>
+              </a:ln>
+            </p:spPr>
+            <p:style>
+              <a:lnRef idx="2">
+                <a:schemeClr val="accent1"/>
+              </a:lnRef>
+              <a:fillRef idx="0">
+                <a:schemeClr val="accent1"/>
+              </a:fillRef>
+              <a:effectRef idx="1">
+                <a:schemeClr val="accent1"/>
+              </a:effectRef>
+              <a:fontRef idx="minor">
+                <a:schemeClr val="tx1"/>
+              </a:fontRef>
+            </p:style>
+          </p:cxnSp>
+          <mc:AlternateContent xmlns:mc="http://schemas.openxmlformats.org/markup-compatibility/2006">
+            <mc:Choice xmlns:a14="http://schemas.microsoft.com/office/drawing/2010/main" Requires="a14">
+              <p:sp>
+                <p:nvSpPr>
+                  <p:cNvPr id="43" name="TextBox 42">
+                    <a:extLst>
+                      <a:ext uri="{FF2B5EF4-FFF2-40B4-BE49-F238E27FC236}">
+                        <a16:creationId xmlns:a16="http://schemas.microsoft.com/office/drawing/2014/main" id="{07258D15-695B-1B83-793D-1D64480E173A}"/>
+                      </a:ext>
+                    </a:extLst>
+                  </p:cNvPr>
+                  <p:cNvSpPr txBox="1"/>
+                  <p:nvPr/>
+                </p:nvSpPr>
+                <p:spPr>
+                  <a:xfrm>
+                    <a:off x="431855" y="1666892"/>
+                    <a:ext cx="675668" cy="482264"/>
+                  </a:xfrm>
+                  <a:prstGeom prst="rect">
+                    <a:avLst/>
+                  </a:prstGeom>
+                  <a:noFill/>
+                </p:spPr>
+                <p:txBody>
+                  <a:bodyPr wrap="square">
+                    <a:spAutoFit/>
+                  </a:bodyPr>
+                  <a:lstStyle/>
+                  <a:p>
+                    <a:pPr/>
+                    <a14:m>
+                      <m:oMathPara xmlns:m="http://schemas.openxmlformats.org/officeDocument/2006/math">
+                        <m:oMathParaPr>
+                          <m:jc m:val="left"/>
+                        </m:oMathParaPr>
+                        <m:oMath xmlns:m="http://schemas.openxmlformats.org/officeDocument/2006/math">
+                          <m:sSub>
+                            <m:sSubPr>
+                              <m:ctrlPr>
+                                <a:rPr lang="de-DE" sz="1600" b="0" i="1" smtClean="0">
+                                  <a:solidFill>
+                                    <a:schemeClr val="bg1"/>
+                                  </a:solidFill>
+                                  <a:latin typeface="Cambria Math" panose="02040503050406030204" pitchFamily="18" charset="0"/>
+                                </a:rPr>
+                              </m:ctrlPr>
+                            </m:sSubPr>
+                            <m:e>
+                              <m:r>
+                                <m:rPr>
+                                  <m:sty m:val="p"/>
+                                </m:rPr>
+                                <a:rPr lang="de-DE" sz="1600" b="0" i="1" smtClean="0">
+                                  <a:solidFill>
+                                    <a:schemeClr val="bg1"/>
+                                  </a:solidFill>
+                                  <a:latin typeface="Cambria Math" panose="02040503050406030204" pitchFamily="18" charset="0"/>
+                                </a:rPr>
+                                <m:t>m</m:t>
+                              </m:r>
+                            </m:e>
+                            <m:sub>
+                              <m:r>
+                                <a:rPr lang="de-DE" sz="1600" b="0" i="1" smtClean="0">
+                                  <a:solidFill>
+                                    <a:schemeClr val="bg1"/>
+                                  </a:solidFill>
+                                  <a:latin typeface="Cambria Math" panose="02040503050406030204" pitchFamily="18" charset="0"/>
+                                </a:rPr>
+                                <m:t>1</m:t>
+                              </m:r>
+                            </m:sub>
+                          </m:sSub>
+                        </m:oMath>
+                      </m:oMathPara>
+                    </a14:m>
+                    <a:endParaRPr lang="en-US" sz="1600" dirty="0">
+                      <a:solidFill>
+                        <a:schemeClr val="bg1"/>
+                      </a:solidFill>
+                    </a:endParaRPr>
+                  </a:p>
+                </p:txBody>
+              </p:sp>
+            </mc:Choice>
+            <mc:Fallback>
+              <p:sp>
+                <p:nvSpPr>
+                  <p:cNvPr id="43" name="TextBox 42">
+                    <a:extLst>
+                      <a:ext uri="{FF2B5EF4-FFF2-40B4-BE49-F238E27FC236}">
+                        <a16:creationId xmlns:a16="http://schemas.microsoft.com/office/drawing/2014/main" id="{07258D15-695B-1B83-793D-1D64480E173A}"/>
+                      </a:ext>
+                    </a:extLst>
+                  </p:cNvPr>
+                  <p:cNvSpPr txBox="1">
+                    <a:spLocks noRot="1" noChangeAspect="1" noMove="1" noResize="1" noEditPoints="1" noAdjustHandles="1" noChangeArrowheads="1" noChangeShapeType="1" noTextEdit="1"/>
+                  </p:cNvSpPr>
+                  <p:nvPr/>
+                </p:nvSpPr>
+                <p:spPr>
+                  <a:xfrm>
+                    <a:off x="431855" y="1666892"/>
+                    <a:ext cx="675668" cy="482264"/>
+                  </a:xfrm>
+                  <a:prstGeom prst="rect">
+                    <a:avLst/>
+                  </a:prstGeom>
+                  <a:blipFill>
+                    <a:blip r:embed="rId12"/>
+                    <a:stretch>
+                      <a:fillRect/>
+                    </a:stretch>
+                  </a:blipFill>
+                </p:spPr>
+                <p:txBody>
+                  <a:bodyPr/>
+                  <a:lstStyle/>
+                  <a:p>
+                    <a:r>
+                      <a:rPr lang="en-US">
+                        <a:noFill/>
+                      </a:rPr>
+                      <a:t> </a:t>
+                    </a:r>
+                  </a:p>
+                </p:txBody>
+              </p:sp>
+            </mc:Fallback>
+          </mc:AlternateContent>
+          <mc:AlternateContent xmlns:mc="http://schemas.openxmlformats.org/markup-compatibility/2006">
+            <mc:Choice xmlns:a14="http://schemas.microsoft.com/office/drawing/2010/main" Requires="a14">
+              <p:sp>
+                <p:nvSpPr>
+                  <p:cNvPr id="44" name="TextBox 43">
+                    <a:extLst>
+                      <a:ext uri="{FF2B5EF4-FFF2-40B4-BE49-F238E27FC236}">
+                        <a16:creationId xmlns:a16="http://schemas.microsoft.com/office/drawing/2014/main" id="{BA6145B7-9CA7-88DF-C697-A6EDC227B8C6}"/>
+                      </a:ext>
+                    </a:extLst>
+                  </p:cNvPr>
+                  <p:cNvSpPr txBox="1"/>
+                  <p:nvPr/>
+                </p:nvSpPr>
+                <p:spPr>
+                  <a:xfrm>
+                    <a:off x="2298433" y="2903358"/>
+                    <a:ext cx="641032" cy="482264"/>
+                  </a:xfrm>
+                  <a:prstGeom prst="rect">
+                    <a:avLst/>
+                  </a:prstGeom>
+                  <a:noFill/>
+                  <a:ln w="19050">
+                    <a:solidFill>
+                      <a:srgbClr val="C00000"/>
+                    </a:solidFill>
+                  </a:ln>
+                </p:spPr>
+                <p:txBody>
+                  <a:bodyPr wrap="square">
+                    <a:spAutoFit/>
+                  </a:bodyPr>
+                  <a:lstStyle/>
+                  <a:p>
+                    <a:pPr/>
+                    <a14:m>
+                      <m:oMathPara xmlns:m="http://schemas.openxmlformats.org/officeDocument/2006/math">
+                        <m:oMathParaPr>
+                          <m:jc m:val="centerGroup"/>
+                        </m:oMathParaPr>
+                        <m:oMath xmlns:m="http://schemas.openxmlformats.org/officeDocument/2006/math">
+                          <m:sSub>
+                            <m:sSubPr>
+                              <m:ctrlPr>
+                                <a:rPr lang="de-DE" sz="1600" b="1" i="1" smtClean="0">
+                                  <a:solidFill>
+                                    <a:schemeClr val="bg1"/>
+                                  </a:solidFill>
+                                  <a:latin typeface="Cambria Math" panose="02040503050406030204" pitchFamily="18" charset="0"/>
+                                </a:rPr>
+                              </m:ctrlPr>
+                            </m:sSubPr>
+                            <m:e>
+                              <m:r>
+                                <a:rPr lang="de-DE" sz="1600" b="1" i="1" smtClean="0">
+                                  <a:solidFill>
+                                    <a:schemeClr val="bg1"/>
+                                  </a:solidFill>
+                                  <a:latin typeface="Cambria Math" panose="02040503050406030204" pitchFamily="18" charset="0"/>
+                                </a:rPr>
+                                <m:t>𝒎</m:t>
+                              </m:r>
+                            </m:e>
+                            <m:sub>
+                              <m:r>
+                                <a:rPr lang="de-DE" sz="1600" b="1" i="0" smtClean="0">
+                                  <a:solidFill>
+                                    <a:schemeClr val="bg1"/>
+                                  </a:solidFill>
+                                  <a:latin typeface="Cambria Math" panose="02040503050406030204" pitchFamily="18" charset="0"/>
+                                </a:rPr>
+                                <m:t>𝐳</m:t>
+                              </m:r>
+                            </m:sub>
+                          </m:sSub>
+                        </m:oMath>
+                      </m:oMathPara>
+                    </a14:m>
+                    <a:endParaRPr lang="en-US" sz="1600" b="1" dirty="0">
+                      <a:solidFill>
+                        <a:schemeClr val="bg1"/>
+                      </a:solidFill>
+                    </a:endParaRPr>
+                  </a:p>
+                </p:txBody>
+              </p:sp>
+            </mc:Choice>
+            <mc:Fallback>
+              <p:sp>
+                <p:nvSpPr>
+                  <p:cNvPr id="44" name="TextBox 43">
+                    <a:extLst>
+                      <a:ext uri="{FF2B5EF4-FFF2-40B4-BE49-F238E27FC236}">
+                        <a16:creationId xmlns:a16="http://schemas.microsoft.com/office/drawing/2014/main" id="{BA6145B7-9CA7-88DF-C697-A6EDC227B8C6}"/>
+                      </a:ext>
+                    </a:extLst>
+                  </p:cNvPr>
+                  <p:cNvSpPr txBox="1">
+                    <a:spLocks noRot="1" noChangeAspect="1" noMove="1" noResize="1" noEditPoints="1" noAdjustHandles="1" noChangeArrowheads="1" noChangeShapeType="1" noTextEdit="1"/>
+                  </p:cNvSpPr>
+                  <p:nvPr/>
+                </p:nvSpPr>
+                <p:spPr>
+                  <a:xfrm>
+                    <a:off x="2298433" y="2903358"/>
+                    <a:ext cx="641032" cy="482264"/>
+                  </a:xfrm>
+                  <a:prstGeom prst="rect">
+                    <a:avLst/>
+                  </a:prstGeom>
+                  <a:blipFill>
+                    <a:blip r:embed="rId13"/>
+                    <a:stretch>
+                      <a:fillRect/>
+                    </a:stretch>
+                  </a:blipFill>
+                  <a:ln w="19050">
+                    <a:solidFill>
+                      <a:srgbClr val="C00000"/>
+                    </a:solidFill>
+                  </a:ln>
+                </p:spPr>
+                <p:txBody>
+                  <a:bodyPr/>
+                  <a:lstStyle/>
+                  <a:p>
+                    <a:r>
+                      <a:rPr lang="en-US">
+                        <a:noFill/>
+                      </a:rPr>
+                      <a:t> </a:t>
+                    </a:r>
+                  </a:p>
+                </p:txBody>
+              </p:sp>
+            </mc:Fallback>
+          </mc:AlternateContent>
+          <mc:AlternateContent xmlns:mc="http://schemas.openxmlformats.org/markup-compatibility/2006">
+            <mc:Choice xmlns:a14="http://schemas.microsoft.com/office/drawing/2010/main" Requires="a14">
+              <p:sp>
+                <p:nvSpPr>
+                  <p:cNvPr id="45" name="TextBox 44">
+                    <a:extLst>
+                      <a:ext uri="{FF2B5EF4-FFF2-40B4-BE49-F238E27FC236}">
+                        <a16:creationId xmlns:a16="http://schemas.microsoft.com/office/drawing/2014/main" id="{252DF143-C11C-397F-520C-BBA7B9736405}"/>
+                      </a:ext>
+                    </a:extLst>
+                  </p:cNvPr>
+                  <p:cNvSpPr txBox="1"/>
+                  <p:nvPr/>
+                </p:nvSpPr>
+                <p:spPr>
+                  <a:xfrm>
+                    <a:off x="465983" y="2632489"/>
+                    <a:ext cx="740342" cy="482264"/>
+                  </a:xfrm>
+                  <a:prstGeom prst="rect">
+                    <a:avLst/>
+                  </a:prstGeom>
+                  <a:noFill/>
+                </p:spPr>
+                <p:txBody>
+                  <a:bodyPr wrap="square">
+                    <a:spAutoFit/>
+                  </a:bodyPr>
+                  <a:lstStyle/>
+                  <a:p>
+                    <a:pPr/>
+                    <a14:m>
+                      <m:oMathPara xmlns:m="http://schemas.openxmlformats.org/officeDocument/2006/math">
+                        <m:oMathParaPr>
+                          <m:jc m:val="left"/>
+                        </m:oMathParaPr>
+                        <m:oMath xmlns:m="http://schemas.openxmlformats.org/officeDocument/2006/math">
+                          <m:sSub>
+                            <m:sSubPr>
+                              <m:ctrlPr>
+                                <a:rPr lang="de-DE" sz="1600" b="0" i="1" smtClean="0">
+                                  <a:solidFill>
+                                    <a:schemeClr val="bg1"/>
+                                  </a:solidFill>
+                                  <a:latin typeface="Cambria Math" panose="02040503050406030204" pitchFamily="18" charset="0"/>
+                                </a:rPr>
+                              </m:ctrlPr>
+                            </m:sSubPr>
+                            <m:e>
+                              <m:r>
+                                <m:rPr>
+                                  <m:sty m:val="p"/>
+                                </m:rPr>
+                                <a:rPr lang="de-DE" sz="1600" b="0" i="1" smtClean="0">
+                                  <a:solidFill>
+                                    <a:schemeClr val="bg1"/>
+                                  </a:solidFill>
+                                  <a:latin typeface="Cambria Math" panose="02040503050406030204" pitchFamily="18" charset="0"/>
+                                </a:rPr>
+                                <m:t>m</m:t>
+                              </m:r>
+                            </m:e>
+                            <m:sub>
+                              <m:r>
+                                <a:rPr lang="de-DE" sz="1600" b="0" i="1" smtClean="0">
+                                  <a:solidFill>
+                                    <a:schemeClr val="bg1"/>
+                                  </a:solidFill>
+                                  <a:latin typeface="Cambria Math" panose="02040503050406030204" pitchFamily="18" charset="0"/>
+                                </a:rPr>
+                                <m:t>2</m:t>
+                              </m:r>
+                            </m:sub>
+                          </m:sSub>
+                        </m:oMath>
+                      </m:oMathPara>
+                    </a14:m>
+                    <a:endParaRPr lang="en-US" sz="1600" dirty="0">
+                      <a:solidFill>
+                        <a:schemeClr val="bg1"/>
+                      </a:solidFill>
+                    </a:endParaRPr>
+                  </a:p>
+                </p:txBody>
+              </p:sp>
+            </mc:Choice>
+            <mc:Fallback>
+              <p:sp>
+                <p:nvSpPr>
+                  <p:cNvPr id="45" name="TextBox 44">
+                    <a:extLst>
+                      <a:ext uri="{FF2B5EF4-FFF2-40B4-BE49-F238E27FC236}">
+                        <a16:creationId xmlns:a16="http://schemas.microsoft.com/office/drawing/2014/main" id="{252DF143-C11C-397F-520C-BBA7B9736405}"/>
+                      </a:ext>
+                    </a:extLst>
+                  </p:cNvPr>
+                  <p:cNvSpPr txBox="1">
+                    <a:spLocks noRot="1" noChangeAspect="1" noMove="1" noResize="1" noEditPoints="1" noAdjustHandles="1" noChangeArrowheads="1" noChangeShapeType="1" noTextEdit="1"/>
+                  </p:cNvSpPr>
+                  <p:nvPr/>
+                </p:nvSpPr>
+                <p:spPr>
+                  <a:xfrm>
+                    <a:off x="465983" y="2632489"/>
+                    <a:ext cx="740342" cy="482264"/>
+                  </a:xfrm>
+                  <a:prstGeom prst="rect">
+                    <a:avLst/>
+                  </a:prstGeom>
+                  <a:blipFill>
+                    <a:blip r:embed="rId14"/>
+                    <a:stretch>
+                      <a:fillRect/>
+                    </a:stretch>
+                  </a:blipFill>
+                </p:spPr>
+                <p:txBody>
+                  <a:bodyPr/>
+                  <a:lstStyle/>
+                  <a:p>
+                    <a:r>
+                      <a:rPr lang="en-US">
+                        <a:noFill/>
+                      </a:rPr>
+                      <a:t> </a:t>
+                    </a:r>
+                  </a:p>
+                </p:txBody>
+              </p:sp>
+            </mc:Fallback>
+          </mc:AlternateContent>
+          <mc:AlternateContent xmlns:mc="http://schemas.openxmlformats.org/markup-compatibility/2006">
+            <mc:Choice xmlns:a14="http://schemas.microsoft.com/office/drawing/2010/main" Requires="a14">
+              <p:sp>
+                <p:nvSpPr>
+                  <p:cNvPr id="46" name="TextBox 45">
+                    <a:extLst>
+                      <a:ext uri="{FF2B5EF4-FFF2-40B4-BE49-F238E27FC236}">
+                        <a16:creationId xmlns:a16="http://schemas.microsoft.com/office/drawing/2014/main" id="{685EDC62-C621-4C4A-A761-09C988AB3144}"/>
+                      </a:ext>
+                    </a:extLst>
+                  </p:cNvPr>
+                  <p:cNvSpPr txBox="1"/>
+                  <p:nvPr/>
+                </p:nvSpPr>
+                <p:spPr>
+                  <a:xfrm>
+                    <a:off x="2121068" y="1391826"/>
+                    <a:ext cx="651146" cy="482264"/>
+                  </a:xfrm>
+                  <a:prstGeom prst="rect">
+                    <a:avLst/>
+                  </a:prstGeom>
+                  <a:noFill/>
+                  <a:ln w="19050">
+                    <a:solidFill>
+                      <a:srgbClr val="C00000"/>
+                    </a:solidFill>
+                  </a:ln>
+                </p:spPr>
+                <p:txBody>
+                  <a:bodyPr wrap="square">
+                    <a:spAutoFit/>
+                  </a:bodyPr>
+                  <a:lstStyle/>
+                  <a:p>
+                    <a:pPr/>
+                    <a14:m>
+                      <m:oMathPara xmlns:m="http://schemas.openxmlformats.org/officeDocument/2006/math">
+                        <m:oMathParaPr>
+                          <m:jc m:val="centerGroup"/>
+                        </m:oMathParaPr>
+                        <m:oMath xmlns:m="http://schemas.openxmlformats.org/officeDocument/2006/math">
+                          <m:sSub>
+                            <m:sSubPr>
+                              <m:ctrlPr>
+                                <a:rPr lang="de-DE" sz="1600" b="1" i="1" smtClean="0">
+                                  <a:solidFill>
+                                    <a:schemeClr val="bg1"/>
+                                  </a:solidFill>
+                                  <a:latin typeface="Cambria Math" panose="02040503050406030204" pitchFamily="18" charset="0"/>
+                                </a:rPr>
+                              </m:ctrlPr>
+                            </m:sSubPr>
+                            <m:e>
+                              <m:r>
+                                <a:rPr lang="de-DE" sz="1600" b="1" i="1" smtClean="0">
+                                  <a:solidFill>
+                                    <a:schemeClr val="bg1"/>
+                                  </a:solidFill>
+                                  <a:latin typeface="Cambria Math" panose="02040503050406030204" pitchFamily="18" charset="0"/>
+                                </a:rPr>
+                                <m:t>𝒎</m:t>
+                              </m:r>
+                            </m:e>
+                            <m:sub>
+                              <m:r>
+                                <a:rPr lang="de-DE" sz="1600" b="1" i="1" smtClean="0">
+                                  <a:solidFill>
+                                    <a:schemeClr val="bg1"/>
+                                  </a:solidFill>
+                                  <a:latin typeface="Cambria Math" panose="02040503050406030204" pitchFamily="18" charset="0"/>
+                                </a:rPr>
+                                <m:t>𝒛</m:t>
+                              </m:r>
+                            </m:sub>
+                          </m:sSub>
+                        </m:oMath>
+                      </m:oMathPara>
+                    </a14:m>
+                    <a:endParaRPr lang="en-US" sz="1600" b="1" dirty="0">
+                      <a:solidFill>
+                        <a:schemeClr val="bg1"/>
+                      </a:solidFill>
+                    </a:endParaRPr>
+                  </a:p>
+                </p:txBody>
+              </p:sp>
+            </mc:Choice>
+            <mc:Fallback>
+              <p:sp>
+                <p:nvSpPr>
+                  <p:cNvPr id="46" name="TextBox 45">
+                    <a:extLst>
+                      <a:ext uri="{FF2B5EF4-FFF2-40B4-BE49-F238E27FC236}">
+                        <a16:creationId xmlns:a16="http://schemas.microsoft.com/office/drawing/2014/main" id="{685EDC62-C621-4C4A-A761-09C988AB3144}"/>
+                      </a:ext>
+                    </a:extLst>
+                  </p:cNvPr>
+                  <p:cNvSpPr txBox="1">
+                    <a:spLocks noRot="1" noChangeAspect="1" noMove="1" noResize="1" noEditPoints="1" noAdjustHandles="1" noChangeArrowheads="1" noChangeShapeType="1" noTextEdit="1"/>
+                  </p:cNvSpPr>
+                  <p:nvPr/>
+                </p:nvSpPr>
+                <p:spPr>
+                  <a:xfrm>
+                    <a:off x="2121068" y="1391826"/>
+                    <a:ext cx="651146" cy="482264"/>
+                  </a:xfrm>
+                  <a:prstGeom prst="rect">
+                    <a:avLst/>
+                  </a:prstGeom>
+                  <a:blipFill>
+                    <a:blip r:embed="rId15"/>
+                    <a:stretch>
+                      <a:fillRect/>
+                    </a:stretch>
+                  </a:blipFill>
+                  <a:ln w="19050">
+                    <a:solidFill>
+                      <a:srgbClr val="C00000"/>
+                    </a:solidFill>
+                  </a:ln>
+                </p:spPr>
+                <p:txBody>
+                  <a:bodyPr/>
+                  <a:lstStyle/>
+                  <a:p>
+                    <a:r>
+                      <a:rPr lang="en-US">
+                        <a:noFill/>
+                      </a:rPr>
+                      <a:t> </a:t>
+                    </a:r>
+                  </a:p>
+                </p:txBody>
+              </p:sp>
+            </mc:Fallback>
+          </mc:AlternateContent>
+          <mc:AlternateContent xmlns:mc="http://schemas.openxmlformats.org/markup-compatibility/2006">
+            <mc:Choice xmlns:a14="http://schemas.microsoft.com/office/drawing/2010/main" Requires="a14">
+              <p:sp>
+                <p:nvSpPr>
+                  <p:cNvPr id="47" name="TextBox 46">
+                    <a:extLst>
+                      <a:ext uri="{FF2B5EF4-FFF2-40B4-BE49-F238E27FC236}">
+                        <a16:creationId xmlns:a16="http://schemas.microsoft.com/office/drawing/2014/main" id="{463F6075-0787-199F-3C53-E5FD284C3852}"/>
+                      </a:ext>
+                    </a:extLst>
+                  </p:cNvPr>
+                  <p:cNvSpPr txBox="1"/>
+                  <p:nvPr/>
+                </p:nvSpPr>
+                <p:spPr>
+                  <a:xfrm>
+                    <a:off x="1057861" y="1831144"/>
+                    <a:ext cx="970607" cy="482264"/>
+                  </a:xfrm>
+                  <a:prstGeom prst="rect">
+                    <a:avLst/>
+                  </a:prstGeom>
+                  <a:noFill/>
+                </p:spPr>
+                <p:txBody>
+                  <a:bodyPr wrap="square">
+                    <a:spAutoFit/>
+                  </a:bodyPr>
+                  <a:lstStyle/>
+                  <a:p>
+                    <a:pPr/>
+                    <a14:m>
+                      <m:oMathPara xmlns:m="http://schemas.openxmlformats.org/officeDocument/2006/math">
+                        <m:oMathParaPr>
+                          <m:jc m:val="centerGroup"/>
+                        </m:oMathParaPr>
+                        <m:oMath xmlns:m="http://schemas.openxmlformats.org/officeDocument/2006/math">
+                          <m:sSub>
+                            <m:sSubPr>
+                              <m:ctrlPr>
+                                <a:rPr lang="de-DE" sz="1600" b="0" i="1" smtClean="0">
+                                  <a:solidFill>
+                                    <a:schemeClr val="bg1"/>
+                                  </a:solidFill>
+                                  <a:latin typeface="Cambria Math" panose="02040503050406030204" pitchFamily="18" charset="0"/>
+                                </a:rPr>
+                              </m:ctrlPr>
+                            </m:sSubPr>
+                            <m:e>
+                              <m:r>
+                                <m:rPr>
+                                  <m:sty m:val="p"/>
+                                </m:rPr>
+                                <a:rPr lang="de-DE" sz="1600" b="0" i="1" smtClean="0">
+                                  <a:solidFill>
+                                    <a:schemeClr val="bg1"/>
+                                  </a:solidFill>
+                                  <a:latin typeface="Cambria Math" panose="02040503050406030204" pitchFamily="18" charset="0"/>
+                                </a:rPr>
+                                <m:t>r</m:t>
+                              </m:r>
+                            </m:e>
+                            <m:sub>
+                              <m:r>
+                                <a:rPr lang="de-DE" sz="1600" b="0" i="1" smtClean="0">
+                                  <a:solidFill>
+                                    <a:schemeClr val="bg1"/>
+                                  </a:solidFill>
+                                  <a:latin typeface="Cambria Math" panose="02040503050406030204" pitchFamily="18" charset="0"/>
+                                </a:rPr>
+                                <m:t>1</m:t>
+                              </m:r>
+                            </m:sub>
+                          </m:sSub>
+                        </m:oMath>
+                      </m:oMathPara>
+                    </a14:m>
+                    <a:endParaRPr lang="en-US" sz="1600" dirty="0">
+                      <a:solidFill>
+                        <a:schemeClr val="bg1"/>
+                      </a:solidFill>
+                    </a:endParaRPr>
+                  </a:p>
+                </p:txBody>
+              </p:sp>
+            </mc:Choice>
+            <mc:Fallback>
+              <p:sp>
+                <p:nvSpPr>
+                  <p:cNvPr id="47" name="TextBox 46">
+                    <a:extLst>
+                      <a:ext uri="{FF2B5EF4-FFF2-40B4-BE49-F238E27FC236}">
+                        <a16:creationId xmlns:a16="http://schemas.microsoft.com/office/drawing/2014/main" id="{463F6075-0787-199F-3C53-E5FD284C3852}"/>
+                      </a:ext>
+                    </a:extLst>
+                  </p:cNvPr>
+                  <p:cNvSpPr txBox="1">
+                    <a:spLocks noRot="1" noChangeAspect="1" noMove="1" noResize="1" noEditPoints="1" noAdjustHandles="1" noChangeArrowheads="1" noChangeShapeType="1" noTextEdit="1"/>
+                  </p:cNvSpPr>
+                  <p:nvPr/>
+                </p:nvSpPr>
+                <p:spPr>
+                  <a:xfrm>
+                    <a:off x="1057861" y="1831144"/>
+                    <a:ext cx="970607" cy="482264"/>
+                  </a:xfrm>
+                  <a:prstGeom prst="rect">
+                    <a:avLst/>
+                  </a:prstGeom>
+                  <a:blipFill>
+                    <a:blip r:embed="rId16"/>
+                    <a:stretch>
+                      <a:fillRect/>
+                    </a:stretch>
+                  </a:blipFill>
+                </p:spPr>
+                <p:txBody>
+                  <a:bodyPr/>
+                  <a:lstStyle/>
+                  <a:p>
+                    <a:r>
+                      <a:rPr lang="en-US">
+                        <a:noFill/>
+                      </a:rPr>
+                      <a:t> </a:t>
+                    </a:r>
+                  </a:p>
+                </p:txBody>
+              </p:sp>
+            </mc:Fallback>
+          </mc:AlternateContent>
+          <mc:AlternateContent xmlns:mc="http://schemas.openxmlformats.org/markup-compatibility/2006">
+            <mc:Choice xmlns:a14="http://schemas.microsoft.com/office/drawing/2010/main" Requires="a14">
+              <p:sp>
+                <p:nvSpPr>
+                  <p:cNvPr id="48" name="TextBox 47">
+                    <a:extLst>
+                      <a:ext uri="{FF2B5EF4-FFF2-40B4-BE49-F238E27FC236}">
+                        <a16:creationId xmlns:a16="http://schemas.microsoft.com/office/drawing/2014/main" id="{25905CC1-6247-176A-FD43-8E6517564CB7}"/>
+                      </a:ext>
+                    </a:extLst>
+                  </p:cNvPr>
+                  <p:cNvSpPr txBox="1"/>
+                  <p:nvPr/>
+                </p:nvSpPr>
+                <p:spPr>
+                  <a:xfrm>
+                    <a:off x="1086781" y="2439570"/>
+                    <a:ext cx="970607" cy="482264"/>
+                  </a:xfrm>
+                  <a:prstGeom prst="rect">
+                    <a:avLst/>
+                  </a:prstGeom>
+                  <a:noFill/>
+                </p:spPr>
+                <p:txBody>
+                  <a:bodyPr wrap="square">
+                    <a:spAutoFit/>
+                  </a:bodyPr>
+                  <a:lstStyle/>
+                  <a:p>
+                    <a:pPr/>
+                    <a14:m>
+                      <m:oMathPara xmlns:m="http://schemas.openxmlformats.org/officeDocument/2006/math">
+                        <m:oMathParaPr>
+                          <m:jc m:val="centerGroup"/>
+                        </m:oMathParaPr>
+                        <m:oMath xmlns:m="http://schemas.openxmlformats.org/officeDocument/2006/math">
+                          <m:sSub>
+                            <m:sSubPr>
+                              <m:ctrlPr>
+                                <a:rPr lang="de-DE" sz="1600" b="0" i="1" smtClean="0">
+                                  <a:solidFill>
+                                    <a:schemeClr val="bg1"/>
+                                  </a:solidFill>
+                                  <a:latin typeface="Cambria Math" panose="02040503050406030204" pitchFamily="18" charset="0"/>
+                                </a:rPr>
+                              </m:ctrlPr>
+                            </m:sSubPr>
+                            <m:e>
+                              <m:r>
+                                <m:rPr>
+                                  <m:sty m:val="p"/>
+                                </m:rPr>
+                                <a:rPr lang="de-DE" sz="1600" b="0" i="1" smtClean="0">
+                                  <a:solidFill>
+                                    <a:schemeClr val="bg1"/>
+                                  </a:solidFill>
+                                  <a:latin typeface="Cambria Math" panose="02040503050406030204" pitchFamily="18" charset="0"/>
+                                </a:rPr>
+                                <m:t>r</m:t>
+                              </m:r>
+                            </m:e>
+                            <m:sub>
+                              <m:r>
+                                <a:rPr lang="de-DE" sz="1600" b="0" i="1" smtClean="0">
+                                  <a:solidFill>
+                                    <a:schemeClr val="bg1"/>
+                                  </a:solidFill>
+                                  <a:latin typeface="Cambria Math" panose="02040503050406030204" pitchFamily="18" charset="0"/>
+                                </a:rPr>
+                                <m:t>2</m:t>
+                              </m:r>
+                            </m:sub>
+                          </m:sSub>
+                        </m:oMath>
+                      </m:oMathPara>
+                    </a14:m>
+                    <a:endParaRPr lang="en-US" sz="1600" dirty="0">
+                      <a:solidFill>
+                        <a:schemeClr val="bg1"/>
+                      </a:solidFill>
+                    </a:endParaRPr>
+                  </a:p>
+                </p:txBody>
+              </p:sp>
+            </mc:Choice>
+            <mc:Fallback>
+              <p:sp>
+                <p:nvSpPr>
+                  <p:cNvPr id="48" name="TextBox 47">
+                    <a:extLst>
+                      <a:ext uri="{FF2B5EF4-FFF2-40B4-BE49-F238E27FC236}">
+                        <a16:creationId xmlns:a16="http://schemas.microsoft.com/office/drawing/2014/main" id="{25905CC1-6247-176A-FD43-8E6517564CB7}"/>
+                      </a:ext>
+                    </a:extLst>
+                  </p:cNvPr>
+                  <p:cNvSpPr txBox="1">
+                    <a:spLocks noRot="1" noChangeAspect="1" noMove="1" noResize="1" noEditPoints="1" noAdjustHandles="1" noChangeArrowheads="1" noChangeShapeType="1" noTextEdit="1"/>
+                  </p:cNvSpPr>
+                  <p:nvPr/>
+                </p:nvSpPr>
+                <p:spPr>
+                  <a:xfrm>
+                    <a:off x="1086781" y="2439570"/>
+                    <a:ext cx="970607" cy="482264"/>
+                  </a:xfrm>
+                  <a:prstGeom prst="rect">
+                    <a:avLst/>
+                  </a:prstGeom>
+                  <a:blipFill>
+                    <a:blip r:embed="rId17"/>
+                    <a:stretch>
+                      <a:fillRect/>
+                    </a:stretch>
+                  </a:blipFill>
+                </p:spPr>
+                <p:txBody>
+                  <a:bodyPr/>
+                  <a:lstStyle/>
+                  <a:p>
+                    <a:r>
+                      <a:rPr lang="en-US">
+                        <a:noFill/>
+                      </a:rPr>
+                      <a:t> </a:t>
+                    </a:r>
+                  </a:p>
+                </p:txBody>
+              </p:sp>
+            </mc:Fallback>
+          </mc:AlternateContent>
+          <mc:AlternateContent xmlns:mc="http://schemas.openxmlformats.org/markup-compatibility/2006">
+            <mc:Choice xmlns:a14="http://schemas.microsoft.com/office/drawing/2010/main" Requires="a14">
+              <p:sp>
+                <p:nvSpPr>
+                  <p:cNvPr id="49" name="TextBox 48">
+                    <a:extLst>
+                      <a:ext uri="{FF2B5EF4-FFF2-40B4-BE49-F238E27FC236}">
+                        <a16:creationId xmlns:a16="http://schemas.microsoft.com/office/drawing/2014/main" id="{6435DA52-6F0D-84AF-740B-0733052D31CE}"/>
+                      </a:ext>
+                    </a:extLst>
+                  </p:cNvPr>
+                  <p:cNvSpPr txBox="1"/>
+                  <p:nvPr/>
+                </p:nvSpPr>
+                <p:spPr>
+                  <a:xfrm>
+                    <a:off x="2871649" y="1730967"/>
+                    <a:ext cx="480274" cy="482264"/>
+                  </a:xfrm>
+                  <a:prstGeom prst="rect">
+                    <a:avLst/>
+                  </a:prstGeom>
+                  <a:noFill/>
+                </p:spPr>
+                <p:txBody>
+                  <a:bodyPr wrap="square">
+                    <a:spAutoFit/>
+                  </a:bodyPr>
+                  <a:lstStyle/>
+                  <a:p>
+                    <a:pPr/>
+                    <a14:m>
+                      <m:oMathPara xmlns:m="http://schemas.openxmlformats.org/officeDocument/2006/math">
+                        <m:oMathParaPr>
+                          <m:jc m:val="centerGroup"/>
+                        </m:oMathParaPr>
+                        <m:oMath xmlns:m="http://schemas.openxmlformats.org/officeDocument/2006/math">
+                          <m:sSub>
+                            <m:sSubPr>
+                              <m:ctrlPr>
+                                <a:rPr lang="de-DE" sz="1600" b="0" i="1" smtClean="0">
+                                  <a:solidFill>
+                                    <a:schemeClr val="bg1"/>
+                                  </a:solidFill>
+                                  <a:latin typeface="Cambria Math" panose="02040503050406030204" pitchFamily="18" charset="0"/>
+                                </a:rPr>
+                              </m:ctrlPr>
+                            </m:sSubPr>
+                            <m:e>
+                              <m:r>
+                                <m:rPr>
+                                  <m:sty m:val="p"/>
+                                </m:rPr>
+                                <a:rPr lang="de-DE" sz="1600" b="0" i="1" smtClean="0">
+                                  <a:solidFill>
+                                    <a:schemeClr val="bg1"/>
+                                  </a:solidFill>
+                                  <a:latin typeface="Cambria Math" panose="02040503050406030204" pitchFamily="18" charset="0"/>
+                                </a:rPr>
+                                <m:t>r</m:t>
+                              </m:r>
+                            </m:e>
+                            <m:sub>
+                              <m:r>
+                                <a:rPr lang="de-DE" sz="1600" b="0" i="1" smtClean="0">
+                                  <a:solidFill>
+                                    <a:schemeClr val="bg1"/>
+                                  </a:solidFill>
+                                  <a:latin typeface="Cambria Math" panose="02040503050406030204" pitchFamily="18" charset="0"/>
+                                </a:rPr>
+                                <m:t>3</m:t>
+                              </m:r>
+                            </m:sub>
+                          </m:sSub>
+                        </m:oMath>
+                      </m:oMathPara>
+                    </a14:m>
+                    <a:endParaRPr lang="en-US" sz="1600" dirty="0">
+                      <a:solidFill>
+                        <a:schemeClr val="bg1"/>
+                      </a:solidFill>
+                    </a:endParaRPr>
+                  </a:p>
+                </p:txBody>
+              </p:sp>
+            </mc:Choice>
+            <mc:Fallback>
+              <p:sp>
+                <p:nvSpPr>
+                  <p:cNvPr id="49" name="TextBox 48">
+                    <a:extLst>
+                      <a:ext uri="{FF2B5EF4-FFF2-40B4-BE49-F238E27FC236}">
+                        <a16:creationId xmlns:a16="http://schemas.microsoft.com/office/drawing/2014/main" id="{6435DA52-6F0D-84AF-740B-0733052D31CE}"/>
+                      </a:ext>
+                    </a:extLst>
+                  </p:cNvPr>
+                  <p:cNvSpPr txBox="1">
+                    <a:spLocks noRot="1" noChangeAspect="1" noMove="1" noResize="1" noEditPoints="1" noAdjustHandles="1" noChangeArrowheads="1" noChangeShapeType="1" noTextEdit="1"/>
+                  </p:cNvSpPr>
+                  <p:nvPr/>
+                </p:nvSpPr>
+                <p:spPr>
+                  <a:xfrm>
+                    <a:off x="2871649" y="1730967"/>
+                    <a:ext cx="480274" cy="482264"/>
+                  </a:xfrm>
+                  <a:prstGeom prst="rect">
+                    <a:avLst/>
+                  </a:prstGeom>
+                  <a:blipFill>
+                    <a:blip r:embed="rId18"/>
+                    <a:stretch>
+                      <a:fillRect/>
+                    </a:stretch>
+                  </a:blipFill>
+                </p:spPr>
+                <p:txBody>
+                  <a:bodyPr/>
+                  <a:lstStyle/>
+                  <a:p>
+                    <a:r>
+                      <a:rPr lang="en-US">
+                        <a:noFill/>
+                      </a:rPr>
+                      <a:t> </a:t>
+                    </a:r>
+                  </a:p>
+                </p:txBody>
+              </p:sp>
+            </mc:Fallback>
+          </mc:AlternateContent>
+        </p:grpSp>
+      </p:grpSp>
+      <p:pic>
+        <p:nvPicPr>
+          <p:cNvPr id="58" name="Picture 57">
+            <a:extLst>
+              <a:ext uri="{FF2B5EF4-FFF2-40B4-BE49-F238E27FC236}">
+                <a16:creationId xmlns:a16="http://schemas.microsoft.com/office/drawing/2014/main" id="{9666714F-C084-6C34-A7FD-C1982C53D86A}"/>
+              </a:ext>
+            </a:extLst>
+          </p:cNvPr>
+          <p:cNvPicPr>
+            <a:picLocks noChangeAspect="1"/>
+          </p:cNvPicPr>
+          <p:nvPr/>
+        </p:nvPicPr>
+        <p:blipFill>
+          <a:blip r:embed="rId19"/>
+          <a:stretch>
+            <a:fillRect/>
+          </a:stretch>
+        </p:blipFill>
+        <p:spPr>
+          <a:xfrm>
+            <a:off x="6969333" y="1990193"/>
+            <a:ext cx="2990850" cy="1533525"/>
+          </a:xfrm>
+          <a:prstGeom prst="rect">
+            <a:avLst/>
+          </a:prstGeom>
+          <a:ln>
+            <a:solidFill>
+              <a:schemeClr val="accent1"/>
+            </a:solidFill>
+          </a:ln>
+        </p:spPr>
+      </p:pic>
+      <p:sp>
+        <p:nvSpPr>
+          <p:cNvPr id="59" name="TextBox 58">
+            <a:extLst>
+              <a:ext uri="{FF2B5EF4-FFF2-40B4-BE49-F238E27FC236}">
+                <a16:creationId xmlns:a16="http://schemas.microsoft.com/office/drawing/2014/main" id="{176F00EA-2BF8-AC26-052B-E1712B05FCB0}"/>
+              </a:ext>
+            </a:extLst>
+          </p:cNvPr>
+          <p:cNvSpPr txBox="1"/>
+          <p:nvPr/>
+        </p:nvSpPr>
+        <p:spPr>
+          <a:xfrm>
+            <a:off x="7633300" y="1995780"/>
+            <a:ext cx="848412" cy="369332"/>
+          </a:xfrm>
+          <a:prstGeom prst="rect">
+            <a:avLst/>
+          </a:prstGeom>
+          <a:noFill/>
+        </p:spPr>
+        <p:txBody>
+          <a:bodyPr wrap="square">
+            <a:spAutoFit/>
+          </a:bodyPr>
+          <a:lstStyle/>
+          <a:p>
+            <a:r>
+              <a:rPr lang="en-US" dirty="0">
+                <a:hlinkClick r:id="rId20"/>
+              </a:rPr>
+              <a:t>THI2</a:t>
+            </a:r>
+            <a:endParaRPr lang="en-US" dirty="0"/>
+          </a:p>
+        </p:txBody>
+      </p:sp>
+      <p:pic>
+        <p:nvPicPr>
+          <p:cNvPr id="61" name="Picture 60">
+            <a:extLst>
+              <a:ext uri="{FF2B5EF4-FFF2-40B4-BE49-F238E27FC236}">
+                <a16:creationId xmlns:a16="http://schemas.microsoft.com/office/drawing/2014/main" id="{D539B949-CA00-A240-362B-6BF455610EB2}"/>
+              </a:ext>
+            </a:extLst>
+          </p:cNvPr>
+          <p:cNvPicPr>
+            <a:picLocks noChangeAspect="1"/>
+          </p:cNvPicPr>
+          <p:nvPr/>
+        </p:nvPicPr>
+        <p:blipFill>
+          <a:blip r:embed="rId21"/>
+          <a:stretch>
+            <a:fillRect/>
+          </a:stretch>
+        </p:blipFill>
+        <p:spPr>
+          <a:xfrm>
+            <a:off x="6929258" y="3608385"/>
+            <a:ext cx="4363059" cy="2429214"/>
+          </a:xfrm>
+          <a:prstGeom prst="rect">
+            <a:avLst/>
+          </a:prstGeom>
+        </p:spPr>
+      </p:pic>
+    </p:spTree>
+    <p:extLst>
+      <p:ext uri="{BB962C8B-B14F-4D97-AF65-F5344CB8AC3E}">
+        <p14:creationId xmlns:p14="http://schemas.microsoft.com/office/powerpoint/2010/main" val="1661616277"/>
       </p:ext>
     </p:extLst>
   </p:cSld>

--- a/slides/slides.pptx
+++ b/slides/slides.pptx
@@ -5,7 +5,7 @@
     <p:sldMasterId id="2147483648" r:id="rId1"/>
   </p:sldMasterIdLst>
   <p:notesMasterIdLst>
-    <p:notesMasterId r:id="rId13"/>
+    <p:notesMasterId r:id="rId14"/>
   </p:notesMasterIdLst>
   <p:sldIdLst>
     <p:sldId id="256" r:id="rId2"/>
@@ -15,10 +15,11 @@
     <p:sldId id="267" r:id="rId6"/>
     <p:sldId id="264" r:id="rId7"/>
     <p:sldId id="268" r:id="rId8"/>
-    <p:sldId id="261" r:id="rId9"/>
-    <p:sldId id="260" r:id="rId10"/>
-    <p:sldId id="263" r:id="rId11"/>
-    <p:sldId id="259" r:id="rId12"/>
+    <p:sldId id="269" r:id="rId9"/>
+    <p:sldId id="261" r:id="rId10"/>
+    <p:sldId id="260" r:id="rId11"/>
+    <p:sldId id="263" r:id="rId12"/>
+    <p:sldId id="259" r:id="rId13"/>
   </p:sldIdLst>
   <p:sldSz cx="12192000" cy="6858000"/>
   <p:notesSz cx="6858000" cy="9144000"/>
@@ -207,7 +208,7 @@
           <a:p>
             <a:fld id="{FF1A252C-87EA-4881-A10E-9E4CA26E6FE3}" type="datetimeFigureOut">
               <a:rPr lang="en-US" smtClean="0"/>
-              <a:t>2/19/2026</a:t>
+              <a:t>2/21/2026</a:t>
             </a:fld>
             <a:endParaRPr lang="en-US"/>
           </a:p>
@@ -515,8 +516,8 @@
         </p:nvSpPr>
         <p:spPr/>
       </p:sp>
-      <mc:AlternateContent xmlns:mc="http://schemas.openxmlformats.org/markup-compatibility/2006">
-        <mc:Choice xmlns:a14="http://schemas.microsoft.com/office/drawing/2010/main" Requires="a14">
+      <mc:AlternateContent xmlns:mc="http://schemas.openxmlformats.org/markup-compatibility/2006" xmlns:a14="http://schemas.microsoft.com/office/drawing/2010/main">
+        <mc:Choice Requires="a14">
           <p:sp>
             <p:nvSpPr>
               <p:cNvPr id="3" name="Notes Placeholder 2">
@@ -1271,7 +1272,7 @@
             </p:txBody>
           </p:sp>
         </mc:Choice>
-        <mc:Fallback>
+        <mc:Fallback xmlns="">
           <p:sp>
             <p:nvSpPr>
               <p:cNvPr id="3" name="Notes Placeholder 2">
@@ -1811,8 +1812,8 @@
         </p:nvSpPr>
         <p:spPr/>
       </p:sp>
-      <mc:AlternateContent xmlns:mc="http://schemas.openxmlformats.org/markup-compatibility/2006">
-        <mc:Choice xmlns:a14="http://schemas.microsoft.com/office/drawing/2010/main" Requires="a14">
+      <mc:AlternateContent xmlns:mc="http://schemas.openxmlformats.org/markup-compatibility/2006" xmlns:a14="http://schemas.microsoft.com/office/drawing/2010/main">
+        <mc:Choice Requires="a14">
           <p:sp>
             <p:nvSpPr>
               <p:cNvPr id="3" name="Notes Placeholder 2">
@@ -2567,7 +2568,7 @@
             </p:txBody>
           </p:sp>
         </mc:Choice>
-        <mc:Fallback>
+        <mc:Fallback xmlns="">
           <p:sp>
             <p:nvSpPr>
               <p:cNvPr id="3" name="Notes Placeholder 2">
@@ -3107,8 +3108,8 @@
         </p:nvSpPr>
         <p:spPr/>
       </p:sp>
-      <mc:AlternateContent xmlns:mc="http://schemas.openxmlformats.org/markup-compatibility/2006">
-        <mc:Choice xmlns:a14="http://schemas.microsoft.com/office/drawing/2010/main" Requires="a14">
+      <mc:AlternateContent xmlns:mc="http://schemas.openxmlformats.org/markup-compatibility/2006" xmlns:a14="http://schemas.microsoft.com/office/drawing/2010/main">
+        <mc:Choice Requires="a14">
           <p:sp>
             <p:nvSpPr>
               <p:cNvPr id="3" name="Notes Placeholder 2">
@@ -3863,7 +3864,7 @@
             </p:txBody>
           </p:sp>
         </mc:Choice>
-        <mc:Fallback>
+        <mc:Fallback xmlns="">
           <p:sp>
             <p:nvSpPr>
               <p:cNvPr id="3" name="Notes Placeholder 2">
@@ -5699,8 +5700,8 @@
         </p:nvSpPr>
         <p:spPr/>
       </p:sp>
-      <mc:AlternateContent xmlns:mc="http://schemas.openxmlformats.org/markup-compatibility/2006">
-        <mc:Choice xmlns:a14="http://schemas.microsoft.com/office/drawing/2010/main" Requires="a14">
+      <mc:AlternateContent xmlns:mc="http://schemas.openxmlformats.org/markup-compatibility/2006" xmlns:a14="http://schemas.microsoft.com/office/drawing/2010/main">
+        <mc:Choice Requires="a14">
           <p:sp>
             <p:nvSpPr>
               <p:cNvPr id="3" name="Notes Placeholder 2">
@@ -6455,7 +6456,7 @@
             </p:txBody>
           </p:sp>
         </mc:Choice>
-        <mc:Fallback>
+        <mc:Fallback xmlns="">
           <p:sp>
             <p:nvSpPr>
               <p:cNvPr id="3" name="Notes Placeholder 2">
@@ -8231,7 +8232,7 @@
           <a:p>
             <a:fld id="{5F818A67-DE81-4BE5-A09A-01BC8A96D5BB}" type="slidenum">
               <a:rPr lang="en-US" smtClean="0"/>
-              <a:t>10</a:t>
+              <a:t>11</a:t>
             </a:fld>
             <a:endParaRPr lang="en-US"/>
           </a:p>
@@ -9527,7 +9528,7 @@
           <a:p>
             <a:fld id="{5F818A67-DE81-4BE5-A09A-01BC8A96D5BB}" type="slidenum">
               <a:rPr lang="en-US" smtClean="0"/>
-              <a:t>11</a:t>
+              <a:t>12</a:t>
             </a:fld>
             <a:endParaRPr lang="en-US"/>
           </a:p>
@@ -9693,7 +9694,7 @@
           <a:p>
             <a:fld id="{E6D7105C-A8E4-4519-9028-35FD188A98F2}" type="datetimeFigureOut">
               <a:rPr lang="en-US" smtClean="0"/>
-              <a:t>2/19/2026</a:t>
+              <a:t>2/21/2026</a:t>
             </a:fld>
             <a:endParaRPr lang="en-US"/>
           </a:p>
@@ -9891,7 +9892,7 @@
           <a:p>
             <a:fld id="{E6D7105C-A8E4-4519-9028-35FD188A98F2}" type="datetimeFigureOut">
               <a:rPr lang="en-US" smtClean="0"/>
-              <a:t>2/19/2026</a:t>
+              <a:t>2/21/2026</a:t>
             </a:fld>
             <a:endParaRPr lang="en-US"/>
           </a:p>
@@ -10099,7 +10100,7 @@
           <a:p>
             <a:fld id="{E6D7105C-A8E4-4519-9028-35FD188A98F2}" type="datetimeFigureOut">
               <a:rPr lang="en-US" smtClean="0"/>
-              <a:t>2/19/2026</a:t>
+              <a:t>2/21/2026</a:t>
             </a:fld>
             <a:endParaRPr lang="en-US"/>
           </a:p>
@@ -10297,7 +10298,7 @@
           <a:p>
             <a:fld id="{E6D7105C-A8E4-4519-9028-35FD188A98F2}" type="datetimeFigureOut">
               <a:rPr lang="en-US" smtClean="0"/>
-              <a:t>2/19/2026</a:t>
+              <a:t>2/21/2026</a:t>
             </a:fld>
             <a:endParaRPr lang="en-US"/>
           </a:p>
@@ -10572,7 +10573,7 @@
           <a:p>
             <a:fld id="{E6D7105C-A8E4-4519-9028-35FD188A98F2}" type="datetimeFigureOut">
               <a:rPr lang="en-US" smtClean="0"/>
-              <a:t>2/19/2026</a:t>
+              <a:t>2/21/2026</a:t>
             </a:fld>
             <a:endParaRPr lang="en-US"/>
           </a:p>
@@ -10837,7 +10838,7 @@
           <a:p>
             <a:fld id="{E6D7105C-A8E4-4519-9028-35FD188A98F2}" type="datetimeFigureOut">
               <a:rPr lang="en-US" smtClean="0"/>
-              <a:t>2/19/2026</a:t>
+              <a:t>2/21/2026</a:t>
             </a:fld>
             <a:endParaRPr lang="en-US"/>
           </a:p>
@@ -11249,7 +11250,7 @@
           <a:p>
             <a:fld id="{E6D7105C-A8E4-4519-9028-35FD188A98F2}" type="datetimeFigureOut">
               <a:rPr lang="en-US" smtClean="0"/>
-              <a:t>2/19/2026</a:t>
+              <a:t>2/21/2026</a:t>
             </a:fld>
             <a:endParaRPr lang="en-US"/>
           </a:p>
@@ -11390,7 +11391,7 @@
           <a:p>
             <a:fld id="{E6D7105C-A8E4-4519-9028-35FD188A98F2}" type="datetimeFigureOut">
               <a:rPr lang="en-US" smtClean="0"/>
-              <a:t>2/19/2026</a:t>
+              <a:t>2/21/2026</a:t>
             </a:fld>
             <a:endParaRPr lang="en-US"/>
           </a:p>
@@ -11503,7 +11504,7 @@
           <a:p>
             <a:fld id="{E6D7105C-A8E4-4519-9028-35FD188A98F2}" type="datetimeFigureOut">
               <a:rPr lang="en-US" smtClean="0"/>
-              <a:t>2/19/2026</a:t>
+              <a:t>2/21/2026</a:t>
             </a:fld>
             <a:endParaRPr lang="en-US"/>
           </a:p>
@@ -11814,7 +11815,7 @@
           <a:p>
             <a:fld id="{E6D7105C-A8E4-4519-9028-35FD188A98F2}" type="datetimeFigureOut">
               <a:rPr lang="en-US" smtClean="0"/>
-              <a:t>2/19/2026</a:t>
+              <a:t>2/21/2026</a:t>
             </a:fld>
             <a:endParaRPr lang="en-US"/>
           </a:p>
@@ -12102,7 +12103,7 @@
           <a:p>
             <a:fld id="{E6D7105C-A8E4-4519-9028-35FD188A98F2}" type="datetimeFigureOut">
               <a:rPr lang="en-US" smtClean="0"/>
-              <a:t>2/19/2026</a:t>
+              <a:t>2/21/2026</a:t>
             </a:fld>
             <a:endParaRPr lang="en-US"/>
           </a:p>
@@ -12343,7 +12344,7 @@
           <a:p>
             <a:fld id="{E6D7105C-A8E4-4519-9028-35FD188A98F2}" type="datetimeFigureOut">
               <a:rPr lang="en-US" smtClean="0"/>
-              <a:t>2/19/2026</a:t>
+              <a:t>2/21/2026</a:t>
             </a:fld>
             <a:endParaRPr lang="en-US"/>
           </a:p>
@@ -12829,6 +12830,2387 @@
 </file>
 
 <file path=ppt/slides/slide10.xml><?xml version="1.0" encoding="utf-8"?>
+<p:sld xmlns:a="http://schemas.openxmlformats.org/drawingml/2006/main" xmlns:r="http://schemas.openxmlformats.org/officeDocument/2006/relationships" xmlns:p="http://schemas.openxmlformats.org/presentationml/2006/main">
+  <p:cSld>
+    <p:spTree>
+      <p:nvGrpSpPr>
+        <p:cNvPr id="1" name=""/>
+        <p:cNvGrpSpPr/>
+        <p:nvPr/>
+      </p:nvGrpSpPr>
+      <p:grpSpPr>
+        <a:xfrm>
+          <a:off x="0" y="0"/>
+          <a:ext cx="0" cy="0"/>
+          <a:chOff x="0" y="0"/>
+          <a:chExt cx="0" cy="0"/>
+        </a:xfrm>
+      </p:grpSpPr>
+      <p:sp>
+        <p:nvSpPr>
+          <p:cNvPr id="2" name="Title 1">
+            <a:extLst>
+              <a:ext uri="{FF2B5EF4-FFF2-40B4-BE49-F238E27FC236}">
+                <a16:creationId xmlns:a16="http://schemas.microsoft.com/office/drawing/2014/main" id="{83C6ED07-B438-DA2A-9475-7CD2E760405C}"/>
+              </a:ext>
+            </a:extLst>
+          </p:cNvPr>
+          <p:cNvSpPr>
+            <a:spLocks noGrp="1"/>
+          </p:cNvSpPr>
+          <p:nvPr>
+            <p:ph type="title"/>
+          </p:nvPr>
+        </p:nvSpPr>
+        <p:spPr>
+          <a:xfrm>
+            <a:off x="83598" y="149682"/>
+            <a:ext cx="4124417" cy="602541"/>
+          </a:xfrm>
+        </p:spPr>
+        <p:txBody>
+          <a:bodyPr>
+            <a:normAutofit/>
+          </a:bodyPr>
+          <a:lstStyle/>
+          <a:p>
+            <a:r>
+              <a:rPr lang="es-ES" sz="2000" dirty="0"/>
+              <a:t>THz-</a:t>
+            </a:r>
+            <a:r>
+              <a:rPr lang="es-ES" sz="2000" dirty="0" err="1"/>
+              <a:t>Induced</a:t>
+            </a:r>
+            <a:r>
+              <a:rPr lang="es-ES" sz="2000" dirty="0"/>
+              <a:t> </a:t>
+            </a:r>
+            <a:r>
+              <a:rPr lang="es-ES" sz="2000" dirty="0" err="1"/>
+              <a:t>Enzyme</a:t>
+            </a:r>
+            <a:r>
+              <a:rPr lang="es-ES" sz="2000" dirty="0"/>
+              <a:t> </a:t>
+            </a:r>
+            <a:r>
+              <a:rPr lang="es-ES" sz="2000" dirty="0" err="1"/>
+              <a:t>Unfolding</a:t>
+            </a:r>
+            <a:r>
+              <a:rPr lang="es-ES" sz="2000" dirty="0"/>
+              <a:t> </a:t>
+            </a:r>
+            <a:r>
+              <a:rPr lang="es-ES" sz="2000" dirty="0" err="1"/>
+              <a:t>Model</a:t>
+            </a:r>
+            <a:endParaRPr lang="en-US" sz="2000" dirty="0"/>
+          </a:p>
+        </p:txBody>
+      </p:sp>
+      <p:sp>
+        <p:nvSpPr>
+          <p:cNvPr id="5" name="TextBox 4">
+            <a:extLst>
+              <a:ext uri="{FF2B5EF4-FFF2-40B4-BE49-F238E27FC236}">
+                <a16:creationId xmlns:a16="http://schemas.microsoft.com/office/drawing/2014/main" id="{AEB9D6A3-59F7-3469-F596-F9D7D21583FA}"/>
+              </a:ext>
+            </a:extLst>
+          </p:cNvPr>
+          <p:cNvSpPr txBox="1"/>
+          <p:nvPr/>
+        </p:nvSpPr>
+        <p:spPr>
+          <a:xfrm>
+            <a:off x="111483" y="6376036"/>
+            <a:ext cx="11743512" cy="507831"/>
+          </a:xfrm>
+          <a:prstGeom prst="rect">
+            <a:avLst/>
+          </a:prstGeom>
+          <a:noFill/>
+        </p:spPr>
+        <p:txBody>
+          <a:bodyPr wrap="square">
+            <a:spAutoFit/>
+          </a:bodyPr>
+          <a:lstStyle/>
+          <a:p>
+            <a:r>
+              <a:rPr lang="en-US" sz="900" dirty="0"/>
+              <a:t>[1] Hadeel Elayan, Andrew W. Eckford, and Raviraj S. Adve. 2023. Terahertz Induced Protein Interactions in a Random Medium. IEEE Transactions on Molecular, Biological and Multi-Scale Communications 9, 4 (Dec. 2023), 435–446. https: //doi.org/10.1109/tmbmc.2023.3327302</a:t>
+            </a:r>
+          </a:p>
+          <a:p>
+            <a:endParaRPr lang="en-US" sz="900" dirty="0"/>
+          </a:p>
+        </p:txBody>
+      </p:sp>
+      <mc:AlternateContent xmlns:mc="http://schemas.openxmlformats.org/markup-compatibility/2006" xmlns:a14="http://schemas.microsoft.com/office/drawing/2010/main">
+        <mc:Choice Requires="a14">
+          <p:sp>
+            <p:nvSpPr>
+              <p:cNvPr id="8" name="TextBox 7">
+                <a:extLst>
+                  <a:ext uri="{FF2B5EF4-FFF2-40B4-BE49-F238E27FC236}">
+                    <a16:creationId xmlns:a16="http://schemas.microsoft.com/office/drawing/2014/main" id="{F1A5A38E-152E-2D88-FF83-2BD41CDDC078}"/>
+                  </a:ext>
+                </a:extLst>
+              </p:cNvPr>
+              <p:cNvSpPr txBox="1"/>
+              <p:nvPr/>
+            </p:nvSpPr>
+            <p:spPr>
+              <a:xfrm>
+                <a:off x="366192" y="734535"/>
+                <a:ext cx="2716567" cy="806824"/>
+              </a:xfrm>
+              <a:prstGeom prst="rect">
+                <a:avLst/>
+              </a:prstGeom>
+              <a:noFill/>
+            </p:spPr>
+            <p:txBody>
+              <a:bodyPr wrap="square">
+                <a:spAutoFit/>
+              </a:bodyPr>
+              <a:lstStyle/>
+              <a:p>
+                <a:pPr/>
+                <a14:m>
+                  <m:oMathPara xmlns:m="http://schemas.openxmlformats.org/officeDocument/2006/math">
+                    <m:oMathParaPr>
+                      <m:jc m:val="centerGroup"/>
+                    </m:oMathParaPr>
+                    <m:oMath xmlns:m="http://schemas.openxmlformats.org/officeDocument/2006/math">
+                      <m:sSub>
+                        <m:sSubPr>
+                          <m:ctrlPr>
+                            <a:rPr lang="de-DE" i="1">
+                              <a:latin typeface="Cambria Math" panose="02040503050406030204" pitchFamily="18" charset="0"/>
+                            </a:rPr>
+                          </m:ctrlPr>
+                        </m:sSubPr>
+                        <m:e>
+                          <m:r>
+                            <a:rPr lang="de-DE" i="1">
+                              <a:latin typeface="Cambria Math" panose="02040503050406030204" pitchFamily="18" charset="0"/>
+                            </a:rPr>
+                            <m:t>𝑝</m:t>
+                          </m:r>
+                        </m:e>
+                        <m:sub>
+                          <m:r>
+                            <a:rPr lang="de-DE" i="1">
+                              <a:latin typeface="Cambria Math" panose="02040503050406030204" pitchFamily="18" charset="0"/>
+                            </a:rPr>
+                            <m:t>𝐹</m:t>
+                          </m:r>
+                        </m:sub>
+                      </m:sSub>
+                      <m:r>
+                        <a:rPr lang="de-DE" i="1">
+                          <a:latin typeface="Cambria Math" panose="02040503050406030204" pitchFamily="18" charset="0"/>
+                        </a:rPr>
+                        <m:t>=</m:t>
+                      </m:r>
+                      <m:f>
+                        <m:fPr>
+                          <m:ctrlPr>
+                            <a:rPr lang="en-US" i="1" dirty="0" smtClean="0">
+                              <a:latin typeface="Cambria Math" panose="02040503050406030204" pitchFamily="18" charset="0"/>
+                            </a:rPr>
+                          </m:ctrlPr>
+                        </m:fPr>
+                        <m:num>
+                          <m:r>
+                            <a:rPr lang="en-US" i="1" dirty="0" smtClean="0">
+                              <a:latin typeface="Cambria Math" panose="02040503050406030204" pitchFamily="18" charset="0"/>
+                            </a:rPr>
+                            <m:t>1</m:t>
+                          </m:r>
+                        </m:num>
+                        <m:den>
+                          <m:r>
+                            <a:rPr lang="en-US" i="1" dirty="0" smtClean="0">
+                              <a:latin typeface="Cambria Math" panose="02040503050406030204" pitchFamily="18" charset="0"/>
+                            </a:rPr>
+                            <m:t>1</m:t>
+                          </m:r>
+                          <m:r>
+                            <a:rPr lang="en-US" i="1" dirty="0" smtClean="0">
+                              <a:latin typeface="Cambria Math" panose="02040503050406030204" pitchFamily="18" charset="0"/>
+                            </a:rPr>
+                            <m:t>+</m:t>
+                          </m:r>
+                          <m:sSup>
+                            <m:sSupPr>
+                              <m:ctrlPr>
+                                <a:rPr lang="de-DE" b="0" i="1" dirty="0" smtClean="0">
+                                  <a:latin typeface="Cambria Math" panose="02040503050406030204" pitchFamily="18" charset="0"/>
+                                </a:rPr>
+                              </m:ctrlPr>
+                            </m:sSupPr>
+                            <m:e>
+                              <m:r>
+                                <a:rPr lang="de-DE" b="0" i="1" dirty="0" smtClean="0">
+                                  <a:latin typeface="Cambria Math" panose="02040503050406030204" pitchFamily="18" charset="0"/>
+                                </a:rPr>
+                                <m:t>𝑒</m:t>
+                              </m:r>
+                            </m:e>
+                            <m:sup>
+                              <m:d>
+                                <m:dPr>
+                                  <m:ctrlPr>
+                                    <a:rPr lang="en-US" b="0" i="1" dirty="0" smtClean="0">
+                                      <a:latin typeface="Cambria Math" panose="02040503050406030204" pitchFamily="18" charset="0"/>
+                                    </a:rPr>
+                                  </m:ctrlPr>
+                                </m:dPr>
+                                <m:e>
+                                  <m:f>
+                                    <m:fPr>
+                                      <m:ctrlPr>
+                                        <a:rPr lang="en-US" b="0" i="1" dirty="0" smtClean="0">
+                                          <a:latin typeface="Cambria Math" panose="02040503050406030204" pitchFamily="18" charset="0"/>
+                                        </a:rPr>
+                                      </m:ctrlPr>
+                                    </m:fPr>
+                                    <m:num>
+                                      <m:r>
+                                        <m:rPr>
+                                          <m:sty m:val="p"/>
+                                        </m:rPr>
+                                        <a:rPr lang="en-US" i="0" dirty="0" smtClean="0">
+                                          <a:latin typeface="Cambria Math" panose="02040503050406030204" pitchFamily="18" charset="0"/>
+                                        </a:rPr>
+                                        <m:t>Δ</m:t>
+                                      </m:r>
+                                      <m:r>
+                                        <a:rPr lang="en-US" i="1" dirty="0" smtClean="0">
+                                          <a:latin typeface="Cambria Math" panose="02040503050406030204" pitchFamily="18" charset="0"/>
+                                        </a:rPr>
+                                        <m:t>𝐸</m:t>
+                                      </m:r>
+                                      <m:r>
+                                        <a:rPr lang="en-US" i="1" dirty="0" smtClean="0">
+                                          <a:latin typeface="Cambria Math" panose="02040503050406030204" pitchFamily="18" charset="0"/>
+                                        </a:rPr>
+                                        <m:t>−</m:t>
+                                      </m:r>
+                                      <m:sSub>
+                                        <m:sSubPr>
+                                          <m:ctrlPr>
+                                            <a:rPr lang="en-US" i="1" dirty="0" smtClean="0">
+                                              <a:latin typeface="Cambria Math" panose="02040503050406030204" pitchFamily="18" charset="0"/>
+                                            </a:rPr>
+                                          </m:ctrlPr>
+                                        </m:sSubPr>
+                                        <m:e>
+                                          <m:d>
+                                            <m:dPr>
+                                              <m:begChr m:val="⟨"/>
+                                              <m:endChr m:val="⟩"/>
+                                              <m:ctrlPr>
+                                                <a:rPr lang="en-US" i="1" dirty="0" smtClean="0">
+                                                  <a:latin typeface="Cambria Math" panose="02040503050406030204" pitchFamily="18" charset="0"/>
+                                                </a:rPr>
+                                              </m:ctrlPr>
+                                            </m:dPr>
+                                            <m:e>
+                                              <m:sSub>
+                                                <m:sSubPr>
+                                                  <m:ctrlPr>
+                                                    <a:rPr lang="en-US" i="1" dirty="0" smtClean="0">
+                                                      <a:latin typeface="Cambria Math" panose="02040503050406030204" pitchFamily="18" charset="0"/>
+                                                    </a:rPr>
+                                                  </m:ctrlPr>
+                                                </m:sSubPr>
+                                                <m:e>
+                                                  <m:r>
+                                                    <a:rPr lang="en-US" i="1" dirty="0" smtClean="0">
+                                                      <a:latin typeface="Cambria Math" panose="02040503050406030204" pitchFamily="18" charset="0"/>
+                                                    </a:rPr>
+                                                    <m:t>𝐸</m:t>
+                                                  </m:r>
+                                                </m:e>
+                                                <m:sub>
+                                                  <m:r>
+                                                    <a:rPr lang="en-US" i="1" dirty="0" smtClean="0">
+                                                      <a:latin typeface="Cambria Math" panose="02040503050406030204" pitchFamily="18" charset="0"/>
+                                                    </a:rPr>
+                                                    <m:t>𝑡𝑜𝑡</m:t>
+                                                  </m:r>
+                                                </m:sub>
+                                              </m:sSub>
+                                            </m:e>
+                                          </m:d>
+                                        </m:e>
+                                        <m:sub>
+                                          <m:r>
+                                            <a:rPr lang="en-US" i="1" dirty="0" smtClean="0">
+                                              <a:latin typeface="Cambria Math" panose="02040503050406030204" pitchFamily="18" charset="0"/>
+                                            </a:rPr>
+                                            <m:t>𝑠𝑠</m:t>
+                                          </m:r>
+                                        </m:sub>
+                                      </m:sSub>
+                                    </m:num>
+                                    <m:den>
+                                      <m:sSub>
+                                        <m:sSubPr>
+                                          <m:ctrlPr>
+                                            <a:rPr lang="en-US" i="1" dirty="0" smtClean="0">
+                                              <a:latin typeface="Cambria Math" panose="02040503050406030204" pitchFamily="18" charset="0"/>
+                                            </a:rPr>
+                                          </m:ctrlPr>
+                                        </m:sSubPr>
+                                        <m:e>
+                                          <m:r>
+                                            <a:rPr lang="en-US" i="1" dirty="0" smtClean="0">
+                                              <a:latin typeface="Cambria Math" panose="02040503050406030204" pitchFamily="18" charset="0"/>
+                                            </a:rPr>
+                                            <m:t>𝑘</m:t>
+                                          </m:r>
+                                        </m:e>
+                                        <m:sub>
+                                          <m:r>
+                                            <a:rPr lang="en-US" i="1" dirty="0" smtClean="0">
+                                              <a:latin typeface="Cambria Math" panose="02040503050406030204" pitchFamily="18" charset="0"/>
+                                            </a:rPr>
+                                            <m:t>𝑏</m:t>
+                                          </m:r>
+                                        </m:sub>
+                                      </m:sSub>
+                                      <m:r>
+                                        <a:rPr lang="en-US" i="1" dirty="0" smtClean="0">
+                                          <a:latin typeface="Cambria Math" panose="02040503050406030204" pitchFamily="18" charset="0"/>
+                                        </a:rPr>
+                                        <m:t>𝑇</m:t>
+                                      </m:r>
+                                    </m:den>
+                                  </m:f>
+                                </m:e>
+                              </m:d>
+                            </m:sup>
+                          </m:sSup>
+                        </m:den>
+                      </m:f>
+                    </m:oMath>
+                  </m:oMathPara>
+                </a14:m>
+                <a:endParaRPr/>
+              </a:p>
+            </p:txBody>
+          </p:sp>
+        </mc:Choice>
+        <mc:Fallback xmlns="">
+          <p:sp>
+            <p:nvSpPr>
+              <p:cNvPr id="8" name="TextBox 7">
+                <a:extLst>
+                  <a:ext uri="{FF2B5EF4-FFF2-40B4-BE49-F238E27FC236}">
+                    <a16:creationId xmlns:a16="http://schemas.microsoft.com/office/drawing/2014/main" id="{F1A5A38E-152E-2D88-FF83-2BD41CDDC078}"/>
+                  </a:ext>
+                </a:extLst>
+              </p:cNvPr>
+              <p:cNvSpPr txBox="1">
+                <a:spLocks noRot="1" noChangeAspect="1" noMove="1" noResize="1" noEditPoints="1" noAdjustHandles="1" noChangeArrowheads="1" noChangeShapeType="1" noTextEdit="1"/>
+              </p:cNvSpPr>
+              <p:nvPr/>
+            </p:nvSpPr>
+            <p:spPr>
+              <a:xfrm>
+                <a:off x="366192" y="734535"/>
+                <a:ext cx="2716567" cy="806824"/>
+              </a:xfrm>
+              <a:prstGeom prst="rect">
+                <a:avLst/>
+              </a:prstGeom>
+              <a:blipFill>
+                <a:blip r:embed="rId2"/>
+                <a:stretch>
+                  <a:fillRect/>
+                </a:stretch>
+              </a:blipFill>
+            </p:spPr>
+            <p:txBody>
+              <a:bodyPr/>
+              <a:lstStyle/>
+              <a:p>
+                <a:r>
+                  <a:rPr lang="en-US">
+                    <a:noFill/>
+                  </a:rPr>
+                  <a:t> </a:t>
+                </a:r>
+              </a:p>
+            </p:txBody>
+          </p:sp>
+        </mc:Fallback>
+      </mc:AlternateContent>
+      <mc:AlternateContent xmlns:mc="http://schemas.openxmlformats.org/markup-compatibility/2006" xmlns:a14="http://schemas.microsoft.com/office/drawing/2010/main">
+        <mc:Choice Requires="a14">
+          <p:sp>
+            <p:nvSpPr>
+              <p:cNvPr id="10" name="TextBox 9">
+                <a:extLst>
+                  <a:ext uri="{FF2B5EF4-FFF2-40B4-BE49-F238E27FC236}">
+                    <a16:creationId xmlns:a16="http://schemas.microsoft.com/office/drawing/2014/main" id="{2D8FCC9F-6F72-EA63-42AE-107091808056}"/>
+                  </a:ext>
+                </a:extLst>
+              </p:cNvPr>
+              <p:cNvSpPr txBox="1"/>
+              <p:nvPr/>
+            </p:nvSpPr>
+            <p:spPr>
+              <a:xfrm>
+                <a:off x="518522" y="1751460"/>
+                <a:ext cx="3264763" cy="391582"/>
+              </a:xfrm>
+              <a:prstGeom prst="rect">
+                <a:avLst/>
+              </a:prstGeom>
+              <a:noFill/>
+            </p:spPr>
+            <p:txBody>
+              <a:bodyPr wrap="square">
+                <a:spAutoFit/>
+              </a:bodyPr>
+              <a:lstStyle/>
+              <a:p>
+                <a14:m>
+                  <m:oMath xmlns:m="http://schemas.openxmlformats.org/officeDocument/2006/math">
+                    <m:r>
+                      <m:rPr>
+                        <m:sty m:val="p"/>
+                      </m:rPr>
+                      <a:rPr lang="en-US" i="0" dirty="0" smtClean="0">
+                        <a:latin typeface="Cambria Math" panose="02040503050406030204" pitchFamily="18" charset="0"/>
+                      </a:rPr>
+                      <m:t>Δ</m:t>
+                    </m:r>
+                    <m:r>
+                      <a:rPr lang="en-US" i="1" dirty="0" smtClean="0">
+                        <a:latin typeface="Cambria Math" panose="02040503050406030204" pitchFamily="18" charset="0"/>
+                      </a:rPr>
+                      <m:t>𝐸</m:t>
+                    </m:r>
+                    <m:r>
+                      <a:rPr lang="de-DE" b="0" i="1" dirty="0" smtClean="0">
+                        <a:latin typeface="Cambria Math" panose="02040503050406030204" pitchFamily="18" charset="0"/>
+                      </a:rPr>
+                      <m:t>=</m:t>
+                    </m:r>
+                    <m:sSub>
+                      <m:sSubPr>
+                        <m:ctrlPr>
+                          <a:rPr lang="de-DE" b="0" i="1" dirty="0" smtClean="0">
+                            <a:latin typeface="Cambria Math" panose="02040503050406030204" pitchFamily="18" charset="0"/>
+                          </a:rPr>
+                        </m:ctrlPr>
+                      </m:sSubPr>
+                      <m:e>
+                        <m:r>
+                          <a:rPr lang="de-DE" b="0" i="1" dirty="0" smtClean="0">
+                            <a:latin typeface="Cambria Math" panose="02040503050406030204" pitchFamily="18" charset="0"/>
+                          </a:rPr>
+                          <m:t>𝐸</m:t>
+                        </m:r>
+                      </m:e>
+                      <m:sub>
+                        <m:r>
+                          <a:rPr lang="de-DE" b="0" i="1" dirty="0" smtClean="0">
+                            <a:latin typeface="Cambria Math" panose="02040503050406030204" pitchFamily="18" charset="0"/>
+                          </a:rPr>
+                          <m:t>𝑓</m:t>
+                        </m:r>
+                      </m:sub>
+                    </m:sSub>
+                    <m:r>
+                      <a:rPr lang="de-DE" b="0" i="1" dirty="0" smtClean="0">
+                        <a:latin typeface="Cambria Math" panose="02040503050406030204" pitchFamily="18" charset="0"/>
+                        <a:ea typeface="Cambria Math" panose="02040503050406030204" pitchFamily="18" charset="0"/>
+                      </a:rPr>
+                      <m:t>−</m:t>
+                    </m:r>
+                    <m:sSub>
+                      <m:sSubPr>
+                        <m:ctrlPr>
+                          <a:rPr lang="de-DE" i="1" dirty="0">
+                            <a:latin typeface="Cambria Math" panose="02040503050406030204" pitchFamily="18" charset="0"/>
+                          </a:rPr>
+                        </m:ctrlPr>
+                      </m:sSubPr>
+                      <m:e>
+                        <m:r>
+                          <a:rPr lang="de-DE" i="1" dirty="0">
+                            <a:latin typeface="Cambria Math" panose="02040503050406030204" pitchFamily="18" charset="0"/>
+                          </a:rPr>
+                          <m:t>𝐸</m:t>
+                        </m:r>
+                      </m:e>
+                      <m:sub>
+                        <m:r>
+                          <a:rPr lang="de-DE" b="0" i="1" dirty="0" smtClean="0">
+                            <a:latin typeface="Cambria Math" panose="02040503050406030204" pitchFamily="18" charset="0"/>
+                          </a:rPr>
+                          <m:t>𝑢</m:t>
+                        </m:r>
+                      </m:sub>
+                    </m:sSub>
+                  </m:oMath>
+                </a14:m>
+                <a:r>
+                  <a:rPr lang="en-US" dirty="0"/>
+                  <a:t> : free energy</a:t>
+                </a:r>
+                <a:r>
+                  <a:rPr lang="en-US" i="1" dirty="0"/>
+                  <a:t> </a:t>
+                </a:r>
+              </a:p>
+            </p:txBody>
+          </p:sp>
+        </mc:Choice>
+        <mc:Fallback xmlns="">
+          <p:sp>
+            <p:nvSpPr>
+              <p:cNvPr id="10" name="TextBox 9">
+                <a:extLst>
+                  <a:ext uri="{FF2B5EF4-FFF2-40B4-BE49-F238E27FC236}">
+                    <a16:creationId xmlns:a16="http://schemas.microsoft.com/office/drawing/2014/main" id="{2D8FCC9F-6F72-EA63-42AE-107091808056}"/>
+                  </a:ext>
+                </a:extLst>
+              </p:cNvPr>
+              <p:cNvSpPr txBox="1">
+                <a:spLocks noRot="1" noChangeAspect="1" noMove="1" noResize="1" noEditPoints="1" noAdjustHandles="1" noChangeArrowheads="1" noChangeShapeType="1" noTextEdit="1"/>
+              </p:cNvSpPr>
+              <p:nvPr/>
+            </p:nvSpPr>
+            <p:spPr>
+              <a:xfrm>
+                <a:off x="518522" y="1751460"/>
+                <a:ext cx="3264763" cy="391582"/>
+              </a:xfrm>
+              <a:prstGeom prst="rect">
+                <a:avLst/>
+              </a:prstGeom>
+              <a:blipFill>
+                <a:blip r:embed="rId3"/>
+                <a:stretch>
+                  <a:fillRect t="-4615" b="-20000"/>
+                </a:stretch>
+              </a:blipFill>
+            </p:spPr>
+            <p:txBody>
+              <a:bodyPr/>
+              <a:lstStyle/>
+              <a:p>
+                <a:r>
+                  <a:rPr lang="en-US">
+                    <a:noFill/>
+                  </a:rPr>
+                  <a:t> </a:t>
+                </a:r>
+              </a:p>
+            </p:txBody>
+          </p:sp>
+        </mc:Fallback>
+      </mc:AlternateContent>
+      <mc:AlternateContent xmlns:mc="http://schemas.openxmlformats.org/markup-compatibility/2006" xmlns:a14="http://schemas.microsoft.com/office/drawing/2010/main">
+        <mc:Choice Requires="a14">
+          <p:sp>
+            <p:nvSpPr>
+              <p:cNvPr id="12" name="TextBox 11">
+                <a:extLst>
+                  <a:ext uri="{FF2B5EF4-FFF2-40B4-BE49-F238E27FC236}">
+                    <a16:creationId xmlns:a16="http://schemas.microsoft.com/office/drawing/2014/main" id="{7DCF8BB0-8B3B-ACD6-63F4-2F98484E9D53}"/>
+                  </a:ext>
+                </a:extLst>
+              </p:cNvPr>
+              <p:cNvSpPr txBox="1"/>
+              <p:nvPr/>
+            </p:nvSpPr>
+            <p:spPr>
+              <a:xfrm>
+                <a:off x="83598" y="2330532"/>
+                <a:ext cx="5552161" cy="531107"/>
+              </a:xfrm>
+              <a:prstGeom prst="rect">
+                <a:avLst/>
+              </a:prstGeom>
+              <a:noFill/>
+            </p:spPr>
+            <p:txBody>
+              <a:bodyPr wrap="none" lIns="0" tIns="0" rIns="0" bIns="0" rtlCol="0">
+                <a:spAutoFit/>
+              </a:bodyPr>
+              <a:lstStyle/>
+              <a:p>
+                <a:pPr/>
+                <a14:m>
+                  <m:oMathPara xmlns:m="http://schemas.openxmlformats.org/officeDocument/2006/math">
+                    <m:oMathParaPr>
+                      <m:jc m:val="centerGroup"/>
+                    </m:oMathParaPr>
+                    <m:oMath xmlns:m="http://schemas.openxmlformats.org/officeDocument/2006/math">
+                      <m:sSub>
+                        <m:sSubPr>
+                          <m:ctrlPr>
+                            <a:rPr lang="en-US" i="1" dirty="0" smtClean="0">
+                              <a:latin typeface="Cambria Math" panose="02040503050406030204" pitchFamily="18" charset="0"/>
+                            </a:rPr>
+                          </m:ctrlPr>
+                        </m:sSubPr>
+                        <m:e>
+                          <m:d>
+                            <m:dPr>
+                              <m:begChr m:val="⟨"/>
+                              <m:endChr m:val="⟩"/>
+                              <m:ctrlPr>
+                                <a:rPr lang="en-US" i="1" dirty="0">
+                                  <a:latin typeface="Cambria Math" panose="02040503050406030204" pitchFamily="18" charset="0"/>
+                                </a:rPr>
+                              </m:ctrlPr>
+                            </m:dPr>
+                            <m:e>
+                              <m:sSub>
+                                <m:sSubPr>
+                                  <m:ctrlPr>
+                                    <a:rPr lang="en-US" i="1" dirty="0">
+                                      <a:latin typeface="Cambria Math" panose="02040503050406030204" pitchFamily="18" charset="0"/>
+                                    </a:rPr>
+                                  </m:ctrlPr>
+                                </m:sSubPr>
+                                <m:e>
+                                  <m:r>
+                                    <a:rPr lang="en-US" i="1" dirty="0">
+                                      <a:latin typeface="Cambria Math" panose="02040503050406030204" pitchFamily="18" charset="0"/>
+                                    </a:rPr>
+                                    <m:t>𝐸</m:t>
+                                  </m:r>
+                                </m:e>
+                                <m:sub>
+                                  <m:r>
+                                    <a:rPr lang="en-US" i="1" dirty="0">
+                                      <a:latin typeface="Cambria Math" panose="02040503050406030204" pitchFamily="18" charset="0"/>
+                                    </a:rPr>
+                                    <m:t>𝑡𝑜𝑡</m:t>
+                                  </m:r>
+                                </m:sub>
+                              </m:sSub>
+                            </m:e>
+                          </m:d>
+                        </m:e>
+                        <m:sub>
+                          <m:r>
+                            <a:rPr lang="en-US" i="1" dirty="0">
+                              <a:latin typeface="Cambria Math" panose="02040503050406030204" pitchFamily="18" charset="0"/>
+                            </a:rPr>
+                            <m:t>𝑠𝑠</m:t>
+                          </m:r>
+                        </m:sub>
+                      </m:sSub>
+                      <m:r>
+                        <a:rPr lang="en-US" i="1" dirty="0">
+                          <a:latin typeface="Cambria Math" panose="02040503050406030204" pitchFamily="18" charset="0"/>
+                        </a:rPr>
+                        <m:t>=</m:t>
+                      </m:r>
+                      <m:f>
+                        <m:fPr>
+                          <m:ctrlPr>
+                            <a:rPr lang="en-US" i="1" dirty="0">
+                              <a:latin typeface="Cambria Math" panose="02040503050406030204" pitchFamily="18" charset="0"/>
+                            </a:rPr>
+                          </m:ctrlPr>
+                        </m:fPr>
+                        <m:num>
+                          <m:r>
+                            <a:rPr lang="en-US" i="1" dirty="0">
+                              <a:latin typeface="Cambria Math" panose="02040503050406030204" pitchFamily="18" charset="0"/>
+                            </a:rPr>
+                            <m:t>𝛼</m:t>
+                          </m:r>
+                        </m:num>
+                        <m:den>
+                          <m:r>
+                            <a:rPr lang="en-US" i="1" dirty="0">
+                              <a:latin typeface="Cambria Math" panose="02040503050406030204" pitchFamily="18" charset="0"/>
+                            </a:rPr>
+                            <m:t>4</m:t>
+                          </m:r>
+                          <m:r>
+                            <a:rPr lang="en-US" i="1" dirty="0">
+                              <a:latin typeface="Cambria Math" panose="02040503050406030204" pitchFamily="18" charset="0"/>
+                            </a:rPr>
+                            <m:t>𝛽</m:t>
+                          </m:r>
+                          <m:r>
+                            <a:rPr lang="en-US" i="1" dirty="0">
+                              <a:latin typeface="Cambria Math" panose="02040503050406030204" pitchFamily="18" charset="0"/>
+                            </a:rPr>
+                            <m:t>𝑚</m:t>
+                          </m:r>
+                          <m:d>
+                            <m:dPr>
+                              <m:begChr m:val="["/>
+                              <m:endChr m:val="]"/>
+                              <m:ctrlPr>
+                                <a:rPr lang="en-US" i="1" dirty="0">
+                                  <a:latin typeface="Cambria Math" panose="02040503050406030204" pitchFamily="18" charset="0"/>
+                                </a:rPr>
+                              </m:ctrlPr>
+                            </m:dPr>
+                            <m:e>
+                              <m:sSup>
+                                <m:sSupPr>
+                                  <m:ctrlPr>
+                                    <a:rPr lang="en-US" i="1" dirty="0">
+                                      <a:latin typeface="Cambria Math" panose="02040503050406030204" pitchFamily="18" charset="0"/>
+                                    </a:rPr>
+                                  </m:ctrlPr>
+                                </m:sSupPr>
+                                <m:e>
+                                  <m:d>
+                                    <m:dPr>
+                                      <m:ctrlPr>
+                                        <a:rPr lang="en-US" i="1" dirty="0">
+                                          <a:latin typeface="Cambria Math" panose="02040503050406030204" pitchFamily="18" charset="0"/>
+                                        </a:rPr>
+                                      </m:ctrlPr>
+                                    </m:dPr>
+                                    <m:e>
+                                      <m:sSubSup>
+                                        <m:sSubSupPr>
+                                          <m:ctrlPr>
+                                            <a:rPr lang="en-US" i="1" dirty="0" smtClean="0">
+                                              <a:solidFill>
+                                                <a:srgbClr val="C00000"/>
+                                              </a:solidFill>
+                                              <a:latin typeface="Cambria Math" panose="02040503050406030204" pitchFamily="18" charset="0"/>
+                                            </a:rPr>
+                                          </m:ctrlPr>
+                                        </m:sSubSupPr>
+                                        <m:e>
+                                          <m:r>
+                                            <a:rPr lang="en-US" i="1" dirty="0">
+                                              <a:solidFill>
+                                                <a:srgbClr val="C00000"/>
+                                              </a:solidFill>
+                                              <a:latin typeface="Cambria Math" panose="02040503050406030204" pitchFamily="18" charset="0"/>
+                                            </a:rPr>
+                                            <m:t>𝜔</m:t>
+                                          </m:r>
+                                        </m:e>
+                                        <m:sub>
+                                          <m:r>
+                                            <a:rPr lang="en-US" i="1" dirty="0">
+                                              <a:solidFill>
+                                                <a:srgbClr val="C00000"/>
+                                              </a:solidFill>
+                                              <a:latin typeface="Cambria Math" panose="02040503050406030204" pitchFamily="18" charset="0"/>
+                                            </a:rPr>
+                                            <m:t>𝑜</m:t>
+                                          </m:r>
+                                        </m:sub>
+                                        <m:sup>
+                                          <m:r>
+                                            <a:rPr lang="en-US" i="1" dirty="0">
+                                              <a:solidFill>
+                                                <a:srgbClr val="C00000"/>
+                                              </a:solidFill>
+                                              <a:latin typeface="Cambria Math" panose="02040503050406030204" pitchFamily="18" charset="0"/>
+                                            </a:rPr>
+                                            <m:t>2</m:t>
+                                          </m:r>
+                                        </m:sup>
+                                      </m:sSubSup>
+                                      <m:r>
+                                        <a:rPr lang="en-US" i="1" dirty="0">
+                                          <a:latin typeface="Cambria Math" panose="02040503050406030204" pitchFamily="18" charset="0"/>
+                                        </a:rPr>
+                                        <m:t>−</m:t>
+                                      </m:r>
+                                      <m:sSubSup>
+                                        <m:sSubSupPr>
+                                          <m:ctrlPr>
+                                            <a:rPr lang="en-US" i="1" dirty="0">
+                                              <a:latin typeface="Cambria Math" panose="02040503050406030204" pitchFamily="18" charset="0"/>
+                                            </a:rPr>
+                                          </m:ctrlPr>
+                                        </m:sSubSupPr>
+                                        <m:e>
+                                          <m:r>
+                                            <a:rPr lang="en-US" i="1" dirty="0">
+                                              <a:latin typeface="Cambria Math" panose="02040503050406030204" pitchFamily="18" charset="0"/>
+                                            </a:rPr>
+                                            <m:t>𝜔</m:t>
+                                          </m:r>
+                                        </m:e>
+                                        <m:sub>
+                                          <m:r>
+                                            <a:rPr lang="en-US" i="1" dirty="0">
+                                              <a:latin typeface="Cambria Math" panose="02040503050406030204" pitchFamily="18" charset="0"/>
+                                            </a:rPr>
+                                            <m:t>𝑎</m:t>
+                                          </m:r>
+                                        </m:sub>
+                                        <m:sup>
+                                          <m:r>
+                                            <a:rPr lang="en-US" i="1" dirty="0">
+                                              <a:latin typeface="Cambria Math" panose="02040503050406030204" pitchFamily="18" charset="0"/>
+                                            </a:rPr>
+                                            <m:t>2</m:t>
+                                          </m:r>
+                                        </m:sup>
+                                      </m:sSubSup>
+                                    </m:e>
+                                  </m:d>
+                                </m:e>
+                                <m:sup>
+                                  <m:r>
+                                    <a:rPr lang="en-US" i="1" dirty="0">
+                                      <a:latin typeface="Cambria Math" panose="02040503050406030204" pitchFamily="18" charset="0"/>
+                                    </a:rPr>
+                                    <m:t>2</m:t>
+                                  </m:r>
+                                </m:sup>
+                              </m:sSup>
+                              <m:r>
+                                <a:rPr lang="en-US" i="1" dirty="0">
+                                  <a:latin typeface="Cambria Math" panose="02040503050406030204" pitchFamily="18" charset="0"/>
+                                </a:rPr>
+                                <m:t>+</m:t>
+                              </m:r>
+                              <m:sSup>
+                                <m:sSupPr>
+                                  <m:ctrlPr>
+                                    <a:rPr lang="en-US" i="1" dirty="0">
+                                      <a:latin typeface="Cambria Math" panose="02040503050406030204" pitchFamily="18" charset="0"/>
+                                    </a:rPr>
+                                  </m:ctrlPr>
+                                </m:sSupPr>
+                                <m:e>
+                                  <m:d>
+                                    <m:dPr>
+                                      <m:ctrlPr>
+                                        <a:rPr lang="en-US" i="1" dirty="0">
+                                          <a:latin typeface="Cambria Math" panose="02040503050406030204" pitchFamily="18" charset="0"/>
+                                        </a:rPr>
+                                      </m:ctrlPr>
+                                    </m:dPr>
+                                    <m:e>
+                                      <m:sSub>
+                                        <m:sSubPr>
+                                          <m:ctrlPr>
+                                            <a:rPr lang="en-US" i="1" dirty="0">
+                                              <a:latin typeface="Cambria Math" panose="02040503050406030204" pitchFamily="18" charset="0"/>
+                                            </a:rPr>
+                                          </m:ctrlPr>
+                                        </m:sSubPr>
+                                        <m:e>
+                                          <m:r>
+                                            <a:rPr lang="en-US" i="1" dirty="0">
+                                              <a:latin typeface="Cambria Math" panose="02040503050406030204" pitchFamily="18" charset="0"/>
+                                            </a:rPr>
+                                            <m:t>𝜔</m:t>
+                                          </m:r>
+                                        </m:e>
+                                        <m:sub>
+                                          <m:r>
+                                            <a:rPr lang="en-US" i="1" dirty="0">
+                                              <a:latin typeface="Cambria Math" panose="02040503050406030204" pitchFamily="18" charset="0"/>
+                                            </a:rPr>
+                                            <m:t>𝑎</m:t>
+                                          </m:r>
+                                        </m:sub>
+                                      </m:sSub>
+                                      <m:acc>
+                                        <m:accPr>
+                                          <m:chr m:val="̅"/>
+                                          <m:ctrlPr>
+                                            <a:rPr lang="en-US" i="1" dirty="0" smtClean="0">
+                                              <a:solidFill>
+                                                <a:srgbClr val="C00000"/>
+                                              </a:solidFill>
+                                              <a:latin typeface="Cambria Math" panose="02040503050406030204" pitchFamily="18" charset="0"/>
+                                            </a:rPr>
+                                          </m:ctrlPr>
+                                        </m:accPr>
+                                        <m:e>
+                                          <m:r>
+                                            <a:rPr lang="en-US" i="1" dirty="0">
+                                              <a:solidFill>
+                                                <a:srgbClr val="C00000"/>
+                                              </a:solidFill>
+                                              <a:latin typeface="Cambria Math" panose="02040503050406030204" pitchFamily="18" charset="0"/>
+                                            </a:rPr>
+                                            <m:t>𝛾</m:t>
+                                          </m:r>
+                                        </m:e>
+                                      </m:acc>
+                                    </m:e>
+                                  </m:d>
+                                </m:e>
+                                <m:sup>
+                                  <m:r>
+                                    <a:rPr lang="en-US" i="1" dirty="0">
+                                      <a:latin typeface="Cambria Math" panose="02040503050406030204" pitchFamily="18" charset="0"/>
+                                    </a:rPr>
+                                    <m:t>2</m:t>
+                                  </m:r>
+                                </m:sup>
+                              </m:sSup>
+                            </m:e>
+                          </m:d>
+                        </m:den>
+                      </m:f>
+                      <m:d>
+                        <m:dPr>
+                          <m:ctrlPr>
+                            <a:rPr lang="en-US" i="1" dirty="0">
+                              <a:latin typeface="Cambria Math" panose="02040503050406030204" pitchFamily="18" charset="0"/>
+                            </a:rPr>
+                          </m:ctrlPr>
+                        </m:dPr>
+                        <m:e>
+                          <m:sSubSup>
+                            <m:sSubSupPr>
+                              <m:ctrlPr>
+                                <a:rPr lang="en-US" i="1" dirty="0">
+                                  <a:latin typeface="Cambria Math" panose="02040503050406030204" pitchFamily="18" charset="0"/>
+                                </a:rPr>
+                              </m:ctrlPr>
+                            </m:sSubSupPr>
+                            <m:e>
+                              <m:r>
+                                <a:rPr lang="en-US" i="1" dirty="0">
+                                  <a:latin typeface="Cambria Math" panose="02040503050406030204" pitchFamily="18" charset="0"/>
+                                </a:rPr>
+                                <m:t>𝜔</m:t>
+                              </m:r>
+                            </m:e>
+                            <m:sub>
+                              <m:r>
+                                <a:rPr lang="en-US" i="1" dirty="0">
+                                  <a:latin typeface="Cambria Math" panose="02040503050406030204" pitchFamily="18" charset="0"/>
+                                </a:rPr>
+                                <m:t>𝑎</m:t>
+                              </m:r>
+                            </m:sub>
+                            <m:sup>
+                              <m:r>
+                                <a:rPr lang="en-US" i="1" dirty="0">
+                                  <a:latin typeface="Cambria Math" panose="02040503050406030204" pitchFamily="18" charset="0"/>
+                                </a:rPr>
+                                <m:t>2</m:t>
+                              </m:r>
+                            </m:sup>
+                          </m:sSubSup>
+                          <m:r>
+                            <a:rPr lang="en-US" i="1" dirty="0">
+                              <a:latin typeface="Cambria Math" panose="02040503050406030204" pitchFamily="18" charset="0"/>
+                            </a:rPr>
+                            <m:t>+</m:t>
+                          </m:r>
+                          <m:sSubSup>
+                            <m:sSubSupPr>
+                              <m:ctrlPr>
+                                <a:rPr lang="en-US" i="1" dirty="0" smtClean="0">
+                                  <a:solidFill>
+                                    <a:srgbClr val="C00000"/>
+                                  </a:solidFill>
+                                  <a:latin typeface="Cambria Math" panose="02040503050406030204" pitchFamily="18" charset="0"/>
+                                </a:rPr>
+                              </m:ctrlPr>
+                            </m:sSubSupPr>
+                            <m:e>
+                              <m:r>
+                                <a:rPr lang="en-US" i="1" dirty="0">
+                                  <a:solidFill>
+                                    <a:srgbClr val="C00000"/>
+                                  </a:solidFill>
+                                  <a:latin typeface="Cambria Math" panose="02040503050406030204" pitchFamily="18" charset="0"/>
+                                </a:rPr>
+                                <m:t>𝜔</m:t>
+                              </m:r>
+                            </m:e>
+                            <m:sub>
+                              <m:r>
+                                <a:rPr lang="en-US" i="1" dirty="0">
+                                  <a:solidFill>
+                                    <a:srgbClr val="C00000"/>
+                                  </a:solidFill>
+                                  <a:latin typeface="Cambria Math" panose="02040503050406030204" pitchFamily="18" charset="0"/>
+                                </a:rPr>
+                                <m:t>𝑜</m:t>
+                              </m:r>
+                            </m:sub>
+                            <m:sup>
+                              <m:r>
+                                <a:rPr lang="en-US" i="1" dirty="0">
+                                  <a:solidFill>
+                                    <a:srgbClr val="C00000"/>
+                                  </a:solidFill>
+                                  <a:latin typeface="Cambria Math" panose="02040503050406030204" pitchFamily="18" charset="0"/>
+                                </a:rPr>
+                                <m:t>2</m:t>
+                              </m:r>
+                            </m:sup>
+                          </m:sSubSup>
+                        </m:e>
+                      </m:d>
+                      <m:r>
+                        <a:rPr lang="en-US" i="1" dirty="0">
+                          <a:latin typeface="Cambria Math" panose="02040503050406030204" pitchFamily="18" charset="0"/>
+                        </a:rPr>
+                        <m:t>+</m:t>
+                      </m:r>
+                      <m:sSub>
+                        <m:sSubPr>
+                          <m:ctrlPr>
+                            <a:rPr lang="en-US" i="1" dirty="0">
+                              <a:latin typeface="Cambria Math" panose="02040503050406030204" pitchFamily="18" charset="0"/>
+                            </a:rPr>
+                          </m:ctrlPr>
+                        </m:sSubPr>
+                        <m:e>
+                          <m:r>
+                            <a:rPr lang="en-US" i="1" dirty="0">
+                              <a:latin typeface="Cambria Math" panose="02040503050406030204" pitchFamily="18" charset="0"/>
+                            </a:rPr>
+                            <m:t>𝑘</m:t>
+                          </m:r>
+                        </m:e>
+                        <m:sub>
+                          <m:r>
+                            <a:rPr lang="en-US" i="1" dirty="0">
+                              <a:latin typeface="Cambria Math" panose="02040503050406030204" pitchFamily="18" charset="0"/>
+                            </a:rPr>
+                            <m:t>𝑏</m:t>
+                          </m:r>
+                        </m:sub>
+                      </m:sSub>
+                      <m:r>
+                        <a:rPr lang="en-US" i="1" dirty="0">
+                          <a:latin typeface="Cambria Math" panose="02040503050406030204" pitchFamily="18" charset="0"/>
+                        </a:rPr>
+                        <m:t>𝑇</m:t>
+                      </m:r>
+                    </m:oMath>
+                  </m:oMathPara>
+                </a14:m>
+                <a:endParaRPr/>
+              </a:p>
+            </p:txBody>
+          </p:sp>
+        </mc:Choice>
+        <mc:Fallback xmlns="">
+          <p:sp>
+            <p:nvSpPr>
+              <p:cNvPr id="12" name="TextBox 11">
+                <a:extLst>
+                  <a:ext uri="{FF2B5EF4-FFF2-40B4-BE49-F238E27FC236}">
+                    <a16:creationId xmlns:a16="http://schemas.microsoft.com/office/drawing/2014/main" id="{7DCF8BB0-8B3B-ACD6-63F4-2F98484E9D53}"/>
+                  </a:ext>
+                </a:extLst>
+              </p:cNvPr>
+              <p:cNvSpPr txBox="1">
+                <a:spLocks noRot="1" noChangeAspect="1" noMove="1" noResize="1" noEditPoints="1" noAdjustHandles="1" noChangeArrowheads="1" noChangeShapeType="1" noTextEdit="1"/>
+              </p:cNvSpPr>
+              <p:nvPr/>
+            </p:nvSpPr>
+            <p:spPr>
+              <a:xfrm>
+                <a:off x="83598" y="2330532"/>
+                <a:ext cx="5552161" cy="531107"/>
+              </a:xfrm>
+              <a:prstGeom prst="rect">
+                <a:avLst/>
+              </a:prstGeom>
+              <a:blipFill>
+                <a:blip r:embed="rId4"/>
+                <a:stretch>
+                  <a:fillRect b="-1149"/>
+                </a:stretch>
+              </a:blipFill>
+            </p:spPr>
+            <p:txBody>
+              <a:bodyPr/>
+              <a:lstStyle/>
+              <a:p>
+                <a:r>
+                  <a:rPr lang="en-US">
+                    <a:noFill/>
+                  </a:rPr>
+                  <a:t> </a:t>
+                </a:r>
+              </a:p>
+            </p:txBody>
+          </p:sp>
+        </mc:Fallback>
+      </mc:AlternateContent>
+      <mc:AlternateContent xmlns:mc="http://schemas.openxmlformats.org/markup-compatibility/2006" xmlns:a14="http://schemas.microsoft.com/office/drawing/2010/main">
+        <mc:Choice Requires="a14">
+          <p:sp>
+            <p:nvSpPr>
+              <p:cNvPr id="13" name="TextBox 12">
+                <a:extLst>
+                  <a:ext uri="{FF2B5EF4-FFF2-40B4-BE49-F238E27FC236}">
+                    <a16:creationId xmlns:a16="http://schemas.microsoft.com/office/drawing/2014/main" id="{1650A18F-AA7B-CC05-AC43-0821909B161A}"/>
+                  </a:ext>
+                </a:extLst>
+              </p:cNvPr>
+              <p:cNvSpPr txBox="1"/>
+              <p:nvPr/>
+            </p:nvSpPr>
+            <p:spPr>
+              <a:xfrm>
+                <a:off x="454159" y="3172361"/>
+                <a:ext cx="5098383" cy="491288"/>
+              </a:xfrm>
+              <a:prstGeom prst="rect">
+                <a:avLst/>
+              </a:prstGeom>
+              <a:noFill/>
+            </p:spPr>
+            <p:txBody>
+              <a:bodyPr wrap="none" rtlCol="0">
+                <a:spAutoFit/>
+              </a:bodyPr>
+              <a:lstStyle/>
+              <a:p>
+                <a14:m>
+                  <m:oMath xmlns:m="http://schemas.openxmlformats.org/officeDocument/2006/math">
+                    <m:sSubSup>
+                      <m:sSubSupPr>
+                        <m:ctrlPr>
+                          <a:rPr lang="en-US" i="1" dirty="0" smtClean="0">
+                            <a:solidFill>
+                              <a:schemeClr val="tx1"/>
+                            </a:solidFill>
+                            <a:latin typeface="Cambria Math" panose="02040503050406030204" pitchFamily="18" charset="0"/>
+                          </a:rPr>
+                        </m:ctrlPr>
+                      </m:sSubSupPr>
+                      <m:e>
+                        <m:r>
+                          <a:rPr lang="en-US" i="1" dirty="0">
+                            <a:solidFill>
+                              <a:schemeClr val="tx1"/>
+                            </a:solidFill>
+                            <a:latin typeface="Cambria Math" panose="02040503050406030204" pitchFamily="18" charset="0"/>
+                          </a:rPr>
+                          <m:t>𝜔</m:t>
+                        </m:r>
+                      </m:e>
+                      <m:sub>
+                        <m:r>
+                          <a:rPr lang="en-US" i="1" dirty="0">
+                            <a:solidFill>
+                              <a:schemeClr val="tx1"/>
+                            </a:solidFill>
+                            <a:latin typeface="Cambria Math" panose="02040503050406030204" pitchFamily="18" charset="0"/>
+                          </a:rPr>
+                          <m:t>𝑜</m:t>
+                        </m:r>
+                      </m:sub>
+                      <m:sup>
+                        <m:r>
+                          <a:rPr lang="en-US" i="1" dirty="0">
+                            <a:solidFill>
+                              <a:schemeClr val="tx1"/>
+                            </a:solidFill>
+                            <a:latin typeface="Cambria Math" panose="02040503050406030204" pitchFamily="18" charset="0"/>
+                          </a:rPr>
+                          <m:t>2</m:t>
+                        </m:r>
+                      </m:sup>
+                    </m:sSubSup>
+                    <m:r>
+                      <a:rPr lang="de-DE" b="0" i="1" smtClean="0">
+                        <a:latin typeface="Cambria Math" panose="02040503050406030204" pitchFamily="18" charset="0"/>
+                      </a:rPr>
+                      <m:t>=</m:t>
+                    </m:r>
+                    <m:f>
+                      <m:fPr>
+                        <m:ctrlPr>
+                          <a:rPr lang="de-DE" b="0" i="1" smtClean="0">
+                            <a:latin typeface="Cambria Math" panose="02040503050406030204" pitchFamily="18" charset="0"/>
+                          </a:rPr>
+                        </m:ctrlPr>
+                      </m:fPr>
+                      <m:num>
+                        <m:r>
+                          <a:rPr lang="de-DE" b="0" i="1" smtClean="0">
+                            <a:latin typeface="Cambria Math" panose="02040503050406030204" pitchFamily="18" charset="0"/>
+                          </a:rPr>
+                          <m:t>𝑘</m:t>
+                        </m:r>
+                      </m:num>
+                      <m:den>
+                        <m:r>
+                          <a:rPr lang="de-DE" b="0" i="1" smtClean="0">
+                            <a:latin typeface="Cambria Math" panose="02040503050406030204" pitchFamily="18" charset="0"/>
+                          </a:rPr>
+                          <m:t>𝑚</m:t>
+                        </m:r>
+                      </m:den>
+                    </m:f>
+                  </m:oMath>
+                </a14:m>
+                <a:r>
+                  <a:rPr lang="en-US" i="1" dirty="0"/>
+                  <a:t> , </a:t>
+                </a:r>
+                <a14:m>
+                  <m:oMath xmlns:m="http://schemas.openxmlformats.org/officeDocument/2006/math">
+                    <m:sSub>
+                      <m:sSubPr>
+                        <m:ctrlPr>
+                          <a:rPr lang="en-US" i="1" smtClean="0">
+                            <a:latin typeface="Cambria Math" panose="02040503050406030204" pitchFamily="18" charset="0"/>
+                          </a:rPr>
+                        </m:ctrlPr>
+                      </m:sSubPr>
+                      <m:e>
+                        <m:r>
+                          <a:rPr lang="en-US" i="1" smtClean="0">
+                            <a:latin typeface="Cambria Math" panose="02040503050406030204" pitchFamily="18" charset="0"/>
+                            <a:ea typeface="Cambria Math" panose="02040503050406030204" pitchFamily="18" charset="0"/>
+                          </a:rPr>
+                          <m:t>𝜔</m:t>
+                        </m:r>
+                      </m:e>
+                      <m:sub>
+                        <m:r>
+                          <a:rPr lang="de-DE" b="0" i="1" smtClean="0">
+                            <a:latin typeface="Cambria Math" panose="02040503050406030204" pitchFamily="18" charset="0"/>
+                          </a:rPr>
+                          <m:t>0</m:t>
+                        </m:r>
+                      </m:sub>
+                    </m:sSub>
+                  </m:oMath>
+                </a14:m>
+                <a:r>
+                  <a:rPr lang="en-US" dirty="0"/>
+                  <a:t> is the natural frequency of the protein</a:t>
+                </a:r>
+              </a:p>
+            </p:txBody>
+          </p:sp>
+        </mc:Choice>
+        <mc:Fallback xmlns="">
+          <p:sp>
+            <p:nvSpPr>
+              <p:cNvPr id="13" name="TextBox 12">
+                <a:extLst>
+                  <a:ext uri="{FF2B5EF4-FFF2-40B4-BE49-F238E27FC236}">
+                    <a16:creationId xmlns:a16="http://schemas.microsoft.com/office/drawing/2014/main" id="{1650A18F-AA7B-CC05-AC43-0821909B161A}"/>
+                  </a:ext>
+                </a:extLst>
+              </p:cNvPr>
+              <p:cNvSpPr txBox="1">
+                <a:spLocks noRot="1" noChangeAspect="1" noMove="1" noResize="1" noEditPoints="1" noAdjustHandles="1" noChangeArrowheads="1" noChangeShapeType="1" noTextEdit="1"/>
+              </p:cNvSpPr>
+              <p:nvPr/>
+            </p:nvSpPr>
+            <p:spPr>
+              <a:xfrm>
+                <a:off x="454159" y="3172361"/>
+                <a:ext cx="5098383" cy="491288"/>
+              </a:xfrm>
+              <a:prstGeom prst="rect">
+                <a:avLst/>
+              </a:prstGeom>
+              <a:blipFill>
+                <a:blip r:embed="rId5"/>
+                <a:stretch>
+                  <a:fillRect r="-239" b="-8642"/>
+                </a:stretch>
+              </a:blipFill>
+            </p:spPr>
+            <p:txBody>
+              <a:bodyPr/>
+              <a:lstStyle/>
+              <a:p>
+                <a:r>
+                  <a:rPr lang="en-US">
+                    <a:noFill/>
+                  </a:rPr>
+                  <a:t> </a:t>
+                </a:r>
+              </a:p>
+            </p:txBody>
+          </p:sp>
+        </mc:Fallback>
+      </mc:AlternateContent>
+      <mc:AlternateContent xmlns:mc="http://schemas.openxmlformats.org/markup-compatibility/2006" xmlns:a14="http://schemas.microsoft.com/office/drawing/2010/main">
+        <mc:Choice Requires="a14">
+          <p:sp>
+            <p:nvSpPr>
+              <p:cNvPr id="15" name="TextBox 14">
+                <a:extLst>
+                  <a:ext uri="{FF2B5EF4-FFF2-40B4-BE49-F238E27FC236}">
+                    <a16:creationId xmlns:a16="http://schemas.microsoft.com/office/drawing/2014/main" id="{DB8140D9-A5BB-2CDD-16C8-EE8CE49E9893}"/>
+                  </a:ext>
+                </a:extLst>
+              </p:cNvPr>
+              <p:cNvSpPr txBox="1"/>
+              <p:nvPr/>
+            </p:nvSpPr>
+            <p:spPr>
+              <a:xfrm>
+                <a:off x="454159" y="3673423"/>
+                <a:ext cx="1112258" cy="681533"/>
+              </a:xfrm>
+              <a:prstGeom prst="rect">
+                <a:avLst/>
+              </a:prstGeom>
+              <a:noFill/>
+            </p:spPr>
+            <p:txBody>
+              <a:bodyPr wrap="square">
+                <a:spAutoFit/>
+              </a:bodyPr>
+              <a:lstStyle/>
+              <a:p>
+                <a:pPr/>
+                <a14:m>
+                  <m:oMathPara xmlns:m="http://schemas.openxmlformats.org/officeDocument/2006/math">
+                    <m:oMathParaPr>
+                      <m:jc m:val="centerGroup"/>
+                    </m:oMathParaPr>
+                    <m:oMath xmlns:m="http://schemas.openxmlformats.org/officeDocument/2006/math">
+                      <m:acc>
+                        <m:accPr>
+                          <m:chr m:val="̅"/>
+                          <m:ctrlPr>
+                            <a:rPr lang="en-US" i="1" dirty="0" smtClean="0">
+                              <a:solidFill>
+                                <a:schemeClr val="tx1"/>
+                              </a:solidFill>
+                              <a:latin typeface="Cambria Math" panose="02040503050406030204" pitchFamily="18" charset="0"/>
+                            </a:rPr>
+                          </m:ctrlPr>
+                        </m:accPr>
+                        <m:e>
+                          <m:r>
+                            <a:rPr lang="en-US" i="1" dirty="0">
+                              <a:solidFill>
+                                <a:schemeClr val="tx1"/>
+                              </a:solidFill>
+                              <a:latin typeface="Cambria Math" panose="02040503050406030204" pitchFamily="18" charset="0"/>
+                            </a:rPr>
+                            <m:t>𝛾</m:t>
+                          </m:r>
+                        </m:e>
+                      </m:acc>
+                      <m:r>
+                        <a:rPr lang="de-DE" b="0" i="1" dirty="0" smtClean="0">
+                          <a:latin typeface="Cambria Math" panose="02040503050406030204" pitchFamily="18" charset="0"/>
+                        </a:rPr>
+                        <m:t>=</m:t>
+                      </m:r>
+                      <m:f>
+                        <m:fPr>
+                          <m:ctrlPr>
+                            <a:rPr lang="de-DE" b="0" i="1" dirty="0" smtClean="0">
+                              <a:latin typeface="Cambria Math" panose="02040503050406030204" pitchFamily="18" charset="0"/>
+                            </a:rPr>
+                          </m:ctrlPr>
+                        </m:fPr>
+                        <m:num>
+                          <m:acc>
+                            <m:accPr>
+                              <m:chr m:val="̈"/>
+                              <m:ctrlPr>
+                                <a:rPr lang="de-DE" b="0" i="1" dirty="0" smtClean="0">
+                                  <a:solidFill>
+                                    <a:schemeClr val="tx1"/>
+                                  </a:solidFill>
+                                  <a:latin typeface="Cambria Math" panose="02040503050406030204" pitchFamily="18" charset="0"/>
+                                </a:rPr>
+                              </m:ctrlPr>
+                            </m:accPr>
+                            <m:e>
+                              <m:r>
+                                <a:rPr lang="de-DE" b="0" i="1" dirty="0" smtClean="0">
+                                  <a:solidFill>
+                                    <a:schemeClr val="tx1"/>
+                                  </a:solidFill>
+                                  <a:latin typeface="Cambria Math" panose="02040503050406030204" pitchFamily="18" charset="0"/>
+                                  <a:ea typeface="Cambria Math" panose="02040503050406030204" pitchFamily="18" charset="0"/>
+                                </a:rPr>
+                                <m:t>𝛽</m:t>
+                              </m:r>
+                            </m:e>
+                          </m:acc>
+                        </m:num>
+                        <m:den>
+                          <m:r>
+                            <a:rPr lang="de-DE" b="0" i="1" dirty="0" smtClean="0">
+                              <a:latin typeface="Cambria Math" panose="02040503050406030204" pitchFamily="18" charset="0"/>
+                            </a:rPr>
+                            <m:t>𝑚</m:t>
+                          </m:r>
+                        </m:den>
+                      </m:f>
+                    </m:oMath>
+                  </m:oMathPara>
+                </a14:m>
+                <a:endParaRPr lang="en-US" dirty="0"/>
+              </a:p>
+            </p:txBody>
+          </p:sp>
+        </mc:Choice>
+        <mc:Fallback xmlns="">
+          <p:sp>
+            <p:nvSpPr>
+              <p:cNvPr id="15" name="TextBox 14">
+                <a:extLst>
+                  <a:ext uri="{FF2B5EF4-FFF2-40B4-BE49-F238E27FC236}">
+                    <a16:creationId xmlns:a16="http://schemas.microsoft.com/office/drawing/2014/main" id="{DB8140D9-A5BB-2CDD-16C8-EE8CE49E9893}"/>
+                  </a:ext>
+                </a:extLst>
+              </p:cNvPr>
+              <p:cNvSpPr txBox="1">
+                <a:spLocks noRot="1" noChangeAspect="1" noMove="1" noResize="1" noEditPoints="1" noAdjustHandles="1" noChangeArrowheads="1" noChangeShapeType="1" noTextEdit="1"/>
+              </p:cNvSpPr>
+              <p:nvPr/>
+            </p:nvSpPr>
+            <p:spPr>
+              <a:xfrm>
+                <a:off x="454159" y="3673423"/>
+                <a:ext cx="1112258" cy="681533"/>
+              </a:xfrm>
+              <a:prstGeom prst="rect">
+                <a:avLst/>
+              </a:prstGeom>
+              <a:blipFill>
+                <a:blip r:embed="rId6"/>
+                <a:stretch>
+                  <a:fillRect/>
+                </a:stretch>
+              </a:blipFill>
+            </p:spPr>
+            <p:txBody>
+              <a:bodyPr/>
+              <a:lstStyle/>
+              <a:p>
+                <a:r>
+                  <a:rPr lang="en-US">
+                    <a:noFill/>
+                  </a:rPr>
+                  <a:t> </a:t>
+                </a:r>
+              </a:p>
+            </p:txBody>
+          </p:sp>
+        </mc:Fallback>
+      </mc:AlternateContent>
+      <mc:AlternateContent xmlns:mc="http://schemas.openxmlformats.org/markup-compatibility/2006" xmlns:a14="http://schemas.microsoft.com/office/drawing/2010/main">
+        <mc:Choice Requires="a14">
+          <p:sp>
+            <p:nvSpPr>
+              <p:cNvPr id="17" name="TextBox 16">
+                <a:extLst>
+                  <a:ext uri="{FF2B5EF4-FFF2-40B4-BE49-F238E27FC236}">
+                    <a16:creationId xmlns:a16="http://schemas.microsoft.com/office/drawing/2014/main" id="{5F87FEDF-92AA-8B90-0A98-D4BECAEB1333}"/>
+                  </a:ext>
+                </a:extLst>
+              </p:cNvPr>
+              <p:cNvSpPr txBox="1"/>
+              <p:nvPr/>
+            </p:nvSpPr>
+            <p:spPr>
+              <a:xfrm>
+                <a:off x="560370" y="4397154"/>
+                <a:ext cx="3870985" cy="385427"/>
+              </a:xfrm>
+              <a:prstGeom prst="rect">
+                <a:avLst/>
+              </a:prstGeom>
+              <a:noFill/>
+            </p:spPr>
+            <p:txBody>
+              <a:bodyPr wrap="square">
+                <a:spAutoFit/>
+              </a:bodyPr>
+              <a:lstStyle/>
+              <a:p>
+                <a14:m>
+                  <m:oMath xmlns:m="http://schemas.openxmlformats.org/officeDocument/2006/math">
+                    <m:acc>
+                      <m:accPr>
+                        <m:chr m:val="̈"/>
+                        <m:ctrlPr>
+                          <a:rPr lang="de-DE" b="0" i="1" dirty="0" smtClean="0">
+                            <a:solidFill>
+                              <a:srgbClr val="C00000"/>
+                            </a:solidFill>
+                            <a:latin typeface="Cambria Math" panose="02040503050406030204" pitchFamily="18" charset="0"/>
+                          </a:rPr>
+                        </m:ctrlPr>
+                      </m:accPr>
+                      <m:e>
+                        <m:r>
+                          <a:rPr lang="de-DE" b="0" i="1" dirty="0" smtClean="0">
+                            <a:solidFill>
+                              <a:srgbClr val="C00000"/>
+                            </a:solidFill>
+                            <a:latin typeface="Cambria Math" panose="02040503050406030204" pitchFamily="18" charset="0"/>
+                            <a:ea typeface="Cambria Math" panose="02040503050406030204" pitchFamily="18" charset="0"/>
+                          </a:rPr>
+                          <m:t>𝛽</m:t>
+                        </m:r>
+                      </m:e>
+                    </m:acc>
+                  </m:oMath>
+                </a14:m>
+                <a:r>
+                  <a:rPr lang="en-US" dirty="0"/>
+                  <a:t>: Damping coefficient of the protein</a:t>
+                </a:r>
+              </a:p>
+            </p:txBody>
+          </p:sp>
+        </mc:Choice>
+        <mc:Fallback xmlns="">
+          <p:sp>
+            <p:nvSpPr>
+              <p:cNvPr id="17" name="TextBox 16">
+                <a:extLst>
+                  <a:ext uri="{FF2B5EF4-FFF2-40B4-BE49-F238E27FC236}">
+                    <a16:creationId xmlns:a16="http://schemas.microsoft.com/office/drawing/2014/main" id="{5F87FEDF-92AA-8B90-0A98-D4BECAEB1333}"/>
+                  </a:ext>
+                </a:extLst>
+              </p:cNvPr>
+              <p:cNvSpPr txBox="1">
+                <a:spLocks noRot="1" noChangeAspect="1" noMove="1" noResize="1" noEditPoints="1" noAdjustHandles="1" noChangeArrowheads="1" noChangeShapeType="1" noTextEdit="1"/>
+              </p:cNvSpPr>
+              <p:nvPr/>
+            </p:nvSpPr>
+            <p:spPr>
+              <a:xfrm>
+                <a:off x="560370" y="4397154"/>
+                <a:ext cx="3870985" cy="385427"/>
+              </a:xfrm>
+              <a:prstGeom prst="rect">
+                <a:avLst/>
+              </a:prstGeom>
+              <a:blipFill>
+                <a:blip r:embed="rId7"/>
+                <a:stretch>
+                  <a:fillRect l="-472" t="-1563" b="-25000"/>
+                </a:stretch>
+              </a:blipFill>
+            </p:spPr>
+            <p:txBody>
+              <a:bodyPr/>
+              <a:lstStyle/>
+              <a:p>
+                <a:r>
+                  <a:rPr lang="en-US">
+                    <a:noFill/>
+                  </a:rPr>
+                  <a:t> </a:t>
+                </a:r>
+              </a:p>
+            </p:txBody>
+          </p:sp>
+        </mc:Fallback>
+      </mc:AlternateContent>
+      <mc:AlternateContent xmlns:mc="http://schemas.openxmlformats.org/markup-compatibility/2006" xmlns:a14="http://schemas.microsoft.com/office/drawing/2010/main">
+        <mc:Choice Requires="a14">
+          <p:sp>
+            <p:nvSpPr>
+              <p:cNvPr id="19" name="TextBox 18">
+                <a:extLst>
+                  <a:ext uri="{FF2B5EF4-FFF2-40B4-BE49-F238E27FC236}">
+                    <a16:creationId xmlns:a16="http://schemas.microsoft.com/office/drawing/2014/main" id="{F94F89C1-9FCA-84B5-953A-9404443B3B8F}"/>
+                  </a:ext>
+                </a:extLst>
+              </p:cNvPr>
+              <p:cNvSpPr txBox="1"/>
+              <p:nvPr/>
+            </p:nvSpPr>
+            <p:spPr>
+              <a:xfrm>
+                <a:off x="558472" y="4947309"/>
+                <a:ext cx="2647384" cy="369332"/>
+              </a:xfrm>
+              <a:prstGeom prst="rect">
+                <a:avLst/>
+              </a:prstGeom>
+              <a:noFill/>
+            </p:spPr>
+            <p:txBody>
+              <a:bodyPr wrap="square">
+                <a:spAutoFit/>
+              </a:bodyPr>
+              <a:lstStyle/>
+              <a:p>
+                <a14:m>
+                  <m:oMath xmlns:m="http://schemas.openxmlformats.org/officeDocument/2006/math">
+                    <m:r>
+                      <a:rPr lang="de-DE" b="0" i="1" smtClean="0">
+                        <a:solidFill>
+                          <a:srgbClr val="C00000"/>
+                        </a:solidFill>
+                        <a:latin typeface="Cambria Math" panose="02040503050406030204" pitchFamily="18" charset="0"/>
+                      </a:rPr>
+                      <m:t>𝑚</m:t>
+                    </m:r>
+                  </m:oMath>
+                </a14:m>
+                <a:r>
+                  <a:rPr lang="en-US" dirty="0">
+                    <a:solidFill>
+                      <a:srgbClr val="C00000"/>
+                    </a:solidFill>
+                  </a:rPr>
+                  <a:t>: </a:t>
+                </a:r>
+                <a:r>
+                  <a:rPr lang="en-US" dirty="0"/>
+                  <a:t>Protein mass</a:t>
+                </a:r>
+              </a:p>
+            </p:txBody>
+          </p:sp>
+        </mc:Choice>
+        <mc:Fallback xmlns="">
+          <p:sp>
+            <p:nvSpPr>
+              <p:cNvPr id="19" name="TextBox 18">
+                <a:extLst>
+                  <a:ext uri="{FF2B5EF4-FFF2-40B4-BE49-F238E27FC236}">
+                    <a16:creationId xmlns:a16="http://schemas.microsoft.com/office/drawing/2014/main" id="{F94F89C1-9FCA-84B5-953A-9404443B3B8F}"/>
+                  </a:ext>
+                </a:extLst>
+              </p:cNvPr>
+              <p:cNvSpPr txBox="1">
+                <a:spLocks noRot="1" noChangeAspect="1" noMove="1" noResize="1" noEditPoints="1" noAdjustHandles="1" noChangeArrowheads="1" noChangeShapeType="1" noTextEdit="1"/>
+              </p:cNvSpPr>
+              <p:nvPr/>
+            </p:nvSpPr>
+            <p:spPr>
+              <a:xfrm>
+                <a:off x="558472" y="4947309"/>
+                <a:ext cx="2647384" cy="369332"/>
+              </a:xfrm>
+              <a:prstGeom prst="rect">
+                <a:avLst/>
+              </a:prstGeom>
+              <a:blipFill>
+                <a:blip r:embed="rId8"/>
+                <a:stretch>
+                  <a:fillRect t="-8333" b="-28333"/>
+                </a:stretch>
+              </a:blipFill>
+            </p:spPr>
+            <p:txBody>
+              <a:bodyPr/>
+              <a:lstStyle/>
+              <a:p>
+                <a:r>
+                  <a:rPr lang="en-US">
+                    <a:noFill/>
+                  </a:rPr>
+                  <a:t> </a:t>
+                </a:r>
+              </a:p>
+            </p:txBody>
+          </p:sp>
+        </mc:Fallback>
+      </mc:AlternateContent>
+      <mc:AlternateContent xmlns:mc="http://schemas.openxmlformats.org/markup-compatibility/2006" xmlns:a14="http://schemas.microsoft.com/office/drawing/2010/main">
+        <mc:Choice Requires="a14">
+          <p:sp>
+            <p:nvSpPr>
+              <p:cNvPr id="20" name="TextBox 19">
+                <a:extLst>
+                  <a:ext uri="{FF2B5EF4-FFF2-40B4-BE49-F238E27FC236}">
+                    <a16:creationId xmlns:a16="http://schemas.microsoft.com/office/drawing/2014/main" id="{431E805A-C64D-599C-F4C7-E2F65E153468}"/>
+                  </a:ext>
+                </a:extLst>
+              </p:cNvPr>
+              <p:cNvSpPr txBox="1"/>
+              <p:nvPr/>
+            </p:nvSpPr>
+            <p:spPr>
+              <a:xfrm>
+                <a:off x="567189" y="5442786"/>
+                <a:ext cx="3216096" cy="369332"/>
+              </a:xfrm>
+              <a:prstGeom prst="rect">
+                <a:avLst/>
+              </a:prstGeom>
+              <a:noFill/>
+            </p:spPr>
+            <p:txBody>
+              <a:bodyPr wrap="square">
+                <a:spAutoFit/>
+              </a:bodyPr>
+              <a:lstStyle/>
+              <a:p>
+                <a14:m>
+                  <m:oMath xmlns:m="http://schemas.openxmlformats.org/officeDocument/2006/math">
+                    <m:r>
+                      <a:rPr lang="de-DE" b="0" i="1" smtClean="0">
+                        <a:solidFill>
+                          <a:srgbClr val="C00000"/>
+                        </a:solidFill>
+                        <a:latin typeface="Cambria Math" panose="02040503050406030204" pitchFamily="18" charset="0"/>
+                      </a:rPr>
+                      <m:t>𝑘</m:t>
+                    </m:r>
+                  </m:oMath>
+                </a14:m>
+                <a:r>
+                  <a:rPr lang="en-US" dirty="0">
+                    <a:solidFill>
+                      <a:srgbClr val="C00000"/>
+                    </a:solidFill>
+                  </a:rPr>
+                  <a:t>:</a:t>
+                </a:r>
+                <a:r>
+                  <a:rPr lang="en-US" dirty="0"/>
+                  <a:t> Protein spring constant</a:t>
+                </a:r>
+              </a:p>
+            </p:txBody>
+          </p:sp>
+        </mc:Choice>
+        <mc:Fallback xmlns="">
+          <p:sp>
+            <p:nvSpPr>
+              <p:cNvPr id="20" name="TextBox 19">
+                <a:extLst>
+                  <a:ext uri="{FF2B5EF4-FFF2-40B4-BE49-F238E27FC236}">
+                    <a16:creationId xmlns:a16="http://schemas.microsoft.com/office/drawing/2014/main" id="{431E805A-C64D-599C-F4C7-E2F65E153468}"/>
+                  </a:ext>
+                </a:extLst>
+              </p:cNvPr>
+              <p:cNvSpPr txBox="1">
+                <a:spLocks noRot="1" noChangeAspect="1" noMove="1" noResize="1" noEditPoints="1" noAdjustHandles="1" noChangeArrowheads="1" noChangeShapeType="1" noTextEdit="1"/>
+              </p:cNvSpPr>
+              <p:nvPr/>
+            </p:nvSpPr>
+            <p:spPr>
+              <a:xfrm>
+                <a:off x="567189" y="5442786"/>
+                <a:ext cx="3216096" cy="369332"/>
+              </a:xfrm>
+              <a:prstGeom prst="rect">
+                <a:avLst/>
+              </a:prstGeom>
+              <a:blipFill>
+                <a:blip r:embed="rId9"/>
+                <a:stretch>
+                  <a:fillRect t="-8333" b="-28333"/>
+                </a:stretch>
+              </a:blipFill>
+            </p:spPr>
+            <p:txBody>
+              <a:bodyPr/>
+              <a:lstStyle/>
+              <a:p>
+                <a:r>
+                  <a:rPr lang="en-US">
+                    <a:noFill/>
+                  </a:rPr>
+                  <a:t> </a:t>
+                </a:r>
+              </a:p>
+            </p:txBody>
+          </p:sp>
+        </mc:Fallback>
+      </mc:AlternateContent>
+      <mc:AlternateContent xmlns:mc="http://schemas.openxmlformats.org/markup-compatibility/2006" xmlns:a14="http://schemas.microsoft.com/office/drawing/2010/main">
+        <mc:Choice Requires="a14">
+          <p:sp>
+            <p:nvSpPr>
+              <p:cNvPr id="22" name="TextBox 21">
+                <a:extLst>
+                  <a:ext uri="{FF2B5EF4-FFF2-40B4-BE49-F238E27FC236}">
+                    <a16:creationId xmlns:a16="http://schemas.microsoft.com/office/drawing/2014/main" id="{5B514ED2-1CD7-E15E-1BB0-9225DFE8855E}"/>
+                  </a:ext>
+                </a:extLst>
+              </p:cNvPr>
+              <p:cNvSpPr txBox="1"/>
+              <p:nvPr/>
+            </p:nvSpPr>
+            <p:spPr>
+              <a:xfrm>
+                <a:off x="481533" y="5812118"/>
+                <a:ext cx="4507958" cy="369332"/>
+              </a:xfrm>
+              <a:prstGeom prst="rect">
+                <a:avLst/>
+              </a:prstGeom>
+              <a:noFill/>
+            </p:spPr>
+            <p:txBody>
+              <a:bodyPr wrap="square">
+                <a:spAutoFit/>
+              </a:bodyPr>
+              <a:lstStyle/>
+              <a:p>
+                <a14:m>
+                  <m:oMath xmlns:m="http://schemas.openxmlformats.org/officeDocument/2006/math">
+                    <m:sSub>
+                      <m:sSubPr>
+                        <m:ctrlPr>
+                          <a:rPr lang="en-US" i="1" smtClean="0">
+                            <a:latin typeface="Cambria Math" panose="02040503050406030204" pitchFamily="18" charset="0"/>
+                          </a:rPr>
+                        </m:ctrlPr>
+                      </m:sSubPr>
+                      <m:e>
+                        <m:r>
+                          <a:rPr lang="en-US" i="1" smtClean="0">
+                            <a:latin typeface="Cambria Math" panose="02040503050406030204" pitchFamily="18" charset="0"/>
+                            <a:ea typeface="Cambria Math" panose="02040503050406030204" pitchFamily="18" charset="0"/>
+                          </a:rPr>
+                          <m:t>𝜔</m:t>
+                        </m:r>
+                      </m:e>
+                      <m:sub>
+                        <m:r>
+                          <a:rPr lang="de-DE" b="0" i="1" smtClean="0">
+                            <a:latin typeface="Cambria Math" panose="02040503050406030204" pitchFamily="18" charset="0"/>
+                          </a:rPr>
+                          <m:t>𝑎</m:t>
+                        </m:r>
+                      </m:sub>
+                    </m:sSub>
+                  </m:oMath>
+                </a14:m>
+                <a:r>
+                  <a:rPr lang="en-US" dirty="0"/>
+                  <a:t>: Antenna radiation angular frequency </a:t>
+                </a:r>
+              </a:p>
+            </p:txBody>
+          </p:sp>
+        </mc:Choice>
+        <mc:Fallback xmlns="">
+          <p:sp>
+            <p:nvSpPr>
+              <p:cNvPr id="22" name="TextBox 21">
+                <a:extLst>
+                  <a:ext uri="{FF2B5EF4-FFF2-40B4-BE49-F238E27FC236}">
+                    <a16:creationId xmlns:a16="http://schemas.microsoft.com/office/drawing/2014/main" id="{5B514ED2-1CD7-E15E-1BB0-9225DFE8855E}"/>
+                  </a:ext>
+                </a:extLst>
+              </p:cNvPr>
+              <p:cNvSpPr txBox="1">
+                <a:spLocks noRot="1" noChangeAspect="1" noMove="1" noResize="1" noEditPoints="1" noAdjustHandles="1" noChangeArrowheads="1" noChangeShapeType="1" noTextEdit="1"/>
+              </p:cNvSpPr>
+              <p:nvPr/>
+            </p:nvSpPr>
+            <p:spPr>
+              <a:xfrm>
+                <a:off x="481533" y="5812118"/>
+                <a:ext cx="4507958" cy="369332"/>
+              </a:xfrm>
+              <a:prstGeom prst="rect">
+                <a:avLst/>
+              </a:prstGeom>
+              <a:blipFill>
+                <a:blip r:embed="rId10"/>
+                <a:stretch>
+                  <a:fillRect t="-6557" b="-26230"/>
+                </a:stretch>
+              </a:blipFill>
+            </p:spPr>
+            <p:txBody>
+              <a:bodyPr/>
+              <a:lstStyle/>
+              <a:p>
+                <a:r>
+                  <a:rPr lang="en-US">
+                    <a:noFill/>
+                  </a:rPr>
+                  <a:t> </a:t>
+                </a:r>
+              </a:p>
+            </p:txBody>
+          </p:sp>
+        </mc:Fallback>
+      </mc:AlternateContent>
+      <p:sp>
+        <p:nvSpPr>
+          <p:cNvPr id="23" name="TextBox 22">
+            <a:extLst>
+              <a:ext uri="{FF2B5EF4-FFF2-40B4-BE49-F238E27FC236}">
+                <a16:creationId xmlns:a16="http://schemas.microsoft.com/office/drawing/2014/main" id="{BF064904-313D-4876-FF49-2B7188FBDA4F}"/>
+              </a:ext>
+            </a:extLst>
+          </p:cNvPr>
+          <p:cNvSpPr txBox="1"/>
+          <p:nvPr/>
+        </p:nvSpPr>
+        <p:spPr>
+          <a:xfrm>
+            <a:off x="3065421" y="850337"/>
+            <a:ext cx="415498" cy="338554"/>
+          </a:xfrm>
+          <a:prstGeom prst="rect">
+            <a:avLst/>
+          </a:prstGeom>
+          <a:noFill/>
+        </p:spPr>
+        <p:txBody>
+          <a:bodyPr wrap="none" rtlCol="0">
+            <a:spAutoFit/>
+          </a:bodyPr>
+          <a:lstStyle/>
+          <a:p>
+            <a:r>
+              <a:rPr lang="en-US" sz="1600" dirty="0"/>
+              <a:t>(1)</a:t>
+            </a:r>
+          </a:p>
+        </p:txBody>
+      </p:sp>
+      <p:sp>
+        <p:nvSpPr>
+          <p:cNvPr id="24" name="TextBox 23">
+            <a:extLst>
+              <a:ext uri="{FF2B5EF4-FFF2-40B4-BE49-F238E27FC236}">
+                <a16:creationId xmlns:a16="http://schemas.microsoft.com/office/drawing/2014/main" id="{CA76E999-D418-5C4C-0604-7C20145C94A1}"/>
+              </a:ext>
+            </a:extLst>
+          </p:cNvPr>
+          <p:cNvSpPr txBox="1"/>
+          <p:nvPr/>
+        </p:nvSpPr>
+        <p:spPr>
+          <a:xfrm>
+            <a:off x="5775490" y="2442196"/>
+            <a:ext cx="415498" cy="338554"/>
+          </a:xfrm>
+          <a:prstGeom prst="rect">
+            <a:avLst/>
+          </a:prstGeom>
+          <a:noFill/>
+        </p:spPr>
+        <p:txBody>
+          <a:bodyPr wrap="none" rtlCol="0">
+            <a:spAutoFit/>
+          </a:bodyPr>
+          <a:lstStyle/>
+          <a:p>
+            <a:r>
+              <a:rPr lang="en-US" sz="1600" dirty="0"/>
+              <a:t>(3)</a:t>
+            </a:r>
+          </a:p>
+        </p:txBody>
+      </p:sp>
+      <p:sp>
+        <p:nvSpPr>
+          <p:cNvPr id="25" name="TextBox 24">
+            <a:extLst>
+              <a:ext uri="{FF2B5EF4-FFF2-40B4-BE49-F238E27FC236}">
+                <a16:creationId xmlns:a16="http://schemas.microsoft.com/office/drawing/2014/main" id="{9986BB83-1865-C31D-4307-87CA6E106E24}"/>
+              </a:ext>
+            </a:extLst>
+          </p:cNvPr>
+          <p:cNvSpPr txBox="1"/>
+          <p:nvPr/>
+        </p:nvSpPr>
+        <p:spPr>
+          <a:xfrm>
+            <a:off x="5582168" y="3221647"/>
+            <a:ext cx="415498" cy="338554"/>
+          </a:xfrm>
+          <a:prstGeom prst="rect">
+            <a:avLst/>
+          </a:prstGeom>
+          <a:noFill/>
+        </p:spPr>
+        <p:txBody>
+          <a:bodyPr wrap="none" rtlCol="0">
+            <a:spAutoFit/>
+          </a:bodyPr>
+          <a:lstStyle/>
+          <a:p>
+            <a:r>
+              <a:rPr lang="en-US" sz="1600" dirty="0"/>
+              <a:t>(4)</a:t>
+            </a:r>
+          </a:p>
+        </p:txBody>
+      </p:sp>
+      <p:sp>
+        <p:nvSpPr>
+          <p:cNvPr id="26" name="TextBox 25">
+            <a:extLst>
+              <a:ext uri="{FF2B5EF4-FFF2-40B4-BE49-F238E27FC236}">
+                <a16:creationId xmlns:a16="http://schemas.microsoft.com/office/drawing/2014/main" id="{64763AD4-BAAE-9453-6AFB-A1A7F9DBD2EA}"/>
+              </a:ext>
+            </a:extLst>
+          </p:cNvPr>
+          <p:cNvSpPr txBox="1"/>
+          <p:nvPr/>
+        </p:nvSpPr>
+        <p:spPr>
+          <a:xfrm>
+            <a:off x="3396641" y="1692652"/>
+            <a:ext cx="415498" cy="338554"/>
+          </a:xfrm>
+          <a:prstGeom prst="rect">
+            <a:avLst/>
+          </a:prstGeom>
+          <a:noFill/>
+        </p:spPr>
+        <p:txBody>
+          <a:bodyPr wrap="none" rtlCol="0">
+            <a:spAutoFit/>
+          </a:bodyPr>
+          <a:lstStyle/>
+          <a:p>
+            <a:r>
+              <a:rPr lang="en-US" sz="1600" dirty="0"/>
+              <a:t>(2)</a:t>
+            </a:r>
+          </a:p>
+        </p:txBody>
+      </p:sp>
+      <p:sp>
+        <p:nvSpPr>
+          <p:cNvPr id="27" name="TextBox 26">
+            <a:extLst>
+              <a:ext uri="{FF2B5EF4-FFF2-40B4-BE49-F238E27FC236}">
+                <a16:creationId xmlns:a16="http://schemas.microsoft.com/office/drawing/2014/main" id="{11B4445D-060C-5310-A139-74A343F8E18E}"/>
+              </a:ext>
+            </a:extLst>
+          </p:cNvPr>
+          <p:cNvSpPr txBox="1"/>
+          <p:nvPr/>
+        </p:nvSpPr>
+        <p:spPr>
+          <a:xfrm>
+            <a:off x="1566417" y="3872308"/>
+            <a:ext cx="415498" cy="338554"/>
+          </a:xfrm>
+          <a:prstGeom prst="rect">
+            <a:avLst/>
+          </a:prstGeom>
+          <a:noFill/>
+        </p:spPr>
+        <p:txBody>
+          <a:bodyPr wrap="none" rtlCol="0">
+            <a:spAutoFit/>
+          </a:bodyPr>
+          <a:lstStyle/>
+          <a:p>
+            <a:r>
+              <a:rPr lang="en-US" sz="1600" dirty="0"/>
+              <a:t>(5)</a:t>
+            </a:r>
+          </a:p>
+        </p:txBody>
+      </p:sp>
+      <p:sp>
+        <p:nvSpPr>
+          <p:cNvPr id="28" name="TextBox 27">
+            <a:extLst>
+              <a:ext uri="{FF2B5EF4-FFF2-40B4-BE49-F238E27FC236}">
+                <a16:creationId xmlns:a16="http://schemas.microsoft.com/office/drawing/2014/main" id="{FC0A81EA-525C-CDAC-4316-AB6600D4982E}"/>
+              </a:ext>
+            </a:extLst>
+          </p:cNvPr>
+          <p:cNvSpPr txBox="1"/>
+          <p:nvPr/>
+        </p:nvSpPr>
+        <p:spPr>
+          <a:xfrm>
+            <a:off x="2320014" y="4939504"/>
+            <a:ext cx="415498" cy="338554"/>
+          </a:xfrm>
+          <a:prstGeom prst="rect">
+            <a:avLst/>
+          </a:prstGeom>
+          <a:noFill/>
+        </p:spPr>
+        <p:txBody>
+          <a:bodyPr wrap="none" rtlCol="0">
+            <a:spAutoFit/>
+          </a:bodyPr>
+          <a:lstStyle/>
+          <a:p>
+            <a:r>
+              <a:rPr lang="en-US" sz="1600" dirty="0"/>
+              <a:t>(7)</a:t>
+            </a:r>
+          </a:p>
+        </p:txBody>
+      </p:sp>
+      <p:sp>
+        <p:nvSpPr>
+          <p:cNvPr id="29" name="TextBox 28">
+            <a:extLst>
+              <a:ext uri="{FF2B5EF4-FFF2-40B4-BE49-F238E27FC236}">
+                <a16:creationId xmlns:a16="http://schemas.microsoft.com/office/drawing/2014/main" id="{B3F51B2F-2D3C-0908-2732-66CC3C47C5CA}"/>
+              </a:ext>
+            </a:extLst>
+          </p:cNvPr>
+          <p:cNvSpPr txBox="1"/>
+          <p:nvPr/>
+        </p:nvSpPr>
+        <p:spPr>
+          <a:xfrm>
+            <a:off x="3273170" y="5442786"/>
+            <a:ext cx="415498" cy="338554"/>
+          </a:xfrm>
+          <a:prstGeom prst="rect">
+            <a:avLst/>
+          </a:prstGeom>
+          <a:noFill/>
+        </p:spPr>
+        <p:txBody>
+          <a:bodyPr wrap="none" rtlCol="0">
+            <a:spAutoFit/>
+          </a:bodyPr>
+          <a:lstStyle/>
+          <a:p>
+            <a:r>
+              <a:rPr lang="en-US" sz="1600" dirty="0"/>
+              <a:t>(8)</a:t>
+            </a:r>
+          </a:p>
+        </p:txBody>
+      </p:sp>
+      <p:sp>
+        <p:nvSpPr>
+          <p:cNvPr id="30" name="TextBox 29">
+            <a:extLst>
+              <a:ext uri="{FF2B5EF4-FFF2-40B4-BE49-F238E27FC236}">
+                <a16:creationId xmlns:a16="http://schemas.microsoft.com/office/drawing/2014/main" id="{F27FA41C-D511-593F-6DFA-391B4101C9E5}"/>
+              </a:ext>
+            </a:extLst>
+          </p:cNvPr>
+          <p:cNvSpPr txBox="1"/>
+          <p:nvPr/>
+        </p:nvSpPr>
+        <p:spPr>
+          <a:xfrm>
+            <a:off x="4431355" y="4420590"/>
+            <a:ext cx="415498" cy="338554"/>
+          </a:xfrm>
+          <a:prstGeom prst="rect">
+            <a:avLst/>
+          </a:prstGeom>
+          <a:noFill/>
+        </p:spPr>
+        <p:txBody>
+          <a:bodyPr wrap="none" rtlCol="0">
+            <a:spAutoFit/>
+          </a:bodyPr>
+          <a:lstStyle/>
+          <a:p>
+            <a:r>
+              <a:rPr lang="en-US" sz="1600" dirty="0"/>
+              <a:t>(6)</a:t>
+            </a:r>
+          </a:p>
+        </p:txBody>
+      </p:sp>
+      <p:sp>
+        <p:nvSpPr>
+          <p:cNvPr id="31" name="TextBox 30">
+            <a:extLst>
+              <a:ext uri="{FF2B5EF4-FFF2-40B4-BE49-F238E27FC236}">
+                <a16:creationId xmlns:a16="http://schemas.microsoft.com/office/drawing/2014/main" id="{9FEBE6D2-9003-73BC-31AF-F94FF69D9C7F}"/>
+              </a:ext>
+            </a:extLst>
+          </p:cNvPr>
+          <p:cNvSpPr txBox="1"/>
+          <p:nvPr/>
+        </p:nvSpPr>
+        <p:spPr>
+          <a:xfrm>
+            <a:off x="4659649" y="5827507"/>
+            <a:ext cx="415498" cy="338554"/>
+          </a:xfrm>
+          <a:prstGeom prst="rect">
+            <a:avLst/>
+          </a:prstGeom>
+          <a:noFill/>
+        </p:spPr>
+        <p:txBody>
+          <a:bodyPr wrap="none" rtlCol="0">
+            <a:spAutoFit/>
+          </a:bodyPr>
+          <a:lstStyle/>
+          <a:p>
+            <a:r>
+              <a:rPr lang="en-US" sz="1600" dirty="0"/>
+              <a:t>(9)</a:t>
+            </a:r>
+          </a:p>
+        </p:txBody>
+      </p:sp>
+      <p:pic>
+        <p:nvPicPr>
+          <p:cNvPr id="58" name="Picture 57">
+            <a:extLst>
+              <a:ext uri="{FF2B5EF4-FFF2-40B4-BE49-F238E27FC236}">
+                <a16:creationId xmlns:a16="http://schemas.microsoft.com/office/drawing/2014/main" id="{9666714F-C084-6C34-A7FD-C1982C53D86A}"/>
+              </a:ext>
+            </a:extLst>
+          </p:cNvPr>
+          <p:cNvPicPr>
+            <a:picLocks noChangeAspect="1"/>
+          </p:cNvPicPr>
+          <p:nvPr/>
+        </p:nvPicPr>
+        <p:blipFill>
+          <a:blip r:embed="rId9"/>
+          <a:stretch>
+            <a:fillRect/>
+          </a:stretch>
+        </p:blipFill>
+        <p:spPr>
+          <a:xfrm>
+            <a:off x="6969333" y="1990193"/>
+            <a:ext cx="2990850" cy="1533525"/>
+          </a:xfrm>
+          <a:prstGeom prst="rect">
+            <a:avLst/>
+          </a:prstGeom>
+          <a:ln>
+            <a:solidFill>
+              <a:schemeClr val="accent1"/>
+            </a:solidFill>
+          </a:ln>
+        </p:spPr>
+      </p:pic>
+      <p:sp>
+        <p:nvSpPr>
+          <p:cNvPr id="59" name="TextBox 58">
+            <a:extLst>
+              <a:ext uri="{FF2B5EF4-FFF2-40B4-BE49-F238E27FC236}">
+                <a16:creationId xmlns:a16="http://schemas.microsoft.com/office/drawing/2014/main" id="{176F00EA-2BF8-AC26-052B-E1712B05FCB0}"/>
+              </a:ext>
+            </a:extLst>
+          </p:cNvPr>
+          <p:cNvSpPr txBox="1"/>
+          <p:nvPr/>
+        </p:nvSpPr>
+        <p:spPr>
+          <a:xfrm>
+            <a:off x="7633300" y="1995780"/>
+            <a:ext cx="848412" cy="369332"/>
+          </a:xfrm>
+          <a:prstGeom prst="rect">
+            <a:avLst/>
+          </a:prstGeom>
+          <a:noFill/>
+        </p:spPr>
+        <p:txBody>
+          <a:bodyPr wrap="square">
+            <a:spAutoFit/>
+          </a:bodyPr>
+          <a:lstStyle/>
+          <a:p>
+            <a:r>
+              <a:rPr lang="en-US" dirty="0">
+                <a:hlinkClick r:id="rId11"/>
+              </a:rPr>
+              <a:t>THI2</a:t>
+            </a:r>
+            <a:endParaRPr lang="en-US" dirty="0"/>
+          </a:p>
+        </p:txBody>
+      </p:sp>
+      <p:pic>
+        <p:nvPicPr>
+          <p:cNvPr id="61" name="Picture 60">
+            <a:extLst>
+              <a:ext uri="{FF2B5EF4-FFF2-40B4-BE49-F238E27FC236}">
+                <a16:creationId xmlns:a16="http://schemas.microsoft.com/office/drawing/2014/main" id="{D539B949-CA00-A240-362B-6BF455610EB2}"/>
+              </a:ext>
+            </a:extLst>
+          </p:cNvPr>
+          <p:cNvPicPr>
+            <a:picLocks noChangeAspect="1"/>
+          </p:cNvPicPr>
+          <p:nvPr/>
+        </p:nvPicPr>
+        <p:blipFill>
+          <a:blip r:embed="rId12"/>
+          <a:stretch>
+            <a:fillRect/>
+          </a:stretch>
+        </p:blipFill>
+        <p:spPr>
+          <a:xfrm>
+            <a:off x="6929258" y="3608385"/>
+            <a:ext cx="4363059" cy="2429214"/>
+          </a:xfrm>
+          <a:prstGeom prst="rect">
+            <a:avLst/>
+          </a:prstGeom>
+        </p:spPr>
+      </p:pic>
+      <p:pic>
+        <p:nvPicPr>
+          <p:cNvPr id="3" name="Picture 2">
+            <a:extLst>
+              <a:ext uri="{FF2B5EF4-FFF2-40B4-BE49-F238E27FC236}">
+                <a16:creationId xmlns:a16="http://schemas.microsoft.com/office/drawing/2014/main" id="{A2EC85DC-E98E-7170-6816-F88FF6ED3046}"/>
+              </a:ext>
+            </a:extLst>
+          </p:cNvPr>
+          <p:cNvPicPr>
+            <a:picLocks noChangeAspect="1"/>
+          </p:cNvPicPr>
+          <p:nvPr/>
+        </p:nvPicPr>
+        <p:blipFill>
+          <a:blip r:embed="rId13"/>
+          <a:stretch>
+            <a:fillRect/>
+          </a:stretch>
+        </p:blipFill>
+        <p:spPr>
+          <a:xfrm>
+            <a:off x="9051846" y="78424"/>
+            <a:ext cx="3140154" cy="1592143"/>
+          </a:xfrm>
+          <a:prstGeom prst="rect">
+            <a:avLst/>
+          </a:prstGeom>
+        </p:spPr>
+      </p:pic>
+    </p:spTree>
+    <p:extLst>
+      <p:ext uri="{BB962C8B-B14F-4D97-AF65-F5344CB8AC3E}">
+        <p14:creationId xmlns:p14="http://schemas.microsoft.com/office/powerpoint/2010/main" val="1661616277"/>
+      </p:ext>
+    </p:extLst>
+  </p:cSld>
+  <p:clrMapOvr>
+    <a:masterClrMapping/>
+  </p:clrMapOvr>
+</p:sld>
+</file>
+
+<file path=ppt/slides/slide11.xml><?xml version="1.0" encoding="utf-8"?>
 <p:sld xmlns:a="http://schemas.openxmlformats.org/drawingml/2006/main" xmlns:r="http://schemas.openxmlformats.org/officeDocument/2006/relationships" xmlns:p="http://schemas.openxmlformats.org/presentationml/2006/main" show="0">
   <p:cSld>
     <p:spTree>
@@ -14457,7 +16839,13 @@
                                       <a:rPr lang="de-DE" sz="2400" b="0" i="1" smtClean="0">
                                         <a:latin typeface="Cambria Math" panose="02040503050406030204" pitchFamily="18" charset="0"/>
                                       </a:rPr>
-                                      <m:t>1,</m:t>
+                                      <m:t>1</m:t>
+                                    </m:r>
+                                    <m:r>
+                                      <a:rPr lang="de-DE" sz="2400" b="0" i="1" smtClean="0">
+                                        <a:latin typeface="Cambria Math" panose="02040503050406030204" pitchFamily="18" charset="0"/>
+                                      </a:rPr>
+                                      <m:t>,</m:t>
                                     </m:r>
                                     <m:r>
                                       <a:rPr lang="de-DE" sz="2400" b="0" i="1" smtClean="0">
@@ -14801,7 +17189,13 @@
                                       <a:rPr lang="de-DE" sz="2400" b="0" i="1" smtClean="0">
                                         <a:latin typeface="Cambria Math" panose="02040503050406030204" pitchFamily="18" charset="0"/>
                                       </a:rPr>
-                                      <m:t>,1</m:t>
+                                      <m:t>,</m:t>
+                                    </m:r>
+                                    <m:r>
+                                      <a:rPr lang="de-DE" sz="2400" b="0" i="1" smtClean="0">
+                                        <a:latin typeface="Cambria Math" panose="02040503050406030204" pitchFamily="18" charset="0"/>
+                                      </a:rPr>
+                                      <m:t>1</m:t>
                                     </m:r>
                                   </m:sub>
                                 </m:sSub>
@@ -15041,7 +17435,19 @@
                         <a:rPr lang="de-DE" sz="2400" b="0" i="1" smtClean="0">
                           <a:latin typeface="Cambria Math" panose="02040503050406030204" pitchFamily="18" charset="0"/>
                         </a:rPr>
-                        <m:t>&gt;0,⋯,</m:t>
+                        <m:t>&gt;</m:t>
+                      </m:r>
+                      <m:r>
+                        <a:rPr lang="de-DE" sz="2400" b="0" i="1" smtClean="0">
+                          <a:latin typeface="Cambria Math" panose="02040503050406030204" pitchFamily="18" charset="0"/>
+                        </a:rPr>
+                        <m:t>0</m:t>
+                      </m:r>
+                      <m:r>
+                        <a:rPr lang="de-DE" sz="2400" b="0" i="1" smtClean="0">
+                          <a:latin typeface="Cambria Math" panose="02040503050406030204" pitchFamily="18" charset="0"/>
+                        </a:rPr>
+                        <m:t>,⋯,</m:t>
                       </m:r>
                       <m:sSub>
                         <m:sSubPr>
@@ -15081,7 +17487,19 @@
                         <a:rPr lang="de-DE" sz="2400" b="0" i="1" smtClean="0">
                           <a:latin typeface="Cambria Math" panose="02040503050406030204" pitchFamily="18" charset="0"/>
                         </a:rPr>
-                        <m:t>&gt;0,⋯,</m:t>
+                        <m:t>&gt;</m:t>
+                      </m:r>
+                      <m:r>
+                        <a:rPr lang="de-DE" sz="2400" b="0" i="1" smtClean="0">
+                          <a:latin typeface="Cambria Math" panose="02040503050406030204" pitchFamily="18" charset="0"/>
+                        </a:rPr>
+                        <m:t>0</m:t>
+                      </m:r>
+                      <m:r>
+                        <a:rPr lang="de-DE" sz="2400" b="0" i="1" smtClean="0">
+                          <a:latin typeface="Cambria Math" panose="02040503050406030204" pitchFamily="18" charset="0"/>
+                        </a:rPr>
+                        <m:t>,⋯,</m:t>
                       </m:r>
                       <m:sSub>
                         <m:sSubPr>
@@ -15112,7 +17530,19 @@
                         <a:rPr lang="de-DE" sz="2400" b="0" i="1" smtClean="0">
                           <a:latin typeface="Cambria Math" panose="02040503050406030204" pitchFamily="18" charset="0"/>
                         </a:rPr>
-                        <m:t>&lt;0,⋯,</m:t>
+                        <m:t>&lt;</m:t>
+                      </m:r>
+                      <m:r>
+                        <a:rPr lang="de-DE" sz="2400" b="0" i="1" smtClean="0">
+                          <a:latin typeface="Cambria Math" panose="02040503050406030204" pitchFamily="18" charset="0"/>
+                        </a:rPr>
+                        <m:t>0</m:t>
+                      </m:r>
+                      <m:r>
+                        <a:rPr lang="de-DE" sz="2400" b="0" i="1" smtClean="0">
+                          <a:latin typeface="Cambria Math" panose="02040503050406030204" pitchFamily="18" charset="0"/>
+                        </a:rPr>
+                        <m:t>,⋯,</m:t>
                       </m:r>
                       <m:sSub>
                         <m:sSubPr>
@@ -16498,7 +18928,7 @@
 </p:sld>
 </file>
 
-<file path=ppt/slides/slide11.xml><?xml version="1.0" encoding="utf-8"?>
+<file path=ppt/slides/slide12.xml><?xml version="1.0" encoding="utf-8"?>
 <p:sld xmlns:a="http://schemas.openxmlformats.org/drawingml/2006/main" xmlns:r="http://schemas.openxmlformats.org/officeDocument/2006/relationships" xmlns:p="http://schemas.openxmlformats.org/presentationml/2006/main">
   <p:cSld>
     <p:spTree>
@@ -20735,18 +23165,10 @@
           <a:lstStyle/>
           <a:p>
             <a:r>
-              <a:rPr lang="de-DE" dirty="0"/>
-              <a:t>Looking </a:t>
+              <a:rPr lang="de-DE" sz="3600" dirty="0"/>
+              <a:t>Mapping a 2-neuron NN</a:t>
             </a:r>
-            <a:r>
-              <a:rPr lang="de-DE" dirty="0" err="1"/>
-              <a:t>for</a:t>
-            </a:r>
-            <a:r>
-              <a:rPr lang="de-DE" dirty="0"/>
-              <a:t> 2-neuron NNs</a:t>
-            </a:r>
-            <a:endParaRPr lang="en-US" dirty="0"/>
+            <a:endParaRPr lang="en-US" sz="3600" dirty="0"/>
           </a:p>
         </p:txBody>
       </p:sp>
@@ -20932,8 +23354,8 @@
           </a:fontRef>
         </p:style>
       </p:cxnSp>
-      <mc:AlternateContent xmlns:mc="http://schemas.openxmlformats.org/markup-compatibility/2006">
-        <mc:Choice xmlns:a14="http://schemas.microsoft.com/office/drawing/2010/main" Requires="a14">
+      <mc:AlternateContent xmlns:mc="http://schemas.openxmlformats.org/markup-compatibility/2006" xmlns:a14="http://schemas.microsoft.com/office/drawing/2010/main">
+        <mc:Choice Requires="a14">
           <p:sp>
             <p:nvSpPr>
               <p:cNvPr id="40" name="TextBox 39">
@@ -21018,7 +23440,7 @@
             </p:txBody>
           </p:sp>
         </mc:Choice>
-        <mc:Fallback>
+        <mc:Fallback xmlns="">
           <p:sp>
             <p:nvSpPr>
               <p:cNvPr id="40" name="TextBox 39">
@@ -21063,8 +23485,8 @@
           </p:sp>
         </mc:Fallback>
       </mc:AlternateContent>
-      <mc:AlternateContent xmlns:mc="http://schemas.openxmlformats.org/markup-compatibility/2006">
-        <mc:Choice xmlns:a14="http://schemas.microsoft.com/office/drawing/2010/main" Requires="a14">
+      <mc:AlternateContent xmlns:mc="http://schemas.openxmlformats.org/markup-compatibility/2006" xmlns:a14="http://schemas.microsoft.com/office/drawing/2010/main">
+        <mc:Choice Requires="a14">
           <p:sp>
             <p:nvSpPr>
               <p:cNvPr id="6" name="TextBox 5">
@@ -21229,7 +23651,7 @@
             </p:txBody>
           </p:sp>
         </mc:Choice>
-        <mc:Fallback>
+        <mc:Fallback xmlns="">
           <p:sp>
             <p:nvSpPr>
               <p:cNvPr id="6" name="TextBox 5">
@@ -21322,8 +23744,8 @@
           </a:p>
         </p:txBody>
       </p:sp>
-      <mc:AlternateContent xmlns:mc="http://schemas.openxmlformats.org/markup-compatibility/2006">
-        <mc:Choice xmlns:a14="http://schemas.microsoft.com/office/drawing/2010/main" Requires="a14">
+      <mc:AlternateContent xmlns:mc="http://schemas.openxmlformats.org/markup-compatibility/2006" xmlns:a14="http://schemas.microsoft.com/office/drawing/2010/main">
+        <mc:Choice Requires="a14">
           <p:sp>
             <p:nvSpPr>
               <p:cNvPr id="12" name="TextBox 11">
@@ -21408,7 +23830,7 @@
             </p:txBody>
           </p:sp>
         </mc:Choice>
-        <mc:Fallback>
+        <mc:Fallback xmlns="">
           <p:sp>
             <p:nvSpPr>
               <p:cNvPr id="12" name="TextBox 11">
@@ -21453,8 +23875,8 @@
           </p:sp>
         </mc:Fallback>
       </mc:AlternateContent>
-      <mc:AlternateContent xmlns:mc="http://schemas.openxmlformats.org/markup-compatibility/2006">
-        <mc:Choice xmlns:a14="http://schemas.microsoft.com/office/drawing/2010/main" Requires="a14">
+      <mc:AlternateContent xmlns:mc="http://schemas.openxmlformats.org/markup-compatibility/2006" xmlns:a14="http://schemas.microsoft.com/office/drawing/2010/main">
+        <mc:Choice Requires="a14">
           <p:sp>
             <p:nvSpPr>
               <p:cNvPr id="14" name="TextBox 13">
@@ -21539,7 +23961,7 @@
             </p:txBody>
           </p:sp>
         </mc:Choice>
-        <mc:Fallback>
+        <mc:Fallback xmlns="">
           <p:sp>
             <p:nvSpPr>
               <p:cNvPr id="14" name="TextBox 13">
@@ -21584,8 +24006,8 @@
           </p:sp>
         </mc:Fallback>
       </mc:AlternateContent>
-      <mc:AlternateContent xmlns:mc="http://schemas.openxmlformats.org/markup-compatibility/2006">
-        <mc:Choice xmlns:a14="http://schemas.microsoft.com/office/drawing/2010/main" Requires="a14">
+      <mc:AlternateContent xmlns:mc="http://schemas.openxmlformats.org/markup-compatibility/2006" xmlns:a14="http://schemas.microsoft.com/office/drawing/2010/main">
+        <mc:Choice Requires="a14">
           <p:sp>
             <p:nvSpPr>
               <p:cNvPr id="15" name="TextBox 14">
@@ -21670,7 +24092,7 @@
             </p:txBody>
           </p:sp>
         </mc:Choice>
-        <mc:Fallback>
+        <mc:Fallback xmlns="">
           <p:sp>
             <p:nvSpPr>
               <p:cNvPr id="15" name="TextBox 14">
@@ -21715,8 +24137,8 @@
           </p:sp>
         </mc:Fallback>
       </mc:AlternateContent>
-      <mc:AlternateContent xmlns:mc="http://schemas.openxmlformats.org/markup-compatibility/2006">
-        <mc:Choice xmlns:a14="http://schemas.microsoft.com/office/drawing/2010/main" Requires="a14">
+      <mc:AlternateContent xmlns:mc="http://schemas.openxmlformats.org/markup-compatibility/2006" xmlns:a14="http://schemas.microsoft.com/office/drawing/2010/main">
+        <mc:Choice Requires="a14">
           <p:sp>
             <p:nvSpPr>
               <p:cNvPr id="3" name="TextBox 2">
@@ -21801,7 +24223,7 @@
             </p:txBody>
           </p:sp>
         </mc:Choice>
-        <mc:Fallback>
+        <mc:Fallback xmlns="">
           <p:sp>
             <p:nvSpPr>
               <p:cNvPr id="3" name="TextBox 2">
@@ -21846,8 +24268,8 @@
           </p:sp>
         </mc:Fallback>
       </mc:AlternateContent>
-      <mc:AlternateContent xmlns:mc="http://schemas.openxmlformats.org/markup-compatibility/2006">
-        <mc:Choice xmlns:a14="http://schemas.microsoft.com/office/drawing/2010/main" Requires="a14">
+      <mc:AlternateContent xmlns:mc="http://schemas.openxmlformats.org/markup-compatibility/2006" xmlns:a14="http://schemas.microsoft.com/office/drawing/2010/main">
+        <mc:Choice Requires="a14">
           <p:sp>
             <p:nvSpPr>
               <p:cNvPr id="10" name="TextBox 9">
@@ -21932,7 +24354,7 @@
             </p:txBody>
           </p:sp>
         </mc:Choice>
-        <mc:Fallback>
+        <mc:Fallback xmlns="">
           <p:sp>
             <p:nvSpPr>
               <p:cNvPr id="10" name="TextBox 9">
@@ -21977,8 +24399,8 @@
           </p:sp>
         </mc:Fallback>
       </mc:AlternateContent>
-      <mc:AlternateContent xmlns:mc="http://schemas.openxmlformats.org/markup-compatibility/2006">
-        <mc:Choice xmlns:a14="http://schemas.microsoft.com/office/drawing/2010/main" Requires="a14">
+      <mc:AlternateContent xmlns:mc="http://schemas.openxmlformats.org/markup-compatibility/2006" xmlns:a14="http://schemas.microsoft.com/office/drawing/2010/main">
+        <mc:Choice Requires="a14">
           <p:sp>
             <p:nvSpPr>
               <p:cNvPr id="13" name="TextBox 12">
@@ -22063,7 +24485,7 @@
             </p:txBody>
           </p:sp>
         </mc:Choice>
-        <mc:Fallback>
+        <mc:Fallback xmlns="">
           <p:sp>
             <p:nvSpPr>
               <p:cNvPr id="13" name="TextBox 12">
@@ -22199,8 +24621,8 @@
           </a:fontRef>
         </p:style>
       </p:cxnSp>
-      <mc:AlternateContent xmlns:mc="http://schemas.openxmlformats.org/markup-compatibility/2006">
-        <mc:Choice xmlns:a14="http://schemas.microsoft.com/office/drawing/2010/main" Requires="a14">
+      <mc:AlternateContent xmlns:mc="http://schemas.openxmlformats.org/markup-compatibility/2006" xmlns:a14="http://schemas.microsoft.com/office/drawing/2010/main">
+        <mc:Choice Requires="a14">
           <p:sp>
             <p:nvSpPr>
               <p:cNvPr id="30" name="TextBox 29">
@@ -22285,7 +24707,7 @@
             </p:txBody>
           </p:sp>
         </mc:Choice>
-        <mc:Fallback>
+        <mc:Fallback xmlns="">
           <p:sp>
             <p:nvSpPr>
               <p:cNvPr id="30" name="TextBox 29">
@@ -22503,8 +24925,8 @@
           </a:fontRef>
         </p:style>
       </p:cxnSp>
-      <mc:AlternateContent xmlns:mc="http://schemas.openxmlformats.org/markup-compatibility/2006">
-        <mc:Choice xmlns:a14="http://schemas.microsoft.com/office/drawing/2010/main" Requires="a14">
+      <mc:AlternateContent xmlns:mc="http://schemas.openxmlformats.org/markup-compatibility/2006" xmlns:a14="http://schemas.microsoft.com/office/drawing/2010/main">
+        <mc:Choice Requires="a14">
           <p:sp>
             <p:nvSpPr>
               <p:cNvPr id="53" name="TextBox 52">
@@ -22576,7 +24998,7 @@
             </p:txBody>
           </p:sp>
         </mc:Choice>
-        <mc:Fallback>
+        <mc:Fallback xmlns="">
           <p:sp>
             <p:nvSpPr>
               <p:cNvPr id="53" name="TextBox 52">
@@ -22621,8 +25043,8 @@
           </p:sp>
         </mc:Fallback>
       </mc:AlternateContent>
-      <mc:AlternateContent xmlns:mc="http://schemas.openxmlformats.org/markup-compatibility/2006">
-        <mc:Choice xmlns:a14="http://schemas.microsoft.com/office/drawing/2010/main" Requires="a14">
+      <mc:AlternateContent xmlns:mc="http://schemas.openxmlformats.org/markup-compatibility/2006" xmlns:a14="http://schemas.microsoft.com/office/drawing/2010/main">
+        <mc:Choice Requires="a14">
           <p:sp>
             <p:nvSpPr>
               <p:cNvPr id="60" name="TextBox 59">
@@ -22989,7 +25411,7 @@
             </p:txBody>
           </p:sp>
         </mc:Choice>
-        <mc:Fallback>
+        <mc:Fallback xmlns="">
           <p:sp>
             <p:nvSpPr>
               <p:cNvPr id="60" name="TextBox 59">
@@ -23034,8 +25456,8 @@
           </p:sp>
         </mc:Fallback>
       </mc:AlternateContent>
-      <mc:AlternateContent xmlns:mc="http://schemas.openxmlformats.org/markup-compatibility/2006">
-        <mc:Choice xmlns:a14="http://schemas.microsoft.com/office/drawing/2010/main" Requires="a14">
+      <mc:AlternateContent xmlns:mc="http://schemas.openxmlformats.org/markup-compatibility/2006" xmlns:a14="http://schemas.microsoft.com/office/drawing/2010/main">
+        <mc:Choice Requires="a14">
           <p:sp>
             <p:nvSpPr>
               <p:cNvPr id="61" name="TextBox 60">
@@ -23104,7 +25526,7 @@
             </p:txBody>
           </p:sp>
         </mc:Choice>
-        <mc:Fallback>
+        <mc:Fallback xmlns="">
           <p:sp>
             <p:nvSpPr>
               <p:cNvPr id="61" name="TextBox 60">
@@ -23149,8 +25571,8 @@
           </p:sp>
         </mc:Fallback>
       </mc:AlternateContent>
-      <mc:AlternateContent xmlns:mc="http://schemas.openxmlformats.org/markup-compatibility/2006">
-        <mc:Choice xmlns:a14="http://schemas.microsoft.com/office/drawing/2010/main" Requires="a14">
+      <mc:AlternateContent xmlns:mc="http://schemas.openxmlformats.org/markup-compatibility/2006" xmlns:a14="http://schemas.microsoft.com/office/drawing/2010/main">
+        <mc:Choice Requires="a14">
           <p:sp>
             <p:nvSpPr>
               <p:cNvPr id="62" name="TextBox 61">
@@ -23219,7 +25641,7 @@
             </p:txBody>
           </p:sp>
         </mc:Choice>
-        <mc:Fallback>
+        <mc:Fallback xmlns="">
           <p:sp>
             <p:nvSpPr>
               <p:cNvPr id="62" name="TextBox 61">
@@ -23264,8 +25686,8 @@
           </p:sp>
         </mc:Fallback>
       </mc:AlternateContent>
-      <mc:AlternateContent xmlns:mc="http://schemas.openxmlformats.org/markup-compatibility/2006">
-        <mc:Choice xmlns:a14="http://schemas.microsoft.com/office/drawing/2010/main" Requires="a14">
+      <mc:AlternateContent xmlns:mc="http://schemas.openxmlformats.org/markup-compatibility/2006" xmlns:a14="http://schemas.microsoft.com/office/drawing/2010/main">
+        <mc:Choice Requires="a14">
           <p:sp>
             <p:nvSpPr>
               <p:cNvPr id="63" name="TextBox 62">
@@ -23334,7 +25756,7 @@
             </p:txBody>
           </p:sp>
         </mc:Choice>
-        <mc:Fallback>
+        <mc:Fallback xmlns="">
           <p:sp>
             <p:nvSpPr>
               <p:cNvPr id="63" name="TextBox 62">
@@ -23379,8 +25801,8 @@
           </p:sp>
         </mc:Fallback>
       </mc:AlternateContent>
-      <mc:AlternateContent xmlns:mc="http://schemas.openxmlformats.org/markup-compatibility/2006">
-        <mc:Choice xmlns:a14="http://schemas.microsoft.com/office/drawing/2010/main" Requires="a14">
+      <mc:AlternateContent xmlns:mc="http://schemas.openxmlformats.org/markup-compatibility/2006" xmlns:a14="http://schemas.microsoft.com/office/drawing/2010/main">
+        <mc:Choice Requires="a14">
           <p:sp>
             <p:nvSpPr>
               <p:cNvPr id="64" name="TextBox 63">
@@ -23449,7 +25871,7 @@
             </p:txBody>
           </p:sp>
         </mc:Choice>
-        <mc:Fallback>
+        <mc:Fallback xmlns="">
           <p:sp>
             <p:nvSpPr>
               <p:cNvPr id="64" name="TextBox 63">
@@ -23494,8 +25916,8 @@
           </p:sp>
         </mc:Fallback>
       </mc:AlternateContent>
-      <mc:AlternateContent xmlns:mc="http://schemas.openxmlformats.org/markup-compatibility/2006">
-        <mc:Choice xmlns:a14="http://schemas.microsoft.com/office/drawing/2010/main" Requires="a14">
+      <mc:AlternateContent xmlns:mc="http://schemas.openxmlformats.org/markup-compatibility/2006" xmlns:a14="http://schemas.microsoft.com/office/drawing/2010/main">
+        <mc:Choice Requires="a14">
           <p:sp>
             <p:nvSpPr>
               <p:cNvPr id="65" name="TextBox 64">
@@ -23564,7 +25986,7 @@
             </p:txBody>
           </p:sp>
         </mc:Choice>
-        <mc:Fallback>
+        <mc:Fallback xmlns="">
           <p:sp>
             <p:nvSpPr>
               <p:cNvPr id="65" name="TextBox 64">
@@ -23609,8 +26031,8 @@
           </p:sp>
         </mc:Fallback>
       </mc:AlternateContent>
-      <mc:AlternateContent xmlns:mc="http://schemas.openxmlformats.org/markup-compatibility/2006">
-        <mc:Choice xmlns:a14="http://schemas.microsoft.com/office/drawing/2010/main" Requires="a14">
+      <mc:AlternateContent xmlns:mc="http://schemas.openxmlformats.org/markup-compatibility/2006" xmlns:a14="http://schemas.microsoft.com/office/drawing/2010/main">
+        <mc:Choice Requires="a14">
           <p:sp>
             <p:nvSpPr>
               <p:cNvPr id="66" name="TextBox 65">
@@ -23682,7 +26104,7 @@
             </p:txBody>
           </p:sp>
         </mc:Choice>
-        <mc:Fallback>
+        <mc:Fallback xmlns="">
           <p:sp>
             <p:nvSpPr>
               <p:cNvPr id="66" name="TextBox 65">
@@ -23727,8 +26149,8 @@
           </p:sp>
         </mc:Fallback>
       </mc:AlternateContent>
-      <mc:AlternateContent xmlns:mc="http://schemas.openxmlformats.org/markup-compatibility/2006">
-        <mc:Choice xmlns:a14="http://schemas.microsoft.com/office/drawing/2010/main" Requires="a14">
+      <mc:AlternateContent xmlns:mc="http://schemas.openxmlformats.org/markup-compatibility/2006" xmlns:a14="http://schemas.microsoft.com/office/drawing/2010/main">
+        <mc:Choice Requires="a14">
           <p:sp>
             <p:nvSpPr>
               <p:cNvPr id="70" name="TextBox 69">
@@ -23813,7 +26235,7 @@
             </p:txBody>
           </p:sp>
         </mc:Choice>
-        <mc:Fallback>
+        <mc:Fallback xmlns="">
           <p:sp>
             <p:nvSpPr>
               <p:cNvPr id="70" name="TextBox 69">
@@ -23858,8 +26280,8 @@
           </p:sp>
         </mc:Fallback>
       </mc:AlternateContent>
-      <mc:AlternateContent xmlns:mc="http://schemas.openxmlformats.org/markup-compatibility/2006">
-        <mc:Choice xmlns:a14="http://schemas.microsoft.com/office/drawing/2010/main" Requires="a14">
+      <mc:AlternateContent xmlns:mc="http://schemas.openxmlformats.org/markup-compatibility/2006" xmlns:a14="http://schemas.microsoft.com/office/drawing/2010/main">
+        <mc:Choice Requires="a14">
           <p:sp>
             <p:nvSpPr>
               <p:cNvPr id="72" name="TextBox 71">
@@ -23944,7 +26366,7 @@
             </p:txBody>
           </p:sp>
         </mc:Choice>
-        <mc:Fallback>
+        <mc:Fallback xmlns="">
           <p:sp>
             <p:nvSpPr>
               <p:cNvPr id="72" name="TextBox 71">
@@ -23989,8 +26411,8 @@
           </p:sp>
         </mc:Fallback>
       </mc:AlternateContent>
-      <mc:AlternateContent xmlns:mc="http://schemas.openxmlformats.org/markup-compatibility/2006">
-        <mc:Choice xmlns:a14="http://schemas.microsoft.com/office/drawing/2010/main" Requires="a14">
+      <mc:AlternateContent xmlns:mc="http://schemas.openxmlformats.org/markup-compatibility/2006" xmlns:a14="http://schemas.microsoft.com/office/drawing/2010/main">
+        <mc:Choice Requires="a14">
           <p:sp>
             <p:nvSpPr>
               <p:cNvPr id="74" name="TextBox 73">
@@ -24075,7 +26497,7 @@
             </p:txBody>
           </p:sp>
         </mc:Choice>
-        <mc:Fallback>
+        <mc:Fallback xmlns="">
           <p:sp>
             <p:nvSpPr>
               <p:cNvPr id="74" name="TextBox 73">
@@ -24120,8 +26542,8 @@
           </p:sp>
         </mc:Fallback>
       </mc:AlternateContent>
-      <mc:AlternateContent xmlns:mc="http://schemas.openxmlformats.org/markup-compatibility/2006">
-        <mc:Choice xmlns:a14="http://schemas.microsoft.com/office/drawing/2010/main" Requires="a14">
+      <mc:AlternateContent xmlns:mc="http://schemas.openxmlformats.org/markup-compatibility/2006" xmlns:a14="http://schemas.microsoft.com/office/drawing/2010/main">
+        <mc:Choice Requires="a14">
           <p:sp>
             <p:nvSpPr>
               <p:cNvPr id="77" name="TextBox 76">
@@ -24206,7 +26628,7 @@
             </p:txBody>
           </p:sp>
         </mc:Choice>
-        <mc:Fallback>
+        <mc:Fallback xmlns="">
           <p:sp>
             <p:nvSpPr>
               <p:cNvPr id="77" name="TextBox 76">
@@ -24251,8 +26673,8 @@
           </p:sp>
         </mc:Fallback>
       </mc:AlternateContent>
-      <mc:AlternateContent xmlns:mc="http://schemas.openxmlformats.org/markup-compatibility/2006">
-        <mc:Choice xmlns:a14="http://schemas.microsoft.com/office/drawing/2010/main" Requires="a14">
+      <mc:AlternateContent xmlns:mc="http://schemas.openxmlformats.org/markup-compatibility/2006" xmlns:a14="http://schemas.microsoft.com/office/drawing/2010/main">
+        <mc:Choice Requires="a14">
           <p:sp>
             <p:nvSpPr>
               <p:cNvPr id="78" name="TextBox 77">
@@ -24324,7 +26746,7 @@
             </p:txBody>
           </p:sp>
         </mc:Choice>
-        <mc:Fallback>
+        <mc:Fallback xmlns="">
           <p:sp>
             <p:nvSpPr>
               <p:cNvPr id="78" name="TextBox 77">
@@ -24369,8 +26791,8 @@
           </p:sp>
         </mc:Fallback>
       </mc:AlternateContent>
-      <mc:AlternateContent xmlns:mc="http://schemas.openxmlformats.org/markup-compatibility/2006">
-        <mc:Choice xmlns:a14="http://schemas.microsoft.com/office/drawing/2010/main" Requires="a14">
+      <mc:AlternateContent xmlns:mc="http://schemas.openxmlformats.org/markup-compatibility/2006" xmlns:a14="http://schemas.microsoft.com/office/drawing/2010/main">
+        <mc:Choice Requires="a14">
           <p:sp>
             <p:nvSpPr>
               <p:cNvPr id="79" name="TextBox 78">
@@ -24442,7 +26864,7 @@
             </p:txBody>
           </p:sp>
         </mc:Choice>
-        <mc:Fallback>
+        <mc:Fallback xmlns="">
           <p:sp>
             <p:nvSpPr>
               <p:cNvPr id="79" name="TextBox 78">
@@ -24487,8 +26909,8 @@
           </p:sp>
         </mc:Fallback>
       </mc:AlternateContent>
-      <mc:AlternateContent xmlns:mc="http://schemas.openxmlformats.org/markup-compatibility/2006">
-        <mc:Choice xmlns:a14="http://schemas.microsoft.com/office/drawing/2010/main" Requires="a14">
+      <mc:AlternateContent xmlns:mc="http://schemas.openxmlformats.org/markup-compatibility/2006" xmlns:a14="http://schemas.microsoft.com/office/drawing/2010/main">
+        <mc:Choice Requires="a14">
           <p:sp>
             <p:nvSpPr>
               <p:cNvPr id="80" name="TextBox 79">
@@ -24560,7 +26982,7 @@
             </p:txBody>
           </p:sp>
         </mc:Choice>
-        <mc:Fallback>
+        <mc:Fallback xmlns="">
           <p:sp>
             <p:nvSpPr>
               <p:cNvPr id="80" name="TextBox 79">
@@ -24605,8 +27027,8 @@
           </p:sp>
         </mc:Fallback>
       </mc:AlternateContent>
-      <mc:AlternateContent xmlns:mc="http://schemas.openxmlformats.org/markup-compatibility/2006">
-        <mc:Choice xmlns:a14="http://schemas.microsoft.com/office/drawing/2010/main" Requires="a14">
+      <mc:AlternateContent xmlns:mc="http://schemas.openxmlformats.org/markup-compatibility/2006" xmlns:a14="http://schemas.microsoft.com/office/drawing/2010/main">
+        <mc:Choice Requires="a14">
           <p:sp>
             <p:nvSpPr>
               <p:cNvPr id="81" name="TextBox 80">
@@ -24678,7 +27100,7 @@
             </p:txBody>
           </p:sp>
         </mc:Choice>
-        <mc:Fallback>
+        <mc:Fallback xmlns="">
           <p:sp>
             <p:nvSpPr>
               <p:cNvPr id="81" name="TextBox 80">
@@ -25039,58 +27461,192 @@
           </a:p>
         </p:txBody>
       </p:sp>
-      <p:sp>
-        <p:nvSpPr>
-          <p:cNvPr id="2" name="Title 1">
-            <a:extLst>
-              <a:ext uri="{FF2B5EF4-FFF2-40B4-BE49-F238E27FC236}">
-                <a16:creationId xmlns:a16="http://schemas.microsoft.com/office/drawing/2014/main" id="{F7808BAB-E390-4181-4D85-47C1204661CE}"/>
-              </a:ext>
-            </a:extLst>
-          </p:cNvPr>
-          <p:cNvSpPr>
-            <a:spLocks noGrp="1"/>
-          </p:cNvSpPr>
-          <p:nvPr>
-            <p:ph type="title"/>
-          </p:nvPr>
-        </p:nvSpPr>
-        <p:spPr>
-          <a:xfrm>
-            <a:off x="265564" y="159471"/>
-            <a:ext cx="5628339" cy="720725"/>
-          </a:xfrm>
-        </p:spPr>
-        <p:txBody>
-          <a:bodyPr>
-            <a:noAutofit/>
-          </a:bodyPr>
-          <a:lstStyle/>
-          <a:p>
-            <a:r>
-              <a:rPr lang="de-DE" sz="2800" dirty="0" err="1"/>
-              <a:t>Step</a:t>
-            </a:r>
-            <a:r>
-              <a:rPr lang="de-DE" sz="2800" dirty="0"/>
-              <a:t> 1: Find </a:t>
-            </a:r>
-            <a:r>
-              <a:rPr lang="de-DE" sz="2800" dirty="0" err="1"/>
-              <a:t>the</a:t>
-            </a:r>
-            <a:r>
-              <a:rPr lang="de-DE" sz="2800" dirty="0"/>
-              <a:t> m4-like </a:t>
-            </a:r>
-            <a:r>
-              <a:rPr lang="de-DE" sz="2800" dirty="0" err="1"/>
-              <a:t>metabolites</a:t>
-            </a:r>
-            <a:endParaRPr lang="en-US" sz="2800" dirty="0"/>
-          </a:p>
-        </p:txBody>
-      </p:sp>
+      <mc:AlternateContent xmlns:mc="http://schemas.openxmlformats.org/markup-compatibility/2006">
+        <mc:Choice xmlns:a14="http://schemas.microsoft.com/office/drawing/2010/main" Requires="a14">
+          <p:sp>
+            <p:nvSpPr>
+              <p:cNvPr id="2" name="Title 1">
+                <a:extLst>
+                  <a:ext uri="{FF2B5EF4-FFF2-40B4-BE49-F238E27FC236}">
+                    <a16:creationId xmlns:a16="http://schemas.microsoft.com/office/drawing/2014/main" id="{F7808BAB-E390-4181-4D85-47C1204661CE}"/>
+                  </a:ext>
+                </a:extLst>
+              </p:cNvPr>
+              <p:cNvSpPr>
+                <a:spLocks noGrp="1"/>
+              </p:cNvSpPr>
+              <p:nvPr>
+                <p:ph type="title"/>
+              </p:nvPr>
+            </p:nvSpPr>
+            <p:spPr>
+              <a:xfrm>
+                <a:off x="265564" y="159471"/>
+                <a:ext cx="5628339" cy="720725"/>
+              </a:xfrm>
+            </p:spPr>
+            <p:txBody>
+              <a:bodyPr>
+                <a:noAutofit/>
+              </a:bodyPr>
+              <a:lstStyle/>
+              <a:p>
+                <a:r>
+                  <a:rPr lang="de-DE" sz="2400" dirty="0"/>
+                  <a:t>Step 1: Find </a:t>
+                </a:r>
+                <a:r>
+                  <a:rPr lang="de-DE" sz="2400" dirty="0" err="1"/>
+                  <a:t>the</a:t>
+                </a:r>
+                <a:r>
+                  <a:rPr lang="de-DE" sz="2400" dirty="0"/>
+                  <a:t> m4-like </a:t>
+                </a:r>
+                <a:r>
+                  <a:rPr lang="de-DE" sz="2400" dirty="0" err="1"/>
+                  <a:t>metabolites</a:t>
+                </a:r>
+                <a:r>
+                  <a:rPr lang="de-DE" sz="2400" dirty="0"/>
+                  <a:t> and </a:t>
+                </a:r>
+                <a:r>
+                  <a:rPr lang="de-DE" sz="2400" dirty="0" err="1"/>
+                  <a:t>the</a:t>
+                </a:r>
+                <a:r>
+                  <a:rPr lang="de-DE" sz="2400" dirty="0"/>
+                  <a:t> </a:t>
+                </a:r>
+                <a:r>
+                  <a:rPr lang="de-DE" sz="2400" dirty="0" err="1"/>
+                  <a:t>reactions</a:t>
+                </a:r>
+                <a:r>
+                  <a:rPr lang="de-DE" sz="2400" dirty="0"/>
+                  <a:t> </a:t>
+                </a:r>
+                <a14:m>
+                  <m:oMath xmlns:m="http://schemas.openxmlformats.org/officeDocument/2006/math">
+                    <m:sSub>
+                      <m:sSubPr>
+                        <m:ctrlPr>
+                          <a:rPr lang="de-DE" sz="2400" i="1" dirty="0">
+                            <a:latin typeface="Cambria Math" panose="02040503050406030204" pitchFamily="18" charset="0"/>
+                          </a:rPr>
+                        </m:ctrlPr>
+                      </m:sSubPr>
+                      <m:e>
+                        <m:r>
+                          <m:rPr>
+                            <m:sty m:val="p"/>
+                          </m:rPr>
+                          <a:rPr lang="en-GB" sz="2400" i="1" dirty="0">
+                            <a:latin typeface="Cambria Math" panose="02040503050406030204" pitchFamily="18" charset="0"/>
+                          </a:rPr>
+                          <m:t>r</m:t>
+                        </m:r>
+                      </m:e>
+                      <m:sub>
+                        <m:r>
+                          <a:rPr lang="en-GB" sz="2400" i="1" dirty="0">
+                            <a:latin typeface="Cambria Math" panose="02040503050406030204" pitchFamily="18" charset="0"/>
+                          </a:rPr>
+                          <m:t>2</m:t>
+                        </m:r>
+                      </m:sub>
+                    </m:sSub>
+                  </m:oMath>
+                </a14:m>
+                <a:r>
+                  <a:rPr lang="en-US" sz="2400" dirty="0"/>
+                  <a:t>’s and </a:t>
+                </a:r>
+                <a14:m>
+                  <m:oMath xmlns:m="http://schemas.openxmlformats.org/officeDocument/2006/math">
+                    <m:sSub>
+                      <m:sSubPr>
+                        <m:ctrlPr>
+                          <a:rPr lang="de-DE" sz="2400" i="1" dirty="0">
+                            <a:latin typeface="Cambria Math" panose="02040503050406030204" pitchFamily="18" charset="0"/>
+                          </a:rPr>
+                        </m:ctrlPr>
+                      </m:sSubPr>
+                      <m:e>
+                        <m:r>
+                          <m:rPr>
+                            <m:sty m:val="p"/>
+                          </m:rPr>
+                          <a:rPr lang="en-GB" sz="2400" i="1" dirty="0">
+                            <a:latin typeface="Cambria Math" panose="02040503050406030204" pitchFamily="18" charset="0"/>
+                          </a:rPr>
+                          <m:t>r</m:t>
+                        </m:r>
+                      </m:e>
+                      <m:sub>
+                        <m:r>
+                          <a:rPr lang="en-GB" sz="2400" i="1" dirty="0">
+                            <a:latin typeface="Cambria Math" panose="02040503050406030204" pitchFamily="18" charset="0"/>
+                          </a:rPr>
+                          <m:t>3</m:t>
+                        </m:r>
+                      </m:sub>
+                    </m:sSub>
+                  </m:oMath>
+                </a14:m>
+                <a:r>
+                  <a:rPr lang="en-US" sz="2400" dirty="0"/>
+                  <a:t>’s</a:t>
+                </a:r>
+              </a:p>
+            </p:txBody>
+          </p:sp>
+        </mc:Choice>
+        <mc:Fallback>
+          <p:sp>
+            <p:nvSpPr>
+              <p:cNvPr id="2" name="Title 1">
+                <a:extLst>
+                  <a:ext uri="{FF2B5EF4-FFF2-40B4-BE49-F238E27FC236}">
+                    <a16:creationId xmlns:a16="http://schemas.microsoft.com/office/drawing/2014/main" id="{F7808BAB-E390-4181-4D85-47C1204661CE}"/>
+                  </a:ext>
+                </a:extLst>
+              </p:cNvPr>
+              <p:cNvSpPr>
+                <a:spLocks noGrp="1" noRot="1" noChangeAspect="1" noMove="1" noResize="1" noEditPoints="1" noAdjustHandles="1" noChangeArrowheads="1" noChangeShapeType="1" noTextEdit="1"/>
+              </p:cNvSpPr>
+              <p:nvPr>
+                <p:ph type="title"/>
+              </p:nvPr>
+            </p:nvSpPr>
+            <p:spPr>
+              <a:xfrm>
+                <a:off x="265564" y="159471"/>
+                <a:ext cx="5628339" cy="720725"/>
+              </a:xfrm>
+              <a:blipFill>
+                <a:blip r:embed="rId3"/>
+                <a:stretch>
+                  <a:fillRect l="-1733" t="-12712" r="-650" b="-22881"/>
+                </a:stretch>
+              </a:blipFill>
+            </p:spPr>
+            <p:txBody>
+              <a:bodyPr/>
+              <a:lstStyle/>
+              <a:p>
+                <a:r>
+                  <a:rPr lang="en-US">
+                    <a:noFill/>
+                  </a:rPr>
+                  <a:t> </a:t>
+                </a:r>
+              </a:p>
+            </p:txBody>
+          </p:sp>
+        </mc:Fallback>
+      </mc:AlternateContent>
       <p:sp>
         <p:nvSpPr>
           <p:cNvPr id="17" name="Oval 16">
@@ -25273,8 +27829,8 @@
           </a:fontRef>
         </p:style>
       </p:cxnSp>
-      <mc:AlternateContent xmlns:mc="http://schemas.openxmlformats.org/markup-compatibility/2006">
-        <mc:Choice xmlns:a14="http://schemas.microsoft.com/office/drawing/2010/main" Requires="a14">
+      <mc:AlternateContent xmlns:mc="http://schemas.openxmlformats.org/markup-compatibility/2006" xmlns:a14="http://schemas.microsoft.com/office/drawing/2010/main">
+        <mc:Choice Requires="a14">
           <p:sp>
             <p:nvSpPr>
               <p:cNvPr id="40" name="TextBox 39">
@@ -25359,7 +27915,7 @@
             </p:txBody>
           </p:sp>
         </mc:Choice>
-        <mc:Fallback>
+        <mc:Fallback xmlns="">
           <p:sp>
             <p:nvSpPr>
               <p:cNvPr id="40" name="TextBox 39">
@@ -25383,7 +27939,7 @@
                 <a:avLst/>
               </a:prstGeom>
               <a:blipFill>
-                <a:blip r:embed="rId3"/>
+                <a:blip r:embed="rId4"/>
                 <a:stretch>
                   <a:fillRect/>
                 </a:stretch>
@@ -25404,8 +27960,8 @@
           </p:sp>
         </mc:Fallback>
       </mc:AlternateContent>
-      <mc:AlternateContent xmlns:mc="http://schemas.openxmlformats.org/markup-compatibility/2006">
-        <mc:Choice xmlns:a14="http://schemas.microsoft.com/office/drawing/2010/main" Requires="a14">
+      <mc:AlternateContent xmlns:mc="http://schemas.openxmlformats.org/markup-compatibility/2006" xmlns:a14="http://schemas.microsoft.com/office/drawing/2010/main">
+        <mc:Choice Requires="a14">
           <p:sp>
             <p:nvSpPr>
               <p:cNvPr id="6" name="TextBox 5">
@@ -25619,7 +28175,7 @@
             </p:txBody>
           </p:sp>
         </mc:Choice>
-        <mc:Fallback>
+        <mc:Fallback xmlns="">
           <p:sp>
             <p:nvSpPr>
               <p:cNvPr id="6" name="TextBox 5">
@@ -25643,7 +28199,7 @@
                 <a:avLst/>
               </a:prstGeom>
               <a:blipFill>
-                <a:blip r:embed="rId4"/>
+                <a:blip r:embed="rId5"/>
                 <a:stretch>
                   <a:fillRect l="-814" b="-15789"/>
                 </a:stretch>
@@ -25712,8 +28268,8 @@
           </a:p>
         </p:txBody>
       </p:sp>
-      <mc:AlternateContent xmlns:mc="http://schemas.openxmlformats.org/markup-compatibility/2006">
-        <mc:Choice xmlns:a14="http://schemas.microsoft.com/office/drawing/2010/main" Requires="a14">
+      <mc:AlternateContent xmlns:mc="http://schemas.openxmlformats.org/markup-compatibility/2006" xmlns:a14="http://schemas.microsoft.com/office/drawing/2010/main">
+        <mc:Choice Requires="a14">
           <p:sp>
             <p:nvSpPr>
               <p:cNvPr id="12" name="TextBox 11">
@@ -25798,7 +28354,7 @@
             </p:txBody>
           </p:sp>
         </mc:Choice>
-        <mc:Fallback>
+        <mc:Fallback xmlns="">
           <p:sp>
             <p:nvSpPr>
               <p:cNvPr id="12" name="TextBox 11">
@@ -25822,7 +28378,7 @@
                 <a:avLst/>
               </a:prstGeom>
               <a:blipFill>
-                <a:blip r:embed="rId5"/>
+                <a:blip r:embed="rId6"/>
                 <a:stretch>
                   <a:fillRect/>
                 </a:stretch>
@@ -25843,8 +28399,8 @@
           </p:sp>
         </mc:Fallback>
       </mc:AlternateContent>
-      <mc:AlternateContent xmlns:mc="http://schemas.openxmlformats.org/markup-compatibility/2006">
-        <mc:Choice xmlns:a14="http://schemas.microsoft.com/office/drawing/2010/main" Requires="a14">
+      <mc:AlternateContent xmlns:mc="http://schemas.openxmlformats.org/markup-compatibility/2006" xmlns:a14="http://schemas.microsoft.com/office/drawing/2010/main">
+        <mc:Choice Requires="a14">
           <p:sp>
             <p:nvSpPr>
               <p:cNvPr id="14" name="TextBox 13">
@@ -25929,7 +28485,7 @@
             </p:txBody>
           </p:sp>
         </mc:Choice>
-        <mc:Fallback>
+        <mc:Fallback xmlns="">
           <p:sp>
             <p:nvSpPr>
               <p:cNvPr id="14" name="TextBox 13">
@@ -25953,7 +28509,7 @@
                 <a:avLst/>
               </a:prstGeom>
               <a:blipFill>
-                <a:blip r:embed="rId6"/>
+                <a:blip r:embed="rId7"/>
                 <a:stretch>
                   <a:fillRect/>
                 </a:stretch>
@@ -25974,8 +28530,8 @@
           </p:sp>
         </mc:Fallback>
       </mc:AlternateContent>
-      <mc:AlternateContent xmlns:mc="http://schemas.openxmlformats.org/markup-compatibility/2006">
-        <mc:Choice xmlns:a14="http://schemas.microsoft.com/office/drawing/2010/main" Requires="a14">
+      <mc:AlternateContent xmlns:mc="http://schemas.openxmlformats.org/markup-compatibility/2006" xmlns:a14="http://schemas.microsoft.com/office/drawing/2010/main">
+        <mc:Choice Requires="a14">
           <p:sp>
             <p:nvSpPr>
               <p:cNvPr id="15" name="TextBox 14">
@@ -26060,7 +28616,7 @@
             </p:txBody>
           </p:sp>
         </mc:Choice>
-        <mc:Fallback>
+        <mc:Fallback xmlns="">
           <p:sp>
             <p:nvSpPr>
               <p:cNvPr id="15" name="TextBox 14">
@@ -26084,7 +28640,7 @@
                 <a:avLst/>
               </a:prstGeom>
               <a:blipFill>
-                <a:blip r:embed="rId7"/>
+                <a:blip r:embed="rId8"/>
                 <a:stretch>
                   <a:fillRect/>
                 </a:stretch>
@@ -26105,8 +28661,8 @@
           </p:sp>
         </mc:Fallback>
       </mc:AlternateContent>
-      <mc:AlternateContent xmlns:mc="http://schemas.openxmlformats.org/markup-compatibility/2006">
-        <mc:Choice xmlns:a14="http://schemas.microsoft.com/office/drawing/2010/main" Requires="a14">
+      <mc:AlternateContent xmlns:mc="http://schemas.openxmlformats.org/markup-compatibility/2006" xmlns:a14="http://schemas.microsoft.com/office/drawing/2010/main">
+        <mc:Choice Requires="a14">
           <p:sp>
             <p:nvSpPr>
               <p:cNvPr id="3" name="TextBox 2">
@@ -26191,7 +28747,7 @@
             </p:txBody>
           </p:sp>
         </mc:Choice>
-        <mc:Fallback>
+        <mc:Fallback xmlns="">
           <p:sp>
             <p:nvSpPr>
               <p:cNvPr id="3" name="TextBox 2">
@@ -26215,7 +28771,7 @@
                 <a:avLst/>
               </a:prstGeom>
               <a:blipFill>
-                <a:blip r:embed="rId8"/>
+                <a:blip r:embed="rId9"/>
                 <a:stretch>
                   <a:fillRect/>
                 </a:stretch>
@@ -26236,8 +28792,8 @@
           </p:sp>
         </mc:Fallback>
       </mc:AlternateContent>
-      <mc:AlternateContent xmlns:mc="http://schemas.openxmlformats.org/markup-compatibility/2006">
-        <mc:Choice xmlns:a14="http://schemas.microsoft.com/office/drawing/2010/main" Requires="a14">
+      <mc:AlternateContent xmlns:mc="http://schemas.openxmlformats.org/markup-compatibility/2006" xmlns:a14="http://schemas.microsoft.com/office/drawing/2010/main">
+        <mc:Choice Requires="a14">
           <p:sp>
             <p:nvSpPr>
               <p:cNvPr id="10" name="TextBox 9">
@@ -26322,7 +28878,7 @@
             </p:txBody>
           </p:sp>
         </mc:Choice>
-        <mc:Fallback>
+        <mc:Fallback xmlns="">
           <p:sp>
             <p:nvSpPr>
               <p:cNvPr id="10" name="TextBox 9">
@@ -26346,7 +28902,7 @@
                 <a:avLst/>
               </a:prstGeom>
               <a:blipFill>
-                <a:blip r:embed="rId9"/>
+                <a:blip r:embed="rId10"/>
                 <a:stretch>
                   <a:fillRect/>
                 </a:stretch>
@@ -26367,8 +28923,8 @@
           </p:sp>
         </mc:Fallback>
       </mc:AlternateContent>
-      <mc:AlternateContent xmlns:mc="http://schemas.openxmlformats.org/markup-compatibility/2006">
-        <mc:Choice xmlns:a14="http://schemas.microsoft.com/office/drawing/2010/main" Requires="a14">
+      <mc:AlternateContent xmlns:mc="http://schemas.openxmlformats.org/markup-compatibility/2006" xmlns:a14="http://schemas.microsoft.com/office/drawing/2010/main">
+        <mc:Choice Requires="a14">
           <p:sp>
             <p:nvSpPr>
               <p:cNvPr id="13" name="TextBox 12">
@@ -26453,7 +29009,7 @@
             </p:txBody>
           </p:sp>
         </mc:Choice>
-        <mc:Fallback>
+        <mc:Fallback xmlns="">
           <p:sp>
             <p:nvSpPr>
               <p:cNvPr id="13" name="TextBox 12">
@@ -26477,7 +29033,7 @@
                 <a:avLst/>
               </a:prstGeom>
               <a:blipFill>
-                <a:blip r:embed="rId10"/>
+                <a:blip r:embed="rId11"/>
                 <a:stretch>
                   <a:fillRect/>
                 </a:stretch>
@@ -26589,8 +29145,8 @@
           </a:fontRef>
         </p:style>
       </p:cxnSp>
-      <mc:AlternateContent xmlns:mc="http://schemas.openxmlformats.org/markup-compatibility/2006">
-        <mc:Choice xmlns:a14="http://schemas.microsoft.com/office/drawing/2010/main" Requires="a14">
+      <mc:AlternateContent xmlns:mc="http://schemas.openxmlformats.org/markup-compatibility/2006" xmlns:a14="http://schemas.microsoft.com/office/drawing/2010/main">
+        <mc:Choice Requires="a14">
           <p:sp>
             <p:nvSpPr>
               <p:cNvPr id="30" name="TextBox 29">
@@ -26675,7 +29231,7 @@
             </p:txBody>
           </p:sp>
         </mc:Choice>
-        <mc:Fallback>
+        <mc:Fallback xmlns="">
           <p:sp>
             <p:nvSpPr>
               <p:cNvPr id="30" name="TextBox 29">
@@ -26699,7 +29255,7 @@
                 <a:avLst/>
               </a:prstGeom>
               <a:blipFill>
-                <a:blip r:embed="rId11"/>
+                <a:blip r:embed="rId12"/>
                 <a:stretch>
                   <a:fillRect/>
                 </a:stretch>
@@ -26893,8 +29449,8 @@
           </a:fontRef>
         </p:style>
       </p:cxnSp>
-      <mc:AlternateContent xmlns:mc="http://schemas.openxmlformats.org/markup-compatibility/2006">
-        <mc:Choice xmlns:a14="http://schemas.microsoft.com/office/drawing/2010/main" Requires="a14">
+      <mc:AlternateContent xmlns:mc="http://schemas.openxmlformats.org/markup-compatibility/2006" xmlns:a14="http://schemas.microsoft.com/office/drawing/2010/main">
+        <mc:Choice Requires="a14">
           <p:sp>
             <p:nvSpPr>
               <p:cNvPr id="53" name="TextBox 52">
@@ -26966,7 +29522,7 @@
             </p:txBody>
           </p:sp>
         </mc:Choice>
-        <mc:Fallback>
+        <mc:Fallback xmlns="">
           <p:sp>
             <p:nvSpPr>
               <p:cNvPr id="53" name="TextBox 52">
@@ -26990,7 +29546,7 @@
                 <a:avLst/>
               </a:prstGeom>
               <a:blipFill>
-                <a:blip r:embed="rId12"/>
+                <a:blip r:embed="rId13"/>
                 <a:stretch>
                   <a:fillRect/>
                 </a:stretch>
@@ -27011,8 +29567,8 @@
           </p:sp>
         </mc:Fallback>
       </mc:AlternateContent>
-      <mc:AlternateContent xmlns:mc="http://schemas.openxmlformats.org/markup-compatibility/2006">
-        <mc:Choice xmlns:a14="http://schemas.microsoft.com/office/drawing/2010/main" Requires="a14">
+      <mc:AlternateContent xmlns:mc="http://schemas.openxmlformats.org/markup-compatibility/2006" xmlns:a14="http://schemas.microsoft.com/office/drawing/2010/main">
+        <mc:Choice Requires="a14">
           <p:sp>
             <p:nvSpPr>
               <p:cNvPr id="60" name="TextBox 59">
@@ -27379,7 +29935,7 @@
             </p:txBody>
           </p:sp>
         </mc:Choice>
-        <mc:Fallback>
+        <mc:Fallback xmlns="">
           <p:sp>
             <p:nvSpPr>
               <p:cNvPr id="60" name="TextBox 59">
@@ -27403,7 +29959,7 @@
                 <a:avLst/>
               </a:prstGeom>
               <a:blipFill>
-                <a:blip r:embed="rId13"/>
+                <a:blip r:embed="rId14"/>
                 <a:stretch>
                   <a:fillRect/>
                 </a:stretch>
@@ -27424,8 +29980,8 @@
           </p:sp>
         </mc:Fallback>
       </mc:AlternateContent>
-      <mc:AlternateContent xmlns:mc="http://schemas.openxmlformats.org/markup-compatibility/2006">
-        <mc:Choice xmlns:a14="http://schemas.microsoft.com/office/drawing/2010/main" Requires="a14">
+      <mc:AlternateContent xmlns:mc="http://schemas.openxmlformats.org/markup-compatibility/2006" xmlns:a14="http://schemas.microsoft.com/office/drawing/2010/main">
+        <mc:Choice Requires="a14">
           <p:sp>
             <p:nvSpPr>
               <p:cNvPr id="61" name="TextBox 60">
@@ -27494,7 +30050,7 @@
             </p:txBody>
           </p:sp>
         </mc:Choice>
-        <mc:Fallback>
+        <mc:Fallback xmlns="">
           <p:sp>
             <p:nvSpPr>
               <p:cNvPr id="61" name="TextBox 60">
@@ -27518,7 +30074,7 @@
                 <a:avLst/>
               </a:prstGeom>
               <a:blipFill>
-                <a:blip r:embed="rId14"/>
+                <a:blip r:embed="rId15"/>
                 <a:stretch>
                   <a:fillRect l="-15686" r="-9804" b="-11475"/>
                 </a:stretch>
@@ -27539,8 +30095,8 @@
           </p:sp>
         </mc:Fallback>
       </mc:AlternateContent>
-      <mc:AlternateContent xmlns:mc="http://schemas.openxmlformats.org/markup-compatibility/2006">
-        <mc:Choice xmlns:a14="http://schemas.microsoft.com/office/drawing/2010/main" Requires="a14">
+      <mc:AlternateContent xmlns:mc="http://schemas.openxmlformats.org/markup-compatibility/2006" xmlns:a14="http://schemas.microsoft.com/office/drawing/2010/main">
+        <mc:Choice Requires="a14">
           <p:sp>
             <p:nvSpPr>
               <p:cNvPr id="62" name="TextBox 61">
@@ -27609,7 +30165,7 @@
             </p:txBody>
           </p:sp>
         </mc:Choice>
-        <mc:Fallback>
+        <mc:Fallback xmlns="">
           <p:sp>
             <p:nvSpPr>
               <p:cNvPr id="62" name="TextBox 61">
@@ -27633,7 +30189,7 @@
                 <a:avLst/>
               </a:prstGeom>
               <a:blipFill>
-                <a:blip r:embed="rId15"/>
+                <a:blip r:embed="rId16"/>
                 <a:stretch>
                   <a:fillRect l="-13462" r="-9615" b="-11475"/>
                 </a:stretch>
@@ -27654,8 +30210,8 @@
           </p:sp>
         </mc:Fallback>
       </mc:AlternateContent>
-      <mc:AlternateContent xmlns:mc="http://schemas.openxmlformats.org/markup-compatibility/2006">
-        <mc:Choice xmlns:a14="http://schemas.microsoft.com/office/drawing/2010/main" Requires="a14">
+      <mc:AlternateContent xmlns:mc="http://schemas.openxmlformats.org/markup-compatibility/2006" xmlns:a14="http://schemas.microsoft.com/office/drawing/2010/main">
+        <mc:Choice Requires="a14">
           <p:sp>
             <p:nvSpPr>
               <p:cNvPr id="63" name="TextBox 62">
@@ -27724,7 +30280,7 @@
             </p:txBody>
           </p:sp>
         </mc:Choice>
-        <mc:Fallback>
+        <mc:Fallback xmlns="">
           <p:sp>
             <p:nvSpPr>
               <p:cNvPr id="63" name="TextBox 62">
@@ -27748,7 +30304,7 @@
                 <a:avLst/>
               </a:prstGeom>
               <a:blipFill>
-                <a:blip r:embed="rId16"/>
+                <a:blip r:embed="rId17"/>
                 <a:stretch>
                   <a:fillRect l="-15385" r="-9615" b="-11475"/>
                 </a:stretch>
@@ -27769,8 +30325,8 @@
           </p:sp>
         </mc:Fallback>
       </mc:AlternateContent>
-      <mc:AlternateContent xmlns:mc="http://schemas.openxmlformats.org/markup-compatibility/2006">
-        <mc:Choice xmlns:a14="http://schemas.microsoft.com/office/drawing/2010/main" Requires="a14">
+      <mc:AlternateContent xmlns:mc="http://schemas.openxmlformats.org/markup-compatibility/2006" xmlns:a14="http://schemas.microsoft.com/office/drawing/2010/main">
+        <mc:Choice Requires="a14">
           <p:sp>
             <p:nvSpPr>
               <p:cNvPr id="64" name="TextBox 63">
@@ -27839,7 +30395,7 @@
             </p:txBody>
           </p:sp>
         </mc:Choice>
-        <mc:Fallback>
+        <mc:Fallback xmlns="">
           <p:sp>
             <p:nvSpPr>
               <p:cNvPr id="64" name="TextBox 63">
@@ -27863,7 +30419,7 @@
                 <a:avLst/>
               </a:prstGeom>
               <a:blipFill>
-                <a:blip r:embed="rId17"/>
+                <a:blip r:embed="rId18"/>
                 <a:stretch>
                   <a:fillRect l="-16327" r="-12245" b="-11475"/>
                 </a:stretch>
@@ -27884,8 +30440,8 @@
           </p:sp>
         </mc:Fallback>
       </mc:AlternateContent>
-      <mc:AlternateContent xmlns:mc="http://schemas.openxmlformats.org/markup-compatibility/2006">
-        <mc:Choice xmlns:a14="http://schemas.microsoft.com/office/drawing/2010/main" Requires="a14">
+      <mc:AlternateContent xmlns:mc="http://schemas.openxmlformats.org/markup-compatibility/2006" xmlns:a14="http://schemas.microsoft.com/office/drawing/2010/main">
+        <mc:Choice Requires="a14">
           <p:sp>
             <p:nvSpPr>
               <p:cNvPr id="65" name="TextBox 64">
@@ -27954,7 +30510,7 @@
             </p:txBody>
           </p:sp>
         </mc:Choice>
-        <mc:Fallback>
+        <mc:Fallback xmlns="">
           <p:sp>
             <p:nvSpPr>
               <p:cNvPr id="65" name="TextBox 64">
@@ -27978,7 +30534,7 @@
                 <a:avLst/>
               </a:prstGeom>
               <a:blipFill>
-                <a:blip r:embed="rId18"/>
+                <a:blip r:embed="rId19"/>
                 <a:stretch>
                   <a:fillRect l="-13462" r="-11538" b="-13333"/>
                 </a:stretch>
@@ -27999,8 +30555,8 @@
           </p:sp>
         </mc:Fallback>
       </mc:AlternateContent>
-      <mc:AlternateContent xmlns:mc="http://schemas.openxmlformats.org/markup-compatibility/2006">
-        <mc:Choice xmlns:a14="http://schemas.microsoft.com/office/drawing/2010/main" Requires="a14">
+      <mc:AlternateContent xmlns:mc="http://schemas.openxmlformats.org/markup-compatibility/2006" xmlns:a14="http://schemas.microsoft.com/office/drawing/2010/main">
+        <mc:Choice Requires="a14">
           <p:sp>
             <p:nvSpPr>
               <p:cNvPr id="66" name="TextBox 65">
@@ -28072,7 +30628,7 @@
             </p:txBody>
           </p:sp>
         </mc:Choice>
-        <mc:Fallback>
+        <mc:Fallback xmlns="">
           <p:sp>
             <p:nvSpPr>
               <p:cNvPr id="66" name="TextBox 65">
@@ -28096,7 +30652,7 @@
                 <a:avLst/>
               </a:prstGeom>
               <a:blipFill>
-                <a:blip r:embed="rId19"/>
+                <a:blip r:embed="rId20"/>
                 <a:stretch>
                   <a:fillRect l="-9333" r="-5333" b="-11475"/>
                 </a:stretch>
@@ -28117,8 +30673,8 @@
           </p:sp>
         </mc:Fallback>
       </mc:AlternateContent>
-      <mc:AlternateContent xmlns:mc="http://schemas.openxmlformats.org/markup-compatibility/2006">
-        <mc:Choice xmlns:a14="http://schemas.microsoft.com/office/drawing/2010/main" Requires="a14">
+      <mc:AlternateContent xmlns:mc="http://schemas.openxmlformats.org/markup-compatibility/2006" xmlns:a14="http://schemas.microsoft.com/office/drawing/2010/main">
+        <mc:Choice Requires="a14">
           <p:sp>
             <p:nvSpPr>
               <p:cNvPr id="70" name="TextBox 69">
@@ -28203,7 +30759,7 @@
             </p:txBody>
           </p:sp>
         </mc:Choice>
-        <mc:Fallback>
+        <mc:Fallback xmlns="">
           <p:sp>
             <p:nvSpPr>
               <p:cNvPr id="70" name="TextBox 69">
@@ -28227,7 +30783,7 @@
                 <a:avLst/>
               </a:prstGeom>
               <a:blipFill>
-                <a:blip r:embed="rId20"/>
+                <a:blip r:embed="rId21"/>
                 <a:stretch>
                   <a:fillRect/>
                 </a:stretch>
@@ -28248,8 +30804,8 @@
           </p:sp>
         </mc:Fallback>
       </mc:AlternateContent>
-      <mc:AlternateContent xmlns:mc="http://schemas.openxmlformats.org/markup-compatibility/2006">
-        <mc:Choice xmlns:a14="http://schemas.microsoft.com/office/drawing/2010/main" Requires="a14">
+      <mc:AlternateContent xmlns:mc="http://schemas.openxmlformats.org/markup-compatibility/2006" xmlns:a14="http://schemas.microsoft.com/office/drawing/2010/main">
+        <mc:Choice Requires="a14">
           <p:sp>
             <p:nvSpPr>
               <p:cNvPr id="72" name="TextBox 71">
@@ -28334,7 +30890,7 @@
             </p:txBody>
           </p:sp>
         </mc:Choice>
-        <mc:Fallback>
+        <mc:Fallback xmlns="">
           <p:sp>
             <p:nvSpPr>
               <p:cNvPr id="72" name="TextBox 71">
@@ -28358,7 +30914,7 @@
                 <a:avLst/>
               </a:prstGeom>
               <a:blipFill>
-                <a:blip r:embed="rId21"/>
+                <a:blip r:embed="rId22"/>
                 <a:stretch>
                   <a:fillRect/>
                 </a:stretch>
@@ -28379,8 +30935,8 @@
           </p:sp>
         </mc:Fallback>
       </mc:AlternateContent>
-      <mc:AlternateContent xmlns:mc="http://schemas.openxmlformats.org/markup-compatibility/2006">
-        <mc:Choice xmlns:a14="http://schemas.microsoft.com/office/drawing/2010/main" Requires="a14">
+      <mc:AlternateContent xmlns:mc="http://schemas.openxmlformats.org/markup-compatibility/2006" xmlns:a14="http://schemas.microsoft.com/office/drawing/2010/main">
+        <mc:Choice Requires="a14">
           <p:sp>
             <p:nvSpPr>
               <p:cNvPr id="74" name="TextBox 73">
@@ -28465,7 +31021,7 @@
             </p:txBody>
           </p:sp>
         </mc:Choice>
-        <mc:Fallback>
+        <mc:Fallback xmlns="">
           <p:sp>
             <p:nvSpPr>
               <p:cNvPr id="74" name="TextBox 73">
@@ -28489,7 +31045,7 @@
                 <a:avLst/>
               </a:prstGeom>
               <a:blipFill>
-                <a:blip r:embed="rId22"/>
+                <a:blip r:embed="rId23"/>
                 <a:stretch>
                   <a:fillRect/>
                 </a:stretch>
@@ -28510,8 +31066,8 @@
           </p:sp>
         </mc:Fallback>
       </mc:AlternateContent>
-      <mc:AlternateContent xmlns:mc="http://schemas.openxmlformats.org/markup-compatibility/2006">
-        <mc:Choice xmlns:a14="http://schemas.microsoft.com/office/drawing/2010/main" Requires="a14">
+      <mc:AlternateContent xmlns:mc="http://schemas.openxmlformats.org/markup-compatibility/2006" xmlns:a14="http://schemas.microsoft.com/office/drawing/2010/main">
+        <mc:Choice Requires="a14">
           <p:sp>
             <p:nvSpPr>
               <p:cNvPr id="77" name="TextBox 76">
@@ -28596,7 +31152,7 @@
             </p:txBody>
           </p:sp>
         </mc:Choice>
-        <mc:Fallback>
+        <mc:Fallback xmlns="">
           <p:sp>
             <p:nvSpPr>
               <p:cNvPr id="77" name="TextBox 76">
@@ -28620,7 +31176,7 @@
                 <a:avLst/>
               </a:prstGeom>
               <a:blipFill>
-                <a:blip r:embed="rId23"/>
+                <a:blip r:embed="rId24"/>
                 <a:stretch>
                   <a:fillRect/>
                 </a:stretch>
@@ -28641,8 +31197,8 @@
           </p:sp>
         </mc:Fallback>
       </mc:AlternateContent>
-      <mc:AlternateContent xmlns:mc="http://schemas.openxmlformats.org/markup-compatibility/2006">
-        <mc:Choice xmlns:a14="http://schemas.microsoft.com/office/drawing/2010/main" Requires="a14">
+      <mc:AlternateContent xmlns:mc="http://schemas.openxmlformats.org/markup-compatibility/2006" xmlns:a14="http://schemas.microsoft.com/office/drawing/2010/main">
+        <mc:Choice Requires="a14">
           <p:sp>
             <p:nvSpPr>
               <p:cNvPr id="78" name="TextBox 77">
@@ -28714,7 +31270,7 @@
             </p:txBody>
           </p:sp>
         </mc:Choice>
-        <mc:Fallback>
+        <mc:Fallback xmlns="">
           <p:sp>
             <p:nvSpPr>
               <p:cNvPr id="78" name="TextBox 77">
@@ -28738,7 +31294,7 @@
                 <a:avLst/>
               </a:prstGeom>
               <a:blipFill>
-                <a:blip r:embed="rId24"/>
+                <a:blip r:embed="rId25"/>
                 <a:stretch>
                   <a:fillRect l="-9211" r="-5263" b="-11475"/>
                 </a:stretch>
@@ -28759,8 +31315,8 @@
           </p:sp>
         </mc:Fallback>
       </mc:AlternateContent>
-      <mc:AlternateContent xmlns:mc="http://schemas.openxmlformats.org/markup-compatibility/2006">
-        <mc:Choice xmlns:a14="http://schemas.microsoft.com/office/drawing/2010/main" Requires="a14">
+      <mc:AlternateContent xmlns:mc="http://schemas.openxmlformats.org/markup-compatibility/2006" xmlns:a14="http://schemas.microsoft.com/office/drawing/2010/main">
+        <mc:Choice Requires="a14">
           <p:sp>
             <p:nvSpPr>
               <p:cNvPr id="79" name="TextBox 78">
@@ -28832,7 +31388,7 @@
             </p:txBody>
           </p:sp>
         </mc:Choice>
-        <mc:Fallback>
+        <mc:Fallback xmlns="">
           <p:sp>
             <p:nvSpPr>
               <p:cNvPr id="79" name="TextBox 78">
@@ -28856,7 +31412,7 @@
                 <a:avLst/>
               </a:prstGeom>
               <a:blipFill>
-                <a:blip r:embed="rId25"/>
+                <a:blip r:embed="rId26"/>
                 <a:stretch>
                   <a:fillRect l="-9211" r="-5263" b="-13333"/>
                 </a:stretch>
@@ -28877,8 +31433,8 @@
           </p:sp>
         </mc:Fallback>
       </mc:AlternateContent>
-      <mc:AlternateContent xmlns:mc="http://schemas.openxmlformats.org/markup-compatibility/2006">
-        <mc:Choice xmlns:a14="http://schemas.microsoft.com/office/drawing/2010/main" Requires="a14">
+      <mc:AlternateContent xmlns:mc="http://schemas.openxmlformats.org/markup-compatibility/2006" xmlns:a14="http://schemas.microsoft.com/office/drawing/2010/main">
+        <mc:Choice Requires="a14">
           <p:sp>
             <p:nvSpPr>
               <p:cNvPr id="80" name="TextBox 79">
@@ -28950,7 +31506,7 @@
             </p:txBody>
           </p:sp>
         </mc:Choice>
-        <mc:Fallback>
+        <mc:Fallback xmlns="">
           <p:sp>
             <p:nvSpPr>
               <p:cNvPr id="80" name="TextBox 79">
@@ -28974,7 +31530,7 @@
                 <a:avLst/>
               </a:prstGeom>
               <a:blipFill>
-                <a:blip r:embed="rId26"/>
+                <a:blip r:embed="rId27"/>
                 <a:stretch>
                   <a:fillRect l="-9211" r="-5263" b="-11475"/>
                 </a:stretch>
@@ -28995,8 +31551,8 @@
           </p:sp>
         </mc:Fallback>
       </mc:AlternateContent>
-      <mc:AlternateContent xmlns:mc="http://schemas.openxmlformats.org/markup-compatibility/2006">
-        <mc:Choice xmlns:a14="http://schemas.microsoft.com/office/drawing/2010/main" Requires="a14">
+      <mc:AlternateContent xmlns:mc="http://schemas.openxmlformats.org/markup-compatibility/2006" xmlns:a14="http://schemas.microsoft.com/office/drawing/2010/main">
+        <mc:Choice Requires="a14">
           <p:sp>
             <p:nvSpPr>
               <p:cNvPr id="81" name="TextBox 80">
@@ -29068,7 +31624,7 @@
             </p:txBody>
           </p:sp>
         </mc:Choice>
-        <mc:Fallback>
+        <mc:Fallback xmlns="">
           <p:sp>
             <p:nvSpPr>
               <p:cNvPr id="81" name="TextBox 80">
@@ -29092,7 +31648,7 @@
                 <a:avLst/>
               </a:prstGeom>
               <a:blipFill>
-                <a:blip r:embed="rId27"/>
+                <a:blip r:embed="rId28"/>
                 <a:stretch>
                   <a:fillRect l="-9211" r="-6579" b="-13115"/>
                 </a:stretch>
@@ -29474,196 +32030,6 @@
           </a:p>
         </p:txBody>
       </p:sp>
-      <mc:AlternateContent xmlns:mc="http://schemas.openxmlformats.org/markup-compatibility/2006">
-        <mc:Choice xmlns:a14="http://schemas.microsoft.com/office/drawing/2010/main" Requires="a14">
-          <p:sp>
-            <p:nvSpPr>
-              <p:cNvPr id="2" name="Title 1">
-                <a:extLst>
-                  <a:ext uri="{FF2B5EF4-FFF2-40B4-BE49-F238E27FC236}">
-                    <a16:creationId xmlns:a16="http://schemas.microsoft.com/office/drawing/2014/main" id="{2DF2378A-D5DE-CD63-1870-A5F2EFD20772}"/>
-                  </a:ext>
-                </a:extLst>
-              </p:cNvPr>
-              <p:cNvSpPr>
-                <a:spLocks noGrp="1"/>
-              </p:cNvSpPr>
-              <p:nvPr>
-                <p:ph type="title"/>
-              </p:nvPr>
-            </p:nvSpPr>
-            <p:spPr>
-              <a:xfrm>
-                <a:off x="0" y="21805"/>
-                <a:ext cx="10637662" cy="720725"/>
-              </a:xfrm>
-            </p:spPr>
-            <p:txBody>
-              <a:bodyPr>
-                <a:noAutofit/>
-              </a:bodyPr>
-              <a:lstStyle/>
-              <a:p>
-                <a:r>
-                  <a:rPr lang="de-DE" sz="2800" dirty="0" err="1"/>
-                  <a:t>Step</a:t>
-                </a:r>
-                <a:r>
-                  <a:rPr lang="de-DE" sz="2800" dirty="0"/>
-                  <a:t> 1: Find </a:t>
-                </a:r>
-                <a:r>
-                  <a:rPr lang="de-DE" sz="2800" dirty="0" err="1"/>
-                  <a:t>the</a:t>
-                </a:r>
-                <a:r>
-                  <a:rPr lang="de-DE" sz="2800" dirty="0"/>
-                  <a:t> m4-like </a:t>
-                </a:r>
-                <a:r>
-                  <a:rPr lang="de-DE" sz="2800" dirty="0" err="1"/>
-                  <a:t>metabolites</a:t>
-                </a:r>
-                <a:r>
-                  <a:rPr lang="de-DE" sz="2800" dirty="0"/>
-                  <a:t> and </a:t>
-                </a:r>
-                <a:r>
-                  <a:rPr lang="de-DE" sz="2800" dirty="0" err="1"/>
-                  <a:t>the</a:t>
-                </a:r>
-                <a:r>
-                  <a:rPr lang="de-DE" sz="2800" dirty="0"/>
-                  <a:t> </a:t>
-                </a:r>
-                <a:r>
-                  <a:rPr lang="de-DE" sz="2800" dirty="0" err="1"/>
-                  <a:t>reactions</a:t>
-                </a:r>
-                <a:r>
-                  <a:rPr lang="de-DE" sz="2800" dirty="0"/>
-                  <a:t> </a:t>
-                </a:r>
-                <a14:m>
-                  <m:oMath xmlns:m="http://schemas.openxmlformats.org/officeDocument/2006/math">
-                    <m:sSub>
-                      <m:sSubPr>
-                        <m:ctrlPr>
-                          <a:rPr lang="de-DE" sz="2800" i="1" dirty="0">
-                            <a:latin typeface="Cambria Math" panose="02040503050406030204" pitchFamily="18" charset="0"/>
-                          </a:rPr>
-                        </m:ctrlPr>
-                      </m:sSubPr>
-                      <m:e>
-                        <m:r>
-                          <m:rPr>
-                            <m:sty m:val="p"/>
-                          </m:rPr>
-                          <a:rPr lang="en-GB" sz="2800" i="1" dirty="0">
-                            <a:latin typeface="Cambria Math" panose="02040503050406030204" pitchFamily="18" charset="0"/>
-                          </a:rPr>
-                          <m:t>r</m:t>
-                        </m:r>
-                      </m:e>
-                      <m:sub>
-                        <m:r>
-                          <a:rPr lang="en-GB" sz="2800" b="0" i="1" dirty="0" smtClean="0">
-                            <a:latin typeface="Cambria Math" panose="02040503050406030204" pitchFamily="18" charset="0"/>
-                          </a:rPr>
-                          <m:t>2</m:t>
-                        </m:r>
-                      </m:sub>
-                    </m:sSub>
-                  </m:oMath>
-                </a14:m>
-                <a:r>
-                  <a:rPr lang="en-US" sz="2800" dirty="0"/>
-                  <a:t>’s and </a:t>
-                </a:r>
-                <a14:m>
-                  <m:oMath xmlns:m="http://schemas.openxmlformats.org/officeDocument/2006/math">
-                    <m:sSub>
-                      <m:sSubPr>
-                        <m:ctrlPr>
-                          <a:rPr lang="de-DE" sz="2800" i="1" dirty="0">
-                            <a:latin typeface="Cambria Math" panose="02040503050406030204" pitchFamily="18" charset="0"/>
-                          </a:rPr>
-                        </m:ctrlPr>
-                      </m:sSubPr>
-                      <m:e>
-                        <m:r>
-                          <m:rPr>
-                            <m:sty m:val="p"/>
-                          </m:rPr>
-                          <a:rPr lang="en-GB" sz="2800" i="1" dirty="0">
-                            <a:latin typeface="Cambria Math" panose="02040503050406030204" pitchFamily="18" charset="0"/>
-                          </a:rPr>
-                          <m:t>r</m:t>
-                        </m:r>
-                      </m:e>
-                      <m:sub>
-                        <m:r>
-                          <a:rPr lang="en-GB" sz="2800" b="0" i="1" dirty="0" smtClean="0">
-                            <a:latin typeface="Cambria Math" panose="02040503050406030204" pitchFamily="18" charset="0"/>
-                          </a:rPr>
-                          <m:t>3</m:t>
-                        </m:r>
-                      </m:sub>
-                    </m:sSub>
-                  </m:oMath>
-                </a14:m>
-                <a:r>
-                  <a:rPr lang="en-US" sz="2800" dirty="0"/>
-                  <a:t>’s</a:t>
-                </a:r>
-              </a:p>
-            </p:txBody>
-          </p:sp>
-        </mc:Choice>
-        <mc:Fallback>
-          <p:sp>
-            <p:nvSpPr>
-              <p:cNvPr id="2" name="Title 1">
-                <a:extLst>
-                  <a:ext uri="{FF2B5EF4-FFF2-40B4-BE49-F238E27FC236}">
-                    <a16:creationId xmlns:a16="http://schemas.microsoft.com/office/drawing/2014/main" id="{2DF2378A-D5DE-CD63-1870-A5F2EFD20772}"/>
-                  </a:ext>
-                </a:extLst>
-              </p:cNvPr>
-              <p:cNvSpPr>
-                <a:spLocks noGrp="1" noRot="1" noChangeAspect="1" noMove="1" noResize="1" noEditPoints="1" noAdjustHandles="1" noChangeArrowheads="1" noChangeShapeType="1" noTextEdit="1"/>
-              </p:cNvSpPr>
-              <p:nvPr>
-                <p:ph type="title"/>
-              </p:nvPr>
-            </p:nvSpPr>
-            <p:spPr>
-              <a:xfrm>
-                <a:off x="0" y="21805"/>
-                <a:ext cx="10637662" cy="720725"/>
-              </a:xfrm>
-              <a:blipFill>
-                <a:blip r:embed="rId3"/>
-                <a:stretch>
-                  <a:fillRect l="-1146" b="-6780"/>
-                </a:stretch>
-              </a:blipFill>
-            </p:spPr>
-            <p:txBody>
-              <a:bodyPr/>
-              <a:lstStyle/>
-              <a:p>
-                <a:r>
-                  <a:rPr lang="en-US">
-                    <a:noFill/>
-                  </a:rPr>
-                  <a:t> </a:t>
-                </a:r>
-              </a:p>
-            </p:txBody>
-          </p:sp>
-        </mc:Fallback>
-      </mc:AlternateContent>
       <p:sp>
         <p:nvSpPr>
           <p:cNvPr id="17" name="Oval 16">
@@ -29846,8 +32212,8 @@
           </a:fontRef>
         </p:style>
       </p:cxnSp>
-      <mc:AlternateContent xmlns:mc="http://schemas.openxmlformats.org/markup-compatibility/2006">
-        <mc:Choice xmlns:a14="http://schemas.microsoft.com/office/drawing/2010/main" Requires="a14">
+      <mc:AlternateContent xmlns:mc="http://schemas.openxmlformats.org/markup-compatibility/2006" xmlns:a14="http://schemas.microsoft.com/office/drawing/2010/main">
+        <mc:Choice Requires="a14">
           <p:sp>
             <p:nvSpPr>
               <p:cNvPr id="40" name="TextBox 39">
@@ -29932,7 +32298,7 @@
             </p:txBody>
           </p:sp>
         </mc:Choice>
-        <mc:Fallback>
+        <mc:Fallback xmlns="">
           <p:sp>
             <p:nvSpPr>
               <p:cNvPr id="40" name="TextBox 39">
@@ -29977,8 +32343,8 @@
           </p:sp>
         </mc:Fallback>
       </mc:AlternateContent>
-      <mc:AlternateContent xmlns:mc="http://schemas.openxmlformats.org/markup-compatibility/2006">
-        <mc:Choice xmlns:a14="http://schemas.microsoft.com/office/drawing/2010/main" Requires="a14">
+      <mc:AlternateContent xmlns:mc="http://schemas.openxmlformats.org/markup-compatibility/2006" xmlns:a14="http://schemas.microsoft.com/office/drawing/2010/main">
+        <mc:Choice Requires="a14">
           <p:sp>
             <p:nvSpPr>
               <p:cNvPr id="3" name="TextBox 2">
@@ -30063,7 +32429,7 @@
             </p:txBody>
           </p:sp>
         </mc:Choice>
-        <mc:Fallback>
+        <mc:Fallback xmlns="">
           <p:sp>
             <p:nvSpPr>
               <p:cNvPr id="3" name="TextBox 2">
@@ -30108,8 +32474,8 @@
           </p:sp>
         </mc:Fallback>
       </mc:AlternateContent>
-      <mc:AlternateContent xmlns:mc="http://schemas.openxmlformats.org/markup-compatibility/2006">
-        <mc:Choice xmlns:a14="http://schemas.microsoft.com/office/drawing/2010/main" Requires="a14">
+      <mc:AlternateContent xmlns:mc="http://schemas.openxmlformats.org/markup-compatibility/2006" xmlns:a14="http://schemas.microsoft.com/office/drawing/2010/main">
+        <mc:Choice Requires="a14">
           <p:sp>
             <p:nvSpPr>
               <p:cNvPr id="10" name="TextBox 9">
@@ -30194,7 +32560,7 @@
             </p:txBody>
           </p:sp>
         </mc:Choice>
-        <mc:Fallback>
+        <mc:Fallback xmlns="">
           <p:sp>
             <p:nvSpPr>
               <p:cNvPr id="10" name="TextBox 9">
@@ -30239,8 +32605,8 @@
           </p:sp>
         </mc:Fallback>
       </mc:AlternateContent>
-      <mc:AlternateContent xmlns:mc="http://schemas.openxmlformats.org/markup-compatibility/2006">
-        <mc:Choice xmlns:a14="http://schemas.microsoft.com/office/drawing/2010/main" Requires="a14">
+      <mc:AlternateContent xmlns:mc="http://schemas.openxmlformats.org/markup-compatibility/2006" xmlns:a14="http://schemas.microsoft.com/office/drawing/2010/main">
+        <mc:Choice Requires="a14">
           <p:sp>
             <p:nvSpPr>
               <p:cNvPr id="13" name="TextBox 12">
@@ -30325,7 +32691,7 @@
             </p:txBody>
           </p:sp>
         </mc:Choice>
-        <mc:Fallback>
+        <mc:Fallback xmlns="">
           <p:sp>
             <p:nvSpPr>
               <p:cNvPr id="13" name="TextBox 12">
@@ -30461,8 +32827,8 @@
           </a:fontRef>
         </p:style>
       </p:cxnSp>
-      <mc:AlternateContent xmlns:mc="http://schemas.openxmlformats.org/markup-compatibility/2006">
-        <mc:Choice xmlns:a14="http://schemas.microsoft.com/office/drawing/2010/main" Requires="a14">
+      <mc:AlternateContent xmlns:mc="http://schemas.openxmlformats.org/markup-compatibility/2006" xmlns:a14="http://schemas.microsoft.com/office/drawing/2010/main">
+        <mc:Choice Requires="a14">
           <p:sp>
             <p:nvSpPr>
               <p:cNvPr id="30" name="TextBox 29">
@@ -30547,7 +32913,7 @@
             </p:txBody>
           </p:sp>
         </mc:Choice>
-        <mc:Fallback>
+        <mc:Fallback xmlns="">
           <p:sp>
             <p:nvSpPr>
               <p:cNvPr id="30" name="TextBox 29">
@@ -30765,8 +33131,8 @@
           </a:fontRef>
         </p:style>
       </p:cxnSp>
-      <mc:AlternateContent xmlns:mc="http://schemas.openxmlformats.org/markup-compatibility/2006">
-        <mc:Choice xmlns:a14="http://schemas.microsoft.com/office/drawing/2010/main" Requires="a14">
+      <mc:AlternateContent xmlns:mc="http://schemas.openxmlformats.org/markup-compatibility/2006" xmlns:a14="http://schemas.microsoft.com/office/drawing/2010/main">
+        <mc:Choice Requires="a14">
           <p:sp>
             <p:nvSpPr>
               <p:cNvPr id="53" name="TextBox 52">
@@ -30838,7 +33204,7 @@
             </p:txBody>
           </p:sp>
         </mc:Choice>
-        <mc:Fallback>
+        <mc:Fallback xmlns="">
           <p:sp>
             <p:nvSpPr>
               <p:cNvPr id="53" name="TextBox 52">
@@ -30883,8 +33249,8 @@
           </p:sp>
         </mc:Fallback>
       </mc:AlternateContent>
-      <mc:AlternateContent xmlns:mc="http://schemas.openxmlformats.org/markup-compatibility/2006">
-        <mc:Choice xmlns:a14="http://schemas.microsoft.com/office/drawing/2010/main" Requires="a14">
+      <mc:AlternateContent xmlns:mc="http://schemas.openxmlformats.org/markup-compatibility/2006" xmlns:a14="http://schemas.microsoft.com/office/drawing/2010/main">
+        <mc:Choice Requires="a14">
           <p:sp>
             <p:nvSpPr>
               <p:cNvPr id="70" name="TextBox 69">
@@ -30969,7 +33335,7 @@
             </p:txBody>
           </p:sp>
         </mc:Choice>
-        <mc:Fallback>
+        <mc:Fallback xmlns="">
           <p:sp>
             <p:nvSpPr>
               <p:cNvPr id="70" name="TextBox 69">
@@ -31014,8 +33380,8 @@
           </p:sp>
         </mc:Fallback>
       </mc:AlternateContent>
-      <mc:AlternateContent xmlns:mc="http://schemas.openxmlformats.org/markup-compatibility/2006">
-        <mc:Choice xmlns:a14="http://schemas.microsoft.com/office/drawing/2010/main" Requires="a14">
+      <mc:AlternateContent xmlns:mc="http://schemas.openxmlformats.org/markup-compatibility/2006" xmlns:a14="http://schemas.microsoft.com/office/drawing/2010/main">
+        <mc:Choice Requires="a14">
           <p:sp>
             <p:nvSpPr>
               <p:cNvPr id="72" name="TextBox 71">
@@ -31100,7 +33466,7 @@
             </p:txBody>
           </p:sp>
         </mc:Choice>
-        <mc:Fallback>
+        <mc:Fallback xmlns="">
           <p:sp>
             <p:nvSpPr>
               <p:cNvPr id="72" name="TextBox 71">
@@ -31145,8 +33511,8 @@
           </p:sp>
         </mc:Fallback>
       </mc:AlternateContent>
-      <mc:AlternateContent xmlns:mc="http://schemas.openxmlformats.org/markup-compatibility/2006">
-        <mc:Choice xmlns:a14="http://schemas.microsoft.com/office/drawing/2010/main" Requires="a14">
+      <mc:AlternateContent xmlns:mc="http://schemas.openxmlformats.org/markup-compatibility/2006" xmlns:a14="http://schemas.microsoft.com/office/drawing/2010/main">
+        <mc:Choice Requires="a14">
           <p:sp>
             <p:nvSpPr>
               <p:cNvPr id="74" name="TextBox 73">
@@ -31231,7 +33597,7 @@
             </p:txBody>
           </p:sp>
         </mc:Choice>
-        <mc:Fallback>
+        <mc:Fallback xmlns="">
           <p:sp>
             <p:nvSpPr>
               <p:cNvPr id="74" name="TextBox 73">
@@ -31276,8 +33642,8 @@
           </p:sp>
         </mc:Fallback>
       </mc:AlternateContent>
-      <mc:AlternateContent xmlns:mc="http://schemas.openxmlformats.org/markup-compatibility/2006">
-        <mc:Choice xmlns:a14="http://schemas.microsoft.com/office/drawing/2010/main" Requires="a14">
+      <mc:AlternateContent xmlns:mc="http://schemas.openxmlformats.org/markup-compatibility/2006" xmlns:a14="http://schemas.microsoft.com/office/drawing/2010/main">
+        <mc:Choice Requires="a14">
           <p:sp>
             <p:nvSpPr>
               <p:cNvPr id="77" name="TextBox 76">
@@ -31362,7 +33728,7 @@
             </p:txBody>
           </p:sp>
         </mc:Choice>
-        <mc:Fallback>
+        <mc:Fallback xmlns="">
           <p:sp>
             <p:nvSpPr>
               <p:cNvPr id="77" name="TextBox 76">
@@ -31437,6 +33803,192 @@
           </a:prstGeom>
         </p:spPr>
       </p:pic>
+      <mc:AlternateContent xmlns:mc="http://schemas.openxmlformats.org/markup-compatibility/2006">
+        <mc:Choice xmlns:a14="http://schemas.microsoft.com/office/drawing/2010/main" Requires="a14">
+          <p:sp>
+            <p:nvSpPr>
+              <p:cNvPr id="6" name="Title 1">
+                <a:extLst>
+                  <a:ext uri="{FF2B5EF4-FFF2-40B4-BE49-F238E27FC236}">
+                    <a16:creationId xmlns:a16="http://schemas.microsoft.com/office/drawing/2014/main" id="{FA6D6D4E-B218-F205-2A1F-A7E77D9351D4}"/>
+                  </a:ext>
+                </a:extLst>
+              </p:cNvPr>
+              <p:cNvSpPr>
+                <a:spLocks noGrp="1"/>
+              </p:cNvSpPr>
+              <p:nvPr>
+                <p:ph type="title"/>
+              </p:nvPr>
+            </p:nvSpPr>
+            <p:spPr>
+              <a:xfrm>
+                <a:off x="265564" y="159471"/>
+                <a:ext cx="5628339" cy="720725"/>
+              </a:xfrm>
+            </p:spPr>
+            <p:txBody>
+              <a:bodyPr>
+                <a:noAutofit/>
+              </a:bodyPr>
+              <a:lstStyle/>
+              <a:p>
+                <a:r>
+                  <a:rPr lang="de-DE" sz="2400" dirty="0"/>
+                  <a:t>Step 1: Find </a:t>
+                </a:r>
+                <a:r>
+                  <a:rPr lang="de-DE" sz="2400" dirty="0" err="1"/>
+                  <a:t>the</a:t>
+                </a:r>
+                <a:r>
+                  <a:rPr lang="de-DE" sz="2400" dirty="0"/>
+                  <a:t> m4-like </a:t>
+                </a:r>
+                <a:r>
+                  <a:rPr lang="de-DE" sz="2400" dirty="0" err="1"/>
+                  <a:t>metabolites</a:t>
+                </a:r>
+                <a:r>
+                  <a:rPr lang="de-DE" sz="2400" dirty="0"/>
+                  <a:t> and </a:t>
+                </a:r>
+                <a:r>
+                  <a:rPr lang="de-DE" sz="2400" dirty="0" err="1"/>
+                  <a:t>the</a:t>
+                </a:r>
+                <a:r>
+                  <a:rPr lang="de-DE" sz="2400" dirty="0"/>
+                  <a:t> </a:t>
+                </a:r>
+                <a:r>
+                  <a:rPr lang="de-DE" sz="2400" dirty="0" err="1"/>
+                  <a:t>reactions</a:t>
+                </a:r>
+                <a:r>
+                  <a:rPr lang="de-DE" sz="2400" dirty="0"/>
+                  <a:t> </a:t>
+                </a:r>
+                <a14:m>
+                  <m:oMath xmlns:m="http://schemas.openxmlformats.org/officeDocument/2006/math">
+                    <m:sSub>
+                      <m:sSubPr>
+                        <m:ctrlPr>
+                          <a:rPr lang="de-DE" sz="2400" i="1" dirty="0">
+                            <a:latin typeface="Cambria Math" panose="02040503050406030204" pitchFamily="18" charset="0"/>
+                          </a:rPr>
+                        </m:ctrlPr>
+                      </m:sSubPr>
+                      <m:e>
+                        <m:r>
+                          <m:rPr>
+                            <m:sty m:val="p"/>
+                          </m:rPr>
+                          <a:rPr lang="en-GB" sz="2400" i="1" dirty="0">
+                            <a:latin typeface="Cambria Math" panose="02040503050406030204" pitchFamily="18" charset="0"/>
+                          </a:rPr>
+                          <m:t>r</m:t>
+                        </m:r>
+                      </m:e>
+                      <m:sub>
+                        <m:r>
+                          <a:rPr lang="en-GB" sz="2400" i="1" dirty="0">
+                            <a:latin typeface="Cambria Math" panose="02040503050406030204" pitchFamily="18" charset="0"/>
+                          </a:rPr>
+                          <m:t>2</m:t>
+                        </m:r>
+                      </m:sub>
+                    </m:sSub>
+                  </m:oMath>
+                </a14:m>
+                <a:r>
+                  <a:rPr lang="en-US" sz="2400" dirty="0"/>
+                  <a:t>’s and </a:t>
+                </a:r>
+                <a14:m>
+                  <m:oMath xmlns:m="http://schemas.openxmlformats.org/officeDocument/2006/math">
+                    <m:sSub>
+                      <m:sSubPr>
+                        <m:ctrlPr>
+                          <a:rPr lang="de-DE" sz="2400" i="1" dirty="0">
+                            <a:latin typeface="Cambria Math" panose="02040503050406030204" pitchFamily="18" charset="0"/>
+                          </a:rPr>
+                        </m:ctrlPr>
+                      </m:sSubPr>
+                      <m:e>
+                        <m:r>
+                          <m:rPr>
+                            <m:sty m:val="p"/>
+                          </m:rPr>
+                          <a:rPr lang="en-GB" sz="2400" i="1" dirty="0">
+                            <a:latin typeface="Cambria Math" panose="02040503050406030204" pitchFamily="18" charset="0"/>
+                          </a:rPr>
+                          <m:t>r</m:t>
+                        </m:r>
+                      </m:e>
+                      <m:sub>
+                        <m:r>
+                          <a:rPr lang="en-GB" sz="2400" i="1" dirty="0">
+                            <a:latin typeface="Cambria Math" panose="02040503050406030204" pitchFamily="18" charset="0"/>
+                          </a:rPr>
+                          <m:t>3</m:t>
+                        </m:r>
+                      </m:sub>
+                    </m:sSub>
+                  </m:oMath>
+                </a14:m>
+                <a:r>
+                  <a:rPr lang="en-US" sz="2400" dirty="0"/>
+                  <a:t>’s</a:t>
+                </a:r>
+              </a:p>
+            </p:txBody>
+          </p:sp>
+        </mc:Choice>
+        <mc:Fallback>
+          <p:sp>
+            <p:nvSpPr>
+              <p:cNvPr id="6" name="Title 1">
+                <a:extLst>
+                  <a:ext uri="{FF2B5EF4-FFF2-40B4-BE49-F238E27FC236}">
+                    <a16:creationId xmlns:a16="http://schemas.microsoft.com/office/drawing/2014/main" id="{FA6D6D4E-B218-F205-2A1F-A7E77D9351D4}"/>
+                  </a:ext>
+                </a:extLst>
+              </p:cNvPr>
+              <p:cNvSpPr>
+                <a:spLocks noGrp="1" noRot="1" noChangeAspect="1" noMove="1" noResize="1" noEditPoints="1" noAdjustHandles="1" noChangeArrowheads="1" noChangeShapeType="1" noTextEdit="1"/>
+              </p:cNvSpPr>
+              <p:nvPr>
+                <p:ph type="title"/>
+              </p:nvPr>
+            </p:nvSpPr>
+            <p:spPr>
+              <a:xfrm>
+                <a:off x="265564" y="159471"/>
+                <a:ext cx="5628339" cy="720725"/>
+              </a:xfrm>
+              <a:blipFill>
+                <a:blip r:embed="rId15"/>
+                <a:stretch>
+                  <a:fillRect l="-1733" t="-12712" r="-650" b="-22881"/>
+                </a:stretch>
+              </a:blipFill>
+            </p:spPr>
+            <p:txBody>
+              <a:bodyPr/>
+              <a:lstStyle/>
+              <a:p>
+                <a:r>
+                  <a:rPr lang="en-US">
+                    <a:noFill/>
+                  </a:rPr>
+                  <a:t> </a:t>
+                </a:r>
+              </a:p>
+            </p:txBody>
+          </p:sp>
+        </mc:Fallback>
+      </mc:AlternateContent>
     </p:spTree>
     <p:extLst>
       <p:ext uri="{BB962C8B-B14F-4D97-AF65-F5344CB8AC3E}">
@@ -31603,7 +34155,10 @@
                     </m:sSub>
                   </m:oMath>
                 </a14:m>
-                <a:endParaRPr lang="en-US" sz="3200" dirty="0"/>
+                <a:r>
+                  <a:rPr lang="en-US" sz="3200" dirty="0"/>
+                  <a:t>- like</a:t>
+                </a:r>
               </a:p>
             </p:txBody>
           </p:sp>
@@ -35471,8 +38026,8 @@
           </a:fontRef>
         </p:style>
       </p:cxnSp>
-      <mc:AlternateContent xmlns:mc="http://schemas.openxmlformats.org/markup-compatibility/2006">
-        <mc:Choice xmlns:a14="http://schemas.microsoft.com/office/drawing/2010/main" Requires="a14">
+      <mc:AlternateContent xmlns:mc="http://schemas.openxmlformats.org/markup-compatibility/2006" xmlns:a14="http://schemas.microsoft.com/office/drawing/2010/main">
+        <mc:Choice Requires="a14">
           <p:sp>
             <p:nvSpPr>
               <p:cNvPr id="40" name="TextBox 39">
@@ -35557,7 +38112,7 @@
             </p:txBody>
           </p:sp>
         </mc:Choice>
-        <mc:Fallback>
+        <mc:Fallback xmlns="">
           <p:sp>
             <p:nvSpPr>
               <p:cNvPr id="40" name="TextBox 39">
@@ -35602,8 +38157,8 @@
           </p:sp>
         </mc:Fallback>
       </mc:AlternateContent>
-      <mc:AlternateContent xmlns:mc="http://schemas.openxmlformats.org/markup-compatibility/2006">
-        <mc:Choice xmlns:a14="http://schemas.microsoft.com/office/drawing/2010/main" Requires="a14">
+      <mc:AlternateContent xmlns:mc="http://schemas.openxmlformats.org/markup-compatibility/2006" xmlns:a14="http://schemas.microsoft.com/office/drawing/2010/main">
+        <mc:Choice Requires="a14">
           <p:sp>
             <p:nvSpPr>
               <p:cNvPr id="3" name="TextBox 2">
@@ -35688,7 +38243,7 @@
             </p:txBody>
           </p:sp>
         </mc:Choice>
-        <mc:Fallback>
+        <mc:Fallback xmlns="">
           <p:sp>
             <p:nvSpPr>
               <p:cNvPr id="3" name="TextBox 2">
@@ -35733,8 +38288,8 @@
           </p:sp>
         </mc:Fallback>
       </mc:AlternateContent>
-      <mc:AlternateContent xmlns:mc="http://schemas.openxmlformats.org/markup-compatibility/2006">
-        <mc:Choice xmlns:a14="http://schemas.microsoft.com/office/drawing/2010/main" Requires="a14">
+      <mc:AlternateContent xmlns:mc="http://schemas.openxmlformats.org/markup-compatibility/2006" xmlns:a14="http://schemas.microsoft.com/office/drawing/2010/main">
+        <mc:Choice Requires="a14">
           <p:sp>
             <p:nvSpPr>
               <p:cNvPr id="10" name="TextBox 9">
@@ -35819,7 +38374,7 @@
             </p:txBody>
           </p:sp>
         </mc:Choice>
-        <mc:Fallback>
+        <mc:Fallback xmlns="">
           <p:sp>
             <p:nvSpPr>
               <p:cNvPr id="10" name="TextBox 9">
@@ -35864,8 +38419,8 @@
           </p:sp>
         </mc:Fallback>
       </mc:AlternateContent>
-      <mc:AlternateContent xmlns:mc="http://schemas.openxmlformats.org/markup-compatibility/2006">
-        <mc:Choice xmlns:a14="http://schemas.microsoft.com/office/drawing/2010/main" Requires="a14">
+      <mc:AlternateContent xmlns:mc="http://schemas.openxmlformats.org/markup-compatibility/2006" xmlns:a14="http://schemas.microsoft.com/office/drawing/2010/main">
+        <mc:Choice Requires="a14">
           <p:sp>
             <p:nvSpPr>
               <p:cNvPr id="13" name="TextBox 12">
@@ -35956,7 +38511,7 @@
             </p:txBody>
           </p:sp>
         </mc:Choice>
-        <mc:Fallback>
+        <mc:Fallback xmlns="">
           <p:sp>
             <p:nvSpPr>
               <p:cNvPr id="13" name="TextBox 12">
@@ -36092,8 +38647,8 @@
           </a:fontRef>
         </p:style>
       </p:cxnSp>
-      <mc:AlternateContent xmlns:mc="http://schemas.openxmlformats.org/markup-compatibility/2006">
-        <mc:Choice xmlns:a14="http://schemas.microsoft.com/office/drawing/2010/main" Requires="a14">
+      <mc:AlternateContent xmlns:mc="http://schemas.openxmlformats.org/markup-compatibility/2006" xmlns:a14="http://schemas.microsoft.com/office/drawing/2010/main">
+        <mc:Choice Requires="a14">
           <p:sp>
             <p:nvSpPr>
               <p:cNvPr id="30" name="TextBox 29">
@@ -36178,7 +38733,7 @@
             </p:txBody>
           </p:sp>
         </mc:Choice>
-        <mc:Fallback>
+        <mc:Fallback xmlns="">
           <p:sp>
             <p:nvSpPr>
               <p:cNvPr id="30" name="TextBox 29">
@@ -36396,8 +38951,8 @@
           </a:fontRef>
         </p:style>
       </p:cxnSp>
-      <mc:AlternateContent xmlns:mc="http://schemas.openxmlformats.org/markup-compatibility/2006">
-        <mc:Choice xmlns:a14="http://schemas.microsoft.com/office/drawing/2010/main" Requires="a14">
+      <mc:AlternateContent xmlns:mc="http://schemas.openxmlformats.org/markup-compatibility/2006" xmlns:a14="http://schemas.microsoft.com/office/drawing/2010/main">
+        <mc:Choice Requires="a14">
           <p:sp>
             <p:nvSpPr>
               <p:cNvPr id="53" name="TextBox 52">
@@ -36469,7 +39024,7 @@
             </p:txBody>
           </p:sp>
         </mc:Choice>
-        <mc:Fallback>
+        <mc:Fallback xmlns="">
           <p:sp>
             <p:nvSpPr>
               <p:cNvPr id="53" name="TextBox 52">
@@ -36514,8 +39069,8 @@
           </p:sp>
         </mc:Fallback>
       </mc:AlternateContent>
-      <mc:AlternateContent xmlns:mc="http://schemas.openxmlformats.org/markup-compatibility/2006">
-        <mc:Choice xmlns:a14="http://schemas.microsoft.com/office/drawing/2010/main" Requires="a14">
+      <mc:AlternateContent xmlns:mc="http://schemas.openxmlformats.org/markup-compatibility/2006" xmlns:a14="http://schemas.microsoft.com/office/drawing/2010/main">
+        <mc:Choice Requires="a14">
           <p:sp>
             <p:nvSpPr>
               <p:cNvPr id="70" name="TextBox 69">
@@ -36600,7 +39155,7 @@
             </p:txBody>
           </p:sp>
         </mc:Choice>
-        <mc:Fallback>
+        <mc:Fallback xmlns="">
           <p:sp>
             <p:nvSpPr>
               <p:cNvPr id="70" name="TextBox 69">
@@ -36645,8 +39200,8 @@
           </p:sp>
         </mc:Fallback>
       </mc:AlternateContent>
-      <mc:AlternateContent xmlns:mc="http://schemas.openxmlformats.org/markup-compatibility/2006">
-        <mc:Choice xmlns:a14="http://schemas.microsoft.com/office/drawing/2010/main" Requires="a14">
+      <mc:AlternateContent xmlns:mc="http://schemas.openxmlformats.org/markup-compatibility/2006" xmlns:a14="http://schemas.microsoft.com/office/drawing/2010/main">
+        <mc:Choice Requires="a14">
           <p:sp>
             <p:nvSpPr>
               <p:cNvPr id="72" name="TextBox 71">
@@ -36731,7 +39286,7 @@
             </p:txBody>
           </p:sp>
         </mc:Choice>
-        <mc:Fallback>
+        <mc:Fallback xmlns="">
           <p:sp>
             <p:nvSpPr>
               <p:cNvPr id="72" name="TextBox 71">
@@ -36776,8 +39331,8 @@
           </p:sp>
         </mc:Fallback>
       </mc:AlternateContent>
-      <mc:AlternateContent xmlns:mc="http://schemas.openxmlformats.org/markup-compatibility/2006">
-        <mc:Choice xmlns:a14="http://schemas.microsoft.com/office/drawing/2010/main" Requires="a14">
+      <mc:AlternateContent xmlns:mc="http://schemas.openxmlformats.org/markup-compatibility/2006" xmlns:a14="http://schemas.microsoft.com/office/drawing/2010/main">
+        <mc:Choice Requires="a14">
           <p:sp>
             <p:nvSpPr>
               <p:cNvPr id="74" name="TextBox 73">
@@ -36862,7 +39417,7 @@
             </p:txBody>
           </p:sp>
         </mc:Choice>
-        <mc:Fallback>
+        <mc:Fallback xmlns="">
           <p:sp>
             <p:nvSpPr>
               <p:cNvPr id="74" name="TextBox 73">
@@ -36907,8 +39462,8 @@
           </p:sp>
         </mc:Fallback>
       </mc:AlternateContent>
-      <mc:AlternateContent xmlns:mc="http://schemas.openxmlformats.org/markup-compatibility/2006">
-        <mc:Choice xmlns:a14="http://schemas.microsoft.com/office/drawing/2010/main" Requires="a14">
+      <mc:AlternateContent xmlns:mc="http://schemas.openxmlformats.org/markup-compatibility/2006" xmlns:a14="http://schemas.microsoft.com/office/drawing/2010/main">
+        <mc:Choice Requires="a14">
           <p:sp>
             <p:nvSpPr>
               <p:cNvPr id="77" name="TextBox 76">
@@ -36993,7 +39548,7 @@
             </p:txBody>
           </p:sp>
         </mc:Choice>
-        <mc:Fallback>
+        <mc:Fallback xmlns="">
           <p:sp>
             <p:nvSpPr>
               <p:cNvPr id="77" name="TextBox 76">
@@ -37640,6 +40195,2058 @@
 </file>
 
 <file path=ppt/slides/slide8.xml><?xml version="1.0" encoding="utf-8"?>
+<p:sld xmlns:a="http://schemas.openxmlformats.org/drawingml/2006/main" xmlns:r="http://schemas.openxmlformats.org/officeDocument/2006/relationships" xmlns:p="http://schemas.openxmlformats.org/presentationml/2006/main">
+  <p:cSld>
+    <p:spTree>
+      <p:nvGrpSpPr>
+        <p:cNvPr id="1" name=""/>
+        <p:cNvGrpSpPr/>
+        <p:nvPr/>
+      </p:nvGrpSpPr>
+      <p:grpSpPr>
+        <a:xfrm>
+          <a:off x="0" y="0"/>
+          <a:ext cx="0" cy="0"/>
+          <a:chOff x="0" y="0"/>
+          <a:chExt cx="0" cy="0"/>
+        </a:xfrm>
+      </p:grpSpPr>
+      <p:pic>
+        <p:nvPicPr>
+          <p:cNvPr id="46" name="Graphic 45">
+            <a:extLst>
+              <a:ext uri="{FF2B5EF4-FFF2-40B4-BE49-F238E27FC236}">
+                <a16:creationId xmlns:a16="http://schemas.microsoft.com/office/drawing/2014/main" id="{626ADE63-46A6-CCA2-2409-373D63232EDA}"/>
+              </a:ext>
+            </a:extLst>
+          </p:cNvPr>
+          <p:cNvPicPr>
+            <a:picLocks noChangeAspect="1"/>
+          </p:cNvPicPr>
+          <p:nvPr/>
+        </p:nvPicPr>
+        <p:blipFill>
+          <a:blip r:embed="rId2">
+            <a:extLst>
+              <a:ext uri="{96DAC541-7B7A-43D3-8B79-37D633B846F1}">
+                <asvg:svgBlip xmlns:asvg="http://schemas.microsoft.com/office/drawing/2016/SVG/main" r:embed="rId3"/>
+              </a:ext>
+            </a:extLst>
+          </a:blip>
+          <a:stretch>
+            <a:fillRect/>
+          </a:stretch>
+        </p:blipFill>
+        <p:spPr>
+          <a:xfrm>
+            <a:off x="-7324" y="857690"/>
+            <a:ext cx="6667500" cy="6029325"/>
+          </a:xfrm>
+          <a:prstGeom prst="rect">
+            <a:avLst/>
+          </a:prstGeom>
+        </p:spPr>
+      </p:pic>
+      <p:sp>
+        <p:nvSpPr>
+          <p:cNvPr id="2" name="Title 1">
+            <a:extLst>
+              <a:ext uri="{FF2B5EF4-FFF2-40B4-BE49-F238E27FC236}">
+                <a16:creationId xmlns:a16="http://schemas.microsoft.com/office/drawing/2014/main" id="{3823179B-9D2D-F996-9FD9-84BA3DCD3633}"/>
+              </a:ext>
+            </a:extLst>
+          </p:cNvPr>
+          <p:cNvSpPr>
+            <a:spLocks noGrp="1"/>
+          </p:cNvSpPr>
+          <p:nvPr>
+            <p:ph type="title"/>
+          </p:nvPr>
+        </p:nvSpPr>
+        <p:spPr>
+          <a:xfrm>
+            <a:off x="124119" y="113154"/>
+            <a:ext cx="4639918" cy="723446"/>
+          </a:xfrm>
+        </p:spPr>
+        <p:txBody>
+          <a:bodyPr>
+            <a:normAutofit/>
+          </a:bodyPr>
+          <a:lstStyle/>
+          <a:p>
+            <a:r>
+              <a:rPr lang="en-US" sz="3200" dirty="0"/>
+              <a:t>Mapping with restrictions</a:t>
+            </a:r>
+          </a:p>
+        </p:txBody>
+      </p:sp>
+      <mc:AlternateContent xmlns:mc="http://schemas.openxmlformats.org/markup-compatibility/2006">
+        <mc:Choice xmlns:a14="http://schemas.microsoft.com/office/drawing/2010/main" Requires="a14">
+          <p:sp>
+            <p:nvSpPr>
+              <p:cNvPr id="26" name="TextBox 25">
+                <a:extLst>
+                  <a:ext uri="{FF2B5EF4-FFF2-40B4-BE49-F238E27FC236}">
+                    <a16:creationId xmlns:a16="http://schemas.microsoft.com/office/drawing/2014/main" id="{AFFBB67B-5A73-1EF5-2CB8-3A325AF07879}"/>
+                  </a:ext>
+                </a:extLst>
+              </p:cNvPr>
+              <p:cNvSpPr txBox="1"/>
+              <p:nvPr/>
+            </p:nvSpPr>
+            <p:spPr>
+              <a:xfrm>
+                <a:off x="6690692" y="95616"/>
+                <a:ext cx="5501308" cy="1554272"/>
+              </a:xfrm>
+              <a:prstGeom prst="rect">
+                <a:avLst/>
+              </a:prstGeom>
+              <a:noFill/>
+            </p:spPr>
+            <p:txBody>
+              <a:bodyPr wrap="square">
+                <a:spAutoFit/>
+              </a:bodyPr>
+              <a:lstStyle/>
+              <a:p>
+                <a:pPr>
+                  <a:spcAft>
+                    <a:spcPts val="600"/>
+                  </a:spcAft>
+                </a:pPr>
+                <a:r>
+                  <a:rPr lang="de-DE" dirty="0" err="1"/>
+                  <a:t>Restrictions</a:t>
+                </a:r>
+                <a:r>
+                  <a:rPr lang="de-DE" dirty="0"/>
+                  <a:t>: </a:t>
+                </a:r>
+              </a:p>
+              <a:p>
+                <a:pPr marL="342900" indent="-342900">
+                  <a:buFont typeface="+mj-lt"/>
+                  <a:buAutoNum type="arabicPeriod"/>
+                </a:pPr>
+                <a:r>
+                  <a:rPr lang="de-DE" dirty="0"/>
+                  <a:t>The metabolite </a:t>
+                </a:r>
+                <a14:m>
+                  <m:oMath xmlns:m="http://schemas.openxmlformats.org/officeDocument/2006/math">
+                    <m:sSub>
+                      <m:sSubPr>
+                        <m:ctrlPr>
+                          <a:rPr lang="de-DE" i="1" smtClean="0">
+                            <a:solidFill>
+                              <a:srgbClr val="C00000"/>
+                            </a:solidFill>
+                            <a:latin typeface="Cambria Math" panose="02040503050406030204" pitchFamily="18" charset="0"/>
+                          </a:rPr>
+                        </m:ctrlPr>
+                      </m:sSubPr>
+                      <m:e>
+                        <m:r>
+                          <m:rPr>
+                            <m:sty m:val="p"/>
+                          </m:rPr>
+                          <a:rPr lang="de-DE">
+                            <a:solidFill>
+                              <a:srgbClr val="C00000"/>
+                            </a:solidFill>
+                            <a:latin typeface="Cambria Math" panose="02040503050406030204" pitchFamily="18" charset="0"/>
+                          </a:rPr>
+                          <m:t>m</m:t>
+                        </m:r>
+                      </m:e>
+                      <m:sub>
+                        <m:r>
+                          <a:rPr lang="de-DE" i="1">
+                            <a:solidFill>
+                              <a:srgbClr val="C00000"/>
+                            </a:solidFill>
+                            <a:latin typeface="Cambria Math" panose="02040503050406030204" pitchFamily="18" charset="0"/>
+                          </a:rPr>
+                          <m:t>4</m:t>
+                        </m:r>
+                      </m:sub>
+                    </m:sSub>
+                  </m:oMath>
+                </a14:m>
+                <a:r>
+                  <a:rPr lang="en-US" dirty="0"/>
+                  <a:t> is a rich extracellular metabolite.</a:t>
+                </a:r>
+              </a:p>
+              <a:p>
+                <a:pPr marL="342900" indent="-342900">
+                  <a:buFont typeface="+mj-lt"/>
+                  <a:buAutoNum type="arabicPeriod"/>
+                </a:pPr>
+                <a:r>
+                  <a:rPr lang="en-US" dirty="0"/>
+                  <a:t>The metabolic network associated with </a:t>
+                </a:r>
+                <a14:m>
+                  <m:oMath xmlns:m="http://schemas.openxmlformats.org/officeDocument/2006/math">
+                    <m:sSub>
+                      <m:sSubPr>
+                        <m:ctrlPr>
+                          <a:rPr lang="de-DE" i="1">
+                            <a:solidFill>
+                              <a:srgbClr val="C00000"/>
+                            </a:solidFill>
+                            <a:latin typeface="Cambria Math" panose="02040503050406030204" pitchFamily="18" charset="0"/>
+                          </a:rPr>
+                        </m:ctrlPr>
+                      </m:sSubPr>
+                      <m:e>
+                        <m:r>
+                          <m:rPr>
+                            <m:sty m:val="p"/>
+                          </m:rPr>
+                          <a:rPr lang="de-DE">
+                            <a:solidFill>
+                              <a:srgbClr val="C00000"/>
+                            </a:solidFill>
+                            <a:latin typeface="Cambria Math" panose="02040503050406030204" pitchFamily="18" charset="0"/>
+                          </a:rPr>
+                          <m:t>m</m:t>
+                        </m:r>
+                      </m:e>
+                      <m:sub>
+                        <m:r>
+                          <a:rPr lang="de-DE" i="1">
+                            <a:solidFill>
+                              <a:srgbClr val="C00000"/>
+                            </a:solidFill>
+                            <a:latin typeface="Cambria Math" panose="02040503050406030204" pitchFamily="18" charset="0"/>
+                          </a:rPr>
+                          <m:t>4</m:t>
+                        </m:r>
+                      </m:sub>
+                    </m:sSub>
+                  </m:oMath>
+                </a14:m>
+                <a:r>
+                  <a:rPr lang="en-US" dirty="0"/>
+                  <a:t> is the least impactful. </a:t>
+                </a:r>
+              </a:p>
+            </p:txBody>
+          </p:sp>
+        </mc:Choice>
+        <mc:Fallback>
+          <p:sp>
+            <p:nvSpPr>
+              <p:cNvPr id="26" name="TextBox 25">
+                <a:extLst>
+                  <a:ext uri="{FF2B5EF4-FFF2-40B4-BE49-F238E27FC236}">
+                    <a16:creationId xmlns:a16="http://schemas.microsoft.com/office/drawing/2014/main" id="{AFFBB67B-5A73-1EF5-2CB8-3A325AF07879}"/>
+                  </a:ext>
+                </a:extLst>
+              </p:cNvPr>
+              <p:cNvSpPr txBox="1">
+                <a:spLocks noRot="1" noChangeAspect="1" noMove="1" noResize="1" noEditPoints="1" noAdjustHandles="1" noChangeArrowheads="1" noChangeShapeType="1" noTextEdit="1"/>
+              </p:cNvSpPr>
+              <p:nvPr/>
+            </p:nvSpPr>
+            <p:spPr>
+              <a:xfrm>
+                <a:off x="6690692" y="95616"/>
+                <a:ext cx="5501308" cy="1554272"/>
+              </a:xfrm>
+              <a:prstGeom prst="rect">
+                <a:avLst/>
+              </a:prstGeom>
+              <a:blipFill>
+                <a:blip r:embed="rId4"/>
+                <a:stretch>
+                  <a:fillRect l="-998" t="-1961" b="-5490"/>
+                </a:stretch>
+              </a:blipFill>
+            </p:spPr>
+            <p:txBody>
+              <a:bodyPr/>
+              <a:lstStyle/>
+              <a:p>
+                <a:r>
+                  <a:rPr lang="en-US">
+                    <a:noFill/>
+                  </a:rPr>
+                  <a:t> </a:t>
+                </a:r>
+              </a:p>
+            </p:txBody>
+          </p:sp>
+        </mc:Fallback>
+      </mc:AlternateContent>
+      <p:sp>
+        <p:nvSpPr>
+          <p:cNvPr id="48" name="Oval 47">
+            <a:extLst>
+              <a:ext uri="{FF2B5EF4-FFF2-40B4-BE49-F238E27FC236}">
+                <a16:creationId xmlns:a16="http://schemas.microsoft.com/office/drawing/2014/main" id="{381E688D-F7B1-B9C2-68AE-0A741E28239E}"/>
+              </a:ext>
+            </a:extLst>
+          </p:cNvPr>
+          <p:cNvSpPr>
+            <a:spLocks noChangeAspect="1"/>
+          </p:cNvSpPr>
+          <p:nvPr/>
+        </p:nvSpPr>
+        <p:spPr>
+          <a:xfrm>
+            <a:off x="9243213" y="2639025"/>
+            <a:ext cx="482803" cy="482803"/>
+          </a:xfrm>
+          <a:prstGeom prst="ellipse">
+            <a:avLst/>
+          </a:prstGeom>
+        </p:spPr>
+        <p:style>
+          <a:lnRef idx="2">
+            <a:schemeClr val="accent1">
+              <a:shade val="15000"/>
+            </a:schemeClr>
+          </a:lnRef>
+          <a:fillRef idx="1">
+            <a:schemeClr val="accent1"/>
+          </a:fillRef>
+          <a:effectRef idx="0">
+            <a:schemeClr val="accent1"/>
+          </a:effectRef>
+          <a:fontRef idx="minor">
+            <a:schemeClr val="lt1"/>
+          </a:fontRef>
+        </p:style>
+        <p:txBody>
+          <a:bodyPr rtlCol="0" anchor="ctr"/>
+          <a:lstStyle/>
+          <a:p>
+            <a:pPr algn="ctr"/>
+            <a:endParaRPr lang="en-US"/>
+          </a:p>
+        </p:txBody>
+      </p:sp>
+      <p:sp>
+        <p:nvSpPr>
+          <p:cNvPr id="49" name="Oval 48">
+            <a:extLst>
+              <a:ext uri="{FF2B5EF4-FFF2-40B4-BE49-F238E27FC236}">
+                <a16:creationId xmlns:a16="http://schemas.microsoft.com/office/drawing/2014/main" id="{3C8BA605-8A53-A383-773F-09F414DD9D61}"/>
+              </a:ext>
+            </a:extLst>
+          </p:cNvPr>
+          <p:cNvSpPr>
+            <a:spLocks noChangeAspect="1"/>
+          </p:cNvSpPr>
+          <p:nvPr/>
+        </p:nvSpPr>
+        <p:spPr>
+          <a:xfrm>
+            <a:off x="9254643" y="4841617"/>
+            <a:ext cx="482803" cy="482803"/>
+          </a:xfrm>
+          <a:prstGeom prst="ellipse">
+            <a:avLst/>
+          </a:prstGeom>
+        </p:spPr>
+        <p:style>
+          <a:lnRef idx="2">
+            <a:schemeClr val="accent1">
+              <a:shade val="15000"/>
+            </a:schemeClr>
+          </a:lnRef>
+          <a:fillRef idx="1">
+            <a:schemeClr val="accent1"/>
+          </a:fillRef>
+          <a:effectRef idx="0">
+            <a:schemeClr val="accent1"/>
+          </a:effectRef>
+          <a:fontRef idx="minor">
+            <a:schemeClr val="lt1"/>
+          </a:fontRef>
+        </p:style>
+        <p:txBody>
+          <a:bodyPr rtlCol="0" anchor="ctr"/>
+          <a:lstStyle/>
+          <a:p>
+            <a:pPr algn="ctr"/>
+            <a:endParaRPr lang="en-US"/>
+          </a:p>
+        </p:txBody>
+      </p:sp>
+      <p:cxnSp>
+        <p:nvCxnSpPr>
+          <p:cNvPr id="50" name="Straight Arrow Connector 49">
+            <a:extLst>
+              <a:ext uri="{FF2B5EF4-FFF2-40B4-BE49-F238E27FC236}">
+                <a16:creationId xmlns:a16="http://schemas.microsoft.com/office/drawing/2014/main" id="{1C570875-FA04-5983-08A4-9CD3F7198087}"/>
+              </a:ext>
+            </a:extLst>
+          </p:cNvPr>
+          <p:cNvCxnSpPr>
+            <a:cxnSpLocks/>
+            <a:stCxn id="49" idx="6"/>
+            <a:endCxn id="61" idx="3"/>
+          </p:cNvCxnSpPr>
+          <p:nvPr/>
+        </p:nvCxnSpPr>
+        <p:spPr>
+          <a:xfrm flipV="1">
+            <a:off x="9737446" y="4143385"/>
+            <a:ext cx="1208754" cy="939634"/>
+          </a:xfrm>
+          <a:prstGeom prst="straightConnector1">
+            <a:avLst/>
+          </a:prstGeom>
+          <a:ln>
+            <a:tailEnd type="triangle" w="lg" len="lg"/>
+          </a:ln>
+        </p:spPr>
+        <p:style>
+          <a:lnRef idx="2">
+            <a:schemeClr val="accent1"/>
+          </a:lnRef>
+          <a:fillRef idx="0">
+            <a:schemeClr val="accent1"/>
+          </a:fillRef>
+          <a:effectRef idx="1">
+            <a:schemeClr val="accent1"/>
+          </a:effectRef>
+          <a:fontRef idx="minor">
+            <a:schemeClr val="tx1"/>
+          </a:fontRef>
+        </p:style>
+      </p:cxnSp>
+      <p:cxnSp>
+        <p:nvCxnSpPr>
+          <p:cNvPr id="51" name="Straight Arrow Connector 50">
+            <a:extLst>
+              <a:ext uri="{FF2B5EF4-FFF2-40B4-BE49-F238E27FC236}">
+                <a16:creationId xmlns:a16="http://schemas.microsoft.com/office/drawing/2014/main" id="{6B4E7AA1-3299-D0A5-38F4-0607CDAE63AA}"/>
+              </a:ext>
+            </a:extLst>
+          </p:cNvPr>
+          <p:cNvCxnSpPr>
+            <a:cxnSpLocks/>
+            <a:stCxn id="48" idx="6"/>
+            <a:endCxn id="61" idx="1"/>
+          </p:cNvCxnSpPr>
+          <p:nvPr/>
+        </p:nvCxnSpPr>
+        <p:spPr>
+          <a:xfrm>
+            <a:off x="9726016" y="2880427"/>
+            <a:ext cx="1220184" cy="921565"/>
+          </a:xfrm>
+          <a:prstGeom prst="straightConnector1">
+            <a:avLst/>
+          </a:prstGeom>
+          <a:ln>
+            <a:tailEnd type="triangle" w="lg" len="lg"/>
+          </a:ln>
+        </p:spPr>
+        <p:style>
+          <a:lnRef idx="2">
+            <a:schemeClr val="accent1"/>
+          </a:lnRef>
+          <a:fillRef idx="0">
+            <a:schemeClr val="accent1"/>
+          </a:fillRef>
+          <a:effectRef idx="1">
+            <a:schemeClr val="accent1"/>
+          </a:effectRef>
+          <a:fontRef idx="minor">
+            <a:schemeClr val="tx1"/>
+          </a:fontRef>
+        </p:style>
+      </p:cxnSp>
+      <mc:AlternateContent xmlns:mc="http://schemas.openxmlformats.org/markup-compatibility/2006">
+        <mc:Choice xmlns:a14="http://schemas.microsoft.com/office/drawing/2010/main" Requires="a14">
+          <p:sp>
+            <p:nvSpPr>
+              <p:cNvPr id="52" name="TextBox 51">
+                <a:extLst>
+                  <a:ext uri="{FF2B5EF4-FFF2-40B4-BE49-F238E27FC236}">
+                    <a16:creationId xmlns:a16="http://schemas.microsoft.com/office/drawing/2014/main" id="{12D5619C-07E5-3A24-75A8-7F054F67BDFA}"/>
+                  </a:ext>
+                </a:extLst>
+              </p:cNvPr>
+              <p:cNvSpPr txBox="1"/>
+              <p:nvPr/>
+            </p:nvSpPr>
+            <p:spPr>
+              <a:xfrm>
+                <a:off x="10093467" y="2754238"/>
+                <a:ext cx="1006792" cy="461665"/>
+              </a:xfrm>
+              <a:prstGeom prst="rect">
+                <a:avLst/>
+              </a:prstGeom>
+              <a:noFill/>
+            </p:spPr>
+            <p:txBody>
+              <a:bodyPr wrap="square">
+                <a:spAutoFit/>
+              </a:bodyPr>
+              <a:lstStyle/>
+              <a:p>
+                <a:pPr/>
+                <a14:m>
+                  <m:oMathPara xmlns:m="http://schemas.openxmlformats.org/officeDocument/2006/math">
+                    <m:oMathParaPr>
+                      <m:jc m:val="centerGroup"/>
+                    </m:oMathParaPr>
+                    <m:oMath xmlns:m="http://schemas.openxmlformats.org/officeDocument/2006/math">
+                      <m:sSub>
+                        <m:sSubPr>
+                          <m:ctrlPr>
+                            <a:rPr lang="de-DE" sz="2400" i="1" smtClean="0">
+                              <a:solidFill>
+                                <a:srgbClr val="C00000"/>
+                              </a:solidFill>
+                              <a:latin typeface="Cambria Math" panose="02040503050406030204" pitchFamily="18" charset="0"/>
+                            </a:rPr>
+                          </m:ctrlPr>
+                        </m:sSubPr>
+                        <m:e>
+                          <m:r>
+                            <m:rPr>
+                              <m:sty m:val="p"/>
+                            </m:rPr>
+                            <a:rPr lang="de-DE" sz="2400" b="0" i="0" smtClean="0">
+                              <a:solidFill>
+                                <a:srgbClr val="C00000"/>
+                              </a:solidFill>
+                              <a:latin typeface="Cambria Math" panose="02040503050406030204" pitchFamily="18" charset="0"/>
+                            </a:rPr>
+                            <m:t>m</m:t>
+                          </m:r>
+                        </m:e>
+                        <m:sub>
+                          <m:r>
+                            <a:rPr lang="de-DE" sz="2400" b="0" i="1" smtClean="0">
+                              <a:solidFill>
+                                <a:srgbClr val="C00000"/>
+                              </a:solidFill>
+                              <a:latin typeface="Cambria Math" panose="02040503050406030204" pitchFamily="18" charset="0"/>
+                            </a:rPr>
+                            <m:t>4</m:t>
+                          </m:r>
+                        </m:sub>
+                      </m:sSub>
+                    </m:oMath>
+                  </m:oMathPara>
+                </a14:m>
+                <a:endParaRPr lang="en-US" sz="2400" dirty="0">
+                  <a:solidFill>
+                    <a:schemeClr val="tx1"/>
+                  </a:solidFill>
+                </a:endParaRPr>
+              </a:p>
+            </p:txBody>
+          </p:sp>
+        </mc:Choice>
+        <mc:Fallback>
+          <p:sp>
+            <p:nvSpPr>
+              <p:cNvPr id="52" name="TextBox 51">
+                <a:extLst>
+                  <a:ext uri="{FF2B5EF4-FFF2-40B4-BE49-F238E27FC236}">
+                    <a16:creationId xmlns:a16="http://schemas.microsoft.com/office/drawing/2014/main" id="{12D5619C-07E5-3A24-75A8-7F054F67BDFA}"/>
+                  </a:ext>
+                </a:extLst>
+              </p:cNvPr>
+              <p:cNvSpPr txBox="1">
+                <a:spLocks noRot="1" noChangeAspect="1" noMove="1" noResize="1" noEditPoints="1" noAdjustHandles="1" noChangeArrowheads="1" noChangeShapeType="1" noTextEdit="1"/>
+              </p:cNvSpPr>
+              <p:nvPr/>
+            </p:nvSpPr>
+            <p:spPr>
+              <a:xfrm>
+                <a:off x="10093467" y="2754238"/>
+                <a:ext cx="1006792" cy="461665"/>
+              </a:xfrm>
+              <a:prstGeom prst="rect">
+                <a:avLst/>
+              </a:prstGeom>
+              <a:blipFill>
+                <a:blip r:embed="rId5"/>
+                <a:stretch>
+                  <a:fillRect/>
+                </a:stretch>
+              </a:blipFill>
+            </p:spPr>
+            <p:txBody>
+              <a:bodyPr/>
+              <a:lstStyle/>
+              <a:p>
+                <a:r>
+                  <a:rPr lang="en-US">
+                    <a:noFill/>
+                  </a:rPr>
+                  <a:t> </a:t>
+                </a:r>
+              </a:p>
+            </p:txBody>
+          </p:sp>
+        </mc:Fallback>
+      </mc:AlternateContent>
+      <mc:AlternateContent xmlns:mc="http://schemas.openxmlformats.org/markup-compatibility/2006">
+        <mc:Choice xmlns:a14="http://schemas.microsoft.com/office/drawing/2010/main" Requires="a14">
+          <p:sp>
+            <p:nvSpPr>
+              <p:cNvPr id="53" name="TextBox 52">
+                <a:extLst>
+                  <a:ext uri="{FF2B5EF4-FFF2-40B4-BE49-F238E27FC236}">
+                    <a16:creationId xmlns:a16="http://schemas.microsoft.com/office/drawing/2014/main" id="{EE527C76-CE34-2DE5-13B7-8858B3AF5588}"/>
+                  </a:ext>
+                </a:extLst>
+              </p:cNvPr>
+              <p:cNvSpPr txBox="1"/>
+              <p:nvPr/>
+            </p:nvSpPr>
+            <p:spPr>
+              <a:xfrm>
+                <a:off x="10162053" y="4553013"/>
+                <a:ext cx="1006792" cy="461665"/>
+              </a:xfrm>
+              <a:prstGeom prst="rect">
+                <a:avLst/>
+              </a:prstGeom>
+              <a:noFill/>
+            </p:spPr>
+            <p:txBody>
+              <a:bodyPr wrap="square">
+                <a:spAutoFit/>
+              </a:bodyPr>
+              <a:lstStyle/>
+              <a:p>
+                <a:pPr/>
+                <a14:m>
+                  <m:oMathPara xmlns:m="http://schemas.openxmlformats.org/officeDocument/2006/math">
+                    <m:oMathParaPr>
+                      <m:jc m:val="centerGroup"/>
+                    </m:oMathParaPr>
+                    <m:oMath xmlns:m="http://schemas.openxmlformats.org/officeDocument/2006/math">
+                      <m:sSub>
+                        <m:sSubPr>
+                          <m:ctrlPr>
+                            <a:rPr lang="de-DE" sz="2400" i="1" smtClean="0">
+                              <a:solidFill>
+                                <a:srgbClr val="C00000"/>
+                              </a:solidFill>
+                              <a:latin typeface="Cambria Math" panose="02040503050406030204" pitchFamily="18" charset="0"/>
+                            </a:rPr>
+                          </m:ctrlPr>
+                        </m:sSubPr>
+                        <m:e>
+                          <m:r>
+                            <m:rPr>
+                              <m:sty m:val="p"/>
+                            </m:rPr>
+                            <a:rPr lang="de-DE" sz="2400" b="0" i="0" smtClean="0">
+                              <a:solidFill>
+                                <a:srgbClr val="C00000"/>
+                              </a:solidFill>
+                              <a:latin typeface="Cambria Math" panose="02040503050406030204" pitchFamily="18" charset="0"/>
+                            </a:rPr>
+                            <m:t>m</m:t>
+                          </m:r>
+                        </m:e>
+                        <m:sub>
+                          <m:r>
+                            <a:rPr lang="de-DE" sz="2400" b="0" i="1" smtClean="0">
+                              <a:solidFill>
+                                <a:srgbClr val="C00000"/>
+                              </a:solidFill>
+                              <a:latin typeface="Cambria Math" panose="02040503050406030204" pitchFamily="18" charset="0"/>
+                            </a:rPr>
+                            <m:t>4</m:t>
+                          </m:r>
+                        </m:sub>
+                      </m:sSub>
+                    </m:oMath>
+                  </m:oMathPara>
+                </a14:m>
+                <a:endParaRPr lang="en-US" sz="2400" dirty="0">
+                  <a:solidFill>
+                    <a:schemeClr val="tx1"/>
+                  </a:solidFill>
+                </a:endParaRPr>
+              </a:p>
+            </p:txBody>
+          </p:sp>
+        </mc:Choice>
+        <mc:Fallback>
+          <p:sp>
+            <p:nvSpPr>
+              <p:cNvPr id="53" name="TextBox 52">
+                <a:extLst>
+                  <a:ext uri="{FF2B5EF4-FFF2-40B4-BE49-F238E27FC236}">
+                    <a16:creationId xmlns:a16="http://schemas.microsoft.com/office/drawing/2014/main" id="{EE527C76-CE34-2DE5-13B7-8858B3AF5588}"/>
+                  </a:ext>
+                </a:extLst>
+              </p:cNvPr>
+              <p:cNvSpPr txBox="1">
+                <a:spLocks noRot="1" noChangeAspect="1" noMove="1" noResize="1" noEditPoints="1" noAdjustHandles="1" noChangeArrowheads="1" noChangeShapeType="1" noTextEdit="1"/>
+              </p:cNvSpPr>
+              <p:nvPr/>
+            </p:nvSpPr>
+            <p:spPr>
+              <a:xfrm>
+                <a:off x="10162053" y="4553013"/>
+                <a:ext cx="1006792" cy="461665"/>
+              </a:xfrm>
+              <a:prstGeom prst="rect">
+                <a:avLst/>
+              </a:prstGeom>
+              <a:blipFill>
+                <a:blip r:embed="rId6"/>
+                <a:stretch>
+                  <a:fillRect/>
+                </a:stretch>
+              </a:blipFill>
+            </p:spPr>
+            <p:txBody>
+              <a:bodyPr/>
+              <a:lstStyle/>
+              <a:p>
+                <a:r>
+                  <a:rPr lang="en-US">
+                    <a:noFill/>
+                  </a:rPr>
+                  <a:t> </a:t>
+                </a:r>
+              </a:p>
+            </p:txBody>
+          </p:sp>
+        </mc:Fallback>
+      </mc:AlternateContent>
+      <mc:AlternateContent xmlns:mc="http://schemas.openxmlformats.org/markup-compatibility/2006">
+        <mc:Choice xmlns:a14="http://schemas.microsoft.com/office/drawing/2010/main" Requires="a14">
+          <p:sp>
+            <p:nvSpPr>
+              <p:cNvPr id="54" name="TextBox 53">
+                <a:extLst>
+                  <a:ext uri="{FF2B5EF4-FFF2-40B4-BE49-F238E27FC236}">
+                    <a16:creationId xmlns:a16="http://schemas.microsoft.com/office/drawing/2014/main" id="{A160E4DF-CAE3-24B0-F913-7684C9DD8037}"/>
+                  </a:ext>
+                </a:extLst>
+              </p:cNvPr>
+              <p:cNvSpPr txBox="1"/>
+              <p:nvPr/>
+            </p:nvSpPr>
+            <p:spPr>
+              <a:xfrm>
+                <a:off x="7780858" y="2712893"/>
+                <a:ext cx="1006792" cy="461665"/>
+              </a:xfrm>
+              <a:prstGeom prst="rect">
+                <a:avLst/>
+              </a:prstGeom>
+              <a:noFill/>
+            </p:spPr>
+            <p:txBody>
+              <a:bodyPr wrap="square">
+                <a:spAutoFit/>
+              </a:bodyPr>
+              <a:lstStyle/>
+              <a:p>
+                <a:pPr/>
+                <a14:m>
+                  <m:oMathPara xmlns:m="http://schemas.openxmlformats.org/officeDocument/2006/math">
+                    <m:oMathParaPr>
+                      <m:jc m:val="centerGroup"/>
+                    </m:oMathParaPr>
+                    <m:oMath xmlns:m="http://schemas.openxmlformats.org/officeDocument/2006/math">
+                      <m:sSub>
+                        <m:sSubPr>
+                          <m:ctrlPr>
+                            <a:rPr lang="de-DE" sz="2400" i="1" smtClean="0">
+                              <a:solidFill>
+                                <a:srgbClr val="0070C0"/>
+                              </a:solidFill>
+                              <a:latin typeface="Cambria Math" panose="02040503050406030204" pitchFamily="18" charset="0"/>
+                            </a:rPr>
+                          </m:ctrlPr>
+                        </m:sSubPr>
+                        <m:e>
+                          <m:r>
+                            <m:rPr>
+                              <m:sty m:val="p"/>
+                            </m:rPr>
+                            <a:rPr lang="de-DE" sz="2400" b="0" i="0" smtClean="0">
+                              <a:solidFill>
+                                <a:srgbClr val="0070C0"/>
+                              </a:solidFill>
+                              <a:latin typeface="Cambria Math" panose="02040503050406030204" pitchFamily="18" charset="0"/>
+                            </a:rPr>
+                            <m:t>m</m:t>
+                          </m:r>
+                        </m:e>
+                        <m:sub>
+                          <m:r>
+                            <a:rPr lang="de-DE" sz="2400" b="0" i="1" smtClean="0">
+                              <a:solidFill>
+                                <a:srgbClr val="0070C0"/>
+                              </a:solidFill>
+                              <a:latin typeface="Cambria Math" panose="02040503050406030204" pitchFamily="18" charset="0"/>
+                            </a:rPr>
+                            <m:t>2</m:t>
+                          </m:r>
+                        </m:sub>
+                      </m:sSub>
+                    </m:oMath>
+                  </m:oMathPara>
+                </a14:m>
+                <a:endParaRPr lang="en-US" sz="2400" dirty="0">
+                  <a:solidFill>
+                    <a:schemeClr val="tx1"/>
+                  </a:solidFill>
+                </a:endParaRPr>
+              </a:p>
+            </p:txBody>
+          </p:sp>
+        </mc:Choice>
+        <mc:Fallback>
+          <p:sp>
+            <p:nvSpPr>
+              <p:cNvPr id="54" name="TextBox 53">
+                <a:extLst>
+                  <a:ext uri="{FF2B5EF4-FFF2-40B4-BE49-F238E27FC236}">
+                    <a16:creationId xmlns:a16="http://schemas.microsoft.com/office/drawing/2014/main" id="{A160E4DF-CAE3-24B0-F913-7684C9DD8037}"/>
+                  </a:ext>
+                </a:extLst>
+              </p:cNvPr>
+              <p:cNvSpPr txBox="1">
+                <a:spLocks noRot="1" noChangeAspect="1" noMove="1" noResize="1" noEditPoints="1" noAdjustHandles="1" noChangeArrowheads="1" noChangeShapeType="1" noTextEdit="1"/>
+              </p:cNvSpPr>
+              <p:nvPr/>
+            </p:nvSpPr>
+            <p:spPr>
+              <a:xfrm>
+                <a:off x="7780858" y="2712893"/>
+                <a:ext cx="1006792" cy="461665"/>
+              </a:xfrm>
+              <a:prstGeom prst="rect">
+                <a:avLst/>
+              </a:prstGeom>
+              <a:blipFill>
+                <a:blip r:embed="rId7"/>
+                <a:stretch>
+                  <a:fillRect/>
+                </a:stretch>
+              </a:blipFill>
+            </p:spPr>
+            <p:txBody>
+              <a:bodyPr/>
+              <a:lstStyle/>
+              <a:p>
+                <a:r>
+                  <a:rPr lang="en-US">
+                    <a:noFill/>
+                  </a:rPr>
+                  <a:t> </a:t>
+                </a:r>
+              </a:p>
+            </p:txBody>
+          </p:sp>
+        </mc:Fallback>
+      </mc:AlternateContent>
+      <mc:AlternateContent xmlns:mc="http://schemas.openxmlformats.org/markup-compatibility/2006">
+        <mc:Choice xmlns:a14="http://schemas.microsoft.com/office/drawing/2010/main" Requires="a14">
+          <p:sp>
+            <p:nvSpPr>
+              <p:cNvPr id="55" name="TextBox 54">
+                <a:extLst>
+                  <a:ext uri="{FF2B5EF4-FFF2-40B4-BE49-F238E27FC236}">
+                    <a16:creationId xmlns:a16="http://schemas.microsoft.com/office/drawing/2014/main" id="{A64B5B1A-1541-DCA8-34F8-DC0758820845}"/>
+                  </a:ext>
+                </a:extLst>
+              </p:cNvPr>
+              <p:cNvSpPr txBox="1"/>
+              <p:nvPr/>
+            </p:nvSpPr>
+            <p:spPr>
+              <a:xfrm>
+                <a:off x="7821640" y="4556777"/>
+                <a:ext cx="1006792" cy="461665"/>
+              </a:xfrm>
+              <a:prstGeom prst="rect">
+                <a:avLst/>
+              </a:prstGeom>
+              <a:noFill/>
+            </p:spPr>
+            <p:txBody>
+              <a:bodyPr wrap="square">
+                <a:spAutoFit/>
+              </a:bodyPr>
+              <a:lstStyle/>
+              <a:p>
+                <a:pPr/>
+                <a14:m>
+                  <m:oMathPara xmlns:m="http://schemas.openxmlformats.org/officeDocument/2006/math">
+                    <m:oMathParaPr>
+                      <m:jc m:val="centerGroup"/>
+                    </m:oMathParaPr>
+                    <m:oMath xmlns:m="http://schemas.openxmlformats.org/officeDocument/2006/math">
+                      <m:sSub>
+                        <m:sSubPr>
+                          <m:ctrlPr>
+                            <a:rPr lang="de-DE" sz="2400" i="1" smtClean="0">
+                              <a:solidFill>
+                                <a:schemeClr val="accent6">
+                                  <a:lumMod val="75000"/>
+                                </a:schemeClr>
+                              </a:solidFill>
+                              <a:latin typeface="Cambria Math" panose="02040503050406030204" pitchFamily="18" charset="0"/>
+                            </a:rPr>
+                          </m:ctrlPr>
+                        </m:sSubPr>
+                        <m:e>
+                          <m:r>
+                            <m:rPr>
+                              <m:sty m:val="p"/>
+                            </m:rPr>
+                            <a:rPr lang="de-DE" sz="2400" b="0" i="0" smtClean="0">
+                              <a:solidFill>
+                                <a:schemeClr val="accent6">
+                                  <a:lumMod val="75000"/>
+                                </a:schemeClr>
+                              </a:solidFill>
+                              <a:latin typeface="Cambria Math" panose="02040503050406030204" pitchFamily="18" charset="0"/>
+                            </a:rPr>
+                            <m:t>m</m:t>
+                          </m:r>
+                        </m:e>
+                        <m:sub>
+                          <m:r>
+                            <a:rPr lang="de-DE" sz="2400" b="0" i="1" smtClean="0">
+                              <a:solidFill>
+                                <a:schemeClr val="accent6">
+                                  <a:lumMod val="75000"/>
+                                </a:schemeClr>
+                              </a:solidFill>
+                              <a:latin typeface="Cambria Math" panose="02040503050406030204" pitchFamily="18" charset="0"/>
+                            </a:rPr>
+                            <m:t>3</m:t>
+                          </m:r>
+                        </m:sub>
+                      </m:sSub>
+                    </m:oMath>
+                  </m:oMathPara>
+                </a14:m>
+                <a:endParaRPr lang="en-US" sz="2400" dirty="0">
+                  <a:solidFill>
+                    <a:schemeClr val="tx1"/>
+                  </a:solidFill>
+                </a:endParaRPr>
+              </a:p>
+            </p:txBody>
+          </p:sp>
+        </mc:Choice>
+        <mc:Fallback>
+          <p:sp>
+            <p:nvSpPr>
+              <p:cNvPr id="55" name="TextBox 54">
+                <a:extLst>
+                  <a:ext uri="{FF2B5EF4-FFF2-40B4-BE49-F238E27FC236}">
+                    <a16:creationId xmlns:a16="http://schemas.microsoft.com/office/drawing/2014/main" id="{A64B5B1A-1541-DCA8-34F8-DC0758820845}"/>
+                  </a:ext>
+                </a:extLst>
+              </p:cNvPr>
+              <p:cNvSpPr txBox="1">
+                <a:spLocks noRot="1" noChangeAspect="1" noMove="1" noResize="1" noEditPoints="1" noAdjustHandles="1" noChangeArrowheads="1" noChangeShapeType="1" noTextEdit="1"/>
+              </p:cNvSpPr>
+              <p:nvPr/>
+            </p:nvSpPr>
+            <p:spPr>
+              <a:xfrm>
+                <a:off x="7821640" y="4556777"/>
+                <a:ext cx="1006792" cy="461665"/>
+              </a:xfrm>
+              <a:prstGeom prst="rect">
+                <a:avLst/>
+              </a:prstGeom>
+              <a:blipFill>
+                <a:blip r:embed="rId8"/>
+                <a:stretch>
+                  <a:fillRect/>
+                </a:stretch>
+              </a:blipFill>
+            </p:spPr>
+            <p:txBody>
+              <a:bodyPr/>
+              <a:lstStyle/>
+              <a:p>
+                <a:r>
+                  <a:rPr lang="en-US">
+                    <a:noFill/>
+                  </a:rPr>
+                  <a:t> </a:t>
+                </a:r>
+              </a:p>
+            </p:txBody>
+          </p:sp>
+        </mc:Fallback>
+      </mc:AlternateContent>
+      <p:sp>
+        <p:nvSpPr>
+          <p:cNvPr id="56" name="Oval 55">
+            <a:extLst>
+              <a:ext uri="{FF2B5EF4-FFF2-40B4-BE49-F238E27FC236}">
+                <a16:creationId xmlns:a16="http://schemas.microsoft.com/office/drawing/2014/main" id="{A0117D18-8DB2-37E0-D8C7-975965FBBAB4}"/>
+              </a:ext>
+            </a:extLst>
+          </p:cNvPr>
+          <p:cNvSpPr>
+            <a:spLocks noChangeAspect="1"/>
+          </p:cNvSpPr>
+          <p:nvPr/>
+        </p:nvSpPr>
+        <p:spPr>
+          <a:xfrm>
+            <a:off x="7421719" y="3731287"/>
+            <a:ext cx="482803" cy="482803"/>
+          </a:xfrm>
+          <a:prstGeom prst="ellipse">
+            <a:avLst/>
+          </a:prstGeom>
+        </p:spPr>
+        <p:style>
+          <a:lnRef idx="2">
+            <a:schemeClr val="accent1">
+              <a:shade val="15000"/>
+            </a:schemeClr>
+          </a:lnRef>
+          <a:fillRef idx="1">
+            <a:schemeClr val="accent1"/>
+          </a:fillRef>
+          <a:effectRef idx="0">
+            <a:schemeClr val="accent1"/>
+          </a:effectRef>
+          <a:fontRef idx="minor">
+            <a:schemeClr val="lt1"/>
+          </a:fontRef>
+        </p:style>
+        <p:txBody>
+          <a:bodyPr rtlCol="0" anchor="ctr"/>
+          <a:lstStyle/>
+          <a:p>
+            <a:pPr algn="ctr"/>
+            <a:endParaRPr lang="en-US"/>
+          </a:p>
+        </p:txBody>
+      </p:sp>
+      <p:cxnSp>
+        <p:nvCxnSpPr>
+          <p:cNvPr id="57" name="Straight Arrow Connector 56">
+            <a:extLst>
+              <a:ext uri="{FF2B5EF4-FFF2-40B4-BE49-F238E27FC236}">
+                <a16:creationId xmlns:a16="http://schemas.microsoft.com/office/drawing/2014/main" id="{5CF489CC-2598-77BA-3929-F6D82A31D9F8}"/>
+              </a:ext>
+            </a:extLst>
+          </p:cNvPr>
+          <p:cNvCxnSpPr>
+            <a:cxnSpLocks/>
+            <a:stCxn id="56" idx="7"/>
+            <a:endCxn id="48" idx="2"/>
+          </p:cNvCxnSpPr>
+          <p:nvPr/>
+        </p:nvCxnSpPr>
+        <p:spPr>
+          <a:xfrm flipV="1">
+            <a:off x="7833817" y="2880427"/>
+            <a:ext cx="1409396" cy="921565"/>
+          </a:xfrm>
+          <a:prstGeom prst="straightConnector1">
+            <a:avLst/>
+          </a:prstGeom>
+          <a:ln>
+            <a:tailEnd type="triangle" w="lg" len="lg"/>
+          </a:ln>
+        </p:spPr>
+        <p:style>
+          <a:lnRef idx="2">
+            <a:schemeClr val="accent1"/>
+          </a:lnRef>
+          <a:fillRef idx="0">
+            <a:schemeClr val="accent1"/>
+          </a:fillRef>
+          <a:effectRef idx="1">
+            <a:schemeClr val="accent1"/>
+          </a:effectRef>
+          <a:fontRef idx="minor">
+            <a:schemeClr val="tx1"/>
+          </a:fontRef>
+        </p:style>
+      </p:cxnSp>
+      <mc:AlternateContent xmlns:mc="http://schemas.openxmlformats.org/markup-compatibility/2006">
+        <mc:Choice xmlns:a14="http://schemas.microsoft.com/office/drawing/2010/main" Requires="a14">
+          <p:sp>
+            <p:nvSpPr>
+              <p:cNvPr id="58" name="TextBox 57">
+                <a:extLst>
+                  <a:ext uri="{FF2B5EF4-FFF2-40B4-BE49-F238E27FC236}">
+                    <a16:creationId xmlns:a16="http://schemas.microsoft.com/office/drawing/2014/main" id="{D8BDDC60-A96B-BAAE-A671-068F13349521}"/>
+                  </a:ext>
+                </a:extLst>
+              </p:cNvPr>
+              <p:cNvSpPr txBox="1"/>
+              <p:nvPr/>
+            </p:nvSpPr>
+            <p:spPr>
+              <a:xfrm>
+                <a:off x="6681486" y="3500454"/>
+                <a:ext cx="642780" cy="461665"/>
+              </a:xfrm>
+              <a:prstGeom prst="rect">
+                <a:avLst/>
+              </a:prstGeom>
+              <a:noFill/>
+            </p:spPr>
+            <p:txBody>
+              <a:bodyPr wrap="square">
+                <a:spAutoFit/>
+              </a:bodyPr>
+              <a:lstStyle/>
+              <a:p>
+                <a:pPr/>
+                <a14:m>
+                  <m:oMathPara xmlns:m="http://schemas.openxmlformats.org/officeDocument/2006/math">
+                    <m:oMathParaPr>
+                      <m:jc m:val="centerGroup"/>
+                    </m:oMathParaPr>
+                    <m:oMath xmlns:m="http://schemas.openxmlformats.org/officeDocument/2006/math">
+                      <m:sSub>
+                        <m:sSubPr>
+                          <m:ctrlPr>
+                            <a:rPr lang="de-DE" sz="2400" i="1" smtClean="0">
+                              <a:solidFill>
+                                <a:schemeClr val="tx1"/>
+                              </a:solidFill>
+                              <a:latin typeface="Cambria Math" panose="02040503050406030204" pitchFamily="18" charset="0"/>
+                            </a:rPr>
+                          </m:ctrlPr>
+                        </m:sSubPr>
+                        <m:e>
+                          <m:r>
+                            <m:rPr>
+                              <m:sty m:val="p"/>
+                            </m:rPr>
+                            <a:rPr lang="de-DE" sz="2400" b="0" i="0" smtClean="0">
+                              <a:solidFill>
+                                <a:schemeClr val="tx1"/>
+                              </a:solidFill>
+                              <a:latin typeface="Cambria Math" panose="02040503050406030204" pitchFamily="18" charset="0"/>
+                            </a:rPr>
+                            <m:t>m</m:t>
+                          </m:r>
+                        </m:e>
+                        <m:sub>
+                          <m:r>
+                            <a:rPr lang="de-DE" sz="2400" b="0" i="1" smtClean="0">
+                              <a:solidFill>
+                                <a:schemeClr val="tx1"/>
+                              </a:solidFill>
+                              <a:latin typeface="Cambria Math" panose="02040503050406030204" pitchFamily="18" charset="0"/>
+                            </a:rPr>
+                            <m:t>1</m:t>
+                          </m:r>
+                        </m:sub>
+                      </m:sSub>
+                    </m:oMath>
+                  </m:oMathPara>
+                </a14:m>
+                <a:endParaRPr lang="en-US" sz="2400" dirty="0">
+                  <a:solidFill>
+                    <a:schemeClr val="tx1"/>
+                  </a:solidFill>
+                </a:endParaRPr>
+              </a:p>
+            </p:txBody>
+          </p:sp>
+        </mc:Choice>
+        <mc:Fallback>
+          <p:sp>
+            <p:nvSpPr>
+              <p:cNvPr id="58" name="TextBox 57">
+                <a:extLst>
+                  <a:ext uri="{FF2B5EF4-FFF2-40B4-BE49-F238E27FC236}">
+                    <a16:creationId xmlns:a16="http://schemas.microsoft.com/office/drawing/2014/main" id="{D8BDDC60-A96B-BAAE-A671-068F13349521}"/>
+                  </a:ext>
+                </a:extLst>
+              </p:cNvPr>
+              <p:cNvSpPr txBox="1">
+                <a:spLocks noRot="1" noChangeAspect="1" noMove="1" noResize="1" noEditPoints="1" noAdjustHandles="1" noChangeArrowheads="1" noChangeShapeType="1" noTextEdit="1"/>
+              </p:cNvSpPr>
+              <p:nvPr/>
+            </p:nvSpPr>
+            <p:spPr>
+              <a:xfrm>
+                <a:off x="6681486" y="3500454"/>
+                <a:ext cx="642780" cy="461665"/>
+              </a:xfrm>
+              <a:prstGeom prst="rect">
+                <a:avLst/>
+              </a:prstGeom>
+              <a:blipFill>
+                <a:blip r:embed="rId9"/>
+                <a:stretch>
+                  <a:fillRect/>
+                </a:stretch>
+              </a:blipFill>
+            </p:spPr>
+            <p:txBody>
+              <a:bodyPr/>
+              <a:lstStyle/>
+              <a:p>
+                <a:r>
+                  <a:rPr lang="en-US">
+                    <a:noFill/>
+                  </a:rPr>
+                  <a:t> </a:t>
+                </a:r>
+              </a:p>
+            </p:txBody>
+          </p:sp>
+        </mc:Fallback>
+      </mc:AlternateContent>
+      <p:cxnSp>
+        <p:nvCxnSpPr>
+          <p:cNvPr id="59" name="Straight Arrow Connector 58">
+            <a:extLst>
+              <a:ext uri="{FF2B5EF4-FFF2-40B4-BE49-F238E27FC236}">
+                <a16:creationId xmlns:a16="http://schemas.microsoft.com/office/drawing/2014/main" id="{31EBB81A-06DA-29CA-4D4F-3035101FC845}"/>
+              </a:ext>
+            </a:extLst>
+          </p:cNvPr>
+          <p:cNvCxnSpPr>
+            <a:cxnSpLocks/>
+          </p:cNvCxnSpPr>
+          <p:nvPr/>
+        </p:nvCxnSpPr>
+        <p:spPr>
+          <a:xfrm>
+            <a:off x="6746736" y="3962119"/>
+            <a:ext cx="665312" cy="0"/>
+          </a:xfrm>
+          <a:prstGeom prst="straightConnector1">
+            <a:avLst/>
+          </a:prstGeom>
+          <a:ln>
+            <a:tailEnd type="triangle" w="lg" len="lg"/>
+          </a:ln>
+        </p:spPr>
+        <p:style>
+          <a:lnRef idx="2">
+            <a:schemeClr val="accent1"/>
+          </a:lnRef>
+          <a:fillRef idx="0">
+            <a:schemeClr val="accent1"/>
+          </a:fillRef>
+          <a:effectRef idx="1">
+            <a:schemeClr val="accent1"/>
+          </a:effectRef>
+          <a:fontRef idx="minor">
+            <a:schemeClr val="tx1"/>
+          </a:fontRef>
+        </p:style>
+      </p:cxnSp>
+      <p:cxnSp>
+        <p:nvCxnSpPr>
+          <p:cNvPr id="60" name="Straight Arrow Connector 59">
+            <a:extLst>
+              <a:ext uri="{FF2B5EF4-FFF2-40B4-BE49-F238E27FC236}">
+                <a16:creationId xmlns:a16="http://schemas.microsoft.com/office/drawing/2014/main" id="{80059042-5FBA-9A9C-171E-9CC239A92D15}"/>
+              </a:ext>
+            </a:extLst>
+          </p:cNvPr>
+          <p:cNvCxnSpPr>
+            <a:cxnSpLocks/>
+            <a:stCxn id="56" idx="5"/>
+            <a:endCxn id="49" idx="2"/>
+          </p:cNvCxnSpPr>
+          <p:nvPr/>
+        </p:nvCxnSpPr>
+        <p:spPr>
+          <a:xfrm>
+            <a:off x="7833817" y="4143385"/>
+            <a:ext cx="1420826" cy="939634"/>
+          </a:xfrm>
+          <a:prstGeom prst="straightConnector1">
+            <a:avLst/>
+          </a:prstGeom>
+          <a:ln>
+            <a:tailEnd type="triangle" w="lg" len="lg"/>
+          </a:ln>
+        </p:spPr>
+        <p:style>
+          <a:lnRef idx="2">
+            <a:schemeClr val="accent1"/>
+          </a:lnRef>
+          <a:fillRef idx="0">
+            <a:schemeClr val="accent1"/>
+          </a:fillRef>
+          <a:effectRef idx="1">
+            <a:schemeClr val="accent1"/>
+          </a:effectRef>
+          <a:fontRef idx="minor">
+            <a:schemeClr val="tx1"/>
+          </a:fontRef>
+        </p:style>
+      </p:cxnSp>
+      <p:sp>
+        <p:nvSpPr>
+          <p:cNvPr id="61" name="Oval 60">
+            <a:extLst>
+              <a:ext uri="{FF2B5EF4-FFF2-40B4-BE49-F238E27FC236}">
+                <a16:creationId xmlns:a16="http://schemas.microsoft.com/office/drawing/2014/main" id="{AF0D208A-3297-6E61-B6C6-E76ABA542FF0}"/>
+              </a:ext>
+            </a:extLst>
+          </p:cNvPr>
+          <p:cNvSpPr>
+            <a:spLocks noChangeAspect="1"/>
+          </p:cNvSpPr>
+          <p:nvPr/>
+        </p:nvSpPr>
+        <p:spPr>
+          <a:xfrm>
+            <a:off x="10875495" y="3731287"/>
+            <a:ext cx="482803" cy="482803"/>
+          </a:xfrm>
+          <a:prstGeom prst="ellipse">
+            <a:avLst/>
+          </a:prstGeom>
+        </p:spPr>
+        <p:style>
+          <a:lnRef idx="2">
+            <a:schemeClr val="accent1">
+              <a:shade val="15000"/>
+            </a:schemeClr>
+          </a:lnRef>
+          <a:fillRef idx="1">
+            <a:schemeClr val="accent1"/>
+          </a:fillRef>
+          <a:effectRef idx="0">
+            <a:schemeClr val="accent1"/>
+          </a:effectRef>
+          <a:fontRef idx="minor">
+            <a:schemeClr val="lt1"/>
+          </a:fontRef>
+        </p:style>
+        <p:txBody>
+          <a:bodyPr rtlCol="0" anchor="ctr"/>
+          <a:lstStyle/>
+          <a:p>
+            <a:pPr algn="ctr"/>
+            <a:endParaRPr lang="en-US"/>
+          </a:p>
+        </p:txBody>
+      </p:sp>
+      <p:cxnSp>
+        <p:nvCxnSpPr>
+          <p:cNvPr id="62" name="Straight Arrow Connector 61">
+            <a:extLst>
+              <a:ext uri="{FF2B5EF4-FFF2-40B4-BE49-F238E27FC236}">
+                <a16:creationId xmlns:a16="http://schemas.microsoft.com/office/drawing/2014/main" id="{06450E29-4B18-783F-8012-BD44F728A77C}"/>
+              </a:ext>
+            </a:extLst>
+          </p:cNvPr>
+          <p:cNvCxnSpPr>
+            <a:cxnSpLocks/>
+          </p:cNvCxnSpPr>
+          <p:nvPr/>
+        </p:nvCxnSpPr>
+        <p:spPr>
+          <a:xfrm>
+            <a:off x="11370173" y="4043938"/>
+            <a:ext cx="665312" cy="0"/>
+          </a:xfrm>
+          <a:prstGeom prst="straightConnector1">
+            <a:avLst/>
+          </a:prstGeom>
+          <a:ln>
+            <a:tailEnd type="triangle" w="lg" len="lg"/>
+          </a:ln>
+        </p:spPr>
+        <p:style>
+          <a:lnRef idx="2">
+            <a:schemeClr val="accent1"/>
+          </a:lnRef>
+          <a:fillRef idx="0">
+            <a:schemeClr val="accent1"/>
+          </a:fillRef>
+          <a:effectRef idx="1">
+            <a:schemeClr val="accent1"/>
+          </a:effectRef>
+          <a:fontRef idx="minor">
+            <a:schemeClr val="tx1"/>
+          </a:fontRef>
+        </p:style>
+      </p:cxnSp>
+      <mc:AlternateContent xmlns:mc="http://schemas.openxmlformats.org/markup-compatibility/2006">
+        <mc:Choice xmlns:a14="http://schemas.microsoft.com/office/drawing/2010/main" Requires="a14">
+          <p:sp>
+            <p:nvSpPr>
+              <p:cNvPr id="63" name="TextBox 62">
+                <a:extLst>
+                  <a:ext uri="{FF2B5EF4-FFF2-40B4-BE49-F238E27FC236}">
+                    <a16:creationId xmlns:a16="http://schemas.microsoft.com/office/drawing/2014/main" id="{1B99AFF1-891C-14CE-91BA-8474EF1F0C36}"/>
+                  </a:ext>
+                </a:extLst>
+              </p:cNvPr>
+              <p:cNvSpPr txBox="1"/>
+              <p:nvPr/>
+            </p:nvSpPr>
+            <p:spPr>
+              <a:xfrm>
+                <a:off x="11185208" y="3340327"/>
+                <a:ext cx="1006792" cy="461665"/>
+              </a:xfrm>
+              <a:prstGeom prst="rect">
+                <a:avLst/>
+              </a:prstGeom>
+              <a:noFill/>
+            </p:spPr>
+            <p:txBody>
+              <a:bodyPr wrap="square">
+                <a:spAutoFit/>
+              </a:bodyPr>
+              <a:lstStyle/>
+              <a:p>
+                <a:pPr/>
+                <a14:m>
+                  <m:oMathPara xmlns:m="http://schemas.openxmlformats.org/officeDocument/2006/math">
+                    <m:oMathParaPr>
+                      <m:jc m:val="centerGroup"/>
+                    </m:oMathParaPr>
+                    <m:oMath xmlns:m="http://schemas.openxmlformats.org/officeDocument/2006/math">
+                      <m:sSub>
+                        <m:sSubPr>
+                          <m:ctrlPr>
+                            <a:rPr lang="de-DE" sz="2400" b="0" i="1" smtClean="0">
+                              <a:latin typeface="Cambria Math" panose="02040503050406030204" pitchFamily="18" charset="0"/>
+                            </a:rPr>
+                          </m:ctrlPr>
+                        </m:sSubPr>
+                        <m:e>
+                          <m:r>
+                            <m:rPr>
+                              <m:sty m:val="p"/>
+                            </m:rPr>
+                            <a:rPr lang="de-DE" sz="2400" b="0" i="1" smtClean="0">
+                              <a:latin typeface="Cambria Math" panose="02040503050406030204" pitchFamily="18" charset="0"/>
+                            </a:rPr>
+                            <m:t>m</m:t>
+                          </m:r>
+                        </m:e>
+                        <m:sub>
+                          <m:r>
+                            <a:rPr lang="de-DE" sz="2400" b="0" i="1" smtClean="0">
+                              <a:latin typeface="Cambria Math" panose="02040503050406030204" pitchFamily="18" charset="0"/>
+                            </a:rPr>
+                            <m:t>5</m:t>
+                          </m:r>
+                        </m:sub>
+                      </m:sSub>
+                    </m:oMath>
+                  </m:oMathPara>
+                </a14:m>
+                <a:endParaRPr lang="en-US" sz="2400" dirty="0"/>
+              </a:p>
+            </p:txBody>
+          </p:sp>
+        </mc:Choice>
+        <mc:Fallback>
+          <p:sp>
+            <p:nvSpPr>
+              <p:cNvPr id="63" name="TextBox 62">
+                <a:extLst>
+                  <a:ext uri="{FF2B5EF4-FFF2-40B4-BE49-F238E27FC236}">
+                    <a16:creationId xmlns:a16="http://schemas.microsoft.com/office/drawing/2014/main" id="{1B99AFF1-891C-14CE-91BA-8474EF1F0C36}"/>
+                  </a:ext>
+                </a:extLst>
+              </p:cNvPr>
+              <p:cNvSpPr txBox="1">
+                <a:spLocks noRot="1" noChangeAspect="1" noMove="1" noResize="1" noEditPoints="1" noAdjustHandles="1" noChangeArrowheads="1" noChangeShapeType="1" noTextEdit="1"/>
+              </p:cNvSpPr>
+              <p:nvPr/>
+            </p:nvSpPr>
+            <p:spPr>
+              <a:xfrm>
+                <a:off x="11185208" y="3340327"/>
+                <a:ext cx="1006792" cy="461665"/>
+              </a:xfrm>
+              <a:prstGeom prst="rect">
+                <a:avLst/>
+              </a:prstGeom>
+              <a:blipFill>
+                <a:blip r:embed="rId10"/>
+                <a:stretch>
+                  <a:fillRect/>
+                </a:stretch>
+              </a:blipFill>
+            </p:spPr>
+            <p:txBody>
+              <a:bodyPr/>
+              <a:lstStyle/>
+              <a:p>
+                <a:r>
+                  <a:rPr lang="en-US">
+                    <a:noFill/>
+                  </a:rPr>
+                  <a:t> </a:t>
+                </a:r>
+              </a:p>
+            </p:txBody>
+          </p:sp>
+        </mc:Fallback>
+      </mc:AlternateContent>
+      <mc:AlternateContent xmlns:mc="http://schemas.openxmlformats.org/markup-compatibility/2006">
+        <mc:Choice xmlns:a14="http://schemas.microsoft.com/office/drawing/2010/main" Requires="a14">
+          <p:sp>
+            <p:nvSpPr>
+              <p:cNvPr id="64" name="TextBox 63">
+                <a:extLst>
+                  <a:ext uri="{FF2B5EF4-FFF2-40B4-BE49-F238E27FC236}">
+                    <a16:creationId xmlns:a16="http://schemas.microsoft.com/office/drawing/2014/main" id="{89269D2D-FF3E-67DF-2686-65BCB1C7F834}"/>
+                  </a:ext>
+                </a:extLst>
+              </p:cNvPr>
+              <p:cNvSpPr txBox="1"/>
+              <p:nvPr/>
+            </p:nvSpPr>
+            <p:spPr>
+              <a:xfrm>
+                <a:off x="10865547" y="3707087"/>
+                <a:ext cx="527465" cy="461665"/>
+              </a:xfrm>
+              <a:prstGeom prst="rect">
+                <a:avLst/>
+              </a:prstGeom>
+              <a:noFill/>
+            </p:spPr>
+            <p:txBody>
+              <a:bodyPr wrap="square">
+                <a:spAutoFit/>
+              </a:bodyPr>
+              <a:lstStyle/>
+              <a:p>
+                <a:pPr/>
+                <a14:m>
+                  <m:oMathPara xmlns:m="http://schemas.openxmlformats.org/officeDocument/2006/math">
+                    <m:oMathParaPr>
+                      <m:jc m:val="centerGroup"/>
+                    </m:oMathParaPr>
+                    <m:oMath xmlns:m="http://schemas.openxmlformats.org/officeDocument/2006/math">
+                      <m:sSub>
+                        <m:sSubPr>
+                          <m:ctrlPr>
+                            <a:rPr lang="de-DE" sz="2400" b="0" i="1" smtClean="0">
+                              <a:solidFill>
+                                <a:schemeClr val="bg1"/>
+                              </a:solidFill>
+                              <a:latin typeface="Cambria Math" panose="02040503050406030204" pitchFamily="18" charset="0"/>
+                            </a:rPr>
+                          </m:ctrlPr>
+                        </m:sSubPr>
+                        <m:e>
+                          <m:r>
+                            <m:rPr>
+                              <m:sty m:val="p"/>
+                            </m:rPr>
+                            <a:rPr lang="de-DE" sz="2400" b="0" i="1" smtClean="0">
+                              <a:solidFill>
+                                <a:schemeClr val="bg1"/>
+                              </a:solidFill>
+                              <a:latin typeface="Cambria Math" panose="02040503050406030204" pitchFamily="18" charset="0"/>
+                            </a:rPr>
+                            <m:t>r</m:t>
+                          </m:r>
+                        </m:e>
+                        <m:sub>
+                          <m:r>
+                            <a:rPr lang="de-DE" sz="2400" b="0" i="1" smtClean="0">
+                              <a:solidFill>
+                                <a:schemeClr val="bg1"/>
+                              </a:solidFill>
+                              <a:latin typeface="Cambria Math" panose="02040503050406030204" pitchFamily="18" charset="0"/>
+                            </a:rPr>
+                            <m:t>4</m:t>
+                          </m:r>
+                        </m:sub>
+                      </m:sSub>
+                    </m:oMath>
+                  </m:oMathPara>
+                </a14:m>
+                <a:endParaRPr lang="en-US" sz="2400" dirty="0">
+                  <a:solidFill>
+                    <a:schemeClr val="bg1"/>
+                  </a:solidFill>
+                </a:endParaRPr>
+              </a:p>
+            </p:txBody>
+          </p:sp>
+        </mc:Choice>
+        <mc:Fallback>
+          <p:sp>
+            <p:nvSpPr>
+              <p:cNvPr id="64" name="TextBox 63">
+                <a:extLst>
+                  <a:ext uri="{FF2B5EF4-FFF2-40B4-BE49-F238E27FC236}">
+                    <a16:creationId xmlns:a16="http://schemas.microsoft.com/office/drawing/2014/main" id="{89269D2D-FF3E-67DF-2686-65BCB1C7F834}"/>
+                  </a:ext>
+                </a:extLst>
+              </p:cNvPr>
+              <p:cNvSpPr txBox="1">
+                <a:spLocks noRot="1" noChangeAspect="1" noMove="1" noResize="1" noEditPoints="1" noAdjustHandles="1" noChangeArrowheads="1" noChangeShapeType="1" noTextEdit="1"/>
+              </p:cNvSpPr>
+              <p:nvPr/>
+            </p:nvSpPr>
+            <p:spPr>
+              <a:xfrm>
+                <a:off x="10865547" y="3707087"/>
+                <a:ext cx="527465" cy="461665"/>
+              </a:xfrm>
+              <a:prstGeom prst="rect">
+                <a:avLst/>
+              </a:prstGeom>
+              <a:blipFill>
+                <a:blip r:embed="rId11"/>
+                <a:stretch>
+                  <a:fillRect/>
+                </a:stretch>
+              </a:blipFill>
+            </p:spPr>
+            <p:txBody>
+              <a:bodyPr/>
+              <a:lstStyle/>
+              <a:p>
+                <a:r>
+                  <a:rPr lang="en-US">
+                    <a:noFill/>
+                  </a:rPr>
+                  <a:t> </a:t>
+                </a:r>
+              </a:p>
+            </p:txBody>
+          </p:sp>
+        </mc:Fallback>
+      </mc:AlternateContent>
+      <mc:AlternateContent xmlns:mc="http://schemas.openxmlformats.org/markup-compatibility/2006">
+        <mc:Choice xmlns:a14="http://schemas.microsoft.com/office/drawing/2010/main" Requires="a14">
+          <p:sp>
+            <p:nvSpPr>
+              <p:cNvPr id="65" name="TextBox 64">
+                <a:extLst>
+                  <a:ext uri="{FF2B5EF4-FFF2-40B4-BE49-F238E27FC236}">
+                    <a16:creationId xmlns:a16="http://schemas.microsoft.com/office/drawing/2014/main" id="{5D3C1859-8246-98F9-DCE1-853234CF86D2}"/>
+                  </a:ext>
+                </a:extLst>
+              </p:cNvPr>
+              <p:cNvSpPr txBox="1"/>
+              <p:nvPr/>
+            </p:nvSpPr>
+            <p:spPr>
+              <a:xfrm>
+                <a:off x="9166996" y="2600620"/>
+                <a:ext cx="656402" cy="461665"/>
+              </a:xfrm>
+              <a:prstGeom prst="rect">
+                <a:avLst/>
+              </a:prstGeom>
+              <a:noFill/>
+            </p:spPr>
+            <p:txBody>
+              <a:bodyPr wrap="square">
+                <a:spAutoFit/>
+              </a:bodyPr>
+              <a:lstStyle/>
+              <a:p>
+                <a:pPr/>
+                <a14:m>
+                  <m:oMathPara xmlns:m="http://schemas.openxmlformats.org/officeDocument/2006/math">
+                    <m:oMathParaPr>
+                      <m:jc m:val="centerGroup"/>
+                    </m:oMathParaPr>
+                    <m:oMath xmlns:m="http://schemas.openxmlformats.org/officeDocument/2006/math">
+                      <m:sSub>
+                        <m:sSubPr>
+                          <m:ctrlPr>
+                            <a:rPr lang="de-DE" sz="2400" b="0" i="1" smtClean="0">
+                              <a:solidFill>
+                                <a:schemeClr val="bg1"/>
+                              </a:solidFill>
+                              <a:latin typeface="Cambria Math" panose="02040503050406030204" pitchFamily="18" charset="0"/>
+                            </a:rPr>
+                          </m:ctrlPr>
+                        </m:sSubPr>
+                        <m:e>
+                          <m:r>
+                            <m:rPr>
+                              <m:sty m:val="p"/>
+                            </m:rPr>
+                            <a:rPr lang="de-DE" sz="2400" b="0" i="1" smtClean="0">
+                              <a:solidFill>
+                                <a:schemeClr val="bg1"/>
+                              </a:solidFill>
+                              <a:latin typeface="Cambria Math" panose="02040503050406030204" pitchFamily="18" charset="0"/>
+                            </a:rPr>
+                            <m:t>r</m:t>
+                          </m:r>
+                        </m:e>
+                        <m:sub>
+                          <m:r>
+                            <a:rPr lang="de-DE" sz="2400" b="0" i="1" smtClean="0">
+                              <a:solidFill>
+                                <a:schemeClr val="bg1"/>
+                              </a:solidFill>
+                              <a:latin typeface="Cambria Math" panose="02040503050406030204" pitchFamily="18" charset="0"/>
+                            </a:rPr>
+                            <m:t>2</m:t>
+                          </m:r>
+                        </m:sub>
+                      </m:sSub>
+                    </m:oMath>
+                  </m:oMathPara>
+                </a14:m>
+                <a:endParaRPr lang="en-US" sz="2400" dirty="0">
+                  <a:solidFill>
+                    <a:schemeClr val="bg1"/>
+                  </a:solidFill>
+                </a:endParaRPr>
+              </a:p>
+            </p:txBody>
+          </p:sp>
+        </mc:Choice>
+        <mc:Fallback>
+          <p:sp>
+            <p:nvSpPr>
+              <p:cNvPr id="65" name="TextBox 64">
+                <a:extLst>
+                  <a:ext uri="{FF2B5EF4-FFF2-40B4-BE49-F238E27FC236}">
+                    <a16:creationId xmlns:a16="http://schemas.microsoft.com/office/drawing/2014/main" id="{5D3C1859-8246-98F9-DCE1-853234CF86D2}"/>
+                  </a:ext>
+                </a:extLst>
+              </p:cNvPr>
+              <p:cNvSpPr txBox="1">
+                <a:spLocks noRot="1" noChangeAspect="1" noMove="1" noResize="1" noEditPoints="1" noAdjustHandles="1" noChangeArrowheads="1" noChangeShapeType="1" noTextEdit="1"/>
+              </p:cNvSpPr>
+              <p:nvPr/>
+            </p:nvSpPr>
+            <p:spPr>
+              <a:xfrm>
+                <a:off x="9166996" y="2600620"/>
+                <a:ext cx="656402" cy="461665"/>
+              </a:xfrm>
+              <a:prstGeom prst="rect">
+                <a:avLst/>
+              </a:prstGeom>
+              <a:blipFill>
+                <a:blip r:embed="rId12"/>
+                <a:stretch>
+                  <a:fillRect/>
+                </a:stretch>
+              </a:blipFill>
+            </p:spPr>
+            <p:txBody>
+              <a:bodyPr/>
+              <a:lstStyle/>
+              <a:p>
+                <a:r>
+                  <a:rPr lang="en-US">
+                    <a:noFill/>
+                  </a:rPr>
+                  <a:t> </a:t>
+                </a:r>
+              </a:p>
+            </p:txBody>
+          </p:sp>
+        </mc:Fallback>
+      </mc:AlternateContent>
+      <mc:AlternateContent xmlns:mc="http://schemas.openxmlformats.org/markup-compatibility/2006">
+        <mc:Choice xmlns:a14="http://schemas.microsoft.com/office/drawing/2010/main" Requires="a14">
+          <p:sp>
+            <p:nvSpPr>
+              <p:cNvPr id="66" name="TextBox 65">
+                <a:extLst>
+                  <a:ext uri="{FF2B5EF4-FFF2-40B4-BE49-F238E27FC236}">
+                    <a16:creationId xmlns:a16="http://schemas.microsoft.com/office/drawing/2014/main" id="{E4AD945A-9B68-249B-6B9D-07D01CA66632}"/>
+                  </a:ext>
+                </a:extLst>
+              </p:cNvPr>
+              <p:cNvSpPr txBox="1"/>
+              <p:nvPr/>
+            </p:nvSpPr>
+            <p:spPr>
+              <a:xfrm>
+                <a:off x="9253547" y="4816306"/>
+                <a:ext cx="495606" cy="461665"/>
+              </a:xfrm>
+              <a:prstGeom prst="rect">
+                <a:avLst/>
+              </a:prstGeom>
+              <a:noFill/>
+            </p:spPr>
+            <p:txBody>
+              <a:bodyPr wrap="square">
+                <a:spAutoFit/>
+              </a:bodyPr>
+              <a:lstStyle/>
+              <a:p>
+                <a:pPr/>
+                <a14:m>
+                  <m:oMathPara xmlns:m="http://schemas.openxmlformats.org/officeDocument/2006/math">
+                    <m:oMathParaPr>
+                      <m:jc m:val="centerGroup"/>
+                    </m:oMathParaPr>
+                    <m:oMath xmlns:m="http://schemas.openxmlformats.org/officeDocument/2006/math">
+                      <m:sSub>
+                        <m:sSubPr>
+                          <m:ctrlPr>
+                            <a:rPr lang="de-DE" sz="2400" b="0" i="1" smtClean="0">
+                              <a:solidFill>
+                                <a:schemeClr val="bg1"/>
+                              </a:solidFill>
+                              <a:latin typeface="Cambria Math" panose="02040503050406030204" pitchFamily="18" charset="0"/>
+                            </a:rPr>
+                          </m:ctrlPr>
+                        </m:sSubPr>
+                        <m:e>
+                          <m:r>
+                            <m:rPr>
+                              <m:sty m:val="p"/>
+                            </m:rPr>
+                            <a:rPr lang="de-DE" sz="2400" b="0" i="1" smtClean="0">
+                              <a:solidFill>
+                                <a:schemeClr val="bg1"/>
+                              </a:solidFill>
+                              <a:latin typeface="Cambria Math" panose="02040503050406030204" pitchFamily="18" charset="0"/>
+                            </a:rPr>
+                            <m:t>r</m:t>
+                          </m:r>
+                        </m:e>
+                        <m:sub>
+                          <m:r>
+                            <a:rPr lang="de-DE" sz="2400" b="0" i="1" smtClean="0">
+                              <a:solidFill>
+                                <a:schemeClr val="bg1"/>
+                              </a:solidFill>
+                              <a:latin typeface="Cambria Math" panose="02040503050406030204" pitchFamily="18" charset="0"/>
+                            </a:rPr>
+                            <m:t>3</m:t>
+                          </m:r>
+                        </m:sub>
+                      </m:sSub>
+                    </m:oMath>
+                  </m:oMathPara>
+                </a14:m>
+                <a:endParaRPr lang="en-US" sz="2400" dirty="0">
+                  <a:solidFill>
+                    <a:schemeClr val="bg1"/>
+                  </a:solidFill>
+                </a:endParaRPr>
+              </a:p>
+            </p:txBody>
+          </p:sp>
+        </mc:Choice>
+        <mc:Fallback>
+          <p:sp>
+            <p:nvSpPr>
+              <p:cNvPr id="66" name="TextBox 65">
+                <a:extLst>
+                  <a:ext uri="{FF2B5EF4-FFF2-40B4-BE49-F238E27FC236}">
+                    <a16:creationId xmlns:a16="http://schemas.microsoft.com/office/drawing/2014/main" id="{E4AD945A-9B68-249B-6B9D-07D01CA66632}"/>
+                  </a:ext>
+                </a:extLst>
+              </p:cNvPr>
+              <p:cNvSpPr txBox="1">
+                <a:spLocks noRot="1" noChangeAspect="1" noMove="1" noResize="1" noEditPoints="1" noAdjustHandles="1" noChangeArrowheads="1" noChangeShapeType="1" noTextEdit="1"/>
+              </p:cNvSpPr>
+              <p:nvPr/>
+            </p:nvSpPr>
+            <p:spPr>
+              <a:xfrm>
+                <a:off x="9253547" y="4816306"/>
+                <a:ext cx="495606" cy="461665"/>
+              </a:xfrm>
+              <a:prstGeom prst="rect">
+                <a:avLst/>
+              </a:prstGeom>
+              <a:blipFill>
+                <a:blip r:embed="rId13"/>
+                <a:stretch>
+                  <a:fillRect/>
+                </a:stretch>
+              </a:blipFill>
+            </p:spPr>
+            <p:txBody>
+              <a:bodyPr/>
+              <a:lstStyle/>
+              <a:p>
+                <a:r>
+                  <a:rPr lang="en-US">
+                    <a:noFill/>
+                  </a:rPr>
+                  <a:t> </a:t>
+                </a:r>
+              </a:p>
+            </p:txBody>
+          </p:sp>
+        </mc:Fallback>
+      </mc:AlternateContent>
+      <mc:AlternateContent xmlns:mc="http://schemas.openxmlformats.org/markup-compatibility/2006">
+        <mc:Choice xmlns:a14="http://schemas.microsoft.com/office/drawing/2010/main" Requires="a14">
+          <p:sp>
+            <p:nvSpPr>
+              <p:cNvPr id="67" name="TextBox 66">
+                <a:extLst>
+                  <a:ext uri="{FF2B5EF4-FFF2-40B4-BE49-F238E27FC236}">
+                    <a16:creationId xmlns:a16="http://schemas.microsoft.com/office/drawing/2014/main" id="{BA195E55-FCB0-F83C-3F4E-83E2D76AF7A5}"/>
+                  </a:ext>
+                </a:extLst>
+              </p:cNvPr>
+              <p:cNvSpPr txBox="1"/>
+              <p:nvPr/>
+            </p:nvSpPr>
+            <p:spPr>
+              <a:xfrm>
+                <a:off x="7421987" y="3705377"/>
+                <a:ext cx="527465" cy="461665"/>
+              </a:xfrm>
+              <a:prstGeom prst="rect">
+                <a:avLst/>
+              </a:prstGeom>
+              <a:noFill/>
+            </p:spPr>
+            <p:txBody>
+              <a:bodyPr wrap="square">
+                <a:spAutoFit/>
+              </a:bodyPr>
+              <a:lstStyle/>
+              <a:p>
+                <a:pPr/>
+                <a14:m>
+                  <m:oMathPara xmlns:m="http://schemas.openxmlformats.org/officeDocument/2006/math">
+                    <m:oMathParaPr>
+                      <m:jc m:val="centerGroup"/>
+                    </m:oMathParaPr>
+                    <m:oMath xmlns:m="http://schemas.openxmlformats.org/officeDocument/2006/math">
+                      <m:sSub>
+                        <m:sSubPr>
+                          <m:ctrlPr>
+                            <a:rPr lang="de-DE" sz="2400" b="0" i="1" smtClean="0">
+                              <a:solidFill>
+                                <a:schemeClr val="bg1"/>
+                              </a:solidFill>
+                              <a:latin typeface="Cambria Math" panose="02040503050406030204" pitchFamily="18" charset="0"/>
+                            </a:rPr>
+                          </m:ctrlPr>
+                        </m:sSubPr>
+                        <m:e>
+                          <m:r>
+                            <m:rPr>
+                              <m:sty m:val="p"/>
+                            </m:rPr>
+                            <a:rPr lang="de-DE" sz="2400" b="0" i="1" smtClean="0">
+                              <a:solidFill>
+                                <a:schemeClr val="bg1"/>
+                              </a:solidFill>
+                              <a:latin typeface="Cambria Math" panose="02040503050406030204" pitchFamily="18" charset="0"/>
+                            </a:rPr>
+                            <m:t>r</m:t>
+                          </m:r>
+                        </m:e>
+                        <m:sub>
+                          <m:r>
+                            <a:rPr lang="de-DE" sz="2400" b="0" i="1" smtClean="0">
+                              <a:solidFill>
+                                <a:schemeClr val="bg1"/>
+                              </a:solidFill>
+                              <a:latin typeface="Cambria Math" panose="02040503050406030204" pitchFamily="18" charset="0"/>
+                            </a:rPr>
+                            <m:t>1</m:t>
+                          </m:r>
+                        </m:sub>
+                      </m:sSub>
+                    </m:oMath>
+                  </m:oMathPara>
+                </a14:m>
+                <a:endParaRPr lang="en-US" sz="2400" dirty="0">
+                  <a:solidFill>
+                    <a:schemeClr val="bg1"/>
+                  </a:solidFill>
+                </a:endParaRPr>
+              </a:p>
+            </p:txBody>
+          </p:sp>
+        </mc:Choice>
+        <mc:Fallback>
+          <p:sp>
+            <p:nvSpPr>
+              <p:cNvPr id="67" name="TextBox 66">
+                <a:extLst>
+                  <a:ext uri="{FF2B5EF4-FFF2-40B4-BE49-F238E27FC236}">
+                    <a16:creationId xmlns:a16="http://schemas.microsoft.com/office/drawing/2014/main" id="{BA195E55-FCB0-F83C-3F4E-83E2D76AF7A5}"/>
+                  </a:ext>
+                </a:extLst>
+              </p:cNvPr>
+              <p:cNvSpPr txBox="1">
+                <a:spLocks noRot="1" noChangeAspect="1" noMove="1" noResize="1" noEditPoints="1" noAdjustHandles="1" noChangeArrowheads="1" noChangeShapeType="1" noTextEdit="1"/>
+              </p:cNvSpPr>
+              <p:nvPr/>
+            </p:nvSpPr>
+            <p:spPr>
+              <a:xfrm>
+                <a:off x="7421987" y="3705377"/>
+                <a:ext cx="527465" cy="461665"/>
+              </a:xfrm>
+              <a:prstGeom prst="rect">
+                <a:avLst/>
+              </a:prstGeom>
+              <a:blipFill>
+                <a:blip r:embed="rId14"/>
+                <a:stretch>
+                  <a:fillRect/>
+                </a:stretch>
+              </a:blipFill>
+            </p:spPr>
+            <p:txBody>
+              <a:bodyPr/>
+              <a:lstStyle/>
+              <a:p>
+                <a:r>
+                  <a:rPr lang="en-US">
+                    <a:noFill/>
+                  </a:rPr>
+                  <a:t> </a:t>
+                </a:r>
+              </a:p>
+            </p:txBody>
+          </p:sp>
+        </mc:Fallback>
+      </mc:AlternateContent>
+    </p:spTree>
+    <p:extLst>
+      <p:ext uri="{BB962C8B-B14F-4D97-AF65-F5344CB8AC3E}">
+        <p14:creationId xmlns:p14="http://schemas.microsoft.com/office/powerpoint/2010/main" val="1205928841"/>
+      </p:ext>
+    </p:extLst>
+  </p:cSld>
+  <p:clrMapOvr>
+    <a:masterClrMapping/>
+  </p:clrMapOvr>
+</p:sld>
+</file>
+
+<file path=ppt/slides/slide9.xml><?xml version="1.0" encoding="utf-8"?>
 <p:sld xmlns:a="http://schemas.openxmlformats.org/drawingml/2006/main" xmlns:r="http://schemas.openxmlformats.org/officeDocument/2006/relationships" xmlns:p="http://schemas.openxmlformats.org/presentationml/2006/main">
   <p:cSld>
     <p:spTree>
@@ -39960,2387 +44567,6 @@
 </p:sld>
 </file>
 
-<file path=ppt/slides/slide9.xml><?xml version="1.0" encoding="utf-8"?>
-<p:sld xmlns:a="http://schemas.openxmlformats.org/drawingml/2006/main" xmlns:r="http://schemas.openxmlformats.org/officeDocument/2006/relationships" xmlns:p="http://schemas.openxmlformats.org/presentationml/2006/main">
-  <p:cSld>
-    <p:spTree>
-      <p:nvGrpSpPr>
-        <p:cNvPr id="1" name=""/>
-        <p:cNvGrpSpPr/>
-        <p:nvPr/>
-      </p:nvGrpSpPr>
-      <p:grpSpPr>
-        <a:xfrm>
-          <a:off x="0" y="0"/>
-          <a:ext cx="0" cy="0"/>
-          <a:chOff x="0" y="0"/>
-          <a:chExt cx="0" cy="0"/>
-        </a:xfrm>
-      </p:grpSpPr>
-      <p:sp>
-        <p:nvSpPr>
-          <p:cNvPr id="2" name="Title 1">
-            <a:extLst>
-              <a:ext uri="{FF2B5EF4-FFF2-40B4-BE49-F238E27FC236}">
-                <a16:creationId xmlns:a16="http://schemas.microsoft.com/office/drawing/2014/main" id="{83C6ED07-B438-DA2A-9475-7CD2E760405C}"/>
-              </a:ext>
-            </a:extLst>
-          </p:cNvPr>
-          <p:cNvSpPr>
-            <a:spLocks noGrp="1"/>
-          </p:cNvSpPr>
-          <p:nvPr>
-            <p:ph type="title"/>
-          </p:nvPr>
-        </p:nvSpPr>
-        <p:spPr>
-          <a:xfrm>
-            <a:off x="83598" y="149682"/>
-            <a:ext cx="4124417" cy="602541"/>
-          </a:xfrm>
-        </p:spPr>
-        <p:txBody>
-          <a:bodyPr>
-            <a:normAutofit/>
-          </a:bodyPr>
-          <a:lstStyle/>
-          <a:p>
-            <a:r>
-              <a:rPr lang="es-ES" sz="2000" dirty="0"/>
-              <a:t>THz-</a:t>
-            </a:r>
-            <a:r>
-              <a:rPr lang="es-ES" sz="2000" dirty="0" err="1"/>
-              <a:t>Induced</a:t>
-            </a:r>
-            <a:r>
-              <a:rPr lang="es-ES" sz="2000" dirty="0"/>
-              <a:t> </a:t>
-            </a:r>
-            <a:r>
-              <a:rPr lang="es-ES" sz="2000" dirty="0" err="1"/>
-              <a:t>Enzyme</a:t>
-            </a:r>
-            <a:r>
-              <a:rPr lang="es-ES" sz="2000" dirty="0"/>
-              <a:t> </a:t>
-            </a:r>
-            <a:r>
-              <a:rPr lang="es-ES" sz="2000" dirty="0" err="1"/>
-              <a:t>Unfolding</a:t>
-            </a:r>
-            <a:r>
-              <a:rPr lang="es-ES" sz="2000" dirty="0"/>
-              <a:t> </a:t>
-            </a:r>
-            <a:r>
-              <a:rPr lang="es-ES" sz="2000" dirty="0" err="1"/>
-              <a:t>Model</a:t>
-            </a:r>
-            <a:endParaRPr lang="en-US" sz="2000" dirty="0"/>
-          </a:p>
-        </p:txBody>
-      </p:sp>
-      <p:sp>
-        <p:nvSpPr>
-          <p:cNvPr id="5" name="TextBox 4">
-            <a:extLst>
-              <a:ext uri="{FF2B5EF4-FFF2-40B4-BE49-F238E27FC236}">
-                <a16:creationId xmlns:a16="http://schemas.microsoft.com/office/drawing/2014/main" id="{AEB9D6A3-59F7-3469-F596-F9D7D21583FA}"/>
-              </a:ext>
-            </a:extLst>
-          </p:cNvPr>
-          <p:cNvSpPr txBox="1"/>
-          <p:nvPr/>
-        </p:nvSpPr>
-        <p:spPr>
-          <a:xfrm>
-            <a:off x="111483" y="6376036"/>
-            <a:ext cx="11743512" cy="507831"/>
-          </a:xfrm>
-          <a:prstGeom prst="rect">
-            <a:avLst/>
-          </a:prstGeom>
-          <a:noFill/>
-        </p:spPr>
-        <p:txBody>
-          <a:bodyPr wrap="square">
-            <a:spAutoFit/>
-          </a:bodyPr>
-          <a:lstStyle/>
-          <a:p>
-            <a:r>
-              <a:rPr lang="en-US" sz="900" dirty="0"/>
-              <a:t>[1] Hadeel Elayan, Andrew W. Eckford, and Raviraj S. Adve. 2023. Terahertz Induced Protein Interactions in a Random Medium. IEEE Transactions on Molecular, Biological and Multi-Scale Communications 9, 4 (Dec. 2023), 435–446. https: //doi.org/10.1109/tmbmc.2023.3327302</a:t>
-            </a:r>
-          </a:p>
-          <a:p>
-            <a:endParaRPr lang="en-US" sz="900" dirty="0"/>
-          </a:p>
-        </p:txBody>
-      </p:sp>
-      <mc:AlternateContent xmlns:mc="http://schemas.openxmlformats.org/markup-compatibility/2006" xmlns:a14="http://schemas.microsoft.com/office/drawing/2010/main">
-        <mc:Choice Requires="a14">
-          <p:sp>
-            <p:nvSpPr>
-              <p:cNvPr id="8" name="TextBox 7">
-                <a:extLst>
-                  <a:ext uri="{FF2B5EF4-FFF2-40B4-BE49-F238E27FC236}">
-                    <a16:creationId xmlns:a16="http://schemas.microsoft.com/office/drawing/2014/main" id="{F1A5A38E-152E-2D88-FF83-2BD41CDDC078}"/>
-                  </a:ext>
-                </a:extLst>
-              </p:cNvPr>
-              <p:cNvSpPr txBox="1"/>
-              <p:nvPr/>
-            </p:nvSpPr>
-            <p:spPr>
-              <a:xfrm>
-                <a:off x="366192" y="734535"/>
-                <a:ext cx="2716567" cy="806824"/>
-              </a:xfrm>
-              <a:prstGeom prst="rect">
-                <a:avLst/>
-              </a:prstGeom>
-              <a:noFill/>
-            </p:spPr>
-            <p:txBody>
-              <a:bodyPr wrap="square">
-                <a:spAutoFit/>
-              </a:bodyPr>
-              <a:lstStyle/>
-              <a:p>
-                <a:pPr/>
-                <a14:m>
-                  <m:oMathPara xmlns:m="http://schemas.openxmlformats.org/officeDocument/2006/math">
-                    <m:oMathParaPr>
-                      <m:jc m:val="centerGroup"/>
-                    </m:oMathParaPr>
-                    <m:oMath xmlns:m="http://schemas.openxmlformats.org/officeDocument/2006/math">
-                      <m:sSub>
-                        <m:sSubPr>
-                          <m:ctrlPr>
-                            <a:rPr lang="de-DE" i="1">
-                              <a:latin typeface="Cambria Math" panose="02040503050406030204" pitchFamily="18" charset="0"/>
-                            </a:rPr>
-                          </m:ctrlPr>
-                        </m:sSubPr>
-                        <m:e>
-                          <m:r>
-                            <a:rPr lang="de-DE" i="1">
-                              <a:latin typeface="Cambria Math" panose="02040503050406030204" pitchFamily="18" charset="0"/>
-                            </a:rPr>
-                            <m:t>𝑝</m:t>
-                          </m:r>
-                        </m:e>
-                        <m:sub>
-                          <m:r>
-                            <a:rPr lang="de-DE" i="1">
-                              <a:latin typeface="Cambria Math" panose="02040503050406030204" pitchFamily="18" charset="0"/>
-                            </a:rPr>
-                            <m:t>𝐹</m:t>
-                          </m:r>
-                        </m:sub>
-                      </m:sSub>
-                      <m:r>
-                        <a:rPr lang="de-DE" i="1">
-                          <a:latin typeface="Cambria Math" panose="02040503050406030204" pitchFamily="18" charset="0"/>
-                        </a:rPr>
-                        <m:t>=</m:t>
-                      </m:r>
-                      <m:f>
-                        <m:fPr>
-                          <m:ctrlPr>
-                            <a:rPr lang="en-US" i="1" dirty="0" smtClean="0">
-                              <a:latin typeface="Cambria Math" panose="02040503050406030204" pitchFamily="18" charset="0"/>
-                            </a:rPr>
-                          </m:ctrlPr>
-                        </m:fPr>
-                        <m:num>
-                          <m:r>
-                            <a:rPr lang="en-US" i="1" dirty="0" smtClean="0">
-                              <a:latin typeface="Cambria Math" panose="02040503050406030204" pitchFamily="18" charset="0"/>
-                            </a:rPr>
-                            <m:t>1</m:t>
-                          </m:r>
-                        </m:num>
-                        <m:den>
-                          <m:r>
-                            <a:rPr lang="en-US" i="1" dirty="0" smtClean="0">
-                              <a:latin typeface="Cambria Math" panose="02040503050406030204" pitchFamily="18" charset="0"/>
-                            </a:rPr>
-                            <m:t>1</m:t>
-                          </m:r>
-                          <m:r>
-                            <a:rPr lang="en-US" i="1" dirty="0" smtClean="0">
-                              <a:latin typeface="Cambria Math" panose="02040503050406030204" pitchFamily="18" charset="0"/>
-                            </a:rPr>
-                            <m:t>+</m:t>
-                          </m:r>
-                          <m:sSup>
-                            <m:sSupPr>
-                              <m:ctrlPr>
-                                <a:rPr lang="de-DE" b="0" i="1" dirty="0" smtClean="0">
-                                  <a:latin typeface="Cambria Math" panose="02040503050406030204" pitchFamily="18" charset="0"/>
-                                </a:rPr>
-                              </m:ctrlPr>
-                            </m:sSupPr>
-                            <m:e>
-                              <m:r>
-                                <a:rPr lang="de-DE" b="0" i="1" dirty="0" smtClean="0">
-                                  <a:latin typeface="Cambria Math" panose="02040503050406030204" pitchFamily="18" charset="0"/>
-                                </a:rPr>
-                                <m:t>𝑒</m:t>
-                              </m:r>
-                            </m:e>
-                            <m:sup>
-                              <m:d>
-                                <m:dPr>
-                                  <m:ctrlPr>
-                                    <a:rPr lang="en-US" b="0" i="1" dirty="0" smtClean="0">
-                                      <a:latin typeface="Cambria Math" panose="02040503050406030204" pitchFamily="18" charset="0"/>
-                                    </a:rPr>
-                                  </m:ctrlPr>
-                                </m:dPr>
-                                <m:e>
-                                  <m:f>
-                                    <m:fPr>
-                                      <m:ctrlPr>
-                                        <a:rPr lang="en-US" b="0" i="1" dirty="0" smtClean="0">
-                                          <a:latin typeface="Cambria Math" panose="02040503050406030204" pitchFamily="18" charset="0"/>
-                                        </a:rPr>
-                                      </m:ctrlPr>
-                                    </m:fPr>
-                                    <m:num>
-                                      <m:r>
-                                        <m:rPr>
-                                          <m:sty m:val="p"/>
-                                        </m:rPr>
-                                        <a:rPr lang="en-US" i="0" dirty="0" smtClean="0">
-                                          <a:latin typeface="Cambria Math" panose="02040503050406030204" pitchFamily="18" charset="0"/>
-                                        </a:rPr>
-                                        <m:t>Δ</m:t>
-                                      </m:r>
-                                      <m:r>
-                                        <a:rPr lang="en-US" i="1" dirty="0" smtClean="0">
-                                          <a:latin typeface="Cambria Math" panose="02040503050406030204" pitchFamily="18" charset="0"/>
-                                        </a:rPr>
-                                        <m:t>𝐸</m:t>
-                                      </m:r>
-                                      <m:r>
-                                        <a:rPr lang="en-US" i="1" dirty="0" smtClean="0">
-                                          <a:latin typeface="Cambria Math" panose="02040503050406030204" pitchFamily="18" charset="0"/>
-                                        </a:rPr>
-                                        <m:t>−</m:t>
-                                      </m:r>
-                                      <m:sSub>
-                                        <m:sSubPr>
-                                          <m:ctrlPr>
-                                            <a:rPr lang="en-US" i="1" dirty="0" smtClean="0">
-                                              <a:latin typeface="Cambria Math" panose="02040503050406030204" pitchFamily="18" charset="0"/>
-                                            </a:rPr>
-                                          </m:ctrlPr>
-                                        </m:sSubPr>
-                                        <m:e>
-                                          <m:d>
-                                            <m:dPr>
-                                              <m:begChr m:val="⟨"/>
-                                              <m:endChr m:val="⟩"/>
-                                              <m:ctrlPr>
-                                                <a:rPr lang="en-US" i="1" dirty="0" smtClean="0">
-                                                  <a:latin typeface="Cambria Math" panose="02040503050406030204" pitchFamily="18" charset="0"/>
-                                                </a:rPr>
-                                              </m:ctrlPr>
-                                            </m:dPr>
-                                            <m:e>
-                                              <m:sSub>
-                                                <m:sSubPr>
-                                                  <m:ctrlPr>
-                                                    <a:rPr lang="en-US" i="1" dirty="0" smtClean="0">
-                                                      <a:latin typeface="Cambria Math" panose="02040503050406030204" pitchFamily="18" charset="0"/>
-                                                    </a:rPr>
-                                                  </m:ctrlPr>
-                                                </m:sSubPr>
-                                                <m:e>
-                                                  <m:r>
-                                                    <a:rPr lang="en-US" i="1" dirty="0" smtClean="0">
-                                                      <a:latin typeface="Cambria Math" panose="02040503050406030204" pitchFamily="18" charset="0"/>
-                                                    </a:rPr>
-                                                    <m:t>𝐸</m:t>
-                                                  </m:r>
-                                                </m:e>
-                                                <m:sub>
-                                                  <m:r>
-                                                    <a:rPr lang="en-US" i="1" dirty="0" smtClean="0">
-                                                      <a:latin typeface="Cambria Math" panose="02040503050406030204" pitchFamily="18" charset="0"/>
-                                                    </a:rPr>
-                                                    <m:t>𝑡𝑜𝑡</m:t>
-                                                  </m:r>
-                                                </m:sub>
-                                              </m:sSub>
-                                            </m:e>
-                                          </m:d>
-                                        </m:e>
-                                        <m:sub>
-                                          <m:r>
-                                            <a:rPr lang="en-US" i="1" dirty="0" smtClean="0">
-                                              <a:latin typeface="Cambria Math" panose="02040503050406030204" pitchFamily="18" charset="0"/>
-                                            </a:rPr>
-                                            <m:t>𝑠𝑠</m:t>
-                                          </m:r>
-                                        </m:sub>
-                                      </m:sSub>
-                                    </m:num>
-                                    <m:den>
-                                      <m:sSub>
-                                        <m:sSubPr>
-                                          <m:ctrlPr>
-                                            <a:rPr lang="en-US" i="1" dirty="0" smtClean="0">
-                                              <a:latin typeface="Cambria Math" panose="02040503050406030204" pitchFamily="18" charset="0"/>
-                                            </a:rPr>
-                                          </m:ctrlPr>
-                                        </m:sSubPr>
-                                        <m:e>
-                                          <m:r>
-                                            <a:rPr lang="en-US" i="1" dirty="0" smtClean="0">
-                                              <a:latin typeface="Cambria Math" panose="02040503050406030204" pitchFamily="18" charset="0"/>
-                                            </a:rPr>
-                                            <m:t>𝑘</m:t>
-                                          </m:r>
-                                        </m:e>
-                                        <m:sub>
-                                          <m:r>
-                                            <a:rPr lang="en-US" i="1" dirty="0" smtClean="0">
-                                              <a:latin typeface="Cambria Math" panose="02040503050406030204" pitchFamily="18" charset="0"/>
-                                            </a:rPr>
-                                            <m:t>𝑏</m:t>
-                                          </m:r>
-                                        </m:sub>
-                                      </m:sSub>
-                                      <m:r>
-                                        <a:rPr lang="en-US" i="1" dirty="0" smtClean="0">
-                                          <a:latin typeface="Cambria Math" panose="02040503050406030204" pitchFamily="18" charset="0"/>
-                                        </a:rPr>
-                                        <m:t>𝑇</m:t>
-                                      </m:r>
-                                    </m:den>
-                                  </m:f>
-                                </m:e>
-                              </m:d>
-                            </m:sup>
-                          </m:sSup>
-                        </m:den>
-                      </m:f>
-                    </m:oMath>
-                  </m:oMathPara>
-                </a14:m>
-                <a:endParaRPr/>
-              </a:p>
-            </p:txBody>
-          </p:sp>
-        </mc:Choice>
-        <mc:Fallback xmlns="">
-          <p:sp>
-            <p:nvSpPr>
-              <p:cNvPr id="8" name="TextBox 7">
-                <a:extLst>
-                  <a:ext uri="{FF2B5EF4-FFF2-40B4-BE49-F238E27FC236}">
-                    <a16:creationId xmlns:a16="http://schemas.microsoft.com/office/drawing/2014/main" id="{F1A5A38E-152E-2D88-FF83-2BD41CDDC078}"/>
-                  </a:ext>
-                </a:extLst>
-              </p:cNvPr>
-              <p:cNvSpPr txBox="1">
-                <a:spLocks noRot="1" noChangeAspect="1" noMove="1" noResize="1" noEditPoints="1" noAdjustHandles="1" noChangeArrowheads="1" noChangeShapeType="1" noTextEdit="1"/>
-              </p:cNvSpPr>
-              <p:nvPr/>
-            </p:nvSpPr>
-            <p:spPr>
-              <a:xfrm>
-                <a:off x="366192" y="734535"/>
-                <a:ext cx="2716567" cy="806824"/>
-              </a:xfrm>
-              <a:prstGeom prst="rect">
-                <a:avLst/>
-              </a:prstGeom>
-              <a:blipFill>
-                <a:blip r:embed="rId2"/>
-                <a:stretch>
-                  <a:fillRect/>
-                </a:stretch>
-              </a:blipFill>
-            </p:spPr>
-            <p:txBody>
-              <a:bodyPr/>
-              <a:lstStyle/>
-              <a:p>
-                <a:r>
-                  <a:rPr lang="en-US">
-                    <a:noFill/>
-                  </a:rPr>
-                  <a:t> </a:t>
-                </a:r>
-              </a:p>
-            </p:txBody>
-          </p:sp>
-        </mc:Fallback>
-      </mc:AlternateContent>
-      <mc:AlternateContent xmlns:mc="http://schemas.openxmlformats.org/markup-compatibility/2006" xmlns:a14="http://schemas.microsoft.com/office/drawing/2010/main">
-        <mc:Choice Requires="a14">
-          <p:sp>
-            <p:nvSpPr>
-              <p:cNvPr id="10" name="TextBox 9">
-                <a:extLst>
-                  <a:ext uri="{FF2B5EF4-FFF2-40B4-BE49-F238E27FC236}">
-                    <a16:creationId xmlns:a16="http://schemas.microsoft.com/office/drawing/2014/main" id="{2D8FCC9F-6F72-EA63-42AE-107091808056}"/>
-                  </a:ext>
-                </a:extLst>
-              </p:cNvPr>
-              <p:cNvSpPr txBox="1"/>
-              <p:nvPr/>
-            </p:nvSpPr>
-            <p:spPr>
-              <a:xfrm>
-                <a:off x="518522" y="1751460"/>
-                <a:ext cx="3264763" cy="391582"/>
-              </a:xfrm>
-              <a:prstGeom prst="rect">
-                <a:avLst/>
-              </a:prstGeom>
-              <a:noFill/>
-            </p:spPr>
-            <p:txBody>
-              <a:bodyPr wrap="square">
-                <a:spAutoFit/>
-              </a:bodyPr>
-              <a:lstStyle/>
-              <a:p>
-                <a14:m>
-                  <m:oMath xmlns:m="http://schemas.openxmlformats.org/officeDocument/2006/math">
-                    <m:r>
-                      <m:rPr>
-                        <m:sty m:val="p"/>
-                      </m:rPr>
-                      <a:rPr lang="en-US" i="0" dirty="0" smtClean="0">
-                        <a:latin typeface="Cambria Math" panose="02040503050406030204" pitchFamily="18" charset="0"/>
-                      </a:rPr>
-                      <m:t>Δ</m:t>
-                    </m:r>
-                    <m:r>
-                      <a:rPr lang="en-US" i="1" dirty="0" smtClean="0">
-                        <a:latin typeface="Cambria Math" panose="02040503050406030204" pitchFamily="18" charset="0"/>
-                      </a:rPr>
-                      <m:t>𝐸</m:t>
-                    </m:r>
-                    <m:r>
-                      <a:rPr lang="de-DE" b="0" i="1" dirty="0" smtClean="0">
-                        <a:latin typeface="Cambria Math" panose="02040503050406030204" pitchFamily="18" charset="0"/>
-                      </a:rPr>
-                      <m:t>=</m:t>
-                    </m:r>
-                    <m:sSub>
-                      <m:sSubPr>
-                        <m:ctrlPr>
-                          <a:rPr lang="de-DE" b="0" i="1" dirty="0" smtClean="0">
-                            <a:latin typeface="Cambria Math" panose="02040503050406030204" pitchFamily="18" charset="0"/>
-                          </a:rPr>
-                        </m:ctrlPr>
-                      </m:sSubPr>
-                      <m:e>
-                        <m:r>
-                          <a:rPr lang="de-DE" b="0" i="1" dirty="0" smtClean="0">
-                            <a:latin typeface="Cambria Math" panose="02040503050406030204" pitchFamily="18" charset="0"/>
-                          </a:rPr>
-                          <m:t>𝐸</m:t>
-                        </m:r>
-                      </m:e>
-                      <m:sub>
-                        <m:r>
-                          <a:rPr lang="de-DE" b="0" i="1" dirty="0" smtClean="0">
-                            <a:latin typeface="Cambria Math" panose="02040503050406030204" pitchFamily="18" charset="0"/>
-                          </a:rPr>
-                          <m:t>𝑓</m:t>
-                        </m:r>
-                      </m:sub>
-                    </m:sSub>
-                    <m:r>
-                      <a:rPr lang="de-DE" b="0" i="1" dirty="0" smtClean="0">
-                        <a:latin typeface="Cambria Math" panose="02040503050406030204" pitchFamily="18" charset="0"/>
-                        <a:ea typeface="Cambria Math" panose="02040503050406030204" pitchFamily="18" charset="0"/>
-                      </a:rPr>
-                      <m:t>−</m:t>
-                    </m:r>
-                    <m:sSub>
-                      <m:sSubPr>
-                        <m:ctrlPr>
-                          <a:rPr lang="de-DE" i="1" dirty="0">
-                            <a:latin typeface="Cambria Math" panose="02040503050406030204" pitchFamily="18" charset="0"/>
-                          </a:rPr>
-                        </m:ctrlPr>
-                      </m:sSubPr>
-                      <m:e>
-                        <m:r>
-                          <a:rPr lang="de-DE" i="1" dirty="0">
-                            <a:latin typeface="Cambria Math" panose="02040503050406030204" pitchFamily="18" charset="0"/>
-                          </a:rPr>
-                          <m:t>𝐸</m:t>
-                        </m:r>
-                      </m:e>
-                      <m:sub>
-                        <m:r>
-                          <a:rPr lang="de-DE" b="0" i="1" dirty="0" smtClean="0">
-                            <a:latin typeface="Cambria Math" panose="02040503050406030204" pitchFamily="18" charset="0"/>
-                          </a:rPr>
-                          <m:t>𝑢</m:t>
-                        </m:r>
-                      </m:sub>
-                    </m:sSub>
-                  </m:oMath>
-                </a14:m>
-                <a:r>
-                  <a:rPr lang="en-US" dirty="0"/>
-                  <a:t> : free energy</a:t>
-                </a:r>
-                <a:r>
-                  <a:rPr lang="en-US" i="1" dirty="0"/>
-                  <a:t> </a:t>
-                </a:r>
-              </a:p>
-            </p:txBody>
-          </p:sp>
-        </mc:Choice>
-        <mc:Fallback xmlns="">
-          <p:sp>
-            <p:nvSpPr>
-              <p:cNvPr id="10" name="TextBox 9">
-                <a:extLst>
-                  <a:ext uri="{FF2B5EF4-FFF2-40B4-BE49-F238E27FC236}">
-                    <a16:creationId xmlns:a16="http://schemas.microsoft.com/office/drawing/2014/main" id="{2D8FCC9F-6F72-EA63-42AE-107091808056}"/>
-                  </a:ext>
-                </a:extLst>
-              </p:cNvPr>
-              <p:cNvSpPr txBox="1">
-                <a:spLocks noRot="1" noChangeAspect="1" noMove="1" noResize="1" noEditPoints="1" noAdjustHandles="1" noChangeArrowheads="1" noChangeShapeType="1" noTextEdit="1"/>
-              </p:cNvSpPr>
-              <p:nvPr/>
-            </p:nvSpPr>
-            <p:spPr>
-              <a:xfrm>
-                <a:off x="518522" y="1751460"/>
-                <a:ext cx="3264763" cy="391582"/>
-              </a:xfrm>
-              <a:prstGeom prst="rect">
-                <a:avLst/>
-              </a:prstGeom>
-              <a:blipFill>
-                <a:blip r:embed="rId3"/>
-                <a:stretch>
-                  <a:fillRect t="-4615" b="-20000"/>
-                </a:stretch>
-              </a:blipFill>
-            </p:spPr>
-            <p:txBody>
-              <a:bodyPr/>
-              <a:lstStyle/>
-              <a:p>
-                <a:r>
-                  <a:rPr lang="en-US">
-                    <a:noFill/>
-                  </a:rPr>
-                  <a:t> </a:t>
-                </a:r>
-              </a:p>
-            </p:txBody>
-          </p:sp>
-        </mc:Fallback>
-      </mc:AlternateContent>
-      <mc:AlternateContent xmlns:mc="http://schemas.openxmlformats.org/markup-compatibility/2006" xmlns:a14="http://schemas.microsoft.com/office/drawing/2010/main">
-        <mc:Choice Requires="a14">
-          <p:sp>
-            <p:nvSpPr>
-              <p:cNvPr id="12" name="TextBox 11">
-                <a:extLst>
-                  <a:ext uri="{FF2B5EF4-FFF2-40B4-BE49-F238E27FC236}">
-                    <a16:creationId xmlns:a16="http://schemas.microsoft.com/office/drawing/2014/main" id="{7DCF8BB0-8B3B-ACD6-63F4-2F98484E9D53}"/>
-                  </a:ext>
-                </a:extLst>
-              </p:cNvPr>
-              <p:cNvSpPr txBox="1"/>
-              <p:nvPr/>
-            </p:nvSpPr>
-            <p:spPr>
-              <a:xfrm>
-                <a:off x="83598" y="2330532"/>
-                <a:ext cx="5552161" cy="531107"/>
-              </a:xfrm>
-              <a:prstGeom prst="rect">
-                <a:avLst/>
-              </a:prstGeom>
-              <a:noFill/>
-            </p:spPr>
-            <p:txBody>
-              <a:bodyPr wrap="none" lIns="0" tIns="0" rIns="0" bIns="0" rtlCol="0">
-                <a:spAutoFit/>
-              </a:bodyPr>
-              <a:lstStyle/>
-              <a:p>
-                <a:pPr/>
-                <a14:m>
-                  <m:oMathPara xmlns:m="http://schemas.openxmlformats.org/officeDocument/2006/math">
-                    <m:oMathParaPr>
-                      <m:jc m:val="centerGroup"/>
-                    </m:oMathParaPr>
-                    <m:oMath xmlns:m="http://schemas.openxmlformats.org/officeDocument/2006/math">
-                      <m:sSub>
-                        <m:sSubPr>
-                          <m:ctrlPr>
-                            <a:rPr lang="en-US" i="1" dirty="0" smtClean="0">
-                              <a:latin typeface="Cambria Math" panose="02040503050406030204" pitchFamily="18" charset="0"/>
-                            </a:rPr>
-                          </m:ctrlPr>
-                        </m:sSubPr>
-                        <m:e>
-                          <m:d>
-                            <m:dPr>
-                              <m:begChr m:val="⟨"/>
-                              <m:endChr m:val="⟩"/>
-                              <m:ctrlPr>
-                                <a:rPr lang="en-US" i="1" dirty="0">
-                                  <a:latin typeface="Cambria Math" panose="02040503050406030204" pitchFamily="18" charset="0"/>
-                                </a:rPr>
-                              </m:ctrlPr>
-                            </m:dPr>
-                            <m:e>
-                              <m:sSub>
-                                <m:sSubPr>
-                                  <m:ctrlPr>
-                                    <a:rPr lang="en-US" i="1" dirty="0">
-                                      <a:latin typeface="Cambria Math" panose="02040503050406030204" pitchFamily="18" charset="0"/>
-                                    </a:rPr>
-                                  </m:ctrlPr>
-                                </m:sSubPr>
-                                <m:e>
-                                  <m:r>
-                                    <a:rPr lang="en-US" i="1" dirty="0">
-                                      <a:latin typeface="Cambria Math" panose="02040503050406030204" pitchFamily="18" charset="0"/>
-                                    </a:rPr>
-                                    <m:t>𝐸</m:t>
-                                  </m:r>
-                                </m:e>
-                                <m:sub>
-                                  <m:r>
-                                    <a:rPr lang="en-US" i="1" dirty="0">
-                                      <a:latin typeface="Cambria Math" panose="02040503050406030204" pitchFamily="18" charset="0"/>
-                                    </a:rPr>
-                                    <m:t>𝑡𝑜𝑡</m:t>
-                                  </m:r>
-                                </m:sub>
-                              </m:sSub>
-                            </m:e>
-                          </m:d>
-                        </m:e>
-                        <m:sub>
-                          <m:r>
-                            <a:rPr lang="en-US" i="1" dirty="0">
-                              <a:latin typeface="Cambria Math" panose="02040503050406030204" pitchFamily="18" charset="0"/>
-                            </a:rPr>
-                            <m:t>𝑠𝑠</m:t>
-                          </m:r>
-                        </m:sub>
-                      </m:sSub>
-                      <m:r>
-                        <a:rPr lang="en-US" i="1" dirty="0">
-                          <a:latin typeface="Cambria Math" panose="02040503050406030204" pitchFamily="18" charset="0"/>
-                        </a:rPr>
-                        <m:t>=</m:t>
-                      </m:r>
-                      <m:f>
-                        <m:fPr>
-                          <m:ctrlPr>
-                            <a:rPr lang="en-US" i="1" dirty="0">
-                              <a:latin typeface="Cambria Math" panose="02040503050406030204" pitchFamily="18" charset="0"/>
-                            </a:rPr>
-                          </m:ctrlPr>
-                        </m:fPr>
-                        <m:num>
-                          <m:r>
-                            <a:rPr lang="en-US" i="1" dirty="0">
-                              <a:latin typeface="Cambria Math" panose="02040503050406030204" pitchFamily="18" charset="0"/>
-                            </a:rPr>
-                            <m:t>𝛼</m:t>
-                          </m:r>
-                        </m:num>
-                        <m:den>
-                          <m:r>
-                            <a:rPr lang="en-US" i="1" dirty="0">
-                              <a:latin typeface="Cambria Math" panose="02040503050406030204" pitchFamily="18" charset="0"/>
-                            </a:rPr>
-                            <m:t>4</m:t>
-                          </m:r>
-                          <m:r>
-                            <a:rPr lang="en-US" i="1" dirty="0">
-                              <a:latin typeface="Cambria Math" panose="02040503050406030204" pitchFamily="18" charset="0"/>
-                            </a:rPr>
-                            <m:t>𝛽</m:t>
-                          </m:r>
-                          <m:r>
-                            <a:rPr lang="en-US" i="1" dirty="0">
-                              <a:latin typeface="Cambria Math" panose="02040503050406030204" pitchFamily="18" charset="0"/>
-                            </a:rPr>
-                            <m:t>𝑚</m:t>
-                          </m:r>
-                          <m:d>
-                            <m:dPr>
-                              <m:begChr m:val="["/>
-                              <m:endChr m:val="]"/>
-                              <m:ctrlPr>
-                                <a:rPr lang="en-US" i="1" dirty="0">
-                                  <a:latin typeface="Cambria Math" panose="02040503050406030204" pitchFamily="18" charset="0"/>
-                                </a:rPr>
-                              </m:ctrlPr>
-                            </m:dPr>
-                            <m:e>
-                              <m:sSup>
-                                <m:sSupPr>
-                                  <m:ctrlPr>
-                                    <a:rPr lang="en-US" i="1" dirty="0">
-                                      <a:latin typeface="Cambria Math" panose="02040503050406030204" pitchFamily="18" charset="0"/>
-                                    </a:rPr>
-                                  </m:ctrlPr>
-                                </m:sSupPr>
-                                <m:e>
-                                  <m:d>
-                                    <m:dPr>
-                                      <m:ctrlPr>
-                                        <a:rPr lang="en-US" i="1" dirty="0">
-                                          <a:latin typeface="Cambria Math" panose="02040503050406030204" pitchFamily="18" charset="0"/>
-                                        </a:rPr>
-                                      </m:ctrlPr>
-                                    </m:dPr>
-                                    <m:e>
-                                      <m:sSubSup>
-                                        <m:sSubSupPr>
-                                          <m:ctrlPr>
-                                            <a:rPr lang="en-US" i="1" dirty="0" smtClean="0">
-                                              <a:solidFill>
-                                                <a:srgbClr val="C00000"/>
-                                              </a:solidFill>
-                                              <a:latin typeface="Cambria Math" panose="02040503050406030204" pitchFamily="18" charset="0"/>
-                                            </a:rPr>
-                                          </m:ctrlPr>
-                                        </m:sSubSupPr>
-                                        <m:e>
-                                          <m:r>
-                                            <a:rPr lang="en-US" i="1" dirty="0">
-                                              <a:solidFill>
-                                                <a:srgbClr val="C00000"/>
-                                              </a:solidFill>
-                                              <a:latin typeface="Cambria Math" panose="02040503050406030204" pitchFamily="18" charset="0"/>
-                                            </a:rPr>
-                                            <m:t>𝜔</m:t>
-                                          </m:r>
-                                        </m:e>
-                                        <m:sub>
-                                          <m:r>
-                                            <a:rPr lang="en-US" i="1" dirty="0">
-                                              <a:solidFill>
-                                                <a:srgbClr val="C00000"/>
-                                              </a:solidFill>
-                                              <a:latin typeface="Cambria Math" panose="02040503050406030204" pitchFamily="18" charset="0"/>
-                                            </a:rPr>
-                                            <m:t>𝑜</m:t>
-                                          </m:r>
-                                        </m:sub>
-                                        <m:sup>
-                                          <m:r>
-                                            <a:rPr lang="en-US" i="1" dirty="0">
-                                              <a:solidFill>
-                                                <a:srgbClr val="C00000"/>
-                                              </a:solidFill>
-                                              <a:latin typeface="Cambria Math" panose="02040503050406030204" pitchFamily="18" charset="0"/>
-                                            </a:rPr>
-                                            <m:t>2</m:t>
-                                          </m:r>
-                                        </m:sup>
-                                      </m:sSubSup>
-                                      <m:r>
-                                        <a:rPr lang="en-US" i="1" dirty="0">
-                                          <a:latin typeface="Cambria Math" panose="02040503050406030204" pitchFamily="18" charset="0"/>
-                                        </a:rPr>
-                                        <m:t>−</m:t>
-                                      </m:r>
-                                      <m:sSubSup>
-                                        <m:sSubSupPr>
-                                          <m:ctrlPr>
-                                            <a:rPr lang="en-US" i="1" dirty="0">
-                                              <a:latin typeface="Cambria Math" panose="02040503050406030204" pitchFamily="18" charset="0"/>
-                                            </a:rPr>
-                                          </m:ctrlPr>
-                                        </m:sSubSupPr>
-                                        <m:e>
-                                          <m:r>
-                                            <a:rPr lang="en-US" i="1" dirty="0">
-                                              <a:latin typeface="Cambria Math" panose="02040503050406030204" pitchFamily="18" charset="0"/>
-                                            </a:rPr>
-                                            <m:t>𝜔</m:t>
-                                          </m:r>
-                                        </m:e>
-                                        <m:sub>
-                                          <m:r>
-                                            <a:rPr lang="en-US" i="1" dirty="0">
-                                              <a:latin typeface="Cambria Math" panose="02040503050406030204" pitchFamily="18" charset="0"/>
-                                            </a:rPr>
-                                            <m:t>𝑎</m:t>
-                                          </m:r>
-                                        </m:sub>
-                                        <m:sup>
-                                          <m:r>
-                                            <a:rPr lang="en-US" i="1" dirty="0">
-                                              <a:latin typeface="Cambria Math" panose="02040503050406030204" pitchFamily="18" charset="0"/>
-                                            </a:rPr>
-                                            <m:t>2</m:t>
-                                          </m:r>
-                                        </m:sup>
-                                      </m:sSubSup>
-                                    </m:e>
-                                  </m:d>
-                                </m:e>
-                                <m:sup>
-                                  <m:r>
-                                    <a:rPr lang="en-US" i="1" dirty="0">
-                                      <a:latin typeface="Cambria Math" panose="02040503050406030204" pitchFamily="18" charset="0"/>
-                                    </a:rPr>
-                                    <m:t>2</m:t>
-                                  </m:r>
-                                </m:sup>
-                              </m:sSup>
-                              <m:r>
-                                <a:rPr lang="en-US" i="1" dirty="0">
-                                  <a:latin typeface="Cambria Math" panose="02040503050406030204" pitchFamily="18" charset="0"/>
-                                </a:rPr>
-                                <m:t>+</m:t>
-                              </m:r>
-                              <m:sSup>
-                                <m:sSupPr>
-                                  <m:ctrlPr>
-                                    <a:rPr lang="en-US" i="1" dirty="0">
-                                      <a:latin typeface="Cambria Math" panose="02040503050406030204" pitchFamily="18" charset="0"/>
-                                    </a:rPr>
-                                  </m:ctrlPr>
-                                </m:sSupPr>
-                                <m:e>
-                                  <m:d>
-                                    <m:dPr>
-                                      <m:ctrlPr>
-                                        <a:rPr lang="en-US" i="1" dirty="0">
-                                          <a:latin typeface="Cambria Math" panose="02040503050406030204" pitchFamily="18" charset="0"/>
-                                        </a:rPr>
-                                      </m:ctrlPr>
-                                    </m:dPr>
-                                    <m:e>
-                                      <m:sSub>
-                                        <m:sSubPr>
-                                          <m:ctrlPr>
-                                            <a:rPr lang="en-US" i="1" dirty="0">
-                                              <a:latin typeface="Cambria Math" panose="02040503050406030204" pitchFamily="18" charset="0"/>
-                                            </a:rPr>
-                                          </m:ctrlPr>
-                                        </m:sSubPr>
-                                        <m:e>
-                                          <m:r>
-                                            <a:rPr lang="en-US" i="1" dirty="0">
-                                              <a:latin typeface="Cambria Math" panose="02040503050406030204" pitchFamily="18" charset="0"/>
-                                            </a:rPr>
-                                            <m:t>𝜔</m:t>
-                                          </m:r>
-                                        </m:e>
-                                        <m:sub>
-                                          <m:r>
-                                            <a:rPr lang="en-US" i="1" dirty="0">
-                                              <a:latin typeface="Cambria Math" panose="02040503050406030204" pitchFamily="18" charset="0"/>
-                                            </a:rPr>
-                                            <m:t>𝑎</m:t>
-                                          </m:r>
-                                        </m:sub>
-                                      </m:sSub>
-                                      <m:acc>
-                                        <m:accPr>
-                                          <m:chr m:val="̅"/>
-                                          <m:ctrlPr>
-                                            <a:rPr lang="en-US" i="1" dirty="0" smtClean="0">
-                                              <a:solidFill>
-                                                <a:srgbClr val="C00000"/>
-                                              </a:solidFill>
-                                              <a:latin typeface="Cambria Math" panose="02040503050406030204" pitchFamily="18" charset="0"/>
-                                            </a:rPr>
-                                          </m:ctrlPr>
-                                        </m:accPr>
-                                        <m:e>
-                                          <m:r>
-                                            <a:rPr lang="en-US" i="1" dirty="0">
-                                              <a:solidFill>
-                                                <a:srgbClr val="C00000"/>
-                                              </a:solidFill>
-                                              <a:latin typeface="Cambria Math" panose="02040503050406030204" pitchFamily="18" charset="0"/>
-                                            </a:rPr>
-                                            <m:t>𝛾</m:t>
-                                          </m:r>
-                                        </m:e>
-                                      </m:acc>
-                                    </m:e>
-                                  </m:d>
-                                </m:e>
-                                <m:sup>
-                                  <m:r>
-                                    <a:rPr lang="en-US" i="1" dirty="0">
-                                      <a:latin typeface="Cambria Math" panose="02040503050406030204" pitchFamily="18" charset="0"/>
-                                    </a:rPr>
-                                    <m:t>2</m:t>
-                                  </m:r>
-                                </m:sup>
-                              </m:sSup>
-                            </m:e>
-                          </m:d>
-                        </m:den>
-                      </m:f>
-                      <m:d>
-                        <m:dPr>
-                          <m:ctrlPr>
-                            <a:rPr lang="en-US" i="1" dirty="0">
-                              <a:latin typeface="Cambria Math" panose="02040503050406030204" pitchFamily="18" charset="0"/>
-                            </a:rPr>
-                          </m:ctrlPr>
-                        </m:dPr>
-                        <m:e>
-                          <m:sSubSup>
-                            <m:sSubSupPr>
-                              <m:ctrlPr>
-                                <a:rPr lang="en-US" i="1" dirty="0">
-                                  <a:latin typeface="Cambria Math" panose="02040503050406030204" pitchFamily="18" charset="0"/>
-                                </a:rPr>
-                              </m:ctrlPr>
-                            </m:sSubSupPr>
-                            <m:e>
-                              <m:r>
-                                <a:rPr lang="en-US" i="1" dirty="0">
-                                  <a:latin typeface="Cambria Math" panose="02040503050406030204" pitchFamily="18" charset="0"/>
-                                </a:rPr>
-                                <m:t>𝜔</m:t>
-                              </m:r>
-                            </m:e>
-                            <m:sub>
-                              <m:r>
-                                <a:rPr lang="en-US" i="1" dirty="0">
-                                  <a:latin typeface="Cambria Math" panose="02040503050406030204" pitchFamily="18" charset="0"/>
-                                </a:rPr>
-                                <m:t>𝑎</m:t>
-                              </m:r>
-                            </m:sub>
-                            <m:sup>
-                              <m:r>
-                                <a:rPr lang="en-US" i="1" dirty="0">
-                                  <a:latin typeface="Cambria Math" panose="02040503050406030204" pitchFamily="18" charset="0"/>
-                                </a:rPr>
-                                <m:t>2</m:t>
-                              </m:r>
-                            </m:sup>
-                          </m:sSubSup>
-                          <m:r>
-                            <a:rPr lang="en-US" i="1" dirty="0">
-                              <a:latin typeface="Cambria Math" panose="02040503050406030204" pitchFamily="18" charset="0"/>
-                            </a:rPr>
-                            <m:t>+</m:t>
-                          </m:r>
-                          <m:sSubSup>
-                            <m:sSubSupPr>
-                              <m:ctrlPr>
-                                <a:rPr lang="en-US" i="1" dirty="0" smtClean="0">
-                                  <a:solidFill>
-                                    <a:srgbClr val="C00000"/>
-                                  </a:solidFill>
-                                  <a:latin typeface="Cambria Math" panose="02040503050406030204" pitchFamily="18" charset="0"/>
-                                </a:rPr>
-                              </m:ctrlPr>
-                            </m:sSubSupPr>
-                            <m:e>
-                              <m:r>
-                                <a:rPr lang="en-US" i="1" dirty="0">
-                                  <a:solidFill>
-                                    <a:srgbClr val="C00000"/>
-                                  </a:solidFill>
-                                  <a:latin typeface="Cambria Math" panose="02040503050406030204" pitchFamily="18" charset="0"/>
-                                </a:rPr>
-                                <m:t>𝜔</m:t>
-                              </m:r>
-                            </m:e>
-                            <m:sub>
-                              <m:r>
-                                <a:rPr lang="en-US" i="1" dirty="0">
-                                  <a:solidFill>
-                                    <a:srgbClr val="C00000"/>
-                                  </a:solidFill>
-                                  <a:latin typeface="Cambria Math" panose="02040503050406030204" pitchFamily="18" charset="0"/>
-                                </a:rPr>
-                                <m:t>𝑜</m:t>
-                              </m:r>
-                            </m:sub>
-                            <m:sup>
-                              <m:r>
-                                <a:rPr lang="en-US" i="1" dirty="0">
-                                  <a:solidFill>
-                                    <a:srgbClr val="C00000"/>
-                                  </a:solidFill>
-                                  <a:latin typeface="Cambria Math" panose="02040503050406030204" pitchFamily="18" charset="0"/>
-                                </a:rPr>
-                                <m:t>2</m:t>
-                              </m:r>
-                            </m:sup>
-                          </m:sSubSup>
-                        </m:e>
-                      </m:d>
-                      <m:r>
-                        <a:rPr lang="en-US" i="1" dirty="0">
-                          <a:latin typeface="Cambria Math" panose="02040503050406030204" pitchFamily="18" charset="0"/>
-                        </a:rPr>
-                        <m:t>+</m:t>
-                      </m:r>
-                      <m:sSub>
-                        <m:sSubPr>
-                          <m:ctrlPr>
-                            <a:rPr lang="en-US" i="1" dirty="0">
-                              <a:latin typeface="Cambria Math" panose="02040503050406030204" pitchFamily="18" charset="0"/>
-                            </a:rPr>
-                          </m:ctrlPr>
-                        </m:sSubPr>
-                        <m:e>
-                          <m:r>
-                            <a:rPr lang="en-US" i="1" dirty="0">
-                              <a:latin typeface="Cambria Math" panose="02040503050406030204" pitchFamily="18" charset="0"/>
-                            </a:rPr>
-                            <m:t>𝑘</m:t>
-                          </m:r>
-                        </m:e>
-                        <m:sub>
-                          <m:r>
-                            <a:rPr lang="en-US" i="1" dirty="0">
-                              <a:latin typeface="Cambria Math" panose="02040503050406030204" pitchFamily="18" charset="0"/>
-                            </a:rPr>
-                            <m:t>𝑏</m:t>
-                          </m:r>
-                        </m:sub>
-                      </m:sSub>
-                      <m:r>
-                        <a:rPr lang="en-US" i="1" dirty="0">
-                          <a:latin typeface="Cambria Math" panose="02040503050406030204" pitchFamily="18" charset="0"/>
-                        </a:rPr>
-                        <m:t>𝑇</m:t>
-                      </m:r>
-                    </m:oMath>
-                  </m:oMathPara>
-                </a14:m>
-                <a:endParaRPr/>
-              </a:p>
-            </p:txBody>
-          </p:sp>
-        </mc:Choice>
-        <mc:Fallback xmlns="">
-          <p:sp>
-            <p:nvSpPr>
-              <p:cNvPr id="12" name="TextBox 11">
-                <a:extLst>
-                  <a:ext uri="{FF2B5EF4-FFF2-40B4-BE49-F238E27FC236}">
-                    <a16:creationId xmlns:a16="http://schemas.microsoft.com/office/drawing/2014/main" id="{7DCF8BB0-8B3B-ACD6-63F4-2F98484E9D53}"/>
-                  </a:ext>
-                </a:extLst>
-              </p:cNvPr>
-              <p:cNvSpPr txBox="1">
-                <a:spLocks noRot="1" noChangeAspect="1" noMove="1" noResize="1" noEditPoints="1" noAdjustHandles="1" noChangeArrowheads="1" noChangeShapeType="1" noTextEdit="1"/>
-              </p:cNvSpPr>
-              <p:nvPr/>
-            </p:nvSpPr>
-            <p:spPr>
-              <a:xfrm>
-                <a:off x="83598" y="2330532"/>
-                <a:ext cx="5552161" cy="531107"/>
-              </a:xfrm>
-              <a:prstGeom prst="rect">
-                <a:avLst/>
-              </a:prstGeom>
-              <a:blipFill>
-                <a:blip r:embed="rId4"/>
-                <a:stretch>
-                  <a:fillRect b="-1149"/>
-                </a:stretch>
-              </a:blipFill>
-            </p:spPr>
-            <p:txBody>
-              <a:bodyPr/>
-              <a:lstStyle/>
-              <a:p>
-                <a:r>
-                  <a:rPr lang="en-US">
-                    <a:noFill/>
-                  </a:rPr>
-                  <a:t> </a:t>
-                </a:r>
-              </a:p>
-            </p:txBody>
-          </p:sp>
-        </mc:Fallback>
-      </mc:AlternateContent>
-      <mc:AlternateContent xmlns:mc="http://schemas.openxmlformats.org/markup-compatibility/2006" xmlns:a14="http://schemas.microsoft.com/office/drawing/2010/main">
-        <mc:Choice Requires="a14">
-          <p:sp>
-            <p:nvSpPr>
-              <p:cNvPr id="13" name="TextBox 12">
-                <a:extLst>
-                  <a:ext uri="{FF2B5EF4-FFF2-40B4-BE49-F238E27FC236}">
-                    <a16:creationId xmlns:a16="http://schemas.microsoft.com/office/drawing/2014/main" id="{1650A18F-AA7B-CC05-AC43-0821909B161A}"/>
-                  </a:ext>
-                </a:extLst>
-              </p:cNvPr>
-              <p:cNvSpPr txBox="1"/>
-              <p:nvPr/>
-            </p:nvSpPr>
-            <p:spPr>
-              <a:xfrm>
-                <a:off x="454159" y="3172361"/>
-                <a:ext cx="5098383" cy="491288"/>
-              </a:xfrm>
-              <a:prstGeom prst="rect">
-                <a:avLst/>
-              </a:prstGeom>
-              <a:noFill/>
-            </p:spPr>
-            <p:txBody>
-              <a:bodyPr wrap="none" rtlCol="0">
-                <a:spAutoFit/>
-              </a:bodyPr>
-              <a:lstStyle/>
-              <a:p>
-                <a14:m>
-                  <m:oMath xmlns:m="http://schemas.openxmlformats.org/officeDocument/2006/math">
-                    <m:sSubSup>
-                      <m:sSubSupPr>
-                        <m:ctrlPr>
-                          <a:rPr lang="en-US" i="1" dirty="0" smtClean="0">
-                            <a:solidFill>
-                              <a:schemeClr val="tx1"/>
-                            </a:solidFill>
-                            <a:latin typeface="Cambria Math" panose="02040503050406030204" pitchFamily="18" charset="0"/>
-                          </a:rPr>
-                        </m:ctrlPr>
-                      </m:sSubSupPr>
-                      <m:e>
-                        <m:r>
-                          <a:rPr lang="en-US" i="1" dirty="0">
-                            <a:solidFill>
-                              <a:schemeClr val="tx1"/>
-                            </a:solidFill>
-                            <a:latin typeface="Cambria Math" panose="02040503050406030204" pitchFamily="18" charset="0"/>
-                          </a:rPr>
-                          <m:t>𝜔</m:t>
-                        </m:r>
-                      </m:e>
-                      <m:sub>
-                        <m:r>
-                          <a:rPr lang="en-US" i="1" dirty="0">
-                            <a:solidFill>
-                              <a:schemeClr val="tx1"/>
-                            </a:solidFill>
-                            <a:latin typeface="Cambria Math" panose="02040503050406030204" pitchFamily="18" charset="0"/>
-                          </a:rPr>
-                          <m:t>𝑜</m:t>
-                        </m:r>
-                      </m:sub>
-                      <m:sup>
-                        <m:r>
-                          <a:rPr lang="en-US" i="1" dirty="0">
-                            <a:solidFill>
-                              <a:schemeClr val="tx1"/>
-                            </a:solidFill>
-                            <a:latin typeface="Cambria Math" panose="02040503050406030204" pitchFamily="18" charset="0"/>
-                          </a:rPr>
-                          <m:t>2</m:t>
-                        </m:r>
-                      </m:sup>
-                    </m:sSubSup>
-                    <m:r>
-                      <a:rPr lang="de-DE" b="0" i="1" smtClean="0">
-                        <a:latin typeface="Cambria Math" panose="02040503050406030204" pitchFamily="18" charset="0"/>
-                      </a:rPr>
-                      <m:t>=</m:t>
-                    </m:r>
-                    <m:f>
-                      <m:fPr>
-                        <m:ctrlPr>
-                          <a:rPr lang="de-DE" b="0" i="1" smtClean="0">
-                            <a:latin typeface="Cambria Math" panose="02040503050406030204" pitchFamily="18" charset="0"/>
-                          </a:rPr>
-                        </m:ctrlPr>
-                      </m:fPr>
-                      <m:num>
-                        <m:r>
-                          <a:rPr lang="de-DE" b="0" i="1" smtClean="0">
-                            <a:latin typeface="Cambria Math" panose="02040503050406030204" pitchFamily="18" charset="0"/>
-                          </a:rPr>
-                          <m:t>𝑘</m:t>
-                        </m:r>
-                      </m:num>
-                      <m:den>
-                        <m:r>
-                          <a:rPr lang="de-DE" b="0" i="1" smtClean="0">
-                            <a:latin typeface="Cambria Math" panose="02040503050406030204" pitchFamily="18" charset="0"/>
-                          </a:rPr>
-                          <m:t>𝑚</m:t>
-                        </m:r>
-                      </m:den>
-                    </m:f>
-                  </m:oMath>
-                </a14:m>
-                <a:r>
-                  <a:rPr lang="en-US" i="1" dirty="0"/>
-                  <a:t> , </a:t>
-                </a:r>
-                <a14:m>
-                  <m:oMath xmlns:m="http://schemas.openxmlformats.org/officeDocument/2006/math">
-                    <m:sSub>
-                      <m:sSubPr>
-                        <m:ctrlPr>
-                          <a:rPr lang="en-US" i="1" smtClean="0">
-                            <a:latin typeface="Cambria Math" panose="02040503050406030204" pitchFamily="18" charset="0"/>
-                          </a:rPr>
-                        </m:ctrlPr>
-                      </m:sSubPr>
-                      <m:e>
-                        <m:r>
-                          <a:rPr lang="en-US" i="1" smtClean="0">
-                            <a:latin typeface="Cambria Math" panose="02040503050406030204" pitchFamily="18" charset="0"/>
-                            <a:ea typeface="Cambria Math" panose="02040503050406030204" pitchFamily="18" charset="0"/>
-                          </a:rPr>
-                          <m:t>𝜔</m:t>
-                        </m:r>
-                      </m:e>
-                      <m:sub>
-                        <m:r>
-                          <a:rPr lang="de-DE" b="0" i="1" smtClean="0">
-                            <a:latin typeface="Cambria Math" panose="02040503050406030204" pitchFamily="18" charset="0"/>
-                          </a:rPr>
-                          <m:t>0</m:t>
-                        </m:r>
-                      </m:sub>
-                    </m:sSub>
-                  </m:oMath>
-                </a14:m>
-                <a:r>
-                  <a:rPr lang="en-US" dirty="0"/>
-                  <a:t> is the natural frequency of the protein</a:t>
-                </a:r>
-              </a:p>
-            </p:txBody>
-          </p:sp>
-        </mc:Choice>
-        <mc:Fallback xmlns="">
-          <p:sp>
-            <p:nvSpPr>
-              <p:cNvPr id="13" name="TextBox 12">
-                <a:extLst>
-                  <a:ext uri="{FF2B5EF4-FFF2-40B4-BE49-F238E27FC236}">
-                    <a16:creationId xmlns:a16="http://schemas.microsoft.com/office/drawing/2014/main" id="{1650A18F-AA7B-CC05-AC43-0821909B161A}"/>
-                  </a:ext>
-                </a:extLst>
-              </p:cNvPr>
-              <p:cNvSpPr txBox="1">
-                <a:spLocks noRot="1" noChangeAspect="1" noMove="1" noResize="1" noEditPoints="1" noAdjustHandles="1" noChangeArrowheads="1" noChangeShapeType="1" noTextEdit="1"/>
-              </p:cNvSpPr>
-              <p:nvPr/>
-            </p:nvSpPr>
-            <p:spPr>
-              <a:xfrm>
-                <a:off x="454159" y="3172361"/>
-                <a:ext cx="5098383" cy="491288"/>
-              </a:xfrm>
-              <a:prstGeom prst="rect">
-                <a:avLst/>
-              </a:prstGeom>
-              <a:blipFill>
-                <a:blip r:embed="rId5"/>
-                <a:stretch>
-                  <a:fillRect r="-239" b="-8642"/>
-                </a:stretch>
-              </a:blipFill>
-            </p:spPr>
-            <p:txBody>
-              <a:bodyPr/>
-              <a:lstStyle/>
-              <a:p>
-                <a:r>
-                  <a:rPr lang="en-US">
-                    <a:noFill/>
-                  </a:rPr>
-                  <a:t> </a:t>
-                </a:r>
-              </a:p>
-            </p:txBody>
-          </p:sp>
-        </mc:Fallback>
-      </mc:AlternateContent>
-      <mc:AlternateContent xmlns:mc="http://schemas.openxmlformats.org/markup-compatibility/2006" xmlns:a14="http://schemas.microsoft.com/office/drawing/2010/main">
-        <mc:Choice Requires="a14">
-          <p:sp>
-            <p:nvSpPr>
-              <p:cNvPr id="15" name="TextBox 14">
-                <a:extLst>
-                  <a:ext uri="{FF2B5EF4-FFF2-40B4-BE49-F238E27FC236}">
-                    <a16:creationId xmlns:a16="http://schemas.microsoft.com/office/drawing/2014/main" id="{DB8140D9-A5BB-2CDD-16C8-EE8CE49E9893}"/>
-                  </a:ext>
-                </a:extLst>
-              </p:cNvPr>
-              <p:cNvSpPr txBox="1"/>
-              <p:nvPr/>
-            </p:nvSpPr>
-            <p:spPr>
-              <a:xfrm>
-                <a:off x="454159" y="3673423"/>
-                <a:ext cx="1112258" cy="681533"/>
-              </a:xfrm>
-              <a:prstGeom prst="rect">
-                <a:avLst/>
-              </a:prstGeom>
-              <a:noFill/>
-            </p:spPr>
-            <p:txBody>
-              <a:bodyPr wrap="square">
-                <a:spAutoFit/>
-              </a:bodyPr>
-              <a:lstStyle/>
-              <a:p>
-                <a:pPr/>
-                <a14:m>
-                  <m:oMathPara xmlns:m="http://schemas.openxmlformats.org/officeDocument/2006/math">
-                    <m:oMathParaPr>
-                      <m:jc m:val="centerGroup"/>
-                    </m:oMathParaPr>
-                    <m:oMath xmlns:m="http://schemas.openxmlformats.org/officeDocument/2006/math">
-                      <m:acc>
-                        <m:accPr>
-                          <m:chr m:val="̅"/>
-                          <m:ctrlPr>
-                            <a:rPr lang="en-US" i="1" dirty="0" smtClean="0">
-                              <a:solidFill>
-                                <a:schemeClr val="tx1"/>
-                              </a:solidFill>
-                              <a:latin typeface="Cambria Math" panose="02040503050406030204" pitchFamily="18" charset="0"/>
-                            </a:rPr>
-                          </m:ctrlPr>
-                        </m:accPr>
-                        <m:e>
-                          <m:r>
-                            <a:rPr lang="en-US" i="1" dirty="0">
-                              <a:solidFill>
-                                <a:schemeClr val="tx1"/>
-                              </a:solidFill>
-                              <a:latin typeface="Cambria Math" panose="02040503050406030204" pitchFamily="18" charset="0"/>
-                            </a:rPr>
-                            <m:t>𝛾</m:t>
-                          </m:r>
-                        </m:e>
-                      </m:acc>
-                      <m:r>
-                        <a:rPr lang="de-DE" b="0" i="1" dirty="0" smtClean="0">
-                          <a:latin typeface="Cambria Math" panose="02040503050406030204" pitchFamily="18" charset="0"/>
-                        </a:rPr>
-                        <m:t>=</m:t>
-                      </m:r>
-                      <m:f>
-                        <m:fPr>
-                          <m:ctrlPr>
-                            <a:rPr lang="de-DE" b="0" i="1" dirty="0" smtClean="0">
-                              <a:latin typeface="Cambria Math" panose="02040503050406030204" pitchFamily="18" charset="0"/>
-                            </a:rPr>
-                          </m:ctrlPr>
-                        </m:fPr>
-                        <m:num>
-                          <m:acc>
-                            <m:accPr>
-                              <m:chr m:val="̈"/>
-                              <m:ctrlPr>
-                                <a:rPr lang="de-DE" b="0" i="1" dirty="0" smtClean="0">
-                                  <a:solidFill>
-                                    <a:schemeClr val="tx1"/>
-                                  </a:solidFill>
-                                  <a:latin typeface="Cambria Math" panose="02040503050406030204" pitchFamily="18" charset="0"/>
-                                </a:rPr>
-                              </m:ctrlPr>
-                            </m:accPr>
-                            <m:e>
-                              <m:r>
-                                <a:rPr lang="de-DE" b="0" i="1" dirty="0" smtClean="0">
-                                  <a:solidFill>
-                                    <a:schemeClr val="tx1"/>
-                                  </a:solidFill>
-                                  <a:latin typeface="Cambria Math" panose="02040503050406030204" pitchFamily="18" charset="0"/>
-                                  <a:ea typeface="Cambria Math" panose="02040503050406030204" pitchFamily="18" charset="0"/>
-                                </a:rPr>
-                                <m:t>𝛽</m:t>
-                              </m:r>
-                            </m:e>
-                          </m:acc>
-                        </m:num>
-                        <m:den>
-                          <m:r>
-                            <a:rPr lang="de-DE" b="0" i="1" dirty="0" smtClean="0">
-                              <a:latin typeface="Cambria Math" panose="02040503050406030204" pitchFamily="18" charset="0"/>
-                            </a:rPr>
-                            <m:t>𝑚</m:t>
-                          </m:r>
-                        </m:den>
-                      </m:f>
-                    </m:oMath>
-                  </m:oMathPara>
-                </a14:m>
-                <a:endParaRPr lang="en-US" dirty="0"/>
-              </a:p>
-            </p:txBody>
-          </p:sp>
-        </mc:Choice>
-        <mc:Fallback xmlns="">
-          <p:sp>
-            <p:nvSpPr>
-              <p:cNvPr id="15" name="TextBox 14">
-                <a:extLst>
-                  <a:ext uri="{FF2B5EF4-FFF2-40B4-BE49-F238E27FC236}">
-                    <a16:creationId xmlns:a16="http://schemas.microsoft.com/office/drawing/2014/main" id="{DB8140D9-A5BB-2CDD-16C8-EE8CE49E9893}"/>
-                  </a:ext>
-                </a:extLst>
-              </p:cNvPr>
-              <p:cNvSpPr txBox="1">
-                <a:spLocks noRot="1" noChangeAspect="1" noMove="1" noResize="1" noEditPoints="1" noAdjustHandles="1" noChangeArrowheads="1" noChangeShapeType="1" noTextEdit="1"/>
-              </p:cNvSpPr>
-              <p:nvPr/>
-            </p:nvSpPr>
-            <p:spPr>
-              <a:xfrm>
-                <a:off x="454159" y="3673423"/>
-                <a:ext cx="1112258" cy="681533"/>
-              </a:xfrm>
-              <a:prstGeom prst="rect">
-                <a:avLst/>
-              </a:prstGeom>
-              <a:blipFill>
-                <a:blip r:embed="rId6"/>
-                <a:stretch>
-                  <a:fillRect/>
-                </a:stretch>
-              </a:blipFill>
-            </p:spPr>
-            <p:txBody>
-              <a:bodyPr/>
-              <a:lstStyle/>
-              <a:p>
-                <a:r>
-                  <a:rPr lang="en-US">
-                    <a:noFill/>
-                  </a:rPr>
-                  <a:t> </a:t>
-                </a:r>
-              </a:p>
-            </p:txBody>
-          </p:sp>
-        </mc:Fallback>
-      </mc:AlternateContent>
-      <mc:AlternateContent xmlns:mc="http://schemas.openxmlformats.org/markup-compatibility/2006" xmlns:a14="http://schemas.microsoft.com/office/drawing/2010/main">
-        <mc:Choice Requires="a14">
-          <p:sp>
-            <p:nvSpPr>
-              <p:cNvPr id="17" name="TextBox 16">
-                <a:extLst>
-                  <a:ext uri="{FF2B5EF4-FFF2-40B4-BE49-F238E27FC236}">
-                    <a16:creationId xmlns:a16="http://schemas.microsoft.com/office/drawing/2014/main" id="{5F87FEDF-92AA-8B90-0A98-D4BECAEB1333}"/>
-                  </a:ext>
-                </a:extLst>
-              </p:cNvPr>
-              <p:cNvSpPr txBox="1"/>
-              <p:nvPr/>
-            </p:nvSpPr>
-            <p:spPr>
-              <a:xfrm>
-                <a:off x="560370" y="4397154"/>
-                <a:ext cx="3870985" cy="385427"/>
-              </a:xfrm>
-              <a:prstGeom prst="rect">
-                <a:avLst/>
-              </a:prstGeom>
-              <a:noFill/>
-            </p:spPr>
-            <p:txBody>
-              <a:bodyPr wrap="square">
-                <a:spAutoFit/>
-              </a:bodyPr>
-              <a:lstStyle/>
-              <a:p>
-                <a14:m>
-                  <m:oMath xmlns:m="http://schemas.openxmlformats.org/officeDocument/2006/math">
-                    <m:acc>
-                      <m:accPr>
-                        <m:chr m:val="̈"/>
-                        <m:ctrlPr>
-                          <a:rPr lang="de-DE" b="0" i="1" dirty="0" smtClean="0">
-                            <a:solidFill>
-                              <a:srgbClr val="C00000"/>
-                            </a:solidFill>
-                            <a:latin typeface="Cambria Math" panose="02040503050406030204" pitchFamily="18" charset="0"/>
-                          </a:rPr>
-                        </m:ctrlPr>
-                      </m:accPr>
-                      <m:e>
-                        <m:r>
-                          <a:rPr lang="de-DE" b="0" i="1" dirty="0" smtClean="0">
-                            <a:solidFill>
-                              <a:srgbClr val="C00000"/>
-                            </a:solidFill>
-                            <a:latin typeface="Cambria Math" panose="02040503050406030204" pitchFamily="18" charset="0"/>
-                            <a:ea typeface="Cambria Math" panose="02040503050406030204" pitchFamily="18" charset="0"/>
-                          </a:rPr>
-                          <m:t>𝛽</m:t>
-                        </m:r>
-                      </m:e>
-                    </m:acc>
-                  </m:oMath>
-                </a14:m>
-                <a:r>
-                  <a:rPr lang="en-US" dirty="0"/>
-                  <a:t>: Damping coefficient of the protein</a:t>
-                </a:r>
-              </a:p>
-            </p:txBody>
-          </p:sp>
-        </mc:Choice>
-        <mc:Fallback xmlns="">
-          <p:sp>
-            <p:nvSpPr>
-              <p:cNvPr id="17" name="TextBox 16">
-                <a:extLst>
-                  <a:ext uri="{FF2B5EF4-FFF2-40B4-BE49-F238E27FC236}">
-                    <a16:creationId xmlns:a16="http://schemas.microsoft.com/office/drawing/2014/main" id="{5F87FEDF-92AA-8B90-0A98-D4BECAEB1333}"/>
-                  </a:ext>
-                </a:extLst>
-              </p:cNvPr>
-              <p:cNvSpPr txBox="1">
-                <a:spLocks noRot="1" noChangeAspect="1" noMove="1" noResize="1" noEditPoints="1" noAdjustHandles="1" noChangeArrowheads="1" noChangeShapeType="1" noTextEdit="1"/>
-              </p:cNvSpPr>
-              <p:nvPr/>
-            </p:nvSpPr>
-            <p:spPr>
-              <a:xfrm>
-                <a:off x="560370" y="4397154"/>
-                <a:ext cx="3870985" cy="385427"/>
-              </a:xfrm>
-              <a:prstGeom prst="rect">
-                <a:avLst/>
-              </a:prstGeom>
-              <a:blipFill>
-                <a:blip r:embed="rId7"/>
-                <a:stretch>
-                  <a:fillRect l="-472" t="-1563" b="-25000"/>
-                </a:stretch>
-              </a:blipFill>
-            </p:spPr>
-            <p:txBody>
-              <a:bodyPr/>
-              <a:lstStyle/>
-              <a:p>
-                <a:r>
-                  <a:rPr lang="en-US">
-                    <a:noFill/>
-                  </a:rPr>
-                  <a:t> </a:t>
-                </a:r>
-              </a:p>
-            </p:txBody>
-          </p:sp>
-        </mc:Fallback>
-      </mc:AlternateContent>
-      <mc:AlternateContent xmlns:mc="http://schemas.openxmlformats.org/markup-compatibility/2006" xmlns:a14="http://schemas.microsoft.com/office/drawing/2010/main">
-        <mc:Choice Requires="a14">
-          <p:sp>
-            <p:nvSpPr>
-              <p:cNvPr id="19" name="TextBox 18">
-                <a:extLst>
-                  <a:ext uri="{FF2B5EF4-FFF2-40B4-BE49-F238E27FC236}">
-                    <a16:creationId xmlns:a16="http://schemas.microsoft.com/office/drawing/2014/main" id="{F94F89C1-9FCA-84B5-953A-9404443B3B8F}"/>
-                  </a:ext>
-                </a:extLst>
-              </p:cNvPr>
-              <p:cNvSpPr txBox="1"/>
-              <p:nvPr/>
-            </p:nvSpPr>
-            <p:spPr>
-              <a:xfrm>
-                <a:off x="558472" y="4947309"/>
-                <a:ext cx="2647384" cy="369332"/>
-              </a:xfrm>
-              <a:prstGeom prst="rect">
-                <a:avLst/>
-              </a:prstGeom>
-              <a:noFill/>
-            </p:spPr>
-            <p:txBody>
-              <a:bodyPr wrap="square">
-                <a:spAutoFit/>
-              </a:bodyPr>
-              <a:lstStyle/>
-              <a:p>
-                <a14:m>
-                  <m:oMath xmlns:m="http://schemas.openxmlformats.org/officeDocument/2006/math">
-                    <m:r>
-                      <a:rPr lang="de-DE" b="0" i="1" smtClean="0">
-                        <a:solidFill>
-                          <a:srgbClr val="C00000"/>
-                        </a:solidFill>
-                        <a:latin typeface="Cambria Math" panose="02040503050406030204" pitchFamily="18" charset="0"/>
-                      </a:rPr>
-                      <m:t>𝑚</m:t>
-                    </m:r>
-                  </m:oMath>
-                </a14:m>
-                <a:r>
-                  <a:rPr lang="en-US" dirty="0">
-                    <a:solidFill>
-                      <a:srgbClr val="C00000"/>
-                    </a:solidFill>
-                  </a:rPr>
-                  <a:t>: </a:t>
-                </a:r>
-                <a:r>
-                  <a:rPr lang="en-US" dirty="0"/>
-                  <a:t>Protein mass</a:t>
-                </a:r>
-              </a:p>
-            </p:txBody>
-          </p:sp>
-        </mc:Choice>
-        <mc:Fallback xmlns="">
-          <p:sp>
-            <p:nvSpPr>
-              <p:cNvPr id="19" name="TextBox 18">
-                <a:extLst>
-                  <a:ext uri="{FF2B5EF4-FFF2-40B4-BE49-F238E27FC236}">
-                    <a16:creationId xmlns:a16="http://schemas.microsoft.com/office/drawing/2014/main" id="{F94F89C1-9FCA-84B5-953A-9404443B3B8F}"/>
-                  </a:ext>
-                </a:extLst>
-              </p:cNvPr>
-              <p:cNvSpPr txBox="1">
-                <a:spLocks noRot="1" noChangeAspect="1" noMove="1" noResize="1" noEditPoints="1" noAdjustHandles="1" noChangeArrowheads="1" noChangeShapeType="1" noTextEdit="1"/>
-              </p:cNvSpPr>
-              <p:nvPr/>
-            </p:nvSpPr>
-            <p:spPr>
-              <a:xfrm>
-                <a:off x="558472" y="4947309"/>
-                <a:ext cx="2647384" cy="369332"/>
-              </a:xfrm>
-              <a:prstGeom prst="rect">
-                <a:avLst/>
-              </a:prstGeom>
-              <a:blipFill>
-                <a:blip r:embed="rId8"/>
-                <a:stretch>
-                  <a:fillRect t="-8333" b="-28333"/>
-                </a:stretch>
-              </a:blipFill>
-            </p:spPr>
-            <p:txBody>
-              <a:bodyPr/>
-              <a:lstStyle/>
-              <a:p>
-                <a:r>
-                  <a:rPr lang="en-US">
-                    <a:noFill/>
-                  </a:rPr>
-                  <a:t> </a:t>
-                </a:r>
-              </a:p>
-            </p:txBody>
-          </p:sp>
-        </mc:Fallback>
-      </mc:AlternateContent>
-      <mc:AlternateContent xmlns:mc="http://schemas.openxmlformats.org/markup-compatibility/2006" xmlns:a14="http://schemas.microsoft.com/office/drawing/2010/main">
-        <mc:Choice Requires="a14">
-          <p:sp>
-            <p:nvSpPr>
-              <p:cNvPr id="20" name="TextBox 19">
-                <a:extLst>
-                  <a:ext uri="{FF2B5EF4-FFF2-40B4-BE49-F238E27FC236}">
-                    <a16:creationId xmlns:a16="http://schemas.microsoft.com/office/drawing/2014/main" id="{431E805A-C64D-599C-F4C7-E2F65E153468}"/>
-                  </a:ext>
-                </a:extLst>
-              </p:cNvPr>
-              <p:cNvSpPr txBox="1"/>
-              <p:nvPr/>
-            </p:nvSpPr>
-            <p:spPr>
-              <a:xfrm>
-                <a:off x="567189" y="5442786"/>
-                <a:ext cx="3216096" cy="369332"/>
-              </a:xfrm>
-              <a:prstGeom prst="rect">
-                <a:avLst/>
-              </a:prstGeom>
-              <a:noFill/>
-            </p:spPr>
-            <p:txBody>
-              <a:bodyPr wrap="square">
-                <a:spAutoFit/>
-              </a:bodyPr>
-              <a:lstStyle/>
-              <a:p>
-                <a14:m>
-                  <m:oMath xmlns:m="http://schemas.openxmlformats.org/officeDocument/2006/math">
-                    <m:r>
-                      <a:rPr lang="de-DE" b="0" i="1" smtClean="0">
-                        <a:solidFill>
-                          <a:srgbClr val="C00000"/>
-                        </a:solidFill>
-                        <a:latin typeface="Cambria Math" panose="02040503050406030204" pitchFamily="18" charset="0"/>
-                      </a:rPr>
-                      <m:t>𝑘</m:t>
-                    </m:r>
-                  </m:oMath>
-                </a14:m>
-                <a:r>
-                  <a:rPr lang="en-US" dirty="0">
-                    <a:solidFill>
-                      <a:srgbClr val="C00000"/>
-                    </a:solidFill>
-                  </a:rPr>
-                  <a:t>:</a:t>
-                </a:r>
-                <a:r>
-                  <a:rPr lang="en-US" dirty="0"/>
-                  <a:t> Protein spring constant</a:t>
-                </a:r>
-              </a:p>
-            </p:txBody>
-          </p:sp>
-        </mc:Choice>
-        <mc:Fallback xmlns="">
-          <p:sp>
-            <p:nvSpPr>
-              <p:cNvPr id="20" name="TextBox 19">
-                <a:extLst>
-                  <a:ext uri="{FF2B5EF4-FFF2-40B4-BE49-F238E27FC236}">
-                    <a16:creationId xmlns:a16="http://schemas.microsoft.com/office/drawing/2014/main" id="{431E805A-C64D-599C-F4C7-E2F65E153468}"/>
-                  </a:ext>
-                </a:extLst>
-              </p:cNvPr>
-              <p:cNvSpPr txBox="1">
-                <a:spLocks noRot="1" noChangeAspect="1" noMove="1" noResize="1" noEditPoints="1" noAdjustHandles="1" noChangeArrowheads="1" noChangeShapeType="1" noTextEdit="1"/>
-              </p:cNvSpPr>
-              <p:nvPr/>
-            </p:nvSpPr>
-            <p:spPr>
-              <a:xfrm>
-                <a:off x="567189" y="5442786"/>
-                <a:ext cx="3216096" cy="369332"/>
-              </a:xfrm>
-              <a:prstGeom prst="rect">
-                <a:avLst/>
-              </a:prstGeom>
-              <a:blipFill>
-                <a:blip r:embed="rId9"/>
-                <a:stretch>
-                  <a:fillRect t="-8333" b="-28333"/>
-                </a:stretch>
-              </a:blipFill>
-            </p:spPr>
-            <p:txBody>
-              <a:bodyPr/>
-              <a:lstStyle/>
-              <a:p>
-                <a:r>
-                  <a:rPr lang="en-US">
-                    <a:noFill/>
-                  </a:rPr>
-                  <a:t> </a:t>
-                </a:r>
-              </a:p>
-            </p:txBody>
-          </p:sp>
-        </mc:Fallback>
-      </mc:AlternateContent>
-      <mc:AlternateContent xmlns:mc="http://schemas.openxmlformats.org/markup-compatibility/2006" xmlns:a14="http://schemas.microsoft.com/office/drawing/2010/main">
-        <mc:Choice Requires="a14">
-          <p:sp>
-            <p:nvSpPr>
-              <p:cNvPr id="22" name="TextBox 21">
-                <a:extLst>
-                  <a:ext uri="{FF2B5EF4-FFF2-40B4-BE49-F238E27FC236}">
-                    <a16:creationId xmlns:a16="http://schemas.microsoft.com/office/drawing/2014/main" id="{5B514ED2-1CD7-E15E-1BB0-9225DFE8855E}"/>
-                  </a:ext>
-                </a:extLst>
-              </p:cNvPr>
-              <p:cNvSpPr txBox="1"/>
-              <p:nvPr/>
-            </p:nvSpPr>
-            <p:spPr>
-              <a:xfrm>
-                <a:off x="481533" y="5812118"/>
-                <a:ext cx="4507958" cy="369332"/>
-              </a:xfrm>
-              <a:prstGeom prst="rect">
-                <a:avLst/>
-              </a:prstGeom>
-              <a:noFill/>
-            </p:spPr>
-            <p:txBody>
-              <a:bodyPr wrap="square">
-                <a:spAutoFit/>
-              </a:bodyPr>
-              <a:lstStyle/>
-              <a:p>
-                <a14:m>
-                  <m:oMath xmlns:m="http://schemas.openxmlformats.org/officeDocument/2006/math">
-                    <m:sSub>
-                      <m:sSubPr>
-                        <m:ctrlPr>
-                          <a:rPr lang="en-US" i="1" smtClean="0">
-                            <a:latin typeface="Cambria Math" panose="02040503050406030204" pitchFamily="18" charset="0"/>
-                          </a:rPr>
-                        </m:ctrlPr>
-                      </m:sSubPr>
-                      <m:e>
-                        <m:r>
-                          <a:rPr lang="en-US" i="1" smtClean="0">
-                            <a:latin typeface="Cambria Math" panose="02040503050406030204" pitchFamily="18" charset="0"/>
-                            <a:ea typeface="Cambria Math" panose="02040503050406030204" pitchFamily="18" charset="0"/>
-                          </a:rPr>
-                          <m:t>𝜔</m:t>
-                        </m:r>
-                      </m:e>
-                      <m:sub>
-                        <m:r>
-                          <a:rPr lang="de-DE" b="0" i="1" smtClean="0">
-                            <a:latin typeface="Cambria Math" panose="02040503050406030204" pitchFamily="18" charset="0"/>
-                          </a:rPr>
-                          <m:t>𝑎</m:t>
-                        </m:r>
-                      </m:sub>
-                    </m:sSub>
-                  </m:oMath>
-                </a14:m>
-                <a:r>
-                  <a:rPr lang="en-US" dirty="0"/>
-                  <a:t>: Antenna radiation angular frequency </a:t>
-                </a:r>
-              </a:p>
-            </p:txBody>
-          </p:sp>
-        </mc:Choice>
-        <mc:Fallback xmlns="">
-          <p:sp>
-            <p:nvSpPr>
-              <p:cNvPr id="22" name="TextBox 21">
-                <a:extLst>
-                  <a:ext uri="{FF2B5EF4-FFF2-40B4-BE49-F238E27FC236}">
-                    <a16:creationId xmlns:a16="http://schemas.microsoft.com/office/drawing/2014/main" id="{5B514ED2-1CD7-E15E-1BB0-9225DFE8855E}"/>
-                  </a:ext>
-                </a:extLst>
-              </p:cNvPr>
-              <p:cNvSpPr txBox="1">
-                <a:spLocks noRot="1" noChangeAspect="1" noMove="1" noResize="1" noEditPoints="1" noAdjustHandles="1" noChangeArrowheads="1" noChangeShapeType="1" noTextEdit="1"/>
-              </p:cNvSpPr>
-              <p:nvPr/>
-            </p:nvSpPr>
-            <p:spPr>
-              <a:xfrm>
-                <a:off x="481533" y="5812118"/>
-                <a:ext cx="4507958" cy="369332"/>
-              </a:xfrm>
-              <a:prstGeom prst="rect">
-                <a:avLst/>
-              </a:prstGeom>
-              <a:blipFill>
-                <a:blip r:embed="rId10"/>
-                <a:stretch>
-                  <a:fillRect t="-6557" b="-26230"/>
-                </a:stretch>
-              </a:blipFill>
-            </p:spPr>
-            <p:txBody>
-              <a:bodyPr/>
-              <a:lstStyle/>
-              <a:p>
-                <a:r>
-                  <a:rPr lang="en-US">
-                    <a:noFill/>
-                  </a:rPr>
-                  <a:t> </a:t>
-                </a:r>
-              </a:p>
-            </p:txBody>
-          </p:sp>
-        </mc:Fallback>
-      </mc:AlternateContent>
-      <p:sp>
-        <p:nvSpPr>
-          <p:cNvPr id="23" name="TextBox 22">
-            <a:extLst>
-              <a:ext uri="{FF2B5EF4-FFF2-40B4-BE49-F238E27FC236}">
-                <a16:creationId xmlns:a16="http://schemas.microsoft.com/office/drawing/2014/main" id="{BF064904-313D-4876-FF49-2B7188FBDA4F}"/>
-              </a:ext>
-            </a:extLst>
-          </p:cNvPr>
-          <p:cNvSpPr txBox="1"/>
-          <p:nvPr/>
-        </p:nvSpPr>
-        <p:spPr>
-          <a:xfrm>
-            <a:off x="3065421" y="850337"/>
-            <a:ext cx="415498" cy="338554"/>
-          </a:xfrm>
-          <a:prstGeom prst="rect">
-            <a:avLst/>
-          </a:prstGeom>
-          <a:noFill/>
-        </p:spPr>
-        <p:txBody>
-          <a:bodyPr wrap="none" rtlCol="0">
-            <a:spAutoFit/>
-          </a:bodyPr>
-          <a:lstStyle/>
-          <a:p>
-            <a:r>
-              <a:rPr lang="en-US" sz="1600" dirty="0"/>
-              <a:t>(1)</a:t>
-            </a:r>
-          </a:p>
-        </p:txBody>
-      </p:sp>
-      <p:sp>
-        <p:nvSpPr>
-          <p:cNvPr id="24" name="TextBox 23">
-            <a:extLst>
-              <a:ext uri="{FF2B5EF4-FFF2-40B4-BE49-F238E27FC236}">
-                <a16:creationId xmlns:a16="http://schemas.microsoft.com/office/drawing/2014/main" id="{CA76E999-D418-5C4C-0604-7C20145C94A1}"/>
-              </a:ext>
-            </a:extLst>
-          </p:cNvPr>
-          <p:cNvSpPr txBox="1"/>
-          <p:nvPr/>
-        </p:nvSpPr>
-        <p:spPr>
-          <a:xfrm>
-            <a:off x="5775490" y="2442196"/>
-            <a:ext cx="415498" cy="338554"/>
-          </a:xfrm>
-          <a:prstGeom prst="rect">
-            <a:avLst/>
-          </a:prstGeom>
-          <a:noFill/>
-        </p:spPr>
-        <p:txBody>
-          <a:bodyPr wrap="none" rtlCol="0">
-            <a:spAutoFit/>
-          </a:bodyPr>
-          <a:lstStyle/>
-          <a:p>
-            <a:r>
-              <a:rPr lang="en-US" sz="1600" dirty="0"/>
-              <a:t>(3)</a:t>
-            </a:r>
-          </a:p>
-        </p:txBody>
-      </p:sp>
-      <p:sp>
-        <p:nvSpPr>
-          <p:cNvPr id="25" name="TextBox 24">
-            <a:extLst>
-              <a:ext uri="{FF2B5EF4-FFF2-40B4-BE49-F238E27FC236}">
-                <a16:creationId xmlns:a16="http://schemas.microsoft.com/office/drawing/2014/main" id="{9986BB83-1865-C31D-4307-87CA6E106E24}"/>
-              </a:ext>
-            </a:extLst>
-          </p:cNvPr>
-          <p:cNvSpPr txBox="1"/>
-          <p:nvPr/>
-        </p:nvSpPr>
-        <p:spPr>
-          <a:xfrm>
-            <a:off x="5582168" y="3221647"/>
-            <a:ext cx="415498" cy="338554"/>
-          </a:xfrm>
-          <a:prstGeom prst="rect">
-            <a:avLst/>
-          </a:prstGeom>
-          <a:noFill/>
-        </p:spPr>
-        <p:txBody>
-          <a:bodyPr wrap="none" rtlCol="0">
-            <a:spAutoFit/>
-          </a:bodyPr>
-          <a:lstStyle/>
-          <a:p>
-            <a:r>
-              <a:rPr lang="en-US" sz="1600" dirty="0"/>
-              <a:t>(4)</a:t>
-            </a:r>
-          </a:p>
-        </p:txBody>
-      </p:sp>
-      <p:sp>
-        <p:nvSpPr>
-          <p:cNvPr id="26" name="TextBox 25">
-            <a:extLst>
-              <a:ext uri="{FF2B5EF4-FFF2-40B4-BE49-F238E27FC236}">
-                <a16:creationId xmlns:a16="http://schemas.microsoft.com/office/drawing/2014/main" id="{64763AD4-BAAE-9453-6AFB-A1A7F9DBD2EA}"/>
-              </a:ext>
-            </a:extLst>
-          </p:cNvPr>
-          <p:cNvSpPr txBox="1"/>
-          <p:nvPr/>
-        </p:nvSpPr>
-        <p:spPr>
-          <a:xfrm>
-            <a:off x="3396641" y="1692652"/>
-            <a:ext cx="415498" cy="338554"/>
-          </a:xfrm>
-          <a:prstGeom prst="rect">
-            <a:avLst/>
-          </a:prstGeom>
-          <a:noFill/>
-        </p:spPr>
-        <p:txBody>
-          <a:bodyPr wrap="none" rtlCol="0">
-            <a:spAutoFit/>
-          </a:bodyPr>
-          <a:lstStyle/>
-          <a:p>
-            <a:r>
-              <a:rPr lang="en-US" sz="1600" dirty="0"/>
-              <a:t>(2)</a:t>
-            </a:r>
-          </a:p>
-        </p:txBody>
-      </p:sp>
-      <p:sp>
-        <p:nvSpPr>
-          <p:cNvPr id="27" name="TextBox 26">
-            <a:extLst>
-              <a:ext uri="{FF2B5EF4-FFF2-40B4-BE49-F238E27FC236}">
-                <a16:creationId xmlns:a16="http://schemas.microsoft.com/office/drawing/2014/main" id="{11B4445D-060C-5310-A139-74A343F8E18E}"/>
-              </a:ext>
-            </a:extLst>
-          </p:cNvPr>
-          <p:cNvSpPr txBox="1"/>
-          <p:nvPr/>
-        </p:nvSpPr>
-        <p:spPr>
-          <a:xfrm>
-            <a:off x="1566417" y="3872308"/>
-            <a:ext cx="415498" cy="338554"/>
-          </a:xfrm>
-          <a:prstGeom prst="rect">
-            <a:avLst/>
-          </a:prstGeom>
-          <a:noFill/>
-        </p:spPr>
-        <p:txBody>
-          <a:bodyPr wrap="none" rtlCol="0">
-            <a:spAutoFit/>
-          </a:bodyPr>
-          <a:lstStyle/>
-          <a:p>
-            <a:r>
-              <a:rPr lang="en-US" sz="1600" dirty="0"/>
-              <a:t>(5)</a:t>
-            </a:r>
-          </a:p>
-        </p:txBody>
-      </p:sp>
-      <p:sp>
-        <p:nvSpPr>
-          <p:cNvPr id="28" name="TextBox 27">
-            <a:extLst>
-              <a:ext uri="{FF2B5EF4-FFF2-40B4-BE49-F238E27FC236}">
-                <a16:creationId xmlns:a16="http://schemas.microsoft.com/office/drawing/2014/main" id="{FC0A81EA-525C-CDAC-4316-AB6600D4982E}"/>
-              </a:ext>
-            </a:extLst>
-          </p:cNvPr>
-          <p:cNvSpPr txBox="1"/>
-          <p:nvPr/>
-        </p:nvSpPr>
-        <p:spPr>
-          <a:xfrm>
-            <a:off x="2320014" y="4939504"/>
-            <a:ext cx="415498" cy="338554"/>
-          </a:xfrm>
-          <a:prstGeom prst="rect">
-            <a:avLst/>
-          </a:prstGeom>
-          <a:noFill/>
-        </p:spPr>
-        <p:txBody>
-          <a:bodyPr wrap="none" rtlCol="0">
-            <a:spAutoFit/>
-          </a:bodyPr>
-          <a:lstStyle/>
-          <a:p>
-            <a:r>
-              <a:rPr lang="en-US" sz="1600" dirty="0"/>
-              <a:t>(7)</a:t>
-            </a:r>
-          </a:p>
-        </p:txBody>
-      </p:sp>
-      <p:sp>
-        <p:nvSpPr>
-          <p:cNvPr id="29" name="TextBox 28">
-            <a:extLst>
-              <a:ext uri="{FF2B5EF4-FFF2-40B4-BE49-F238E27FC236}">
-                <a16:creationId xmlns:a16="http://schemas.microsoft.com/office/drawing/2014/main" id="{B3F51B2F-2D3C-0908-2732-66CC3C47C5CA}"/>
-              </a:ext>
-            </a:extLst>
-          </p:cNvPr>
-          <p:cNvSpPr txBox="1"/>
-          <p:nvPr/>
-        </p:nvSpPr>
-        <p:spPr>
-          <a:xfrm>
-            <a:off x="3273170" y="5442786"/>
-            <a:ext cx="415498" cy="338554"/>
-          </a:xfrm>
-          <a:prstGeom prst="rect">
-            <a:avLst/>
-          </a:prstGeom>
-          <a:noFill/>
-        </p:spPr>
-        <p:txBody>
-          <a:bodyPr wrap="none" rtlCol="0">
-            <a:spAutoFit/>
-          </a:bodyPr>
-          <a:lstStyle/>
-          <a:p>
-            <a:r>
-              <a:rPr lang="en-US" sz="1600" dirty="0"/>
-              <a:t>(8)</a:t>
-            </a:r>
-          </a:p>
-        </p:txBody>
-      </p:sp>
-      <p:sp>
-        <p:nvSpPr>
-          <p:cNvPr id="30" name="TextBox 29">
-            <a:extLst>
-              <a:ext uri="{FF2B5EF4-FFF2-40B4-BE49-F238E27FC236}">
-                <a16:creationId xmlns:a16="http://schemas.microsoft.com/office/drawing/2014/main" id="{F27FA41C-D511-593F-6DFA-391B4101C9E5}"/>
-              </a:ext>
-            </a:extLst>
-          </p:cNvPr>
-          <p:cNvSpPr txBox="1"/>
-          <p:nvPr/>
-        </p:nvSpPr>
-        <p:spPr>
-          <a:xfrm>
-            <a:off x="4431355" y="4420590"/>
-            <a:ext cx="415498" cy="338554"/>
-          </a:xfrm>
-          <a:prstGeom prst="rect">
-            <a:avLst/>
-          </a:prstGeom>
-          <a:noFill/>
-        </p:spPr>
-        <p:txBody>
-          <a:bodyPr wrap="none" rtlCol="0">
-            <a:spAutoFit/>
-          </a:bodyPr>
-          <a:lstStyle/>
-          <a:p>
-            <a:r>
-              <a:rPr lang="en-US" sz="1600" dirty="0"/>
-              <a:t>(6)</a:t>
-            </a:r>
-          </a:p>
-        </p:txBody>
-      </p:sp>
-      <p:sp>
-        <p:nvSpPr>
-          <p:cNvPr id="31" name="TextBox 30">
-            <a:extLst>
-              <a:ext uri="{FF2B5EF4-FFF2-40B4-BE49-F238E27FC236}">
-                <a16:creationId xmlns:a16="http://schemas.microsoft.com/office/drawing/2014/main" id="{9FEBE6D2-9003-73BC-31AF-F94FF69D9C7F}"/>
-              </a:ext>
-            </a:extLst>
-          </p:cNvPr>
-          <p:cNvSpPr txBox="1"/>
-          <p:nvPr/>
-        </p:nvSpPr>
-        <p:spPr>
-          <a:xfrm>
-            <a:off x="4659649" y="5827507"/>
-            <a:ext cx="415498" cy="338554"/>
-          </a:xfrm>
-          <a:prstGeom prst="rect">
-            <a:avLst/>
-          </a:prstGeom>
-          <a:noFill/>
-        </p:spPr>
-        <p:txBody>
-          <a:bodyPr wrap="none" rtlCol="0">
-            <a:spAutoFit/>
-          </a:bodyPr>
-          <a:lstStyle/>
-          <a:p>
-            <a:r>
-              <a:rPr lang="en-US" sz="1600" dirty="0"/>
-              <a:t>(9)</a:t>
-            </a:r>
-          </a:p>
-        </p:txBody>
-      </p:sp>
-      <p:pic>
-        <p:nvPicPr>
-          <p:cNvPr id="58" name="Picture 57">
-            <a:extLst>
-              <a:ext uri="{FF2B5EF4-FFF2-40B4-BE49-F238E27FC236}">
-                <a16:creationId xmlns:a16="http://schemas.microsoft.com/office/drawing/2014/main" id="{9666714F-C084-6C34-A7FD-C1982C53D86A}"/>
-              </a:ext>
-            </a:extLst>
-          </p:cNvPr>
-          <p:cNvPicPr>
-            <a:picLocks noChangeAspect="1"/>
-          </p:cNvPicPr>
-          <p:nvPr/>
-        </p:nvPicPr>
-        <p:blipFill>
-          <a:blip r:embed="rId11"/>
-          <a:stretch>
-            <a:fillRect/>
-          </a:stretch>
-        </p:blipFill>
-        <p:spPr>
-          <a:xfrm>
-            <a:off x="6969333" y="1990193"/>
-            <a:ext cx="2990850" cy="1533525"/>
-          </a:xfrm>
-          <a:prstGeom prst="rect">
-            <a:avLst/>
-          </a:prstGeom>
-          <a:ln>
-            <a:solidFill>
-              <a:schemeClr val="accent1"/>
-            </a:solidFill>
-          </a:ln>
-        </p:spPr>
-      </p:pic>
-      <p:sp>
-        <p:nvSpPr>
-          <p:cNvPr id="59" name="TextBox 58">
-            <a:extLst>
-              <a:ext uri="{FF2B5EF4-FFF2-40B4-BE49-F238E27FC236}">
-                <a16:creationId xmlns:a16="http://schemas.microsoft.com/office/drawing/2014/main" id="{176F00EA-2BF8-AC26-052B-E1712B05FCB0}"/>
-              </a:ext>
-            </a:extLst>
-          </p:cNvPr>
-          <p:cNvSpPr txBox="1"/>
-          <p:nvPr/>
-        </p:nvSpPr>
-        <p:spPr>
-          <a:xfrm>
-            <a:off x="7633300" y="1995780"/>
-            <a:ext cx="848412" cy="369332"/>
-          </a:xfrm>
-          <a:prstGeom prst="rect">
-            <a:avLst/>
-          </a:prstGeom>
-          <a:noFill/>
-        </p:spPr>
-        <p:txBody>
-          <a:bodyPr wrap="square">
-            <a:spAutoFit/>
-          </a:bodyPr>
-          <a:lstStyle/>
-          <a:p>
-            <a:r>
-              <a:rPr lang="en-US" dirty="0">
-                <a:hlinkClick r:id="rId12"/>
-              </a:rPr>
-              <a:t>THI2</a:t>
-            </a:r>
-            <a:endParaRPr lang="en-US" dirty="0"/>
-          </a:p>
-        </p:txBody>
-      </p:sp>
-      <p:pic>
-        <p:nvPicPr>
-          <p:cNvPr id="61" name="Picture 60">
-            <a:extLst>
-              <a:ext uri="{FF2B5EF4-FFF2-40B4-BE49-F238E27FC236}">
-                <a16:creationId xmlns:a16="http://schemas.microsoft.com/office/drawing/2014/main" id="{D539B949-CA00-A240-362B-6BF455610EB2}"/>
-              </a:ext>
-            </a:extLst>
-          </p:cNvPr>
-          <p:cNvPicPr>
-            <a:picLocks noChangeAspect="1"/>
-          </p:cNvPicPr>
-          <p:nvPr/>
-        </p:nvPicPr>
-        <p:blipFill>
-          <a:blip r:embed="rId13"/>
-          <a:stretch>
-            <a:fillRect/>
-          </a:stretch>
-        </p:blipFill>
-        <p:spPr>
-          <a:xfrm>
-            <a:off x="6929258" y="3608385"/>
-            <a:ext cx="4363059" cy="2429214"/>
-          </a:xfrm>
-          <a:prstGeom prst="rect">
-            <a:avLst/>
-          </a:prstGeom>
-        </p:spPr>
-      </p:pic>
-      <p:pic>
-        <p:nvPicPr>
-          <p:cNvPr id="3" name="Picture 2">
-            <a:extLst>
-              <a:ext uri="{FF2B5EF4-FFF2-40B4-BE49-F238E27FC236}">
-                <a16:creationId xmlns:a16="http://schemas.microsoft.com/office/drawing/2014/main" id="{A2EC85DC-E98E-7170-6816-F88FF6ED3046}"/>
-              </a:ext>
-            </a:extLst>
-          </p:cNvPr>
-          <p:cNvPicPr>
-            <a:picLocks noChangeAspect="1"/>
-          </p:cNvPicPr>
-          <p:nvPr/>
-        </p:nvPicPr>
-        <p:blipFill>
-          <a:blip r:embed="rId14"/>
-          <a:stretch>
-            <a:fillRect/>
-          </a:stretch>
-        </p:blipFill>
-        <p:spPr>
-          <a:xfrm>
-            <a:off x="9051846" y="78424"/>
-            <a:ext cx="3140154" cy="1592143"/>
-          </a:xfrm>
-          <a:prstGeom prst="rect">
-            <a:avLst/>
-          </a:prstGeom>
-        </p:spPr>
-      </p:pic>
-    </p:spTree>
-    <p:extLst>
-      <p:ext uri="{BB962C8B-B14F-4D97-AF65-F5344CB8AC3E}">
-        <p14:creationId xmlns:p14="http://schemas.microsoft.com/office/powerpoint/2010/main" val="1661616277"/>
-      </p:ext>
-    </p:extLst>
-  </p:cSld>
-  <p:clrMapOvr>
-    <a:masterClrMapping/>
-  </p:clrMapOvr>
-</p:sld>
-</file>
-
 <file path=ppt/theme/theme1.xml><?xml version="1.0" encoding="utf-8"?>
 <a:theme xmlns:a="http://schemas.openxmlformats.org/drawingml/2006/main" name="Office Theme">
   <a:themeElements>
